--- a/library/seminars/sem-07/rendered/sem-07.pptx
+++ b/library/seminars/sem-07/rendered/sem-07.pptx
@@ -535,7 +535,7 @@
           <a:lstStyle/>
           <a:p>
             <a:r>
-              <a:t>Сегодня начинается новая дуга — шесть занятий подряд про то, как инженер строит процесс вокруг вызова модели, а не просто получает от неё один ответ. На С4–С6 вы собирали одного агента: права, память, инструменты, проверяемость каждого шага. Эта дуга смотрит на уровень выше — на то, как выглядит процесс, который таким агентом, или просто одним вызовом модели, пользуется.</a:t>
+              <a:t>Сегодня начинается новая дуга — шесть занятий подряд про то, как инженер строит процесс вокруг вызова модели, вместо того чтобы просто получать от неё один ответ. На С4–С6 вы собирали одного агента: права, память, инструменты, проверяемость каждого шага. Эта дуга смотрит на уровень выше — на то, как выглядит процесс, который таким агентом, или просто одним вызовом модели, пользуется.</a:t>
             </a:r>
           </a:p>
           <a:p/>
@@ -623,13 +623,13 @@
           <a:p/>
           <a:p>
             <a:r>
-              <a:t>Ошибка первого звена цепочки не исчезает на втором и не становится заметнее — она молча протекает внутрь второго звена в том же формате, что и правильный результат, и внешне неотличима от него: оба черновика выглядят одинаково профессионально написанными. Без проверки метки до второго вызова и без настоящего, а не формального человеческого гейта в конце — этот ответ уходит клиенту ровно таким, каким его написала модель на основе неверной метки.</a:t>
+              <a:t>Ошибка первого звена цепочки не исчезает на втором и не становится заметнее — она молча протекает внутрь второго звена в том же формате, что и правильный результат, и внешне неотличима от него: оба черновика выглядят одинаково профессионально написанными. Без проверки метки до второго вызова и без человеческого гейта, который работает по-настоящему, не формально, — этот ответ уходит клиенту ровно таким, каким его написала модель на основе неверной метки.</a:t>
             </a:r>
           </a:p>
           <a:p/>
           <a:p>
             <a:r>
-              <a:t>Цена здесь — не катастрофа, а что-то более обычное и более опасное именно этим: недовольный клиент, упущенный возврат, повторное письмо «почему мне не ответили по существу» — ошибка, которая выглядит как единичный сбой, а на самом деле системное следствие пропущенной на этапе разработки проверки.</a:t>
+              <a:t>Цена здесь — не катастрофа. Что-то более обычное и более опасное именно этим: недовольный клиент, упущенный возврат, повторное письмо «почему мне не ответили по существу» — ошибка, которая выглядит как единичный сбой, а на самом деле системное следствие пропущенной на этапе разработки проверки.</a:t>
             </a:r>
           </a:p>
           <a:p/>
@@ -705,25 +705,25 @@
           <a:lstStyle/>
           <a:p>
             <a:r>
-              <a:t>Таблица этого экрана — не абстрактное правило, а прямой вывод из того, что показали оба предыдущих экрана: правильно собранная цепочка с проверкой между шагами и та же цепочка без неё.</a:t>
+              <a:t>Таблица этого экрана — не абстрактное правило. Прямой вывод из того, что показали оба предыдущих экрана: правильно собранная цепочка с проверкой между шагами и та же цепочка без неё.</a:t>
             </a:r>
           </a:p>
           <a:p/>
           <a:p>
             <a:r>
-              <a:t>Цепочка подходит, когда задача раскладывается на фиксированную, известную заранее последовательность шагов — именно так устроена обработка письма: классифицировать, написать черновик, показать человеку, всегда в этом порядке. Подходит она и тогда, когда входы, пусть и разные по содержанию, относятся к одному и тому же классу обработки — все письма из сцены, от простого вопроса про пароль до жалобы на доставку, одинаково проходят через одни и те же три шага, различается только содержание, а не форма обработки. И подходит она там, где между шагами можно поставить детерминированную проверку и, в конце, человеческий гейт, — именно это и отделило рабочую цепочку от провалившейся.</a:t>
+              <a:t>Цепочка подходит, когда задача раскладывается на фиксированную, известную заранее последовательность шагов — именно так устроена обработка письма: классифицировать, написать черновик, показать человеку, всегда в этом порядке. Подходит она и тогда, когда входы, пусть и разные по содержанию, относятся к одному и тому же классу обработки — все письма из сцены, от простого вопроса про пароль до жалобы на доставку, одинаково проходят через одни и те же три шага, различается только содержание, не форма обработки. И подходит она там, где между шагами можно поставить детерминированную проверку и, в конце, человеческий гейт, — именно это и отделило рабочую цепочку от провалившейся.</a:t>
             </a:r>
           </a:p>
           <a:p/>
           <a:p>
             <a:r>
-              <a:t>Цепочки недостаточно, когда шаги или их число зависят от того, что пришло на входе, и не укладываются в один заранее написанный список; когда входы разнородны настолько, что для разных групп нужны принципиально разные шаги, разные промпты или разные инструменты; и когда решение о том, какой путь выбрать, само требует суждения модели, а не формальной проверки заранее известного списка значений.</a:t>
+              <a:t>Цепочки недостаточно, когда шаги или их число зависят от того, что пришло на входе, и не укладываются в один заранее написанный список; когда входы разнородны настолько, что для разных групп нужны принципиально разные шаги, разные промпты или разные инструменты; и когда решение о том, какой путь выбрать, само требует суждения модели — не формальной проверки заранее известного списка значений.</a:t>
             </a:r>
           </a:p>
           <a:p/>
           <a:p>
             <a:r>
-              <a:t>Третья и четвёртая строки открывают прямой вопрос на будущее. Что, если письма, приходящие в один и тот же почтовый ящик, на самом деле относятся не к одной группе обработки, а к принципиально разным — скажем, вопросы по оплате требуют одного набора действий и один тон, технические жалобы — другого, а запросы от потенциальных оптовых партнёров — вообще другого отдела и других документов? Единственный шаг classify на входе цепочки в этом случае начинает разрастаться в десятки if-веток внутри самого себя, и это — наблюдаемый сигнал, а не теоретическое рассуждение: там, где один и тот же фиксированный порядок шагов перестаёт одинаково хорошо подходить всем входам, прямая цепочка кончается и начинается маршрутизация.</a:t>
+              <a:t>Третья и четвёртая строки открывают прямой вопрос на будущее. Что, если письма, приходящие в один и тот же почтовый ящик, на самом деле относятся к принципиально разным группам обработки, не к одной, — скажем, вопросы по оплате требуют одного набора действий и один тон, технические жалобы — другого, а запросы от потенциальных оптовых партнёров — вообще другого отдела и других документов? Единственный шаг classify на входе цепочки в этом случае начинает разрастаться в десятки if-веток внутри самого себя, и это — наблюдаемый сигнал, не теоретическое рассуждение: там, где один и тот же фиксированный порядок шагов перестаёт одинаково хорошо подходить всем входам, прямая цепочка кончается и начинается маршрутизация.</a:t>
             </a:r>
           </a:p>
         </p:txBody>
@@ -793,19 +793,19 @@
           <a:lstStyle/>
           <a:p>
             <a:r>
-              <a:t>Фраза этого экрана — «цена дома — это одно число, мы поверили, что знаем его точно» — не цитата конкретного человека, а формулировка наблюдаемой проблемы, которую дальше кейс раскрывает документированным, публичным случаем, а не учебной сценой. В отличие от кейса A этой же ступени, всё, что здесь приводится дальше, — проверяемые факты с указанными источниками.</a:t>
+              <a:t>Фраза этого экрана — «цена дома — это одно число, мы поверили, что знаем его точно» — формулировка наблюдаемой проблемы, не цитата конкретного человека; дальше кейс раскрывает её документированным, публичным случаем, не учебной сценой. В отличие от кейса A этой же ступени, всё, что здесь приводится дальше, — проверяемые факты с указанными источниками.</a:t>
             </a:r>
           </a:p>
           <a:p/>
           <a:p>
             <a:r>
-              <a:t>Этот кейс — не новая, отдельная тема, а прямое продолжение того, что уже показал кейс A: та же самая форма ошибки — промежуточный результат цепочки проходит дальше без проверки — здесь случилась на несопоставимо большей цене. В кейсе A непроверенная метка классификации доходила до черновика письма, который можно переписать. Здесь непроверенная автоматическая оценка доходит до действия, которое одним кликом не отменить.</a:t>
+              <a:t>Этот кейс — прямое продолжение того, что уже показал кейс A, не новая отдельная тема: та же самая форма ошибки — промежуточный результат цепочки проходит дальше без проверки — здесь случилась на несопоставимо большей цене. В кейсе A непроверенная метка классификации доходила до черновика письма, который можно переписать. Здесь непроверенная автоматическая оценка доходит до действия, которое одним кликом не отменить.</a:t>
             </a:r>
           </a:p>
           <a:p/>
           <a:p>
             <a:r>
-              <a:t>Разница между учебной механикой и документированным случаем здесь не случайна. Кейс A несёт приём через всю ступень, не претендуя на реальный инцидент конкретной компании — называть его чьим-то провалом было бы прямой выдумкой. Кейс B и кейс C дальше в этой же ступени — наоборот, реальные, задокументированные события с цифрами и прямыми источниками, и расхождение между учебной сценой и документированным случаем называется прямо, а не прячется за одинаковой формой подачи.</a:t>
+              <a:t>Разница между учебной механикой и документированным случаем здесь не случайна. Кейс A несёт приём через всю ступень, не претендуя на реальный инцидент конкретной компании — называть его чьим-то провалом было бы прямой выдумкой. Кейс B и кейс C дальше в этой же ступени — наоборот, реальные, задокументированные события с цифрами и прямыми источниками, и расхождение между учебной сценой и документированным случаем называется прямо — не прячется за одинаковой формой подачи.</a:t>
             </a:r>
           </a:p>
           <a:p/>
@@ -893,7 +893,7 @@
           <a:p/>
           <a:p>
             <a:r>
-              <a:t>Первым шагом в этой цепочке стояла автоматическая оценка — Zestimate, модель, частично построенная на машинном обучении и давно известная пользователям Zillow как оценочная цифра рядом с каждым объявлением на сайте. Для обычного пользователя сайта Zestimate — ориентир, а не точная цифра: сама компания годами подчёркивала, что это не оценка эксперта, а «компьютерный расчёт стоимости дома сегодня, на основе доступных данных». Но внутри Zillow Offers эта же цифра стала первым шагом цепочки, которая заканчивалась не ориентиром, а обязывающим денежным предложением о покупке конкретного дома по конкретной цене — реальным обязательством компании потратить реальный капитал.</a:t>
+              <a:t>Первым шагом в этой цепочке стояла автоматическая оценка — Zestimate, модель, частично построенная на машинном обучении и давно известная пользователям Zillow как оценочная цифра рядом с каждым объявлением на сайте. Для обычного пользователя сайта Zestimate — ориентир, не точная цифра: сама компания годами подчёркивала, что это «компьютерный расчёт стоимости дома сегодня, на основе доступных данных», не оценка эксперта. Но внутри Zillow Offers эта же цифра стала первым шагом цепочки, которая заканчивалась обязывающим денежным предложением о покупке конкретного дома по конкретной цене, не ориентиром, — реальным обязательством компании потратить реальный капитал.</a:t>
             </a:r>
           </a:p>
           <a:p/>
@@ -905,7 +905,7 @@
           <a:p/>
           <a:p>
             <a:r>
-              <a:t>Разница — не в механизме ошибки, а в том, что в кейсе A следующий шаг — черновик письма, который можно переписать после того, как ошибку заметили, а здесь следующий шаг — покупка конкретного дома, которую одним действием не отменить. Чем это кончилось — следующий экран.</a:t>
+              <a:t>Разница не в механизме ошибки. В том, что в кейсе A следующий шаг — черновик письма, который можно переписать после того, как ошибку заметили; здесь следующий шаг — покупка конкретного дома, которую одним действием не отменить. Чем это кончилось — следующий экран.</a:t>
             </a:r>
           </a:p>
         </p:txBody>
@@ -987,7 +987,7 @@
           <a:p/>
           <a:p>
             <a:r>
-              <a:t>По итогам всего 2021 года списание составило $407,9 млн — более полная цифра, чем квартальная. Это тот же случай и то же число, которым Лекция 5 уже разбирала этот провал — там через рамку мониторинга жизненного цикла модели, здесь тот же инцидент читается другой линзой: не «где пропущен мониторинг», а «где в цепочке шагов пропущен гейт перед необратимым действием».</a:t>
+              <a:t>По итогам всего 2021 года списание составило $407,9 млн — более полная цифра, чем квартальная. Это тот же случай и то же число, которым Лекция 5 уже разбирала этот провал — там через рамку мониторинга жизненного цикла модели, здесь тот же инцидент читается другой линзой: вопрос был «где пропущен мониторинг» — стал «где в цепочке шагов пропущен гейт перед необратимым действием».</a:t>
             </a:r>
           </a:p>
         </p:txBody>
@@ -1057,13 +1057,13 @@
           <a:lstStyle/>
           <a:p>
             <a:r>
-              <a:t>Урок кейса A был в том, что ошибка первого звена цепочки без проверки молча доходит до результата, с которым соприкасается внешний человек. Этот кейс показывает тот же самый механизм там, где результат — не письмо, а решение потратить реальные деньги на актив, который потом не отменить одним действием.</a:t>
+              <a:t>Урок кейса A был в том, что ошибка первого звена цепочки без проверки молча доходит до результата, с которым соприкасается внешний человек. Этот кейс показывает тот же самый механизм там, где результат — не письмо. Решение потратить реальные деньги на актив, который потом не отменить одним действием.</a:t>
             </a:r>
           </a:p>
           <a:p/>
           <a:p>
             <a:r>
-              <a:t>Это задаёт прямой, не абстрактный критерий: где в цепочке нужен гейт — вопрос не вкуса и не перфекционизма, а цены и обратимости того шага, который наступит следом. Чем дороже и чем менее обратимо действие, которое цепочка готова совершить сразу после текущего шага, тем меньше смысла экономить именно на проверке перед этим шагом. Письмо, ушедшее клиенту с неверным ответом, можно исправить следующим письмом в тот же день. Купленный дом, оценённый неверно, требует либо многомесячной перепродажи с убытком, либо того самого списания в сотни миллионов долларов.</a:t>
+              <a:t>Это задаёт прямой, не абстрактный критерий: где в цепочке нужен гейт — вопрос цены и обратимости того шага, который наступит следом, не вкуса и не перфекционизма. Чем дороже и чем менее обратимо действие, которое цепочка готова совершить сразу после текущего шага, тем меньше смысла экономить именно на проверке перед этим шагом. Письмо, ушедшее клиенту с неверным ответом, можно исправить следующим письмом в тот же день. Купленный дом, оценённый неверно, требует либо многомесячной перепродажи с убытком, либо того самого списания в сотни миллионов долларов.</a:t>
             </a:r>
           </a:p>
           <a:p/>
@@ -1151,25 +1151,25 @@
           <a:p/>
           <a:p>
             <a:r>
-              <a:t>Имя компании на этом экране ещё не звучит — по тому же правилу, что и у предыдущих двух дивайдеров ступени: дивайдер называет наблюдаемую проблему, а не решение и не источник. Называет их следующий экран.</a:t>
+              <a:t>Имя компании на этом экране ещё не звучит — по тому же правилу, что и у предыдущих двух дивайдеров ступени: дивайдер называет наблюдаемую проблему — не решение и не источник. Называет их следующий экран.</a:t>
             </a:r>
           </a:p>
           <a:p/>
           <a:p>
             <a:r>
-              <a:t>Этот кейс, как и кейс B, — документированный публичный случай с прямыми источниками, оба прочитаны напрямую в этой сессии, а не взяты по пересказу. Третий кейс этой ступени держит ту же ось, что первые два, но с новой стороны: кейс A показал, где цепочки достаточно и что её ломает, кейс B показал, во что превращается та же экономия, когда следующий шаг необратим и дорог. Кейс C показывает, что происходит, когда сверху добавляют сложность, которую сама задача не требовала.</a:t>
+              <a:t>Этот кейс, как и кейс B, — документированный публичный случай с прямыми источниками, оба прочитаны напрямую в этой сессии — не взяты по пересказу. Третий кейс этой ступени держит ту же ось, что первые два, но с новой стороны: кейс A показал, где цепочки достаточно и что её ломает, кейс B показал, во что превращается та же экономия, когда следующий шаг необратим и дорог. Кейс C показывает, что происходит, когда сверху добавляют сложность, которую сама задача не требовала.</a:t>
             </a:r>
           </a:p>
           <a:p/>
           <a:p>
             <a:r>
-              <a:t>Компания и фреймворк, о которых идёт речь, отказались от инструмента, который должен был снять с них сложность, и обнаружили, что без него проще, а не сложнее. Следующий экран называет компанию, фреймворк и конкретную цифру того, во что превратилось простое действие — перевод одного слова на другой язык — после того, как фреймворк встал между прямым вызовом модели и кодом команды.</a:t>
+              <a:t>Компания и фреймворк, о которых идёт речь, отказались от инструмента, который должен был снять с них сложность, и обнаружили, что без него проще, не сложнее. Следующий экран называет компанию, фреймворк и конкретную цифру того, во что превратилось простое действие — перевод одного слова на другой язык — после того, как фреймворк встал между прямым вызовом модели и кодом команды.</a:t>
             </a:r>
           </a:p>
           <a:p/>
           <a:p>
             <a:r>
-              <a:t>Почему этот поворот стоит третьим, а не первым или вторым: кейс A и кейс B — оба про нехватку проверки там, где цепочка уже построена правильно по форме. Кейс C — про другую ошибку, случившуюся раньше: сложность добавили туда, где задача её не требовала, и эта добавленная сложность сама стала источником новых мест для ошибки. Один урок ступени держится на трёх разных причинах одного и того же итога — цепочка подвела не потому, что приём плох, а потому что его либо недоверили, либо перегрузили лишним.</a:t>
+              <a:t>Почему этот поворот стоит третьим — не первым и не вторым: кейс A и кейс B — оба про нехватку проверки там, где цепочка уже построена правильно по форме. Кейс C — про другую ошибку, случившуюся раньше: сложность добавили туда, где задача её не требовала, и эта добавленная сложность сама стала источником новых мест для ошибки. Один урок ступени держится на трёх разных причинах одного и того же итога — цепочка подвела не потому, что приём плох, а потому что его либо недоверили, либо перегрузили лишним.</a:t>
             </a:r>
           </a:p>
         </p:txBody>
@@ -1345,13 +1345,13 @@
           <a:lstStyle/>
           <a:p>
             <a:r>
-              <a:t>Фреймворк, который должен был снять сложность с команды — буквально обещанием «от идеи до кода за вечер», — сам стал источником сложности: на то же самое действие требовалось больше кода, а не меньше, и понять, что происходит внутри одного шага, стало труднее, а не легче. И самое важное — когда фреймворк убрали, сложность не вернулась в каком-то другом виде. Простой код — прямые вызовы модели, обычные ветвления и обычная обработка текста, та же структура, что разобрана в кейсе A этой ступени: явные шаги, явная проверка между ними, без слоя, который прячет, что происходит внутри, — оказался достаточен с самого начала. Именно это имели в виду авторы поста под фразой «we could just code»: не то, что писать код сложнее, чем использовать фреймворк, а то, что фреймворк в их случае решал проблему, которой не было, и создавал проблему, которой не было бы без него.</a:t>
+              <a:t>Фреймворк, который должен был снять сложность с команды — буквально обещанием «от идеи до кода за вечер», — сам стал источником сложности: на то же самое действие требовалось больше кода, не меньше, и понять, что происходит внутри одного шага, стало труднее, не легче. И самое важное — когда фреймворк убрали, сложность не вернулась в каком-то другом виде. Простой код — прямые вызовы модели, обычные ветвления и обычная обработка текста, та же структура, что разобрана в кейсе A этой ступени: явные шаги, явная проверка между ними, без слоя, который прячет, что происходит внутри, — оказался достаточен с самого начала. Именно это имели в виду авторы поста под фразой «we could just code»: не то, что писать код сложнее, чем использовать фреймворк, а то, что фреймворк в их случае решал проблему, которой не было, и создавал проблему, которой не было бы без него.</a:t>
             </a:r>
           </a:p>
           <a:p/>
           <a:p>
             <a:r>
-              <a:t>Этот вывод — не изолированное наблюдение одной команды, а прямое, отдельно задокументированное подтверждение того, что формулирует сама компания Anthropic в материале Building Effective Agents (2024): «найди простейшее решение» — начинай с прямых вызовов API, а фреймворк бери только тогда, когда он доказанно снимает реальную сложность, а не по умолчанию, просто потому что он существует и обещает решить всё за вечер.</a:t>
+              <a:t>Этот вывод — не изолированное наблюдение одной команды. Прямое, отдельно задокументированное подтверждение того, что формулирует сама компания Anthropic в материале Building Effective Agents (2024): «найди простейшее решение» — начинай с прямых вызовов API, а фреймворк бери только тогда, когда он доказанно снимает реальную сложность, не по умолчанию, просто потому что он существует и обещает решить всё за вечер.</a:t>
             </a:r>
           </a:p>
           <a:p/>
@@ -1363,7 +1363,7 @@
           <a:p/>
           <a:p>
             <a:r>
-              <a:t>Следующий вопрос прямо вырастает из границы, которую назвал конец кейса A: что делать, если входы, приходящие в одну и ту же точку, на самом деле относятся не к одной группе обработки, а к принципиально разным — и единственный фиксированный порядок шагов одной цепочки не может одинаково хорошо подойти им всем? Ответ на этот вопрос — выбор одного из нескольких заранее заданных маршрутов в зависимости от типа входа.</a:t>
+              <a:t>Следующий вопрос прямо вырастает из границы, которую назвал конец кейса A: что делать, если входы, приходящие в одну и ту же точку, на самом деле относятся к принципиально разным группам обработки, не к одной, — и единственный фиксированный порядок шагов одной цепочки не может одинаково хорошо подойти им всем? Ответ на этот вопрос — выбор одного из нескольких заранее заданных маршрутов в зависимости от типа входа.</a:t>
             </a:r>
           </a:p>
         </p:txBody>
@@ -1505,7 +1505,7 @@
           </a:p>
           <a:p>
             <a:r>
-              <a:t>отдела продаж и форму с сайта, и в день релиза за час приходит не двадцать писем, а двести.</a:t>
+              <a:t>отдела продаж и форму с сайта, и в день релиза за час приходит уже двести писем, не двадцать.</a:t>
             </a:r>
           </a:p>
           <a:p>
@@ -1541,7 +1541,7 @@
           </a:p>
           <a:p>
             <a:r>
-              <a:t>классификации — вернуть одно значение из короткого списка известных вариантов, а не сочинить</a:t>
+              <a:t>классификации — вернуть одно значение из короткого списка известных вариантов, не сочинить</a:t>
             </a:r>
           </a:p>
           <a:p>
@@ -1637,7 +1637,7 @@
           <a:p/>
           <a:p>
             <a:r>
-              <a:t>Сегодня взгляд меняется. Речь не про то, как работает один агент, а про то, как выглядит процесс, который таким агентом — или просто одним вызовом модели — пользуется. LLM здесь не главный герой, а один шаг из многих в цепочке действий, которую инженер строит и контролирует сам. Разница похожа на разницу между тем, как устроен один работник, и тем, как устроена линия, на которой этот работник стоит одним из звеньев.</a:t>
+              <a:t>Сегодня взгляд меняется. Речь не про то, как работает один агент, а про то, как выглядит процесс, который таким агентом — или просто одним вызовом модели — пользуется. LLM здесь — не главный герой. Один шаг из многих в цепочке действий, которую инженер строит и контролирует сам. Разница похожа на разницу между тем, как устроен один работник, и тем, как устроена линия, на которой этот работник стоит одним из звеньев.</a:t>
             </a:r>
           </a:p>
           <a:p/>
@@ -1649,7 +1649,7 @@
           <a:p/>
           <a:p>
             <a:r>
-              <a:t>На экране — лестница из девяти строк, от самого простого узла процесса до самого сложного. Нижняя строка — ситуация, когда для задачи хватает одного вызова модели и, при необходимости, обращения к базе знаний, а строить вокруг LLM вообще ничего не нужно. Верхние строки — всё более сложные способы организовать процесс: цепочка шагов, маршрут с разбором по категориям, параллельные проверки, переделка по эталону, дирижёр с несколькими исполнителями, один агент, несколько агентов — и, наконец, решение вообще не автоматизировать, а вернуться к ручному процессу. Сейчас все девять строк пустые: ни одна ещё не закрыта, это чистый контракт на шесть занятий вперёд, а не список терминов для запоминания.</a:t>
+              <a:t>На экране — лестница из девяти строк, от самого простого узла процесса до самого сложного. Нижняя строка — ситуация, когда для задачи хватает одного вызова модели и, при необходимости, обращения к базе знаний, а строить вокруг LLM вообще ничего не нужно. Верхние строки — всё более сложные способы организовать процесс: цепочка шагов, маршрут с разбором по категориям, параллельные проверки, переделка по эталону, дирижёр с несколькими исполнителями, один агент, несколько агентов — и, наконец, решение отказаться от автоматизации и вернуться к ручному процессу. Сейчас все девять строк пустые: ни одна ещё не закрыта, это чистый контракт на шесть занятий вперёд — запоминать термины заранее не нужно.</a:t>
             </a:r>
           </a:p>
           <a:p/>
@@ -1812,7 +1812,7 @@
           </a:p>
           <a:p>
             <a:r>
-              <a:t>ошибки растёт с тем, что ветка делает дальше, а не с тем, сколько стоил сам шаг</a:t>
+              <a:t>ошибки растёт с тем, что ветка делает дальше, не с тем, сколько стоил сам шаг</a:t>
             </a:r>
           </a:p>
           <a:p>
@@ -1943,7 +1943,7 @@
           </a:p>
           <a:p>
             <a:r>
-              <a:t>модель» — вызов, который возвращает типизированное значение, а не текст; наименее знакомый</a:t>
+              <a:t>модель» — вызов, который возвращает типизированное значение, не текст; наименее знакомый</a:t>
             </a:r>
           </a:p>
           <a:p>
@@ -2131,7 +2131,7 @@
           </a:p>
           <a:p>
             <a:r>
-              <a:t>которых никто не предусмотрел, а клиенты формулируют жалобы десятками разных способов.</a:t>
+              <a:t>которых никто не предусмотрел: клиенты формулируют жалобы десятками разных способов.</a:t>
             </a:r>
           </a:p>
           <a:p>
@@ -2141,7 +2141,7 @@
           </a:p>
           <a:p>
             <a:r>
-              <a:t>но требует отдельного обучения и поддержки: новая категория — это переобучение, а не правка</a:t>
+              <a:t>но требует отдельного обучения и поддержки: новая категория — это переобучение, не правка</a:t>
             </a:r>
           </a:p>
           <a:p>
@@ -2224,7 +2224,7 @@
           </a:p>
           <a:p>
             <a:r>
-              <a:t>измеримая, сегодня же проверяемая цена, а не гипотетическая.</a:t>
+              <a:t>измеримая, сегодня же проверяемая цена, не гипотетическая.</a:t>
             </a:r>
           </a:p>
         </p:txBody>
@@ -2319,7 +2319,7 @@
           </a:p>
           <a:p>
             <a:r>
-              <a:t>оценкам не было и не могло быть: формат ответа Jev — число, а не причина. Какой именно</a:t>
+              <a:t>оценкам не было и не могло быть: формат ответа Jev — число, не причина. Какой именно</a:t>
             </a:r>
           </a:p>
           <a:p>
@@ -2547,7 +2547,7 @@
           </a:p>
           <a:p>
             <a:r>
-              <a:t>них с почтовым маршрутизатором — не область применения, а внутреннее устройство:</a:t>
+              <a:t>них с почтовым маршрутизатором — внутреннее устройство, не область применения:</a:t>
             </a:r>
           </a:p>
           <a:p>
@@ -2573,17 +2573,12 @@
           </a:p>
           <a:p>
             <a:r>
-              <a:t>миллионов решений. Поэтому следующие два кейса разбираются не как курьёз из другой отрасли,</a:t>
-            </a:r>
-          </a:p>
-          <a:p>
-            <a:r>
-              <a:t>а как напоминание о том, какую цену способен получить ровно тот же технический выбор, если</a:t>
-            </a:r>
-          </a:p>
-          <a:p>
-            <a:r>
-              <a:t>его не проверять. Там, где в почтовом пайплайне достаточно вопроса «какой способ дешевле и</a:t>
+              <a:t>миллионов решений. Поэтому следующие два кейса разбираются как напоминание о том, какую цену способен получить</a:t>
+            </a:r>
+          </a:p>
+          <a:p>
+            <a:r>
+              <a:t>ровно тот же технический выбор, если его не проверять, — не как курьёз из другой отрасли. Там, где в почтовом пайплайне достаточно вопроса «какой способ дешевле и</a:t>
             </a:r>
           </a:p>
           <a:p>
@@ -2604,17 +2599,17 @@
           <a:p/>
           <a:p>
             <a:r>
-              <a:t>Держать в голове дальше стоит не детали медицины или налогов, а то, что подмена одного</a:t>
-            </a:r>
-          </a:p>
-          <a:p>
-            <a:r>
-              <a:t>признака другим повторяется из домена в домен ровно по одной и той же причине и ровно тем же</a:t>
-            </a:r>
-          </a:p>
-          <a:p>
-            <a:r>
-              <a:t>механизмом, который только что разобран на примере четырёх почтовых маршрутов.</a:t>
+              <a:t>Держать в голове дальше стоит то, что подмена одного признака другим повторяется из домена в</a:t>
+            </a:r>
+          </a:p>
+          <a:p>
+            <a:r>
+              <a:t>домен ровно по одной и той же причине и ровно тем же механизмом, который только что разобран</a:t>
+            </a:r>
+          </a:p>
+          <a:p>
+            <a:r>
+              <a:t>на примере четырёх почтовых маршрутов, — не детали медицины или налогов.</a:t>
             </a:r>
           </a:p>
         </p:txBody>
@@ -2791,12 +2786,12 @@
           </a:p>
           <a:p>
             <a:r>
-              <a:t>направленных на этом масштабе означает не статистическую погрешность, а миллионы конкретных</a:t>
-            </a:r>
-          </a:p>
-          <a:p>
-            <a:r>
-              <a:t>решений. Дальше — конкретная пара пациентов, на которой это видно без статистики.</a:t>
+              <a:t>направленных на этом масштабе означает миллионы конкретных решений, не статистическую</a:t>
+            </a:r>
+          </a:p>
+          <a:p>
+            <a:r>
+              <a:t>погрешность. Дальше — конкретная пара пациентов, на которой это видно без статистики.</a:t>
             </a:r>
           </a:p>
         </p:txBody>
@@ -2902,7 +2897,7 @@
           </a:p>
           <a:p>
             <a:r>
-              <a:t>заболеваний, лабораторных показателях, а не в баллах самого алгоритма — чёрный пациент с</a:t>
+              <a:t>заболеваний, лабораторных показателях, не в баллах самого алгоритма — чёрный пациент с</a:t>
             </a:r>
           </a:p>
           <a:p>
@@ -2948,12 +2943,12 @@
           </a:p>
           <a:p>
             <a:r>
-              <a:t>состояния, разница проявится не у одного пациента, а у всех пациентов этой группы сразу, в</a:t>
-            </a:r>
-          </a:p>
-          <a:p>
-            <a:r>
-              <a:t>одном и том же направлении, с одной и той же постоянной ошибкой — ровно так отличают</a:t>
+              <a:t>состояния, разница проявится у всех пациентов этой группы сразу, не у одного, — в</a:t>
+            </a:r>
+          </a:p>
+          <a:p>
+            <a:r>
+              <a:t>одном и том же направлении, с одной и той же постоянной ошибкой. Ровно так отличают</a:t>
             </a:r>
           </a:p>
           <a:p>
@@ -3147,12 +3142,12 @@
           </a:p>
           <a:p>
             <a:r>
-              <a:t>в его числовой истории способно систематически смещаться не из-за тяжести болезни, а из-за</a:t>
-            </a:r>
-          </a:p>
-          <a:p>
-            <a:r>
-              <a:t>истории доступа к медицине у разных групп пациентов.</a:t>
+              <a:t>в его числовой истории способно систематически смещаться из-за истории доступа к медицине у</a:t>
+            </a:r>
+          </a:p>
+          <a:p>
+            <a:r>
+              <a:t>разных групп пациентов, не из-за тяжести болезни.</a:t>
             </a:r>
           </a:p>
         </p:txBody>
@@ -3263,12 +3258,12 @@
           </a:p>
           <a:p>
             <a:r>
-              <a:t>заболевания, чем белые пациенты, — не потому что болезнь легче, а из-за неравного доступа к</a:t>
-            </a:r>
-          </a:p>
-          <a:p>
-            <a:r>
-              <a:t>медицине: меньше визитов к врачу, меньше диагностических процедур, меньше направлений к</a:t>
+              <a:t>заболевания, чем белые пациенты, — из-за неравного доступа к медицине, не из-за более лёгкой</a:t>
+            </a:r>
+          </a:p>
+          <a:p>
+            <a:r>
+              <a:t>болезни: меньше визитов к врачу, меньше диагностических процедур, меньше направлений к</a:t>
             </a:r>
           </a:p>
           <a:p>
@@ -3334,7 +3329,7 @@
           </a:p>
           <a:p>
             <a:r>
-              <a:t>потребность, а не прошлые расходы, доля чёрных пациентов в программе выросла бы с 17,7% до</a:t>
+              <a:t>потребность, не прошлые расходы, доля чёрных пациентов в программе выросла бы с 17,7% до</a:t>
             </a:r>
           </a:p>
           <a:p>
@@ -3455,12 +3450,12 @@
           </a:p>
           <a:p>
             <a:r>
-              <a:t>в домене, где ставки измеряются не здоровьем, а деньгами и потраченным временем, и где</a:t>
-            </a:r>
-          </a:p>
-          <a:p>
-            <a:r>
-              <a:t>ответом будет уже не расходы, а что-то совсем другое. Домен меняется полностью — другое</a:t>
+              <a:t>в домене, где ставки измеряются деньгами и потраченным временем, не здоровьем, и где</a:t>
+            </a:r>
+          </a:p>
+          <a:p>
+            <a:r>
+              <a:t>ответом будет уже не расходы — что-то совсем другое. Домен меняется полностью — другое</a:t>
             </a:r>
           </a:p>
           <a:p>
@@ -3547,7 +3542,7 @@
           </a:p>
           <a:p>
             <a:r>
-              <a:t>именно в этом одном признаке, а не в самом приёме замены. Совпадает не признак — совпадает</a:t>
+              <a:t>именно в этом одном признаке, не в самом приёме замены. Совпадает не признак — совпадает</a:t>
             </a:r>
           </a:p>
           <a:p>
@@ -3622,7 +3617,7 @@
           <a:lstStyle/>
           <a:p>
             <a:r>
-              <a:t>На экране — не разговор с моделью, а три коробки и две стрелки. Письмо попадает в почтовый ящик поддержки. Срабатывает правило: «если письмо пришло в этот ящик — создать карточку в трекере задач». Правило отправляет HTTP-запрос, и через секунду в трекере уже лежит новая карточка с темой письма и его текстом. Никто не писал код прямо во время этого события — правило было написано заранее, один раз, и с тех пор просто срабатывает.</a:t>
+              <a:t>На экране — три коробки и две стрелки, не разговор с моделью. Письмо попадает в почтовый ящик поддержки. Срабатывает правило: «если письмо пришло в этот ящик — создать карточку в трекере задач». Правило отправляет HTTP-запрос, и через секунду в трекере уже лежит новая карточка с темой письма и его текстом. Никто не писал код прямо во время этого события — правило было написано заранее, один раз, и с тех пор просто срабатывает.</a:t>
             </a:r>
           </a:p>
           <a:p/>
@@ -3640,7 +3635,7 @@
           <a:p/>
           <a:p>
             <a:r>
-              <a:t>Вопрос, который задаёт эта картинка, не закрывается ответом «нигде» — он переезжает на следующий уровень. Автоматизация без единого вызова модели уже решает часть задачи: создать карточку, уведомить, положить в очередь. Вопрос про остаток задачи — ответить на письмо по существу — становится не «нужен ли здесь ИИ», а «какому конкретно шагу он нужен, а какому нет». Этим вопросом открывается первый кейс ступени: человек, который каждый день отвечает на такие письма сам.</a:t>
+              <a:t>Вопрос, который задаёт эта картинка, не закрывается ответом «нигде» — он переезжает на следующий уровень. Автоматизация без единого вызова модели уже решает часть задачи: создать карточку, уведомить, положить в очередь. Вопрос про остаток задачи — ответить на письмо по существу — был «нужен ли здесь ИИ», стал «какому конкретно шагу он нужен, и какому нет». Этим вопросом открывается первый кейс ступени: человек, который каждый день отвечает на такие письма сам.</a:t>
             </a:r>
           </a:p>
         </p:txBody>
@@ -3740,12 +3735,12 @@
           </a:p>
           <a:p>
             <a:r>
-              <a:t>проверке означает не просто бумажную формальность, а дни, потраченные на сбор документов, и</a:t>
-            </a:r>
-          </a:p>
-          <a:p>
-            <a:r>
-              <a:t>реальный риск потерять часть уже рассчитанного возврата, которым семья успела распорядиться.</a:t>
+              <a:t>проверке означает дни, потраченные на сбор документов, и реальный риск потерять часть уже</a:t>
+            </a:r>
+          </a:p>
+          <a:p>
+            <a:r>
+              <a:t>рассчитанного возврата, которым семья успела распорядиться, — не просто бумажную формальность.</a:t>
             </a:r>
           </a:p>
           <a:p>
@@ -3812,7 +3807,7 @@
           </a:p>
           <a:p>
             <a:r>
-              <a:t>устойчивая из года в год, а не случайный разброс, который можно было бы списать на</a:t>
+              <a:t>устойчивая из года в год, не случайный разброс, который можно было бы списать на</a:t>
             </a:r>
           </a:p>
           <a:p>
@@ -3887,7 +3882,7 @@
           <a:lstStyle/>
           <a:p>
             <a:r>
-              <a:t>Здесь вопрос звучит иначе, чем в кейсах A и B: не выбрать карточку, а назвать число вслух.</a:t>
+              <a:t>Здесь вопрос звучит иначе, чем в кейсах A и B: назвать число вслух, не выбрать карточку.</a:t>
             </a:r>
           </a:p>
           <a:p>
@@ -3903,32 +3898,27 @@
           <a:p/>
           <a:p>
             <a:r>
-              <a:t>Форма вопроса меняется намеренно, не для разнообразия. В кейсах A и B вопрос классу был про</a:t>
-            </a:r>
-          </a:p>
-          <a:p>
-            <a:r>
-              <a:t>признак — что именно алгоритм взял в качестве замены нужной величины. Здесь после кейса B</a:t>
-            </a:r>
-          </a:p>
-          <a:p>
-            <a:r>
-              <a:t>почти у всех в зале уже есть рабочая гипотеза про сам механизм подмены, и повторять вопрос</a:t>
-            </a:r>
-          </a:p>
-          <a:p>
-            <a:r>
-              <a:t>«какой признак» означало бы спросить то, что аудитория уже умеет угадывать. Неизвестным</a:t>
-            </a:r>
-          </a:p>
-          <a:p>
-            <a:r>
-              <a:t>остаётся другое — масштаб итогового перекоса, и именно его зал называет вслух, числом, до</a:t>
-            </a:r>
-          </a:p>
-          <a:p>
-            <a:r>
-              <a:t>того как прозвучит разбор.</a:t>
+              <a:t>Форма вопроса меняется намеренно, не для разнообразия. В кейсах A и B вопрос был про признак —</a:t>
+            </a:r>
+          </a:p>
+          <a:p>
+            <a:r>
+              <a:t>что именно алгоритм взял в качестве замены нужной величины. Здесь, после кейса B, механизм</a:t>
+            </a:r>
+          </a:p>
+          <a:p>
+            <a:r>
+              <a:t>подмены уже известен — повторять вопрос «какой признак» означало бы спрашивать то, что уже</a:t>
+            </a:r>
+          </a:p>
+          <a:p>
+            <a:r>
+              <a:t>прозвучало. Неизвестным остаётся другое — масштаб итогового перекоса, и его называют вслух</a:t>
+            </a:r>
+          </a:p>
+          <a:p>
+            <a:r>
+              <a:t>числом, до того как прозвучит разбор.</a:t>
             </a:r>
           </a:p>
           <a:p/>
@@ -3995,7 +3985,7 @@
           </a:p>
           <a:p>
             <a:r>
-              <a:t>возвращается именно к ним, а не просто называет правильный ответ без контекста угадывания.</a:t>
+              <a:t>возвращается именно к ним, не просто называет правильный ответ без контекста угадывания.</a:t>
             </a:r>
           </a:p>
           <a:p>
@@ -4005,7 +3995,7 @@
           </a:p>
           <a:p>
             <a:r>
-              <a:t>урока, а не вступление к нему.</a:t>
+              <a:t>урока, не вступление к нему.</a:t>
             </a:r>
           </a:p>
         </p:txBody>
@@ -4131,7 +4121,7 @@
           </a:p>
           <a:p>
             <a:r>
-              <a:t>закономерно смещается к декларациям, которые дешевле проверить, а не к декларациям, где</a:t>
+              <a:t>закономерно смещается к декларациям, которые дешевле проверить, не к декларациям, где</a:t>
             </a:r>
           </a:p>
           <a:p>
@@ -4151,7 +4141,7 @@
           </a:p>
           <a:p>
             <a:r>
-              <a:t>декларациям, — не потому что они чаще нарушают правила, а потому что состав претендентов на</a:t>
+              <a:t>декларациям — не потому что они чаще нарушают правила: состав претендентов на</a:t>
             </a:r>
           </a:p>
           <a:p>
@@ -4308,17 +4298,17 @@
           </a:p>
           <a:p>
             <a:r>
-              <a:t>истории переписки или от сочетания нескольких признаков сразу, а не от одной метки; и — это</a:t>
-            </a:r>
-          </a:p>
-          <a:p>
-            <a:r>
-              <a:t>объединяет кейсы B и C — когда ошибка систематическая, а не разовая, и видна только на</a:t>
-            </a:r>
-          </a:p>
-          <a:p>
-            <a:r>
-              <a:t>статистике по множеству решений, а не по одному случаю. Ровно по третьей строке кейсы B и C</a:t>
+              <a:t>истории переписки или от сочетания нескольких признаков сразу, не от одной метки; и — это</a:t>
+            </a:r>
+          </a:p>
+          <a:p>
+            <a:r>
+              <a:t>объединяет кейсы B и C — когда ошибка систематическая, не разовая, и видна только на</a:t>
+            </a:r>
+          </a:p>
+          <a:p>
+            <a:r>
+              <a:t>статистике по множеству решений, не по одному случаю. Ровно по третьей строке кейсы B и C</a:t>
             </a:r>
           </a:p>
           <a:p>
@@ -4349,7 +4339,7 @@
           </a:p>
           <a:p>
             <a:r>
-              <a:t>размазана по множеству мелких решений, а не сосредоточена в одном. Там, где нужная</a:t>
+              <a:t>размазана по множеству мелких решений, не сосредоточена в одном. Там, где нужная</a:t>
             </a:r>
           </a:p>
           <a:p>
@@ -4359,12 +4349,12 @@
           </a:p>
           <a:p>
             <a:r>
-              <a:t>например, письмо требует не одной метки, а последовательности разных действий в зависимости</a:t>
-            </a:r>
-          </a:p>
-          <a:p>
-            <a:r>
-              <a:t>от того, что ответит клиент дальше, — маршрут по готовым классам перестаёт быть правильным</a:t>
+              <a:t>например, письмо требует последовательности разных действий в зависимости</a:t>
+            </a:r>
+          </a:p>
+          <a:p>
+            <a:r>
+              <a:t>от того, что ответит клиент дальше, не одной метки, — маршрут по готовым классам перестаёт быть правильным</a:t>
             </a:r>
           </a:p>
           <a:p>
@@ -4375,12 +4365,12 @@
           <a:p/>
           <a:p>
             <a:r>
-              <a:t>Это первый предвестник следующего уровня лестницы процесса: одного агента, который не</a:t>
-            </a:r>
-          </a:p>
-          <a:p>
-            <a:r>
-              <a:t>выбирает одну из заранее заданных веток, а сам решает на каждом шаге, что делать дальше.</a:t>
+              <a:t>Это первый предвестник следующего уровня лестницы процесса: одного агента, который сам</a:t>
+            </a:r>
+          </a:p>
+          <a:p>
+            <a:r>
+              <a:t>решает на каждом шаге, что делать дальше, не выбирает одну из заранее заданных веток.</a:t>
             </a:r>
           </a:p>
           <a:p>
@@ -4461,13 +4451,13 @@
           <a:p/>
           <a:p>
             <a:r>
-              <a:t>Строка «хватит одного вызова» закрыта: для части задач, где одного обращения к модели и, при необходимости, одного обращения к базе знаний достаточно, строить процесс вокруг LLM не нужно вовсе — такая ситуация встречается не реже, чем кажется на первый взгляд. Строка «цепочка» закрыта: там, где одного вызова не хватает, но порядок шагов известен заранее, шаги выстраиваются друг за другом, и между ними ставится проверка — без неё ошибка первого шага тихо утекает в последний. Строка «маршрут» закрыта: там, где заранее неизвестно, какой из нескольких известных путей подойдёт входящей задаче, вызов модели — или вовсе не модели, а классификатора без текстового вывода — определяет, по какому пути пойти дальше.</a:t>
+              <a:t>Строка «хватит одного вызова» закрыта: для части задач, где одного обращения к модели и, при необходимости, одного обращения к базе знаний достаточно, строить процесс вокруг LLM не нужно вовсе — такая ситуация встречается не реже, чем кажется на первый взгляд. Строка «цепочка» закрыта: там, где одного вызова не хватает, но порядок шагов известен заранее, шаги выстраиваются друг за другом, и между ними ставится проверка — без неё ошибка первого шага тихо утекает в последний. Строка «маршрут» закрыта: там, где заранее неизвестно, какой из нескольких известных путей подойдёт входящей задаче, по какому пути пойти дальше определяет вызов модели — или классификатора без текстового вывода, вовсе не модели.</a:t>
             </a:r>
           </a:p>
           <a:p/>
           <a:p>
             <a:r>
-              <a:t>Эти три строки — нижняя часть лестницы, самые простые способы организовать процесс вокруг LLM. Выше остаются шесть пустых строк: параллельные проверки, переделка по эталону, несколько исполнителей под одним дирижёром, один агент, несколько агентов, и строка, которая не про усложнение, а про обратное решение — выключить автоматизацию там, где ручной процесс справляется лучше. Эти шесть строк останутся пустыми до следующих пяти занятий этой же серии: каждое из них закрывает одну-две строки, не все сразу.</a:t>
+              <a:t>Эти три строки — нижняя часть лестницы, самые простые способы организовать процесс вокруг LLM. Выше остаются шесть пустых строк: параллельные проверки, переделка по эталону, несколько исполнителей под одним дирижёром, один агент, несколько агентов, и строка про обратное решение, не про усложнение, — выключить автоматизацию там, где ручной процесс справляется лучше. Эти шесть строк останутся пустыми до следующих пяти занятий этой же серии: каждое из них закрывает одну-две строки, не все сразу.</a:t>
             </a:r>
           </a:p>
           <a:p/>
@@ -4479,7 +4469,7 @@
           <a:p/>
           <a:p>
             <a:r>
-              <a:t>Лестница — не список того, что нужно запомнить, а карта того, какую часть процесса вокруг LLM занятие покрыло сегодня и какая часть остаётся впереди. Три нижние строки работают с этого момента как проверенный, закрытый результат: у вопроса «хватит одного вызова, нужна цепочка или нужен маршрут» для новой задачи теперь есть на что опереться. Остальные шесть строк ждут своего занятия, и форма, в которой лестница появится снова, будет той же самой, прочитанной дальше.</a:t>
+              <a:t>Лестница — не список того, что нужно запомнить. Карта того, какую часть процесса вокруг LLM занятие покрыло сегодня и какая часть остаётся впереди. Три нижние строки работают с этого момента как проверенный, закрытый результат: у вопроса «хватит одного вызова, нужна цепочка или нужен маршрут» для новой задачи теперь есть на что опереться. Остальные шесть строк ждут своего занятия, и форма, в которой лестница появится снова, будет той же самой, прочитанной дальше.</a:t>
             </a:r>
           </a:p>
         </p:txBody>
@@ -4555,13 +4545,13 @@
           <a:p/>
           <a:p>
             <a:r>
-              <a:t>Это осознанный порядок подачи, не случайность: экран называет то, что человек уже делает руками, а не инструмент, который должен его заменить. Назвать сразу «цепочку вызовов модели» означало бы вводить структуру раньше, чем видно, какую именно знакомую работу она затрагивает — а материал этого занятия идёт в обратном порядке: сначала узнаваемое действие, потом то, что его автоматизирует.</a:t>
+              <a:t>Это осознанный порядок подачи, не случайность: экран называет то, что человек уже делает руками — не инструмент, который должен его заменить. Назвать сразу «цепочку вызовов модели» означало бы вводить структуру раньше, чем видно, какую именно знакомую работу она затрагивает — а материал этого занятия идёт в обратном порядке: сначала узнаваемое действие, потом то, что его автоматизирует.</a:t>
             </a:r>
           </a:p>
           <a:p/>
           <a:p>
             <a:r>
-              <a:t>Кейс, который открывает эта фраза, — не документированный публичный случай, а сквозной учебный сценарий: он несёт механику приёма через всю ступень, и дальше к нему возвращаются кейсы B и C этого же занятия, каждый на несопоставимо большей цене ошибки. Называть его чьим-то провалом было бы прямой выдумкой — здесь он называется тем, что он есть: механикой, предъявленной через правдоподобную сцену, ровно тем же способом, каким был устроен первый кейс ступени MCP. Это честный пробел, не два случайных примера: кейсы B и C дальше в этой же ступени — документированные публичные случаи с указанными источниками, и расхождение статуса называется прямо, а не прячется за одинаковой формой подачи.</a:t>
+              <a:t>Кейс, который открывает эта фраза, — не документированный публичный случай. Сквозной учебный сценарий: он несёт механику приёма через всю ступень, и дальше к нему возвращаются кейсы B и C этого же занятия, каждый на несопоставимо большей цене ошибки. Называть его чьим-то провалом было бы прямой выдумкой — здесь он называется тем, что он есть: механикой, предъявленной через правдоподобную сцену, ровно тем же способом, каким был устроен первый кейс ступени MCP. Это честный пробел, не два случайных примера: кейсы B и C дальше в этой же ступени — документированные публичные случаи с указанными источниками, и расхождение статуса называется прямо — не прячется за одинаковой формой подачи.</a:t>
             </a:r>
           </a:p>
           <a:p/>
@@ -4573,7 +4563,7 @@
           <a:p/>
           <a:p>
             <a:r>
-              <a:t>Сцена выбрана именно про почту поддержки, а не про какую-то более эффектную область, по той же причине, по которой кейс MCP Семинара 6 выбирал трекер задач: это узнаваемая, неэффектная, будничная работа — ровно та, в которой приёмы этого курса проверяются каждый день, а не раз в квартал на показательном примере.</a:t>
+              <a:t>Сцена выбрана именно про почту поддержки — не про какую-то более эффектную область, по той же причине, по которой кейс MCP Семинара 6 выбирал трекер задач: это узнаваемая, неэффектная, будничная работа — ровно та, в которой приёмы этого курса проверяются каждый день, не раз в квартал на показательном примере.</a:t>
             </a:r>
           </a:p>
         </p:txBody>
@@ -4655,13 +4645,13 @@
           <a:p/>
           <a:p>
             <a:r>
-              <a:t>Вопрос залу разделяет эти два случая не по ощущению, а по конкретному критерию: хватит ли для автоматического ответа одного вызова модели, у которой есть доступ к базе знаний компании — retrieval, поиск релевантного кусочка документации перед тем, как модель формулирует ответ, тот самый RAG, уже разобранный на предыдущих занятиях курса. Три карточки держат ответ открытым: «да, одного вызова достаточно», «нет, нужно несколько шагов», «зависит от письма». Голосовать нужно не абстрактно, а держа перед глазами именно эти четыре примера писем из сцены — и для каждого типа ответ может оказаться своим.</a:t>
+              <a:t>Вопрос залу разделяет эти два случая по конкретному критерию, не по ощущению: хватит ли для автоматического ответа одного вызова модели, у которой есть доступ к базе знаний компании — retrieval, поиск релевантного кусочка документации перед тем, как модель формулирует ответ, тот самый RAG, уже разобранный на предыдущих занятиях курса. Три карточки держат ответ открытым: «да, одного вызова достаточно», «нет, нужно несколько шагов», «зависит от письма». Голосовать нужно, держа перед глазами именно эти четыре примера писем из сцены, не абстрактно — и для каждого типа ответ может оказаться своим.</a:t>
             </a:r>
           </a:p>
           <a:p/>
           <a:p>
             <a:r>
-              <a:t>Четыре письма сцены выбраны не случайно и не ради разнообразия: первые два выглядят скучно предсказуемыми именно потому, что сотрудник отвечает на них автоматически, не задумываясь, а третье и четвёртое специально взяты так, чтобы на них ответ одним движением дать было нельзя — там нужно сопоставить несколько фактов, прежде чем решить, что писать. Один и тот же вопрос — «хватит ли одного вызова» — применённый к этим четырём письмам по отдельности, и даёт четыре разных ответа, и ровно в этом разбросе ответов — весь смысл вопроса для зала.</a:t>
+              <a:t>Четыре письма сцены выбраны не случайно и не ради разнообразия: первые два выглядят скучно предсказуемыми именно потому, что сотрудник отвечает на них автоматически, без раздумий; третье и четвёртое выбраны иначе — так, чтобы на них ответ одним движением дать было нельзя: там нужно сопоставить несколько фактов, прежде чем решить, что писать. Один и тот же вопрос — «хватит ли одного вызова» — применённый к этим четырём письмам по отдельности, и даёт четыре разных ответа, и ровно в этом разбросе ответов — весь смысл вопроса для зала.</a:t>
             </a:r>
           </a:p>
         </p:txBody>
@@ -4731,25 +4721,25 @@
           <a:lstStyle/>
           <a:p>
             <a:r>
-              <a:t>Правильный ответ — «зависит», и дальше кейс разворачивает обе стороны этого ответа по очереди, а не оставляет его как уклончивую формулировку.</a:t>
+              <a:t>Правильный ответ — «зависит», и дальше кейс разворачивает обе стороны этого ответа по очереди — не оставляет его как уклончивую формулировку.</a:t>
             </a:r>
           </a:p>
           <a:p/>
           <a:p>
             <a:r>
-              <a:t>Для доли писем из сцены — «забыл пароль», «где мой заказ» без спора, прямой вопрос про условия возврата без конкретной претензии — одного вызова с доступом к базе знаний действительно достаточно. Это буквально то, что сотрудник делает за минуту: смотрит на письмо, достаёт из памяти или из документа готовый кусок текста, печатает ответ. Модель с доступом к той же базе знаний способна сделать тот же шаг за один вызов, и строить для этого что-то сложнее одного вызова — не улучшение, а лишняя работа. Это прямое следствие правила, которое уже вводилось в курсе: если одного промпта или одного вызова с retrieval достаточно для задачи — так и нужно сделать, без того, чтобы добавлять структуру, которая задаче не нужна.</a:t>
+              <a:t>Для доли писем из сцены — «забыл пароль», «где мой заказ» без спора, прямой вопрос про условия возврата без конкретной претензии — одного вызова с доступом к базе знаний действительно достаточно. Это буквально то, что сотрудник делает за минуту: смотрит на письмо, достаёт из памяти или из документа готовый кусок текста, печатает ответ. Модель с доступом к той же базе знаний способна сделать тот же шаг за один вызов, и строить для этого что-то сложнее одного вызова — лишняя работа, не улучшение. Это прямое следствие правила, которое уже вводилось в курсе: если одного промпта или одного вызова с retrieval достаточно для задачи — так и нужно сделать, без того, чтобы добавлять структуру, которая задаче не нужна.</a:t>
             </a:r>
           </a:p>
           <a:p/>
           <a:p>
             <a:r>
-              <a:t>Но не все письма такие, и ровно это показывает четвёртый пример сцены — смешанное письмо (жалоба и просьба про возврат в одном тексте), письмо, в котором не хватает контекста, или письмо, которое на самом деле требует решения («вернуть деньги или нет»), а не справки («как оформить возврат»). Для таких писем ответ одним вызовом звучит так же уверенно, как и правильный ответ на простое письмо, — но его уверенность ничем не подтверждена: никто не проверил, правильно ли модель поняла суть жалобы, и никто не сверил предложенное решение с политикой компании построчно.</a:t>
+              <a:t>Но не все письма такие, и ровно это показывает четвёртый пример сцены — смешанное письмо (жалоба и просьба про возврат в одном тексте), письмо, в котором не хватает контекста, или письмо, которое на самом деле требует решения («вернуть деньги или нет»), не справки («как оформить возврат»). Для таких писем ответ одним вызовом звучит так же уверенно, как и правильный ответ на простое письмо, — но его уверенность ничем не подтверждена: никто не проверил, правильно ли модель поняла суть жалобы, и никто не сверил предложенное решение с политикой компании построчно.</a:t>
             </a:r>
           </a:p>
           <a:p/>
           <a:p>
             <a:r>
-              <a:t>Для таких писем компании нужно не «более умная» одна модель, а структура из нескольких шагов, где промежуточный результат можно проверить, прежде чем на нём строится следующий шаг. Что это за структура конкретно — следующий вопрос.</a:t>
+              <a:t>Для таких писем компании нужна не «более умная» одна модель. Структура из нескольких шагов, где промежуточный результат можно проверить, прежде чем на нём строится следующий шаг. Что это за структура конкретно — следующий вопрос.</a:t>
             </a:r>
           </a:p>
         </p:txBody>
@@ -4819,13 +4809,13 @@
           <a:lstStyle/>
           <a:p>
             <a:r>
-              <a:t>Прежде чем переходить к устройству структуры, которая обрабатывает письма, стоит назвать её класс точно — потому что он противоположен тому, что собиралось на предыдущих семинарах курса. На занятиях С4–С6 собирался кодинг-агент: внутри его цикла путь не прописан заранее — модель сама, на каждом шаге, решает, что делать дальше, основываясь на том, что уже произошло. Непредсказуемость пути там была не недостатком, а сутью: задача разработки заранее не знает, сколько шагов понадобится и в каком порядке.</a:t>
+              <a:t>Прежде чем переходить к устройству структуры, которая обрабатывает письма, стоит назвать её класс точно — потому что он противоположен тому, что собиралось на предыдущих семинарах курса. На занятиях С4–С6 собирался кодинг-агент: внутри его цикла путь не прописан заранее — модель сама, на каждом шаге, решает, что делать дальше, основываясь на том, что уже произошло. Непредсказуемость пути там была сутью, не недостатком: задача разработки заранее не знает, сколько шагов понадобится и в каком порядке.</a:t>
             </a:r>
           </a:p>
           <a:p/>
           <a:p>
             <a:r>
-              <a:t>Здесь — ровно наоборот. Путь обработки письма — классифицировать, написать черновик, показать человеку — известен заранее, записан в коде именно в этом порядке, и ни один из трёх шагов не решает сам, «а не сделать ли что-то ещё» или «а не пропустить ли этот шаг». Систему, где путь прописан заранее в коде, принято называть workflow — рабочий поток, сценарий; систему, где путь определяет сама модель по ходу работы, — агентом. Различение не терминологическое, а операциональное: оно прямо говорит, что строить. Предсказуемая по форме задача получает workflow; задача, чей путь принципиально нельзя выписать заранее, получает агента. Это же различение, в тех же терминах, уже вводилось в Лекции 3 со ссылкой на работу Anthropic Building Effective Agents (2024); у создателей контента об автоматизации на базе ИИ встречается та же граница, сформулированная для практикующей аудитории: путь предопределён в коде — или модель сама решает путь по ходу дела.</a:t>
+              <a:t>Здесь — ровно наоборот. Путь обработки письма — классифицировать, написать черновик, показать человеку — известен заранее, записан в коде именно в этом порядке, и ни один из трёх шагов не решает сам, «а не сделать ли что-то ещё» или «а не пропустить ли этот шаг». Систему, где путь прописан заранее в коде, принято называть workflow — рабочий поток, сценарий; систему, где путь определяет сама модель по ходу работы, — агентом. Различение операциональное, не терминологическое: оно прямо говорит, что строить. Предсказуемая по форме задача получает workflow; задача, чей путь принципиально нельзя выписать заранее, получает агента. Это же различение, в тех же терминах, уже вводилось в Лекции 3 со ссылкой на работу Anthropic Building Effective Agents (2024); у создателей контента об автоматизации на базе ИИ встречается та же граница, сформулированная для практикующей аудитории: путь предопределён в коде — или модель сама решает путь по ходу дела.</a:t>
             </a:r>
           </a:p>
           <a:p/>
@@ -4907,19 +4897,19 @@
           <a:p/>
           <a:p>
             <a:r>
-              <a:t>Первое звено — classify: на входе письмо целиком, на выходе не текст, а одна метка из заранее зафиксированного, закрытого списка (например: «пароль», «статус заказа», «возврат», «жалоба», «другое»). Модель здесь не пишет ответ клиенту — она решает одну узкую задачу: к какому из известных классов относится это письмо.</a:t>
+              <a:t>Первое звено — classify: на входе письмо целиком, на выходе одна метка из заранее зафиксированного, закрытого списка — не текст (например: «пароль», «статус заказа», «возврат», «жалоба», «другое»). Модель здесь не пишет ответ клиенту — она решает одну узкую задачу: к какому из известных классов относится это письмо.</a:t>
             </a:r>
           </a:p>
           <a:p/>
           <a:p>
             <a:r>
-              <a:t>Второе звено — draft: на входе письмо, метка класса из первого звена и контекст, извлечённый из базы знаний компании именно по этому классу — тот самый retrieval. На выходе — черновик ответа клиенту, написанный с учётом нужной именно этому классу информации, а не общей.</a:t>
+              <a:t>Второе звено — draft: на входе письмо, метка класса из первого звена и контекст, извлечённый из базы знаний компании именно по этому классу — тот самый retrieval. На выходе — черновик ответа клиенту, написанный с учётом нужной именно этому классу информации, не общей.</a:t>
             </a:r>
           </a:p>
           <a:p/>
           <a:p>
             <a:r>
-              <a:t>Третье звено — не вызов модели вовсе, а человеческий гейт: черновик кладётся в очередь, и письмо уходит клиенту только после того, как человек его подтвердил или поправил.</a:t>
+              <a:t>Третье звено — человеческий гейт, не вызов модели: черновик кладётся в очередь, и письмо уходит клиенту только после того, как человек его подтвердил или поправил.</a:t>
             </a:r>
           </a:p>
           <a:p/>
@@ -4995,7 +4985,7 @@
           <a:lstStyle/>
           <a:p>
             <a:r>
-              <a:t>Минимальная запись этой цепочки — четыре строки кода, без деталей реализации самих вызовов. Здесь важны не детали синтаксиса, а четыре факта, которые из них видны.</a:t>
+              <a:t>Минимальная запись этой цепочки — четыре строки кода, без деталей реализации самих вызовов. Здесь важны четыре факта, которые из них видны, не детали синтаксиса.</a:t>
             </a:r>
           </a:p>
           <a:p/>
@@ -5007,13 +4997,13 @@
               <a:t>call_classify</a:t>
             </a:r>
             <a:r>
-              <a:t> возвращает метку, а не свободный текст, — иначе проверку на следующей строке невозможно было бы написать. Если бы classify возвращал произвольный текст, сравнение с разрешённым списком превратилось бы в нечёткое сопоставление, а не в точную проверку.</a:t>
+              <a:t> возвращает метку, не свободный текст, — иначе проверку на следующей строке невозможно было бы написать. Если бы classify возвращал произвольный текст, сравнение с разрешённым списком превратилось бы в нечёткое сопоставление, не в точную проверку.</a:t>
             </a:r>
           </a:p>
           <a:p/>
           <a:p>
             <a:r>
-              <a:t>Проверка метки стоит до второго вызова, а не после него, — иначе цепочка уже потратила бы второй, более дорогой вызов модели на заведомо плохой входной сигнал. Порядок строк здесь не случайный: проверка стоит именно до того, как написана строка с </a:t>
+              <a:t>Проверка метки стоит до второго вызова, не после него, — иначе цепочка уже потратила бы второй, более дорогой вызов модели на заведомо плохой входной сигнал. Порядок строк здесь не случайный: проверка стоит именно до того, как написана строка с </a:t>
             </a:r>
             <a:r>
               <a:rPr>
@@ -5034,13 +5024,13 @@
               <a:t>call_draft</a:t>
             </a:r>
             <a:r>
-              <a:t> получает на вход метку и извлечённый по ней контекст, а не одно голое письмо, — именно это и отличает второй шаг осмысленной цепочки от того же вызова без первого шага вовсе. Без метки draft не знает, какой фрагмент базы знаний релевантен, и придётся либо передавать весь объём документации, либо гадать.</a:t>
+              <a:t> получает на вход метку и извлечённый по ней контекст, не одно голое письмо, — именно это и отличает второй шаг осмысленной цепочки от того же вызова без первого шага вовсе. Без метки draft не знает, какой фрагмент базы знаний релевантен, и придётся либо передавать весь объём документации, либо гадать.</a:t>
             </a:r>
           </a:p>
           <a:p/>
           <a:p>
             <a:r>
-              <a:t>И последняя строка не отправляет ничего клиенту напрямую — последнее действие всей цепочки — положить черновик в очередь человека, а не вместо него. Строка-комментарий под кодом называет это прямо: письмо уходит клиенту только после действия человека в очереди.</a:t>
+              <a:t>И последняя строка не отправляет ничего клиенту напрямую — последнее действие всей цепочки — положить черновик в очередь человека, не вместо него. Строка-комментарий под кодом называет это прямо: письмо уходит клиенту только после действия человека в очереди.</a:t>
             </a:r>
           </a:p>
           <a:p/>
@@ -9414,7 +9404,7 @@
                 </a:solidFill>
                 <a:latin typeface="Arial"/>
               </a:rPr>
-              <a:t>Что, если письма, приходящие в один и тот же ящик, относятся не к одному классу обработки, а к принципиально разным — и единственный </a:t>
+              <a:t>Что, если письма, приходящие в один и тот же ящик, относятся к принципиально разным классам обработки, не к одному, — и единственный </a:t>
             </a:r>
             <a:r>
               <a:rPr sz="1500" b="1" i="0">
@@ -14518,7 +14508,7 @@
         </p:nvSpPr>
         <p:spPr>
           <a:xfrm>
-            <a:off x="502920" y="1095451"/>
+            <a:off x="502920" y="1126947"/>
             <a:ext cx="11183112" cy="1871852"/>
           </a:xfrm>
           <a:prstGeom prst="roundRect">
@@ -14566,7 +14556,7 @@
         </p:nvSpPr>
         <p:spPr>
           <a:xfrm>
-            <a:off x="685800" y="1278331"/>
+            <a:off x="685800" y="1309827"/>
             <a:ext cx="610910" cy="282067"/>
           </a:xfrm>
           <a:prstGeom prst="rect">
@@ -14608,7 +14598,7 @@
         </p:nvSpPr>
         <p:spPr>
           <a:xfrm>
-            <a:off x="1443014" y="1278331"/>
+            <a:off x="1443014" y="1309827"/>
             <a:ext cx="9913833" cy="282067"/>
           </a:xfrm>
           <a:prstGeom prst="rect">
@@ -14650,7 +14640,7 @@
         </p:nvSpPr>
         <p:spPr>
           <a:xfrm>
-            <a:off x="685800" y="1560398"/>
+            <a:off x="685800" y="1591894"/>
             <a:ext cx="610910" cy="347154"/>
           </a:xfrm>
           <a:prstGeom prst="rect">
@@ -14692,7 +14682,7 @@
         </p:nvSpPr>
         <p:spPr>
           <a:xfrm>
-            <a:off x="1443014" y="1560398"/>
+            <a:off x="1443014" y="1591894"/>
             <a:ext cx="9913833" cy="347154"/>
           </a:xfrm>
           <a:prstGeom prst="rect">
@@ -14734,7 +14724,7 @@
         </p:nvCxnSpPr>
         <p:spPr>
           <a:xfrm>
-            <a:off x="685800" y="1907552"/>
+            <a:off x="685800" y="1939048"/>
             <a:ext cx="10817352" cy="0"/>
           </a:xfrm>
           <a:prstGeom prst="line">
@@ -14769,7 +14759,7 @@
         </p:nvSpPr>
         <p:spPr>
           <a:xfrm>
-            <a:off x="685800" y="1907552"/>
+            <a:off x="685800" y="1939048"/>
             <a:ext cx="610910" cy="529717"/>
           </a:xfrm>
           <a:prstGeom prst="rect">
@@ -14811,7 +14801,7 @@
         </p:nvSpPr>
         <p:spPr>
           <a:xfrm>
-            <a:off x="1443014" y="1907552"/>
+            <a:off x="1443014" y="1939048"/>
             <a:ext cx="9913833" cy="529717"/>
           </a:xfrm>
           <a:prstGeom prst="rect">
@@ -14853,7 +14843,7 @@
         </p:nvCxnSpPr>
         <p:spPr>
           <a:xfrm>
-            <a:off x="685800" y="2437269"/>
+            <a:off x="685800" y="2468765"/>
             <a:ext cx="10817352" cy="0"/>
           </a:xfrm>
           <a:prstGeom prst="line">
@@ -14888,7 +14878,7 @@
         </p:nvSpPr>
         <p:spPr>
           <a:xfrm>
-            <a:off x="685800" y="2437269"/>
+            <a:off x="685800" y="2468765"/>
             <a:ext cx="610910" cy="347154"/>
           </a:xfrm>
           <a:prstGeom prst="rect">
@@ -14930,7 +14920,7 @@
         </p:nvSpPr>
         <p:spPr>
           <a:xfrm>
-            <a:off x="1443014" y="2437269"/>
+            <a:off x="1443014" y="2468765"/>
             <a:ext cx="9913833" cy="347154"/>
           </a:xfrm>
           <a:prstGeom prst="rect">
@@ -14972,8 +14962,8 @@
         </p:nvSpPr>
         <p:spPr>
           <a:xfrm>
-            <a:off x="502920" y="3512134"/>
-            <a:ext cx="82296" cy="982980"/>
+            <a:off x="502920" y="3622370"/>
+            <a:ext cx="82296" cy="746760"/>
           </a:xfrm>
           <a:prstGeom prst="roundRect">
             <a:avLst>
@@ -15018,8 +15008,8 @@
         </p:nvSpPr>
         <p:spPr>
           <a:xfrm>
-            <a:off x="859536" y="3640150"/>
-            <a:ext cx="10643616" cy="726948"/>
+            <a:off x="859536" y="3750386"/>
+            <a:ext cx="10643616" cy="490727"/>
           </a:xfrm>
           <a:prstGeom prst="rect">
             <a:avLst/>
@@ -15047,7 +15037,7 @@
                 </a:solidFill>
                 <a:latin typeface="Arial"/>
               </a:rPr>
-              <a:t>Anthropic, Building Effective Agents (2024): «найди простейшее решение» — начинай с прямых вызовов API, бери фреймворк только тогда, когда он доказанно снимает реальную сложность, а не по умолчанию.</a:t>
+              <a:t>Anthropic, Building Effective Agents (2024): «найди простейшее решение» — начинай с прямых вызовов API, бери фреймворк только тогда, когда он доказанно снимает реальную сложность, не по умолчанию.</a:t>
             </a:r>
           </a:p>
         </p:txBody>
@@ -15060,7 +15050,7 @@
         </p:nvSpPr>
         <p:spPr>
           <a:xfrm>
-            <a:off x="502920" y="5039944"/>
+            <a:off x="502920" y="4992700"/>
             <a:ext cx="11183112" cy="1059561"/>
           </a:xfrm>
           <a:prstGeom prst="roundRect">
@@ -15108,7 +15098,7 @@
         </p:nvSpPr>
         <p:spPr>
           <a:xfrm>
-            <a:off x="722376" y="5167960"/>
+            <a:off x="722376" y="5120716"/>
             <a:ext cx="10634472" cy="803528"/>
           </a:xfrm>
           <a:prstGeom prst="rect">
@@ -15137,7 +15127,7 @@
                 </a:solidFill>
                 <a:latin typeface="Arial"/>
               </a:rPr>
-              <a:t>Что делать, если входы, приходящие в одну и ту же точку, относятся не к одной группе обработки, а к принципиально разным — и единственный фиксированный порядок шагов не может одинаково хорошо подойти им всем?</a:t>
+              <a:t>Что делать, если входы, приходящие в одну и ту же точку, относятся к принципиально разным группам обработки, не к одной, — и единственный фиксированный порядок шагов не может одинаково хорошо подойти им всем?</a:t>
             </a:r>
           </a:p>
         </p:txBody>
@@ -19123,7 +19113,7 @@
                 </a:solidFill>
                 <a:latin typeface="Arial"/>
               </a:rPr>
-              <a:t>использовать decision-модель — вызов, который возвращает типизированное значение, а не текст</a:t>
+              <a:t>использовать decision-модель — вызов, который возвращает типизированное значение, не текст</a:t>
             </a:r>
           </a:p>
         </p:txBody>
@@ -20169,7 +20159,7 @@
                 </a:solidFill>
                 <a:latin typeface="Arial"/>
               </a:rPr>
-              <a:t>отправляется туда как вход, в ответ приходит не абзац, а значение — уверенность от 0 до 1,</a:t>
+              <a:t>отправляется туда как вход, в ответ приходит значение, не абзац, — уверенность от 0 до 1,</a:t>
             </a:r>
           </a:p>
           <a:p>
@@ -20443,7 +20433,7 @@
                 </a:solidFill>
                 <a:latin typeface="Arial"/>
               </a:rPr>
-              <a:t>Объяснения не было и не могло быть — формат ответа Jev — число, а не причина (Simon</a:t>
+              <a:t>Объяснения не было и не могло быть — формат ответа Jev — число, не причина (Simon</a:t>
             </a:r>
           </a:p>
           <a:p>
@@ -20959,7 +20949,7 @@
                 </a:solidFill>
                 <a:latin typeface="Arial"/>
               </a:rPr>
-              <a:t>декларации проверить. Общее с почтовым маршрутизатором — не область применения, а</a:t>
+              <a:t>декларации проверить. Общее с почтовым маршрутизатором — внутреннее устройство, не область</a:t>
             </a:r>
           </a:p>
           <a:p>
@@ -20978,7 +20968,7 @@
                 </a:solidFill>
                 <a:latin typeface="Arial"/>
               </a:rPr>
-              <a:t>внутреннее устройство: классификатор выбрал признак, который легко измерить, вместо</a:t>
+              <a:t>применения: классификатор выбрал признак, который легко измерить, вместо</a:t>
             </a:r>
           </a:p>
           <a:p>
@@ -22894,7 +22884,7 @@
                 </a:solidFill>
                 <a:latin typeface="Arial"/>
               </a:rPr>
-              <a:t>Прошлые расходы — замена потребности, а не её измерение</a:t>
+              <a:t>Прошлые расходы — замена потребности, не её измерение</a:t>
             </a:r>
           </a:p>
         </p:txBody>
@@ -22907,12 +22897,100 @@
         </p:nvSpPr>
         <p:spPr>
           <a:xfrm>
-            <a:off x="502920" y="1458417"/>
-            <a:ext cx="11183112" cy="3090925"/>
+            <a:off x="502920" y="1382606"/>
+            <a:ext cx="82296" cy="746760"/>
           </a:xfrm>
           <a:prstGeom prst="roundRect">
             <a:avLst>
-              <a:gd name="adj" fmla="val 9861"/>
+              <a:gd name="adj" fmla="val 50000"/>
+            </a:avLst>
+          </a:prstGeom>
+          <a:solidFill>
+            <a:srgbClr val="F0AB00"/>
+          </a:solidFill>
+          <a:ln>
+            <a:noFill/>
+          </a:ln>
+          <a:effectLst/>
+        </p:spPr>
+        <p:style>
+          <a:lnRef idx="1">
+            <a:schemeClr val="accent1"/>
+          </a:lnRef>
+          <a:fillRef idx="3">
+            <a:schemeClr val="accent1"/>
+          </a:fillRef>
+          <a:effectRef idx="2">
+            <a:schemeClr val="accent1"/>
+          </a:effectRef>
+          <a:fontRef idx="minor">
+            <a:schemeClr val="lt1"/>
+          </a:fontRef>
+        </p:style>
+        <p:txBody>
+          <a:bodyPr rtlCol="0" anchor="ctr"/>
+          <a:lstStyle/>
+          <a:p>
+            <a:pPr algn="ctr"/>
+          </a:p>
+        </p:txBody>
+      </p:sp>
+      <p:sp>
+        <p:nvSpPr>
+          <p:cNvPr id="4" name="TextBox 3"/>
+          <p:cNvSpPr txBox="1"/>
+          <p:nvPr/>
+        </p:nvSpPr>
+        <p:spPr>
+          <a:xfrm>
+            <a:off x="859536" y="1510622"/>
+            <a:ext cx="10643616" cy="490727"/>
+          </a:xfrm>
+          <a:prstGeom prst="rect">
+            <a:avLst/>
+          </a:prstGeom>
+          <a:noFill/>
+        </p:spPr>
+        <p:txBody>
+          <a:bodyPr wrap="square" lIns="0" rIns="0" tIns="0" bIns="0" anchor="ctr">
+            <a:spAutoFit/>
+          </a:bodyPr>
+          <a:lstStyle/>
+          <a:p>
+            <a:pPr algn="l">
+              <a:lnSpc>
+                <a:spcPts val="1860"/>
+              </a:lnSpc>
+              <a:spcAft>
+                <a:spcPts val="300"/>
+              </a:spcAft>
+            </a:pPr>
+            <a:r>
+              <a:rPr sz="1500" b="1" i="0">
+                <a:solidFill>
+                  <a:srgbClr val="141B2E"/>
+                </a:solidFill>
+                <a:latin typeface="Arial"/>
+              </a:rPr>
+              <a:t>Все четыре кандидата измеримы без нового сбора данных; различие — в том, что обнаружило исследование.</a:t>
+            </a:r>
+          </a:p>
+        </p:txBody>
+      </p:sp>
+      <p:sp>
+        <p:nvSpPr>
+          <p:cNvPr id="5" name="Rounded Rectangle 4"/>
+          <p:cNvSpPr/>
+          <p:nvPr/>
+        </p:nvSpPr>
+        <p:spPr>
+          <a:xfrm>
+            <a:off x="502920" y="2451015"/>
+            <a:ext cx="11183112" cy="2401569"/>
+          </a:xfrm>
+          <a:prstGeom prst="roundRect">
+            <a:avLst>
+              <a:gd name="adj" fmla="val 12691"/>
             </a:avLst>
           </a:prstGeom>
           <a:solidFill>
@@ -22949,14 +23027,14 @@
       </p:sp>
       <p:sp>
         <p:nvSpPr>
-          <p:cNvPr id="4" name="TextBox 3"/>
-          <p:cNvSpPr txBox="1"/>
-          <p:nvPr/>
-        </p:nvSpPr>
-        <p:spPr>
-          <a:xfrm>
-            <a:off x="685800" y="1641297"/>
-            <a:ext cx="3266335" cy="971423"/>
+          <p:cNvPr id="6" name="TextBox 5"/>
+          <p:cNvSpPr txBox="1"/>
+          <p:nvPr/>
+        </p:nvSpPr>
+        <p:spPr>
+          <a:xfrm>
+            <a:off x="685800" y="2633895"/>
+            <a:ext cx="3386760" cy="282067"/>
           </a:xfrm>
           <a:prstGeom prst="rect">
             <a:avLst/>
@@ -22991,14 +23069,14 @@
       </p:sp>
       <p:sp>
         <p:nvSpPr>
-          <p:cNvPr id="5" name="TextBox 4"/>
-          <p:cNvSpPr txBox="1"/>
-          <p:nvPr/>
-        </p:nvSpPr>
-        <p:spPr>
-          <a:xfrm>
-            <a:off x="4098439" y="1641297"/>
-            <a:ext cx="879628" cy="971423"/>
+          <p:cNvPr id="7" name="TextBox 6"/>
+          <p:cNvSpPr txBox="1"/>
+          <p:nvPr/>
+        </p:nvSpPr>
+        <p:spPr>
+          <a:xfrm>
+            <a:off x="4218864" y="2633895"/>
+            <a:ext cx="7137983" cy="282067"/>
           </a:xfrm>
           <a:prstGeom prst="rect">
             <a:avLst/>
@@ -23026,48 +23104,6 @@
                 </a:solidFill>
                 <a:latin typeface="Arial"/>
               </a:rPr>
-              <a:t>ИЗМЕРИМ БЕЗ НОВОГО СБОРА ДАННЫХ</a:t>
-            </a:r>
-          </a:p>
-        </p:txBody>
-      </p:sp>
-      <p:sp>
-        <p:nvSpPr>
-          <p:cNvPr id="6" name="TextBox 5"/>
-          <p:cNvSpPr txBox="1"/>
-          <p:nvPr/>
-        </p:nvSpPr>
-        <p:spPr>
-          <a:xfrm>
-            <a:off x="5124372" y="1641297"/>
-            <a:ext cx="6232475" cy="971423"/>
-          </a:xfrm>
-          <a:prstGeom prst="rect">
-            <a:avLst/>
-          </a:prstGeom>
-          <a:noFill/>
-        </p:spPr>
-        <p:txBody>
-          <a:bodyPr wrap="square" lIns="0" rIns="0" tIns="0" bIns="0" anchor="t">
-            <a:spAutoFit/>
-          </a:bodyPr>
-          <a:lstStyle/>
-          <a:p>
-            <a:pPr algn="l">
-              <a:lnSpc>
-                <a:spcPts val="1265"/>
-              </a:lnSpc>
-              <a:spcAft>
-                <a:spcPts val="0"/>
-              </a:spcAft>
-            </a:pPr>
-            <a:r>
-              <a:rPr sz="1150" b="1" i="0">
-                <a:solidFill>
-                  <a:srgbClr val="6B7685"/>
-                </a:solidFill>
-                <a:latin typeface="Arial"/>
-              </a:rPr>
               <a:t>ЧТО ОБНАРУЖИЛО ИССЛЕДОВАНИЕ</a:t>
             </a:r>
           </a:p>
@@ -23075,14 +23111,14 @@
       </p:sp>
       <p:sp>
         <p:nvSpPr>
-          <p:cNvPr id="7" name="TextBox 6"/>
-          <p:cNvSpPr txBox="1"/>
-          <p:nvPr/>
-        </p:nvSpPr>
-        <p:spPr>
-          <a:xfrm>
-            <a:off x="685800" y="2612720"/>
-            <a:ext cx="3266335" cy="347154"/>
+          <p:cNvPr id="8" name="TextBox 7"/>
+          <p:cNvSpPr txBox="1"/>
+          <p:nvPr/>
+        </p:nvSpPr>
+        <p:spPr>
+          <a:xfrm>
+            <a:off x="685800" y="2915962"/>
+            <a:ext cx="3386760" cy="347154"/>
           </a:xfrm>
           <a:prstGeom prst="rect">
             <a:avLst/>
@@ -23117,56 +23153,14 @@
       </p:sp>
       <p:sp>
         <p:nvSpPr>
-          <p:cNvPr id="8" name="TextBox 7"/>
-          <p:cNvSpPr txBox="1"/>
-          <p:nvPr/>
-        </p:nvSpPr>
-        <p:spPr>
-          <a:xfrm>
-            <a:off x="4098439" y="2612720"/>
-            <a:ext cx="879628" cy="347154"/>
-          </a:xfrm>
-          <a:prstGeom prst="rect">
-            <a:avLst/>
-          </a:prstGeom>
-          <a:noFill/>
-        </p:spPr>
-        <p:txBody>
-          <a:bodyPr wrap="square" lIns="0" rIns="0" tIns="0" bIns="0" anchor="ctr">
-            <a:spAutoFit/>
-          </a:bodyPr>
-          <a:lstStyle/>
-          <a:p>
-            <a:pPr algn="l">
-              <a:lnSpc>
-                <a:spcPts val="1437"/>
-              </a:lnSpc>
-              <a:spcAft>
-                <a:spcPts val="0"/>
-              </a:spcAft>
-            </a:pPr>
-            <a:r>
-              <a:rPr sz="1250" b="0" i="0">
-                <a:solidFill>
-                  <a:srgbClr val="141B2E"/>
-                </a:solidFill>
-                <a:latin typeface="Arial"/>
-              </a:rPr>
-              <a:t>да</a:t>
-            </a:r>
-          </a:p>
-        </p:txBody>
-      </p:sp>
-      <p:sp>
-        <p:nvSpPr>
           <p:cNvPr id="9" name="TextBox 8"/>
           <p:cNvSpPr txBox="1"/>
           <p:nvPr/>
         </p:nvSpPr>
         <p:spPr>
           <a:xfrm>
-            <a:off x="5124372" y="2612720"/>
-            <a:ext cx="6232475" cy="347154"/>
+            <a:off x="4218864" y="2915962"/>
+            <a:ext cx="7137983" cy="347154"/>
           </a:xfrm>
           <a:prstGeom prst="rect">
             <a:avLst/>
@@ -23207,7 +23201,7 @@
         </p:nvCxnSpPr>
         <p:spPr>
           <a:xfrm>
-            <a:off x="685800" y="2959874"/>
+            <a:off x="685800" y="3263116"/>
             <a:ext cx="10817352" cy="0"/>
           </a:xfrm>
           <a:prstGeom prst="line">
@@ -23242,7 +23236,7 @@
         </p:nvSpPr>
         <p:spPr>
           <a:xfrm>
-            <a:off x="566928" y="2959874"/>
+            <a:off x="566928" y="3263116"/>
             <a:ext cx="11055096" cy="712279"/>
           </a:xfrm>
           <a:prstGeom prst="roundRect">
@@ -23288,8 +23282,8 @@
         </p:nvSpPr>
         <p:spPr>
           <a:xfrm>
-            <a:off x="685800" y="2959874"/>
-            <a:ext cx="3266335" cy="712279"/>
+            <a:off x="685800" y="3263116"/>
+            <a:ext cx="3386760" cy="712279"/>
           </a:xfrm>
           <a:prstGeom prst="rect">
             <a:avLst/>
@@ -23330,50 +23324,8 @@
         </p:nvSpPr>
         <p:spPr>
           <a:xfrm>
-            <a:off x="4098439" y="2959874"/>
-            <a:ext cx="879628" cy="712279"/>
-          </a:xfrm>
-          <a:prstGeom prst="rect">
-            <a:avLst/>
-          </a:prstGeom>
-          <a:noFill/>
-        </p:spPr>
-        <p:txBody>
-          <a:bodyPr wrap="square" lIns="0" rIns="0" tIns="0" bIns="0" anchor="ctr">
-            <a:spAutoFit/>
-          </a:bodyPr>
-          <a:lstStyle/>
-          <a:p>
-            <a:pPr algn="l">
-              <a:lnSpc>
-                <a:spcPts val="1437"/>
-              </a:lnSpc>
-              <a:spcAft>
-                <a:spcPts val="0"/>
-              </a:spcAft>
-            </a:pPr>
-            <a:r>
-              <a:rPr sz="1250" b="1" i="0">
-                <a:solidFill>
-                  <a:srgbClr val="141B2E"/>
-                </a:solidFill>
-                <a:latin typeface="Arial"/>
-              </a:rPr>
-              <a:t>да</a:t>
-            </a:r>
-          </a:p>
-        </p:txBody>
-      </p:sp>
-      <p:sp>
-        <p:nvSpPr>
-          <p:cNvPr id="14" name="TextBox 13"/>
-          <p:cNvSpPr txBox="1"/>
-          <p:nvPr/>
-        </p:nvSpPr>
-        <p:spPr>
-          <a:xfrm>
-            <a:off x="5124372" y="2959874"/>
-            <a:ext cx="6232475" cy="712279"/>
+            <a:off x="4218864" y="3263116"/>
+            <a:ext cx="7137983" cy="712279"/>
           </a:xfrm>
           <a:prstGeom prst="rect">
             <a:avLst/>
@@ -23408,13 +23360,13 @@
       </p:sp>
       <p:cxnSp>
         <p:nvCxnSpPr>
-          <p:cNvPr id="15" name="Connector 14"/>
+          <p:cNvPr id="14" name="Connector 13"/>
           <p:cNvCxnSpPr/>
           <p:nvPr/>
         </p:nvCxnSpPr>
         <p:spPr>
           <a:xfrm>
-            <a:off x="685800" y="3672154"/>
+            <a:off x="685800" y="3975396"/>
             <a:ext cx="10817352" cy="0"/>
           </a:xfrm>
           <a:prstGeom prst="line">
@@ -23443,98 +23395,56 @@
       </p:cxnSp>
       <p:sp>
         <p:nvSpPr>
+          <p:cNvPr id="15" name="TextBox 14"/>
+          <p:cNvSpPr txBox="1"/>
+          <p:nvPr/>
+        </p:nvSpPr>
+        <p:spPr>
+          <a:xfrm>
+            <a:off x="685800" y="3975396"/>
+            <a:ext cx="3386760" cy="347154"/>
+          </a:xfrm>
+          <a:prstGeom prst="rect">
+            <a:avLst/>
+          </a:prstGeom>
+          <a:noFill/>
+        </p:spPr>
+        <p:txBody>
+          <a:bodyPr wrap="square" lIns="0" rIns="0" tIns="0" bIns="0" anchor="ctr">
+            <a:spAutoFit/>
+          </a:bodyPr>
+          <a:lstStyle/>
+          <a:p>
+            <a:pPr algn="l">
+              <a:lnSpc>
+                <a:spcPts val="1437"/>
+              </a:lnSpc>
+              <a:spcAft>
+                <a:spcPts val="0"/>
+              </a:spcAft>
+            </a:pPr>
+            <a:r>
+              <a:rPr sz="1250" b="0" i="0">
+                <a:solidFill>
+                  <a:srgbClr val="141B2E"/>
+                </a:solidFill>
+                <a:latin typeface="Arial"/>
+              </a:rPr>
+              <a:t>количество выписанных препаратов</a:t>
+            </a:r>
+          </a:p>
+        </p:txBody>
+      </p:sp>
+      <p:sp>
+        <p:nvSpPr>
           <p:cNvPr id="16" name="TextBox 15"/>
           <p:cNvSpPr txBox="1"/>
           <p:nvPr/>
         </p:nvSpPr>
         <p:spPr>
           <a:xfrm>
-            <a:off x="685800" y="3672154"/>
-            <a:ext cx="3266335" cy="347154"/>
-          </a:xfrm>
-          <a:prstGeom prst="rect">
-            <a:avLst/>
-          </a:prstGeom>
-          <a:noFill/>
-        </p:spPr>
-        <p:txBody>
-          <a:bodyPr wrap="square" lIns="0" rIns="0" tIns="0" bIns="0" anchor="ctr">
-            <a:spAutoFit/>
-          </a:bodyPr>
-          <a:lstStyle/>
-          <a:p>
-            <a:pPr algn="l">
-              <a:lnSpc>
-                <a:spcPts val="1437"/>
-              </a:lnSpc>
-              <a:spcAft>
-                <a:spcPts val="0"/>
-              </a:spcAft>
-            </a:pPr>
-            <a:r>
-              <a:rPr sz="1250" b="0" i="0">
-                <a:solidFill>
-                  <a:srgbClr val="141B2E"/>
-                </a:solidFill>
-                <a:latin typeface="Arial"/>
-              </a:rPr>
-              <a:t>количество выписанных препаратов</a:t>
-            </a:r>
-          </a:p>
-        </p:txBody>
-      </p:sp>
-      <p:sp>
-        <p:nvSpPr>
-          <p:cNvPr id="17" name="TextBox 16"/>
-          <p:cNvSpPr txBox="1"/>
-          <p:nvPr/>
-        </p:nvSpPr>
-        <p:spPr>
-          <a:xfrm>
-            <a:off x="4098439" y="3672154"/>
-            <a:ext cx="879628" cy="347154"/>
-          </a:xfrm>
-          <a:prstGeom prst="rect">
-            <a:avLst/>
-          </a:prstGeom>
-          <a:noFill/>
-        </p:spPr>
-        <p:txBody>
-          <a:bodyPr wrap="square" lIns="0" rIns="0" tIns="0" bIns="0" anchor="ctr">
-            <a:spAutoFit/>
-          </a:bodyPr>
-          <a:lstStyle/>
-          <a:p>
-            <a:pPr algn="l">
-              <a:lnSpc>
-                <a:spcPts val="1437"/>
-              </a:lnSpc>
-              <a:spcAft>
-                <a:spcPts val="0"/>
-              </a:spcAft>
-            </a:pPr>
-            <a:r>
-              <a:rPr sz="1250" b="0" i="0">
-                <a:solidFill>
-                  <a:srgbClr val="141B2E"/>
-                </a:solidFill>
-                <a:latin typeface="Arial"/>
-              </a:rPr>
-              <a:t>да</a:t>
-            </a:r>
-          </a:p>
-        </p:txBody>
-      </p:sp>
-      <p:sp>
-        <p:nvSpPr>
-          <p:cNvPr id="18" name="TextBox 17"/>
-          <p:cNvSpPr txBox="1"/>
-          <p:nvPr/>
-        </p:nvSpPr>
-        <p:spPr>
-          <a:xfrm>
-            <a:off x="5124372" y="3672154"/>
-            <a:ext cx="6232475" cy="347154"/>
+            <a:off x="4218864" y="3975396"/>
+            <a:ext cx="7137983" cy="347154"/>
           </a:xfrm>
           <a:prstGeom prst="rect">
             <a:avLst/>
@@ -23569,13 +23479,13 @@
       </p:sp>
       <p:cxnSp>
         <p:nvCxnSpPr>
-          <p:cNvPr id="19" name="Connector 18"/>
+          <p:cNvPr id="17" name="Connector 16"/>
           <p:cNvCxnSpPr/>
           <p:nvPr/>
         </p:nvCxnSpPr>
         <p:spPr>
           <a:xfrm>
-            <a:off x="685800" y="4019308"/>
+            <a:off x="685800" y="4322550"/>
             <a:ext cx="10817352" cy="0"/>
           </a:xfrm>
           <a:prstGeom prst="line">
@@ -23604,14 +23514,14 @@
       </p:cxnSp>
       <p:sp>
         <p:nvSpPr>
-          <p:cNvPr id="20" name="TextBox 19"/>
-          <p:cNvSpPr txBox="1"/>
-          <p:nvPr/>
-        </p:nvSpPr>
-        <p:spPr>
-          <a:xfrm>
-            <a:off x="685800" y="4019308"/>
-            <a:ext cx="3266335" cy="347154"/>
+          <p:cNvPr id="18" name="TextBox 17"/>
+          <p:cNvSpPr txBox="1"/>
+          <p:nvPr/>
+        </p:nvSpPr>
+        <p:spPr>
+          <a:xfrm>
+            <a:off x="685800" y="4322550"/>
+            <a:ext cx="3386760" cy="347154"/>
           </a:xfrm>
           <a:prstGeom prst="rect">
             <a:avLst/>
@@ -23646,14 +23556,14 @@
       </p:sp>
       <p:sp>
         <p:nvSpPr>
-          <p:cNvPr id="21" name="TextBox 20"/>
-          <p:cNvSpPr txBox="1"/>
-          <p:nvPr/>
-        </p:nvSpPr>
-        <p:spPr>
-          <a:xfrm>
-            <a:off x="4098439" y="4019308"/>
-            <a:ext cx="879628" cy="347154"/>
+          <p:cNvPr id="19" name="TextBox 18"/>
+          <p:cNvSpPr txBox="1"/>
+          <p:nvPr/>
+        </p:nvSpPr>
+        <p:spPr>
+          <a:xfrm>
+            <a:off x="4218864" y="4322550"/>
+            <a:ext cx="7137983" cy="347154"/>
           </a:xfrm>
           <a:prstGeom prst="rect">
             <a:avLst/>
@@ -23681,48 +23591,6 @@
                 </a:solidFill>
                 <a:latin typeface="Arial"/>
               </a:rPr>
-              <a:t>да</a:t>
-            </a:r>
-          </a:p>
-        </p:txBody>
-      </p:sp>
-      <p:sp>
-        <p:nvSpPr>
-          <p:cNvPr id="22" name="TextBox 21"/>
-          <p:cNvSpPr txBox="1"/>
-          <p:nvPr/>
-        </p:nvSpPr>
-        <p:spPr>
-          <a:xfrm>
-            <a:off x="5124372" y="4019308"/>
-            <a:ext cx="6232475" cy="347154"/>
-          </a:xfrm>
-          <a:prstGeom prst="rect">
-            <a:avLst/>
-          </a:prstGeom>
-          <a:noFill/>
-        </p:spPr>
-        <p:txBody>
-          <a:bodyPr wrap="square" lIns="0" rIns="0" tIns="0" bIns="0" anchor="ctr">
-            <a:spAutoFit/>
-          </a:bodyPr>
-          <a:lstStyle/>
-          <a:p>
-            <a:pPr algn="l">
-              <a:lnSpc>
-                <a:spcPts val="1437"/>
-              </a:lnSpc>
-              <a:spcAft>
-                <a:spcPts val="0"/>
-              </a:spcAft>
-            </a:pPr>
-            <a:r>
-              <a:rPr sz="1250" b="0" i="0">
-                <a:solidFill>
-                  <a:srgbClr val="141B2E"/>
-                </a:solidFill>
-                <a:latin typeface="Arial"/>
-              </a:rPr>
               <a:t>не тот признак</a:t>
             </a:r>
           </a:p>
@@ -23730,13 +23598,13 @@
       </p:sp>
       <p:sp>
         <p:nvSpPr>
-          <p:cNvPr id="23" name="Rounded Rectangle 22"/>
+          <p:cNvPr id="20" name="Rounded Rectangle 19"/>
           <p:cNvSpPr/>
           <p:nvPr/>
         </p:nvSpPr>
         <p:spPr>
           <a:xfrm>
-            <a:off x="502920" y="5060518"/>
+            <a:off x="502920" y="5174234"/>
             <a:ext cx="82296" cy="1059180"/>
           </a:xfrm>
           <a:prstGeom prst="roundRect">
@@ -23776,13 +23644,13 @@
       </p:sp>
       <p:sp>
         <p:nvSpPr>
-          <p:cNvPr id="24" name="TextBox 23"/>
-          <p:cNvSpPr txBox="1"/>
-          <p:nvPr/>
-        </p:nvSpPr>
-        <p:spPr>
-          <a:xfrm>
-            <a:off x="859536" y="5188534"/>
+          <p:cNvPr id="21" name="TextBox 20"/>
+          <p:cNvSpPr txBox="1"/>
+          <p:nvPr/>
+        </p:nvSpPr>
+        <p:spPr>
+          <a:xfrm>
+            <a:off x="859536" y="5302250"/>
             <a:ext cx="10643616" cy="803148"/>
           </a:xfrm>
           <a:prstGeom prst="rect">
@@ -23856,7 +23724,7 @@
       </p:sp>
       <p:sp>
         <p:nvSpPr>
-          <p:cNvPr id="25" name="TextBox 24"/>
+          <p:cNvPr id="22" name="TextBox 21"/>
           <p:cNvSpPr txBox="1"/>
           <p:nvPr/>
         </p:nvSpPr>
@@ -25056,7 +24924,7 @@
                 </a:solidFill>
                 <a:latin typeface="Arial"/>
               </a:rPr>
-              <a:t>Автоматизация и искусственный интеллект — разные вещи: словами их путают чаще, чем в поведении систем за ними. Этот вопрос не закрывается ответом «нигде» — он переезжает на уровень выше: не «нужен ли здесь ИИ», а какому конкретно шагу он нужен, а какому нет.</a:t>
+              <a:t>Автоматизация и искусственный интеллект — разные вещи: словами их путают чаще, чем в поведении систем за ними. Этот вопрос не закрывается ответом «нигде» — он переезжает на уровень выше. Вопрос был «нужен ли здесь ИИ» — становится «какому конкретно шагу он нужен, и какому нет».</a:t>
             </a:r>
           </a:p>
         </p:txBody>
@@ -26183,7 +26051,7 @@
         </p:nvSpPr>
         <p:spPr>
           <a:xfrm>
-            <a:off x="502920" y="1880412"/>
+            <a:off x="502920" y="1949348"/>
             <a:ext cx="82296" cy="1059180"/>
           </a:xfrm>
           <a:prstGeom prst="roundRect">
@@ -26229,7 +26097,7 @@
         </p:nvSpPr>
         <p:spPr>
           <a:xfrm>
-            <a:off x="859536" y="2008428"/>
+            <a:off x="859536" y="2077364"/>
             <a:ext cx="10643616" cy="803148"/>
           </a:xfrm>
           <a:prstGeom prst="rect">
@@ -26318,12 +26186,12 @@
         </p:nvSpPr>
         <p:spPr>
           <a:xfrm>
-            <a:off x="502920" y="3607104"/>
-            <a:ext cx="11183112" cy="1879599"/>
+            <a:off x="502920" y="3676040"/>
+            <a:ext cx="11183112" cy="1707261"/>
           </a:xfrm>
           <a:prstGeom prst="roundRect">
             <a:avLst>
-              <a:gd name="adj" fmla="val 16216"/>
+              <a:gd name="adj" fmla="val 17853"/>
             </a:avLst>
           </a:prstGeom>
           <a:solidFill>
@@ -26366,8 +26234,8 @@
         </p:nvSpPr>
         <p:spPr>
           <a:xfrm>
-            <a:off x="685800" y="3789984"/>
-            <a:ext cx="610910" cy="454405"/>
+            <a:off x="685800" y="3858920"/>
+            <a:ext cx="610910" cy="282067"/>
           </a:xfrm>
           <a:prstGeom prst="rect">
             <a:avLst/>
@@ -26408,8 +26276,8 @@
         </p:nvSpPr>
         <p:spPr>
           <a:xfrm>
-            <a:off x="1443014" y="3789984"/>
-            <a:ext cx="2763277" cy="454405"/>
+            <a:off x="1443014" y="3858920"/>
+            <a:ext cx="9913833" cy="282067"/>
           </a:xfrm>
           <a:prstGeom prst="rect">
             <a:avLst/>
@@ -26437,7 +26305,7 @@
                 </a:solidFill>
                 <a:latin typeface="Arial"/>
               </a:rPr>
-              <a:t>ЧТО ОПТИМИЗИРОВАЛ АЛГОРИТМ</a:t>
+              <a:t>МЕХАНИЗМ ПОДМЕНЫ</a:t>
             </a:r>
           </a:p>
         </p:txBody>
@@ -26450,36 +26318,36 @@
         </p:nvSpPr>
         <p:spPr>
           <a:xfrm>
-            <a:off x="4352596" y="3789984"/>
-            <a:ext cx="7004251" cy="454405"/>
-          </a:xfrm>
-          <a:prstGeom prst="rect">
-            <a:avLst/>
-          </a:prstGeom>
-          <a:noFill/>
-        </p:spPr>
-        <p:txBody>
-          <a:bodyPr wrap="square" lIns="0" rIns="0" tIns="0" bIns="0" anchor="t">
-            <a:spAutoFit/>
-          </a:bodyPr>
-          <a:lstStyle/>
-          <a:p>
-            <a:pPr algn="l">
-              <a:lnSpc>
-                <a:spcPts val="1265"/>
-              </a:lnSpc>
-              <a:spcAft>
-                <a:spcPts val="0"/>
-              </a:spcAft>
-            </a:pPr>
-            <a:r>
-              <a:rPr sz="1150" b="1" i="0">
-                <a:solidFill>
-                  <a:srgbClr val="6B7685"/>
-                </a:solidFill>
-                <a:latin typeface="Arial"/>
-              </a:rPr>
-              <a:t>ЧЕРЕЗ ЧТО ПОДМЕНА УДАРИЛА ПО РАСЕ</a:t>
+            <a:off x="685800" y="4140987"/>
+            <a:ext cx="610910" cy="529717"/>
+          </a:xfrm>
+          <a:prstGeom prst="rect">
+            <a:avLst/>
+          </a:prstGeom>
+          <a:noFill/>
+        </p:spPr>
+        <p:txBody>
+          <a:bodyPr wrap="square" lIns="0" rIns="0" tIns="0" bIns="0" anchor="ctr">
+            <a:spAutoFit/>
+          </a:bodyPr>
+          <a:lstStyle/>
+          <a:p>
+            <a:pPr algn="l">
+              <a:lnSpc>
+                <a:spcPts val="1437"/>
+              </a:lnSpc>
+              <a:spcAft>
+                <a:spcPts val="0"/>
+              </a:spcAft>
+            </a:pPr>
+            <a:r>
+              <a:rPr sz="1250" b="0" i="0">
+                <a:solidFill>
+                  <a:srgbClr val="141B2E"/>
+                </a:solidFill>
+                <a:latin typeface="Arial"/>
+              </a:rPr>
+              <a:t>B — Optum</a:t>
             </a:r>
           </a:p>
         </p:txBody>
@@ -26492,8 +26360,8 @@
         </p:nvSpPr>
         <p:spPr>
           <a:xfrm>
-            <a:off x="685800" y="4244390"/>
-            <a:ext cx="610910" cy="529717"/>
+            <a:off x="1443014" y="4140987"/>
+            <a:ext cx="9913833" cy="529717"/>
           </a:xfrm>
           <a:prstGeom prst="rect">
             <a:avLst/>
@@ -26521,104 +26389,20 @@
                 </a:solidFill>
                 <a:latin typeface="Arial"/>
               </a:rPr>
-              <a:t>B — Optum</a:t>
-            </a:r>
-          </a:p>
-        </p:txBody>
-      </p:sp>
-      <p:sp>
-        <p:nvSpPr>
-          <p:cNvPr id="10" name="TextBox 9"/>
-          <p:cNvSpPr txBox="1"/>
-          <p:nvPr/>
-        </p:nvSpPr>
-        <p:spPr>
-          <a:xfrm>
-            <a:off x="1443014" y="4244390"/>
-            <a:ext cx="2763277" cy="529717"/>
-          </a:xfrm>
-          <a:prstGeom prst="rect">
-            <a:avLst/>
-          </a:prstGeom>
-          <a:noFill/>
-        </p:spPr>
-        <p:txBody>
-          <a:bodyPr wrap="square" lIns="0" rIns="0" tIns="0" bIns="0" anchor="ctr">
-            <a:spAutoFit/>
-          </a:bodyPr>
-          <a:lstStyle/>
-          <a:p>
-            <a:pPr algn="l">
-              <a:lnSpc>
-                <a:spcPts val="1437"/>
-              </a:lnSpc>
-              <a:spcAft>
-                <a:spcPts val="0"/>
-              </a:spcAft>
-            </a:pPr>
-            <a:r>
-              <a:rPr sz="1250" b="0" i="0">
-                <a:solidFill>
-                  <a:srgbClr val="141B2E"/>
-                </a:solidFill>
-                <a:latin typeface="Arial"/>
-              </a:rPr>
-              <a:t>предсказание будущих расходов на лечение</a:t>
-            </a:r>
-          </a:p>
-        </p:txBody>
-      </p:sp>
-      <p:sp>
-        <p:nvSpPr>
-          <p:cNvPr id="11" name="TextBox 10"/>
-          <p:cNvSpPr txBox="1"/>
-          <p:nvPr/>
-        </p:nvSpPr>
-        <p:spPr>
-          <a:xfrm>
-            <a:off x="4352596" y="4244390"/>
-            <a:ext cx="7004251" cy="529717"/>
-          </a:xfrm>
-          <a:prstGeom prst="rect">
-            <a:avLst/>
-          </a:prstGeom>
-          <a:noFill/>
-        </p:spPr>
-        <p:txBody>
-          <a:bodyPr wrap="square" lIns="0" rIns="0" tIns="0" bIns="0" anchor="ctr">
-            <a:spAutoFit/>
-          </a:bodyPr>
-          <a:lstStyle/>
-          <a:p>
-            <a:pPr algn="l">
-              <a:lnSpc>
-                <a:spcPts val="1437"/>
-              </a:lnSpc>
-              <a:spcAft>
-                <a:spcPts val="0"/>
-              </a:spcAft>
-            </a:pPr>
-            <a:r>
-              <a:rPr sz="1250" b="0" i="0">
-                <a:solidFill>
-                  <a:srgbClr val="141B2E"/>
-                </a:solidFill>
-                <a:latin typeface="Arial"/>
-              </a:rPr>
-              <a:t>прошлые расходы ниже у чёрных пациентов при той же тяжести состояния</a:t>
+              <a:t>алгоритм оптимизировал предсказание будущих расходов на лечение — а прошлые расходы ниже у чёрных пациентов при той же тяжести состояния</a:t>
             </a:r>
           </a:p>
         </p:txBody>
       </p:sp>
       <p:cxnSp>
         <p:nvCxnSpPr>
-          <p:cNvPr id="12" name="Connector 11"/>
+          <p:cNvPr id="10" name="Connector 9"/>
           <p:cNvCxnSpPr/>
           <p:nvPr/>
         </p:nvCxnSpPr>
         <p:spPr>
           <a:xfrm>
-            <a:off x="685800" y="4774107"/>
+            <a:off x="685800" y="4670704"/>
             <a:ext cx="10817352" cy="0"/>
           </a:xfrm>
           <a:prstGeom prst="line">
@@ -26647,133 +26431,91 @@
       </p:cxnSp>
       <p:sp>
         <p:nvSpPr>
+          <p:cNvPr id="11" name="TextBox 10"/>
+          <p:cNvSpPr txBox="1"/>
+          <p:nvPr/>
+        </p:nvSpPr>
+        <p:spPr>
+          <a:xfrm>
+            <a:off x="685800" y="4670704"/>
+            <a:ext cx="610910" cy="529717"/>
+          </a:xfrm>
+          <a:prstGeom prst="rect">
+            <a:avLst/>
+          </a:prstGeom>
+          <a:noFill/>
+        </p:spPr>
+        <p:txBody>
+          <a:bodyPr wrap="square" lIns="0" rIns="0" tIns="0" bIns="0" anchor="ctr">
+            <a:spAutoFit/>
+          </a:bodyPr>
+          <a:lstStyle/>
+          <a:p>
+            <a:pPr algn="l">
+              <a:lnSpc>
+                <a:spcPts val="1437"/>
+              </a:lnSpc>
+              <a:spcAft>
+                <a:spcPts val="0"/>
+              </a:spcAft>
+            </a:pPr>
+            <a:r>
+              <a:rPr sz="1250" b="0" i="0">
+                <a:solidFill>
+                  <a:srgbClr val="141B2E"/>
+                </a:solidFill>
+                <a:latin typeface="Arial"/>
+              </a:rPr>
+              <a:t>C — IRS</a:t>
+            </a:r>
+          </a:p>
+        </p:txBody>
+      </p:sp>
+      <p:sp>
+        <p:nvSpPr>
+          <p:cNvPr id="12" name="TextBox 11"/>
+          <p:cNvSpPr txBox="1"/>
+          <p:nvPr/>
+        </p:nvSpPr>
+        <p:spPr>
+          <a:xfrm>
+            <a:off x="1443014" y="4670704"/>
+            <a:ext cx="9913833" cy="529717"/>
+          </a:xfrm>
+          <a:prstGeom prst="rect">
+            <a:avLst/>
+          </a:prstGeom>
+          <a:noFill/>
+        </p:spPr>
+        <p:txBody>
+          <a:bodyPr wrap="square" lIns="0" rIns="0" tIns="0" bIns="0" anchor="ctr">
+            <a:spAutoFit/>
+          </a:bodyPr>
+          <a:lstStyle/>
+          <a:p>
+            <a:pPr algn="l">
+              <a:lnSpc>
+                <a:spcPts val="1437"/>
+              </a:lnSpc>
+              <a:spcAft>
+                <a:spcPts val="0"/>
+              </a:spcAft>
+            </a:pPr>
+            <a:r>
+              <a:rPr sz="1250" b="0" i="0">
+                <a:solidFill>
+                  <a:srgbClr val="141B2E"/>
+                </a:solidFill>
+                <a:latin typeface="Arial"/>
+              </a:rPr>
+              <a:t>алгоритм оптимизировал экономию часов инспектора — а декларации с EITC дешевле и быстрее проверить, и среди претендентов на EITC доля чернокожих налогоплательщиков выше, чем в среднем</a:t>
+            </a:r>
+          </a:p>
+        </p:txBody>
+      </p:sp>
+      <p:sp>
+        <p:nvSpPr>
           <p:cNvPr id="13" name="TextBox 12"/>
-          <p:cNvSpPr txBox="1"/>
-          <p:nvPr/>
-        </p:nvSpPr>
-        <p:spPr>
-          <a:xfrm>
-            <a:off x="685800" y="4774107"/>
-            <a:ext cx="610910" cy="529717"/>
-          </a:xfrm>
-          <a:prstGeom prst="rect">
-            <a:avLst/>
-          </a:prstGeom>
-          <a:noFill/>
-        </p:spPr>
-        <p:txBody>
-          <a:bodyPr wrap="square" lIns="0" rIns="0" tIns="0" bIns="0" anchor="ctr">
-            <a:spAutoFit/>
-          </a:bodyPr>
-          <a:lstStyle/>
-          <a:p>
-            <a:pPr algn="l">
-              <a:lnSpc>
-                <a:spcPts val="1437"/>
-              </a:lnSpc>
-              <a:spcAft>
-                <a:spcPts val="0"/>
-              </a:spcAft>
-            </a:pPr>
-            <a:r>
-              <a:rPr sz="1250" b="0" i="0">
-                <a:solidFill>
-                  <a:srgbClr val="141B2E"/>
-                </a:solidFill>
-                <a:latin typeface="Arial"/>
-              </a:rPr>
-              <a:t>C — IRS</a:t>
-            </a:r>
-          </a:p>
-        </p:txBody>
-      </p:sp>
-      <p:sp>
-        <p:nvSpPr>
-          <p:cNvPr id="14" name="TextBox 13"/>
-          <p:cNvSpPr txBox="1"/>
-          <p:nvPr/>
-        </p:nvSpPr>
-        <p:spPr>
-          <a:xfrm>
-            <a:off x="1443014" y="4774107"/>
-            <a:ext cx="2763277" cy="529717"/>
-          </a:xfrm>
-          <a:prstGeom prst="rect">
-            <a:avLst/>
-          </a:prstGeom>
-          <a:noFill/>
-        </p:spPr>
-        <p:txBody>
-          <a:bodyPr wrap="square" lIns="0" rIns="0" tIns="0" bIns="0" anchor="ctr">
-            <a:spAutoFit/>
-          </a:bodyPr>
-          <a:lstStyle/>
-          <a:p>
-            <a:pPr algn="l">
-              <a:lnSpc>
-                <a:spcPts val="1437"/>
-              </a:lnSpc>
-              <a:spcAft>
-                <a:spcPts val="0"/>
-              </a:spcAft>
-            </a:pPr>
-            <a:r>
-              <a:rPr sz="1250" b="0" i="0">
-                <a:solidFill>
-                  <a:srgbClr val="141B2E"/>
-                </a:solidFill>
-                <a:latin typeface="Arial"/>
-              </a:rPr>
-              <a:t>экономию часов инспектора</a:t>
-            </a:r>
-          </a:p>
-        </p:txBody>
-      </p:sp>
-      <p:sp>
-        <p:nvSpPr>
-          <p:cNvPr id="15" name="TextBox 14"/>
-          <p:cNvSpPr txBox="1"/>
-          <p:nvPr/>
-        </p:nvSpPr>
-        <p:spPr>
-          <a:xfrm>
-            <a:off x="4352596" y="4774107"/>
-            <a:ext cx="7004251" cy="529717"/>
-          </a:xfrm>
-          <a:prstGeom prst="rect">
-            <a:avLst/>
-          </a:prstGeom>
-          <a:noFill/>
-        </p:spPr>
-        <p:txBody>
-          <a:bodyPr wrap="square" lIns="0" rIns="0" tIns="0" bIns="0" anchor="ctr">
-            <a:spAutoFit/>
-          </a:bodyPr>
-          <a:lstStyle/>
-          <a:p>
-            <a:pPr algn="l">
-              <a:lnSpc>
-                <a:spcPts val="1437"/>
-              </a:lnSpc>
-              <a:spcAft>
-                <a:spcPts val="0"/>
-              </a:spcAft>
-            </a:pPr>
-            <a:r>
-              <a:rPr sz="1250" b="0" i="0">
-                <a:solidFill>
-                  <a:srgbClr val="141B2E"/>
-                </a:solidFill>
-                <a:latin typeface="Arial"/>
-              </a:rPr>
-              <a:t>декларации с EITC дешевле и быстрее проверить, а среди претендентов на EITC доля чернокожих налогоплательщиков выше, чем в среднем</a:t>
-            </a:r>
-          </a:p>
-        </p:txBody>
-      </p:sp>
-      <p:sp>
-        <p:nvSpPr>
-          <p:cNvPr id="16" name="TextBox 15"/>
           <p:cNvSpPr txBox="1"/>
           <p:nvPr/>
         </p:nvSpPr>
@@ -27478,7 +27220,7 @@
                 </a:solidFill>
                 <a:latin typeface="Arial"/>
               </a:rPr>
-              <a:t>правильный ответ зависит от истории переписки или от сочетания нескольких признаков сразу, а не от одной метки</a:t>
+              <a:t>правильный ответ зависит от истории переписки или от сочетания нескольких признаков сразу, не от одной метки</a:t>
             </a:r>
           </a:p>
         </p:txBody>
@@ -31348,7 +31090,7 @@
         </p:nvSpPr>
         <p:spPr>
           <a:xfrm>
-            <a:off x="502920" y="1600758"/>
+            <a:off x="502920" y="1108032"/>
             <a:ext cx="11183112" cy="2236977"/>
           </a:xfrm>
           <a:prstGeom prst="roundRect">
@@ -31396,8 +31138,8 @@
         </p:nvSpPr>
         <p:spPr>
           <a:xfrm>
-            <a:off x="685800" y="1783638"/>
-            <a:ext cx="5754279" cy="282067"/>
+            <a:off x="685800" y="1290912"/>
+            <a:ext cx="5752905" cy="282067"/>
           </a:xfrm>
           <a:prstGeom prst="rect">
             <a:avLst/>
@@ -31438,8 +31180,8 @@
         </p:nvSpPr>
         <p:spPr>
           <a:xfrm>
-            <a:off x="6586383" y="1783638"/>
-            <a:ext cx="4770464" cy="282067"/>
+            <a:off x="6585009" y="1290912"/>
+            <a:ext cx="4771838" cy="282067"/>
           </a:xfrm>
           <a:prstGeom prst="rect">
             <a:avLst/>
@@ -31480,8 +31222,8 @@
         </p:nvSpPr>
         <p:spPr>
           <a:xfrm>
-            <a:off x="685800" y="2065705"/>
-            <a:ext cx="5754279" cy="529717"/>
+            <a:off x="685800" y="1572979"/>
+            <a:ext cx="5752905" cy="529717"/>
           </a:xfrm>
           <a:prstGeom prst="rect">
             <a:avLst/>
@@ -31522,8 +31264,8 @@
         </p:nvSpPr>
         <p:spPr>
           <a:xfrm>
-            <a:off x="6586383" y="2065705"/>
-            <a:ext cx="4770464" cy="529717"/>
+            <a:off x="6585009" y="1572979"/>
+            <a:ext cx="4771838" cy="529717"/>
           </a:xfrm>
           <a:prstGeom prst="rect">
             <a:avLst/>
@@ -31564,7 +31306,7 @@
         </p:nvCxnSpPr>
         <p:spPr>
           <a:xfrm>
-            <a:off x="685800" y="2595422"/>
+            <a:off x="685800" y="2102696"/>
             <a:ext cx="10817352" cy="0"/>
           </a:xfrm>
           <a:prstGeom prst="line">
@@ -31599,8 +31341,8 @@
         </p:nvSpPr>
         <p:spPr>
           <a:xfrm>
-            <a:off x="685800" y="2595422"/>
-            <a:ext cx="5754279" cy="529717"/>
+            <a:off x="685800" y="2102696"/>
+            <a:ext cx="5752905" cy="529717"/>
           </a:xfrm>
           <a:prstGeom prst="rect">
             <a:avLst/>
@@ -31641,8 +31383,8 @@
         </p:nvSpPr>
         <p:spPr>
           <a:xfrm>
-            <a:off x="6586383" y="2595422"/>
-            <a:ext cx="4770464" cy="529717"/>
+            <a:off x="6585009" y="2102696"/>
+            <a:ext cx="4771838" cy="529717"/>
           </a:xfrm>
           <a:prstGeom prst="rect">
             <a:avLst/>
@@ -31683,7 +31425,7 @@
         </p:nvCxnSpPr>
         <p:spPr>
           <a:xfrm>
-            <a:off x="685800" y="3125139"/>
+            <a:off x="685800" y="2632413"/>
             <a:ext cx="10817352" cy="0"/>
           </a:xfrm>
           <a:prstGeom prst="line">
@@ -31718,8 +31460,8 @@
         </p:nvSpPr>
         <p:spPr>
           <a:xfrm>
-            <a:off x="685800" y="3125139"/>
-            <a:ext cx="5754279" cy="529717"/>
+            <a:off x="685800" y="2632413"/>
+            <a:ext cx="5752905" cy="529717"/>
           </a:xfrm>
           <a:prstGeom prst="rect">
             <a:avLst/>
@@ -31760,8 +31502,8 @@
         </p:nvSpPr>
         <p:spPr>
           <a:xfrm>
-            <a:off x="6586383" y="3125139"/>
-            <a:ext cx="4770464" cy="529717"/>
+            <a:off x="6585009" y="2632413"/>
+            <a:ext cx="4771838" cy="529717"/>
           </a:xfrm>
           <a:prstGeom prst="rect">
             <a:avLst/>
@@ -31789,7 +31531,7 @@
                 </a:solidFill>
                 <a:latin typeface="Arial"/>
               </a:rPr>
-              <a:t>письмо требует решения («вернуть деньги или нет»), а не справки («как оформить возврат»)</a:t>
+              <a:t>письмо требует решения («вернуть деньги или нет») — не справки («как оформить возврат»)</a:t>
             </a:r>
           </a:p>
         </p:txBody>
@@ -31802,7 +31544,7 @@
         </p:nvSpPr>
         <p:spPr>
           <a:xfrm>
-            <a:off x="502920" y="4505248"/>
+            <a:off x="502920" y="3921294"/>
             <a:ext cx="11183112" cy="836295"/>
           </a:xfrm>
           <a:prstGeom prst="roundRect">
@@ -31851,7 +31593,7 @@
         </p:nvSpPr>
         <p:spPr>
           <a:xfrm>
-            <a:off x="740664" y="4642408"/>
+            <a:off x="740664" y="4058454"/>
             <a:ext cx="10707624" cy="561974"/>
           </a:xfrm>
           <a:prstGeom prst="rect">
@@ -31887,7 +31629,95 @@
       </p:sp>
       <p:sp>
         <p:nvSpPr>
-          <p:cNvPr id="16" name="TextBox 15"/>
+          <p:cNvPr id="16" name="Rounded Rectangle 15"/>
+          <p:cNvSpPr/>
+          <p:nvPr/>
+        </p:nvSpPr>
+        <p:spPr>
+          <a:xfrm>
+            <a:off x="502920" y="5333873"/>
+            <a:ext cx="82296" cy="746760"/>
+          </a:xfrm>
+          <a:prstGeom prst="roundRect">
+            <a:avLst>
+              <a:gd name="adj" fmla="val 50000"/>
+            </a:avLst>
+          </a:prstGeom>
+          <a:solidFill>
+            <a:srgbClr val="F0AB00"/>
+          </a:solidFill>
+          <a:ln>
+            <a:noFill/>
+          </a:ln>
+          <a:effectLst/>
+        </p:spPr>
+        <p:style>
+          <a:lnRef idx="1">
+            <a:schemeClr val="accent1"/>
+          </a:lnRef>
+          <a:fillRef idx="3">
+            <a:schemeClr val="accent1"/>
+          </a:fillRef>
+          <a:effectRef idx="2">
+            <a:schemeClr val="accent1"/>
+          </a:effectRef>
+          <a:fontRef idx="minor">
+            <a:schemeClr val="lt1"/>
+          </a:fontRef>
+        </p:style>
+        <p:txBody>
+          <a:bodyPr rtlCol="0" anchor="ctr"/>
+          <a:lstStyle/>
+          <a:p>
+            <a:pPr algn="ctr"/>
+          </a:p>
+        </p:txBody>
+      </p:sp>
+      <p:sp>
+        <p:nvSpPr>
+          <p:cNvPr id="17" name="TextBox 16"/>
+          <p:cNvSpPr txBox="1"/>
+          <p:nvPr/>
+        </p:nvSpPr>
+        <p:spPr>
+          <a:xfrm>
+            <a:off x="859536" y="5461889"/>
+            <a:ext cx="10643616" cy="490727"/>
+          </a:xfrm>
+          <a:prstGeom prst="rect">
+            <a:avLst/>
+          </a:prstGeom>
+          <a:noFill/>
+        </p:spPr>
+        <p:txBody>
+          <a:bodyPr wrap="square" lIns="0" rIns="0" tIns="0" bIns="0" anchor="ctr">
+            <a:spAutoFit/>
+          </a:bodyPr>
+          <a:lstStyle/>
+          <a:p>
+            <a:pPr algn="l">
+              <a:lnSpc>
+                <a:spcPts val="1860"/>
+              </a:lnSpc>
+              <a:spcAft>
+                <a:spcPts val="300"/>
+              </a:spcAft>
+            </a:pPr>
+            <a:r>
+              <a:rPr sz="1500" b="1" i="0">
+                <a:solidFill>
+                  <a:srgbClr val="141B2E"/>
+                </a:solidFill>
+                <a:latin typeface="Arial"/>
+              </a:rPr>
+              <a:t>Правило уже знакомое курсу: справится ли один вызов (с RAG) — на нём и остановиться; если нет — нужна структура из нескольких шагов с проверяемым промежуточным результатом.</a:t>
+            </a:r>
+          </a:p>
+        </p:txBody>
+      </p:sp>
+      <p:sp>
+        <p:nvSpPr>
+          <p:cNvPr id="18" name="TextBox 17"/>
           <p:cNvSpPr txBox="1"/>
           <p:nvPr/>
         </p:nvSpPr>
@@ -34287,7 +34117,7 @@
         </p:nvSpPr>
         <p:spPr>
           <a:xfrm>
-            <a:off x="502920" y="1238199"/>
+            <a:off x="502920" y="987179"/>
             <a:ext cx="11183112" cy="1578102"/>
           </a:xfrm>
           <a:prstGeom prst="roundRect">
@@ -34335,7 +34165,7 @@
         </p:nvSpPr>
         <p:spPr>
           <a:xfrm>
-            <a:off x="502920" y="1274775"/>
+            <a:off x="502920" y="1023755"/>
             <a:ext cx="50292" cy="1504950"/>
           </a:xfrm>
           <a:prstGeom prst="rect">
@@ -34379,7 +34209,7 @@
         </p:nvSpPr>
         <p:spPr>
           <a:xfrm>
-            <a:off x="722376" y="1421079"/>
+            <a:off x="722376" y="1170059"/>
             <a:ext cx="10744200" cy="1212342"/>
           </a:xfrm>
           <a:prstGeom prst="rect">
@@ -34516,7 +34346,7 @@
         </p:nvSpPr>
         <p:spPr>
           <a:xfrm>
-            <a:off x="502920" y="3483813"/>
+            <a:off x="502920" y="2839432"/>
             <a:ext cx="11183112" cy="2401570"/>
           </a:xfrm>
           <a:prstGeom prst="roundRect">
@@ -34564,7 +34394,7 @@
         </p:nvSpPr>
         <p:spPr>
           <a:xfrm>
-            <a:off x="685800" y="3666693"/>
+            <a:off x="685800" y="3022312"/>
             <a:ext cx="634368" cy="282067"/>
           </a:xfrm>
           <a:prstGeom prst="rect">
@@ -34606,7 +34436,7 @@
         </p:nvSpPr>
         <p:spPr>
           <a:xfrm>
-            <a:off x="1466472" y="3666693"/>
+            <a:off x="1466472" y="3022312"/>
             <a:ext cx="9890375" cy="282067"/>
           </a:xfrm>
           <a:prstGeom prst="rect">
@@ -34648,7 +34478,7 @@
         </p:nvSpPr>
         <p:spPr>
           <a:xfrm>
-            <a:off x="685800" y="3948760"/>
+            <a:off x="685800" y="3304379"/>
             <a:ext cx="634368" cy="529717"/>
           </a:xfrm>
           <a:prstGeom prst="rect">
@@ -34690,7 +34520,7 @@
         </p:nvSpPr>
         <p:spPr>
           <a:xfrm>
-            <a:off x="1466472" y="3948760"/>
+            <a:off x="1466472" y="3304379"/>
             <a:ext cx="9890375" cy="529717"/>
           </a:xfrm>
           <a:prstGeom prst="rect">
@@ -34728,7 +34558,7 @@
                 </a:solidFill>
                 <a:latin typeface="Arial"/>
               </a:rPr>
-              <a:t> возвращает метку, а не свободный текст — иначе проверку на строке 2 невозможно было бы написать</a:t>
+              <a:t> возвращает метку, не свободный текст — иначе проверку на строке 2 невозможно было бы написать</a:t>
             </a:r>
           </a:p>
         </p:txBody>
@@ -34741,7 +34571,7 @@
         </p:nvCxnSpPr>
         <p:spPr>
           <a:xfrm>
-            <a:off x="685800" y="4478477"/>
+            <a:off x="685800" y="3834096"/>
             <a:ext cx="10817352" cy="0"/>
           </a:xfrm>
           <a:prstGeom prst="line">
@@ -34776,7 +34606,7 @@
         </p:nvSpPr>
         <p:spPr>
           <a:xfrm>
-            <a:off x="685800" y="4478477"/>
+            <a:off x="685800" y="3834096"/>
             <a:ext cx="634368" cy="529717"/>
           </a:xfrm>
           <a:prstGeom prst="rect">
@@ -34818,7 +34648,7 @@
         </p:nvSpPr>
         <p:spPr>
           <a:xfrm>
-            <a:off x="1466472" y="4478477"/>
+            <a:off x="1466472" y="3834096"/>
             <a:ext cx="9890375" cy="529717"/>
           </a:xfrm>
           <a:prstGeom prst="rect">
@@ -34860,7 +34690,7 @@
         </p:nvCxnSpPr>
         <p:spPr>
           <a:xfrm>
-            <a:off x="685800" y="5008194"/>
+            <a:off x="685800" y="4363813"/>
             <a:ext cx="10817352" cy="0"/>
           </a:xfrm>
           <a:prstGeom prst="line">
@@ -34895,7 +34725,7 @@
         </p:nvSpPr>
         <p:spPr>
           <a:xfrm>
-            <a:off x="685800" y="5008194"/>
+            <a:off x="685800" y="4363813"/>
             <a:ext cx="634368" cy="347154"/>
           </a:xfrm>
           <a:prstGeom prst="rect">
@@ -34937,7 +34767,7 @@
         </p:nvSpPr>
         <p:spPr>
           <a:xfrm>
-            <a:off x="1466472" y="5008194"/>
+            <a:off x="1466472" y="4363813"/>
             <a:ext cx="9890375" cy="347154"/>
           </a:xfrm>
           <a:prstGeom prst="rect">
@@ -34975,7 +34805,7 @@
                 </a:solidFill>
                 <a:latin typeface="Arial"/>
               </a:rPr>
-              <a:t> получает метку и извлечённый по ней контекст, а не одно голое письмо</a:t>
+              <a:t> получает метку и извлечённый по ней контекст, не одно голое письмо</a:t>
             </a:r>
           </a:p>
         </p:txBody>
@@ -34988,7 +34818,7 @@
         </p:nvCxnSpPr>
         <p:spPr>
           <a:xfrm>
-            <a:off x="685800" y="5355348"/>
+            <a:off x="685800" y="4710967"/>
             <a:ext cx="10817352" cy="0"/>
           </a:xfrm>
           <a:prstGeom prst="line">
@@ -35023,7 +34853,7 @@
         </p:nvSpPr>
         <p:spPr>
           <a:xfrm>
-            <a:off x="685800" y="5355348"/>
+            <a:off x="685800" y="4710967"/>
             <a:ext cx="634368" cy="347154"/>
           </a:xfrm>
           <a:prstGeom prst="rect">
@@ -35065,7 +34895,7 @@
         </p:nvSpPr>
         <p:spPr>
           <a:xfrm>
-            <a:off x="1466472" y="5355348"/>
+            <a:off x="1466472" y="4710967"/>
             <a:ext cx="9890375" cy="347154"/>
           </a:xfrm>
           <a:prstGeom prst="rect">
@@ -35094,14 +34924,102 @@
                 </a:solidFill>
                 <a:latin typeface="Arial"/>
               </a:rPr>
-              <a:t>последняя операция — положить черновик в очередь человека, а не отправить его клиенту напрямую</a:t>
-            </a:r>
-          </a:p>
-        </p:txBody>
-      </p:sp>
-      <p:sp>
-        <p:nvSpPr>
-          <p:cNvPr id="20" name="TextBox 19"/>
+              <a:t>последняя операция — положить черновик в очередь человека, не отправить его клиенту напрямую</a:t>
+            </a:r>
+          </a:p>
+        </p:txBody>
+      </p:sp>
+      <p:sp>
+        <p:nvSpPr>
+          <p:cNvPr id="20" name="Rounded Rectangle 19"/>
+          <p:cNvSpPr/>
+          <p:nvPr/>
+        </p:nvSpPr>
+        <p:spPr>
+          <a:xfrm>
+            <a:off x="502920" y="5515152"/>
+            <a:ext cx="82296" cy="746760"/>
+          </a:xfrm>
+          <a:prstGeom prst="roundRect">
+            <a:avLst>
+              <a:gd name="adj" fmla="val 50000"/>
+            </a:avLst>
+          </a:prstGeom>
+          <a:solidFill>
+            <a:srgbClr val="F0AB00"/>
+          </a:solidFill>
+          <a:ln>
+            <a:noFill/>
+          </a:ln>
+          <a:effectLst/>
+        </p:spPr>
+        <p:style>
+          <a:lnRef idx="1">
+            <a:schemeClr val="accent1"/>
+          </a:lnRef>
+          <a:fillRef idx="3">
+            <a:schemeClr val="accent1"/>
+          </a:fillRef>
+          <a:effectRef idx="2">
+            <a:schemeClr val="accent1"/>
+          </a:effectRef>
+          <a:fontRef idx="minor">
+            <a:schemeClr val="lt1"/>
+          </a:fontRef>
+        </p:style>
+        <p:txBody>
+          <a:bodyPr rtlCol="0" anchor="ctr"/>
+          <a:lstStyle/>
+          <a:p>
+            <a:pPr algn="ctr"/>
+          </a:p>
+        </p:txBody>
+      </p:sp>
+      <p:sp>
+        <p:nvSpPr>
+          <p:cNvPr id="21" name="TextBox 20"/>
+          <p:cNvSpPr txBox="1"/>
+          <p:nvPr/>
+        </p:nvSpPr>
+        <p:spPr>
+          <a:xfrm>
+            <a:off x="859536" y="5643168"/>
+            <a:ext cx="10643616" cy="490727"/>
+          </a:xfrm>
+          <a:prstGeom prst="rect">
+            <a:avLst/>
+          </a:prstGeom>
+          <a:noFill/>
+        </p:spPr>
+        <p:txBody>
+          <a:bodyPr wrap="square" lIns="0" rIns="0" tIns="0" bIns="0" anchor="ctr">
+            <a:spAutoFit/>
+          </a:bodyPr>
+          <a:lstStyle/>
+          <a:p>
+            <a:pPr algn="l">
+              <a:lnSpc>
+                <a:spcPts val="1860"/>
+              </a:lnSpc>
+              <a:spcAft>
+                <a:spcPts val="300"/>
+              </a:spcAft>
+            </a:pPr>
+            <a:r>
+              <a:rPr sz="1500" b="1" i="0">
+                <a:solidFill>
+                  <a:srgbClr val="141B2E"/>
+                </a:solidFill>
+                <a:latin typeface="Arial"/>
+              </a:rPr>
+              <a:t>Четыре факта — не детали синтаксиса: удаление любого из них по отдельности превращает рабочую цепочку в ту, что ломается на следующем экране.</a:t>
+            </a:r>
+          </a:p>
+        </p:txBody>
+      </p:sp>
+      <p:sp>
+        <p:nvSpPr>
+          <p:cNvPr id="22" name="TextBox 21"/>
           <p:cNvSpPr txBox="1"/>
           <p:nvPr/>
         </p:nvSpPr>

--- a/library/seminars/sem-07/rendered/sem-07.pptx
+++ b/library/seminars/sem-07/rendered/sem-07.pptx
@@ -3990,7 +3990,7 @@
           </a:p>
           <a:p>
             <a:r>
-              <a:t>Расхождение между тем, что зал сказал вслух, и тем, что покажет разбор, — часть самого</a:t>
+              <a:t>Расхождение между тем, что прозвучало вслух, и тем, что покажет разбор, — часть самого</a:t>
             </a:r>
           </a:p>
           <a:p>
@@ -4645,13 +4645,13 @@
           <a:p/>
           <a:p>
             <a:r>
-              <a:t>Вопрос залу разделяет эти два случая по конкретному критерию, не по ощущению: хватит ли для автоматического ответа одного вызова модели, у которой есть доступ к базе знаний компании — retrieval, поиск релевантного кусочка документации перед тем, как модель формулирует ответ, тот самый RAG, уже разобранный на предыдущих занятиях курса. Три карточки держат ответ открытым: «да, одного вызова достаточно», «нет, нужно несколько шагов», «зависит от письма». Голосовать нужно, держа перед глазами именно эти четыре примера писем из сцены, не абстрактно — и для каждого типа ответ может оказаться своим.</a:t>
+              <a:t>Вопрос на экране разделяет эти два случая по конкретному критерию, не по ощущению: хватит ли для автоматического ответа одного вызова модели, у которой есть доступ к базе знаний компании — retrieval, поиск релевантного кусочка документации перед тем, как модель формулирует ответ, тот самый RAG, уже разобранный на предыдущих занятиях курса. Три карточки держат ответ открытым: «да, одного вызова достаточно», «нет, нужно несколько шагов», «зависит от письма». Голосовать нужно, держа перед глазами именно эти четыре примера писем из сцены, не абстрактно — и для каждого типа ответ может оказаться своим.</a:t>
             </a:r>
           </a:p>
           <a:p/>
           <a:p>
             <a:r>
-              <a:t>Четыре письма сцены выбраны не случайно и не ради разнообразия: первые два выглядят скучно предсказуемыми именно потому, что сотрудник отвечает на них автоматически, без раздумий; третье и четвёртое выбраны иначе — так, чтобы на них ответ одним движением дать было нельзя: там нужно сопоставить несколько фактов, прежде чем решить, что писать. Один и тот же вопрос — «хватит ли одного вызова» — применённый к этим четырём письмам по отдельности, и даёт четыре разных ответа, и ровно в этом разбросе ответов — весь смысл вопроса для зала.</a:t>
+              <a:t>Четыре письма сцены выбраны не случайно и не ради разнообразия: первые два выглядят скучно предсказуемыми именно потому, что сотрудник отвечает на них автоматически, без раздумий; третье и четвёртое выбраны иначе — так, чтобы на них ответ одним движением дать было нельзя: там нужно сопоставить несколько фактов, прежде чем решить, что писать. Один и тот же вопрос — «хватит ли одного вызова» — применённый к этим четырём письмам по отдельности, и даёт четыре разных ответа, и ровно в этом разбросе ответов — весь смысл вопроса.</a:t>
             </a:r>
           </a:p>
         </p:txBody>

--- a/library/seminars/sem-07/rendered/sem-07.pptx
+++ b/library/seminars/sem-07/rendered/sem-07.pptx
@@ -611,31 +611,37 @@
           <a:lstStyle/>
           <a:p>
             <a:r>
-              <a:t>Три замечания, которые пригодятся на любом следующем процессе, не только на этом.</a:t>
+              <a:t>Три замечания, которые пригодятся на любом следующем процессе.</a:t>
             </a:r>
           </a:p>
           <a:p/>
           <a:p>
             <a:r>
-              <a:t>Первое — про Data Table. Это внутренняя таблица самого n8n: не нужно ни Google-аккаунта, ни отдельной базы, ни учётных данных. Для первого процесса это принципиально: вы проверяете идею, а не настраиваете доступы полчаса. Когда процесс заработает, приёмник меняется на настоящий одним узлом.</a:t>
+              <a:t>Первое — про экран результата, и это главная практика занятия. Его ставят сразу, в первый же проход, а не «когда дойдём до красоты». Причина простая и считается в минутах: без него, чтобы узнать, что получилось, надо открыть журнал прогонов, найти нужный, раскрыть узел, потом открыть таблицу и найти строку. Это два переключения на каждую проверку, а проверок на отладке десятки. С экраном вся дорога печатается там, где вы и так находитесь.</a:t>
             </a:r>
           </a:p>
           <a:p/>
           <a:p>
             <a:r>
-              <a:t>Второе — про ограничение блока, который мы взяли. Basic LLM Chain не поддерживает ни память, ни инструменты, и это написано в документации прямым текстом. То есть он не помнит предыдущих запусков и не умеет никуда сходить за данными. Для нашей задачи этого достаточно: заявка самодостаточна. Как только понадобится, чтобы шаг модели помнил разговор или сам куда-то лазил, нужен другой блок — агент, и это занятие одиннадцатое.</a:t>
+              <a:t>И есть вторая причина, менее очевидная. Экран заставляет вас заранее решить, что считается результатом. Пока вы пишете, какие четыре вещи на нём показать, вы отвечаете на вопрос «за что я тут отвечаю», — и отвечаете до того, как процесс поехал, а не после.</a:t>
             </a:r>
           </a:p>
           <a:p/>
           <a:p>
             <a:r>
-              <a:t>Третье, чисто рабочее. Собирать процесс удобнее с ручного триггера, а настоящий подключать в конце. Иначе на каждую проверку придётся заново заполнять форму, и на третьем разе это начнёт раздражать.</a:t>
+              <a:t>Второе — про Data Table. Это внутренняя таблица самого n8n: не нужно ни Google-аккаунта, ни отдельной базы, ни учётных данных. Для первого процесса это принципиально: вы проверяете идею, а не настраиваете доступы полчаса. Когда процесс заработает, приёмник меняется на настоящий одним узлом.</a:t>
             </a:r>
           </a:p>
           <a:p/>
           <a:p>
             <a:r>
-              <a:t>И сравнение, которое будет в конце каждого кейса. В Activepieces этот же процесс собирается из тех же трёх шагов, имена блоков другие. В LangFlow его тоже можно собрать — там есть и вызов модели, и ветвления, и даже вложенные сценарии, — но запустить по расписанию нечем: планировщика в нём нет вовсе, запуск только по вызову снаружи. Это и есть граница между классами инструментов, к ней мы ещё вернёмся.</a:t>
+              <a:t>Третье — про ограничение блока. Если вместо извлечения полей взять обычную цепочку, Basic LLM Chain, знайте: она не поддерживает ни память, ни инструменты, это написано в документации прямым текстом. Для нашей задачи этого хватило бы — заявка самодостаточна. Как только понадобится, чтобы шаг модели помнил разговор или сам куда-то лазил, нужен агент, и это одиннадцатое занятие.</a:t>
+            </a:r>
+          </a:p>
+          <a:p/>
+          <a:p>
+            <a:r>
+              <a:t>И сравнение, которое будет в конце каждого кейса. В Activepieces этот же процесс собирается из тех же пяти шагов, имена блоков другие. В LangFlow его тоже можно собрать — есть и вызов модели, и ветвления, — но запустить по расписанию нечем: планировщика в нём нет вовсе, запуск только по вызову снаружи. Это граница между классами инструментов, к ней мы ещё вернёмся.</a:t>
             </a:r>
           </a:p>
         </p:txBody>
@@ -705,25 +711,31 @@
           <a:lstStyle/>
           <a:p>
             <a:r>
-              <a:t>Посмотрим, что получилось минуту назад. В таблице появилась строка, и в ней действительно есть пометка. Выглядит она так: «Похоже, человек хочет записаться на курс по аналитике, просит перезвонить сегодня после шести, телефон указан в конце».</a:t>
+              <a:t>Процесс работает, и работает честно: тема и срочность заполнены, значения из справочника, пустых клеток нет. Мы за это ручались и ручаемся.</a:t>
             </a:r>
           </a:p>
           <a:p/>
           <a:p>
             <a:r>
-              <a:t>Это абсолютно разумный ответ. Модель прочитала заявку и пересказала её — ровно то, о чём её попросили. Претензий к ней нет.</a:t>
+              <a:t>Теперь смотрите, за что мы не ручались. Отправляю заявку: «Можно перенести занятие со вторника? И подскажите, как оплатить». Две темы в одном сообщении, обе наши, обе из справочника.</a:t>
             </a:r>
           </a:p>
           <a:p/>
           <a:p>
             <a:r>
-              <a:t>Претензия к устройству процесса. В таблице нужны столбцы: тема отдельно, срочность отдельно, контакт отдельно. По ним потом фильтруют, считают и раскладывают заявки по людям. Один столбец с абзацем для этого не годится: его нельзя отсортировать, по нему нельзя посчитать, сколько заявок на аналитику за неделю.</a:t>
+              <a:t>На экране результата: тема «перенос занятия». Одна. Про оплату не сказано ничего — ни на экране, ни в таблице, ни в журнале. Вторая тема не потерялась с ошибкой, её просто нет.</a:t>
             </a:r>
           </a:p>
           <a:p/>
           <a:p>
             <a:r>
-              <a:t>И это не частный случай нашей задачи. Любой процесс, в котором шаг модели идёт не последним, упирается в то же самое: следующий шаг ждёт значения, а получает прозу. Поэтому кейс про то, как из текста достать поля, стоит вторым — раньше, чем в большинстве курсов по этому инструменту, и намеренно.</a:t>
+              <a:t>Это другой класс беды, чем в первом кейсе. Там клетка могла остаться пустой, и мы это починили. Здесь клетка заполнена, значение законное, а заявка обслужена наполовину — и ни один сторож этого не заметит, потому что формально всё в порядке.</a:t>
+            </a:r>
+          </a:p>
+          <a:p/>
+          <a:p>
+            <a:r>
+              <a:t>Кейс второй про то, что справочник даёт гарантию формы, а гарантию смысла не даёт. И про то, какие ещё заявки ломают классификацию, которая минуту назад казалась надёжной.</a:t>
             </a:r>
           </a:p>
         </p:txBody>
@@ -793,25 +805,25 @@
           <a:lstStyle/>
           <a:p>
             <a:r>
-              <a:t>Вопрос второй, и он из тех, где у каждого в зале, кто что-то такое делал, есть свой ответ.</a:t>
+              <a:t>Вопрос второй, и в нём нет технической части: все четыре варианта собираются одинаково легко. Выбор тут содержательный.</a:t>
             </a:r>
           </a:p>
           <a:p/>
           <a:p>
             <a:r>
-              <a:t>Четыре варианта. Первый: попросить модель в самом запросе — «ответь только JSON, без пояснений». Второй: оставить как есть и разобрать пришедший текст регулярным выражением. Третий: взять штатное средство инструмента, которое умеет требовать формат. Четвёртый: поставить отдельный узел, задача которого — доставать поля из текста.</a:t>
+              <a:t>Первый: писать первую из найденных тем. Второй: писать «другое» — раз тем несколько, автоматика не справилась, пусть разбирает человек. Третий: сделать из одной заявки две строки, по теме на каждую. Четвёртый: писать главную тему и рядом пометку, что в заявке есть ещё что-то.</a:t>
             </a:r>
           </a:p>
           <a:p/>
           <a:p>
             <a:r>
-              <a:t>Я намеренно описываю их тем, что они делают, без названий блоков. Названия прозвучат на разборе: если я их назову сейчас, половина выберет то, что звучит официальнее, а не то, что считает правильным.</a:t>
+              <a:t>Выбирайте и формулируйте довод. И думайте не про то, что красивее на схеме, а про человека, который завтра утром работает с этой таблицей. Что он должен увидеть, чтобы не упустить вопрос про оплату?</a:t>
             </a:r>
           </a:p>
           <a:p/>
           <a:p>
             <a:r>
-              <a:t>Выбирайте и формулируйте довод. И отдельно спрошу: у кого из вас уже был первый вариант в работе, и чем кончилось? Это самый популярный ответ в жизни, и у него есть вполне конкретная статистика отказов, про которую мы сейчас и поговорим.</a:t>
+              <a:t>Сразу скажу: неправильного ответа здесь нет. Все четыре живут в настоящих системах, и у каждого своя цена. Что меня интересует — кто из вас выберет второй вариант и сможет его защитить. Потому что он выглядит как отказ от автоматизации, а на самом деле это самый честный из четырёх.</a:t>
             </a:r>
           </a:p>
         </p:txBody>
@@ -881,44 +893,44 @@
           <a:lstStyle/>
           <a:p>
             <a:r>
-              <a:t>Пройдём по четырём, и обратите внимание на характер отказа у первых двух — он у них общий, и он важнее разницы в качестве.</a:t>
+              <a:t>Пройдём по четырём, и смотрите на средний столбец — он и есть ответ на вопрос.</a:t>
             </a:r>
           </a:p>
           <a:p/>
           <a:p>
             <a:r>
-              <a:t>Просьба в промпте. Работает в большинстве случаев, стоит ноль, делается за минуту. Ломается так: модель добавляет вежливое вступление перед скобкой, или обрывает ответ на половине, или в следующий раз возвращает поля в другом порядке. Каждый отдельный случай редкий, на потоке в двадцать заявок в день они набегают.</a:t>
+              <a:t>Первый, писать первую из найденных. Остаток разбирает никто. Мы это только что видели: вторая тема исчезает, и нигде не остаётся следа. Самый дешёвый вариант и самый опасный, потому что он выглядит как работающий.</a:t>
             </a:r>
           </a:p>
           <a:p/>
           <a:p>
             <a:r>
-              <a:t>Регулярное выражение. Даёт полный контроль: вы точно знаете, что ищете. И ровно поэтому ломается при любом отклонении — не находит ничего и отдаёт пустое значение.</a:t>
+              <a:t>Второй, писать «другое». Остаток разбирает человек — и, что важнее, он об этом </a:t>
+            </a:r>
+            <a:r>
+              <a:rPr b="1"/>
+              <a:t>знает</a:t>
+            </a:r>
+            <a:r>
+              <a:t>: он видит «другое» и идёт читать текст. Вот почему я называю этот ответ самым честным из четырёх: разница между ним и первым не в точности, а в знании о своём незнании. Первый уверен и неправ. Второй не знает и говорит об этом. Цена — в «другое» начинает сваливаться всё: и многотемье, и настоящая экзотика про юрлица, и заявка из одного слова «ок». Столбец «другое» разрастается, и по нему уже не видно, что именно непонятно.</a:t>
             </a:r>
           </a:p>
           <a:p/>
           <a:p>
             <a:r>
-              <a:t>Вот что их объединяет и почему это важнее, чем разница между ними. Когда они не срабатывают, </a:t>
-            </a:r>
-            <a:r>
-              <a:rPr b="1"/>
-              <a:t>процесс завершается успешно</a:t>
-            </a:r>
-            <a:r>
-              <a:t>. Исключения не произошло, узел отработал, в журнале зелёная галочка. В таблице при этом пустая строка или мусор. Ошибки, которые видно, стоят дёшево; дорого стоят те, которые не видно, и первые два варианта относятся ко вторым.</a:t>
+              <a:t>Третий, две строки из одной заявки. Остаток разбирает следующий шаг, без человека. Это правильный ответ для зрелой системы, и у него своя цена: одна заявка превращается в две судьбы, и надо решать, кому звонить и кто закрывает вопрос. Как из одного элемента сделать несколько — тема девятого занятия, и сегодня мы туда не идём.</a:t>
             </a:r>
           </a:p>
           <a:p/>
           <a:p>
             <a:r>
-              <a:t>Третий — штатный разборщик вывода. Формат задаётся схемой, инструмент сам требует его от модели и умеет чинить ответ, если он разъехался. Ограничение одно и его стоит знать: он описывает финальный вывод шага, а не промежуточный.</a:t>
+              <a:t>Четвёртый, главная тема плюс пометка. Остаток разбирает тот, кто читает пометку. Хороший вариант, и у него есть незаметное условие: пометку надо куда-то положить — отдельным столбцом, — и кому-то её читать. Столбец, который никто не читает, работает так же, как первый вариант.</a:t>
             </a:r>
           </a:p>
           <a:p/>
           <a:p>
             <a:r>
-              <a:t>Четвёртый — отдельный узел извлечения. Сделан ровно под задачу «достать поля из текста», схема задаётся списком полей с описаниями словами. Платите отдельным вызовом модели.</a:t>
+              <a:t>Что мы возьмём и почему — следующий экран.</a:t>
             </a:r>
           </a:p>
         </p:txBody>
@@ -988,43 +1000,55 @@
           <a:lstStyle/>
           <a:p>
             <a:r>
-              <a:t>Меняю средний узел. Вместо Basic LLM Chain ставлю Information Extractor — блок, сделанный ровно под задачу «достать поля из текста».</a:t>
+              <a:t>Берём четвёртый вариант — главная тема плюс пометка. И смотрите, что для этого меняется: один узел из пяти, справочник. Форму не трогаем, извлечение не трогаем, запись и экран остаются как были.</a:t>
             </a:r>
           </a:p>
           <a:p/>
           <a:p>
             <a:r>
-              <a:t>Схему в нём можно задать тремя способами: примером готового JSON, полной схемой или списком атрибутов с описаниями. Беру третий, потому что он читается словами и его видно целиком.</a:t>
+              <a:t>В схеме извлечения появляется ещё одно поле — «ещё в заявке»: список тем, которые в тексте есть, кроме главной. В справочнике это поле проходит ту же сверку, что и тема, и попадает в отдельный столбец.</a:t>
             </a:r>
           </a:p>
           <a:p/>
           <a:p>
             <a:r>
-              <a:t>Первый атрибут — тема. В описании пишу не «тема заявки», а перечисляю, что бывает: курс, перенос занятия, оплата, другое. Описание здесь работает как инструкция: чем конкретнее, тем предсказуемее результат.</a:t>
+              <a:t>Теперь прогоняю пять заявок подряд, и это те самые заявки, на которых классификация обычно и ломается.</a:t>
             </a:r>
           </a:p>
           <a:p/>
           <a:p>
             <a:r>
-              <a:t>Второй — срочность. Описываю через то, что реально встречается в тексте: сегодня, на неделе, не указано.</a:t>
+              <a:t>Первая — две темы. Тема «перенос занятия», и в столбце «ещё в заявке» теперь стоит «оплата». Вторая тема перестала исчезать.</a:t>
             </a:r>
           </a:p>
           <a:p/>
           <a:p>
             <a:r>
-              <a:t>Третий — контакт. Телефон или почта из текста заявки. Обратите внимание: контакт у нас уже есть из формы, отдельным полем, и я всё равно прошу достать его из текста — в отдельный столбец. Зачем: люди регулярно пишут в сообщении второй адрес или номер, и рабочим оказывается он. На этой заявке в форме стоит один адрес, а в тексте приписано «пишите на anna.work» — в таблице будут оба, и видно, что они разные.</a:t>
+              <a:t>Вторая — три темы, и одна из них не наша: «хочу оплатить, перенести занятие и узнать про скидки для сотрудников». Смотрите на пометку: «перенос занятия · другое». Про скидки в справочнике нет ничего, и третья тема честно стала «другим» — не выдумкой и не пропуском.</a:t>
             </a:r>
           </a:p>
           <a:p/>
           <a:p>
             <a:r>
-              <a:t>Запускаю на той же заявке, что в прошлый раз. Смотрим: в таблице теперь три столбца, и в каждом лежит значение.</a:t>
+              <a:t>Третья — про юрлица. Такой темы в справочнике нет вовсе, и это правильно: мы не обязаны предусмотреть всё. Смотрите на экран: тема «другое». Честное «это не из нашего списка» — вместо пустой клетки и вместо выдумки.</a:t>
             </a:r>
           </a:p>
           <a:p/>
           <a:p>
             <a:r>
-              <a:t>И сразу проверка на прочность, на заявке с двумя темами сразу: «можно перенести занятие со вторника? И подскажите, как оплатить». Смотрите на столбец «тема»: там будет «перенос занятия». Про оплату не будет ничего — вторая тема исчезнет, и нигде об этом не будет сказано. Запомните этот экран, с него начнётся занятие про маршруты.</a:t>
+              <a:t>Четвёртая — «расскажите про курс», без всякой срочности. Тема «курс», срочность «не указано». Обратите внимание: модель не придумала срочность, потому что в справочнике для этого есть законное значение. Если бы его не было, она бы что-нибудь поставила — это самый частый способ получить выдумку в данных.</a:t>
+            </a:r>
+          </a:p>
+          <a:p/>
+          <a:p>
+            <a:r>
+              <a:t>И пятая, моя любимая. Заявка из одного слова: «ок». Прогоняю. Тема «другое», срочность «не указано», строка в таблице есть. Процесс не упал, клетки не пусты, и никто не соврал.</a:t>
+            </a:r>
+          </a:p>
+          <a:p/>
+          <a:p>
+            <a:r>
+              <a:t>Вот что я хочу, чтобы вы отсюда унесли. Классификация надёжна не тогда, когда модель всегда права, а тогда, когда у неё есть законный способ сказать «не знаю» — и этот способ ведёт к человеку, а не в пустую клетку.</a:t>
             </a:r>
           </a:p>
         </p:txBody>
@@ -1094,31 +1118,37 @@
           <a:lstStyle/>
           <a:p>
             <a:r>
-              <a:t>Главная практика этого кейса одна, и она стоит того, чтобы запомнить её формулировкой.</a:t>
+              <a:t>Три практики, и первая стоит того, чтобы запомнить формулировкой.</a:t>
             </a:r>
           </a:p>
           <a:p/>
           <a:p>
             <a:r>
-              <a:t>Описание атрибута — это инструкция для модели, а не подпись столбца для вас. Если в описании написано «тема заявки», вы получите случайные слова: «запись», «обучение», «вопрос по курсу», «интересуется аналитикой» — и ни одна сортировка по этому столбцу не соберётся. Если написано «курс, перенос занятия, оплата, другое» — получите одно из четырёх. Разница в одной строчке текста, а на выходе разница между данными и шумом.</a:t>
+              <a:t>В каждом справочнике обязано быть «иначе». «Другое» и «не указано» выглядят как признание, что список неполон, — и они им и являются. Только это условие его работы, и работает он ровно потому, что признаётся в неполноте. Уберите их — и модель на непонятной заявке не промолчит: она поставит в клетку то, что сочтёт ближайшим. Вы получите «курс» на заявке про юрлица и никогда об этом не узнаете, потому что значение законное.</a:t>
             </a:r>
           </a:p>
           <a:p/>
           <a:p>
             <a:r>
-              <a:t>Второе. Предусмотрите пустое значение заранее. Контакта в тексте может не быть вообще — человек заполнил форму и ничего не написал. Если в описании нет варианта «не указано», модель поставит туда что-нибудь: придумает формат, подставит почту из подписи, перепишет номер из другого поля. Это самый частый способ получить выдумку в данных, и чинится он одним словом в описании.</a:t>
+              <a:t>Второе. За «другим» нужен глаз. Этот столбец легко превращается в свалку: туда падает и многотемье, и экзотика, и «ок». Правильно смотреть на него как на очередь — заявки, которые процесс честно передал человеку. И смотреть на её рост: если «другое» было два процента, а стало двадцать — значит, в справочнике не хватает значения, и это сигнал. У такой очереди должен быть человек, иначе она ничем не отличается от исчезнувшей второй темы.</a:t>
             </a:r>
           </a:p>
           <a:p/>
           <a:p>
             <a:r>
-              <a:t>Третье — про то, где этот механизм ставить. Схема формата навешивается на шаг модели: цепочку, извлечение, классификацию. На агента её навешивать не надо — у агента свой механизм работы с форматом, и документация инструмента прямо предупреждает, что совмещать эти два не стоит. Запомните границу сейчас, чтобы на одиннадцатом занятии не чинить это полчаса.</a:t>
+              <a:t>Третье, про устройство. Перечисление в схеме — это просьба к модели, пусть и строгая: инструмент требует от неё одно из перечисленных значений. Но последней инстанцией остаётся обычный узел «задать поля». Почему оба: схема дёшево даёт хороший результат, узел даёт гарантию. В живой классификации всегда есть оба, и это не перестраховка.</a:t>
             </a:r>
           </a:p>
           <a:p/>
           <a:p>
             <a:r>
-              <a:t>И сравнение. В Activepieces поля задаются точно так же — описаниями словами. В sim отдельного узла для этого нет: структурированный вывод настраивается прямо внутри блока модели, галочкой и схемой. Приём один, мест его применения разное количество.</a:t>
+              <a:t>Отдельно граница, которую стоит знать заранее. Схему формата навешивают на шаг модели — цепочку, извлечение, классификацию. На агента её навешивать не надо: у агента свой механизм, и документация инструмента прямо предупреждает против совмещения. Это понадобится на одиннадцатом занятии.</a:t>
+            </a:r>
+          </a:p>
+          <a:p/>
+          <a:p>
+            <a:r>
+              <a:t>И сравнение. В Activepieces справочник собирается тем же способом: перечисление в схеме плюс шаг нормализации. В sim отдельного узла схемы нет — структурированный вывод настраивается внутри блока модели, то есть первая половина приёма есть, а вторую делают руками.</a:t>
             </a:r>
           </a:p>
         </p:txBody>
@@ -1494,31 +1524,58 @@
           <a:p/>
           <a:p>
             <a:r>
-              <a:t>Включаю Retry On Fail. Появляются два поля: сколько попыток и сколько ждать между ними. Ставлю три попытки и две секунды паузы.</a:t>
+              <a:t>Включаю Retry On Fail. Появляются два поля: сколько попыток и сколько ждать между ними. Ставлю три попытки и две секунды.</a:t>
             </a:r>
           </a:p>
           <a:p/>
           <a:p>
             <a:r>
-              <a:t>Ниже On Error, и выбираю Continue using error output. Смотрите на холст: у узла появился второй выход. Он подписан и обычно отрисован красным.</a:t>
+              <a:t>Ниже On Error, выбираю Continue using error output. Смотрите на холст: у узла появился второй выход, подписанный и отрисованный красным.</a:t>
             </a:r>
           </a:p>
           <a:p/>
           <a:p>
             <a:r>
-              <a:t>Теперь куда его вести. Самое простое и самое полезное: в тот же узел записи в таблицу. Только значения другие — тему ставлю текстом «не разобрано», текст заявки кладу как есть, время прихода сохраняю. Заявка в таблице есть, помечена, и по этому столбцу её видно.</a:t>
+              <a:t>Теперь куда его вести. В ту же таблицу, только значения другие: тема «другое», срочность «не указано», </a:t>
+            </a:r>
+            <a:r>
+              <a:rPr>
+                <a:latin typeface="Consolas"/>
+              </a:rPr>
+              <a:t>status</a:t>
+            </a:r>
+            <a:r>
+              <a:t> становится </a:t>
+            </a:r>
+            <a:r>
+              <a:rPr>
+                <a:latin typeface="Consolas"/>
+              </a:rPr>
+              <a:t>not_parsed</a:t>
+            </a:r>
+            <a:r>
+              <a:t> вместо </a:t>
+            </a:r>
+            <a:r>
+              <a:rPr>
+                <a:latin typeface="Consolas"/>
+              </a:rPr>
+              <a:t>ok</a:t>
+            </a:r>
+            <a:r>
+              <a:t>. И дальше свой экран результата, который честно печатает: вызов не удался после трёх попыток, строка записана, вот её номер.</a:t>
             </a:r>
           </a:p>
           <a:p/>
           <a:p>
             <a:r>
-              <a:t>Почему именно так, а не в отдельный приёмник: потому что человек, который утром смотрит таблицу, смотрит одну таблицу. Если неудачные заявки лежат в другом месте, он туда не пойдёт, пока не заподозрит, что надо. А мы только что видели, во что это обходится.</a:t>
+              <a:t>Почему в ту же таблицу, а не в отдельное место: потому что человек, который утром смотрит заявки, смотрит одну таблицу. Если неудачные лежат в другом месте, он туда не пойдёт, пока не заподозрит. А мы только что видели, во что это обходится — двое суток пропуска.</a:t>
             </a:r>
           </a:p>
           <a:p/>
           <a:p>
             <a:r>
-              <a:t>Теперь показываю, что это работает, и показываю настоящим отказом. Порчу ключ провайдера: добавляю в него лишний символ. Запускаю.</a:t>
+              <a:t>Теперь показываю, что это работает, и показываю настоящим отказом. Порчу ключ провайдера: добавляю лишний символ. Отправляю заявку.</a:t>
             </a:r>
           </a:p>
           <a:p/>
@@ -1530,13 +1587,19 @@
           <a:p/>
           <a:p>
             <a:r>
-              <a:t>Дальше элемент уходит в красную ветку, и в ней он несёт исходные данные формы плюс поле с текстом ошибки — то есть в таблицу можно записать и саму заявку, и причину. В таблице появилась строка с пометкой. А статус всего прогона — успех.</a:t>
+              <a:t>Дальше элемент уходит в красную ветку, и в ней он несёт исходные данные формы плюс поле с текстом ошибки — то есть в таблицу можно записать и саму заявку, и причину. Экран печатает «заявка принята, но не разобрана».</a:t>
             </a:r>
           </a:p>
           <a:p/>
           <a:p>
             <a:r>
-              <a:t>Возвращаю ключ, прогоняю ещё раз. Строка нормальная. Один узел, две судьбы, обе видны.</a:t>
+              <a:t>И главное число: статус всего прогона — успех. Три отказа подряд, а прогон зелёный.</a:t>
+            </a:r>
+          </a:p>
+          <a:p/>
+          <a:p>
+            <a:r>
+              <a:t>Возвращаю ключ, отправляю ещё раз. Экран обычный, строка нормальная. Один узел, две судьбы, и обе видны там, где заявку отправили.</a:t>
             </a:r>
           </a:p>
         </p:txBody>
@@ -2388,31 +2451,37 @@
           <a:p/>
           <a:p>
             <a:r>
-              <a:t>Процесс из пяти узлов. Форма принимает заявку. Узел извлечения достаёт три поля по описаниям. Успешные идут строкой в таблицу, неудачные — в ту же таблицу с пометкой. На узле модели стоит повтор, три попытки. Версия опубликована, то есть работает та же, что на холсте.</a:t>
+              <a:t>Форма принимает заявку и сама объясняет человеку, что с его текстом произойдёт. Узел извлечения достаёт тему, срочность, контакт из текста и пометку о других темах — всё по схеме с перечислением. Справочник сверяет и не оставляет ни пустых клеток, ни значений вне списка. Строка уходит в таблицу. Экран результата печатает всю дорогу в том же окне. А на узле извлечения стоят повтор и вторая ветка, так что отказ вызова тоже доезжает — с пометкой, а не в тишину.</a:t>
             </a:r>
           </a:p>
           <a:p/>
           <a:p>
             <a:r>
-              <a:t>Это не учебная заготовка. Это рабочий минимум: такой процесс можно поставить в небольшом центре и он будет приносить пользу, пока поток не вырастет.</a:t>
+              <a:t>Это не учебная заготовка. Такой процесс можно поставить в небольшом центре, и он будет приносить пользу, пока поток не вырастет. За каждую строку в этой таблице можно отвечать — ровно это мы и обсуждали в первом кейсе.</a:t>
             </a:r>
           </a:p>
           <a:p/>
           <a:p>
             <a:r>
-              <a:t>Файл называется так, как на экране. Ставится одним импортом через меню сценария. Что нужно с вашей стороны — свой n8n и ключ провайдера; инструкция по подъёму идёт вместе с файлом, там оба способа, с контейнером и без.</a:t>
+              <a:t>Файл называется так, как на экране. Ставится одним импортом через меню сценария. Что нужно с вашей стороны: свой n8n и ключ провайдера модели. Инструкция по подъёму идёт вместе с файлом, там оба способа — с контейнером и без.</a:t>
             </a:r>
           </a:p>
           <a:p/>
           <a:p>
             <a:r>
-              <a:t>Задание на дом не письменное, и его никто не проверяет. Просьба такая: поставьте, прогоните на трёх своих заявках — не на моих, на тех, что похожи на вашу работу, — и посмотрите, где развалится. Оно развалится, у меня нет на этот счёт иллюзий. Интересно, где именно и первым.</a:t>
+              <a:t>Два узла в файле придётся настроить самим, и это сделано намеренно: в узле модели пустые учётные данные, в узле таблицы — пустой выбор таблицы. Мой стенд вам недоступен, и чужой идентификатор в этих полях выглядел бы сломанным узлом — десять минут недоумения на ровном месте.</a:t>
             </a:r>
           </a:p>
           <a:p/>
           <a:p>
             <a:r>
-              <a:t>Потому что с этого мы начнём следующее занятие.</a:t>
+              <a:t>Задание на дом не письменное, и его никто не проверяет. Просьба такая: поставьте, отправьте три заявки, похожие на вашу настоящую работу, и посмотрите на экран результата. Где развалится первым? Оно развалится, у меня на этот счёт иллюзий нет.</a:t>
+            </a:r>
+          </a:p>
+          <a:p/>
+          <a:p>
+            <a:r>
+              <a:t>С этого мы и начнём следующее занятие.</a:t>
             </a:r>
           </a:p>
         </p:txBody>
@@ -2894,7 +2963,7 @@
           <a:p/>
           <a:p>
             <a:r>
-              <a:t>Задача выглядит очевидной, и в этом ловушка: очевидные задачи чаще всего собирают сложнее, чем нужно. Поэтому первый вопрос сегодня будет не «как сделать», а «из чего это вообще состоит».</a:t>
+              <a:t>Задача выглядит очевидной, и в этом ловушка — но не та, которую вы ждёте. Очевидные задачи обычно собирают не сложнее, чем нужно, а проще: до состояния «вроде работает». Поэтому первый вопрос сегодня — из скольких узлов собирается процесс, за который можно отвечать.</a:t>
             </a:r>
           </a:p>
           <a:p/>
@@ -2970,31 +3039,45 @@
           <a:lstStyle/>
           <a:p>
             <a:r>
-              <a:t>Прежде чем что-то собирать, стоит вслух посчитать, из чего это состоит. Вопрос именно такой: сколько узлов и какие.</a:t>
+              <a:t>Задача. В учебный центр приходят заявки через форму на сайте: имя, контакт и свободный текст — что человеку нужно. Сейчас их читают руками и переносят в таблицу, помечая, о чём заявка и насколько это срочно. По этим двум столбцам потом сортируют, считают и раскладывают заявки по людям.</a:t>
             </a:r>
           </a:p>
           <a:p/>
           <a:p>
             <a:r>
-              <a:t>Четыре варианта на экране, и ни один не поставлен для смеха. Два узла — форма и таблица, без всякой модели. Три — форма, модель, таблица. Четыре — то же самое плюс проверка перед записью. И четвёртый вариант, который формально не число: «зависит от того, что считать пометкой».</a:t>
+              <a:t>Задача — чтобы это происходило само. И обратите внимание на требование, которое я ставлю сразу: тема и срочность заполнены </a:t>
+            </a:r>
+            <a:r>
+              <a:rPr b="1"/>
+              <a:t>всегда</a:t>
+            </a:r>
+            <a:r>
+              <a:t>, и значения в них </a:t>
+            </a:r>
+            <a:r>
+              <a:rPr b="1"/>
+              <a:t>из справочника</a:t>
+            </a:r>
+            <a:r>
+              <a:t>. Не «обычно заполнены». Не «какое-то слово». Потому что столбец, в котором иногда пусто, а иногда «интересуется аналитикой», для сортировки не годится — по нему ничего не посчитать, и вся затея теряет смысл.</a:t>
             </a:r>
           </a:p>
           <a:p/>
           <a:p>
             <a:r>
-              <a:t>Выбирайте про себя, а двое-трое назовут вслух и скажут, почему. Довод важнее числа: в нём будет видно, что человек считает необходимым, а что лишним.</a:t>
+              <a:t>Вопрос: из скольких узлов соберётся процесс, который решает это полностью?</a:t>
             </a:r>
           </a:p>
           <a:p/>
           <a:p>
             <a:r>
-              <a:t>Подсказка, которая не подсказка: на этот вопрос нет единственного верного ответа, есть ответ для нашей постановки. И граница между «достаточно» и «мало» проходит ровно там, где мы договоримся, что такое «тема заявки» — название из короткого списка или фраза своими словами.</a:t>
+              <a:t>Четыре карточки: два, три, пять, и «зависит от того, что считать решением». Выбирайте и формулируйте довод — почему именно столько.</a:t>
             </a:r>
           </a:p>
           <a:p/>
           <a:p>
             <a:r>
-              <a:t>Я специально не называю сейчас, какие блоки есть в инструменте. Если я их перечислю, вопрос превратится в угадывание названного. Перечислю сразу после разбора.</a:t>
+              <a:t>Пока голосуете, подскажу, в какую сторону думать. Не «сколько узлов нужно, чтобы заработало», а «сколько нужно, чтобы я мог поручиться за каждую строку в этой таблице». Это разные числа, и разница между ними — содержание следующего экрана.</a:t>
             </a:r>
           </a:p>
         </p:txBody>
@@ -3064,37 +3147,45 @@
           <a:lstStyle/>
           <a:p>
             <a:r>
-              <a:t>Пройдём по всем четырём, потому что три из них содержат верную мысль.</a:t>
+              <a:t>Пройдём по ответам, и начну с того, который выбирает большинство.</a:t>
             </a:r>
           </a:p>
           <a:p/>
           <a:p>
             <a:r>
-              <a:t>Два узла. Форма кладёт заявку в таблицу, человек читает и помечает. Это работает, ничего не стоит и ломаться там нечему. Беда одна: ровно та работа, ради устранения которой задачу ставили, осталась на месте. Вариант честный, но задачу не решает.</a:t>
+              <a:t>Два узла — форма и таблица. Мгновенно, бесплатно, ничего не ломается. И задача не решена: тема и срочность сами не появятся, их по-прежнему ставит человек. Это не процесс, это труба.</a:t>
             </a:r>
           </a:p>
           <a:p/>
           <a:p>
             <a:r>
-              <a:t>Три узла — то, что мы и соберём. Между формой и таблицей встаёт шаг модели, который читает свободный текст и возвращает пометку. Минимальный процесс, который действительно делает работу.</a:t>
+              <a:t>Три узла — форма, шаг модели, таблица. Заявка доезжает, в столбце что-то появляется. Вот чего здесь нет. Во-первых, тема будет какой угодно: «запись», «обучение», «интересуется аналитикой», «Аналитика.» с точкой — и ни одна сортировка по такому столбцу не соберётся. Во-вторых, срочности не будет вовсе, если её отдельно не попросить. В-третьих, чтобы узнать, что получилось, надо идти в таблицу — а на занятии это переключение экрана на каждый прогон.</a:t>
             </a:r>
           </a:p>
           <a:p/>
           <a:p>
             <a:r>
-              <a:t>Четыре узла, с проверкой перед записью. Мысль верная и к ней мы придём, но сегодня она преждевременна по конкретной причине: проверять пока нечего. Модель вернёт связный текст, и у нас ещё нет отдельных значений, которые можно сверить. Как только они появятся — а это следующий кейс — проверка станет осмысленной.</a:t>
+              <a:t>Пять узлов — то, что мы сейчас соберём, и это именно решение. Между шагом модели и таблицей встаёт </a:t>
+            </a:r>
+            <a:r>
+              <a:rPr b="1"/>
+              <a:t>справочник</a:t>
+            </a:r>
+            <a:r>
+              <a:t>: он не даст ни пустой темы, ни темы вне списка. А в конце встаёт </a:t>
+            </a:r>
+            <a:r>
+              <a:rPr b="1"/>
+              <a:t>экран результата</a:t>
+            </a:r>
+            <a:r>
+              <a:t> — в том же окне браузера, где заявку отправили, печатается вход, что вернула модель, что решил справочник и что легло в таблицу.</a:t>
             </a:r>
           </a:p>
           <a:p/>
           <a:p>
             <a:r>
-              <a:t>Четвёртый вариант, «зависит от того, что считать пометкой», — самый интересный, потому что он верен и при этом не ответ. Зависит действительно от этого: если пометка это одно слово из списка, достаточно трёх узлов; если это фраза своими словами, их тоже три, но дальше с ней будет тяжело. Довод стоит договорить до конца, иначе он остаётся правильным ощущением.</a:t>
-            </a:r>
-          </a:p>
-          <a:p/>
-          <a:p>
-            <a:r>
-              <a:t>Теперь блоки, которые я нарочно не называл до голосования. Форма — n8n Form Trigger. Шаг модели — Basic LLM Chain. Таблица — Data Table.</a:t>
+              <a:t>Кто ответил «зависит» — вы правы по сути, и я приму этот ответ, если вы скажете, от чего. Ответ: от того, считаем ли мы решением то, что заработало, или то, за что можно поручиться.</a:t>
             </a:r>
           </a:p>
         </p:txBody>
@@ -3164,37 +3255,77 @@
           <a:lstStyle/>
           <a:p>
             <a:r>
-              <a:t>Собираем. Я делаю это на своей машине, вы смотрите; всё, что появится на холсте, продублировано на этом слайде.</a:t>
+              <a:t>Собираю. Пять узлов, и про каждый скажу, зачем он, а не только что в нём нажать.</a:t>
             </a:r>
           </a:p>
           <a:p/>
           <a:p>
             <a:r>
-              <a:t>Первый узел — форма. В n8n это n8n Form Trigger: описываем поля, которые видит человек. Имя — обычная строка. Контакт — строка. «Что нужно» — многострочное поле, потому что люди пишут абзацами. Все три обязательные, иначе придёт заявка без контакта, и дальше с ней делать нечего.</a:t>
+              <a:t>Первый — форма. Три поля, все обязательные: имя, контакт, свободный текст.</a:t>
             </a:r>
           </a:p>
           <a:p/>
           <a:p>
             <a:r>
-              <a:t>Второй — шаг модели, Basic LLM Chain. В нём два важных места. Первое: переключатель источника запроса ставим в «задать ниже», потому что текст запроса мы пишем сами, а не берём из чата. Второе: в само поле запроса подставляем выражением текст заявки с предыдущего узла — вот здесь и пригождается то, о чём говорили в теории. И отдельно, снизу, подключается узел модели: сам по себе этот блок ничего не вызывает, он только собирает запрос.</a:t>
+              <a:t>Второй — извлечение полей. Схему задаю </a:t>
+            </a:r>
+            <a:r>
+              <a:rPr b="1"/>
+              <a:t>вручную</a:t>
+            </a:r>
+            <a:r>
+              <a:t>, и вот зачем. Схему тут можно задать описаниями словами, и это проще. Но описание допустимые значения только </a:t>
+            </a:r>
+            <a:r>
+              <a:rPr b="1"/>
+              <a:t>предлагает</a:t>
+            </a:r>
+            <a:r>
+              <a:t>. А мне нужно, чтобы инструмент их </a:t>
+            </a:r>
+            <a:r>
+              <a:rPr b="1"/>
+              <a:t>перечислил</a:t>
+            </a:r>
+            <a:r>
+              <a:t>, — и для этого в схеме есть перечисление. Смотрите: тема — одно из четырёх, срочность — одно из трёх, оба обязательны. Последнее значение в каждом списке — «другое» и «не указано», и это не формальность: без них классификация упирается в пустую клетку на первой же непонятной заявке.</a:t>
             </a:r>
           </a:p>
           <a:p/>
           <a:p>
             <a:r>
-              <a:t>Третий — Data Table, внутренняя таблица n8n. Операция Insert, одна строка на заявку.</a:t>
+              <a:t>Третий — справочник. Обычный узел «задать поля», никакого кода. Он делает одно: если пришло не из списка или пришло пустым — ставит «другое» или «не указано». Зачем он, если перечисление уже в схеме? Потому что схема — просьба к модели, пусть и строгая, а справочник — последняя инстанция. Схему можно обойти, справочник нельзя. В живой классификации всегда есть оба, и мысль, которую стоит унести: </a:t>
+            </a:r>
+            <a:r>
+              <a:rPr b="1"/>
+              <a:t>модель предлагает, справочник решает</a:t>
+            </a:r>
+            <a:r>
+              <a:t>.</a:t>
             </a:r>
           </a:p>
           <a:p/>
           <a:p>
             <a:r>
-              <a:t>Запускаю. Заполняю форму так, как её заполнил бы человек: «хочу записаться на аналитику, желательно в вечернюю группу, звоните после шести». Смотрим, что пришло в таблицу.</a:t>
+              <a:t>Четвёртый — запись строки. Обратите внимание, откуда берутся значения: от справочника, не от модели. Поэтому в таблице не бывает ни пустой темы, ни темы вне списка.</a:t>
             </a:r>
           </a:p>
           <a:p/>
           <a:p>
             <a:r>
-              <a:t>Пришла строка, в ней есть пометка. Процесс работает, и на этом можно было бы закончить — если бы пометка нас устраивала. Посмотрите, в каком она виде, это понадобится через минуту.</a:t>
+              <a:t>Пятый — экран результата. Тот же узел формы, только режим «завершение». И вот что он печатает: что пришло, что вернул шаг модели, что решил справочник, и номер строки в таблице. В том же окне, где заявку отправили.</a:t>
+            </a:r>
+          </a:p>
+          <a:p/>
+          <a:p>
+            <a:r>
+              <a:t>Отправляю заявку. Смотрите на один экран — вся дорога от текста до строки здесь, и ни в журнал, ни в таблицу идти не нужно.</a:t>
+            </a:r>
+          </a:p>
+          <a:p/>
+          <a:p>
+            <a:r>
+              <a:t>Пять узлов вместо трёх. Два лишних — это ровно та разница, из-за которой за эту таблицу можно отвечать.</a:t>
             </a:r>
           </a:p>
         </p:txBody>
@@ -6501,8 +6632,8 @@
         </p:nvSpPr>
         <p:spPr>
           <a:xfrm>
-            <a:off x="502920" y="1133703"/>
-            <a:ext cx="82296" cy="746760"/>
+            <a:off x="502920" y="1110081"/>
+            <a:ext cx="82296" cy="982980"/>
           </a:xfrm>
           <a:prstGeom prst="roundRect">
             <a:avLst>
@@ -6547,8 +6678,8 @@
         </p:nvSpPr>
         <p:spPr>
           <a:xfrm>
-            <a:off x="859536" y="1261719"/>
-            <a:ext cx="10643616" cy="490727"/>
+            <a:off x="859536" y="1238097"/>
+            <a:ext cx="10643616" cy="726948"/>
           </a:xfrm>
           <a:prstGeom prst="rect">
             <a:avLst/>
@@ -6576,7 +6707,7 @@
                 </a:solidFill>
                 <a:latin typeface="Arial"/>
               </a:rPr>
-              <a:t>Data Table не требует внешних учётных данных.</a:t>
+              <a:t>Экран результата ставится в первый же проход.</a:t>
             </a:r>
             <a:r>
               <a:rPr sz="1500" b="1" i="0">
@@ -6585,7 +6716,7 @@
                 </a:solidFill>
                 <a:latin typeface="Arial"/>
               </a:rPr>
-              <a:t> Ни Google-аккаунта, ни базы. Для первого процесса это самый дешёвый приёмник результата, и поэтому он здесь.</a:t>
+              <a:t> Он печатает вход, что предложила модель, что решил справочник и номер строки — в том же окне. Без него каждая проверка стоит двух переключений: журнал прогонов и таблица.</a:t>
             </a:r>
           </a:p>
         </p:txBody>
@@ -6598,7 +6729,7 @@
         </p:nvSpPr>
         <p:spPr>
           <a:xfrm>
-            <a:off x="502920" y="2520924"/>
+            <a:off x="502920" y="2674467"/>
             <a:ext cx="82296" cy="746760"/>
           </a:xfrm>
           <a:prstGeom prst="roundRect">
@@ -6644,7 +6775,7 @@
         </p:nvSpPr>
         <p:spPr>
           <a:xfrm>
-            <a:off x="859536" y="2648940"/>
+            <a:off x="859536" y="2802483"/>
             <a:ext cx="10643616" cy="490727"/>
           </a:xfrm>
           <a:prstGeom prst="rect">
@@ -6673,7 +6804,7 @@
                 </a:solidFill>
                 <a:latin typeface="Arial"/>
               </a:rPr>
-              <a:t>Basic LLM Chain не умеет ни памяти, ни инструментов</a:t>
+              <a:t>Data Table не требует внешних учётных данных.</a:t>
             </a:r>
             <a:r>
               <a:rPr sz="1500" b="1" i="0">
@@ -6682,7 +6813,7 @@
                 </a:solidFill>
                 <a:latin typeface="Arial"/>
               </a:rPr>
-              <a:t> — так записано в документации. Нужны они — нужен другой блок, и это ступень Семинара 11.</a:t>
+              <a:t> Ни Google-аккаунта, ни базы. Для первого процесса это самый дешёвый приёмник результата, и поэтому он здесь.</a:t>
             </a:r>
           </a:p>
         </p:txBody>
@@ -6695,7 +6826,7 @@
         </p:nvSpPr>
         <p:spPr>
           <a:xfrm>
-            <a:off x="502920" y="3908145"/>
+            <a:off x="502920" y="4002633"/>
             <a:ext cx="82296" cy="746760"/>
           </a:xfrm>
           <a:prstGeom prst="roundRect">
@@ -6741,7 +6872,7 @@
         </p:nvSpPr>
         <p:spPr>
           <a:xfrm>
-            <a:off x="859536" y="4036161"/>
+            <a:off x="859536" y="4130649"/>
             <a:ext cx="10643616" cy="490727"/>
           </a:xfrm>
           <a:prstGeom prst="rect">
@@ -6770,7 +6901,7 @@
                 </a:solidFill>
                 <a:latin typeface="Arial"/>
               </a:rPr>
-              <a:t>Собирать удобнее с ручного триггера.</a:t>
+              <a:t>Basic LLM Chain не умеет ни памяти, ни инструментов</a:t>
             </a:r>
             <a:r>
               <a:rPr sz="1500" b="1" i="0">
@@ -6779,7 +6910,7 @@
                 </a:solidFill>
                 <a:latin typeface="Arial"/>
               </a:rPr>
-              <a:t> Форму подключать, когда остальное уже работает: не придётся заполнять её на каждую проверку.</a:t>
+              <a:t> — так записано в документации. Нужны они — нужен другой блок, и это ступень Семинара 11.</a:t>
             </a:r>
           </a:p>
         </p:txBody>
@@ -6792,7 +6923,7 @@
         </p:nvSpPr>
         <p:spPr>
           <a:xfrm>
-            <a:off x="502920" y="5295366"/>
+            <a:off x="502920" y="5330799"/>
             <a:ext cx="82296" cy="746760"/>
           </a:xfrm>
           <a:prstGeom prst="roundRect">
@@ -6838,7 +6969,7 @@
         </p:nvSpPr>
         <p:spPr>
           <a:xfrm>
-            <a:off x="859536" y="5423382"/>
+            <a:off x="859536" y="5458815"/>
             <a:ext cx="10643616" cy="490727"/>
           </a:xfrm>
           <a:prstGeom prst="rect">
@@ -6876,7 +7007,7 @@
                 </a:solidFill>
                 <a:latin typeface="Arial"/>
               </a:rPr>
-              <a:t> в Activepieces это те же три шага другими блоками. В LangFlow такой процесс собрать можно, а запустить по расписанию нечем — планировщика у него нет вовсе.</a:t>
+              <a:t> в Activepieces те же пять шагов другими блоками. В LangFlow такой процесс собрать можно, а запустить по расписанию нечем — планировщика у него нет вовсе.</a:t>
             </a:r>
           </a:p>
         </p:txBody>
@@ -7033,7 +7164,7 @@
                 </a:solidFill>
                 <a:latin typeface="Arial"/>
               </a:rPr>
-              <a:t>«В таблице один столбец, и в нём абзац»</a:t>
+              <a:t>«В заявке две темы, а в таблице одна»</a:t>
             </a:r>
           </a:p>
         </p:txBody>
@@ -7495,7 +7626,7 @@
                 </a:solidFill>
                 <a:latin typeface="Arial"/>
               </a:rPr>
-              <a:t>Как достать значения из текста?</a:t>
+              <a:t>Что писать в тему, если их две?</a:t>
             </a:r>
           </a:p>
         </p:txBody>
@@ -7508,8 +7639,8 @@
         </p:nvSpPr>
         <p:spPr>
           <a:xfrm>
-            <a:off x="502920" y="1445514"/>
-            <a:ext cx="11183112" cy="919353"/>
+            <a:off x="502920" y="1526438"/>
+            <a:ext cx="11183112" cy="717042"/>
           </a:xfrm>
           <a:prstGeom prst="roundRect">
             <a:avLst>
@@ -7556,8 +7687,8 @@
         </p:nvSpPr>
         <p:spPr>
           <a:xfrm>
-            <a:off x="521208" y="1500378"/>
-            <a:ext cx="64008" cy="809625"/>
+            <a:off x="521208" y="1581302"/>
+            <a:ext cx="64008" cy="607314"/>
           </a:xfrm>
           <a:prstGeom prst="roundRect">
             <a:avLst>
@@ -7602,8 +7733,8 @@
         </p:nvSpPr>
         <p:spPr>
           <a:xfrm>
-            <a:off x="804672" y="1582674"/>
-            <a:ext cx="10643616" cy="645032"/>
+            <a:off x="804672" y="1663598"/>
+            <a:ext cx="10643616" cy="442722"/>
           </a:xfrm>
           <a:prstGeom prst="rect">
             <a:avLst/>
@@ -7631,7 +7762,7 @@
                 </a:solidFill>
                 <a:latin typeface="Arial"/>
               </a:rPr>
-              <a:t>пришло:</a:t>
+              <a:t>в заявке:</a:t>
             </a:r>
             <a:r>
               <a:rPr sz="1350" b="0" i="0">
@@ -7640,7 +7771,70 @@
                 </a:solidFill>
                 <a:latin typeface="Arial"/>
               </a:rPr>
-              <a:t> «Похоже, человек хочет записаться на курс по аналитике, просит перезвонить сегодня после шести, телефон указан в конце»</a:t>
+              <a:t> </a:t>
+            </a:r>
+            <a:r>
+              <a:rPr sz="1350" b="0" i="0">
+                <a:solidFill>
+                  <a:srgbClr val="141B2E"/>
+                </a:solidFill>
+                <a:latin typeface="Consolas"/>
+              </a:rPr>
+              <a:t>перенос</a:t>
+            </a:r>
+            <a:r>
+              <a:rPr sz="1350" b="0" i="0">
+                <a:solidFill>
+                  <a:srgbClr val="141B2E"/>
+                </a:solidFill>
+                <a:latin typeface="Arial"/>
+              </a:rPr>
+              <a:t> </a:t>
+            </a:r>
+            <a:r>
+              <a:rPr sz="1350" b="0" i="0">
+                <a:solidFill>
+                  <a:srgbClr val="141B2E"/>
+                </a:solidFill>
+                <a:latin typeface="Consolas"/>
+              </a:rPr>
+              <a:t>занятия</a:t>
+            </a:r>
+            <a:r>
+              <a:rPr sz="1350" b="0" i="0">
+                <a:solidFill>
+                  <a:srgbClr val="141B2E"/>
+                </a:solidFill>
+                <a:latin typeface="Arial"/>
+              </a:rPr>
+              <a:t> </a:t>
+            </a:r>
+            <a:r>
+              <a:rPr sz="1350" b="1" i="0">
+                <a:solidFill>
+                  <a:srgbClr val="141B2E"/>
+                </a:solidFill>
+                <a:latin typeface="Arial"/>
+              </a:rPr>
+              <a:t>и</a:t>
+            </a:r>
+            <a:r>
+              <a:rPr sz="1350" b="0" i="0">
+                <a:solidFill>
+                  <a:srgbClr val="141B2E"/>
+                </a:solidFill>
+                <a:latin typeface="Arial"/>
+              </a:rPr>
+              <a:t> </a:t>
+            </a:r>
+            <a:r>
+              <a:rPr sz="1350" b="0" i="0">
+                <a:solidFill>
+                  <a:srgbClr val="141B2E"/>
+                </a:solidFill>
+                <a:latin typeface="Consolas"/>
+              </a:rPr>
+              <a:t>оплата</a:t>
             </a:r>
           </a:p>
           <a:p>
@@ -7659,7 +7853,7 @@
                 </a:solidFill>
                 <a:latin typeface="Arial"/>
               </a:rPr>
-              <a:t>нужно:</a:t>
+              <a:t>в таблице:</a:t>
             </a:r>
             <a:r>
               <a:rPr sz="1350" b="0" i="0">
@@ -7668,7 +7862,7 @@
                 </a:solidFill>
                 <a:latin typeface="Arial"/>
               </a:rPr>
-              <a:t> </a:t>
+              <a:t> одна клетка </a:t>
             </a:r>
             <a:r>
               <a:rPr sz="1350" b="0" i="0">
@@ -7677,97 +7871,7 @@
                 </a:solidFill>
                 <a:latin typeface="Consolas"/>
               </a:rPr>
-              <a:t>тема:</a:t>
-            </a:r>
-            <a:r>
-              <a:rPr sz="1350" b="0" i="0">
-                <a:solidFill>
-                  <a:srgbClr val="141B2E"/>
-                </a:solidFill>
-                <a:latin typeface="Arial"/>
-              </a:rPr>
-              <a:t> </a:t>
-            </a:r>
-            <a:r>
-              <a:rPr sz="1350" b="0" i="0">
-                <a:solidFill>
-                  <a:srgbClr val="141B2E"/>
-                </a:solidFill>
-                <a:latin typeface="Consolas"/>
-              </a:rPr>
-              <a:t>аналитика</a:t>
-            </a:r>
-            <a:r>
-              <a:rPr sz="1350" b="0" i="0">
-                <a:solidFill>
-                  <a:srgbClr val="141B2E"/>
-                </a:solidFill>
-                <a:latin typeface="Arial"/>
-              </a:rPr>
-              <a:t> · </a:t>
-            </a:r>
-            <a:r>
-              <a:rPr sz="1350" b="0" i="0">
-                <a:solidFill>
-                  <a:srgbClr val="141B2E"/>
-                </a:solidFill>
-                <a:latin typeface="Consolas"/>
-              </a:rPr>
-              <a:t>срочность:</a:t>
-            </a:r>
-            <a:r>
-              <a:rPr sz="1350" b="0" i="0">
-                <a:solidFill>
-                  <a:srgbClr val="141B2E"/>
-                </a:solidFill>
-                <a:latin typeface="Arial"/>
-              </a:rPr>
-              <a:t> </a:t>
-            </a:r>
-            <a:r>
-              <a:rPr sz="1350" b="0" i="0">
-                <a:solidFill>
-                  <a:srgbClr val="141B2E"/>
-                </a:solidFill>
-                <a:latin typeface="Consolas"/>
-              </a:rPr>
-              <a:t>сегодня</a:t>
-            </a:r>
-            <a:r>
-              <a:rPr sz="1350" b="0" i="0">
-                <a:solidFill>
-                  <a:srgbClr val="141B2E"/>
-                </a:solidFill>
-                <a:latin typeface="Arial"/>
-              </a:rPr>
-              <a:t> · </a:t>
-            </a:r>
-            <a:r>
-              <a:rPr sz="1350" b="0" i="0">
-                <a:solidFill>
-                  <a:srgbClr val="141B2E"/>
-                </a:solidFill>
-                <a:latin typeface="Consolas"/>
-              </a:rPr>
-              <a:t>контакт:</a:t>
-            </a:r>
-            <a:r>
-              <a:rPr sz="1350" b="0" i="0">
-                <a:solidFill>
-                  <a:srgbClr val="141B2E"/>
-                </a:solidFill>
-                <a:latin typeface="Arial"/>
-              </a:rPr>
-              <a:t> </a:t>
-            </a:r>
-            <a:r>
-              <a:rPr sz="1350" b="0" i="0">
-                <a:solidFill>
-                  <a:srgbClr val="141B2E"/>
-                </a:solidFill>
-                <a:latin typeface="Consolas"/>
-              </a:rPr>
-              <a:t>+7…</a:t>
+              <a:t>тема</a:t>
             </a:r>
           </a:p>
         </p:txBody>
@@ -7780,7 +7884,7 @@
         </p:nvSpPr>
         <p:spPr>
           <a:xfrm>
-            <a:off x="502920" y="3032379"/>
+            <a:off x="502920" y="2910992"/>
             <a:ext cx="11183112" cy="822960"/>
           </a:xfrm>
           <a:prstGeom prst="roundRect">
@@ -7828,7 +7932,7 @@
         </p:nvSpPr>
         <p:spPr>
           <a:xfrm>
-            <a:off x="722376" y="3160395"/>
+            <a:off x="722376" y="3039008"/>
             <a:ext cx="10634472" cy="566928"/>
           </a:xfrm>
           <a:prstGeom prst="rect">
@@ -7857,7 +7961,7 @@
                 </a:solidFill>
                 <a:latin typeface="Arial"/>
               </a:rPr>
-              <a:t>Как получить от шага модели именно значения?</a:t>
+              <a:t>Что должно попасть в тему?</a:t>
             </a:r>
           </a:p>
         </p:txBody>
@@ -7870,7 +7974,7 @@
         </p:nvSpPr>
         <p:spPr>
           <a:xfrm>
-            <a:off x="502920" y="4522851"/>
+            <a:off x="502920" y="4401464"/>
             <a:ext cx="2686050" cy="1051560"/>
           </a:xfrm>
           <a:prstGeom prst="roundRect">
@@ -7918,7 +8022,7 @@
         </p:nvSpPr>
         <p:spPr>
           <a:xfrm>
-            <a:off x="612648" y="4522851"/>
+            <a:off x="612648" y="4401464"/>
             <a:ext cx="2466594" cy="1051560"/>
           </a:xfrm>
           <a:prstGeom prst="rect">
@@ -7947,7 +8051,7 @@
                 </a:solidFill>
                 <a:latin typeface="Arial"/>
               </a:rPr>
-              <a:t>попросить в промпте «ответь только JSON»</a:t>
+              <a:t>первую из найденных</a:t>
             </a:r>
           </a:p>
         </p:txBody>
@@ -7960,7 +8064,7 @@
         </p:nvSpPr>
         <p:spPr>
           <a:xfrm>
-            <a:off x="3335274" y="4522851"/>
+            <a:off x="3335274" y="4401464"/>
             <a:ext cx="2686050" cy="1051560"/>
           </a:xfrm>
           <a:prstGeom prst="roundRect">
@@ -8008,7 +8112,7 @@
         </p:nvSpPr>
         <p:spPr>
           <a:xfrm>
-            <a:off x="3445002" y="4522851"/>
+            <a:off x="3445002" y="4401464"/>
             <a:ext cx="2466594" cy="1051560"/>
           </a:xfrm>
           <a:prstGeom prst="rect">
@@ -8037,7 +8141,7 @@
                 </a:solidFill>
                 <a:latin typeface="Arial"/>
               </a:rPr>
-              <a:t>разобрать ответ регулярным выражением</a:t>
+              <a:t>другое — пусть разбирает человек</a:t>
             </a:r>
           </a:p>
         </p:txBody>
@@ -8050,7 +8154,7 @@
         </p:nvSpPr>
         <p:spPr>
           <a:xfrm>
-            <a:off x="6167628" y="4522851"/>
+            <a:off x="6167628" y="4401464"/>
             <a:ext cx="2686050" cy="1051560"/>
           </a:xfrm>
           <a:prstGeom prst="roundRect">
@@ -8098,7 +8202,7 @@
         </p:nvSpPr>
         <p:spPr>
           <a:xfrm>
-            <a:off x="6277356" y="4522851"/>
+            <a:off x="6277356" y="4401464"/>
             <a:ext cx="2466594" cy="1051560"/>
           </a:xfrm>
           <a:prstGeom prst="rect">
@@ -8127,7 +8231,7 @@
                 </a:solidFill>
                 <a:latin typeface="Arial"/>
               </a:rPr>
-              <a:t>штатный разборщик вывода</a:t>
+              <a:t>две строки вместо одной</a:t>
             </a:r>
           </a:p>
         </p:txBody>
@@ -8140,7 +8244,7 @@
         </p:nvSpPr>
         <p:spPr>
           <a:xfrm>
-            <a:off x="8999982" y="4522851"/>
+            <a:off x="8999982" y="4401464"/>
             <a:ext cx="2686050" cy="1051560"/>
           </a:xfrm>
           <a:prstGeom prst="roundRect">
@@ -8188,7 +8292,7 @@
         </p:nvSpPr>
         <p:spPr>
           <a:xfrm>
-            <a:off x="9109710" y="4522851"/>
+            <a:off x="9109710" y="4401464"/>
             <a:ext cx="2466594" cy="1051560"/>
           </a:xfrm>
           <a:prstGeom prst="rect">
@@ -8217,7 +8321,7 @@
                 </a:solidFill>
                 <a:latin typeface="Arial"/>
               </a:rPr>
-              <a:t>отдельный узел, который достаёт поля</a:t>
+              <a:t>главную, и пометить, что есть ещё</a:t>
             </a:r>
           </a:p>
         </p:txBody>
@@ -8327,7 +8431,7 @@
                 </a:solidFill>
                 <a:latin typeface="Arial"/>
               </a:rPr>
-              <a:t>Чем платит каждый способ</a:t>
+              <a:t>Кто разбирает остаток</a:t>
             </a:r>
           </a:p>
         </p:txBody>
@@ -8340,12 +8444,12 @@
         </p:nvSpPr>
         <p:spPr>
           <a:xfrm>
-            <a:off x="502920" y="1424686"/>
-            <a:ext cx="11183112" cy="2766695"/>
+            <a:off x="502920" y="1643761"/>
+            <a:ext cx="11183112" cy="2219007"/>
           </a:xfrm>
           <a:prstGeom prst="roundRect">
             <a:avLst>
-              <a:gd name="adj" fmla="val 11016"/>
+              <a:gd name="adj" fmla="val 13735"/>
             </a:avLst>
           </a:prstGeom>
           <a:solidFill>
@@ -8388,8 +8492,8 @@
         </p:nvSpPr>
         <p:spPr>
           <a:xfrm>
-            <a:off x="685800" y="1607566"/>
-            <a:ext cx="1839925" cy="282067"/>
+            <a:off x="685800" y="1826641"/>
+            <a:ext cx="2438022" cy="282067"/>
           </a:xfrm>
           <a:prstGeom prst="rect">
             <a:avLst/>
@@ -8417,7 +8521,7 @@
                 </a:solidFill>
                 <a:latin typeface="Arial"/>
               </a:rPr>
-              <a:t>СПОСОБ</a:t>
+              <a:t>ОТВЕТ</a:t>
             </a:r>
           </a:p>
         </p:txBody>
@@ -8430,8 +8534,8 @@
         </p:nvSpPr>
         <p:spPr>
           <a:xfrm>
-            <a:off x="2672029" y="1607566"/>
-            <a:ext cx="3878688" cy="282067"/>
+            <a:off x="3270126" y="1826641"/>
+            <a:ext cx="2651888" cy="282067"/>
           </a:xfrm>
           <a:prstGeom prst="rect">
             <a:avLst/>
@@ -8459,7 +8563,7 @@
                 </a:solidFill>
                 <a:latin typeface="Arial"/>
               </a:rPr>
-              <a:t>ЧТО ДАЁТ</a:t>
+              <a:t>ОСТАТОК РАЗБИРАЕТ</a:t>
             </a:r>
           </a:p>
         </p:txBody>
@@ -8472,8 +8576,8 @@
         </p:nvSpPr>
         <p:spPr>
           <a:xfrm>
-            <a:off x="6697021" y="1607566"/>
-            <a:ext cx="4659826" cy="282067"/>
+            <a:off x="6068319" y="1826641"/>
+            <a:ext cx="5288528" cy="282067"/>
           </a:xfrm>
           <a:prstGeom prst="rect">
             <a:avLst/>
@@ -8514,8 +8618,8 @@
         </p:nvSpPr>
         <p:spPr>
           <a:xfrm>
-            <a:off x="685800" y="1889633"/>
-            <a:ext cx="1839925" cy="529717"/>
+            <a:off x="685800" y="2108708"/>
+            <a:ext cx="2438022" cy="347154"/>
           </a:xfrm>
           <a:prstGeom prst="rect">
             <a:avLst/>
@@ -8543,7 +8647,7 @@
                 </a:solidFill>
                 <a:latin typeface="Arial"/>
               </a:rPr>
-              <a:t>просьба в промпте</a:t>
+              <a:t>первую из найденных</a:t>
             </a:r>
           </a:p>
         </p:txBody>
@@ -8556,8 +8660,8 @@
         </p:nvSpPr>
         <p:spPr>
           <a:xfrm>
-            <a:off x="2672029" y="1889633"/>
-            <a:ext cx="3878688" cy="529717"/>
+            <a:off x="3270126" y="2108708"/>
+            <a:ext cx="2651888" cy="347154"/>
           </a:xfrm>
           <a:prstGeom prst="rect">
             <a:avLst/>
@@ -8579,13 +8683,13 @@
               </a:spcAft>
             </a:pPr>
             <a:r>
-              <a:rPr sz="1250" b="0" i="0">
-                <a:solidFill>
-                  <a:srgbClr val="141B2E"/>
-                </a:solidFill>
-                <a:latin typeface="Arial"/>
-              </a:rPr>
-              <a:t>ничего не стоит, работает в большинстве случаев</a:t>
+              <a:rPr sz="1250" b="1" i="0">
+                <a:solidFill>
+                  <a:srgbClr val="141B2E"/>
+                </a:solidFill>
+                <a:latin typeface="Arial"/>
+              </a:rPr>
+              <a:t>никто</a:t>
             </a:r>
           </a:p>
         </p:txBody>
@@ -8598,8 +8702,8 @@
         </p:nvSpPr>
         <p:spPr>
           <a:xfrm>
-            <a:off x="6697021" y="1889633"/>
-            <a:ext cx="4659826" cy="529717"/>
+            <a:off x="6068319" y="2108708"/>
+            <a:ext cx="5288528" cy="347154"/>
           </a:xfrm>
           <a:prstGeom prst="rect">
             <a:avLst/>
@@ -8627,7 +8731,7 @@
                 </a:solidFill>
                 <a:latin typeface="Arial"/>
               </a:rPr>
-              <a:t>модель добавляет пояснение вокруг, обрывает скобку, меняет формат между вызовами</a:t>
+              <a:t>вторая тема исчезает молча — то, что мы только что видели</a:t>
             </a:r>
           </a:p>
         </p:txBody>
@@ -8640,7 +8744,7 @@
         </p:nvCxnSpPr>
         <p:spPr>
           <a:xfrm>
-            <a:off x="685800" y="2419350"/>
+            <a:off x="685800" y="2455862"/>
             <a:ext cx="10817352" cy="0"/>
           </a:xfrm>
           <a:prstGeom prst="line">
@@ -8675,8 +8779,8 @@
         </p:nvSpPr>
         <p:spPr>
           <a:xfrm>
-            <a:off x="685800" y="2419350"/>
-            <a:ext cx="1839925" cy="529717"/>
+            <a:off x="685800" y="2455862"/>
+            <a:ext cx="2438022" cy="347154"/>
           </a:xfrm>
           <a:prstGeom prst="rect">
             <a:avLst/>
@@ -8698,13 +8802,13 @@
               </a:spcAft>
             </a:pPr>
             <a:r>
-              <a:rPr sz="1250" b="0" i="0">
-                <a:solidFill>
-                  <a:srgbClr val="141B2E"/>
-                </a:solidFill>
-                <a:latin typeface="Arial"/>
-              </a:rPr>
-              <a:t>регулярное выражение</a:t>
+              <a:rPr sz="1250" b="1" i="0">
+                <a:solidFill>
+                  <a:srgbClr val="141B2E"/>
+                </a:solidFill>
+                <a:latin typeface="Arial"/>
+              </a:rPr>
+              <a:t>«другое»</a:t>
             </a:r>
           </a:p>
         </p:txBody>
@@ -8717,8 +8821,8 @@
         </p:nvSpPr>
         <p:spPr>
           <a:xfrm>
-            <a:off x="2672029" y="2419350"/>
-            <a:ext cx="3878688" cy="529717"/>
+            <a:off x="3270126" y="2455862"/>
+            <a:ext cx="2651888" cy="347154"/>
           </a:xfrm>
           <a:prstGeom prst="rect">
             <a:avLst/>
@@ -8740,13 +8844,22 @@
               </a:spcAft>
             </a:pPr>
             <a:r>
+              <a:rPr sz="1250" b="1" i="0">
+                <a:solidFill>
+                  <a:srgbClr val="141B2E"/>
+                </a:solidFill>
+                <a:latin typeface="Arial"/>
+              </a:rPr>
+              <a:t>человек</a:t>
+            </a:r>
+            <a:r>
               <a:rPr sz="1250" b="0" i="0">
                 <a:solidFill>
                   <a:srgbClr val="141B2E"/>
                 </a:solidFill>
                 <a:latin typeface="Arial"/>
               </a:rPr>
-              <a:t>полный контроль над разбором</a:t>
+              <a:t>, и он об этом знает</a:t>
             </a:r>
           </a:p>
         </p:txBody>
@@ -8759,8 +8872,8 @@
         </p:nvSpPr>
         <p:spPr>
           <a:xfrm>
-            <a:off x="6697021" y="2419350"/>
-            <a:ext cx="4659826" cy="529717"/>
+            <a:off x="6068319" y="2455862"/>
+            <a:ext cx="5288528" cy="347154"/>
           </a:xfrm>
           <a:prstGeom prst="rect">
             <a:avLst/>
@@ -8788,7 +8901,7 @@
                 </a:solidFill>
                 <a:latin typeface="Arial"/>
               </a:rPr>
-              <a:t>при любом отклонении формата не находит ничего и отдаёт пустое</a:t>
+              <a:t>в «другое» сваливается и многотемье, и настоящая экзотика</a:t>
             </a:r>
           </a:p>
         </p:txBody>
@@ -8801,7 +8914,7 @@
         </p:nvCxnSpPr>
         <p:spPr>
           <a:xfrm>
-            <a:off x="685800" y="2949067"/>
+            <a:off x="685800" y="2803017"/>
             <a:ext cx="10817352" cy="0"/>
           </a:xfrm>
           <a:prstGeom prst="line">
@@ -8836,8 +8949,8 @@
         </p:nvSpPr>
         <p:spPr>
           <a:xfrm>
-            <a:off x="685800" y="2949067"/>
-            <a:ext cx="1839925" cy="529717"/>
+            <a:off x="685800" y="2803017"/>
+            <a:ext cx="2438022" cy="529717"/>
           </a:xfrm>
           <a:prstGeom prst="rect">
             <a:avLst/>
@@ -8859,13 +8972,13 @@
               </a:spcAft>
             </a:pPr>
             <a:r>
-              <a:rPr sz="1250" b="1" i="0">
-                <a:solidFill>
-                  <a:srgbClr val="141B2E"/>
-                </a:solidFill>
-                <a:latin typeface="Arial"/>
-              </a:rPr>
-              <a:t>штатный разборщик вывода</a:t>
+              <a:rPr sz="1250" b="0" i="0">
+                <a:solidFill>
+                  <a:srgbClr val="141B2E"/>
+                </a:solidFill>
+                <a:latin typeface="Arial"/>
+              </a:rPr>
+              <a:t>две строки из одной заявки</a:t>
             </a:r>
           </a:p>
         </p:txBody>
@@ -8878,8 +8991,8 @@
         </p:nvSpPr>
         <p:spPr>
           <a:xfrm>
-            <a:off x="2672029" y="2949067"/>
-            <a:ext cx="3878688" cy="529717"/>
+            <a:off x="3270126" y="2803017"/>
+            <a:ext cx="2651888" cy="529717"/>
           </a:xfrm>
           <a:prstGeom prst="rect">
             <a:avLst/>
@@ -8901,13 +9014,22 @@
               </a:spcAft>
             </a:pPr>
             <a:r>
+              <a:rPr sz="1250" b="1" i="0">
+                <a:solidFill>
+                  <a:srgbClr val="141B2E"/>
+                </a:solidFill>
+                <a:latin typeface="Arial"/>
+              </a:rPr>
+              <a:t>следующий шаг</a:t>
+            </a:r>
+            <a:r>
               <a:rPr sz="1250" b="0" i="0">
                 <a:solidFill>
                   <a:srgbClr val="141B2E"/>
                 </a:solidFill>
                 <a:latin typeface="Arial"/>
               </a:rPr>
-              <a:t>формат задаётся схемой явно, есть авто-починка</a:t>
+              <a:t>, без человека</a:t>
             </a:r>
           </a:p>
         </p:txBody>
@@ -8920,8 +9042,8 @@
         </p:nvSpPr>
         <p:spPr>
           <a:xfrm>
-            <a:off x="6697021" y="2949067"/>
-            <a:ext cx="4659826" cy="529717"/>
+            <a:off x="6068319" y="2803017"/>
+            <a:ext cx="5288528" cy="529717"/>
           </a:xfrm>
           <a:prstGeom prst="rect">
             <a:avLst/>
@@ -8949,25 +9071,7 @@
                 </a:solidFill>
                 <a:latin typeface="Arial"/>
               </a:rPr>
-              <a:t>описывает </a:t>
-            </a:r>
-            <a:r>
-              <a:rPr sz="1250" b="1" i="0">
-                <a:solidFill>
-                  <a:srgbClr val="141B2E"/>
-                </a:solidFill>
-                <a:latin typeface="Arial"/>
-              </a:rPr>
-              <a:t>финальный</a:t>
-            </a:r>
-            <a:r>
-              <a:rPr sz="1250" b="0" i="0">
-                <a:solidFill>
-                  <a:srgbClr val="141B2E"/>
-                </a:solidFill>
-                <a:latin typeface="Arial"/>
-              </a:rPr>
-              <a:t> вывод шага, не промежуточный</a:t>
+              <a:t>одна заявка — две судьбы: кому звонить и кто закрывает</a:t>
             </a:r>
           </a:p>
         </p:txBody>
@@ -8980,7 +9084,7 @@
         </p:nvCxnSpPr>
         <p:spPr>
           <a:xfrm>
-            <a:off x="685800" y="3478784"/>
+            <a:off x="685800" y="3332734"/>
             <a:ext cx="10817352" cy="0"/>
           </a:xfrm>
           <a:prstGeom prst="line">
@@ -9015,8 +9119,8 @@
         </p:nvSpPr>
         <p:spPr>
           <a:xfrm>
-            <a:off x="685800" y="3478784"/>
-            <a:ext cx="1839925" cy="529717"/>
+            <a:off x="685800" y="3332734"/>
+            <a:ext cx="2438022" cy="347154"/>
           </a:xfrm>
           <a:prstGeom prst="rect">
             <a:avLst/>
@@ -9038,13 +9142,13 @@
               </a:spcAft>
             </a:pPr>
             <a:r>
-              <a:rPr sz="1250" b="1" i="0">
-                <a:solidFill>
-                  <a:srgbClr val="141B2E"/>
-                </a:solidFill>
-                <a:latin typeface="Arial"/>
-              </a:rPr>
-              <a:t>отдельный узел извлечения</a:t>
+              <a:rPr sz="1250" b="0" i="0">
+                <a:solidFill>
+                  <a:srgbClr val="141B2E"/>
+                </a:solidFill>
+                <a:latin typeface="Arial"/>
+              </a:rPr>
+              <a:t>главная + пометка</a:t>
             </a:r>
           </a:p>
         </p:txBody>
@@ -9057,8 +9161,8 @@
         </p:nvSpPr>
         <p:spPr>
           <a:xfrm>
-            <a:off x="2672029" y="3478784"/>
-            <a:ext cx="3878688" cy="529717"/>
+            <a:off x="3270126" y="3332734"/>
+            <a:ext cx="2651888" cy="347154"/>
           </a:xfrm>
           <a:prstGeom prst="rect">
             <a:avLst/>
@@ -9080,13 +9184,13 @@
               </a:spcAft>
             </a:pPr>
             <a:r>
-              <a:rPr sz="1250" b="0" i="0">
-                <a:solidFill>
-                  <a:srgbClr val="141B2E"/>
-                </a:solidFill>
-                <a:latin typeface="Arial"/>
-              </a:rPr>
-              <a:t>сделан ровно под эту задачу, схема задаётся списком полей с описаниями</a:t>
+              <a:rPr sz="1250" b="1" i="0">
+                <a:solidFill>
+                  <a:srgbClr val="141B2E"/>
+                </a:solidFill>
+                <a:latin typeface="Arial"/>
+              </a:rPr>
+              <a:t>тот, кто читает пометку</a:t>
             </a:r>
           </a:p>
         </p:txBody>
@@ -9099,8 +9203,8 @@
         </p:nvSpPr>
         <p:spPr>
           <a:xfrm>
-            <a:off x="6697021" y="3478784"/>
-            <a:ext cx="4659826" cy="529717"/>
+            <a:off x="6068319" y="3332734"/>
+            <a:ext cx="5288528" cy="347154"/>
           </a:xfrm>
           <a:prstGeom prst="rect">
             <a:avLst/>
@@ -9128,7 +9232,7 @@
                 </a:solidFill>
                 <a:latin typeface="Arial"/>
               </a:rPr>
-              <a:t>стоит отдельного вызова модели</a:t>
+              <a:t>пометку надо куда-то положить и кому-то читать</a:t>
             </a:r>
           </a:p>
         </p:txBody>
@@ -9141,7 +9245,7 @@
         </p:nvSpPr>
         <p:spPr>
           <a:xfrm>
-            <a:off x="502920" y="4858893"/>
+            <a:off x="502920" y="4530280"/>
             <a:ext cx="82296" cy="746760"/>
           </a:xfrm>
           <a:prstGeom prst="roundRect">
@@ -9187,7 +9291,7 @@
         </p:nvSpPr>
         <p:spPr>
           <a:xfrm>
-            <a:off x="859536" y="4986909"/>
+            <a:off x="859536" y="4658296"/>
             <a:ext cx="10643616" cy="490727"/>
           </a:xfrm>
           <a:prstGeom prst="rect">
@@ -9216,7 +9320,7 @@
                 </a:solidFill>
                 <a:latin typeface="Arial"/>
               </a:rPr>
-              <a:t>У первых двух общая беда: когда они не сработали, </a:t>
+              <a:t>Разница между первым и вторым ответом — не точность, а </a:t>
             </a:r>
             <a:r>
               <a:rPr sz="1500" b="1" i="0">
@@ -9225,7 +9329,7 @@
                 </a:solidFill>
                 <a:latin typeface="Arial"/>
               </a:rPr>
-              <a:t>процесс завершается успешно</a:t>
+              <a:t>знание о своём незнании</a:t>
             </a:r>
             <a:r>
               <a:rPr sz="1500" b="1" i="0">
@@ -9234,7 +9338,7 @@
                 </a:solidFill>
                 <a:latin typeface="Arial"/>
               </a:rPr>
-              <a:t>. В журнале зелёная галочка, в таблице мусор.</a:t>
+              <a:t>. Первый уверен и неправ; второй не знает и говорит об этом.</a:t>
             </a:r>
           </a:p>
         </p:txBody>
@@ -9344,14 +9448,14 @@
                 </a:solidFill>
                 <a:latin typeface="Arial"/>
               </a:rPr>
-              <a:t>Три атрибута с описаниями</a:t>
+              <a:t>Трудные заявки</a:t>
             </a:r>
           </a:p>
         </p:txBody>
       </p:sp>
       <p:pic>
         <p:nvPicPr>
-          <p:cNvPr id="3" name="Picture 2" descr="k2-shema-izvlechenie.png"/>
+          <p:cNvPr id="3" name="Picture 2" descr="k1-shema-pyat-uzlov.png"/>
           <p:cNvPicPr>
             <a:picLocks noChangeAspect="1"/>
           </p:cNvPicPr>
@@ -9365,8 +9469,8 @@
         </p:blipFill>
         <p:spPr>
           <a:xfrm>
-            <a:off x="1128101" y="943356"/>
-            <a:ext cx="9932748" cy="2483187"/>
+            <a:off x="1021626" y="943356"/>
+            <a:ext cx="10145699" cy="1902318"/>
           </a:xfrm>
           <a:prstGeom prst="rect">
             <a:avLst/>
@@ -9381,12 +9485,12 @@
         </p:nvSpPr>
         <p:spPr>
           <a:xfrm>
-            <a:off x="502920" y="3591135"/>
-            <a:ext cx="11183112" cy="1496123"/>
+            <a:off x="502920" y="3010266"/>
+            <a:ext cx="11183112" cy="1797177"/>
           </a:xfrm>
           <a:prstGeom prst="roundRect">
             <a:avLst>
-              <a:gd name="adj" fmla="val 20372"/>
+              <a:gd name="adj" fmla="val 16959"/>
             </a:avLst>
           </a:prstGeom>
           <a:solidFill>
@@ -9429,8 +9533,8 @@
         </p:nvSpPr>
         <p:spPr>
           <a:xfrm>
-            <a:off x="658368" y="3746583"/>
-            <a:ext cx="3172798" cy="282067"/>
+            <a:off x="658368" y="3165714"/>
+            <a:ext cx="4248648" cy="282067"/>
           </a:xfrm>
           <a:prstGeom prst="rect">
             <a:avLst/>
@@ -9458,7 +9562,7 @@
                 </a:solidFill>
                 <a:latin typeface="Arial"/>
               </a:rPr>
-              <a:t>АТРИБУТ</a:t>
+              <a:t>ЗАЯВКА</a:t>
             </a:r>
           </a:p>
         </p:txBody>
@@ -9471,8 +9575,8 @@
         </p:nvSpPr>
         <p:spPr>
           <a:xfrm>
-            <a:off x="3977470" y="3746583"/>
-            <a:ext cx="7406809" cy="282067"/>
+            <a:off x="5053320" y="3165714"/>
+            <a:ext cx="2725293" cy="282067"/>
           </a:xfrm>
           <a:prstGeom prst="rect">
             <a:avLst/>
@@ -9500,7 +9604,7 @@
                 </a:solidFill>
                 <a:latin typeface="Arial"/>
               </a:rPr>
-              <a:t>ОПИСАНИЕ, КОТОРОЕ ЗАДАЁМ</a:t>
+              <a:t>ТЕМА</a:t>
             </a:r>
           </a:p>
         </p:txBody>
@@ -9513,8 +9617,50 @@
         </p:nvSpPr>
         <p:spPr>
           <a:xfrm>
-            <a:off x="658368" y="4028650"/>
-            <a:ext cx="3172798" cy="301053"/>
+            <a:off x="7924917" y="3165714"/>
+            <a:ext cx="3459362" cy="282067"/>
+          </a:xfrm>
+          <a:prstGeom prst="rect">
+            <a:avLst/>
+          </a:prstGeom>
+          <a:noFill/>
+        </p:spPr>
+        <p:txBody>
+          <a:bodyPr wrap="square" lIns="0" rIns="0" tIns="0" bIns="0" anchor="t">
+            <a:spAutoFit/>
+          </a:bodyPr>
+          <a:lstStyle/>
+          <a:p>
+            <a:pPr algn="l">
+              <a:lnSpc>
+                <a:spcPts val="1265"/>
+              </a:lnSpc>
+              <a:spcAft>
+                <a:spcPts val="0"/>
+              </a:spcAft>
+            </a:pPr>
+            <a:r>
+              <a:rPr sz="1150" b="1" i="0">
+                <a:solidFill>
+                  <a:srgbClr val="6B7685"/>
+                </a:solidFill>
+                <a:latin typeface="Arial"/>
+              </a:rPr>
+              <a:t>ЕЩЁ В ЗАЯВКЕ</a:t>
+            </a:r>
+          </a:p>
+        </p:txBody>
+      </p:sp>
+      <p:sp>
+        <p:nvSpPr>
+          <p:cNvPr id="8" name="TextBox 7"/>
+          <p:cNvSpPr txBox="1"/>
+          <p:nvPr/>
+        </p:nvSpPr>
+        <p:spPr>
+          <a:xfrm>
+            <a:off x="658368" y="3447781"/>
+            <a:ext cx="4248648" cy="301053"/>
           </a:xfrm>
           <a:prstGeom prst="rect">
             <a:avLst/>
@@ -9542,21 +9688,39 @@
                 </a:solidFill>
                 <a:latin typeface="Arial"/>
               </a:rPr>
-              <a:t>тема</a:t>
-            </a:r>
-          </a:p>
-        </p:txBody>
-      </p:sp>
-      <p:sp>
-        <p:nvSpPr>
-          <p:cNvPr id="8" name="TextBox 7"/>
+              <a:t>перенести занятие </a:t>
+            </a:r>
+            <a:r>
+              <a:rPr sz="1250" b="1" i="0">
+                <a:solidFill>
+                  <a:srgbClr val="141B2E"/>
+                </a:solidFill>
+                <a:latin typeface="Arial"/>
+              </a:rPr>
+              <a:t>и</a:t>
+            </a:r>
+            <a:r>
+              <a:rPr sz="1250" b="0" i="0">
+                <a:solidFill>
+                  <a:srgbClr val="141B2E"/>
+                </a:solidFill>
+                <a:latin typeface="Arial"/>
+              </a:rPr>
+              <a:t> как оплатить</a:t>
+            </a:r>
+          </a:p>
+        </p:txBody>
+      </p:sp>
+      <p:sp>
+        <p:nvSpPr>
+          <p:cNvPr id="9" name="TextBox 8"/>
           <p:cNvSpPr txBox="1"/>
           <p:nvPr/>
         </p:nvSpPr>
         <p:spPr>
           <a:xfrm>
-            <a:off x="3977470" y="4028650"/>
-            <a:ext cx="7406809" cy="301053"/>
+            <a:off x="5053320" y="3447781"/>
+            <a:ext cx="2725293" cy="301053"/>
           </a:xfrm>
           <a:prstGeom prst="rect">
             <a:avLst/>
@@ -9584,20 +9748,62 @@
                 </a:solidFill>
                 <a:latin typeface="Arial"/>
               </a:rPr>
-              <a:t>о чём заявка: курс, перенос занятия, оплата, другое</a:t>
+              <a:t>перенос занятия</a:t>
+            </a:r>
+          </a:p>
+        </p:txBody>
+      </p:sp>
+      <p:sp>
+        <p:nvSpPr>
+          <p:cNvPr id="10" name="TextBox 9"/>
+          <p:cNvSpPr txBox="1"/>
+          <p:nvPr/>
+        </p:nvSpPr>
+        <p:spPr>
+          <a:xfrm>
+            <a:off x="7924917" y="3447781"/>
+            <a:ext cx="3459362" cy="301053"/>
+          </a:xfrm>
+          <a:prstGeom prst="rect">
+            <a:avLst/>
+          </a:prstGeom>
+          <a:noFill/>
+        </p:spPr>
+        <p:txBody>
+          <a:bodyPr wrap="square" lIns="0" rIns="0" tIns="0" bIns="0" anchor="ctr">
+            <a:spAutoFit/>
+          </a:bodyPr>
+          <a:lstStyle/>
+          <a:p>
+            <a:pPr algn="l">
+              <a:lnSpc>
+                <a:spcPts val="1362"/>
+              </a:lnSpc>
+              <a:spcAft>
+                <a:spcPts val="0"/>
+              </a:spcAft>
+            </a:pPr>
+            <a:r>
+              <a:rPr sz="1250" b="0" i="0">
+                <a:solidFill>
+                  <a:srgbClr val="141B2E"/>
+                </a:solidFill>
+                <a:latin typeface="Arial"/>
+              </a:rPr>
+              <a:t>оплата</a:t>
             </a:r>
           </a:p>
         </p:txBody>
       </p:sp>
       <p:cxnSp>
         <p:nvCxnSpPr>
-          <p:cNvPr id="9" name="Connector 8"/>
+          <p:cNvPr id="11" name="Connector 10"/>
           <p:cNvCxnSpPr/>
           <p:nvPr/>
         </p:nvCxnSpPr>
         <p:spPr>
           <a:xfrm>
-            <a:off x="658368" y="4329703"/>
+            <a:off x="658368" y="3748835"/>
             <a:ext cx="10872216" cy="0"/>
           </a:xfrm>
           <a:prstGeom prst="line">
@@ -9626,14 +9832,14 @@
       </p:cxnSp>
       <p:sp>
         <p:nvSpPr>
-          <p:cNvPr id="10" name="TextBox 9"/>
+          <p:cNvPr id="12" name="TextBox 11"/>
           <p:cNvSpPr txBox="1"/>
           <p:nvPr/>
         </p:nvSpPr>
         <p:spPr>
           <a:xfrm>
-            <a:off x="658368" y="4329703"/>
-            <a:ext cx="3172798" cy="301053"/>
+            <a:off x="658368" y="3748835"/>
+            <a:ext cx="4248648" cy="301053"/>
           </a:xfrm>
           <a:prstGeom prst="rect">
             <a:avLst/>
@@ -9661,21 +9867,39 @@
                 </a:solidFill>
                 <a:latin typeface="Arial"/>
               </a:rPr>
-              <a:t>срочность</a:t>
-            </a:r>
-          </a:p>
-        </p:txBody>
-      </p:sp>
-      <p:sp>
-        <p:nvSpPr>
-          <p:cNvPr id="11" name="TextBox 10"/>
+              <a:t>оплатить, перенести </a:t>
+            </a:r>
+            <a:r>
+              <a:rPr sz="1250" b="1" i="0">
+                <a:solidFill>
+                  <a:srgbClr val="141B2E"/>
+                </a:solidFill>
+                <a:latin typeface="Arial"/>
+              </a:rPr>
+              <a:t>и</a:t>
+            </a:r>
+            <a:r>
+              <a:rPr sz="1250" b="0" i="0">
+                <a:solidFill>
+                  <a:srgbClr val="141B2E"/>
+                </a:solidFill>
+                <a:latin typeface="Arial"/>
+              </a:rPr>
+              <a:t> про скидки</a:t>
+            </a:r>
+          </a:p>
+        </p:txBody>
+      </p:sp>
+      <p:sp>
+        <p:nvSpPr>
+          <p:cNvPr id="13" name="TextBox 12"/>
           <p:cNvSpPr txBox="1"/>
           <p:nvPr/>
         </p:nvSpPr>
         <p:spPr>
           <a:xfrm>
-            <a:off x="3977470" y="4329703"/>
-            <a:ext cx="7406809" cy="301053"/>
+            <a:off x="5053320" y="3748835"/>
+            <a:ext cx="2725293" cy="301053"/>
           </a:xfrm>
           <a:prstGeom prst="rect">
             <a:avLst/>
@@ -9703,20 +9927,71 @@
                 </a:solidFill>
                 <a:latin typeface="Arial"/>
               </a:rPr>
-              <a:t>когда человек ждёт ответа: сегодня, на неделе, не указано</a:t>
+              <a:t>оплата</a:t>
+            </a:r>
+          </a:p>
+        </p:txBody>
+      </p:sp>
+      <p:sp>
+        <p:nvSpPr>
+          <p:cNvPr id="14" name="TextBox 13"/>
+          <p:cNvSpPr txBox="1"/>
+          <p:nvPr/>
+        </p:nvSpPr>
+        <p:spPr>
+          <a:xfrm>
+            <a:off x="7924917" y="3748835"/>
+            <a:ext cx="3459362" cy="301053"/>
+          </a:xfrm>
+          <a:prstGeom prst="rect">
+            <a:avLst/>
+          </a:prstGeom>
+          <a:noFill/>
+        </p:spPr>
+        <p:txBody>
+          <a:bodyPr wrap="square" lIns="0" rIns="0" tIns="0" bIns="0" anchor="ctr">
+            <a:spAutoFit/>
+          </a:bodyPr>
+          <a:lstStyle/>
+          <a:p>
+            <a:pPr algn="l">
+              <a:lnSpc>
+                <a:spcPts val="1362"/>
+              </a:lnSpc>
+              <a:spcAft>
+                <a:spcPts val="0"/>
+              </a:spcAft>
+            </a:pPr>
+            <a:r>
+              <a:rPr sz="1250" b="0" i="0">
+                <a:solidFill>
+                  <a:srgbClr val="141B2E"/>
+                </a:solidFill>
+                <a:latin typeface="Arial"/>
+              </a:rPr>
+              <a:t>перенос занятия · </a:t>
+            </a:r>
+            <a:r>
+              <a:rPr sz="1250" b="1" i="0">
+                <a:solidFill>
+                  <a:srgbClr val="141B2E"/>
+                </a:solidFill>
+                <a:latin typeface="Arial"/>
+              </a:rPr>
+              <a:t>другое</a:t>
             </a:r>
           </a:p>
         </p:txBody>
       </p:sp>
       <p:cxnSp>
         <p:nvCxnSpPr>
-          <p:cNvPr id="12" name="Connector 11"/>
+          <p:cNvPr id="15" name="Connector 14"/>
           <p:cNvCxnSpPr/>
           <p:nvPr/>
         </p:nvCxnSpPr>
         <p:spPr>
           <a:xfrm>
-            <a:off x="658368" y="4630757"/>
+            <a:off x="658368" y="4049888"/>
             <a:ext cx="10872216" cy="0"/>
           </a:xfrm>
           <a:prstGeom prst="line">
@@ -9745,14 +10020,14 @@
       </p:cxnSp>
       <p:sp>
         <p:nvSpPr>
-          <p:cNvPr id="13" name="TextBox 12"/>
+          <p:cNvPr id="16" name="TextBox 15"/>
           <p:cNvSpPr txBox="1"/>
           <p:nvPr/>
         </p:nvSpPr>
         <p:spPr>
           <a:xfrm>
-            <a:off x="658368" y="4630757"/>
-            <a:ext cx="3172798" cy="301053"/>
+            <a:off x="658368" y="4049888"/>
+            <a:ext cx="4248648" cy="301053"/>
           </a:xfrm>
           <a:prstGeom prst="rect">
             <a:avLst/>
@@ -9780,21 +10055,21 @@
                 </a:solidFill>
                 <a:latin typeface="Arial"/>
               </a:rPr>
-              <a:t>контакт</a:t>
-            </a:r>
-          </a:p>
-        </p:txBody>
-      </p:sp>
-      <p:sp>
-        <p:nvSpPr>
-          <p:cNvPr id="14" name="TextBox 13"/>
+              <a:t>сотрудничаете с юрлицами?</a:t>
+            </a:r>
+          </a:p>
+        </p:txBody>
+      </p:sp>
+      <p:sp>
+        <p:nvSpPr>
+          <p:cNvPr id="17" name="TextBox 16"/>
           <p:cNvSpPr txBox="1"/>
           <p:nvPr/>
         </p:nvSpPr>
         <p:spPr>
           <a:xfrm>
-            <a:off x="3977470" y="4630757"/>
-            <a:ext cx="7406809" cy="301053"/>
+            <a:off x="5053320" y="4049888"/>
+            <a:ext cx="2725293" cy="301053"/>
           </a:xfrm>
           <a:prstGeom prst="rect">
             <a:avLst/>
@@ -9816,27 +10091,230 @@
               </a:spcAft>
             </a:pPr>
             <a:r>
+              <a:rPr sz="1250" b="1" i="0">
+                <a:solidFill>
+                  <a:srgbClr val="141B2E"/>
+                </a:solidFill>
+                <a:latin typeface="Arial"/>
+              </a:rPr>
+              <a:t>другое</a:t>
+            </a:r>
+          </a:p>
+        </p:txBody>
+      </p:sp>
+      <p:sp>
+        <p:nvSpPr>
+          <p:cNvPr id="18" name="TextBox 17"/>
+          <p:cNvSpPr txBox="1"/>
+          <p:nvPr/>
+        </p:nvSpPr>
+        <p:spPr>
+          <a:xfrm>
+            <a:off x="7924917" y="4049888"/>
+            <a:ext cx="3459362" cy="301053"/>
+          </a:xfrm>
+          <a:prstGeom prst="rect">
+            <a:avLst/>
+          </a:prstGeom>
+          <a:noFill/>
+        </p:spPr>
+        <p:txBody>
+          <a:bodyPr wrap="square" lIns="0" rIns="0" tIns="0" bIns="0" anchor="ctr">
+            <a:spAutoFit/>
+          </a:bodyPr>
+          <a:lstStyle/>
+          <a:p>
+            <a:pPr algn="l">
+              <a:lnSpc>
+                <a:spcPts val="1362"/>
+              </a:lnSpc>
+              <a:spcAft>
+                <a:spcPts val="0"/>
+              </a:spcAft>
+            </a:pPr>
+            <a:r>
               <a:rPr sz="1250" b="0" i="0">
                 <a:solidFill>
                   <a:srgbClr val="141B2E"/>
                 </a:solidFill>
                 <a:latin typeface="Arial"/>
               </a:rPr>
-              <a:t>телефон или почта из текста заявки</a:t>
-            </a:r>
-          </a:p>
-        </p:txBody>
-      </p:sp>
-      <p:sp>
-        <p:nvSpPr>
-          <p:cNvPr id="15" name="Rounded Rectangle 14"/>
+              <a:t>—</a:t>
+            </a:r>
+          </a:p>
+        </p:txBody>
+      </p:sp>
+      <p:cxnSp>
+        <p:nvCxnSpPr>
+          <p:cNvPr id="19" name="Connector 18"/>
+          <p:cNvCxnSpPr/>
+          <p:nvPr/>
+        </p:nvCxnSpPr>
+        <p:spPr>
+          <a:xfrm>
+            <a:off x="658368" y="4350942"/>
+            <a:ext cx="10872216" cy="0"/>
+          </a:xfrm>
+          <a:prstGeom prst="line">
+            <a:avLst/>
+          </a:prstGeom>
+          <a:ln w="9525">
+            <a:solidFill>
+              <a:srgbClr val="E5EAF0"/>
+            </a:solidFill>
+          </a:ln>
+        </p:spPr>
+        <p:style>
+          <a:lnRef idx="2">
+            <a:schemeClr val="accent1"/>
+          </a:lnRef>
+          <a:fillRef idx="0">
+            <a:schemeClr val="accent1"/>
+          </a:fillRef>
+          <a:effectRef idx="1">
+            <a:schemeClr val="accent1"/>
+          </a:effectRef>
+          <a:fontRef idx="minor">
+            <a:schemeClr val="tx1"/>
+          </a:fontRef>
+        </p:style>
+      </p:cxnSp>
+      <p:sp>
+        <p:nvSpPr>
+          <p:cNvPr id="20" name="TextBox 19"/>
+          <p:cNvSpPr txBox="1"/>
+          <p:nvPr/>
+        </p:nvSpPr>
+        <p:spPr>
+          <a:xfrm>
+            <a:off x="658368" y="4350942"/>
+            <a:ext cx="4248648" cy="301053"/>
+          </a:xfrm>
+          <a:prstGeom prst="rect">
+            <a:avLst/>
+          </a:prstGeom>
+          <a:noFill/>
+        </p:spPr>
+        <p:txBody>
+          <a:bodyPr wrap="square" lIns="0" rIns="0" tIns="0" bIns="0" anchor="ctr">
+            <a:spAutoFit/>
+          </a:bodyPr>
+          <a:lstStyle/>
+          <a:p>
+            <a:pPr algn="l">
+              <a:lnSpc>
+                <a:spcPts val="1362"/>
+              </a:lnSpc>
+              <a:spcAft>
+                <a:spcPts val="0"/>
+              </a:spcAft>
+            </a:pPr>
+            <a:r>
+              <a:rPr sz="1250" b="0" i="0">
+                <a:solidFill>
+                  <a:srgbClr val="141B2E"/>
+                </a:solidFill>
+                <a:latin typeface="Arial"/>
+              </a:rPr>
+              <a:t>«ок»</a:t>
+            </a:r>
+          </a:p>
+        </p:txBody>
+      </p:sp>
+      <p:sp>
+        <p:nvSpPr>
+          <p:cNvPr id="21" name="TextBox 20"/>
+          <p:cNvSpPr txBox="1"/>
+          <p:nvPr/>
+        </p:nvSpPr>
+        <p:spPr>
+          <a:xfrm>
+            <a:off x="5053320" y="4350942"/>
+            <a:ext cx="2725293" cy="301053"/>
+          </a:xfrm>
+          <a:prstGeom prst="rect">
+            <a:avLst/>
+          </a:prstGeom>
+          <a:noFill/>
+        </p:spPr>
+        <p:txBody>
+          <a:bodyPr wrap="square" lIns="0" rIns="0" tIns="0" bIns="0" anchor="ctr">
+            <a:spAutoFit/>
+          </a:bodyPr>
+          <a:lstStyle/>
+          <a:p>
+            <a:pPr algn="l">
+              <a:lnSpc>
+                <a:spcPts val="1362"/>
+              </a:lnSpc>
+              <a:spcAft>
+                <a:spcPts val="0"/>
+              </a:spcAft>
+            </a:pPr>
+            <a:r>
+              <a:rPr sz="1250" b="1" i="0">
+                <a:solidFill>
+                  <a:srgbClr val="141B2E"/>
+                </a:solidFill>
+                <a:latin typeface="Arial"/>
+              </a:rPr>
+              <a:t>другое</a:t>
+            </a:r>
+          </a:p>
+        </p:txBody>
+      </p:sp>
+      <p:sp>
+        <p:nvSpPr>
+          <p:cNvPr id="22" name="TextBox 21"/>
+          <p:cNvSpPr txBox="1"/>
+          <p:nvPr/>
+        </p:nvSpPr>
+        <p:spPr>
+          <a:xfrm>
+            <a:off x="7924917" y="4350942"/>
+            <a:ext cx="3459362" cy="301053"/>
+          </a:xfrm>
+          <a:prstGeom prst="rect">
+            <a:avLst/>
+          </a:prstGeom>
+          <a:noFill/>
+        </p:spPr>
+        <p:txBody>
+          <a:bodyPr wrap="square" lIns="0" rIns="0" tIns="0" bIns="0" anchor="ctr">
+            <a:spAutoFit/>
+          </a:bodyPr>
+          <a:lstStyle/>
+          <a:p>
+            <a:pPr algn="l">
+              <a:lnSpc>
+                <a:spcPts val="1362"/>
+              </a:lnSpc>
+              <a:spcAft>
+                <a:spcPts val="0"/>
+              </a:spcAft>
+            </a:pPr>
+            <a:r>
+              <a:rPr sz="1250" b="0" i="0">
+                <a:solidFill>
+                  <a:srgbClr val="141B2E"/>
+                </a:solidFill>
+                <a:latin typeface="Arial"/>
+              </a:rPr>
+              <a:t>—</a:t>
+            </a:r>
+          </a:p>
+        </p:txBody>
+      </p:sp>
+      <p:sp>
+        <p:nvSpPr>
+          <p:cNvPr id="23" name="Rounded Rectangle 22"/>
           <p:cNvSpPr/>
           <p:nvPr/>
         </p:nvSpPr>
         <p:spPr>
           <a:xfrm>
-            <a:off x="502920" y="5251850"/>
-            <a:ext cx="82296" cy="455422"/>
+            <a:off x="502920" y="4972035"/>
+            <a:ext cx="82296" cy="471169"/>
           </a:xfrm>
           <a:prstGeom prst="roundRect">
             <a:avLst>
@@ -9875,14 +10353,14 @@
       </p:sp>
       <p:sp>
         <p:nvSpPr>
-          <p:cNvPr id="16" name="TextBox 15"/>
+          <p:cNvPr id="24" name="TextBox 23"/>
           <p:cNvSpPr txBox="1"/>
           <p:nvPr/>
         </p:nvSpPr>
         <p:spPr>
           <a:xfrm>
-            <a:off x="859536" y="5379866"/>
-            <a:ext cx="10643616" cy="199389"/>
+            <a:off x="859536" y="5100051"/>
+            <a:ext cx="10643616" cy="215137"/>
           </a:xfrm>
           <a:prstGeom prst="rect">
             <a:avLst/>
@@ -9897,51 +10375,51 @@
           <a:p>
             <a:pPr algn="l">
               <a:lnSpc>
-                <a:spcPts val="1426"/>
+                <a:spcPts val="1550"/>
               </a:lnSpc>
               <a:spcAft>
                 <a:spcPts val="300"/>
               </a:spcAft>
             </a:pPr>
             <a:r>
-              <a:rPr sz="1150" b="1" i="0">
-                <a:solidFill>
-                  <a:srgbClr val="141B2E"/>
-                </a:solidFill>
-                <a:latin typeface="Arial"/>
-              </a:rPr>
-              <a:t>Schema Type = </a:t>
-            </a:r>
-            <a:r>
-              <a:rPr sz="1150" b="1" i="0">
-                <a:solidFill>
-                  <a:srgbClr val="141B2E"/>
-                </a:solidFill>
-                <a:latin typeface="Arial"/>
-              </a:rPr>
-              <a:t>From Attribute Descriptions</a:t>
-            </a:r>
-            <a:r>
-              <a:rPr sz="1150" b="1" i="0">
-                <a:solidFill>
-                  <a:srgbClr val="141B2E"/>
-                </a:solidFill>
-                <a:latin typeface="Arial"/>
-              </a:rPr>
-              <a:t>: схема задаётся словами, без JSON.</a:t>
-            </a:r>
-          </a:p>
-        </p:txBody>
-      </p:sp>
-      <p:sp>
-        <p:nvSpPr>
-          <p:cNvPr id="17" name="Rounded Rectangle 16"/>
+              <a:rPr sz="1250" b="1" i="0">
+                <a:solidFill>
+                  <a:srgbClr val="141B2E"/>
+                </a:solidFill>
+                <a:latin typeface="Arial"/>
+              </a:rPr>
+              <a:t>Меняем </a:t>
+            </a:r>
+            <a:r>
+              <a:rPr sz="1250" b="1" i="0">
+                <a:solidFill>
+                  <a:srgbClr val="141B2E"/>
+                </a:solidFill>
+                <a:latin typeface="Arial"/>
+              </a:rPr>
+              <a:t>один узел из пяти</a:t>
+            </a:r>
+            <a:r>
+              <a:rPr sz="1250" b="1" i="0">
+                <a:solidFill>
+                  <a:srgbClr val="141B2E"/>
+                </a:solidFill>
+                <a:latin typeface="Arial"/>
+              </a:rPr>
+              <a:t> — справочник. В него добавляется столбец «ещё в заявке»; остальные четыре не трогаются.</a:t>
+            </a:r>
+          </a:p>
+        </p:txBody>
+      </p:sp>
+      <p:sp>
+        <p:nvSpPr>
+          <p:cNvPr id="25" name="Rounded Rectangle 24"/>
           <p:cNvSpPr/>
           <p:nvPr/>
         </p:nvSpPr>
         <p:spPr>
           <a:xfrm>
-            <a:off x="502920" y="5871864"/>
+            <a:off x="502920" y="5607797"/>
             <a:ext cx="82296" cy="455422"/>
           </a:xfrm>
           <a:prstGeom prst="roundRect">
@@ -9981,13 +10459,13 @@
       </p:sp>
       <p:sp>
         <p:nvSpPr>
-          <p:cNvPr id="18" name="TextBox 17"/>
+          <p:cNvPr id="26" name="TextBox 25"/>
           <p:cNvSpPr txBox="1"/>
           <p:nvPr/>
         </p:nvSpPr>
         <p:spPr>
           <a:xfrm>
-            <a:off x="859536" y="5999880"/>
+            <a:off x="859536" y="5735813"/>
             <a:ext cx="10643616" cy="199389"/>
           </a:xfrm>
           <a:prstGeom prst="rect">
@@ -10023,7 +10501,7 @@
       </p:sp>
       <p:sp>
         <p:nvSpPr>
-          <p:cNvPr id="19" name="TextBox 18"/>
+          <p:cNvPr id="27" name="TextBox 26"/>
           <p:cNvSpPr txBox="1"/>
           <p:nvPr/>
         </p:nvSpPr>
@@ -10139,7 +10617,7 @@
         </p:nvSpPr>
         <p:spPr>
           <a:xfrm>
-            <a:off x="502920" y="1133703"/>
+            <a:off x="502920" y="1110081"/>
             <a:ext cx="82296" cy="746760"/>
           </a:xfrm>
           <a:prstGeom prst="roundRect">
@@ -10185,7 +10663,7 @@
         </p:nvSpPr>
         <p:spPr>
           <a:xfrm>
-            <a:off x="859536" y="1261719"/>
+            <a:off x="859536" y="1238097"/>
             <a:ext cx="10643616" cy="490727"/>
           </a:xfrm>
           <a:prstGeom prst="rect">
@@ -10214,7 +10692,7 @@
                 </a:solidFill>
                 <a:latin typeface="Arial"/>
               </a:rPr>
-              <a:t>Описание атрибута работает как инструкция.</a:t>
+              <a:t>В каждом справочнике обязано быть «иначе».</a:t>
             </a:r>
             <a:r>
               <a:rPr sz="1500" b="1" i="0">
@@ -10223,7 +10701,7 @@
                 </a:solidFill>
                 <a:latin typeface="Arial"/>
               </a:rPr>
-              <a:t> «Тема заявки» даёт случайные слова. Перечисление «курс, перенос, оплата, другое» даёт одно из четырёх.</a:t>
+              <a:t> «Другое» и «не указано» держат список на ногах: без них модель поставит в клетку выдумку, и вы об этом не узнаете.</a:t>
             </a:r>
           </a:p>
         </p:txBody>
@@ -10236,7 +10714,7 @@
         </p:nvSpPr>
         <p:spPr>
           <a:xfrm>
-            <a:off x="502920" y="2520924"/>
+            <a:off x="502920" y="2438247"/>
             <a:ext cx="82296" cy="746760"/>
           </a:xfrm>
           <a:prstGeom prst="roundRect">
@@ -10282,7 +10760,7 @@
         </p:nvSpPr>
         <p:spPr>
           <a:xfrm>
-            <a:off x="859536" y="2648940"/>
+            <a:off x="859536" y="2566263"/>
             <a:ext cx="10643616" cy="490727"/>
           </a:xfrm>
           <a:prstGeom prst="rect">
@@ -10311,7 +10789,7 @@
                 </a:solidFill>
                 <a:latin typeface="Arial"/>
               </a:rPr>
-              <a:t>Пустое значение предусматривается заранее.</a:t>
+              <a:t>За «другим» нужен глаз.</a:t>
             </a:r>
             <a:r>
               <a:rPr sz="1500" b="1" i="0">
@@ -10320,7 +10798,7 @@
                 </a:solidFill>
                 <a:latin typeface="Arial"/>
               </a:rPr>
-              <a:t> Контакта в тексте может не быть вовсе. Либо в описании есть вариант «не указано», либо следующий шаг получит выдумку.</a:t>
+              <a:t> Этот столбец — очередь на разбор, и у неё должен быть человек. Растёт очередь — значит, в справочнике не хватает значения; это сигнал, который стоит читать.</a:t>
             </a:r>
           </a:p>
         </p:txBody>
@@ -10333,7 +10811,7 @@
         </p:nvSpPr>
         <p:spPr>
           <a:xfrm>
-            <a:off x="502920" y="3908145"/>
+            <a:off x="502920" y="3766413"/>
             <a:ext cx="82296" cy="746760"/>
           </a:xfrm>
           <a:prstGeom prst="roundRect">
@@ -10379,7 +10857,7 @@
         </p:nvSpPr>
         <p:spPr>
           <a:xfrm>
-            <a:off x="859536" y="4036161"/>
+            <a:off x="859536" y="3894429"/>
             <a:ext cx="10643616" cy="490727"/>
           </a:xfrm>
           <a:prstGeom prst="rect">
@@ -10408,7 +10886,7 @@
                 </a:solidFill>
                 <a:latin typeface="Arial"/>
               </a:rPr>
-              <a:t>Схема формата — для шага модели.</a:t>
+              <a:t>Схема предлагает, узел решает.</a:t>
             </a:r>
             <a:r>
               <a:rPr sz="1500" b="1" i="0">
@@ -10417,7 +10895,7 @@
                 </a:solidFill>
                 <a:latin typeface="Arial"/>
               </a:rPr>
-              <a:t> У агента для этого свой механизм; документация инструмента прямо предупреждает против того, чтобы навешивать разбор вывода на агента.</a:t>
+              <a:t> Перечисление в схеме — строгая просьба к модели. Последняя инстанция — обычный узел «задать поля»: что не из списка или пусто, он заменяет сам.</a:t>
             </a:r>
           </a:p>
         </p:txBody>
@@ -10430,8 +10908,8 @@
         </p:nvSpPr>
         <p:spPr>
           <a:xfrm>
-            <a:off x="502920" y="5295366"/>
-            <a:ext cx="82296" cy="746760"/>
+            <a:off x="502920" y="5094579"/>
+            <a:ext cx="82296" cy="982980"/>
           </a:xfrm>
           <a:prstGeom prst="roundRect">
             <a:avLst>
@@ -10476,8 +10954,8 @@
         </p:nvSpPr>
         <p:spPr>
           <a:xfrm>
-            <a:off x="859536" y="5423382"/>
-            <a:ext cx="10643616" cy="490727"/>
+            <a:off x="859536" y="5222595"/>
+            <a:ext cx="10643616" cy="726948"/>
           </a:xfrm>
           <a:prstGeom prst="rect">
             <a:avLst/>
@@ -10514,7 +10992,7 @@
                 </a:solidFill>
                 <a:latin typeface="Arial"/>
               </a:rPr>
-              <a:t> в Activepieces поля задаются так же описаниями. В sim структурированный вывод настраивается прямо в блоке модели, отдельного узла нет.</a:t>
+              <a:t> в Activepieces справочник собирается так же — перечисление в схеме плюс шаг нормализации. В sim структурированный вывод настраивается внутри блока модели, отдельного узла схемы нет.</a:t>
             </a:r>
           </a:p>
         </p:txBody>
@@ -12791,7 +13269,7 @@
                 </a:solidFill>
                 <a:latin typeface="Arial"/>
               </a:rPr>
-              <a:t>Две ветки из одного узла</a:t>
+              <a:t>Две ветки и два экрана</a:t>
             </a:r>
           </a:p>
         </p:txBody>
@@ -12812,8 +13290,8 @@
         </p:blipFill>
         <p:spPr>
           <a:xfrm>
-            <a:off x="502920" y="960299"/>
-            <a:ext cx="11183112" cy="3075355"/>
+            <a:off x="1066392" y="943356"/>
+            <a:ext cx="10056167" cy="2765446"/>
           </a:xfrm>
           <a:prstGeom prst="rect">
             <a:avLst/>
@@ -12828,12 +13306,12 @@
         </p:nvSpPr>
         <p:spPr>
           <a:xfrm>
-            <a:off x="502920" y="4242606"/>
-            <a:ext cx="11183112" cy="1342135"/>
+            <a:off x="502920" y="3873394"/>
+            <a:ext cx="11183112" cy="1195070"/>
           </a:xfrm>
           <a:prstGeom prst="roundRect">
             <a:avLst>
-              <a:gd name="adj" fmla="val 22710"/>
+              <a:gd name="adj" fmla="val 25000"/>
             </a:avLst>
           </a:prstGeom>
           <a:solidFill>
@@ -12876,8 +13354,8 @@
         </p:nvSpPr>
         <p:spPr>
           <a:xfrm>
-            <a:off x="685800" y="4425486"/>
-            <a:ext cx="4777241" cy="282067"/>
+            <a:off x="658368" y="4028842"/>
+            <a:ext cx="5336957" cy="282067"/>
           </a:xfrm>
           <a:prstGeom prst="rect">
             <a:avLst/>
@@ -12905,7 +13383,7 @@
                 </a:solidFill>
                 <a:latin typeface="Arial"/>
               </a:rPr>
-              <a:t>НАСТРОЙКА УЗЛА</a:t>
+              <a:t>НАСТРОЙКА УЗЛА ИЗВЛЕЧЕНИЯ</a:t>
             </a:r>
           </a:p>
         </p:txBody>
@@ -12918,8 +13396,8 @@
         </p:nvSpPr>
         <p:spPr>
           <a:xfrm>
-            <a:off x="5609345" y="4425486"/>
-            <a:ext cx="5747502" cy="282067"/>
+            <a:off x="6141629" y="4028842"/>
+            <a:ext cx="5242650" cy="282067"/>
           </a:xfrm>
           <a:prstGeom prst="rect">
             <a:avLst/>
@@ -12960,8 +13438,8 @@
         </p:nvSpPr>
         <p:spPr>
           <a:xfrm>
-            <a:off x="685800" y="4707553"/>
-            <a:ext cx="4777241" cy="347154"/>
+            <a:off x="658368" y="4310909"/>
+            <a:ext cx="5336957" cy="301053"/>
           </a:xfrm>
           <a:prstGeom prst="rect">
             <a:avLst/>
@@ -12976,7 +13454,7 @@
           <a:p>
             <a:pPr algn="l">
               <a:lnSpc>
-                <a:spcPts val="1437"/>
+                <a:spcPts val="1362"/>
               </a:lnSpc>
               <a:spcAft>
                 <a:spcPts val="0"/>
@@ -13002,8 +13480,8 @@
         </p:nvSpPr>
         <p:spPr>
           <a:xfrm>
-            <a:off x="5609345" y="4707553"/>
-            <a:ext cx="5747502" cy="347154"/>
+            <a:off x="6141629" y="4310909"/>
+            <a:ext cx="5242650" cy="301053"/>
           </a:xfrm>
           <a:prstGeom prst="rect">
             <a:avLst/>
@@ -13018,7 +13496,7 @@
           <a:p>
             <a:pPr algn="l">
               <a:lnSpc>
-                <a:spcPts val="1437"/>
+                <a:spcPts val="1362"/>
               </a:lnSpc>
               <a:spcAft>
                 <a:spcPts val="0"/>
@@ -13044,8 +13522,8 @@
         </p:nvCxnSpPr>
         <p:spPr>
           <a:xfrm>
-            <a:off x="685800" y="5054707"/>
-            <a:ext cx="10817352" cy="0"/>
+            <a:off x="658368" y="4611962"/>
+            <a:ext cx="10872216" cy="0"/>
           </a:xfrm>
           <a:prstGeom prst="line">
             <a:avLst/>
@@ -13079,8 +13557,8 @@
         </p:nvSpPr>
         <p:spPr>
           <a:xfrm>
-            <a:off x="685800" y="5054707"/>
-            <a:ext cx="4777241" cy="347154"/>
+            <a:off x="658368" y="4611962"/>
+            <a:ext cx="5336957" cy="301053"/>
           </a:xfrm>
           <a:prstGeom prst="rect">
             <a:avLst/>
@@ -13095,7 +13573,7 @@
           <a:p>
             <a:pPr algn="l">
               <a:lnSpc>
-                <a:spcPts val="1437"/>
+                <a:spcPts val="1362"/>
               </a:lnSpc>
               <a:spcAft>
                 <a:spcPts val="0"/>
@@ -13121,8 +13599,8 @@
         </p:nvSpPr>
         <p:spPr>
           <a:xfrm>
-            <a:off x="5609345" y="5054707"/>
-            <a:ext cx="5747502" cy="347154"/>
+            <a:off x="6141629" y="4611962"/>
+            <a:ext cx="5242650" cy="301053"/>
           </a:xfrm>
           <a:prstGeom prst="rect">
             <a:avLst/>
@@ -13137,7 +13615,7 @@
           <a:p>
             <a:pPr algn="l">
               <a:lnSpc>
-                <a:spcPts val="1437"/>
+                <a:spcPts val="1362"/>
               </a:lnSpc>
               <a:spcAft>
                 <a:spcPts val="0"/>
@@ -13163,8 +13641,8 @@
         </p:nvSpPr>
         <p:spPr>
           <a:xfrm>
-            <a:off x="502920" y="5791692"/>
-            <a:ext cx="82296" cy="510540"/>
+            <a:off x="502920" y="5233056"/>
+            <a:ext cx="82296" cy="455422"/>
           </a:xfrm>
           <a:prstGeom prst="roundRect">
             <a:avLst>
@@ -13209,8 +13687,8 @@
         </p:nvSpPr>
         <p:spPr>
           <a:xfrm>
-            <a:off x="859536" y="5919708"/>
-            <a:ext cx="10643616" cy="254508"/>
+            <a:off x="859536" y="5361072"/>
+            <a:ext cx="10643616" cy="199389"/>
           </a:xfrm>
           <a:prstGeom prst="rect">
             <a:avLst/>
@@ -13225,14 +13703,174 @@
           <a:p>
             <a:pPr algn="l">
               <a:lnSpc>
-                <a:spcPts val="1860"/>
+                <a:spcPts val="1426"/>
               </a:lnSpc>
               <a:spcAft>
                 <a:spcPts val="300"/>
               </a:spcAft>
             </a:pPr>
             <a:r>
-              <a:rPr sz="1500" b="1" i="0">
+              <a:rPr sz="1150" b="1" i="0">
+                <a:solidFill>
+                  <a:srgbClr val="141B2E"/>
+                </a:solidFill>
+                <a:latin typeface="Arial"/>
+              </a:rPr>
+              <a:t>Из выхода </a:t>
+            </a:r>
+            <a:r>
+              <a:rPr sz="1150" b="1" i="0">
+                <a:solidFill>
+                  <a:srgbClr val="141B2E"/>
+                </a:solidFill>
+                <a:latin typeface="Consolas"/>
+              </a:rPr>
+              <a:t>error</a:t>
+            </a:r>
+            <a:r>
+              <a:rPr sz="1150" b="1" i="0">
+                <a:solidFill>
+                  <a:srgbClr val="141B2E"/>
+                </a:solidFill>
+                <a:latin typeface="Arial"/>
+              </a:rPr>
+              <a:t> — в ту же таблицу: </a:t>
+            </a:r>
+            <a:r>
+              <a:rPr sz="1150" b="1" i="0">
+                <a:solidFill>
+                  <a:srgbClr val="141B2E"/>
+                </a:solidFill>
+                <a:latin typeface="Consolas"/>
+              </a:rPr>
+              <a:t>status</a:t>
+            </a:r>
+            <a:r>
+              <a:rPr sz="1150" b="1" i="0">
+                <a:solidFill>
+                  <a:srgbClr val="141B2E"/>
+                </a:solidFill>
+                <a:latin typeface="Arial"/>
+              </a:rPr>
+              <a:t> </a:t>
+            </a:r>
+            <a:r>
+              <a:rPr sz="1150" b="1" i="0">
+                <a:solidFill>
+                  <a:srgbClr val="141B2E"/>
+                </a:solidFill>
+                <a:latin typeface="Consolas"/>
+              </a:rPr>
+              <a:t>=</a:t>
+            </a:r>
+            <a:r>
+              <a:rPr sz="1150" b="1" i="0">
+                <a:solidFill>
+                  <a:srgbClr val="141B2E"/>
+                </a:solidFill>
+                <a:latin typeface="Arial"/>
+              </a:rPr>
+              <a:t> </a:t>
+            </a:r>
+            <a:r>
+              <a:rPr sz="1150" b="1" i="0">
+                <a:solidFill>
+                  <a:srgbClr val="141B2E"/>
+                </a:solidFill>
+                <a:latin typeface="Consolas"/>
+              </a:rPr>
+              <a:t>not_parsed</a:t>
+            </a:r>
+            <a:r>
+              <a:rPr sz="1150" b="1" i="0">
+                <a:solidFill>
+                  <a:srgbClr val="141B2E"/>
+                </a:solidFill>
+                <a:latin typeface="Arial"/>
+              </a:rPr>
+              <a:t>. Экран печатает, что вызов не удался.</a:t>
+            </a:r>
+          </a:p>
+        </p:txBody>
+      </p:sp>
+      <p:sp>
+        <p:nvSpPr>
+          <p:cNvPr id="14" name="Rounded Rectangle 13"/>
+          <p:cNvSpPr/>
+          <p:nvPr/>
+        </p:nvSpPr>
+        <p:spPr>
+          <a:xfrm>
+            <a:off x="502920" y="5853070"/>
+            <a:ext cx="82296" cy="455422"/>
+          </a:xfrm>
+          <a:prstGeom prst="roundRect">
+            <a:avLst>
+              <a:gd name="adj" fmla="val 50000"/>
+            </a:avLst>
+          </a:prstGeom>
+          <a:solidFill>
+            <a:srgbClr val="F0AB00"/>
+          </a:solidFill>
+          <a:ln>
+            <a:noFill/>
+          </a:ln>
+          <a:effectLst/>
+        </p:spPr>
+        <p:style>
+          <a:lnRef idx="1">
+            <a:schemeClr val="accent1"/>
+          </a:lnRef>
+          <a:fillRef idx="3">
+            <a:schemeClr val="accent1"/>
+          </a:fillRef>
+          <a:effectRef idx="2">
+            <a:schemeClr val="accent1"/>
+          </a:effectRef>
+          <a:fontRef idx="minor">
+            <a:schemeClr val="lt1"/>
+          </a:fontRef>
+        </p:style>
+        <p:txBody>
+          <a:bodyPr rtlCol="0" anchor="ctr"/>
+          <a:lstStyle/>
+          <a:p>
+            <a:pPr algn="ctr"/>
+          </a:p>
+        </p:txBody>
+      </p:sp>
+      <p:sp>
+        <p:nvSpPr>
+          <p:cNvPr id="15" name="TextBox 14"/>
+          <p:cNvSpPr txBox="1"/>
+          <p:nvPr/>
+        </p:nvSpPr>
+        <p:spPr>
+          <a:xfrm>
+            <a:off x="859536" y="5981086"/>
+            <a:ext cx="10643616" cy="199389"/>
+          </a:xfrm>
+          <a:prstGeom prst="rect">
+            <a:avLst/>
+          </a:prstGeom>
+          <a:noFill/>
+        </p:spPr>
+        <p:txBody>
+          <a:bodyPr wrap="square" lIns="0" rIns="0" tIns="0" bIns="0" anchor="ctr">
+            <a:spAutoFit/>
+          </a:bodyPr>
+          <a:lstStyle/>
+          <a:p>
+            <a:pPr algn="l">
+              <a:lnSpc>
+                <a:spcPts val="1426"/>
+              </a:lnSpc>
+              <a:spcAft>
+                <a:spcPts val="300"/>
+              </a:spcAft>
+            </a:pPr>
+            <a:r>
+              <a:rPr sz="1150" b="1" i="0">
                 <a:solidFill>
                   <a:srgbClr val="141B2E"/>
                 </a:solidFill>
@@ -13245,7 +13883,7 @@
       </p:sp>
       <p:sp>
         <p:nvSpPr>
-          <p:cNvPr id="14" name="TextBox 13"/>
+          <p:cNvPr id="16" name="TextBox 15"/>
           <p:cNvSpPr txBox="1"/>
           <p:nvPr/>
         </p:nvSpPr>
@@ -18074,7 +18712,7 @@
       </p:sp>
       <p:pic>
         <p:nvPicPr>
-          <p:cNvPr id="3" name="Picture 2" descr="vyhod-shema-pyat-uzlov.png"/>
+          <p:cNvPr id="3" name="Picture 2" descr="vyhod-shema-protsess.png"/>
           <p:cNvPicPr>
             <a:picLocks noChangeAspect="1"/>
           </p:cNvPicPr>
@@ -18223,7 +18861,7 @@
                 </a:solidFill>
                 <a:latin typeface="Consolas"/>
               </a:rPr>
-              <a:t>SEM-07-VYHOD.JSON</a:t>
+              <a:t>STUDENT.JSON</a:t>
             </a:r>
           </a:p>
         </p:txBody>
@@ -22006,7 +22644,7 @@
                 </a:solidFill>
                 <a:latin typeface="Arial"/>
               </a:rPr>
-              <a:t>Из скольких узлов это соберётся?</a:t>
+              <a:t>Из скольких узлов?</a:t>
             </a:r>
           </a:p>
         </p:txBody>
@@ -22019,8 +22657,8 @@
         </p:nvSpPr>
         <p:spPr>
           <a:xfrm>
-            <a:off x="502920" y="1430274"/>
-            <a:ext cx="11183112" cy="957453"/>
+            <a:off x="502920" y="1526438"/>
+            <a:ext cx="11183112" cy="717042"/>
           </a:xfrm>
           <a:prstGeom prst="roundRect">
             <a:avLst>
@@ -22067,8 +22705,8 @@
         </p:nvSpPr>
         <p:spPr>
           <a:xfrm>
-            <a:off x="521208" y="1485138"/>
-            <a:ext cx="64008" cy="847725"/>
+            <a:off x="521208" y="1581302"/>
+            <a:ext cx="64008" cy="607314"/>
           </a:xfrm>
           <a:prstGeom prst="roundRect">
             <a:avLst>
@@ -22113,8 +22751,8 @@
         </p:nvSpPr>
         <p:spPr>
           <a:xfrm>
-            <a:off x="804672" y="1567434"/>
-            <a:ext cx="10643616" cy="683133"/>
+            <a:off x="804672" y="1663598"/>
+            <a:ext cx="10643616" cy="442722"/>
           </a:xfrm>
           <a:prstGeom prst="rect">
             <a:avLst/>
@@ -22142,7 +22780,7 @@
                 </a:solidFill>
                 <a:latin typeface="Arial"/>
               </a:rPr>
-              <a:t>на входе:</a:t>
+              <a:t>что есть:</a:t>
             </a:r>
             <a:r>
               <a:rPr sz="1350" b="0" i="0">
@@ -22151,7 +22789,7 @@
                 </a:solidFill>
                 <a:latin typeface="Arial"/>
               </a:rPr>
-              <a:t> имя, контакт, свободный текст «что нужно»</a:t>
+              <a:t> форма на сайте — имя, контакт и свободный текст «что нужно»</a:t>
             </a:r>
           </a:p>
           <a:p>
@@ -22170,7 +22808,7 @@
                 </a:solidFill>
                 <a:latin typeface="Arial"/>
               </a:rPr>
-              <a:t>на выходе:</a:t>
+              <a:t>что нужно:</a:t>
             </a:r>
             <a:r>
               <a:rPr sz="1350" b="0" i="0">
@@ -22179,18 +22817,44 @@
                 </a:solidFill>
                 <a:latin typeface="Arial"/>
               </a:rPr>
-              <a:t> строка в таблице, где тема заявки проставлена</a:t>
-            </a:r>
-          </a:p>
-          <a:p>
-            <a:pPr algn="l">
-              <a:lnSpc>
-                <a:spcPts val="1593"/>
-              </a:lnSpc>
-              <a:spcAft>
-                <a:spcPts val="300"/>
-              </a:spcAft>
-            </a:pPr>
+              <a:t> строка в таблице, где </a:t>
+            </a:r>
+            <a:r>
+              <a:rPr sz="1350" b="0" i="0">
+                <a:solidFill>
+                  <a:srgbClr val="141B2E"/>
+                </a:solidFill>
+                <a:latin typeface="Consolas"/>
+              </a:rPr>
+              <a:t>тема</a:t>
+            </a:r>
+            <a:r>
+              <a:rPr sz="1350" b="0" i="0">
+                <a:solidFill>
+                  <a:srgbClr val="141B2E"/>
+                </a:solidFill>
+                <a:latin typeface="Arial"/>
+              </a:rPr>
+              <a:t> и </a:t>
+            </a:r>
+            <a:r>
+              <a:rPr sz="1350" b="0" i="0">
+                <a:solidFill>
+                  <a:srgbClr val="141B2E"/>
+                </a:solidFill>
+                <a:latin typeface="Consolas"/>
+              </a:rPr>
+              <a:t>срочность</a:t>
+            </a:r>
+            <a:r>
+              <a:rPr sz="1350" b="0" i="0">
+                <a:solidFill>
+                  <a:srgbClr val="141B2E"/>
+                </a:solidFill>
+                <a:latin typeface="Arial"/>
+              </a:rPr>
+              <a:t> </a:t>
+            </a:r>
             <a:r>
               <a:rPr sz="1350" b="1" i="0">
                 <a:solidFill>
@@ -22198,7 +22862,7 @@
                 </a:solidFill>
                 <a:latin typeface="Arial"/>
               </a:rPr>
-              <a:t>сейчас:</a:t>
+              <a:t>никогда не пусты</a:t>
             </a:r>
             <a:r>
               <a:rPr sz="1350" b="0" i="0">
@@ -22207,7 +22871,7 @@
                 </a:solidFill>
                 <a:latin typeface="Arial"/>
               </a:rPr>
-              <a:t> это делает человек, сорок минут в день</a:t>
+              <a:t> и всегда из списка</a:t>
             </a:r>
           </a:p>
         </p:txBody>
@@ -22220,7 +22884,7 @@
         </p:nvSpPr>
         <p:spPr>
           <a:xfrm>
-            <a:off x="502920" y="3055239"/>
+            <a:off x="502920" y="2910992"/>
             <a:ext cx="11183112" cy="822960"/>
           </a:xfrm>
           <a:prstGeom prst="roundRect">
@@ -22268,7 +22932,7 @@
         </p:nvSpPr>
         <p:spPr>
           <a:xfrm>
-            <a:off x="722376" y="3183255"/>
+            <a:off x="722376" y="3039008"/>
             <a:ext cx="10634472" cy="566928"/>
           </a:xfrm>
           <a:prstGeom prst="rect">
@@ -22297,7 +22961,7 @@
                 </a:solidFill>
                 <a:latin typeface="Arial"/>
               </a:rPr>
-              <a:t>Из скольких узлов соберётся такой процесс и какие это узлы?</a:t>
+              <a:t>Из скольких узлов соберётся процесс, который решает эту задачу полностью?</a:t>
             </a:r>
           </a:p>
         </p:txBody>
@@ -22310,7 +22974,7 @@
         </p:nvSpPr>
         <p:spPr>
           <a:xfrm>
-            <a:off x="502920" y="4545711"/>
+            <a:off x="502920" y="4401464"/>
             <a:ext cx="2686050" cy="1051560"/>
           </a:xfrm>
           <a:prstGeom prst="roundRect">
@@ -22358,7 +23022,7 @@
         </p:nvSpPr>
         <p:spPr>
           <a:xfrm>
-            <a:off x="612648" y="4545711"/>
+            <a:off x="612648" y="4401464"/>
             <a:ext cx="2466594" cy="1051560"/>
           </a:xfrm>
           <a:prstGeom prst="rect">
@@ -22387,7 +23051,7 @@
                 </a:solidFill>
                 <a:latin typeface="Arial"/>
               </a:rPr>
-              <a:t>два: форма и таблица</a:t>
+              <a:t>два</a:t>
             </a:r>
           </a:p>
         </p:txBody>
@@ -22400,7 +23064,7 @@
         </p:nvSpPr>
         <p:spPr>
           <a:xfrm>
-            <a:off x="3335274" y="4545711"/>
+            <a:off x="3335274" y="4401464"/>
             <a:ext cx="2686050" cy="1051560"/>
           </a:xfrm>
           <a:prstGeom prst="roundRect">
@@ -22448,7 +23112,7 @@
         </p:nvSpPr>
         <p:spPr>
           <a:xfrm>
-            <a:off x="3445002" y="4545711"/>
+            <a:off x="3445002" y="4401464"/>
             <a:ext cx="2466594" cy="1051560"/>
           </a:xfrm>
           <a:prstGeom prst="rect">
@@ -22477,7 +23141,7 @@
                 </a:solidFill>
                 <a:latin typeface="Arial"/>
               </a:rPr>
-              <a:t>три: форма, модель, таблица</a:t>
+              <a:t>три</a:t>
             </a:r>
           </a:p>
         </p:txBody>
@@ -22490,7 +23154,7 @@
         </p:nvSpPr>
         <p:spPr>
           <a:xfrm>
-            <a:off x="6167628" y="4545711"/>
+            <a:off x="6167628" y="4401464"/>
             <a:ext cx="2686050" cy="1051560"/>
           </a:xfrm>
           <a:prstGeom prst="roundRect">
@@ -22538,7 +23202,7 @@
         </p:nvSpPr>
         <p:spPr>
           <a:xfrm>
-            <a:off x="6277356" y="4545711"/>
+            <a:off x="6277356" y="4401464"/>
             <a:ext cx="2466594" cy="1051560"/>
           </a:xfrm>
           <a:prstGeom prst="rect">
@@ -22567,7 +23231,7 @@
                 </a:solidFill>
                 <a:latin typeface="Arial"/>
               </a:rPr>
-              <a:t>четыре: форма, модель, проверка, таблица</a:t>
+              <a:t>пять</a:t>
             </a:r>
           </a:p>
         </p:txBody>
@@ -22580,7 +23244,7 @@
         </p:nvSpPr>
         <p:spPr>
           <a:xfrm>
-            <a:off x="8999982" y="4545711"/>
+            <a:off x="8999982" y="4401464"/>
             <a:ext cx="2686050" cy="1051560"/>
           </a:xfrm>
           <a:prstGeom prst="roundRect">
@@ -22628,7 +23292,7 @@
         </p:nvSpPr>
         <p:spPr>
           <a:xfrm>
-            <a:off x="9109710" y="4545711"/>
+            <a:off x="9109710" y="4401464"/>
             <a:ext cx="2466594" cy="1051560"/>
           </a:xfrm>
           <a:prstGeom prst="rect">
@@ -22657,7 +23321,7 @@
                 </a:solidFill>
                 <a:latin typeface="Arial"/>
               </a:rPr>
-              <a:t>зависит от того, что считать пометкой</a:t>
+              <a:t>зависит от того, что считать решением</a:t>
             </a:r>
           </a:p>
         </p:txBody>
@@ -22767,7 +23431,7 @@
                 </a:solidFill>
                 <a:latin typeface="Arial"/>
               </a:rPr>
-              <a:t>Каждый вариант отвечает на свой вопрос</a:t>
+              <a:t>Чего не хватает трём узлам</a:t>
             </a:r>
           </a:p>
         </p:txBody>
@@ -22780,12 +23444,12 @@
         </p:nvSpPr>
         <p:spPr>
           <a:xfrm>
-            <a:off x="502920" y="1424686"/>
-            <a:ext cx="11183112" cy="2766695"/>
+            <a:off x="502920" y="1497711"/>
+            <a:ext cx="11183112" cy="2584132"/>
           </a:xfrm>
           <a:prstGeom prst="roundRect">
             <a:avLst>
-              <a:gd name="adj" fmla="val 11016"/>
+              <a:gd name="adj" fmla="val 11795"/>
             </a:avLst>
           </a:prstGeom>
           <a:solidFill>
@@ -22828,8 +23492,8 @@
         </p:nvSpPr>
         <p:spPr>
           <a:xfrm>
-            <a:off x="685800" y="1607566"/>
-            <a:ext cx="2464407" cy="282067"/>
+            <a:off x="685800" y="1680591"/>
+            <a:ext cx="892238" cy="282067"/>
           </a:xfrm>
           <a:prstGeom prst="rect">
             <a:avLst/>
@@ -22857,7 +23521,7 @@
                 </a:solidFill>
                 <a:latin typeface="Arial"/>
               </a:rPr>
-              <a:t>ВАРИАНТ</a:t>
+              <a:t>ОТВЕТ</a:t>
             </a:r>
           </a:p>
         </p:txBody>
@@ -22870,8 +23534,8 @@
         </p:nvSpPr>
         <p:spPr>
           <a:xfrm>
-            <a:off x="3296511" y="1607566"/>
-            <a:ext cx="3333547" cy="282067"/>
+            <a:off x="1724342" y="1680591"/>
+            <a:ext cx="3552691" cy="282067"/>
           </a:xfrm>
           <a:prstGeom prst="rect">
             <a:avLst/>
@@ -22912,8 +23576,8 @@
         </p:nvSpPr>
         <p:spPr>
           <a:xfrm>
-            <a:off x="6776362" y="1607566"/>
-            <a:ext cx="4580485" cy="282067"/>
+            <a:off x="5423338" y="1680591"/>
+            <a:ext cx="5933509" cy="282067"/>
           </a:xfrm>
           <a:prstGeom prst="rect">
             <a:avLst/>
@@ -22941,7 +23605,7 @@
                 </a:solidFill>
                 <a:latin typeface="Arial"/>
               </a:rPr>
-              <a:t>ЧЕМ ПЛАТИТ</a:t>
+              <a:t>ЧЕГО НЕ ХВАТАЕТ</a:t>
             </a:r>
           </a:p>
         </p:txBody>
@@ -22954,8 +23618,8 @@
         </p:nvSpPr>
         <p:spPr>
           <a:xfrm>
-            <a:off x="685800" y="1889633"/>
-            <a:ext cx="2464407" cy="529717"/>
+            <a:off x="685800" y="1962658"/>
+            <a:ext cx="892238" cy="347154"/>
           </a:xfrm>
           <a:prstGeom prst="rect">
             <a:avLst/>
@@ -22983,7 +23647,7 @@
                 </a:solidFill>
                 <a:latin typeface="Arial"/>
               </a:rPr>
-              <a:t>два: форма и таблица</a:t>
+              <a:t>два</a:t>
             </a:r>
           </a:p>
         </p:txBody>
@@ -22996,8 +23660,8 @@
         </p:nvSpPr>
         <p:spPr>
           <a:xfrm>
-            <a:off x="3296511" y="1889633"/>
-            <a:ext cx="3333547" cy="529717"/>
+            <a:off x="1724342" y="1962658"/>
+            <a:ext cx="3552691" cy="347154"/>
           </a:xfrm>
           <a:prstGeom prst="rect">
             <a:avLst/>
@@ -23025,7 +23689,7 @@
                 </a:solidFill>
                 <a:latin typeface="Arial"/>
               </a:rPr>
-              <a:t>мгновенно, бесплатно, ломаться нечему</a:t>
+              <a:t>мгновенно и бесплатно</a:t>
             </a:r>
           </a:p>
         </p:txBody>
@@ -23038,8 +23702,8 @@
         </p:nvSpPr>
         <p:spPr>
           <a:xfrm>
-            <a:off x="6776362" y="1889633"/>
-            <a:ext cx="4580485" cy="529717"/>
+            <a:off x="5423338" y="1962658"/>
+            <a:ext cx="5933509" cy="347154"/>
           </a:xfrm>
           <a:prstGeom prst="rect">
             <a:avLst/>
@@ -23067,7 +23731,7 @@
                 </a:solidFill>
                 <a:latin typeface="Arial"/>
               </a:rPr>
-              <a:t>пометку ставит человек — задача осталась нерешённой</a:t>
+              <a:t>тема и срочность не появятся сами — задача не решена</a:t>
             </a:r>
           </a:p>
         </p:txBody>
@@ -23080,7 +23744,7 @@
         </p:nvCxnSpPr>
         <p:spPr>
           <a:xfrm>
-            <a:off x="685800" y="2419350"/>
+            <a:off x="685800" y="2309812"/>
             <a:ext cx="10817352" cy="0"/>
           </a:xfrm>
           <a:prstGeom prst="line">
@@ -23115,8 +23779,8 @@
         </p:nvSpPr>
         <p:spPr>
           <a:xfrm>
-            <a:off x="685800" y="2419350"/>
-            <a:ext cx="2464407" cy="529717"/>
+            <a:off x="685800" y="2309812"/>
+            <a:ext cx="892238" cy="529717"/>
           </a:xfrm>
           <a:prstGeom prst="rect">
             <a:avLst/>
@@ -23138,13 +23802,13 @@
               </a:spcAft>
             </a:pPr>
             <a:r>
-              <a:rPr sz="1250" b="1" i="0">
-                <a:solidFill>
-                  <a:srgbClr val="141B2E"/>
-                </a:solidFill>
-                <a:latin typeface="Arial"/>
-              </a:rPr>
-              <a:t>три: форма, модель, таблица</a:t>
+              <a:rPr sz="1250" b="0" i="0">
+                <a:solidFill>
+                  <a:srgbClr val="141B2E"/>
+                </a:solidFill>
+                <a:latin typeface="Arial"/>
+              </a:rPr>
+              <a:t>три</a:t>
             </a:r>
           </a:p>
         </p:txBody>
@@ -23157,8 +23821,8 @@
         </p:nvSpPr>
         <p:spPr>
           <a:xfrm>
-            <a:off x="3296511" y="2419350"/>
-            <a:ext cx="3333547" cy="529717"/>
+            <a:off x="1724342" y="2309812"/>
+            <a:ext cx="3552691" cy="529717"/>
           </a:xfrm>
           <a:prstGeom prst="rect">
             <a:avLst/>
@@ -23186,7 +23850,7 @@
                 </a:solidFill>
                 <a:latin typeface="Arial"/>
               </a:rPr>
-              <a:t>минимальный процесс, который действительно работает</a:t>
+              <a:t>заявка доезжает до таблицы</a:t>
             </a:r>
           </a:p>
         </p:txBody>
@@ -23199,8 +23863,8 @@
         </p:nvSpPr>
         <p:spPr>
           <a:xfrm>
-            <a:off x="6776362" y="2419350"/>
-            <a:ext cx="4580485" cy="529717"/>
+            <a:off x="5423338" y="2309812"/>
+            <a:ext cx="5933509" cy="529717"/>
           </a:xfrm>
           <a:prstGeom prst="rect">
             <a:avLst/>
@@ -23228,7 +23892,7 @@
                 </a:solidFill>
                 <a:latin typeface="Arial"/>
               </a:rPr>
-              <a:t>пометка приходит как есть, проверить её нечем</a:t>
+              <a:t>тема будет какой угодно, срочности не будет вовсе, результат видно только в таблице</a:t>
             </a:r>
           </a:p>
         </p:txBody>
@@ -23241,7 +23905,7 @@
         </p:nvCxnSpPr>
         <p:spPr>
           <a:xfrm>
-            <a:off x="685800" y="2949067"/>
+            <a:off x="685800" y="2839529"/>
             <a:ext cx="10817352" cy="0"/>
           </a:xfrm>
           <a:prstGeom prst="line">
@@ -23276,8 +23940,8 @@
         </p:nvSpPr>
         <p:spPr>
           <a:xfrm>
-            <a:off x="685800" y="2949067"/>
-            <a:ext cx="2464407" cy="529717"/>
+            <a:off x="685800" y="2839529"/>
+            <a:ext cx="892238" cy="712279"/>
           </a:xfrm>
           <a:prstGeom prst="rect">
             <a:avLst/>
@@ -23299,13 +23963,13 @@
               </a:spcAft>
             </a:pPr>
             <a:r>
-              <a:rPr sz="1250" b="0" i="0">
-                <a:solidFill>
-                  <a:srgbClr val="141B2E"/>
-                </a:solidFill>
-                <a:latin typeface="Arial"/>
-              </a:rPr>
-              <a:t>четыре: плюс проверка</a:t>
+              <a:rPr sz="1250" b="1" i="0">
+                <a:solidFill>
+                  <a:srgbClr val="141B2E"/>
+                </a:solidFill>
+                <a:latin typeface="Arial"/>
+              </a:rPr>
+              <a:t>пять</a:t>
             </a:r>
           </a:p>
         </p:txBody>
@@ -23318,8 +23982,8 @@
         </p:nvSpPr>
         <p:spPr>
           <a:xfrm>
-            <a:off x="3296511" y="2949067"/>
-            <a:ext cx="3333547" cy="529717"/>
+            <a:off x="1724342" y="2839529"/>
+            <a:ext cx="3552691" cy="712279"/>
           </a:xfrm>
           <a:prstGeom prst="rect">
             <a:avLst/>
@@ -23341,13 +24005,22 @@
               </a:spcAft>
             </a:pPr>
             <a:r>
+              <a:rPr sz="1250" b="1" i="0">
+                <a:solidFill>
+                  <a:srgbClr val="141B2E"/>
+                </a:solidFill>
+                <a:latin typeface="Arial"/>
+              </a:rPr>
+              <a:t>решение</a:t>
+            </a:r>
+            <a:r>
               <a:rPr sz="1250" b="0" i="0">
                 <a:solidFill>
                   <a:srgbClr val="141B2E"/>
                 </a:solidFill>
                 <a:latin typeface="Arial"/>
               </a:rPr>
-              <a:t>ошибку видно до записи</a:t>
+              <a:t>: значения из справочника, всегда заполнены, результат виден сразу</a:t>
             </a:r>
           </a:p>
         </p:txBody>
@@ -23360,8 +24033,8 @@
         </p:nvSpPr>
         <p:spPr>
           <a:xfrm>
-            <a:off x="6776362" y="2949067"/>
-            <a:ext cx="4580485" cy="529717"/>
+            <a:off x="5423338" y="2839529"/>
+            <a:ext cx="5933509" cy="712279"/>
           </a:xfrm>
           <a:prstGeom prst="rect">
             <a:avLst/>
@@ -23389,7 +24062,7 @@
                 </a:solidFill>
                 <a:latin typeface="Arial"/>
               </a:rPr>
-              <a:t>проверять пока нечего: значения ещё не выделены — это кейс 2</a:t>
+              <a:t>лишний узел там, где хватило бы трёх для показа</a:t>
             </a:r>
           </a:p>
         </p:txBody>
@@ -23402,7 +24075,7 @@
         </p:nvCxnSpPr>
         <p:spPr>
           <a:xfrm>
-            <a:off x="685800" y="3478784"/>
+            <a:off x="685800" y="3551809"/>
             <a:ext cx="10817352" cy="0"/>
           </a:xfrm>
           <a:prstGeom prst="line">
@@ -23437,8 +24110,8 @@
         </p:nvSpPr>
         <p:spPr>
           <a:xfrm>
-            <a:off x="685800" y="3478784"/>
-            <a:ext cx="2464407" cy="529717"/>
+            <a:off x="685800" y="3551809"/>
+            <a:ext cx="892238" cy="347154"/>
           </a:xfrm>
           <a:prstGeom prst="rect">
             <a:avLst/>
@@ -23466,7 +24139,7 @@
                 </a:solidFill>
                 <a:latin typeface="Arial"/>
               </a:rPr>
-              <a:t>«зависит от того, что считать пометкой»</a:t>
+              <a:t>«зависит»</a:t>
             </a:r>
           </a:p>
         </p:txBody>
@@ -23479,8 +24152,8 @@
         </p:nvSpPr>
         <p:spPr>
           <a:xfrm>
-            <a:off x="3296511" y="3478784"/>
-            <a:ext cx="3333547" cy="529717"/>
+            <a:off x="1724342" y="3551809"/>
+            <a:ext cx="3552691" cy="347154"/>
           </a:xfrm>
           <a:prstGeom prst="rect">
             <a:avLst/>
@@ -23508,7 +24181,7 @@
                 </a:solidFill>
                 <a:latin typeface="Arial"/>
               </a:rPr>
-              <a:t>верно по сути: от этого и зависит</a:t>
+              <a:t>верно по сути</a:t>
             </a:r>
           </a:p>
         </p:txBody>
@@ -23521,8 +24194,8 @@
         </p:nvSpPr>
         <p:spPr>
           <a:xfrm>
-            <a:off x="6776362" y="3478784"/>
-            <a:ext cx="4580485" cy="529717"/>
+            <a:off x="5423338" y="3551809"/>
+            <a:ext cx="5933509" cy="347154"/>
           </a:xfrm>
           <a:prstGeom prst="rect">
             <a:avLst/>
@@ -23563,7 +24236,7 @@
         </p:nvSpPr>
         <p:spPr>
           <a:xfrm>
-            <a:off x="502920" y="4858893"/>
+            <a:off x="502920" y="4749355"/>
             <a:ext cx="82296" cy="746760"/>
           </a:xfrm>
           <a:prstGeom prst="roundRect">
@@ -23609,7 +24282,7 @@
         </p:nvSpPr>
         <p:spPr>
           <a:xfrm>
-            <a:off x="859536" y="4986909"/>
+            <a:off x="859536" y="4877371"/>
             <a:ext cx="10643616" cy="490727"/>
           </a:xfrm>
           <a:prstGeom prst="rect">
@@ -23638,7 +24311,7 @@
                 </a:solidFill>
                 <a:latin typeface="Arial"/>
               </a:rPr>
-              <a:t>Блоки, из которых собираем:</a:t>
+              <a:t>Трём узлам не хватает двух вещей: </a:t>
             </a:r>
             <a:r>
               <a:rPr sz="1500" b="1" i="0">
@@ -23647,16 +24320,16 @@
                 </a:solidFill>
                 <a:latin typeface="Arial"/>
               </a:rPr>
-              <a:t> </a:t>
+              <a:t>справочника</a:t>
             </a:r>
             <a:r>
               <a:rPr sz="1500" b="1" i="0">
                 <a:solidFill>
                   <a:srgbClr val="141B2E"/>
                 </a:solidFill>
-                <a:latin typeface="Consolas"/>
-              </a:rPr>
-              <a:t>n8n</a:t>
+                <a:latin typeface="Arial"/>
+              </a:rPr>
+              <a:t>, который не даст ни пустой темы, ни темы вне списка, и </a:t>
             </a:r>
             <a:r>
               <a:rPr sz="1500" b="1" i="0">
@@ -23665,133 +24338,16 @@
                 </a:solidFill>
                 <a:latin typeface="Arial"/>
               </a:rPr>
-              <a:t> </a:t>
+              <a:t>места, где виден результат</a:t>
             </a:r>
             <a:r>
               <a:rPr sz="1500" b="1" i="0">
                 <a:solidFill>
                   <a:srgbClr val="141B2E"/>
                 </a:solidFill>
-                <a:latin typeface="Consolas"/>
-              </a:rPr>
-              <a:t>Form</a:t>
-            </a:r>
-            <a:r>
-              <a:rPr sz="1500" b="1" i="0">
-                <a:solidFill>
-                  <a:srgbClr val="141B2E"/>
-                </a:solidFill>
-                <a:latin typeface="Arial"/>
-              </a:rPr>
-              <a:t> </a:t>
-            </a:r>
-            <a:r>
-              <a:rPr sz="1500" b="1" i="0">
-                <a:solidFill>
-                  <a:srgbClr val="141B2E"/>
-                </a:solidFill>
-                <a:latin typeface="Consolas"/>
-              </a:rPr>
-              <a:t>Trigger</a:t>
-            </a:r>
-            <a:r>
-              <a:rPr sz="1500" b="1" i="0">
-                <a:solidFill>
-                  <a:srgbClr val="141B2E"/>
-                </a:solidFill>
-                <a:latin typeface="Arial"/>
-              </a:rPr>
-              <a:t> — форма и её поля · </a:t>
-            </a:r>
-            <a:r>
-              <a:rPr sz="1500" b="1" i="0">
-                <a:solidFill>
-                  <a:srgbClr val="141B2E"/>
-                </a:solidFill>
-                <a:latin typeface="Consolas"/>
-              </a:rPr>
-              <a:t>Basic</a:t>
-            </a:r>
-            <a:r>
-              <a:rPr sz="1500" b="1" i="0">
-                <a:solidFill>
-                  <a:srgbClr val="141B2E"/>
-                </a:solidFill>
-                <a:latin typeface="Arial"/>
-              </a:rPr>
-              <a:t> </a:t>
-            </a:r>
-            <a:r>
-              <a:rPr sz="1500" b="1" i="0">
-                <a:solidFill>
-                  <a:srgbClr val="141B2E"/>
-                </a:solidFill>
-                <a:latin typeface="Consolas"/>
-              </a:rPr>
-              <a:t>LLM</a:t>
-            </a:r>
-            <a:r>
-              <a:rPr sz="1500" b="1" i="0">
-                <a:solidFill>
-                  <a:srgbClr val="141B2E"/>
-                </a:solidFill>
-                <a:latin typeface="Arial"/>
-              </a:rPr>
-              <a:t> </a:t>
-            </a:r>
-            <a:r>
-              <a:rPr sz="1500" b="1" i="0">
-                <a:solidFill>
-                  <a:srgbClr val="141B2E"/>
-                </a:solidFill>
-                <a:latin typeface="Consolas"/>
-              </a:rPr>
-              <a:t>Chain</a:t>
-            </a:r>
-            <a:r>
-              <a:rPr sz="1500" b="1" i="0">
-                <a:solidFill>
-                  <a:srgbClr val="141B2E"/>
-                </a:solidFill>
-                <a:latin typeface="Arial"/>
-              </a:rPr>
-              <a:t> — шаг модели · </a:t>
-            </a:r>
-            <a:r>
-              <a:rPr sz="1500" b="1" i="0">
-                <a:solidFill>
-                  <a:srgbClr val="141B2E"/>
-                </a:solidFill>
-                <a:latin typeface="Consolas"/>
-              </a:rPr>
-              <a:t>Data</a:t>
-            </a:r>
-            <a:r>
-              <a:rPr sz="1500" b="1" i="0">
-                <a:solidFill>
-                  <a:srgbClr val="141B2E"/>
-                </a:solidFill>
-                <a:latin typeface="Arial"/>
-              </a:rPr>
-              <a:t> </a:t>
-            </a:r>
-            <a:r>
-              <a:rPr sz="1500" b="1" i="0">
-                <a:solidFill>
-                  <a:srgbClr val="141B2E"/>
-                </a:solidFill>
-                <a:latin typeface="Consolas"/>
-              </a:rPr>
-              <a:t>Table</a:t>
-            </a:r>
-            <a:r>
-              <a:rPr sz="1500" b="1" i="0">
-                <a:solidFill>
-                  <a:srgbClr val="141B2E"/>
-                </a:solidFill>
-                <a:latin typeface="Arial"/>
-              </a:rPr>
-              <a:t> — внутренняя таблица n8n</a:t>
+                <a:latin typeface="Arial"/>
+              </a:rPr>
+              <a:t> — иначе каждую проверку придётся ходить в таблицу.</a:t>
             </a:r>
           </a:p>
         </p:txBody>
@@ -23901,14 +24457,14 @@
                 </a:solidFill>
                 <a:latin typeface="Arial"/>
               </a:rPr>
-              <a:t>Три узла</a:t>
+              <a:t>Пять узлов и один экран</a:t>
             </a:r>
           </a:p>
         </p:txBody>
       </p:sp>
       <p:pic>
         <p:nvPicPr>
-          <p:cNvPr id="3" name="Picture 2" descr="k1-shema-tri-uzla.png"/>
+          <p:cNvPr id="3" name="Picture 2" descr="k1-shema-pyat-uzlov.png"/>
           <p:cNvPicPr>
             <a:picLocks noChangeAspect="1"/>
           </p:cNvPicPr>
@@ -23922,8 +24478,8 @@
         </p:blipFill>
         <p:spPr>
           <a:xfrm>
-            <a:off x="1436952" y="943356"/>
-            <a:ext cx="9315046" cy="2328761"/>
+            <a:off x="1328552" y="943356"/>
+            <a:ext cx="9531846" cy="1787221"/>
           </a:xfrm>
           <a:prstGeom prst="rect">
             <a:avLst/>
@@ -23938,136 +24494,12 @@
         </p:nvSpPr>
         <p:spPr>
           <a:xfrm>
-            <a:off x="502920" y="3436709"/>
-            <a:ext cx="82296" cy="455422"/>
+            <a:off x="502920" y="2895169"/>
+            <a:ext cx="11183112" cy="2029015"/>
           </a:xfrm>
           <a:prstGeom prst="roundRect">
             <a:avLst>
-              <a:gd name="adj" fmla="val 50000"/>
-            </a:avLst>
-          </a:prstGeom>
-          <a:solidFill>
-            <a:srgbClr val="F0AB00"/>
-          </a:solidFill>
-          <a:ln>
-            <a:noFill/>
-          </a:ln>
-          <a:effectLst/>
-        </p:spPr>
-        <p:style>
-          <a:lnRef idx="1">
-            <a:schemeClr val="accent1"/>
-          </a:lnRef>
-          <a:fillRef idx="3">
-            <a:schemeClr val="accent1"/>
-          </a:fillRef>
-          <a:effectRef idx="2">
-            <a:schemeClr val="accent1"/>
-          </a:effectRef>
-          <a:fontRef idx="minor">
-            <a:schemeClr val="lt1"/>
-          </a:fontRef>
-        </p:style>
-        <p:txBody>
-          <a:bodyPr rtlCol="0" anchor="ctr"/>
-          <a:lstStyle/>
-          <a:p>
-            <a:pPr algn="ctr"/>
-          </a:p>
-        </p:txBody>
-      </p:sp>
-      <p:sp>
-        <p:nvSpPr>
-          <p:cNvPr id="5" name="TextBox 4"/>
-          <p:cNvSpPr txBox="1"/>
-          <p:nvPr/>
-        </p:nvSpPr>
-        <p:spPr>
-          <a:xfrm>
-            <a:off x="859536" y="3564725"/>
-            <a:ext cx="10643616" cy="199389"/>
-          </a:xfrm>
-          <a:prstGeom prst="rect">
-            <a:avLst/>
-          </a:prstGeom>
-          <a:noFill/>
-        </p:spPr>
-        <p:txBody>
-          <a:bodyPr wrap="square" lIns="0" rIns="0" tIns="0" bIns="0" anchor="ctr">
-            <a:spAutoFit/>
-          </a:bodyPr>
-          <a:lstStyle/>
-          <a:p>
-            <a:pPr algn="l">
-              <a:lnSpc>
-                <a:spcPts val="1426"/>
-              </a:lnSpc>
-              <a:spcAft>
-                <a:spcPts val="300"/>
-              </a:spcAft>
-            </a:pPr>
-            <a:r>
-              <a:rPr sz="1150" b="1" i="0">
-                <a:solidFill>
-                  <a:srgbClr val="141B2E"/>
-                </a:solidFill>
-                <a:latin typeface="Arial"/>
-              </a:rPr>
-              <a:t>форма на сайте</a:t>
-            </a:r>
-            <a:r>
-              <a:rPr sz="1150" b="1" i="0">
-                <a:solidFill>
-                  <a:srgbClr val="141B2E"/>
-                </a:solidFill>
-                <a:latin typeface="Arial"/>
-              </a:rPr>
-              <a:t> → </a:t>
-            </a:r>
-            <a:r>
-              <a:rPr sz="1150" b="1" i="0">
-                <a:solidFill>
-                  <a:srgbClr val="141B2E"/>
-                </a:solidFill>
-                <a:latin typeface="Arial"/>
-              </a:rPr>
-              <a:t>шаг модели</a:t>
-            </a:r>
-            <a:r>
-              <a:rPr sz="1150" b="1" i="0">
-                <a:solidFill>
-                  <a:srgbClr val="141B2E"/>
-                </a:solidFill>
-                <a:latin typeface="Arial"/>
-              </a:rPr>
-              <a:t> → </a:t>
-            </a:r>
-            <a:r>
-              <a:rPr sz="1150" b="1" i="0">
-                <a:solidFill>
-                  <a:srgbClr val="141B2E"/>
-                </a:solidFill>
-                <a:latin typeface="Arial"/>
-              </a:rPr>
-              <a:t>строка в таблице</a:t>
-            </a:r>
-          </a:p>
-        </p:txBody>
-      </p:sp>
-      <p:sp>
-        <p:nvSpPr>
-          <p:cNvPr id="6" name="Rounded Rectangle 5"/>
-          <p:cNvSpPr/>
-          <p:nvPr/>
-        </p:nvSpPr>
-        <p:spPr>
-          <a:xfrm>
-            <a:off x="502920" y="4056723"/>
-            <a:ext cx="11183112" cy="1645475"/>
-          </a:xfrm>
-          <a:prstGeom prst="roundRect">
-            <a:avLst>
-              <a:gd name="adj" fmla="val 18523"/>
+              <a:gd name="adj" fmla="val 15022"/>
             </a:avLst>
           </a:prstGeom>
           <a:solidFill>
@@ -24104,14 +24536,98 @@
       </p:sp>
       <p:sp>
         <p:nvSpPr>
+          <p:cNvPr id="5" name="TextBox 4"/>
+          <p:cNvSpPr txBox="1"/>
+          <p:nvPr/>
+        </p:nvSpPr>
+        <p:spPr>
+          <a:xfrm>
+            <a:off x="658368" y="3050617"/>
+            <a:ext cx="3206458" cy="282067"/>
+          </a:xfrm>
+          <a:prstGeom prst="rect">
+            <a:avLst/>
+          </a:prstGeom>
+          <a:noFill/>
+        </p:spPr>
+        <p:txBody>
+          <a:bodyPr wrap="square" lIns="0" rIns="0" tIns="0" bIns="0" anchor="t">
+            <a:spAutoFit/>
+          </a:bodyPr>
+          <a:lstStyle/>
+          <a:p>
+            <a:pPr algn="l">
+              <a:lnSpc>
+                <a:spcPts val="1265"/>
+              </a:lnSpc>
+              <a:spcAft>
+                <a:spcPts val="0"/>
+              </a:spcAft>
+            </a:pPr>
+            <a:r>
+              <a:rPr sz="1150" b="1" i="0">
+                <a:solidFill>
+                  <a:srgbClr val="6B7685"/>
+                </a:solidFill>
+                <a:latin typeface="Arial"/>
+              </a:rPr>
+              <a:t>УЗЕЛ</a:t>
+            </a:r>
+          </a:p>
+        </p:txBody>
+      </p:sp>
+      <p:sp>
+        <p:nvSpPr>
+          <p:cNvPr id="6" name="TextBox 5"/>
+          <p:cNvSpPr txBox="1"/>
+          <p:nvPr/>
+        </p:nvSpPr>
+        <p:spPr>
+          <a:xfrm>
+            <a:off x="4011130" y="3050617"/>
+            <a:ext cx="7373149" cy="282067"/>
+          </a:xfrm>
+          <a:prstGeom prst="rect">
+            <a:avLst/>
+          </a:prstGeom>
+          <a:noFill/>
+        </p:spPr>
+        <p:txBody>
+          <a:bodyPr wrap="square" lIns="0" rIns="0" tIns="0" bIns="0" anchor="t">
+            <a:spAutoFit/>
+          </a:bodyPr>
+          <a:lstStyle/>
+          <a:p>
+            <a:pPr algn="l">
+              <a:lnSpc>
+                <a:spcPts val="1265"/>
+              </a:lnSpc>
+              <a:spcAft>
+                <a:spcPts val="0"/>
+              </a:spcAft>
+            </a:pPr>
+            <a:r>
+              <a:rPr sz="1150" b="1" i="0">
+                <a:solidFill>
+                  <a:srgbClr val="6B7685"/>
+                </a:solidFill>
+                <a:latin typeface="Arial"/>
+              </a:rPr>
+              <a:t>ЧТО НАСТРАИВАЕМ</a:t>
+            </a:r>
+          </a:p>
+        </p:txBody>
+      </p:sp>
+      <p:sp>
+        <p:nvSpPr>
           <p:cNvPr id="7" name="TextBox 6"/>
           <p:cNvSpPr txBox="1"/>
           <p:nvPr/>
         </p:nvSpPr>
         <p:spPr>
           <a:xfrm>
-            <a:off x="685800" y="4239603"/>
-            <a:ext cx="1455174" cy="282067"/>
+            <a:off x="658368" y="3332684"/>
+            <a:ext cx="3206458" cy="287210"/>
           </a:xfrm>
           <a:prstGeom prst="rect">
             <a:avLst/>
@@ -24119,14 +24635,14 @@
           <a:noFill/>
         </p:spPr>
         <p:txBody>
-          <a:bodyPr wrap="square" lIns="0" rIns="0" tIns="0" bIns="0" anchor="t">
+          <a:bodyPr wrap="square" lIns="0" rIns="0" tIns="0" bIns="0" anchor="ctr">
             <a:spAutoFit/>
           </a:bodyPr>
           <a:lstStyle/>
           <a:p>
             <a:pPr algn="l">
               <a:lnSpc>
-                <a:spcPts val="1265"/>
+                <a:spcPts val="1253"/>
               </a:lnSpc>
               <a:spcAft>
                 <a:spcPts val="0"/>
@@ -24135,11 +24651,11 @@
             <a:r>
               <a:rPr sz="1150" b="1" i="0">
                 <a:solidFill>
-                  <a:srgbClr val="6B7685"/>
-                </a:solidFill>
-                <a:latin typeface="Arial"/>
-              </a:rPr>
-              <a:t>УЗЕЛ</a:t>
+                  <a:srgbClr val="141B2E"/>
+                </a:solidFill>
+                <a:latin typeface="Arial"/>
+              </a:rPr>
+              <a:t>Request form</a:t>
             </a:r>
           </a:p>
         </p:txBody>
@@ -24152,50 +24668,8 @@
         </p:nvSpPr>
         <p:spPr>
           <a:xfrm>
-            <a:off x="2287278" y="4239603"/>
-            <a:ext cx="9069569" cy="282067"/>
-          </a:xfrm>
-          <a:prstGeom prst="rect">
-            <a:avLst/>
-          </a:prstGeom>
-          <a:noFill/>
-        </p:spPr>
-        <p:txBody>
-          <a:bodyPr wrap="square" lIns="0" rIns="0" tIns="0" bIns="0" anchor="t">
-            <a:spAutoFit/>
-          </a:bodyPr>
-          <a:lstStyle/>
-          <a:p>
-            <a:pPr algn="l">
-              <a:lnSpc>
-                <a:spcPts val="1265"/>
-              </a:lnSpc>
-              <a:spcAft>
-                <a:spcPts val="0"/>
-              </a:spcAft>
-            </a:pPr>
-            <a:r>
-              <a:rPr sz="1150" b="1" i="0">
-                <a:solidFill>
-                  <a:srgbClr val="6B7685"/>
-                </a:solidFill>
-                <a:latin typeface="Arial"/>
-              </a:rPr>
-              <a:t>ЧТО НАСТРАИВАЕМ</a:t>
-            </a:r>
-          </a:p>
-        </p:txBody>
-      </p:sp>
-      <p:sp>
-        <p:nvSpPr>
-          <p:cNvPr id="9" name="TextBox 8"/>
-          <p:cNvSpPr txBox="1"/>
-          <p:nvPr/>
-        </p:nvSpPr>
-        <p:spPr>
-          <a:xfrm>
-            <a:off x="685800" y="4521670"/>
-            <a:ext cx="1455174" cy="332549"/>
+            <a:off x="4011130" y="3332684"/>
+            <a:ext cx="7373149" cy="287210"/>
           </a:xfrm>
           <a:prstGeom prst="rect">
             <a:avLst/>
@@ -24210,76 +24684,34 @@
           <a:p>
             <a:pPr algn="l">
               <a:lnSpc>
-                <a:spcPts val="1322"/>
+                <a:spcPts val="1253"/>
               </a:lnSpc>
               <a:spcAft>
                 <a:spcPts val="0"/>
               </a:spcAft>
             </a:pPr>
             <a:r>
-              <a:rPr sz="1150" b="1" i="0">
-                <a:solidFill>
-                  <a:srgbClr val="141B2E"/>
-                </a:solidFill>
-                <a:latin typeface="Arial"/>
-              </a:rPr>
-              <a:t>n8n Form Trigger</a:t>
-            </a:r>
-          </a:p>
-        </p:txBody>
-      </p:sp>
-      <p:sp>
-        <p:nvSpPr>
-          <p:cNvPr id="10" name="TextBox 9"/>
-          <p:cNvSpPr txBox="1"/>
-          <p:nvPr/>
-        </p:nvSpPr>
-        <p:spPr>
-          <a:xfrm>
-            <a:off x="2287278" y="4521670"/>
-            <a:ext cx="9069569" cy="332549"/>
-          </a:xfrm>
-          <a:prstGeom prst="rect">
-            <a:avLst/>
-          </a:prstGeom>
-          <a:noFill/>
-        </p:spPr>
-        <p:txBody>
-          <a:bodyPr wrap="square" lIns="0" rIns="0" tIns="0" bIns="0" anchor="ctr">
-            <a:spAutoFit/>
-          </a:bodyPr>
-          <a:lstStyle/>
-          <a:p>
-            <a:pPr algn="l">
-              <a:lnSpc>
-                <a:spcPts val="1322"/>
-              </a:lnSpc>
-              <a:spcAft>
-                <a:spcPts val="0"/>
-              </a:spcAft>
-            </a:pPr>
-            <a:r>
               <a:rPr sz="1150" b="0" i="0">
                 <a:solidFill>
                   <a:srgbClr val="141B2E"/>
                 </a:solidFill>
                 <a:latin typeface="Arial"/>
               </a:rPr>
-              <a:t>поля: Имя (Text), Контакт (Text), Что нужно (Textarea), все обязательные</a:t>
+              <a:t>три поля, все обязательные</a:t>
             </a:r>
           </a:p>
         </p:txBody>
       </p:sp>
       <p:cxnSp>
         <p:nvCxnSpPr>
-          <p:cNvPr id="11" name="Connector 10"/>
+          <p:cNvPr id="9" name="Connector 8"/>
           <p:cNvCxnSpPr/>
           <p:nvPr/>
         </p:nvCxnSpPr>
         <p:spPr>
           <a:xfrm>
-            <a:off x="685800" y="4854220"/>
-            <a:ext cx="10817352" cy="0"/>
+            <a:off x="658368" y="3619894"/>
+            <a:ext cx="10872216" cy="0"/>
           </a:xfrm>
           <a:prstGeom prst="line">
             <a:avLst/>
@@ -24307,14 +24739,14 @@
       </p:cxnSp>
       <p:sp>
         <p:nvSpPr>
-          <p:cNvPr id="12" name="TextBox 11"/>
+          <p:cNvPr id="10" name="TextBox 9"/>
           <p:cNvSpPr txBox="1"/>
           <p:nvPr/>
         </p:nvSpPr>
         <p:spPr>
           <a:xfrm>
-            <a:off x="685800" y="4854220"/>
-            <a:ext cx="1455174" cy="332549"/>
+            <a:off x="658368" y="3619894"/>
+            <a:ext cx="3206458" cy="287210"/>
           </a:xfrm>
           <a:prstGeom prst="rect">
             <a:avLst/>
@@ -24329,7 +24761,7 @@
           <a:p>
             <a:pPr algn="l">
               <a:lnSpc>
-                <a:spcPts val="1322"/>
+                <a:spcPts val="1253"/>
               </a:lnSpc>
               <a:spcAft>
                 <a:spcPts val="0"/>
@@ -24342,21 +24774,21 @@
                 </a:solidFill>
                 <a:latin typeface="Arial"/>
               </a:rPr>
-              <a:t>Basic LLM Chain</a:t>
-            </a:r>
-          </a:p>
-        </p:txBody>
-      </p:sp>
-      <p:sp>
-        <p:nvSpPr>
-          <p:cNvPr id="13" name="TextBox 12"/>
+              <a:t>Extract fields</a:t>
+            </a:r>
+          </a:p>
+        </p:txBody>
+      </p:sp>
+      <p:sp>
+        <p:nvSpPr>
+          <p:cNvPr id="11" name="TextBox 10"/>
           <p:cNvSpPr txBox="1"/>
           <p:nvPr/>
         </p:nvSpPr>
         <p:spPr>
           <a:xfrm>
-            <a:off x="2287278" y="4854220"/>
-            <a:ext cx="9069569" cy="332549"/>
+            <a:off x="4011130" y="3619894"/>
+            <a:ext cx="7373149" cy="287210"/>
           </a:xfrm>
           <a:prstGeom prst="rect">
             <a:avLst/>
@@ -24371,7 +24803,7 @@
           <a:p>
             <a:pPr algn="l">
               <a:lnSpc>
-                <a:spcPts val="1322"/>
+                <a:spcPts val="1253"/>
               </a:lnSpc>
               <a:spcAft>
                 <a:spcPts val="0"/>
@@ -24384,39 +24816,57 @@
                 </a:solidFill>
                 <a:latin typeface="Arial"/>
               </a:rPr>
-              <a:t>Source for Prompt = </a:t>
-            </a:r>
-            <a:r>
-              <a:rPr sz="1150" b="1" i="0">
-                <a:solidFill>
-                  <a:srgbClr val="141B2E"/>
-                </a:solidFill>
-                <a:latin typeface="Arial"/>
-              </a:rPr>
-              <a:t>Define below</a:t>
+              <a:t>схема вручную: </a:t>
             </a:r>
             <a:r>
               <a:rPr sz="1150" b="0" i="0">
                 <a:solidFill>
                   <a:srgbClr val="141B2E"/>
                 </a:solidFill>
-                <a:latin typeface="Arial"/>
-              </a:rPr>
-              <a:t>; в поле Prompt — выражение с текстом заявки; снизу подключается узел модели</a:t>
+                <a:latin typeface="Consolas"/>
+              </a:rPr>
+              <a:t>topic</a:t>
+            </a:r>
+            <a:r>
+              <a:rPr sz="1150" b="0" i="0">
+                <a:solidFill>
+                  <a:srgbClr val="141B2E"/>
+                </a:solidFill>
+                <a:latin typeface="Arial"/>
+              </a:rPr>
+              <a:t> и </a:t>
+            </a:r>
+            <a:r>
+              <a:rPr sz="1150" b="0" i="0">
+                <a:solidFill>
+                  <a:srgbClr val="141B2E"/>
+                </a:solidFill>
+                <a:latin typeface="Consolas"/>
+              </a:rPr>
+              <a:t>urgency</a:t>
+            </a:r>
+            <a:r>
+              <a:rPr sz="1150" b="0" i="0">
+                <a:solidFill>
+                  <a:srgbClr val="141B2E"/>
+                </a:solidFill>
+                <a:latin typeface="Arial"/>
+              </a:rPr>
+              <a:t> — перечисления, оба обязательны</a:t>
             </a:r>
           </a:p>
         </p:txBody>
       </p:sp>
       <p:cxnSp>
         <p:nvCxnSpPr>
-          <p:cNvPr id="14" name="Connector 13"/>
+          <p:cNvPr id="12" name="Connector 11"/>
           <p:cNvCxnSpPr/>
           <p:nvPr/>
         </p:nvCxnSpPr>
         <p:spPr>
           <a:xfrm>
-            <a:off x="685800" y="5186769"/>
-            <a:ext cx="10817352" cy="0"/>
+            <a:off x="658368" y="3907105"/>
+            <a:ext cx="10872216" cy="0"/>
           </a:xfrm>
           <a:prstGeom prst="line">
             <a:avLst/>
@@ -24444,14 +24894,14 @@
       </p:cxnSp>
       <p:sp>
         <p:nvSpPr>
-          <p:cNvPr id="15" name="TextBox 14"/>
+          <p:cNvPr id="13" name="TextBox 12"/>
           <p:cNvSpPr txBox="1"/>
           <p:nvPr/>
         </p:nvSpPr>
         <p:spPr>
           <a:xfrm>
-            <a:off x="685800" y="5186769"/>
-            <a:ext cx="1455174" cy="332549"/>
+            <a:off x="658368" y="3907105"/>
+            <a:ext cx="3206458" cy="287210"/>
           </a:xfrm>
           <a:prstGeom prst="rect">
             <a:avLst/>
@@ -24466,7 +24916,7 @@
           <a:p>
             <a:pPr algn="l">
               <a:lnSpc>
-                <a:spcPts val="1322"/>
+                <a:spcPts val="1253"/>
               </a:lnSpc>
               <a:spcAft>
                 <a:spcPts val="0"/>
@@ -24479,11 +24929,187 @@
                 </a:solidFill>
                 <a:latin typeface="Arial"/>
               </a:rPr>
-              <a:t>Data Table</a:t>
-            </a:r>
-          </a:p>
-        </p:txBody>
-      </p:sp>
+              <a:t>Vocabulary check</a:t>
+            </a:r>
+          </a:p>
+        </p:txBody>
+      </p:sp>
+      <p:sp>
+        <p:nvSpPr>
+          <p:cNvPr id="14" name="TextBox 13"/>
+          <p:cNvSpPr txBox="1"/>
+          <p:nvPr/>
+        </p:nvSpPr>
+        <p:spPr>
+          <a:xfrm>
+            <a:off x="4011130" y="3907105"/>
+            <a:ext cx="7373149" cy="287210"/>
+          </a:xfrm>
+          <a:prstGeom prst="rect">
+            <a:avLst/>
+          </a:prstGeom>
+          <a:noFill/>
+        </p:spPr>
+        <p:txBody>
+          <a:bodyPr wrap="square" lIns="0" rIns="0" tIns="0" bIns="0" anchor="ctr">
+            <a:spAutoFit/>
+          </a:bodyPr>
+          <a:lstStyle/>
+          <a:p>
+            <a:pPr algn="l">
+              <a:lnSpc>
+                <a:spcPts val="1253"/>
+              </a:lnSpc>
+              <a:spcAft>
+                <a:spcPts val="0"/>
+              </a:spcAft>
+            </a:pPr>
+            <a:r>
+              <a:rPr sz="1150" b="0" i="0">
+                <a:solidFill>
+                  <a:srgbClr val="141B2E"/>
+                </a:solidFill>
+                <a:latin typeface="Arial"/>
+              </a:rPr>
+              <a:t>не из списка или пусто → </a:t>
+            </a:r>
+            <a:r>
+              <a:rPr sz="1150" b="0" i="0">
+                <a:solidFill>
+                  <a:srgbClr val="141B2E"/>
+                </a:solidFill>
+                <a:latin typeface="Consolas"/>
+              </a:rPr>
+              <a:t>другое</a:t>
+            </a:r>
+            <a:r>
+              <a:rPr sz="1150" b="0" i="0">
+                <a:solidFill>
+                  <a:srgbClr val="141B2E"/>
+                </a:solidFill>
+                <a:latin typeface="Arial"/>
+              </a:rPr>
+              <a:t> / </a:t>
+            </a:r>
+            <a:r>
+              <a:rPr sz="1150" b="0" i="0">
+                <a:solidFill>
+                  <a:srgbClr val="141B2E"/>
+                </a:solidFill>
+                <a:latin typeface="Consolas"/>
+              </a:rPr>
+              <a:t>не</a:t>
+            </a:r>
+            <a:r>
+              <a:rPr sz="1150" b="0" i="0">
+                <a:solidFill>
+                  <a:srgbClr val="141B2E"/>
+                </a:solidFill>
+                <a:latin typeface="Arial"/>
+              </a:rPr>
+              <a:t> </a:t>
+            </a:r>
+            <a:r>
+              <a:rPr sz="1150" b="0" i="0">
+                <a:solidFill>
+                  <a:srgbClr val="141B2E"/>
+                </a:solidFill>
+                <a:latin typeface="Consolas"/>
+              </a:rPr>
+              <a:t>указано</a:t>
+            </a:r>
+            <a:r>
+              <a:rPr sz="1150" b="0" i="0">
+                <a:solidFill>
+                  <a:srgbClr val="141B2E"/>
+                </a:solidFill>
+                <a:latin typeface="Arial"/>
+              </a:rPr>
+              <a:t>; </a:t>
+            </a:r>
+            <a:r>
+              <a:rPr sz="1150" b="0" i="0">
+                <a:solidFill>
+                  <a:srgbClr val="141B2E"/>
+                </a:solidFill>
+                <a:latin typeface="Consolas"/>
+              </a:rPr>
+              <a:t>status</a:t>
+            </a:r>
+            <a:r>
+              <a:rPr sz="1150" b="0" i="0">
+                <a:solidFill>
+                  <a:srgbClr val="141B2E"/>
+                </a:solidFill>
+                <a:latin typeface="Arial"/>
+              </a:rPr>
+              <a:t> </a:t>
+            </a:r>
+            <a:r>
+              <a:rPr sz="1150" b="0" i="0">
+                <a:solidFill>
+                  <a:srgbClr val="141B2E"/>
+                </a:solidFill>
+                <a:latin typeface="Consolas"/>
+              </a:rPr>
+              <a:t>=</a:t>
+            </a:r>
+            <a:r>
+              <a:rPr sz="1150" b="0" i="0">
+                <a:solidFill>
+                  <a:srgbClr val="141B2E"/>
+                </a:solidFill>
+                <a:latin typeface="Arial"/>
+              </a:rPr>
+              <a:t> </a:t>
+            </a:r>
+            <a:r>
+              <a:rPr sz="1150" b="0" i="0">
+                <a:solidFill>
+                  <a:srgbClr val="141B2E"/>
+                </a:solidFill>
+                <a:latin typeface="Consolas"/>
+              </a:rPr>
+              <a:t>ok</a:t>
+            </a:r>
+          </a:p>
+        </p:txBody>
+      </p:sp>
+      <p:cxnSp>
+        <p:nvCxnSpPr>
+          <p:cNvPr id="15" name="Connector 14"/>
+          <p:cNvCxnSpPr/>
+          <p:nvPr/>
+        </p:nvCxnSpPr>
+        <p:spPr>
+          <a:xfrm>
+            <a:off x="658368" y="4194315"/>
+            <a:ext cx="10872216" cy="0"/>
+          </a:xfrm>
+          <a:prstGeom prst="line">
+            <a:avLst/>
+          </a:prstGeom>
+          <a:ln w="9525">
+            <a:solidFill>
+              <a:srgbClr val="E5EAF0"/>
+            </a:solidFill>
+          </a:ln>
+        </p:spPr>
+        <p:style>
+          <a:lnRef idx="2">
+            <a:schemeClr val="accent1"/>
+          </a:lnRef>
+          <a:fillRef idx="0">
+            <a:schemeClr val="accent1"/>
+          </a:fillRef>
+          <a:effectRef idx="1">
+            <a:schemeClr val="accent1"/>
+          </a:effectRef>
+          <a:fontRef idx="minor">
+            <a:schemeClr val="tx1"/>
+          </a:fontRef>
+        </p:style>
+      </p:cxnSp>
       <p:sp>
         <p:nvSpPr>
           <p:cNvPr id="16" name="TextBox 15"/>
@@ -24492,8 +25118,8 @@
         </p:nvSpPr>
         <p:spPr>
           <a:xfrm>
-            <a:off x="2287278" y="5186769"/>
-            <a:ext cx="9069569" cy="332549"/>
+            <a:off x="658368" y="4194315"/>
+            <a:ext cx="3206458" cy="287210"/>
           </a:xfrm>
           <a:prstGeom prst="rect">
             <a:avLst/>
@@ -24508,21 +25134,131 @@
           <a:p>
             <a:pPr algn="l">
               <a:lnSpc>
-                <a:spcPts val="1322"/>
+                <a:spcPts val="1253"/>
               </a:lnSpc>
               <a:spcAft>
                 <a:spcPts val="0"/>
               </a:spcAft>
             </a:pPr>
             <a:r>
+              <a:rPr sz="1150" b="1" i="0">
+                <a:solidFill>
+                  <a:srgbClr val="141B2E"/>
+                </a:solidFill>
+                <a:latin typeface="Arial"/>
+              </a:rPr>
+              <a:t>Write row</a:t>
+            </a:r>
+          </a:p>
+        </p:txBody>
+      </p:sp>
+      <p:sp>
+        <p:nvSpPr>
+          <p:cNvPr id="17" name="TextBox 16"/>
+          <p:cNvSpPr txBox="1"/>
+          <p:nvPr/>
+        </p:nvSpPr>
+        <p:spPr>
+          <a:xfrm>
+            <a:off x="4011130" y="4194315"/>
+            <a:ext cx="7373149" cy="287210"/>
+          </a:xfrm>
+          <a:prstGeom prst="rect">
+            <a:avLst/>
+          </a:prstGeom>
+          <a:noFill/>
+        </p:spPr>
+        <p:txBody>
+          <a:bodyPr wrap="square" lIns="0" rIns="0" tIns="0" bIns="0" anchor="ctr">
+            <a:spAutoFit/>
+          </a:bodyPr>
+          <a:lstStyle/>
+          <a:p>
+            <a:pPr algn="l">
+              <a:lnSpc>
+                <a:spcPts val="1253"/>
+              </a:lnSpc>
+              <a:spcAft>
+                <a:spcPts val="0"/>
+              </a:spcAft>
+            </a:pPr>
+            <a:r>
               <a:rPr sz="1150" b="0" i="0">
                 <a:solidFill>
                   <a:srgbClr val="141B2E"/>
                 </a:solidFill>
                 <a:latin typeface="Arial"/>
               </a:rPr>
-              <a:t>Resource = Row, операция </a:t>
-            </a:r>
+              <a:t>значения берутся у справочника, не у модели</a:t>
+            </a:r>
+          </a:p>
+        </p:txBody>
+      </p:sp>
+      <p:cxnSp>
+        <p:nvCxnSpPr>
+          <p:cNvPr id="18" name="Connector 17"/>
+          <p:cNvCxnSpPr/>
+          <p:nvPr/>
+        </p:nvCxnSpPr>
+        <p:spPr>
+          <a:xfrm>
+            <a:off x="658368" y="4481526"/>
+            <a:ext cx="10872216" cy="0"/>
+          </a:xfrm>
+          <a:prstGeom prst="line">
+            <a:avLst/>
+          </a:prstGeom>
+          <a:ln w="9525">
+            <a:solidFill>
+              <a:srgbClr val="E5EAF0"/>
+            </a:solidFill>
+          </a:ln>
+        </p:spPr>
+        <p:style>
+          <a:lnRef idx="2">
+            <a:schemeClr val="accent1"/>
+          </a:lnRef>
+          <a:fillRef idx="0">
+            <a:schemeClr val="accent1"/>
+          </a:fillRef>
+          <a:effectRef idx="1">
+            <a:schemeClr val="accent1"/>
+          </a:effectRef>
+          <a:fontRef idx="minor">
+            <a:schemeClr val="tx1"/>
+          </a:fontRef>
+        </p:style>
+      </p:cxnSp>
+      <p:sp>
+        <p:nvSpPr>
+          <p:cNvPr id="19" name="TextBox 18"/>
+          <p:cNvSpPr txBox="1"/>
+          <p:nvPr/>
+        </p:nvSpPr>
+        <p:spPr>
+          <a:xfrm>
+            <a:off x="658368" y="4481526"/>
+            <a:ext cx="3206458" cy="287210"/>
+          </a:xfrm>
+          <a:prstGeom prst="rect">
+            <a:avLst/>
+          </a:prstGeom>
+          <a:noFill/>
+        </p:spPr>
+        <p:txBody>
+          <a:bodyPr wrap="square" lIns="0" rIns="0" tIns="0" bIns="0" anchor="ctr">
+            <a:spAutoFit/>
+          </a:bodyPr>
+          <a:lstStyle/>
+          <a:p>
+            <a:pPr algn="l">
+              <a:lnSpc>
+                <a:spcPts val="1253"/>
+              </a:lnSpc>
+              <a:spcAft>
+                <a:spcPts val="0"/>
+              </a:spcAft>
+            </a:pPr>
             <a:r>
               <a:rPr sz="1150" b="1" i="0">
                 <a:solidFill>
@@ -24530,21 +25266,63 @@
                 </a:solidFill>
                 <a:latin typeface="Arial"/>
               </a:rPr>
-              <a:t>Insert</a:t>
-            </a:r>
-          </a:p>
-        </p:txBody>
-      </p:sp>
-      <p:sp>
-        <p:nvSpPr>
-          <p:cNvPr id="17" name="Rounded Rectangle 16"/>
+              <a:t>Result screen</a:t>
+            </a:r>
+          </a:p>
+        </p:txBody>
+      </p:sp>
+      <p:sp>
+        <p:nvSpPr>
+          <p:cNvPr id="20" name="TextBox 19"/>
+          <p:cNvSpPr txBox="1"/>
+          <p:nvPr/>
+        </p:nvSpPr>
+        <p:spPr>
+          <a:xfrm>
+            <a:off x="4011130" y="4481526"/>
+            <a:ext cx="7373149" cy="287210"/>
+          </a:xfrm>
+          <a:prstGeom prst="rect">
+            <a:avLst/>
+          </a:prstGeom>
+          <a:noFill/>
+        </p:spPr>
+        <p:txBody>
+          <a:bodyPr wrap="square" lIns="0" rIns="0" tIns="0" bIns="0" anchor="ctr">
+            <a:spAutoFit/>
+          </a:bodyPr>
+          <a:lstStyle/>
+          <a:p>
+            <a:pPr algn="l">
+              <a:lnSpc>
+                <a:spcPts val="1253"/>
+              </a:lnSpc>
+              <a:spcAft>
+                <a:spcPts val="0"/>
+              </a:spcAft>
+            </a:pPr>
+            <a:r>
+              <a:rPr sz="1150" b="0" i="0">
+                <a:solidFill>
+                  <a:srgbClr val="141B2E"/>
+                </a:solidFill>
+                <a:latin typeface="Arial"/>
+              </a:rPr>
+              <a:t>вход · что вернула модель · что решил справочник · номер строки</a:t>
+            </a:r>
+          </a:p>
+        </p:txBody>
+      </p:sp>
+      <p:sp>
+        <p:nvSpPr>
+          <p:cNvPr id="21" name="Rounded Rectangle 20"/>
           <p:cNvSpPr/>
           <p:nvPr/>
         </p:nvSpPr>
         <p:spPr>
           <a:xfrm>
-            <a:off x="502920" y="5866791"/>
-            <a:ext cx="82296" cy="455422"/>
+            <a:off x="502920" y="5088776"/>
+            <a:ext cx="82296" cy="620776"/>
           </a:xfrm>
           <a:prstGeom prst="roundRect">
             <a:avLst>
@@ -24583,14 +25361,14 @@
       </p:sp>
       <p:sp>
         <p:nvSpPr>
-          <p:cNvPr id="18" name="TextBox 17"/>
+          <p:cNvPr id="22" name="TextBox 21"/>
           <p:cNvSpPr txBox="1"/>
           <p:nvPr/>
         </p:nvSpPr>
         <p:spPr>
           <a:xfrm>
-            <a:off x="859536" y="5994807"/>
-            <a:ext cx="10643616" cy="199389"/>
+            <a:off x="859536" y="5216792"/>
+            <a:ext cx="10643616" cy="364743"/>
           </a:xfrm>
           <a:prstGeom prst="rect">
             <a:avLst/>
@@ -24605,6 +25383,211 @@
           <a:p>
             <a:pPr algn="l">
               <a:lnSpc>
+                <a:spcPts val="1364"/>
+              </a:lnSpc>
+              <a:spcAft>
+                <a:spcPts val="300"/>
+              </a:spcAft>
+            </a:pPr>
+            <a:r>
+              <a:rPr sz="1100" b="1" i="0">
+                <a:solidFill>
+                  <a:srgbClr val="141B2E"/>
+                </a:solidFill>
+                <a:latin typeface="Consolas"/>
+              </a:rPr>
+              <a:t>"topic":</a:t>
+            </a:r>
+            <a:r>
+              <a:rPr sz="1100" b="1" i="0">
+                <a:solidFill>
+                  <a:srgbClr val="141B2E"/>
+                </a:solidFill>
+                <a:latin typeface="Arial"/>
+              </a:rPr>
+              <a:t> </a:t>
+            </a:r>
+            <a:r>
+              <a:rPr sz="1100" b="1" i="0">
+                <a:solidFill>
+                  <a:srgbClr val="141B2E"/>
+                </a:solidFill>
+                <a:latin typeface="Consolas"/>
+              </a:rPr>
+              <a:t>{"enum":</a:t>
+            </a:r>
+            <a:r>
+              <a:rPr sz="1100" b="1" i="0">
+                <a:solidFill>
+                  <a:srgbClr val="141B2E"/>
+                </a:solidFill>
+                <a:latin typeface="Arial"/>
+              </a:rPr>
+              <a:t> </a:t>
+            </a:r>
+            <a:r>
+              <a:rPr sz="1100" b="1" i="0">
+                <a:solidFill>
+                  <a:srgbClr val="141B2E"/>
+                </a:solidFill>
+                <a:latin typeface="Consolas"/>
+              </a:rPr>
+              <a:t>["курс",</a:t>
+            </a:r>
+            <a:r>
+              <a:rPr sz="1100" b="1" i="0">
+                <a:solidFill>
+                  <a:srgbClr val="141B2E"/>
+                </a:solidFill>
+                <a:latin typeface="Arial"/>
+              </a:rPr>
+              <a:t> </a:t>
+            </a:r>
+            <a:r>
+              <a:rPr sz="1100" b="1" i="0">
+                <a:solidFill>
+                  <a:srgbClr val="141B2E"/>
+                </a:solidFill>
+                <a:latin typeface="Consolas"/>
+              </a:rPr>
+              <a:t>"перенос</a:t>
+            </a:r>
+            <a:r>
+              <a:rPr sz="1100" b="1" i="0">
+                <a:solidFill>
+                  <a:srgbClr val="141B2E"/>
+                </a:solidFill>
+                <a:latin typeface="Arial"/>
+              </a:rPr>
+              <a:t> </a:t>
+            </a:r>
+            <a:r>
+              <a:rPr sz="1100" b="1" i="0">
+                <a:solidFill>
+                  <a:srgbClr val="141B2E"/>
+                </a:solidFill>
+                <a:latin typeface="Consolas"/>
+              </a:rPr>
+              <a:t>занятия",</a:t>
+            </a:r>
+            <a:r>
+              <a:rPr sz="1100" b="1" i="0">
+                <a:solidFill>
+                  <a:srgbClr val="141B2E"/>
+                </a:solidFill>
+                <a:latin typeface="Arial"/>
+              </a:rPr>
+              <a:t> </a:t>
+            </a:r>
+            <a:r>
+              <a:rPr sz="1100" b="1" i="0">
+                <a:solidFill>
+                  <a:srgbClr val="141B2E"/>
+                </a:solidFill>
+                <a:latin typeface="Consolas"/>
+              </a:rPr>
+              <a:t>"оплата",</a:t>
+            </a:r>
+            <a:r>
+              <a:rPr sz="1100" b="1" i="0">
+                <a:solidFill>
+                  <a:srgbClr val="141B2E"/>
+                </a:solidFill>
+                <a:latin typeface="Arial"/>
+              </a:rPr>
+              <a:t> </a:t>
+            </a:r>
+            <a:r>
+              <a:rPr sz="1100" b="1" i="0">
+                <a:solidFill>
+                  <a:srgbClr val="141B2E"/>
+                </a:solidFill>
+                <a:latin typeface="Consolas"/>
+              </a:rPr>
+              <a:t>"другое"]}</a:t>
+            </a:r>
+            <a:r>
+              <a:rPr sz="1100" b="1" i="0">
+                <a:solidFill>
+                  <a:srgbClr val="141B2E"/>
+                </a:solidFill>
+                <a:latin typeface="Arial"/>
+              </a:rPr>
+              <a:t> — справочник объявлен схемой, и инструмент требует от модели одно из этих значений.</a:t>
+            </a:r>
+          </a:p>
+        </p:txBody>
+      </p:sp>
+      <p:sp>
+        <p:nvSpPr>
+          <p:cNvPr id="23" name="Rounded Rectangle 22"/>
+          <p:cNvSpPr/>
+          <p:nvPr/>
+        </p:nvSpPr>
+        <p:spPr>
+          <a:xfrm>
+            <a:off x="502920" y="5874144"/>
+            <a:ext cx="82296" cy="455422"/>
+          </a:xfrm>
+          <a:prstGeom prst="roundRect">
+            <a:avLst>
+              <a:gd name="adj" fmla="val 50000"/>
+            </a:avLst>
+          </a:prstGeom>
+          <a:solidFill>
+            <a:srgbClr val="F0AB00"/>
+          </a:solidFill>
+          <a:ln>
+            <a:noFill/>
+          </a:ln>
+          <a:effectLst/>
+        </p:spPr>
+        <p:style>
+          <a:lnRef idx="1">
+            <a:schemeClr val="accent1"/>
+          </a:lnRef>
+          <a:fillRef idx="3">
+            <a:schemeClr val="accent1"/>
+          </a:fillRef>
+          <a:effectRef idx="2">
+            <a:schemeClr val="accent1"/>
+          </a:effectRef>
+          <a:fontRef idx="minor">
+            <a:schemeClr val="lt1"/>
+          </a:fontRef>
+        </p:style>
+        <p:txBody>
+          <a:bodyPr rtlCol="0" anchor="ctr"/>
+          <a:lstStyle/>
+          <a:p>
+            <a:pPr algn="ctr"/>
+          </a:p>
+        </p:txBody>
+      </p:sp>
+      <p:sp>
+        <p:nvSpPr>
+          <p:cNvPr id="24" name="TextBox 23"/>
+          <p:cNvSpPr txBox="1"/>
+          <p:nvPr/>
+        </p:nvSpPr>
+        <p:spPr>
+          <a:xfrm>
+            <a:off x="859536" y="6002160"/>
+            <a:ext cx="10643616" cy="199389"/>
+          </a:xfrm>
+          <a:prstGeom prst="rect">
+            <a:avLst/>
+          </a:prstGeom>
+          <a:noFill/>
+        </p:spPr>
+        <p:txBody>
+          <a:bodyPr wrap="square" lIns="0" rIns="0" tIns="0" bIns="0" anchor="ctr">
+            <a:spAutoFit/>
+          </a:bodyPr>
+          <a:lstStyle/>
+          <a:p>
+            <a:pPr algn="l">
+              <a:lnSpc>
                 <a:spcPts val="1426"/>
               </a:lnSpc>
               <a:spcAft>
@@ -24625,7 +25608,7 @@
       </p:sp>
       <p:sp>
         <p:nvSpPr>
-          <p:cNvPr id="19" name="TextBox 18"/>
+          <p:cNvPr id="25" name="TextBox 24"/>
           <p:cNvSpPr txBox="1"/>
           <p:nvPr/>
         </p:nvSpPr>

--- a/library/seminars/sem-07/rendered/sem-07.pptx
+++ b/library/seminars/sem-07/rendered/sem-07.pptx
@@ -1365,7 +1365,7 @@
           <a:p/>
           <a:p>
             <a:r>
-              <a:t>Что из правила следует практически — следующий экран, там четыре вещи, и все четыре вы увидите в первый же месяц работы.</a:t>
+              <a:t>Что из правила следует практически — две строки в таблице перед вами, и обе вы увидите в первый же месяц работы.</a:t>
             </a:r>
           </a:p>
           <a:p/>
@@ -1448,31 +1448,20 @@
           <a:lstStyle/>
           <a:p>
             <a:r>
-              <a:t>Процесс работает, и работает честно: тема и срочность заполнены, значения из справочника, пустых клеток нет. Мы за это ручались и ручаемся.</a:t>
+              <a:t>Процесс, который мы собрали, работает честно: пустых клеток нет, значения из списка, прогон зелёный. За это мы ручались и ручаемся.</a:t>
             </a:r>
           </a:p>
           <a:p/>
           <a:p>
             <a:r>
-              <a:t>Теперь смотрите, за что мы не ручались. Отправляю заявку: «Можно перенести занятие со вторника? И подскажите, как оплатить». Две темы в одном сообщении, обе наши, обе из справочника.</a:t>
-            </a:r>
-          </a:p>
-          <a:p/>
-          <a:p>
-            <a:r>
-              <a:t>На экране результата: тема «перенос занятия». Одна. Про оплату не сказано ничего — ни на экране, ни в таблице, ни в журнале. Вторая тема не потерялась с ошибкой, её просто нет.</a:t>
-            </a:r>
-          </a:p>
-          <a:p/>
-          <a:p>
-            <a:r>
-              <a:t>Это другой класс беды, чем в первом кейсе. Там клетка могла остаться пустой, и мы это починили. Здесь клетка заполнена, значение законное, а заявка обслужена наполовину — и ни один сторож этого не заметит, потому что формально всё в порядке.</a:t>
-            </a:r>
-          </a:p>
-          <a:p/>
-          <a:p>
-            <a:r>
-              <a:t>Кейс второй про то, что справочник даёт гарантию формы, а гарантию смысла не даёт. И про то, какие ещё заявки ломают классификацию, которая минуту назад казалась надёжной.</a:t>
+              <a:t>А теперь посмотрим, за что мы </a:t>
+            </a:r>
+            <a:r>
+              <a:rPr b="1"/>
+              <a:t>не</a:t>
+            </a:r>
+            <a:r>
+              <a:t> ручались, — и обнаружится это не в журнале и не на моём экране, а в разговоре с человеком, который звонит и спрашивает, почему ему ответили на половину вопроса.</a:t>
             </a:r>
           </a:p>
         </p:txBody>
@@ -1686,7 +1675,7 @@
           <a:p/>
           <a:p>
             <a:r>
-              <a:t>Сразу скажу: неправильного ответа здесь нет. Все четыре живут в настоящих системах, и у каждого своя цена. Что меня интересует — кто из вас выберет второй вариант и сможет его защитить. Потому что он выглядит как отказ от автоматизации, а на самом деле это самый честный из четырёх.</a:t>
+              <a:t>Сразу скажу: неправильного ответа здесь нет. Все четыре живут в настоящих системах, и у каждого своя цена. Что меня интересует — кто из вас выберет второй вариант и сможет его защитить вслух.</a:t>
             </a:r>
           </a:p>
         </p:txBody>
@@ -1768,7 +1757,7 @@
           <a:p/>
           <a:p>
             <a:r>
-              <a:t>Второй, писать «другое». Остаток разбирает человек — и, что важнее, он об этом </a:t>
+              <a:t>Второй, писать «другое», — и его я называю самым честным из четырёх, хотя он и выглядит отказом от автоматизации. Остаток разбирает человек — и, что важнее, он об этом </a:t>
             </a:r>
             <a:r>
               <a:rPr b="1"/>
@@ -2024,7 +2013,7 @@
           <a:lstStyle/>
           <a:p>
             <a:r>
-              <a:t>Берём четвёртый вариант — главная тема плюс пометка. И смотрите, что для этого меняется: один узел из шести, сверка со списком. Форму не трогаем, извлечение не трогаем, модель не трогаем, запись и экран остаются как были.</a:t>
+              <a:t>Берём четвёртый вариант — главная тема плюс пометка. И смотрите, что для этого меняется: два узла из шести. В схеме извлечения появляется ещё одно поле — «ещё в заявке», список тем кроме главной. И в сверке со списком появляется ещё один столбец, который проходит ту же проверку, что тема. Форму, модель, запись и экран не трогаем вовсе.</a:t>
             </a:r>
           </a:p>
           <a:p/>
@@ -2036,7 +2025,7 @@
           <a:p/>
           <a:p>
             <a:r>
-              <a:t>Теперь прогоняю пять заявок подряд, и это те самые заявки, на которых классификация обычно и ломается.</a:t>
+              <a:t>Теперь прогоняю четыре заявки подряд — те самые, на которых классификация обычно и ломается.</a:t>
             </a:r>
           </a:p>
           <a:p/>
@@ -2060,13 +2049,7 @@
           <a:p/>
           <a:p>
             <a:r>
-              <a:t>Четвёртая — «расскажите про курс», без всякой срочности. Тема «курс», срочность «не указано». Обратите внимание: модель не придумала срочность, потому что в справочнике для этого есть законное значение. Если бы его не было, она бы что-нибудь поставила — это самый частый способ получить выдумку в данных.</a:t>
-            </a:r>
-          </a:p>
-          <a:p/>
-          <a:p>
-            <a:r>
-              <a:t>И пятая, моя любимая. Заявка из одного слова: «ок». Прогоняю. Тема «другое», срочность «не указано», строка в таблице есть. Процесс не упал, клетки не пусты, и никто не соврал.</a:t>
+              <a:t>И четвёртая, моя любимая. Заявка из одного слова: «ок». Прогоняю. Тема «другое», срочность «не указано», строка в таблице есть. Процесс не упал, клетки не пусты, и никто не соврал.</a:t>
             </a:r>
           </a:p>
           <a:p/>
@@ -2268,31 +2251,19 @@
           <a:lstStyle/>
           <a:p>
             <a:r>
-              <a:t>Третий кейс начинается не с чьих-то слов, а с того, что видно в таблице.</a:t>
+              <a:t>Третий кейс начинается не с чьих-то слов, а с того, что видно в таблице. Или, точнее, с того, чего в ней не видно.</a:t>
             </a:r>
           </a:p>
           <a:p/>
           <a:p>
             <a:r>
-              <a:t>Утро понедельника. Процесс работает неделю, к нему привыкли, в таблицу заглядывают по делу. Заглядывают — и видят: пятница заполнена, понедельник заполнен, выходных нет вовсе. Открою сейчас таблицу на стенде, посмотрим на эту дырку вместе.</a:t>
+              <a:t>Процесс работает неделю, к нему привыкли, заглядывают по делу. И в одно утро в таблице обнаруживается дырка — не ошибка, не сбой, а именно пропуск.</a:t>
             </a:r>
           </a:p>
           <a:p/>
           <a:p>
             <a:r>
-              <a:t>Что мы знаем на этот момент. Заявки за выходные приходили — это видно по журналу формы на сайте. В таблице их нет. Процесс не останавливался и ни на что не жаловался: письма об ошибке никто не получал, потому что никто не настраивал, кому его отправлять.</a:t>
-            </a:r>
-          </a:p>
-          <a:p/>
-          <a:p>
-            <a:r>
-              <a:t>Чего мы не знаем, и это важнее: что именно процесс делал эти два дня. Падал на каждой заявке? На части? Писал куда-то не туда? Журнал прогонов посмотреть можно, и мы посмотрим.</a:t>
-            </a:r>
-          </a:p>
-          <a:p/>
-          <a:p>
-            <a:r>
-              <a:t>Причина, кстати, выяснится скучная: провайдер модели два часа отдавал таймауты. Интересно здесь другое — что процесс должен был сделать вместо того, что он сделал.</a:t>
+              <a:t>Что это за утро и чего мы про него не знаем — следующий экран.</a:t>
             </a:r>
           </a:p>
         </p:txBody>
@@ -2522,12 +2493,6 @@
               <a:t>И вопрос в сторону, пока голосуете: кто-нибудь ставил такое поведение в своей системе сознательно, а не по умолчанию? Что стояло по умолчанию, знаете?</a:t>
             </a:r>
           </a:p>
-          <a:p/>
-          <a:p>
-            <a:r>
-              <a:t>Я спрашиваю не для красоты. Все четыре варианта, которые вы сейчас выбираете, — это не абстракции. Это буквально значения одной настройки в карточке узла, и один из них стоит там по умолчанию. Какой именно — скажу на разборе.</a:t>
-            </a:r>
-          </a:p>
         </p:txBody>
       </p:sp>
       <p:sp>
@@ -2595,7 +2560,7 @@
           <a:lstStyle/>
           <a:p>
             <a:r>
-              <a:t>Теперь поворот, ради которого вопрос задавался именно так.</a:t>
+              <a:t>Теперь поворот, ради которого вопрос задавался именно так. Все четыре варианта, которые вы выбирали, — не абстракции.</a:t>
             </a:r>
           </a:p>
           <a:p/>
@@ -2991,31 +2956,13 @@
           <a:lstStyle/>
           <a:p>
             <a:r>
-              <a:t>Четвёртый кейс, и он единственный, где мы ничего не будем достраивать. Здесь разберём, почему уже собранное работает не так, как выглядит.</a:t>
+              <a:t>Четвёртый кейс, и он единственный, где мы ничего не будем достраивать. Процесс уже собран, работает и проверен.</a:t>
             </a:r>
           </a:p>
           <a:p/>
           <a:p>
             <a:r>
-              <a:t>Ситуация. Промпт получился неточным: тема иногда определялась слишком общо. Поправили, проверили ручным запуском — хорошо, именно то, что хотели. Закрыли, пошли дальше.</a:t>
-            </a:r>
-          </a:p>
-          <a:p/>
-          <a:p>
-            <a:r>
-              <a:t>На следующий день смотрят таблицу за сутки. Все заявки разобраны по-старому. Открывают холст — правка на месте, никто её не откатывал. Запускают руками — работает по-новому.</a:t>
-            </a:r>
-          </a:p>
-          <a:p/>
-          <a:p>
-            <a:r>
-              <a:t>Оба утверждения на экране верны одновременно, и это не чья-то ошибка и не чья-то забывчивость. Это устройство инструмента, про которое не сказали.</a:t>
-            </a:r>
-          </a:p>
-          <a:p/>
-          <a:p>
-            <a:r>
-              <a:t>Я ставлю этот кейс последним намеренно. На первых трёх мы собирали, и всё, что собирали, проверяли ручным запуском — тем самым способом, который здесь оказывается недостаточным. Скажи я про это в начале, вы бы запомнили правило. А сейчас вы сначала увидели цену его незнания.</a:t>
+              <a:t>Здесь мы разберём другое: почему собранное работает не так, как выглядит, — и почему проверка, которой мы пользовались весь последний час, этого не показывает.</a:t>
             </a:r>
           </a:p>
         </p:txBody>
@@ -3091,25 +3038,31 @@
           <a:p/>
           <a:p>
             <a:r>
-              <a:t>Что сделали. Тема иногда определялась слишком общо — «курс» там, где речь была про конкретную программу. Поправили формулировку запроса в узле извлечения. В карточке узла стоит новый текст, никто его не откатывал.</a:t>
+              <a:t>И здесь у истории есть лицо, та же администратор. Она говорит: тема определяется слишком общо — «курс» стоит там, где речь про конкретную программу, и заявки уходят не тому человеку.</a:t>
             </a:r>
           </a:p>
           <a:p/>
           <a:p>
             <a:r>
-              <a:t>Проверили ручным запуском на трёх заявках. Все три разобраны правильно, именно так, как хотели. Закрыли и пошли дальше — и, обратите внимание, сделали всё, что обычно считается достаточным.</a:t>
+              <a:t>Вы поправили формулировку запроса в узле извлечения. В карточке стоит новый текст, никто его не откатывал.</a:t>
             </a:r>
           </a:p>
           <a:p/>
           <a:p>
             <a:r>
-              <a:t>На следующий день посмотрели таблицу за сутки. Все заявки разобраны по-старому. Ни одной по новой формулировке.</a:t>
+              <a:t>Проверили ручным запуском на трёх её заявках, при ней. Все три разобраны правильно, именно так, как она просила. Закрыли и пошли дальше — и, обратите внимание, сделали всё, что обычно считается достаточным, и даже показали человеку результат.</a:t>
             </a:r>
           </a:p>
           <a:p/>
           <a:p>
             <a:r>
-              <a:t>Открыли холст — правка на месте. Запустили руками ещё раз — снова правильно.</a:t>
+              <a:t>На следующий день она открывает таблицу за сутки. Все заявки разобраны по-старому. Ни одной по новой формулировке — и она приходит с этим к вам.</a:t>
+            </a:r>
+          </a:p>
+          <a:p/>
+          <a:p>
+            <a:r>
+              <a:t>Вы открываете холст: правка на месте. Запускаете руками: снова правильно. И объяснить ей это нечем.</a:t>
             </a:r>
           </a:p>
           <a:p/>
@@ -3349,7 +3302,7 @@
           <a:p/>
           <a:p>
             <a:r>
-              <a:t>Подсказка одна, и она честная: правильных карточек здесь две. Не потому что я схитрил с формулировками, а потому что две из четырёх описывают одно и то же явление с разных сторон — со стороны того, что надо сделать, и со стороны того, как оно устроено. Найдите обе.</a:t>
+              <a:t>Выбирайте и формулируйте довод. В разборе будет неожиданное — про то, сколько здесь правильных ответов.</a:t>
             </a:r>
           </a:p>
           <a:p/>
@@ -3425,7 +3378,14 @@
           <a:lstStyle/>
           <a:p>
             <a:r>
-              <a:t>Вот механика, и в ней три утверждения.</a:t>
+              <a:t>И сразу то, что я придержал: </a:t>
+            </a:r>
+            <a:r>
+              <a:rPr b="1"/>
+              <a:t>правильных карточек здесь две</a:t>
+            </a:r>
+            <a:r>
+              <a:t> — не потому, что я схитрил с формулировками, а потому что две из четырёх описывают одно явление с разных сторон. Сначала механика, в ней три утверждения, и из неё обе станут видны.</a:t>
             </a:r>
           </a:p>
           <a:p/>
@@ -3890,7 +3850,7 @@
           <a:p/>
           <a:p>
             <a:r>
-              <a:t>Следующее занятие про развилку. Как она устроена, по какому полю разводит, и главный вопрос, который на ней обычно забывают: что делать с тем, что не подошло ни под одну ветку. Мы такую заявку уже видели — помните, я прогонял «а вы сотрудничаете с юрлицами?». Тема у неё получилась какая угодно, а правильный ответ был «не знаю». Куда её девать — вопрос восьмого занятия, и у инструмента на него есть ответ по умолчанию, который вам не понравится.</a:t>
+              <a:t>Следующее занятие про развилку. Как она устроена, по какому полю разводит, и главный вопрос, который на ней обычно забывают: что делать с тем, что не подошло ни под одну ветку. Мы такую заявку уже видели: «а вы сотрудничаете с юрлицами?» дала законное «другое», и это была победа списка. А на развилке её придётся куда-то отправить — и «другое» само по себе не говорит, в какую ветку. У инструмента на этот случай есть ответ по умолчанию, и он вам не понравится.</a:t>
             </a:r>
           </a:p>
           <a:p/>
@@ -4339,6 +4299,19 @@
           <a:p/>
           <a:p>
             <a:r>
+              <a:t>Вопрос занятия я задаю сейчас и прошу держать его в голове полтора часа: </a:t>
+            </a:r>
+            <a:r>
+              <a:rPr b="1"/>
+              <a:t>возьмите процесс, который у вас на работе уже работает — он работает или за него можно ручаться?</a:t>
+            </a:r>
+            <a:r>
+              <a:t> Отвечать сейчас не надо, у вас пока нет способа проверить. К концу занятия будет четыре.</a:t>
+            </a:r>
+          </a:p>
+          <a:p/>
+          <a:p>
+            <a:r>
               <a:t>Сегодняшняя задача маленькая намеренно: заявка с формы сайта должна попадать в таблицу уже разобранной. На ней все четыре различия видно целиком, за полтора часа, на живом стенде.</a:t>
             </a:r>
           </a:p>
@@ -4409,25 +4382,19 @@
           <a:lstStyle/>
           <a:p>
             <a:r>
-              <a:t>Учебный центр, на сайте форма записи. Человек оставляет имя, контакт и пишет свободным текстом, что ему нужно: «хочу на курс по аналитике», «можно ли перенести занятие», «выставьте счёт на организацию».</a:t>
+              <a:t>Учебный центр, на сайте форма записи. Форма работает, заявки приходят — и дальше их читает человек и перекладывает в таблицу руками.</a:t>
             </a:r>
           </a:p>
           <a:p/>
           <a:p>
             <a:r>
-              <a:t>Форма складывает всё это письмами. Дальше администратор открывает каждое, читает, понимает, о чём оно, и переносит в таблицу: отдельно контакт, отдельно тема, отдельно пометка, срочное или нет. Двадцать заявок в день, минут сорок работы, и работа такая, что к концу её делают механически.</a:t>
+              <a:t>Это та самая ситуация, в которой автоматизацию обычно и заводят: не потому, что что-то сломалось, а потому, что работа скучная и её много. И именно поэтому её чаще всего делают наполовину.</a:t>
             </a:r>
           </a:p>
           <a:p/>
           <a:p>
             <a:r>
-              <a:t>Задача выглядит очевидной, и в этом ловушка — но не та, которую вы ждёте. Очевидные задачи обычно собирают не сложнее, чем нужно, а проще: до состояния «вроде работает». Поэтому первый вопрос сегодня — из скольких узлов собирается процесс, за который можно отвечать.</a:t>
-            </a:r>
-          </a:p>
-          <a:p/>
-          <a:p>
-            <a:r>
-              <a:t>Обратите внимание, что в постановке не названо ни одного инструмента. Там нет слов «модель», «автоматизация», «процесс». Есть только то, что сейчас происходит, и то, что должно происходить вместо этого. С такой формулировки начинается почти любая задача на работе, и первое решение инженера — выбрать, насколько сложным будет ответ.</a:t>
+              <a:t>Кто этот человек и чего ему это стоит — следующий экран.</a:t>
             </a:r>
           </a:p>
         </p:txBody>
@@ -4621,7 +4588,7 @@
           <a:p/>
           <a:p>
             <a:r>
-              <a:t>Два: форма уже есть, таблица уже есть, осталось соединить. Три: между ними нужен шаг модели, он прочитает заявку и назовёт тему. Шесть: кроме чтения нужно ещё что-то — удержать значения в списке и показать, что получилось. И «зависит»: смотря что считать решением задачи.</a:t>
+              <a:t>Два: форма уже есть, таблица уже есть, осталось соединить. Три: между ними нужен шаг модели, он прочитает заявку и назовёт тему. Шесть: если решением считать то, за что можно отвечать перед человеком, который этот столбец читает. И «зависит»: смотря что считать решением задачи.</a:t>
             </a:r>
           </a:p>
           <a:p/>
@@ -19751,7 +19718,7 @@
         <p:spPr>
           <a:xfrm>
             <a:off x="502920" y="4812332"/>
-            <a:ext cx="82296" cy="455422"/>
+            <a:ext cx="82296" cy="479043"/>
           </a:xfrm>
           <a:prstGeom prst="roundRect">
             <a:avLst>
@@ -19797,7 +19764,7 @@
         <p:spPr>
           <a:xfrm>
             <a:off x="859536" y="4940348"/>
-            <a:ext cx="10643616" cy="199389"/>
+            <a:ext cx="10643616" cy="223011"/>
           </a:xfrm>
           <a:prstGeom prst="rect">
             <a:avLst/>
@@ -19812,14 +19779,14 @@
           <a:p>
             <a:pPr algn="l">
               <a:lnSpc>
-                <a:spcPts val="1426"/>
+                <a:spcPts val="1612"/>
               </a:lnSpc>
               <a:spcAft>
                 <a:spcPts val="300"/>
               </a:spcAft>
             </a:pPr>
             <a:r>
-              <a:rPr sz="1150" b="1" i="0">
+              <a:rPr sz="1300" b="1" i="0">
                 <a:solidFill>
                   <a:srgbClr val="141B2E"/>
                 </a:solidFill>
@@ -19828,22 +19795,22 @@
               <a:t>Меняем </a:t>
             </a:r>
             <a:r>
-              <a:rPr sz="1150" b="1" i="0">
-                <a:solidFill>
-                  <a:srgbClr val="141B2E"/>
-                </a:solidFill>
-                <a:latin typeface="Arial"/>
-              </a:rPr>
-              <a:t>один узел из шести</a:t>
-            </a:r>
-            <a:r>
-              <a:rPr sz="1150" b="1" i="0">
-                <a:solidFill>
-                  <a:srgbClr val="141B2E"/>
-                </a:solidFill>
-                <a:latin typeface="Arial"/>
-              </a:rPr>
-              <a:t> — сверку со списком. В неё добавляется столбец «ещё в заявке»; остальные пять не трогаются вовсе.</a:t>
+              <a:rPr sz="1300" b="1" i="0">
+                <a:solidFill>
+                  <a:srgbClr val="141B2E"/>
+                </a:solidFill>
+                <a:latin typeface="Arial"/>
+              </a:rPr>
+              <a:t>два узла из шести</a:t>
+            </a:r>
+            <a:r>
+              <a:rPr sz="1300" b="1" i="0">
+                <a:solidFill>
+                  <a:srgbClr val="141B2E"/>
+                </a:solidFill>
+                <a:latin typeface="Arial"/>
+              </a:rPr>
+              <a:t>: в схеме извлечения — ещё поле, в сверке — ещё столбец. Остальные четыре не трогаем.</a:t>
             </a:r>
           </a:p>
         </p:txBody>
@@ -19856,7 +19823,7 @@
         </p:nvSpPr>
         <p:spPr>
           <a:xfrm>
-            <a:off x="502920" y="5432346"/>
+            <a:off x="502920" y="5455968"/>
             <a:ext cx="11183112" cy="780562"/>
           </a:xfrm>
           <a:prstGeom prst="roundRect">
@@ -19904,7 +19871,7 @@
         </p:nvSpPr>
         <p:spPr>
           <a:xfrm>
-            <a:off x="722376" y="5560362"/>
+            <a:off x="722376" y="5583984"/>
             <a:ext cx="10634472" cy="524530"/>
           </a:xfrm>
           <a:prstGeom prst="rect">
@@ -22435,7 +22402,7 @@
         </p:nvSpPr>
         <p:spPr>
           <a:xfrm>
-            <a:off x="502920" y="1622602"/>
+            <a:off x="502920" y="1091336"/>
             <a:ext cx="11183112" cy="822960"/>
           </a:xfrm>
           <a:prstGeom prst="roundRect">
@@ -22483,7 +22450,7 @@
         </p:nvSpPr>
         <p:spPr>
           <a:xfrm>
-            <a:off x="722376" y="1750618"/>
+            <a:off x="722376" y="1219352"/>
             <a:ext cx="10634472" cy="566928"/>
           </a:xfrm>
           <a:prstGeom prst="rect">
@@ -22525,7 +22492,7 @@
         </p:nvSpPr>
         <p:spPr>
           <a:xfrm>
-            <a:off x="502920" y="3113074"/>
+            <a:off x="502920" y="2448839"/>
             <a:ext cx="2686050" cy="1051560"/>
           </a:xfrm>
           <a:prstGeom prst="roundRect">
@@ -22574,7 +22541,7 @@
         </p:nvSpPr>
         <p:spPr>
           <a:xfrm>
-            <a:off x="612648" y="3113074"/>
+            <a:off x="612648" y="2448839"/>
             <a:ext cx="2466594" cy="1051560"/>
           </a:xfrm>
           <a:prstGeom prst="rect">
@@ -22616,7 +22583,7 @@
         </p:nvSpPr>
         <p:spPr>
           <a:xfrm>
-            <a:off x="3335274" y="3113074"/>
+            <a:off x="3335274" y="2448839"/>
             <a:ext cx="2686050" cy="1051560"/>
           </a:xfrm>
           <a:prstGeom prst="roundRect">
@@ -22664,7 +22631,7 @@
         </p:nvSpPr>
         <p:spPr>
           <a:xfrm>
-            <a:off x="3445002" y="3113074"/>
+            <a:off x="3445002" y="2448839"/>
             <a:ext cx="2466594" cy="1051560"/>
           </a:xfrm>
           <a:prstGeom prst="rect">
@@ -22706,7 +22673,7 @@
         </p:nvSpPr>
         <p:spPr>
           <a:xfrm>
-            <a:off x="6167628" y="3113074"/>
+            <a:off x="6167628" y="2448839"/>
             <a:ext cx="2686050" cy="1051560"/>
           </a:xfrm>
           <a:prstGeom prst="roundRect">
@@ -22754,7 +22721,7 @@
         </p:nvSpPr>
         <p:spPr>
           <a:xfrm>
-            <a:off x="6277356" y="3113074"/>
+            <a:off x="6277356" y="2448839"/>
             <a:ext cx="2466594" cy="1051560"/>
           </a:xfrm>
           <a:prstGeom prst="rect">
@@ -22796,7 +22763,7 @@
         </p:nvSpPr>
         <p:spPr>
           <a:xfrm>
-            <a:off x="8999982" y="3113074"/>
+            <a:off x="8999982" y="2448839"/>
             <a:ext cx="2686050" cy="1051560"/>
           </a:xfrm>
           <a:prstGeom prst="roundRect">
@@ -22844,7 +22811,7 @@
         </p:nvSpPr>
         <p:spPr>
           <a:xfrm>
-            <a:off x="9109710" y="3113074"/>
+            <a:off x="9109710" y="2448839"/>
             <a:ext cx="2466594" cy="1051560"/>
           </a:xfrm>
           <a:prstGeom prst="rect">
@@ -22886,7 +22853,7 @@
         </p:nvSpPr>
         <p:spPr>
           <a:xfrm>
-            <a:off x="502920" y="4832146"/>
+            <a:off x="502920" y="4034942"/>
             <a:ext cx="11183112" cy="476631"/>
           </a:xfrm>
           <a:prstGeom prst="roundRect">
@@ -22934,7 +22901,7 @@
         </p:nvSpPr>
         <p:spPr>
           <a:xfrm>
-            <a:off x="521208" y="4887010"/>
+            <a:off x="521208" y="4089806"/>
             <a:ext cx="64008" cy="366903"/>
           </a:xfrm>
           <a:prstGeom prst="roundRect">
@@ -22980,7 +22947,7 @@
         </p:nvSpPr>
         <p:spPr>
           <a:xfrm>
-            <a:off x="804672" y="4969306"/>
+            <a:off x="804672" y="4172102"/>
             <a:ext cx="10643616" cy="202311"/>
           </a:xfrm>
           <a:prstGeom prst="rect">
@@ -23016,7 +22983,124 @@
       </p:sp>
       <p:sp>
         <p:nvSpPr>
-          <p:cNvPr id="16" name="TextBox 15"/>
+          <p:cNvPr id="16" name="Rounded Rectangle 15"/>
+          <p:cNvSpPr/>
+          <p:nvPr/>
+        </p:nvSpPr>
+        <p:spPr>
+          <a:xfrm>
+            <a:off x="502920" y="5046116"/>
+            <a:ext cx="11183112" cy="1059561"/>
+          </a:xfrm>
+          <a:prstGeom prst="roundRect">
+            <a:avLst>
+              <a:gd name="adj" fmla="val 10000"/>
+            </a:avLst>
+          </a:prstGeom>
+          <a:solidFill>
+            <a:srgbClr val="FEF5E0"/>
+          </a:solidFill>
+          <a:ln w="19050">
+            <a:solidFill>
+              <a:srgbClr val="F0AB00"/>
+            </a:solidFill>
+          </a:ln>
+          <a:effectLst/>
+        </p:spPr>
+        <p:style>
+          <a:lnRef idx="1">
+            <a:schemeClr val="accent1"/>
+          </a:lnRef>
+          <a:fillRef idx="3">
+            <a:schemeClr val="accent1"/>
+          </a:fillRef>
+          <a:effectRef idx="2">
+            <a:schemeClr val="accent1"/>
+          </a:effectRef>
+          <a:fontRef idx="minor">
+            <a:schemeClr val="lt1"/>
+          </a:fontRef>
+        </p:style>
+        <p:txBody>
+          <a:bodyPr rtlCol="0" anchor="ctr"/>
+          <a:lstStyle/>
+          <a:p>
+            <a:pPr algn="ctr"/>
+          </a:p>
+        </p:txBody>
+      </p:sp>
+      <p:sp>
+        <p:nvSpPr>
+          <p:cNvPr id="17" name="TextBox 16"/>
+          <p:cNvSpPr txBox="1"/>
+          <p:nvPr/>
+        </p:nvSpPr>
+        <p:spPr>
+          <a:xfrm>
+            <a:off x="722376" y="5174132"/>
+            <a:ext cx="10634472" cy="803528"/>
+          </a:xfrm>
+          <a:prstGeom prst="rect">
+            <a:avLst/>
+          </a:prstGeom>
+          <a:noFill/>
+        </p:spPr>
+        <p:txBody>
+          <a:bodyPr wrap="square" lIns="0" rIns="0" tIns="0" bIns="0" anchor="ctr">
+            <a:spAutoFit/>
+          </a:bodyPr>
+          <a:lstStyle/>
+          <a:p>
+            <a:pPr algn="ctr">
+              <a:lnSpc>
+                <a:spcPts val="2013"/>
+              </a:lnSpc>
+              <a:spcAft>
+                <a:spcPts val="300"/>
+              </a:spcAft>
+            </a:pPr>
+            <a:r>
+              <a:rPr sz="1650" b="1" i="0">
+                <a:solidFill>
+                  <a:srgbClr val="141B2E"/>
+                </a:solidFill>
+                <a:latin typeface="Arial"/>
+              </a:rPr>
+              <a:t>И вопрос к себе, пока голосуете:</a:t>
+            </a:r>
+            <a:r>
+              <a:rPr sz="1650" b="1" i="0">
+                <a:solidFill>
+                  <a:srgbClr val="141B2E"/>
+                </a:solidFill>
+                <a:latin typeface="Arial"/>
+              </a:rPr>
+              <a:t> у вас на работе в каком-нибудь процессе стоит повтор при отказе? </a:t>
+            </a:r>
+            <a:r>
+              <a:rPr sz="1650" b="1" i="0">
+                <a:solidFill>
+                  <a:srgbClr val="141B2E"/>
+                </a:solidFill>
+                <a:latin typeface="Arial"/>
+              </a:rPr>
+              <a:t>Знаете ли вы, что там выбрано по умолчанию</a:t>
+            </a:r>
+            <a:r>
+              <a:rPr sz="1650" b="1" i="0">
+                <a:solidFill>
+                  <a:srgbClr val="141B2E"/>
+                </a:solidFill>
+                <a:latin typeface="Arial"/>
+              </a:rPr>
+              <a:t> — или оно просто стоит как поставилось?</a:t>
+            </a:r>
+          </a:p>
+        </p:txBody>
+      </p:sp>
+      <p:sp>
+        <p:nvSpPr>
+          <p:cNvPr id="18" name="TextBox 17"/>
           <p:cNvSpPr txBox="1"/>
           <p:nvPr/>
         </p:nvSpPr>
@@ -24060,8 +24144,8 @@
         </p:blipFill>
         <p:spPr>
           <a:xfrm>
-            <a:off x="1223095" y="943356"/>
-            <a:ext cx="9742760" cy="2861935"/>
+            <a:off x="773996" y="943356"/>
+            <a:ext cx="10640958" cy="3325299"/>
           </a:xfrm>
           <a:prstGeom prst="rect">
             <a:avLst/>
@@ -24076,8 +24160,8 @@
         </p:nvSpPr>
         <p:spPr>
           <a:xfrm>
-            <a:off x="502920" y="3969883"/>
-            <a:ext cx="11183112" cy="865758"/>
+            <a:off x="502920" y="4433247"/>
+            <a:ext cx="11183112" cy="936244"/>
           </a:xfrm>
           <a:prstGeom prst="roundRect">
             <a:avLst>
@@ -24124,8 +24208,8 @@
         </p:nvSpPr>
         <p:spPr>
           <a:xfrm>
-            <a:off x="658368" y="4125331"/>
-            <a:ext cx="4698534" cy="274574"/>
+            <a:off x="685800" y="4616127"/>
+            <a:ext cx="4724804" cy="259587"/>
           </a:xfrm>
           <a:prstGeom prst="rect">
             <a:avLst/>
@@ -24140,14 +24224,14 @@
           <a:p>
             <a:pPr algn="l">
               <a:lnSpc>
-                <a:spcPts val="1210"/>
-              </a:lnSpc>
-              <a:spcAft>
-                <a:spcPts val="0"/>
-              </a:spcAft>
-            </a:pPr>
-            <a:r>
-              <a:rPr sz="1100" b="1" i="0">
+                <a:spcPts val="1100"/>
+              </a:lnSpc>
+              <a:spcAft>
+                <a:spcPts val="0"/>
+              </a:spcAft>
+            </a:pPr>
+            <a:r>
+              <a:rPr sz="1000" b="1" i="0">
                 <a:solidFill>
                   <a:srgbClr val="6B7685"/>
                 </a:solidFill>
@@ -24166,8 +24250,8 @@
         </p:nvSpPr>
         <p:spPr>
           <a:xfrm>
-            <a:off x="5503206" y="4125331"/>
-            <a:ext cx="5881073" cy="274574"/>
+            <a:off x="5556908" y="4616127"/>
+            <a:ext cx="5799939" cy="259587"/>
           </a:xfrm>
           <a:prstGeom prst="rect">
             <a:avLst/>
@@ -24182,14 +24266,14 @@
           <a:p>
             <a:pPr algn="l">
               <a:lnSpc>
-                <a:spcPts val="1210"/>
-              </a:lnSpc>
-              <a:spcAft>
-                <a:spcPts val="0"/>
-              </a:spcAft>
-            </a:pPr>
-            <a:r>
-              <a:rPr sz="1100" b="1" i="0">
+                <a:spcPts val="1100"/>
+              </a:lnSpc>
+              <a:spcAft>
+                <a:spcPts val="0"/>
+              </a:spcAft>
+            </a:pPr>
+            <a:r>
+              <a:rPr sz="1000" b="1" i="0">
                 <a:solidFill>
                   <a:srgbClr val="6B7685"/>
                 </a:solidFill>
@@ -24208,8 +24292,8 @@
         </p:nvSpPr>
         <p:spPr>
           <a:xfrm>
-            <a:off x="658368" y="4399905"/>
-            <a:ext cx="4698534" cy="280289"/>
+            <a:off x="685800" y="4875715"/>
+            <a:ext cx="4724804" cy="310896"/>
           </a:xfrm>
           <a:prstGeom prst="rect">
             <a:avLst/>
@@ -24224,14 +24308,14 @@
           <a:p>
             <a:pPr algn="l">
               <a:lnSpc>
-                <a:spcPts val="1199"/>
-              </a:lnSpc>
-              <a:spcAft>
-                <a:spcPts val="0"/>
-              </a:spcAft>
-            </a:pPr>
-            <a:r>
-              <a:rPr sz="1100" b="0" i="0">
+                <a:spcPts val="1150"/>
+              </a:lnSpc>
+              <a:spcAft>
+                <a:spcPts val="0"/>
+              </a:spcAft>
+            </a:pPr>
+            <a:r>
+              <a:rPr sz="1000" b="0" i="0">
                 <a:solidFill>
                   <a:srgbClr val="141B2E"/>
                 </a:solidFill>
@@ -24250,8 +24334,8 @@
         </p:nvSpPr>
         <p:spPr>
           <a:xfrm>
-            <a:off x="5503206" y="4399905"/>
-            <a:ext cx="5881073" cy="280289"/>
+            <a:off x="5556908" y="4875715"/>
+            <a:ext cx="5799939" cy="310896"/>
           </a:xfrm>
           <a:prstGeom prst="rect">
             <a:avLst/>
@@ -24266,14 +24350,14 @@
           <a:p>
             <a:pPr algn="l">
               <a:lnSpc>
-                <a:spcPts val="1199"/>
-              </a:lnSpc>
-              <a:spcAft>
-                <a:spcPts val="0"/>
-              </a:spcAft>
-            </a:pPr>
-            <a:r>
-              <a:rPr sz="1100" b="0" i="0">
+                <a:spcPts val="1150"/>
+              </a:lnSpc>
+              <a:spcAft>
+                <a:spcPts val="0"/>
+              </a:spcAft>
+            </a:pPr>
+            <a:r>
+              <a:rPr sz="1000" b="0" i="0">
                 <a:solidFill>
                   <a:srgbClr val="141B2E"/>
                 </a:solidFill>
@@ -24282,7 +24366,7 @@
               <a:t>3 попытки, пауза 2 с → </a:t>
             </a:r>
             <a:r>
-              <a:rPr sz="1100" b="0" i="0">
+              <a:rPr sz="1000" b="0" i="0">
                 <a:solidFill>
                   <a:srgbClr val="141B2E"/>
                 </a:solidFill>
@@ -24291,7 +24375,7 @@
               <a:t>Continue</a:t>
             </a:r>
             <a:r>
-              <a:rPr sz="1100" b="0" i="0">
+              <a:rPr sz="1000" b="0" i="0">
                 <a:solidFill>
                   <a:srgbClr val="141B2E"/>
                 </a:solidFill>
@@ -24300,7 +24384,7 @@
               <a:t> </a:t>
             </a:r>
             <a:r>
-              <a:rPr sz="1100" b="0" i="0">
+              <a:rPr sz="1000" b="0" i="0">
                 <a:solidFill>
                   <a:srgbClr val="141B2E"/>
                 </a:solidFill>
@@ -24309,7 +24393,7 @@
               <a:t>(using</a:t>
             </a:r>
             <a:r>
-              <a:rPr sz="1100" b="0" i="0">
+              <a:rPr sz="1000" b="0" i="0">
                 <a:solidFill>
                   <a:srgbClr val="141B2E"/>
                 </a:solidFill>
@@ -24318,7 +24402,7 @@
               <a:t> </a:t>
             </a:r>
             <a:r>
-              <a:rPr sz="1100" b="0" i="0">
+              <a:rPr sz="1000" b="0" i="0">
                 <a:solidFill>
                   <a:srgbClr val="141B2E"/>
                 </a:solidFill>
@@ -24327,7 +24411,7 @@
               <a:t>error</a:t>
             </a:r>
             <a:r>
-              <a:rPr sz="1100" b="0" i="0">
+              <a:rPr sz="1000" b="0" i="0">
                 <a:solidFill>
                   <a:srgbClr val="141B2E"/>
                 </a:solidFill>
@@ -24336,7 +24420,7 @@
               <a:t> </a:t>
             </a:r>
             <a:r>
-              <a:rPr sz="1100" b="0" i="0">
+              <a:rPr sz="1000" b="0" i="0">
                 <a:solidFill>
                   <a:srgbClr val="141B2E"/>
                 </a:solidFill>
@@ -24355,168 +24439,8 @@
         </p:nvSpPr>
         <p:spPr>
           <a:xfrm>
-            <a:off x="502920" y="5000234"/>
-            <a:ext cx="82296" cy="455422"/>
-          </a:xfrm>
-          <a:prstGeom prst="roundRect">
-            <a:avLst>
-              <a:gd name="adj" fmla="val 50000"/>
-            </a:avLst>
-          </a:prstGeom>
-          <a:solidFill>
-            <a:srgbClr val="F0AB00"/>
-          </a:solidFill>
-          <a:ln>
-            <a:noFill/>
-          </a:ln>
-          <a:effectLst/>
-        </p:spPr>
-        <p:style>
-          <a:lnRef idx="1">
-            <a:schemeClr val="accent1"/>
-          </a:lnRef>
-          <a:fillRef idx="3">
-            <a:schemeClr val="accent1"/>
-          </a:fillRef>
-          <a:effectRef idx="2">
-            <a:schemeClr val="accent1"/>
-          </a:effectRef>
-          <a:fontRef idx="minor">
-            <a:schemeClr val="lt1"/>
-          </a:fontRef>
-        </p:style>
-        <p:txBody>
-          <a:bodyPr rtlCol="0" anchor="ctr"/>
-          <a:lstStyle/>
-          <a:p>
-            <a:pPr algn="ctr"/>
-          </a:p>
-        </p:txBody>
-      </p:sp>
-      <p:sp>
-        <p:nvSpPr>
-          <p:cNvPr id="10" name="TextBox 9"/>
-          <p:cNvSpPr txBox="1"/>
-          <p:nvPr/>
-        </p:nvSpPr>
-        <p:spPr>
-          <a:xfrm>
-            <a:off x="859536" y="5128250"/>
-            <a:ext cx="10643616" cy="199389"/>
-          </a:xfrm>
-          <a:prstGeom prst="rect">
-            <a:avLst/>
-          </a:prstGeom>
-          <a:noFill/>
-        </p:spPr>
-        <p:txBody>
-          <a:bodyPr wrap="square" lIns="0" rIns="0" tIns="0" bIns="0" anchor="ctr">
-            <a:spAutoFit/>
-          </a:bodyPr>
-          <a:lstStyle/>
-          <a:p>
-            <a:pPr algn="l">
-              <a:lnSpc>
-                <a:spcPts val="1426"/>
-              </a:lnSpc>
-              <a:spcAft>
-                <a:spcPts val="300"/>
-              </a:spcAft>
-            </a:pPr>
-            <a:r>
-              <a:rPr sz="1150" b="1" i="0">
-                <a:solidFill>
-                  <a:srgbClr val="141B2E"/>
-                </a:solidFill>
-                <a:latin typeface="Arial"/>
-              </a:rPr>
-              <a:t>Из выхода </a:t>
-            </a:r>
-            <a:r>
-              <a:rPr sz="1150" b="1" i="0">
-                <a:solidFill>
-                  <a:srgbClr val="141B2E"/>
-                </a:solidFill>
-                <a:latin typeface="Consolas"/>
-              </a:rPr>
-              <a:t>error</a:t>
-            </a:r>
-            <a:r>
-              <a:rPr sz="1150" b="1" i="0">
-                <a:solidFill>
-                  <a:srgbClr val="141B2E"/>
-                </a:solidFill>
-                <a:latin typeface="Arial"/>
-              </a:rPr>
-              <a:t> — в ту же таблицу, </a:t>
-            </a:r>
-            <a:r>
-              <a:rPr sz="1150" b="1" i="0">
-                <a:solidFill>
-                  <a:srgbClr val="141B2E"/>
-                </a:solidFill>
-                <a:latin typeface="Consolas"/>
-              </a:rPr>
-              <a:t>status</a:t>
-            </a:r>
-            <a:r>
-              <a:rPr sz="1150" b="1" i="0">
-                <a:solidFill>
-                  <a:srgbClr val="141B2E"/>
-                </a:solidFill>
-                <a:latin typeface="Arial"/>
-              </a:rPr>
-              <a:t> </a:t>
-            </a:r>
-            <a:r>
-              <a:rPr sz="1150" b="1" i="0">
-                <a:solidFill>
-                  <a:srgbClr val="141B2E"/>
-                </a:solidFill>
-                <a:latin typeface="Consolas"/>
-              </a:rPr>
-              <a:t>=</a:t>
-            </a:r>
-            <a:r>
-              <a:rPr sz="1150" b="1" i="0">
-                <a:solidFill>
-                  <a:srgbClr val="141B2E"/>
-                </a:solidFill>
-                <a:latin typeface="Arial"/>
-              </a:rPr>
-              <a:t> </a:t>
-            </a:r>
-            <a:r>
-              <a:rPr sz="1150" b="1" i="0">
-                <a:solidFill>
-                  <a:srgbClr val="141B2E"/>
-                </a:solidFill>
-                <a:latin typeface="Consolas"/>
-              </a:rPr>
-              <a:t>not_parsed</a:t>
-            </a:r>
-            <a:r>
-              <a:rPr sz="1150" b="1" i="0">
-                <a:solidFill>
-                  <a:srgbClr val="141B2E"/>
-                </a:solidFill>
-                <a:latin typeface="Arial"/>
-              </a:rPr>
-              <a:t>, и на свой экран.</a:t>
-            </a:r>
-          </a:p>
-        </p:txBody>
-      </p:sp>
-      <p:sp>
-        <p:nvSpPr>
-          <p:cNvPr id="11" name="Rounded Rectangle 10"/>
-          <p:cNvSpPr/>
-          <p:nvPr/>
-        </p:nvSpPr>
-        <p:spPr>
-          <a:xfrm>
-            <a:off x="502920" y="5620248"/>
-            <a:ext cx="11183112" cy="716965"/>
+            <a:off x="502920" y="5534083"/>
+            <a:ext cx="11183112" cy="783063"/>
           </a:xfrm>
           <a:prstGeom prst="roundRect">
             <a:avLst>
@@ -24557,14 +24481,14 @@
       </p:sp>
       <p:sp>
         <p:nvSpPr>
-          <p:cNvPr id="12" name="TextBox 11"/>
-          <p:cNvSpPr txBox="1"/>
-          <p:nvPr/>
-        </p:nvSpPr>
-        <p:spPr>
-          <a:xfrm>
-            <a:off x="722376" y="5748264"/>
-            <a:ext cx="10634472" cy="460933"/>
+          <p:cNvPr id="10" name="TextBox 9"/>
+          <p:cNvSpPr txBox="1"/>
+          <p:nvPr/>
+        </p:nvSpPr>
+        <p:spPr>
+          <a:xfrm>
+            <a:off x="722376" y="5662099"/>
+            <a:ext cx="10634472" cy="527031"/>
           </a:xfrm>
           <a:prstGeom prst="rect">
             <a:avLst/>
@@ -24579,14 +24503,14 @@
           <a:p>
             <a:pPr algn="ctr">
               <a:lnSpc>
-                <a:spcPts val="1647"/>
+                <a:spcPts val="1891"/>
               </a:lnSpc>
               <a:spcAft>
                 <a:spcPts val="300"/>
               </a:spcAft>
             </a:pPr>
             <a:r>
-              <a:rPr sz="1350" b="1" i="0">
+              <a:rPr sz="1550" b="1" i="0">
                 <a:solidFill>
                   <a:srgbClr val="141B2E"/>
                 </a:solidFill>
@@ -24595,7 +24519,7 @@
               <a:t>Предскажите.</a:t>
             </a:r>
             <a:r>
-              <a:rPr sz="1350" b="1" i="0">
+              <a:rPr sz="1550" b="1" i="0">
                 <a:solidFill>
                   <a:srgbClr val="141B2E"/>
                 </a:solidFill>
@@ -24608,7 +24532,7 @@
       </p:sp>
       <p:sp>
         <p:nvSpPr>
-          <p:cNvPr id="13" name="TextBox 12"/>
+          <p:cNvPr id="11" name="TextBox 10"/>
           <p:cNvSpPr txBox="1"/>
           <p:nvPr/>
         </p:nvSpPr>
@@ -26402,12 +26326,12 @@
         </p:nvSpPr>
         <p:spPr>
           <a:xfrm>
-            <a:off x="502920" y="1497711"/>
-            <a:ext cx="11183112" cy="2584132"/>
+            <a:off x="502920" y="1424686"/>
+            <a:ext cx="11183112" cy="2766695"/>
           </a:xfrm>
           <a:prstGeom prst="roundRect">
             <a:avLst>
-              <a:gd name="adj" fmla="val 11795"/>
+              <a:gd name="adj" fmla="val 11016"/>
             </a:avLst>
           </a:prstGeom>
           <a:solidFill>
@@ -26450,8 +26374,8 @@
         </p:nvSpPr>
         <p:spPr>
           <a:xfrm>
-            <a:off x="685800" y="1680591"/>
-            <a:ext cx="5012248" cy="282067"/>
+            <a:off x="685800" y="1607566"/>
+            <a:ext cx="5606899" cy="282067"/>
           </a:xfrm>
           <a:prstGeom prst="rect">
             <a:avLst/>
@@ -26492,8 +26416,8 @@
         </p:nvSpPr>
         <p:spPr>
           <a:xfrm>
-            <a:off x="5844352" y="1680591"/>
-            <a:ext cx="5512495" cy="282067"/>
+            <a:off x="6439003" y="1607566"/>
+            <a:ext cx="4917844" cy="282067"/>
           </a:xfrm>
           <a:prstGeom prst="rect">
             <a:avLst/>
@@ -26534,8 +26458,8 @@
         </p:nvSpPr>
         <p:spPr>
           <a:xfrm>
-            <a:off x="685800" y="1962658"/>
-            <a:ext cx="5012248" cy="529717"/>
+            <a:off x="685800" y="1889633"/>
+            <a:ext cx="5606899" cy="712279"/>
           </a:xfrm>
           <a:prstGeom prst="rect">
             <a:avLst/>
@@ -26563,7 +26487,7 @@
                 </a:solidFill>
                 <a:latin typeface="Arial"/>
               </a:rPr>
-              <a:t>тема иногда определялась слишком общо — поправили формулировку запроса в узле извлечения</a:t>
+              <a:t>администратор сказала: тема определяется слишком общо, «курс» стоит там, где речь про конкретную программу. Вы поправили формулировку запроса в узле извлечения</a:t>
             </a:r>
           </a:p>
         </p:txBody>
@@ -26576,8 +26500,8 @@
         </p:nvSpPr>
         <p:spPr>
           <a:xfrm>
-            <a:off x="5844352" y="1962658"/>
-            <a:ext cx="5512495" cy="529717"/>
+            <a:off x="6439003" y="1889633"/>
+            <a:ext cx="4917844" cy="712279"/>
           </a:xfrm>
           <a:prstGeom prst="rect">
             <a:avLst/>
@@ -26618,7 +26542,7 @@
         </p:nvCxnSpPr>
         <p:spPr>
           <a:xfrm>
-            <a:off x="685800" y="2492375"/>
+            <a:off x="685800" y="2601912"/>
             <a:ext cx="10817352" cy="0"/>
           </a:xfrm>
           <a:prstGeom prst="line">
@@ -26653,8 +26577,8 @@
         </p:nvSpPr>
         <p:spPr>
           <a:xfrm>
-            <a:off x="685800" y="2492375"/>
-            <a:ext cx="5012248" cy="529717"/>
+            <a:off x="685800" y="2601912"/>
+            <a:ext cx="5606899" cy="529717"/>
           </a:xfrm>
           <a:prstGeom prst="rect">
             <a:avLst/>
@@ -26682,7 +26606,7 @@
                 </a:solidFill>
                 <a:latin typeface="Arial"/>
               </a:rPr>
-              <a:t>проверили ручным запуском на трёх заявках</a:t>
+              <a:t>вы проверили ручным запуском на трёх её заявках, при ней</a:t>
             </a:r>
           </a:p>
         </p:txBody>
@@ -26695,8 +26619,8 @@
         </p:nvSpPr>
         <p:spPr>
           <a:xfrm>
-            <a:off x="5844352" y="2492375"/>
-            <a:ext cx="5512495" cy="529717"/>
+            <a:off x="6439003" y="2601912"/>
+            <a:ext cx="4917844" cy="529717"/>
           </a:xfrm>
           <a:prstGeom prst="rect">
             <a:avLst/>
@@ -26724,7 +26648,7 @@
                 </a:solidFill>
                 <a:latin typeface="Arial"/>
               </a:rPr>
-              <a:t>все три разобраны правильно, именно так, как хотели. Закрыли, пошли дальше</a:t>
+              <a:t>все три разобраны правильно, именно так, как она просила. Закрыли, пошли дальше</a:t>
             </a:r>
           </a:p>
         </p:txBody>
@@ -26737,7 +26661,7 @@
         </p:nvCxnSpPr>
         <p:spPr>
           <a:xfrm>
-            <a:off x="685800" y="3022092"/>
+            <a:off x="685800" y="3131629"/>
             <a:ext cx="10817352" cy="0"/>
           </a:xfrm>
           <a:prstGeom prst="line">
@@ -26772,8 +26696,8 @@
         </p:nvSpPr>
         <p:spPr>
           <a:xfrm>
-            <a:off x="685800" y="3022092"/>
-            <a:ext cx="5012248" cy="529717"/>
+            <a:off x="685800" y="3131629"/>
+            <a:ext cx="5606899" cy="529717"/>
           </a:xfrm>
           <a:prstGeom prst="rect">
             <a:avLst/>
@@ -26801,7 +26725,7 @@
                 </a:solidFill>
                 <a:latin typeface="Arial"/>
               </a:rPr>
-              <a:t>на следующий день посмотрели таблицу за сутки</a:t>
+              <a:t>на следующий день она открывает таблицу за сутки</a:t>
             </a:r>
           </a:p>
         </p:txBody>
@@ -26814,8 +26738,8 @@
         </p:nvSpPr>
         <p:spPr>
           <a:xfrm>
-            <a:off x="5844352" y="3022092"/>
-            <a:ext cx="5512495" cy="529717"/>
+            <a:off x="6439003" y="3131629"/>
+            <a:ext cx="4917844" cy="529717"/>
           </a:xfrm>
           <a:prstGeom prst="rect">
             <a:avLst/>
@@ -26852,7 +26776,7 @@
                 </a:solidFill>
                 <a:latin typeface="Arial"/>
               </a:rPr>
-              <a:t> Ни одной по новой формулировке</a:t>
+              <a:t> Ни одной по новой формулировке — и она приходит с этим к вам</a:t>
             </a:r>
           </a:p>
         </p:txBody>
@@ -26865,7 +26789,7 @@
         </p:nvCxnSpPr>
         <p:spPr>
           <a:xfrm>
-            <a:off x="685800" y="3551809"/>
+            <a:off x="685800" y="3661346"/>
             <a:ext cx="10817352" cy="0"/>
           </a:xfrm>
           <a:prstGeom prst="line">
@@ -26900,8 +26824,8 @@
         </p:nvSpPr>
         <p:spPr>
           <a:xfrm>
-            <a:off x="685800" y="3551809"/>
-            <a:ext cx="5012248" cy="347154"/>
+            <a:off x="685800" y="3661346"/>
+            <a:ext cx="5606899" cy="347154"/>
           </a:xfrm>
           <a:prstGeom prst="rect">
             <a:avLst/>
@@ -26929,7 +26853,7 @@
                 </a:solidFill>
                 <a:latin typeface="Arial"/>
               </a:rPr>
-              <a:t>открыли холст, запустили руками ещё раз</a:t>
+              <a:t>вы открываете холст, запускаете руками ещё раз</a:t>
             </a:r>
           </a:p>
         </p:txBody>
@@ -26942,8 +26866,8 @@
         </p:nvSpPr>
         <p:spPr>
           <a:xfrm>
-            <a:off x="5844352" y="3551809"/>
-            <a:ext cx="5512495" cy="347154"/>
+            <a:off x="6439003" y="3661346"/>
+            <a:ext cx="4917844" cy="347154"/>
           </a:xfrm>
           <a:prstGeom prst="rect">
             <a:avLst/>
@@ -26971,7 +26895,7 @@
                 </a:solidFill>
                 <a:latin typeface="Arial"/>
               </a:rPr>
-              <a:t>снова правильно. То есть правка на месте и работает</a:t>
+              <a:t>снова правильно. И теперь объяснить это ей нечем</a:t>
             </a:r>
           </a:p>
         </p:txBody>
@@ -26984,7 +26908,7 @@
         </p:nvSpPr>
         <p:spPr>
           <a:xfrm>
-            <a:off x="502920" y="4749355"/>
+            <a:off x="502920" y="4858893"/>
             <a:ext cx="82296" cy="746760"/>
           </a:xfrm>
           <a:prstGeom prst="roundRect">
@@ -27030,7 +26954,7 @@
         </p:nvSpPr>
         <p:spPr>
           <a:xfrm>
-            <a:off x="859536" y="4877371"/>
+            <a:off x="859536" y="4986909"/>
             <a:ext cx="10643616" cy="490727"/>
           </a:xfrm>
           <a:prstGeom prst="rect">
@@ -31628,8 +31552,8 @@
         </p:blipFill>
         <p:spPr>
           <a:xfrm>
-            <a:off x="609869" y="943356"/>
-            <a:ext cx="10969212" cy="3222206"/>
+            <a:off x="817788" y="943356"/>
+            <a:ext cx="10553375" cy="3297929"/>
           </a:xfrm>
           <a:prstGeom prst="rect">
             <a:avLst/>
@@ -31644,12 +31568,12 @@
         </p:nvSpPr>
         <p:spPr>
           <a:xfrm>
-            <a:off x="502920" y="4330154"/>
-            <a:ext cx="11183112" cy="1978025"/>
+            <a:off x="502920" y="4405877"/>
+            <a:ext cx="11183112" cy="1904619"/>
           </a:xfrm>
           <a:prstGeom prst="roundRect">
             <a:avLst>
-              <a:gd name="adj" fmla="val 15409"/>
+              <a:gd name="adj" fmla="val 16003"/>
             </a:avLst>
           </a:prstGeom>
           <a:solidFill>
@@ -31692,8 +31616,8 @@
         </p:nvSpPr>
         <p:spPr>
           <a:xfrm>
-            <a:off x="685800" y="4513034"/>
-            <a:ext cx="3064577" cy="282067"/>
+            <a:off x="685800" y="4588757"/>
+            <a:ext cx="3255771" cy="267081"/>
           </a:xfrm>
           <a:prstGeom prst="rect">
             <a:avLst/>
@@ -31708,14 +31632,14 @@
           <a:p>
             <a:pPr algn="l">
               <a:lnSpc>
-                <a:spcPts val="1265"/>
-              </a:lnSpc>
-              <a:spcAft>
-                <a:spcPts val="0"/>
-              </a:spcAft>
-            </a:pPr>
-            <a:r>
-              <a:rPr sz="1150" b="1" i="0">
+                <a:spcPts val="1155"/>
+              </a:lnSpc>
+              <a:spcAft>
+                <a:spcPts val="0"/>
+              </a:spcAft>
+            </a:pPr>
+            <a:r>
+              <a:rPr sz="1050" b="1" i="0">
                 <a:solidFill>
                   <a:srgbClr val="6B7685"/>
                 </a:solidFill>
@@ -31734,8 +31658,8 @@
         </p:nvSpPr>
         <p:spPr>
           <a:xfrm>
-            <a:off x="3896681" y="4513034"/>
-            <a:ext cx="7460166" cy="282067"/>
+            <a:off x="4087875" y="4588757"/>
+            <a:ext cx="7268971" cy="267081"/>
           </a:xfrm>
           <a:prstGeom prst="rect">
             <a:avLst/>
@@ -31750,14 +31674,14 @@
           <a:p>
             <a:pPr algn="l">
               <a:lnSpc>
-                <a:spcPts val="1265"/>
-              </a:lnSpc>
-              <a:spcAft>
-                <a:spcPts val="0"/>
-              </a:spcAft>
-            </a:pPr>
-            <a:r>
-              <a:rPr sz="1150" b="1" i="0">
+                <a:spcPts val="1155"/>
+              </a:lnSpc>
+              <a:spcAft>
+                <a:spcPts val="0"/>
+              </a:spcAft>
+            </a:pPr>
+            <a:r>
+              <a:rPr sz="1050" b="1" i="0">
                 <a:solidFill>
                   <a:srgbClr val="6B7685"/>
                 </a:solidFill>
@@ -31776,8 +31700,8 @@
         </p:nvSpPr>
         <p:spPr>
           <a:xfrm>
-            <a:off x="685800" y="4795101"/>
-            <a:ext cx="3064577" cy="332549"/>
+            <a:off x="685800" y="4855838"/>
+            <a:ext cx="3255771" cy="317944"/>
           </a:xfrm>
           <a:prstGeom prst="rect">
             <a:avLst/>
@@ -31792,14 +31716,14 @@
           <a:p>
             <a:pPr algn="l">
               <a:lnSpc>
-                <a:spcPts val="1322"/>
-              </a:lnSpc>
-              <a:spcAft>
-                <a:spcPts val="0"/>
-              </a:spcAft>
-            </a:pPr>
-            <a:r>
-              <a:rPr sz="1150" b="1" i="0">
+                <a:spcPts val="1207"/>
+              </a:lnSpc>
+              <a:spcAft>
+                <a:spcPts val="0"/>
+              </a:spcAft>
+            </a:pPr>
+            <a:r>
+              <a:rPr sz="1050" b="1" i="0">
                 <a:solidFill>
                   <a:srgbClr val="141B2E"/>
                 </a:solidFill>
@@ -31818,8 +31742,8 @@
         </p:nvSpPr>
         <p:spPr>
           <a:xfrm>
-            <a:off x="3896681" y="4795101"/>
-            <a:ext cx="7460166" cy="332549"/>
+            <a:off x="4087875" y="4855838"/>
+            <a:ext cx="7268971" cy="317944"/>
           </a:xfrm>
           <a:prstGeom prst="rect">
             <a:avLst/>
@@ -31834,14 +31758,14 @@
           <a:p>
             <a:pPr algn="l">
               <a:lnSpc>
-                <a:spcPts val="1322"/>
-              </a:lnSpc>
-              <a:spcAft>
-                <a:spcPts val="0"/>
-              </a:spcAft>
-            </a:pPr>
-            <a:r>
-              <a:rPr sz="1150" b="0" i="0">
+                <a:spcPts val="1207"/>
+              </a:lnSpc>
+              <a:spcAft>
+                <a:spcPts val="0"/>
+              </a:spcAft>
+            </a:pPr>
+            <a:r>
+              <a:rPr sz="1050" b="0" i="0">
                 <a:solidFill>
                   <a:srgbClr val="141B2E"/>
                 </a:solidFill>
@@ -31860,7 +31784,7 @@
         </p:nvCxnSpPr>
         <p:spPr>
           <a:xfrm>
-            <a:off x="685800" y="5127650"/>
+            <a:off x="685800" y="5173783"/>
             <a:ext cx="10817352" cy="0"/>
           </a:xfrm>
           <a:prstGeom prst="line">
@@ -31895,8 +31819,8 @@
         </p:nvSpPr>
         <p:spPr>
           <a:xfrm>
-            <a:off x="685800" y="5127650"/>
-            <a:ext cx="3064577" cy="332549"/>
+            <a:off x="685800" y="5173783"/>
+            <a:ext cx="3255771" cy="317944"/>
           </a:xfrm>
           <a:prstGeom prst="rect">
             <a:avLst/>
@@ -31911,14 +31835,14 @@
           <a:p>
             <a:pPr algn="l">
               <a:lnSpc>
-                <a:spcPts val="1322"/>
-              </a:lnSpc>
-              <a:spcAft>
-                <a:spcPts val="0"/>
-              </a:spcAft>
-            </a:pPr>
-            <a:r>
-              <a:rPr sz="1150" b="1" i="0">
+                <a:spcPts val="1207"/>
+              </a:lnSpc>
+              <a:spcAft>
+                <a:spcPts val="0"/>
+              </a:spcAft>
+            </a:pPr>
+            <a:r>
+              <a:rPr sz="1050" b="1" i="0">
                 <a:solidFill>
                   <a:srgbClr val="141B2E"/>
                 </a:solidFill>
@@ -31937,8 +31861,8 @@
         </p:nvSpPr>
         <p:spPr>
           <a:xfrm>
-            <a:off x="3896681" y="5127650"/>
-            <a:ext cx="7460166" cy="332549"/>
+            <a:off x="4087875" y="5173783"/>
+            <a:ext cx="7268971" cy="317944"/>
           </a:xfrm>
           <a:prstGeom prst="rect">
             <a:avLst/>
@@ -31953,14 +31877,14 @@
           <a:p>
             <a:pPr algn="l">
               <a:lnSpc>
-                <a:spcPts val="1322"/>
-              </a:lnSpc>
-              <a:spcAft>
-                <a:spcPts val="0"/>
-              </a:spcAft>
-            </a:pPr>
-            <a:r>
-              <a:rPr sz="1150" b="0" i="0">
+                <a:spcPts val="1207"/>
+              </a:lnSpc>
+              <a:spcAft>
+                <a:spcPts val="0"/>
+              </a:spcAft>
+            </a:pPr>
+            <a:r>
+              <a:rPr sz="1050" b="0" i="0">
                 <a:solidFill>
                   <a:srgbClr val="141B2E"/>
                 </a:solidFill>
@@ -31979,7 +31903,7 @@
         </p:nvCxnSpPr>
         <p:spPr>
           <a:xfrm>
-            <a:off x="685800" y="5460200"/>
+            <a:off x="685800" y="5491727"/>
             <a:ext cx="10817352" cy="0"/>
           </a:xfrm>
           <a:prstGeom prst="line">
@@ -32014,8 +31938,8 @@
         </p:nvSpPr>
         <p:spPr>
           <a:xfrm>
-            <a:off x="685800" y="5460200"/>
-            <a:ext cx="3064577" cy="332549"/>
+            <a:off x="685800" y="5491727"/>
+            <a:ext cx="3255771" cy="317944"/>
           </a:xfrm>
           <a:prstGeom prst="rect">
             <a:avLst/>
@@ -32030,14 +31954,14 @@
           <a:p>
             <a:pPr algn="l">
               <a:lnSpc>
-                <a:spcPts val="1322"/>
-              </a:lnSpc>
-              <a:spcAft>
-                <a:spcPts val="0"/>
-              </a:spcAft>
-            </a:pPr>
-            <a:r>
-              <a:rPr sz="1150" b="1" i="0">
+                <a:spcPts val="1207"/>
+              </a:lnSpc>
+              <a:spcAft>
+                <a:spcPts val="0"/>
+              </a:spcAft>
+            </a:pPr>
+            <a:r>
+              <a:rPr sz="1050" b="1" i="0">
                 <a:solidFill>
                   <a:srgbClr val="141B2E"/>
                 </a:solidFill>
@@ -32056,8 +31980,8 @@
         </p:nvSpPr>
         <p:spPr>
           <a:xfrm>
-            <a:off x="3896681" y="5460200"/>
-            <a:ext cx="7460166" cy="332549"/>
+            <a:off x="4087875" y="5491727"/>
+            <a:ext cx="7268971" cy="317944"/>
           </a:xfrm>
           <a:prstGeom prst="rect">
             <a:avLst/>
@@ -32072,14 +31996,14 @@
           <a:p>
             <a:pPr algn="l">
               <a:lnSpc>
-                <a:spcPts val="1322"/>
-              </a:lnSpc>
-              <a:spcAft>
-                <a:spcPts val="0"/>
-              </a:spcAft>
-            </a:pPr>
-            <a:r>
-              <a:rPr sz="1150" b="0" i="0">
+                <a:spcPts val="1207"/>
+              </a:lnSpc>
+              <a:spcAft>
+                <a:spcPts val="0"/>
+              </a:spcAft>
+            </a:pPr>
+            <a:r>
+              <a:rPr sz="1050" b="0" i="0">
                 <a:solidFill>
                   <a:srgbClr val="141B2E"/>
                 </a:solidFill>
@@ -32098,7 +32022,7 @@
         </p:nvCxnSpPr>
         <p:spPr>
           <a:xfrm>
-            <a:off x="685800" y="5792749"/>
+            <a:off x="685800" y="5809672"/>
             <a:ext cx="10817352" cy="0"/>
           </a:xfrm>
           <a:prstGeom prst="line">
@@ -32133,8 +32057,8 @@
         </p:nvSpPr>
         <p:spPr>
           <a:xfrm>
-            <a:off x="685800" y="5792749"/>
-            <a:ext cx="3064577" cy="332549"/>
+            <a:off x="685800" y="5809672"/>
+            <a:ext cx="3255771" cy="317944"/>
           </a:xfrm>
           <a:prstGeom prst="rect">
             <a:avLst/>
@@ -32149,14 +32073,14 @@
           <a:p>
             <a:pPr algn="l">
               <a:lnSpc>
-                <a:spcPts val="1322"/>
-              </a:lnSpc>
-              <a:spcAft>
-                <a:spcPts val="0"/>
-              </a:spcAft>
-            </a:pPr>
-            <a:r>
-              <a:rPr sz="1150" b="1" i="0">
+                <a:spcPts val="1207"/>
+              </a:lnSpc>
+              <a:spcAft>
+                <a:spcPts val="0"/>
+              </a:spcAft>
+            </a:pPr>
+            <a:r>
+              <a:rPr sz="1050" b="1" i="0">
                 <a:solidFill>
                   <a:srgbClr val="141B2E"/>
                 </a:solidFill>
@@ -32175,8 +32099,8 @@
         </p:nvSpPr>
         <p:spPr>
           <a:xfrm>
-            <a:off x="3896681" y="5792749"/>
-            <a:ext cx="7460166" cy="332549"/>
+            <a:off x="4087875" y="5809672"/>
+            <a:ext cx="7268971" cy="317944"/>
           </a:xfrm>
           <a:prstGeom prst="rect">
             <a:avLst/>
@@ -32191,14 +32115,14 @@
           <a:p>
             <a:pPr algn="l">
               <a:lnSpc>
-                <a:spcPts val="1322"/>
-              </a:lnSpc>
-              <a:spcAft>
-                <a:spcPts val="0"/>
-              </a:spcAft>
-            </a:pPr>
-            <a:r>
-              <a:rPr sz="1150" b="0" i="0">
+                <a:spcPts val="1207"/>
+              </a:lnSpc>
+              <a:spcAft>
+                <a:spcPts val="0"/>
+              </a:spcAft>
+            </a:pPr>
+            <a:r>
+              <a:rPr sz="1050" b="0" i="0">
                 <a:solidFill>
                   <a:srgbClr val="141B2E"/>
                 </a:solidFill>
@@ -34989,7 +34913,7 @@
         </p:nvSpPr>
         <p:spPr>
           <a:xfrm>
-            <a:off x="502920" y="1110132"/>
+            <a:off x="502920" y="969683"/>
             <a:ext cx="82296" cy="1021080"/>
           </a:xfrm>
           <a:prstGeom prst="roundRect">
@@ -35035,7 +34959,7 @@
         </p:nvSpPr>
         <p:spPr>
           <a:xfrm>
-            <a:off x="859536" y="1238148"/>
+            <a:off x="859536" y="1097699"/>
             <a:ext cx="10643616" cy="765048"/>
           </a:xfrm>
           <a:prstGeom prst="rect">
@@ -35132,7 +35056,7 @@
         </p:nvSpPr>
         <p:spPr>
           <a:xfrm>
-            <a:off x="502920" y="2712745"/>
+            <a:off x="502920" y="2221172"/>
             <a:ext cx="11183112" cy="2036444"/>
           </a:xfrm>
           <a:prstGeom prst="roundRect">
@@ -35180,7 +35104,7 @@
         </p:nvSpPr>
         <p:spPr>
           <a:xfrm>
-            <a:off x="685800" y="2895625"/>
+            <a:off x="685800" y="2404052"/>
             <a:ext cx="6625463" cy="282067"/>
           </a:xfrm>
           <a:prstGeom prst="rect">
@@ -35222,7 +35146,7 @@
         </p:nvSpPr>
         <p:spPr>
           <a:xfrm>
-            <a:off x="7457567" y="2895625"/>
+            <a:off x="7457567" y="2404052"/>
             <a:ext cx="3899280" cy="282067"/>
           </a:xfrm>
           <a:prstGeom prst="rect">
@@ -35264,7 +35188,7 @@
         </p:nvSpPr>
         <p:spPr>
           <a:xfrm>
-            <a:off x="685800" y="3177692"/>
+            <a:off x="685800" y="2686119"/>
             <a:ext cx="6625463" cy="347154"/>
           </a:xfrm>
           <a:prstGeom prst="rect">
@@ -35306,7 +35230,7 @@
         </p:nvSpPr>
         <p:spPr>
           <a:xfrm>
-            <a:off x="7475855" y="3250844"/>
+            <a:off x="7475855" y="2759271"/>
             <a:ext cx="3862704" cy="200850"/>
           </a:xfrm>
           <a:prstGeom prst="roundRect">
@@ -35355,7 +35279,7 @@
         </p:nvCxnSpPr>
         <p:spPr>
           <a:xfrm>
-            <a:off x="685800" y="3524846"/>
+            <a:off x="685800" y="3033274"/>
             <a:ext cx="10817352" cy="0"/>
           </a:xfrm>
           <a:prstGeom prst="line">
@@ -35390,7 +35314,7 @@
         </p:nvSpPr>
         <p:spPr>
           <a:xfrm>
-            <a:off x="685800" y="3524846"/>
+            <a:off x="685800" y="3033274"/>
             <a:ext cx="6625463" cy="347154"/>
           </a:xfrm>
           <a:prstGeom prst="rect">
@@ -35432,7 +35356,7 @@
         </p:nvSpPr>
         <p:spPr>
           <a:xfrm>
-            <a:off x="7475855" y="3597998"/>
+            <a:off x="7475855" y="3106426"/>
             <a:ext cx="3862704" cy="200850"/>
           </a:xfrm>
           <a:prstGeom prst="roundRect">
@@ -35481,7 +35405,7 @@
         </p:nvCxnSpPr>
         <p:spPr>
           <a:xfrm>
-            <a:off x="685800" y="3872001"/>
+            <a:off x="685800" y="3380428"/>
             <a:ext cx="10817352" cy="0"/>
           </a:xfrm>
           <a:prstGeom prst="line">
@@ -35516,7 +35440,7 @@
         </p:nvSpPr>
         <p:spPr>
           <a:xfrm>
-            <a:off x="685800" y="3872001"/>
+            <a:off x="685800" y="3380428"/>
             <a:ext cx="6625463" cy="347154"/>
           </a:xfrm>
           <a:prstGeom prst="rect">
@@ -35558,7 +35482,7 @@
         </p:nvSpPr>
         <p:spPr>
           <a:xfrm>
-            <a:off x="7475855" y="3945153"/>
+            <a:off x="7475855" y="3453580"/>
             <a:ext cx="3862704" cy="200850"/>
           </a:xfrm>
           <a:prstGeom prst="roundRect">
@@ -35607,7 +35531,7 @@
         </p:nvCxnSpPr>
         <p:spPr>
           <a:xfrm>
-            <a:off x="685800" y="4219155"/>
+            <a:off x="685800" y="3727583"/>
             <a:ext cx="10817352" cy="0"/>
           </a:xfrm>
           <a:prstGeom prst="line">
@@ -35642,7 +35566,7 @@
         </p:nvSpPr>
         <p:spPr>
           <a:xfrm>
-            <a:off x="685800" y="4219155"/>
+            <a:off x="685800" y="3727583"/>
             <a:ext cx="6625463" cy="347154"/>
           </a:xfrm>
           <a:prstGeom prst="rect">
@@ -35684,7 +35608,7 @@
         </p:nvSpPr>
         <p:spPr>
           <a:xfrm>
-            <a:off x="7475855" y="4292307"/>
+            <a:off x="7475855" y="3800735"/>
             <a:ext cx="3862704" cy="200850"/>
           </a:xfrm>
           <a:prstGeom prst="roundRect">
@@ -35733,7 +35657,97 @@
         </p:nvSpPr>
         <p:spPr>
           <a:xfrm>
-            <a:off x="502920" y="5330723"/>
+            <a:off x="502920" y="4488027"/>
+            <a:ext cx="11183112" cy="822960"/>
+          </a:xfrm>
+          <a:prstGeom prst="roundRect">
+            <a:avLst>
+              <a:gd name="adj" fmla="val 10000"/>
+            </a:avLst>
+          </a:prstGeom>
+          <a:solidFill>
+            <a:srgbClr val="FEF5E0"/>
+          </a:solidFill>
+          <a:ln w="19050">
+            <a:solidFill>
+              <a:srgbClr val="F0AB00"/>
+            </a:solidFill>
+          </a:ln>
+          <a:effectLst/>
+        </p:spPr>
+        <p:style>
+          <a:lnRef idx="1">
+            <a:schemeClr val="accent1"/>
+          </a:lnRef>
+          <a:fillRef idx="3">
+            <a:schemeClr val="accent1"/>
+          </a:fillRef>
+          <a:effectRef idx="2">
+            <a:schemeClr val="accent1"/>
+          </a:effectRef>
+          <a:fontRef idx="minor">
+            <a:schemeClr val="lt1"/>
+          </a:fontRef>
+        </p:style>
+        <p:txBody>
+          <a:bodyPr rtlCol="0" anchor="ctr"/>
+          <a:lstStyle/>
+          <a:p>
+            <a:pPr algn="ctr"/>
+          </a:p>
+        </p:txBody>
+      </p:sp>
+      <p:sp>
+        <p:nvSpPr>
+          <p:cNvPr id="20" name="TextBox 19"/>
+          <p:cNvSpPr txBox="1"/>
+          <p:nvPr/>
+        </p:nvSpPr>
+        <p:spPr>
+          <a:xfrm>
+            <a:off x="722376" y="4616043"/>
+            <a:ext cx="10634472" cy="566928"/>
+          </a:xfrm>
+          <a:prstGeom prst="rect">
+            <a:avLst/>
+          </a:prstGeom>
+          <a:noFill/>
+        </p:spPr>
+        <p:txBody>
+          <a:bodyPr wrap="square" lIns="0" rIns="0" tIns="0" bIns="0" anchor="ctr">
+            <a:spAutoFit/>
+          </a:bodyPr>
+          <a:lstStyle/>
+          <a:p>
+            <a:pPr algn="ctr">
+              <a:lnSpc>
+                <a:spcPts val="2013"/>
+              </a:lnSpc>
+              <a:spcAft>
+                <a:spcPts val="300"/>
+              </a:spcAft>
+            </a:pPr>
+            <a:r>
+              <a:rPr sz="1650" b="1" i="0">
+                <a:solidFill>
+                  <a:srgbClr val="141B2E"/>
+                </a:solidFill>
+                <a:latin typeface="Arial"/>
+              </a:rPr>
+              <a:t>Вопрос занятия, и к нему мы вернёмся в конце: возьмите процесс, который у вас на работе уже работает — он работает или за него можно ручаться?</a:t>
+            </a:r>
+          </a:p>
+        </p:txBody>
+      </p:sp>
+      <p:sp>
+        <p:nvSpPr>
+          <p:cNvPr id="21" name="Rounded Rectangle 20"/>
+          <p:cNvSpPr/>
+          <p:nvPr/>
+        </p:nvSpPr>
+        <p:spPr>
+          <a:xfrm>
+            <a:off x="502920" y="5541397"/>
             <a:ext cx="82296" cy="746760"/>
           </a:xfrm>
           <a:prstGeom prst="roundRect">
@@ -35773,13 +35787,13 @@
       </p:sp>
       <p:sp>
         <p:nvSpPr>
-          <p:cNvPr id="20" name="TextBox 19"/>
-          <p:cNvSpPr txBox="1"/>
-          <p:nvPr/>
-        </p:nvSpPr>
-        <p:spPr>
-          <a:xfrm>
-            <a:off x="859536" y="5458739"/>
+          <p:cNvPr id="22" name="TextBox 21"/>
+          <p:cNvSpPr txBox="1"/>
+          <p:nvPr/>
+        </p:nvSpPr>
+        <p:spPr>
+          <a:xfrm>
+            <a:off x="859536" y="5669413"/>
             <a:ext cx="10643616" cy="490727"/>
           </a:xfrm>
           <a:prstGeom prst="rect">
@@ -35815,7 +35829,7 @@
       </p:sp>
       <p:sp>
         <p:nvSpPr>
-          <p:cNvPr id="21" name="TextBox 20"/>
+          <p:cNvPr id="23" name="TextBox 22"/>
           <p:cNvSpPr txBox="1"/>
           <p:nvPr/>
         </p:nvSpPr>
@@ -37654,7 +37668,7 @@
         <p:spPr>
           <a:xfrm>
             <a:off x="685800" y="4046143"/>
-            <a:ext cx="1782199" cy="282067"/>
+            <a:ext cx="1398297" cy="282067"/>
           </a:xfrm>
           <a:prstGeom prst="rect">
             <a:avLst/>
@@ -37695,8 +37709,8 @@
         </p:nvSpPr>
         <p:spPr>
           <a:xfrm>
-            <a:off x="2614303" y="4046143"/>
-            <a:ext cx="8742544" cy="282067"/>
+            <a:off x="2230401" y="4046143"/>
+            <a:ext cx="9126446" cy="282067"/>
           </a:xfrm>
           <a:prstGeom prst="rect">
             <a:avLst/>
@@ -37738,7 +37752,7 @@
         <p:spPr>
           <a:xfrm>
             <a:off x="685800" y="4328210"/>
-            <a:ext cx="1782199" cy="347154"/>
+            <a:ext cx="1398297" cy="347154"/>
           </a:xfrm>
           <a:prstGeom prst="rect">
             <a:avLst/>
@@ -37779,8 +37793,8 @@
         </p:nvSpPr>
         <p:spPr>
           <a:xfrm>
-            <a:off x="2614303" y="4328210"/>
-            <a:ext cx="8742544" cy="347154"/>
+            <a:off x="2230401" y="4328210"/>
+            <a:ext cx="9126446" cy="347154"/>
           </a:xfrm>
           <a:prstGeom prst="rect">
             <a:avLst/>
@@ -37857,7 +37871,7 @@
         <p:spPr>
           <a:xfrm>
             <a:off x="685800" y="4675365"/>
-            <a:ext cx="1782199" cy="347154"/>
+            <a:ext cx="1398297" cy="347154"/>
           </a:xfrm>
           <a:prstGeom prst="rect">
             <a:avLst/>
@@ -37898,8 +37912,8 @@
         </p:nvSpPr>
         <p:spPr>
           <a:xfrm>
-            <a:off x="2614303" y="4675365"/>
-            <a:ext cx="8742544" cy="347154"/>
+            <a:off x="2230401" y="4675365"/>
+            <a:ext cx="9126446" cy="347154"/>
           </a:xfrm>
           <a:prstGeom prst="rect">
             <a:avLst/>
@@ -37976,7 +37990,7 @@
         <p:spPr>
           <a:xfrm>
             <a:off x="685800" y="5022519"/>
-            <a:ext cx="1782199" cy="347154"/>
+            <a:ext cx="1398297" cy="347154"/>
           </a:xfrm>
           <a:prstGeom prst="rect">
             <a:avLst/>
@@ -38017,8 +38031,8 @@
         </p:nvSpPr>
         <p:spPr>
           <a:xfrm>
-            <a:off x="2614303" y="5022519"/>
-            <a:ext cx="8742544" cy="347154"/>
+            <a:off x="2230401" y="5022519"/>
+            <a:ext cx="9126446" cy="347154"/>
           </a:xfrm>
           <a:prstGeom prst="rect">
             <a:avLst/>
@@ -38046,7 +38060,7 @@
                 </a:solidFill>
                 <a:latin typeface="Arial"/>
               </a:rPr>
-              <a:t>кроме чтения нужно ещё что-то: удержать значения в списке и показать, что получилось</a:t>
+              <a:t>если решением считать то, за что можно отвечать перед человеком, который этот столбец читает</a:t>
             </a:r>
           </a:p>
         </p:txBody>
@@ -38095,7 +38109,7 @@
         <p:spPr>
           <a:xfrm>
             <a:off x="685800" y="5369674"/>
-            <a:ext cx="1782199" cy="347154"/>
+            <a:ext cx="1398297" cy="347154"/>
           </a:xfrm>
           <a:prstGeom prst="rect">
             <a:avLst/>
@@ -38136,8 +38150,8 @@
         </p:nvSpPr>
         <p:spPr>
           <a:xfrm>
-            <a:off x="2614303" y="5369674"/>
-            <a:ext cx="8742544" cy="347154"/>
+            <a:off x="2230401" y="5369674"/>
+            <a:ext cx="9126446" cy="347154"/>
           </a:xfrm>
           <a:prstGeom prst="rect">
             <a:avLst/>

--- a/library/seminars/sem-07/rendered/sem-07.pptx
+++ b/library/seminars/sem-07/rendered/sem-07.pptx
@@ -9873,16 +9873,40 @@
           </a:p>
         </p:txBody>
       </p:sp>
-      <p:sp>
-        <p:nvSpPr>
-          <p:cNvPr id="3" name="Rounded Rectangle 2"/>
+      <p:pic>
+        <p:nvPicPr>
+          <p:cNvPr id="3" name="Picture 2" descr="n8n-kartochka-izvlecheniya.png"/>
+          <p:cNvPicPr>
+            <a:picLocks noChangeAspect="1"/>
+          </p:cNvPicPr>
+          <p:nvPr/>
+        </p:nvPicPr>
+        <p:blipFill>
+          <a:blip r:embed="rId2"/>
+          <a:stretch>
+            <a:fillRect/>
+          </a:stretch>
+        </p:blipFill>
+        <p:spPr>
+          <a:xfrm>
+            <a:off x="2038531" y="943356"/>
+            <a:ext cx="8111888" cy="2913979"/>
+          </a:xfrm>
+          <a:prstGeom prst="rect">
+            <a:avLst/>
+          </a:prstGeom>
+        </p:spPr>
+      </p:pic>
+      <p:sp>
+        <p:nvSpPr>
+          <p:cNvPr id="4" name="Rounded Rectangle 3"/>
           <p:cNvSpPr/>
           <p:nvPr/>
         </p:nvSpPr>
         <p:spPr>
           <a:xfrm>
-            <a:off x="502920" y="1496263"/>
-            <a:ext cx="82296" cy="1059180"/>
+            <a:off x="502920" y="4021927"/>
+            <a:ext cx="82296" cy="784967"/>
           </a:xfrm>
           <a:prstGeom prst="roundRect">
             <a:avLst>
@@ -9921,14 +9945,14 @@
       </p:sp>
       <p:sp>
         <p:nvSpPr>
-          <p:cNvPr id="4" name="TextBox 3"/>
-          <p:cNvSpPr txBox="1"/>
-          <p:nvPr/>
-        </p:nvSpPr>
-        <p:spPr>
-          <a:xfrm>
-            <a:off x="859536" y="1624279"/>
-            <a:ext cx="10643616" cy="803148"/>
+          <p:cNvPr id="5" name="TextBox 4"/>
+          <p:cNvSpPr txBox="1"/>
+          <p:nvPr/>
+        </p:nvSpPr>
+        <p:spPr>
+          <a:xfrm>
+            <a:off x="859536" y="4149943"/>
+            <a:ext cx="10643616" cy="528935"/>
           </a:xfrm>
           <a:prstGeom prst="rect">
             <a:avLst/>
@@ -9943,14 +9967,14 @@
           <a:p>
             <a:pPr algn="l">
               <a:lnSpc>
-                <a:spcPts val="1860"/>
+                <a:spcPts val="1364"/>
               </a:lnSpc>
               <a:spcAft>
                 <a:spcPts val="300"/>
               </a:spcAft>
             </a:pPr>
             <a:r>
-              <a:rPr sz="1500" b="1" i="0">
+              <a:rPr sz="1100" b="1" i="0">
                 <a:solidFill>
                   <a:srgbClr val="141B2E"/>
                 </a:solidFill>
@@ -9962,14 +9986,14 @@
           <a:p>
             <a:pPr algn="l">
               <a:lnSpc>
-                <a:spcPts val="1860"/>
+                <a:spcPts val="1364"/>
               </a:lnSpc>
               <a:spcAft>
                 <a:spcPts val="300"/>
               </a:spcAft>
             </a:pPr>
             <a:r>
-              <a:rPr sz="1500" b="1" i="0">
+              <a:rPr sz="1100" b="1" i="0">
                 <a:solidFill>
                   <a:srgbClr val="141B2E"/>
                 </a:solidFill>
@@ -9978,7 +10002,7 @@
               <a:t>"topic":</a:t>
             </a:r>
             <a:r>
-              <a:rPr sz="1500" b="1" i="0">
+              <a:rPr sz="1100" b="1" i="0">
                 <a:solidFill>
                   <a:srgbClr val="141B2E"/>
                 </a:solidFill>
@@ -9987,7 +10011,7 @@
               <a:t> </a:t>
             </a:r>
             <a:r>
-              <a:rPr sz="1500" b="1" i="0">
+              <a:rPr sz="1100" b="1" i="0">
                 <a:solidFill>
                   <a:srgbClr val="141B2E"/>
                 </a:solidFill>
@@ -9996,7 +10020,7 @@
               <a:t>{"enum":</a:t>
             </a:r>
             <a:r>
-              <a:rPr sz="1500" b="1" i="0">
+              <a:rPr sz="1100" b="1" i="0">
                 <a:solidFill>
                   <a:srgbClr val="141B2E"/>
                 </a:solidFill>
@@ -10005,7 +10029,7 @@
               <a:t> </a:t>
             </a:r>
             <a:r>
-              <a:rPr sz="1500" b="1" i="0">
+              <a:rPr sz="1100" b="1" i="0">
                 <a:solidFill>
                   <a:srgbClr val="141B2E"/>
                 </a:solidFill>
@@ -10014,7 +10038,7 @@
               <a:t>["курс",</a:t>
             </a:r>
             <a:r>
-              <a:rPr sz="1500" b="1" i="0">
+              <a:rPr sz="1100" b="1" i="0">
                 <a:solidFill>
                   <a:srgbClr val="141B2E"/>
                 </a:solidFill>
@@ -10023,7 +10047,7 @@
               <a:t> </a:t>
             </a:r>
             <a:r>
-              <a:rPr sz="1500" b="1" i="0">
+              <a:rPr sz="1100" b="1" i="0">
                 <a:solidFill>
                   <a:srgbClr val="141B2E"/>
                 </a:solidFill>
@@ -10032,7 +10056,7 @@
               <a:t>"перенос</a:t>
             </a:r>
             <a:r>
-              <a:rPr sz="1500" b="1" i="0">
+              <a:rPr sz="1100" b="1" i="0">
                 <a:solidFill>
                   <a:srgbClr val="141B2E"/>
                 </a:solidFill>
@@ -10041,7 +10065,7 @@
               <a:t> </a:t>
             </a:r>
             <a:r>
-              <a:rPr sz="1500" b="1" i="0">
+              <a:rPr sz="1100" b="1" i="0">
                 <a:solidFill>
                   <a:srgbClr val="141B2E"/>
                 </a:solidFill>
@@ -10050,7 +10074,7 @@
               <a:t>занятия",</a:t>
             </a:r>
             <a:r>
-              <a:rPr sz="1500" b="1" i="0">
+              <a:rPr sz="1100" b="1" i="0">
                 <a:solidFill>
                   <a:srgbClr val="141B2E"/>
                 </a:solidFill>
@@ -10059,7 +10083,7 @@
               <a:t> </a:t>
             </a:r>
             <a:r>
-              <a:rPr sz="1500" b="1" i="0">
+              <a:rPr sz="1100" b="1" i="0">
                 <a:solidFill>
                   <a:srgbClr val="141B2E"/>
                 </a:solidFill>
@@ -10068,7 +10092,7 @@
               <a:t>"оплата",</a:t>
             </a:r>
             <a:r>
-              <a:rPr sz="1500" b="1" i="0">
+              <a:rPr sz="1100" b="1" i="0">
                 <a:solidFill>
                   <a:srgbClr val="141B2E"/>
                 </a:solidFill>
@@ -10077,7 +10101,7 @@
               <a:t> </a:t>
             </a:r>
             <a:r>
-              <a:rPr sz="1500" b="1" i="0">
+              <a:rPr sz="1100" b="1" i="0">
                 <a:solidFill>
                   <a:srgbClr val="141B2E"/>
                 </a:solidFill>
@@ -10089,14 +10113,14 @@
           <a:p>
             <a:pPr algn="l">
               <a:lnSpc>
-                <a:spcPts val="1860"/>
+                <a:spcPts val="1364"/>
               </a:lnSpc>
               <a:spcAft>
                 <a:spcPts val="300"/>
               </a:spcAft>
             </a:pPr>
             <a:r>
-              <a:rPr sz="1500" b="1" i="0">
+              <a:rPr sz="1100" b="1" i="0">
                 <a:solidFill>
                   <a:srgbClr val="141B2E"/>
                 </a:solidFill>
@@ -10105,7 +10129,7 @@
               <a:t>"urgency":</a:t>
             </a:r>
             <a:r>
-              <a:rPr sz="1500" b="1" i="0">
+              <a:rPr sz="1100" b="1" i="0">
                 <a:solidFill>
                   <a:srgbClr val="141B2E"/>
                 </a:solidFill>
@@ -10114,7 +10138,7 @@
               <a:t> </a:t>
             </a:r>
             <a:r>
-              <a:rPr sz="1500" b="1" i="0">
+              <a:rPr sz="1100" b="1" i="0">
                 <a:solidFill>
                   <a:srgbClr val="141B2E"/>
                 </a:solidFill>
@@ -10123,7 +10147,7 @@
               <a:t>{"enum":</a:t>
             </a:r>
             <a:r>
-              <a:rPr sz="1500" b="1" i="0">
+              <a:rPr sz="1100" b="1" i="0">
                 <a:solidFill>
                   <a:srgbClr val="141B2E"/>
                 </a:solidFill>
@@ -10132,7 +10156,7 @@
               <a:t> </a:t>
             </a:r>
             <a:r>
-              <a:rPr sz="1500" b="1" i="0">
+              <a:rPr sz="1100" b="1" i="0">
                 <a:solidFill>
                   <a:srgbClr val="141B2E"/>
                 </a:solidFill>
@@ -10141,7 +10165,7 @@
               <a:t>["сегодня",</a:t>
             </a:r>
             <a:r>
-              <a:rPr sz="1500" b="1" i="0">
+              <a:rPr sz="1100" b="1" i="0">
                 <a:solidFill>
                   <a:srgbClr val="141B2E"/>
                 </a:solidFill>
@@ -10150,7 +10174,7 @@
               <a:t> </a:t>
             </a:r>
             <a:r>
-              <a:rPr sz="1500" b="1" i="0">
+              <a:rPr sz="1100" b="1" i="0">
                 <a:solidFill>
                   <a:srgbClr val="141B2E"/>
                 </a:solidFill>
@@ -10159,7 +10183,7 @@
               <a:t>"на</a:t>
             </a:r>
             <a:r>
-              <a:rPr sz="1500" b="1" i="0">
+              <a:rPr sz="1100" b="1" i="0">
                 <a:solidFill>
                   <a:srgbClr val="141B2E"/>
                 </a:solidFill>
@@ -10168,7 +10192,7 @@
               <a:t> </a:t>
             </a:r>
             <a:r>
-              <a:rPr sz="1500" b="1" i="0">
+              <a:rPr sz="1100" b="1" i="0">
                 <a:solidFill>
                   <a:srgbClr val="141B2E"/>
                 </a:solidFill>
@@ -10177,7 +10201,7 @@
               <a:t>неделе",</a:t>
             </a:r>
             <a:r>
-              <a:rPr sz="1500" b="1" i="0">
+              <a:rPr sz="1100" b="1" i="0">
                 <a:solidFill>
                   <a:srgbClr val="141B2E"/>
                 </a:solidFill>
@@ -10186,7 +10210,7 @@
               <a:t> </a:t>
             </a:r>
             <a:r>
-              <a:rPr sz="1500" b="1" i="0">
+              <a:rPr sz="1100" b="1" i="0">
                 <a:solidFill>
                   <a:srgbClr val="141B2E"/>
                 </a:solidFill>
@@ -10195,7 +10219,7 @@
               <a:t>"не</a:t>
             </a:r>
             <a:r>
-              <a:rPr sz="1500" b="1" i="0">
+              <a:rPr sz="1100" b="1" i="0">
                 <a:solidFill>
                   <a:srgbClr val="141B2E"/>
                 </a:solidFill>
@@ -10204,7 +10228,7 @@
               <a:t> </a:t>
             </a:r>
             <a:r>
-              <a:rPr sz="1500" b="1" i="0">
+              <a:rPr sz="1100" b="1" i="0">
                 <a:solidFill>
                   <a:srgbClr val="141B2E"/>
                 </a:solidFill>
@@ -10213,7 +10237,7 @@
               <a:t>указано"]}</a:t>
             </a:r>
             <a:r>
-              <a:rPr sz="1500" b="1" i="0">
+              <a:rPr sz="1100" b="1" i="0">
                 <a:solidFill>
                   <a:srgbClr val="141B2E"/>
                 </a:solidFill>
@@ -10226,14 +10250,14 @@
       </p:sp>
       <p:sp>
         <p:nvSpPr>
-          <p:cNvPr id="5" name="Rounded Rectangle 4"/>
+          <p:cNvPr id="6" name="Rounded Rectangle 5"/>
           <p:cNvSpPr/>
           <p:nvPr/>
         </p:nvSpPr>
         <p:spPr>
           <a:xfrm>
-            <a:off x="502920" y="3222955"/>
-            <a:ext cx="82296" cy="784860"/>
+            <a:off x="502920" y="4971486"/>
+            <a:ext cx="82296" cy="581666"/>
           </a:xfrm>
           <a:prstGeom prst="roundRect">
             <a:avLst>
@@ -10272,14 +10296,14 @@
       </p:sp>
       <p:sp>
         <p:nvSpPr>
-          <p:cNvPr id="6" name="TextBox 5"/>
-          <p:cNvSpPr txBox="1"/>
-          <p:nvPr/>
-        </p:nvSpPr>
-        <p:spPr>
-          <a:xfrm>
-            <a:off x="859536" y="3350971"/>
-            <a:ext cx="10643616" cy="528828"/>
+          <p:cNvPr id="7" name="TextBox 6"/>
+          <p:cNvSpPr txBox="1"/>
+          <p:nvPr/>
+        </p:nvSpPr>
+        <p:spPr>
+          <a:xfrm>
+            <a:off x="859536" y="5099502"/>
+            <a:ext cx="10643616" cy="325634"/>
           </a:xfrm>
           <a:prstGeom prst="rect">
             <a:avLst/>
@@ -10294,14 +10318,14 @@
           <a:p>
             <a:pPr algn="l">
               <a:lnSpc>
-                <a:spcPts val="1860"/>
+                <a:spcPts val="1364"/>
               </a:lnSpc>
               <a:spcAft>
                 <a:spcPts val="300"/>
               </a:spcAft>
             </a:pPr>
             <a:r>
-              <a:rPr sz="1500" b="1" i="0">
+              <a:rPr sz="1100" b="1" i="0">
                 <a:solidFill>
                   <a:srgbClr val="141B2E"/>
                 </a:solidFill>
@@ -10313,14 +10337,14 @@
           <a:p>
             <a:pPr algn="l">
               <a:lnSpc>
-                <a:spcPts val="1860"/>
+                <a:spcPts val="1364"/>
               </a:lnSpc>
               <a:spcAft>
                 <a:spcPts val="300"/>
               </a:spcAft>
             </a:pPr>
             <a:r>
-              <a:rPr sz="1500" b="1" i="0">
+              <a:rPr sz="1100" b="1" i="0">
                 <a:solidFill>
                   <a:srgbClr val="141B2E"/>
                 </a:solidFill>
@@ -10329,7 +10353,7 @@
               <a:t>{{</a:t>
             </a:r>
             <a:r>
-              <a:rPr sz="1500" b="1" i="0">
+              <a:rPr sz="1100" b="1" i="0">
                 <a:solidFill>
                   <a:srgbClr val="141B2E"/>
                 </a:solidFill>
@@ -10338,7 +10362,7 @@
               <a:t> </a:t>
             </a:r>
             <a:r>
-              <a:rPr sz="1500" b="1" i="0">
+              <a:rPr sz="1100" b="1" i="0">
                 <a:solidFill>
                   <a:srgbClr val="141B2E"/>
                 </a:solidFill>
@@ -10347,7 +10371,7 @@
               <a:t>$json.topic</a:t>
             </a:r>
             <a:r>
-              <a:rPr sz="1500" b="1" i="0">
+              <a:rPr sz="1100" b="1" i="0">
                 <a:solidFill>
                   <a:srgbClr val="141B2E"/>
                 </a:solidFill>
@@ -10356,7 +10380,7 @@
               <a:t> </a:t>
             </a:r>
             <a:r>
-              <a:rPr sz="1500" b="1" i="0">
+              <a:rPr sz="1100" b="1" i="0">
                 <a:solidFill>
                   <a:srgbClr val="141B2E"/>
                 </a:solidFill>
@@ -10365,7 +10389,7 @@
               <a:t>||</a:t>
             </a:r>
             <a:r>
-              <a:rPr sz="1500" b="1" i="0">
+              <a:rPr sz="1100" b="1" i="0">
                 <a:solidFill>
                   <a:srgbClr val="141B2E"/>
                 </a:solidFill>
@@ -10374,7 +10398,7 @@
               <a:t> </a:t>
             </a:r>
             <a:r>
-              <a:rPr sz="1500" b="1" i="0">
+              <a:rPr sz="1100" b="1" i="0">
                 <a:solidFill>
                   <a:srgbClr val="141B2E"/>
                 </a:solidFill>
@@ -10383,7 +10407,7 @@
               <a:t>'другое'</a:t>
             </a:r>
             <a:r>
-              <a:rPr sz="1500" b="1" i="0">
+              <a:rPr sz="1100" b="1" i="0">
                 <a:solidFill>
                   <a:srgbClr val="141B2E"/>
                 </a:solidFill>
@@ -10392,7 +10416,7 @@
               <a:t> </a:t>
             </a:r>
             <a:r>
-              <a:rPr sz="1500" b="1" i="0">
+              <a:rPr sz="1100" b="1" i="0">
                 <a:solidFill>
                   <a:srgbClr val="141B2E"/>
                 </a:solidFill>
@@ -10401,7 +10425,7 @@
               <a:t>}}</a:t>
             </a:r>
             <a:r>
-              <a:rPr sz="1500" b="1" i="0">
+              <a:rPr sz="1100" b="1" i="0">
                 <a:solidFill>
                   <a:srgbClr val="141B2E"/>
                 </a:solidFill>
@@ -10414,14 +10438,14 @@
       </p:sp>
       <p:sp>
         <p:nvSpPr>
-          <p:cNvPr id="7" name="Rounded Rectangle 6"/>
+          <p:cNvPr id="8" name="Rounded Rectangle 7"/>
           <p:cNvSpPr/>
           <p:nvPr/>
         </p:nvSpPr>
         <p:spPr>
           <a:xfrm>
-            <a:off x="502920" y="4675327"/>
-            <a:ext cx="11183112" cy="822960"/>
+            <a:off x="502920" y="5717745"/>
+            <a:ext cx="11183112" cy="609902"/>
           </a:xfrm>
           <a:prstGeom prst="roundRect">
             <a:avLst>
@@ -10462,14 +10486,14 @@
       </p:sp>
       <p:sp>
         <p:nvSpPr>
-          <p:cNvPr id="8" name="TextBox 7"/>
-          <p:cNvSpPr txBox="1"/>
-          <p:nvPr/>
-        </p:nvSpPr>
-        <p:spPr>
-          <a:xfrm>
-            <a:off x="722376" y="4803343"/>
-            <a:ext cx="10634472" cy="566928"/>
+          <p:cNvPr id="9" name="TextBox 8"/>
+          <p:cNvSpPr txBox="1"/>
+          <p:nvPr/>
+        </p:nvSpPr>
+        <p:spPr>
+          <a:xfrm>
+            <a:off x="722376" y="5845761"/>
+            <a:ext cx="10634472" cy="353870"/>
           </a:xfrm>
           <a:prstGeom prst="rect">
             <a:avLst/>
@@ -10484,14 +10508,14 @@
           <a:p>
             <a:pPr algn="ctr">
               <a:lnSpc>
-                <a:spcPts val="2013"/>
+                <a:spcPts val="1281"/>
               </a:lnSpc>
               <a:spcAft>
                 <a:spcPts val="300"/>
               </a:spcAft>
             </a:pPr>
             <a:r>
-              <a:rPr sz="1650" b="1" i="0">
+              <a:rPr sz="1050" b="1" i="0">
                 <a:solidFill>
                   <a:srgbClr val="141B2E"/>
                 </a:solidFill>
@@ -10500,7 +10524,7 @@
               <a:t>Предскажите до прогона.</a:t>
             </a:r>
             <a:r>
-              <a:rPr sz="1650" b="1" i="0">
+              <a:rPr sz="1050" b="1" i="0">
                 <a:solidFill>
                   <a:srgbClr val="141B2E"/>
                 </a:solidFill>
@@ -10513,7 +10537,7 @@
       </p:sp>
       <p:sp>
         <p:nvSpPr>
-          <p:cNvPr id="9" name="TextBox 8"/>
+          <p:cNvPr id="10" name="TextBox 9"/>
           <p:cNvSpPr txBox="1"/>
           <p:nvPr/>
         </p:nvSpPr>
@@ -18859,7 +18883,7 @@
       </p:sp>
       <p:pic>
         <p:nvPicPr>
-          <p:cNvPr id="3" name="Picture 2" descr="k2-shema-trudnye-zayavki.png"/>
+          <p:cNvPr id="3" name="Picture 2" descr="n8n-kartochka-sverki.png"/>
           <p:cNvPicPr>
             <a:picLocks noChangeAspect="1"/>
           </p:cNvPicPr>
@@ -18873,8 +18897,8 @@
         </p:blipFill>
         <p:spPr>
           <a:xfrm>
-            <a:off x="1975260" y="943356"/>
-            <a:ext cx="8238431" cy="2059607"/>
+            <a:off x="1630348" y="943356"/>
+            <a:ext cx="8928255" cy="2860508"/>
           </a:xfrm>
           <a:prstGeom prst="rect">
             <a:avLst/>
@@ -18889,12 +18913,12 @@
         </p:nvSpPr>
         <p:spPr>
           <a:xfrm>
-            <a:off x="502920" y="3167555"/>
-            <a:ext cx="11183112" cy="1480185"/>
+            <a:off x="502920" y="3968456"/>
+            <a:ext cx="11183112" cy="1335151"/>
           </a:xfrm>
           <a:prstGeom prst="roundRect">
             <a:avLst>
-              <a:gd name="adj" fmla="val 20592"/>
+              <a:gd name="adj" fmla="val 22828"/>
             </a:avLst>
           </a:prstGeom>
           <a:solidFill>
@@ -18937,8 +18961,8 @@
         </p:nvSpPr>
         <p:spPr>
           <a:xfrm>
-            <a:off x="630936" y="3295571"/>
-            <a:ext cx="4143574" cy="267081"/>
+            <a:off x="630936" y="4096472"/>
+            <a:ext cx="4266936" cy="282067"/>
           </a:xfrm>
           <a:prstGeom prst="rect">
             <a:avLst/>
@@ -18953,14 +18977,14 @@
           <a:p>
             <a:pPr algn="l">
               <a:lnSpc>
-                <a:spcPts val="1155"/>
-              </a:lnSpc>
-              <a:spcAft>
-                <a:spcPts val="0"/>
-              </a:spcAft>
-            </a:pPr>
-            <a:r>
-              <a:rPr sz="1050" b="1" i="0">
+                <a:spcPts val="1265"/>
+              </a:lnSpc>
+              <a:spcAft>
+                <a:spcPts val="0"/>
+              </a:spcAft>
+            </a:pPr>
+            <a:r>
+              <a:rPr sz="1150" b="1" i="0">
                 <a:solidFill>
                   <a:srgbClr val="6B7685"/>
                 </a:solidFill>
@@ -18979,8 +19003,8 @@
         </p:nvSpPr>
         <p:spPr>
           <a:xfrm>
-            <a:off x="4920814" y="3295571"/>
-            <a:ext cx="2863999" cy="267081"/>
+            <a:off x="5044176" y="4096472"/>
+            <a:ext cx="2743581" cy="282067"/>
           </a:xfrm>
           <a:prstGeom prst="rect">
             <a:avLst/>
@@ -18995,14 +19019,14 @@
           <a:p>
             <a:pPr algn="l">
               <a:lnSpc>
-                <a:spcPts val="1155"/>
-              </a:lnSpc>
-              <a:spcAft>
-                <a:spcPts val="0"/>
-              </a:spcAft>
-            </a:pPr>
-            <a:r>
-              <a:rPr sz="1050" b="1" i="0">
+                <a:spcPts val="1265"/>
+              </a:lnSpc>
+              <a:spcAft>
+                <a:spcPts val="0"/>
+              </a:spcAft>
+            </a:pPr>
+            <a:r>
+              <a:rPr sz="1150" b="1" i="0">
                 <a:solidFill>
                   <a:srgbClr val="6B7685"/>
                 </a:solidFill>
@@ -19021,8 +19045,8 @@
         </p:nvSpPr>
         <p:spPr>
           <a:xfrm>
-            <a:off x="7931117" y="3295571"/>
-            <a:ext cx="3480594" cy="267081"/>
+            <a:off x="7934061" y="4096472"/>
+            <a:ext cx="3477650" cy="282067"/>
           </a:xfrm>
           <a:prstGeom prst="rect">
             <a:avLst/>
@@ -19037,14 +19061,14 @@
           <a:p>
             <a:pPr algn="l">
               <a:lnSpc>
-                <a:spcPts val="1155"/>
-              </a:lnSpc>
-              <a:spcAft>
-                <a:spcPts val="0"/>
-              </a:spcAft>
-            </a:pPr>
-            <a:r>
-              <a:rPr sz="1050" b="1" i="0">
+                <a:spcPts val="1265"/>
+              </a:lnSpc>
+              <a:spcAft>
+                <a:spcPts val="0"/>
+              </a:spcAft>
+            </a:pPr>
+            <a:r>
+              <a:rPr sz="1150" b="1" i="0">
                 <a:solidFill>
                   <a:srgbClr val="6B7685"/>
                 </a:solidFill>
@@ -19063,8 +19087,8 @@
         </p:nvSpPr>
         <p:spPr>
           <a:xfrm>
-            <a:off x="630936" y="3562652"/>
-            <a:ext cx="4143574" cy="239268"/>
+            <a:off x="630936" y="4378539"/>
+            <a:ext cx="4266936" cy="265684"/>
           </a:xfrm>
           <a:prstGeom prst="rect">
             <a:avLst/>
@@ -19079,14 +19103,14 @@
           <a:p>
             <a:pPr algn="l">
               <a:lnSpc>
-                <a:spcPts val="1092"/>
-              </a:lnSpc>
-              <a:spcAft>
-                <a:spcPts val="0"/>
-              </a:spcAft>
-            </a:pPr>
-            <a:r>
-              <a:rPr sz="1050" b="0" i="0">
+                <a:spcPts val="1300"/>
+              </a:lnSpc>
+              <a:spcAft>
+                <a:spcPts val="0"/>
+              </a:spcAft>
+            </a:pPr>
+            <a:r>
+              <a:rPr sz="1250" b="0" i="0">
                 <a:solidFill>
                   <a:srgbClr val="141B2E"/>
                 </a:solidFill>
@@ -19095,7 +19119,7 @@
               <a:t>перенести занятие </a:t>
             </a:r>
             <a:r>
-              <a:rPr sz="1050" b="1" i="0">
+              <a:rPr sz="1250" b="1" i="0">
                 <a:solidFill>
                   <a:srgbClr val="141B2E"/>
                 </a:solidFill>
@@ -19104,7 +19128,7 @@
               <a:t>и</a:t>
             </a:r>
             <a:r>
-              <a:rPr sz="1050" b="0" i="0">
+              <a:rPr sz="1250" b="0" i="0">
                 <a:solidFill>
                   <a:srgbClr val="141B2E"/>
                 </a:solidFill>
@@ -19123,8 +19147,8 @@
         </p:nvSpPr>
         <p:spPr>
           <a:xfrm>
-            <a:off x="4920814" y="3562652"/>
-            <a:ext cx="2863999" cy="239268"/>
+            <a:off x="5044176" y="4378539"/>
+            <a:ext cx="2743581" cy="265684"/>
           </a:xfrm>
           <a:prstGeom prst="rect">
             <a:avLst/>
@@ -19139,14 +19163,14 @@
           <a:p>
             <a:pPr algn="l">
               <a:lnSpc>
-                <a:spcPts val="1092"/>
-              </a:lnSpc>
-              <a:spcAft>
-                <a:spcPts val="0"/>
-              </a:spcAft>
-            </a:pPr>
-            <a:r>
-              <a:rPr sz="1050" b="0" i="0">
+                <a:spcPts val="1300"/>
+              </a:lnSpc>
+              <a:spcAft>
+                <a:spcPts val="0"/>
+              </a:spcAft>
+            </a:pPr>
+            <a:r>
+              <a:rPr sz="1250" b="0" i="0">
                 <a:solidFill>
                   <a:srgbClr val="141B2E"/>
                 </a:solidFill>
@@ -19165,8 +19189,8 @@
         </p:nvSpPr>
         <p:spPr>
           <a:xfrm>
-            <a:off x="7931117" y="3562652"/>
-            <a:ext cx="3480594" cy="239268"/>
+            <a:off x="7934061" y="4378539"/>
+            <a:ext cx="3477650" cy="265684"/>
           </a:xfrm>
           <a:prstGeom prst="rect">
             <a:avLst/>
@@ -19181,14 +19205,14 @@
           <a:p>
             <a:pPr algn="l">
               <a:lnSpc>
-                <a:spcPts val="1092"/>
-              </a:lnSpc>
-              <a:spcAft>
-                <a:spcPts val="0"/>
-              </a:spcAft>
-            </a:pPr>
-            <a:r>
-              <a:rPr sz="1050" b="0" i="0">
+                <a:spcPts val="1300"/>
+              </a:lnSpc>
+              <a:spcAft>
+                <a:spcPts val="0"/>
+              </a:spcAft>
+            </a:pPr>
+            <a:r>
+              <a:rPr sz="1250" b="0" i="0">
                 <a:solidFill>
                   <a:srgbClr val="141B2E"/>
                 </a:solidFill>
@@ -19207,7 +19231,7 @@
         </p:nvCxnSpPr>
         <p:spPr>
           <a:xfrm>
-            <a:off x="630936" y="3801920"/>
+            <a:off x="630936" y="4644223"/>
             <a:ext cx="10927080" cy="0"/>
           </a:xfrm>
           <a:prstGeom prst="line">
@@ -19242,8 +19266,8 @@
         </p:nvSpPr>
         <p:spPr>
           <a:xfrm>
-            <a:off x="630936" y="3801920"/>
-            <a:ext cx="4143574" cy="239268"/>
+            <a:off x="630936" y="4644223"/>
+            <a:ext cx="4266936" cy="265684"/>
           </a:xfrm>
           <a:prstGeom prst="rect">
             <a:avLst/>
@@ -19258,14 +19282,14 @@
           <a:p>
             <a:pPr algn="l">
               <a:lnSpc>
-                <a:spcPts val="1092"/>
-              </a:lnSpc>
-              <a:spcAft>
-                <a:spcPts val="0"/>
-              </a:spcAft>
-            </a:pPr>
-            <a:r>
-              <a:rPr sz="1050" b="0" i="0">
+                <a:spcPts val="1300"/>
+              </a:lnSpc>
+              <a:spcAft>
+                <a:spcPts val="0"/>
+              </a:spcAft>
+            </a:pPr>
+            <a:r>
+              <a:rPr sz="1250" b="0" i="0">
                 <a:solidFill>
                   <a:srgbClr val="141B2E"/>
                 </a:solidFill>
@@ -19274,7 +19298,7 @@
               <a:t>оплатить, перенести </a:t>
             </a:r>
             <a:r>
-              <a:rPr sz="1050" b="1" i="0">
+              <a:rPr sz="1250" b="1" i="0">
                 <a:solidFill>
                   <a:srgbClr val="141B2E"/>
                 </a:solidFill>
@@ -19283,7 +19307,7 @@
               <a:t>и</a:t>
             </a:r>
             <a:r>
-              <a:rPr sz="1050" b="0" i="0">
+              <a:rPr sz="1250" b="0" i="0">
                 <a:solidFill>
                   <a:srgbClr val="141B2E"/>
                 </a:solidFill>
@@ -19302,8 +19326,8 @@
         </p:nvSpPr>
         <p:spPr>
           <a:xfrm>
-            <a:off x="4920814" y="3801920"/>
-            <a:ext cx="2863999" cy="239268"/>
+            <a:off x="5044176" y="4644223"/>
+            <a:ext cx="2743581" cy="265684"/>
           </a:xfrm>
           <a:prstGeom prst="rect">
             <a:avLst/>
@@ -19318,14 +19342,14 @@
           <a:p>
             <a:pPr algn="l">
               <a:lnSpc>
-                <a:spcPts val="1092"/>
-              </a:lnSpc>
-              <a:spcAft>
-                <a:spcPts val="0"/>
-              </a:spcAft>
-            </a:pPr>
-            <a:r>
-              <a:rPr sz="1050" b="0" i="0">
+                <a:spcPts val="1300"/>
+              </a:lnSpc>
+              <a:spcAft>
+                <a:spcPts val="0"/>
+              </a:spcAft>
+            </a:pPr>
+            <a:r>
+              <a:rPr sz="1250" b="0" i="0">
                 <a:solidFill>
                   <a:srgbClr val="141B2E"/>
                 </a:solidFill>
@@ -19344,8 +19368,8 @@
         </p:nvSpPr>
         <p:spPr>
           <a:xfrm>
-            <a:off x="7931117" y="3801920"/>
-            <a:ext cx="3480594" cy="239268"/>
+            <a:off x="7934061" y="4644223"/>
+            <a:ext cx="3477650" cy="265684"/>
           </a:xfrm>
           <a:prstGeom prst="rect">
             <a:avLst/>
@@ -19360,14 +19384,14 @@
           <a:p>
             <a:pPr algn="l">
               <a:lnSpc>
-                <a:spcPts val="1092"/>
-              </a:lnSpc>
-              <a:spcAft>
-                <a:spcPts val="0"/>
-              </a:spcAft>
-            </a:pPr>
-            <a:r>
-              <a:rPr sz="1050" b="0" i="0">
+                <a:spcPts val="1300"/>
+              </a:lnSpc>
+              <a:spcAft>
+                <a:spcPts val="0"/>
+              </a:spcAft>
+            </a:pPr>
+            <a:r>
+              <a:rPr sz="1250" b="0" i="0">
                 <a:solidFill>
                   <a:srgbClr val="141B2E"/>
                 </a:solidFill>
@@ -19376,7 +19400,7 @@
               <a:t>перенос занятия · </a:t>
             </a:r>
             <a:r>
-              <a:rPr sz="1050" b="1" i="0">
+              <a:rPr sz="1250" b="1" i="0">
                 <a:solidFill>
                   <a:srgbClr val="141B2E"/>
                 </a:solidFill>
@@ -19395,7 +19419,7 @@
         </p:nvCxnSpPr>
         <p:spPr>
           <a:xfrm>
-            <a:off x="630936" y="4041188"/>
+            <a:off x="630936" y="4909907"/>
             <a:ext cx="10927080" cy="0"/>
           </a:xfrm>
           <a:prstGeom prst="line">
@@ -19430,8 +19454,8 @@
         </p:nvSpPr>
         <p:spPr>
           <a:xfrm>
-            <a:off x="630936" y="4041188"/>
-            <a:ext cx="4143574" cy="239268"/>
+            <a:off x="630936" y="4909907"/>
+            <a:ext cx="4266936" cy="265684"/>
           </a:xfrm>
           <a:prstGeom prst="rect">
             <a:avLst/>
@@ -19446,20 +19470,20 @@
           <a:p>
             <a:pPr algn="l">
               <a:lnSpc>
-                <a:spcPts val="1092"/>
-              </a:lnSpc>
-              <a:spcAft>
-                <a:spcPts val="0"/>
-              </a:spcAft>
-            </a:pPr>
-            <a:r>
-              <a:rPr sz="1050" b="0" i="0">
-                <a:solidFill>
-                  <a:srgbClr val="141B2E"/>
-                </a:solidFill>
-                <a:latin typeface="Arial"/>
-              </a:rPr>
-              <a:t>сотрудничаете с юрлицами?</a:t>
+                <a:spcPts val="1300"/>
+              </a:lnSpc>
+              <a:spcAft>
+                <a:spcPts val="0"/>
+              </a:spcAft>
+            </a:pPr>
+            <a:r>
+              <a:rPr sz="1250" b="0" i="0">
+                <a:solidFill>
+                  <a:srgbClr val="141B2E"/>
+                </a:solidFill>
+                <a:latin typeface="Arial"/>
+              </a:rPr>
+              <a:t>«ок»</a:t>
             </a:r>
           </a:p>
         </p:txBody>
@@ -19472,8 +19496,8 @@
         </p:nvSpPr>
         <p:spPr>
           <a:xfrm>
-            <a:off x="4920814" y="4041188"/>
-            <a:ext cx="2863999" cy="239268"/>
+            <a:off x="5044176" y="4909907"/>
+            <a:ext cx="2743581" cy="265684"/>
           </a:xfrm>
           <a:prstGeom prst="rect">
             <a:avLst/>
@@ -19488,14 +19512,14 @@
           <a:p>
             <a:pPr algn="l">
               <a:lnSpc>
-                <a:spcPts val="1092"/>
-              </a:lnSpc>
-              <a:spcAft>
-                <a:spcPts val="0"/>
-              </a:spcAft>
-            </a:pPr>
-            <a:r>
-              <a:rPr sz="1050" b="1" i="0">
+                <a:spcPts val="1300"/>
+              </a:lnSpc>
+              <a:spcAft>
+                <a:spcPts val="0"/>
+              </a:spcAft>
+            </a:pPr>
+            <a:r>
+              <a:rPr sz="1250" b="1" i="0">
                 <a:solidFill>
                   <a:srgbClr val="141B2E"/>
                 </a:solidFill>
@@ -19514,8 +19538,8 @@
         </p:nvSpPr>
         <p:spPr>
           <a:xfrm>
-            <a:off x="7931117" y="4041188"/>
-            <a:ext cx="3480594" cy="239268"/>
+            <a:off x="7934061" y="4909907"/>
+            <a:ext cx="3477650" cy="265684"/>
           </a:xfrm>
           <a:prstGeom prst="rect">
             <a:avLst/>
@@ -19530,14 +19554,14 @@
           <a:p>
             <a:pPr algn="l">
               <a:lnSpc>
-                <a:spcPts val="1092"/>
-              </a:lnSpc>
-              <a:spcAft>
-                <a:spcPts val="0"/>
-              </a:spcAft>
-            </a:pPr>
-            <a:r>
-              <a:rPr sz="1050" b="0" i="0">
+                <a:spcPts val="1300"/>
+              </a:lnSpc>
+              <a:spcAft>
+                <a:spcPts val="0"/>
+              </a:spcAft>
+            </a:pPr>
+            <a:r>
+              <a:rPr sz="1250" b="0" i="0">
                 <a:solidFill>
                   <a:srgbClr val="141B2E"/>
                 </a:solidFill>
@@ -19548,283 +19572,16 @@
           </a:p>
         </p:txBody>
       </p:sp>
-      <p:cxnSp>
-        <p:nvCxnSpPr>
-          <p:cNvPr id="19" name="Connector 18"/>
-          <p:cNvCxnSpPr/>
-          <p:nvPr/>
-        </p:nvCxnSpPr>
-        <p:spPr>
-          <a:xfrm>
-            <a:off x="630936" y="4280456"/>
-            <a:ext cx="10927080" cy="0"/>
-          </a:xfrm>
-          <a:prstGeom prst="line">
-            <a:avLst/>
-          </a:prstGeom>
-          <a:ln w="9525">
-            <a:solidFill>
-              <a:srgbClr val="E5EAF0"/>
-            </a:solidFill>
-          </a:ln>
-        </p:spPr>
-        <p:style>
-          <a:lnRef idx="2">
-            <a:schemeClr val="accent1"/>
-          </a:lnRef>
-          <a:fillRef idx="0">
-            <a:schemeClr val="accent1"/>
-          </a:fillRef>
-          <a:effectRef idx="1">
-            <a:schemeClr val="accent1"/>
-          </a:effectRef>
-          <a:fontRef idx="minor">
-            <a:schemeClr val="tx1"/>
-          </a:fontRef>
-        </p:style>
-      </p:cxnSp>
-      <p:sp>
-        <p:nvSpPr>
-          <p:cNvPr id="20" name="TextBox 19"/>
-          <p:cNvSpPr txBox="1"/>
-          <p:nvPr/>
-        </p:nvSpPr>
-        <p:spPr>
-          <a:xfrm>
-            <a:off x="630936" y="4280456"/>
-            <a:ext cx="4143574" cy="239268"/>
-          </a:xfrm>
-          <a:prstGeom prst="rect">
-            <a:avLst/>
-          </a:prstGeom>
-          <a:noFill/>
-        </p:spPr>
-        <p:txBody>
-          <a:bodyPr wrap="square" lIns="0" rIns="0" tIns="0" bIns="0" anchor="ctr">
-            <a:spAutoFit/>
-          </a:bodyPr>
-          <a:lstStyle/>
-          <a:p>
-            <a:pPr algn="l">
-              <a:lnSpc>
-                <a:spcPts val="1092"/>
-              </a:lnSpc>
-              <a:spcAft>
-                <a:spcPts val="0"/>
-              </a:spcAft>
-            </a:pPr>
-            <a:r>
-              <a:rPr sz="1050" b="0" i="0">
-                <a:solidFill>
-                  <a:srgbClr val="141B2E"/>
-                </a:solidFill>
-                <a:latin typeface="Arial"/>
-              </a:rPr>
-              <a:t>«ок»</a:t>
-            </a:r>
-          </a:p>
-        </p:txBody>
-      </p:sp>
-      <p:sp>
-        <p:nvSpPr>
-          <p:cNvPr id="21" name="TextBox 20"/>
-          <p:cNvSpPr txBox="1"/>
-          <p:nvPr/>
-        </p:nvSpPr>
-        <p:spPr>
-          <a:xfrm>
-            <a:off x="4920814" y="4280456"/>
-            <a:ext cx="2863999" cy="239268"/>
-          </a:xfrm>
-          <a:prstGeom prst="rect">
-            <a:avLst/>
-          </a:prstGeom>
-          <a:noFill/>
-        </p:spPr>
-        <p:txBody>
-          <a:bodyPr wrap="square" lIns="0" rIns="0" tIns="0" bIns="0" anchor="ctr">
-            <a:spAutoFit/>
-          </a:bodyPr>
-          <a:lstStyle/>
-          <a:p>
-            <a:pPr algn="l">
-              <a:lnSpc>
-                <a:spcPts val="1092"/>
-              </a:lnSpc>
-              <a:spcAft>
-                <a:spcPts val="0"/>
-              </a:spcAft>
-            </a:pPr>
-            <a:r>
-              <a:rPr sz="1050" b="1" i="0">
-                <a:solidFill>
-                  <a:srgbClr val="141B2E"/>
-                </a:solidFill>
-                <a:latin typeface="Arial"/>
-              </a:rPr>
-              <a:t>другое</a:t>
-            </a:r>
-          </a:p>
-        </p:txBody>
-      </p:sp>
-      <p:sp>
-        <p:nvSpPr>
-          <p:cNvPr id="22" name="TextBox 21"/>
-          <p:cNvSpPr txBox="1"/>
-          <p:nvPr/>
-        </p:nvSpPr>
-        <p:spPr>
-          <a:xfrm>
-            <a:off x="7931117" y="4280456"/>
-            <a:ext cx="3480594" cy="239268"/>
-          </a:xfrm>
-          <a:prstGeom prst="rect">
-            <a:avLst/>
-          </a:prstGeom>
-          <a:noFill/>
-        </p:spPr>
-        <p:txBody>
-          <a:bodyPr wrap="square" lIns="0" rIns="0" tIns="0" bIns="0" anchor="ctr">
-            <a:spAutoFit/>
-          </a:bodyPr>
-          <a:lstStyle/>
-          <a:p>
-            <a:pPr algn="l">
-              <a:lnSpc>
-                <a:spcPts val="1092"/>
-              </a:lnSpc>
-              <a:spcAft>
-                <a:spcPts val="0"/>
-              </a:spcAft>
-            </a:pPr>
-            <a:r>
-              <a:rPr sz="1050" b="0" i="0">
-                <a:solidFill>
-                  <a:srgbClr val="141B2E"/>
-                </a:solidFill>
-                <a:latin typeface="Arial"/>
-              </a:rPr>
-              <a:t>—</a:t>
-            </a:r>
-          </a:p>
-        </p:txBody>
-      </p:sp>
-      <p:sp>
-        <p:nvSpPr>
-          <p:cNvPr id="23" name="Rounded Rectangle 22"/>
+      <p:sp>
+        <p:nvSpPr>
+          <p:cNvPr id="19" name="Rounded Rectangle 18"/>
           <p:cNvSpPr/>
           <p:nvPr/>
         </p:nvSpPr>
         <p:spPr>
           <a:xfrm>
-            <a:off x="502920" y="4812332"/>
-            <a:ext cx="82296" cy="479043"/>
-          </a:xfrm>
-          <a:prstGeom prst="roundRect">
-            <a:avLst>
-              <a:gd name="adj" fmla="val 50000"/>
-            </a:avLst>
-          </a:prstGeom>
-          <a:solidFill>
-            <a:srgbClr val="F0AB00"/>
-          </a:solidFill>
-          <a:ln>
-            <a:noFill/>
-          </a:ln>
-          <a:effectLst/>
-        </p:spPr>
-        <p:style>
-          <a:lnRef idx="1">
-            <a:schemeClr val="accent1"/>
-          </a:lnRef>
-          <a:fillRef idx="3">
-            <a:schemeClr val="accent1"/>
-          </a:fillRef>
-          <a:effectRef idx="2">
-            <a:schemeClr val="accent1"/>
-          </a:effectRef>
-          <a:fontRef idx="minor">
-            <a:schemeClr val="lt1"/>
-          </a:fontRef>
-        </p:style>
-        <p:txBody>
-          <a:bodyPr rtlCol="0" anchor="ctr"/>
-          <a:lstStyle/>
-          <a:p>
-            <a:pPr algn="ctr"/>
-          </a:p>
-        </p:txBody>
-      </p:sp>
-      <p:sp>
-        <p:nvSpPr>
-          <p:cNvPr id="24" name="TextBox 23"/>
-          <p:cNvSpPr txBox="1"/>
-          <p:nvPr/>
-        </p:nvSpPr>
-        <p:spPr>
-          <a:xfrm>
-            <a:off x="859536" y="4940348"/>
-            <a:ext cx="10643616" cy="223011"/>
-          </a:xfrm>
-          <a:prstGeom prst="rect">
-            <a:avLst/>
-          </a:prstGeom>
-          <a:noFill/>
-        </p:spPr>
-        <p:txBody>
-          <a:bodyPr wrap="square" lIns="0" rIns="0" tIns="0" bIns="0" anchor="ctr">
-            <a:spAutoFit/>
-          </a:bodyPr>
-          <a:lstStyle/>
-          <a:p>
-            <a:pPr algn="l">
-              <a:lnSpc>
-                <a:spcPts val="1612"/>
-              </a:lnSpc>
-              <a:spcAft>
-                <a:spcPts val="300"/>
-              </a:spcAft>
-            </a:pPr>
-            <a:r>
-              <a:rPr sz="1300" b="1" i="0">
-                <a:solidFill>
-                  <a:srgbClr val="141B2E"/>
-                </a:solidFill>
-                <a:latin typeface="Arial"/>
-              </a:rPr>
-              <a:t>Меняем </a:t>
-            </a:r>
-            <a:r>
-              <a:rPr sz="1300" b="1" i="0">
-                <a:solidFill>
-                  <a:srgbClr val="141B2E"/>
-                </a:solidFill>
-                <a:latin typeface="Arial"/>
-              </a:rPr>
-              <a:t>два узла из шести</a:t>
-            </a:r>
-            <a:r>
-              <a:rPr sz="1300" b="1" i="0">
-                <a:solidFill>
-                  <a:srgbClr val="141B2E"/>
-                </a:solidFill>
-                <a:latin typeface="Arial"/>
-              </a:rPr>
-              <a:t>: в схеме извлечения — ещё поле, в сверке — ещё столбец. Остальные четыре не трогаем.</a:t>
-            </a:r>
-          </a:p>
-        </p:txBody>
-      </p:sp>
-      <p:sp>
-        <p:nvSpPr>
-          <p:cNvPr id="25" name="Rounded Rectangle 24"/>
-          <p:cNvSpPr/>
-          <p:nvPr/>
-        </p:nvSpPr>
-        <p:spPr>
-          <a:xfrm>
-            <a:off x="502920" y="5455968"/>
-            <a:ext cx="11183112" cy="780562"/>
+            <a:off x="502920" y="5468199"/>
+            <a:ext cx="11183112" cy="822960"/>
           </a:xfrm>
           <a:prstGeom prst="roundRect">
             <a:avLst>
@@ -19865,14 +19622,14 @@
       </p:sp>
       <p:sp>
         <p:nvSpPr>
-          <p:cNvPr id="26" name="TextBox 25"/>
-          <p:cNvSpPr txBox="1"/>
-          <p:nvPr/>
-        </p:nvSpPr>
-        <p:spPr>
-          <a:xfrm>
-            <a:off x="722376" y="5583984"/>
-            <a:ext cx="10634472" cy="524530"/>
+          <p:cNvPr id="20" name="TextBox 19"/>
+          <p:cNvSpPr txBox="1"/>
+          <p:nvPr/>
+        </p:nvSpPr>
+        <p:spPr>
+          <a:xfrm>
+            <a:off x="722376" y="5596215"/>
+            <a:ext cx="10634472" cy="566928"/>
           </a:xfrm>
           <a:prstGeom prst="rect">
             <a:avLst/>
@@ -19916,7 +19673,7 @@
       </p:sp>
       <p:sp>
         <p:nvSpPr>
-          <p:cNvPr id="27" name="TextBox 26"/>
+          <p:cNvPr id="21" name="TextBox 20"/>
           <p:cNvSpPr txBox="1"/>
           <p:nvPr/>
         </p:nvSpPr>
@@ -24130,7 +23887,7 @@
       </p:sp>
       <p:pic>
         <p:nvPicPr>
-          <p:cNvPr id="3" name="Picture 2" descr="k3-shema-dve-vetki.png"/>
+          <p:cNvPr id="3" name="Picture 2" descr="n8n-holst-vetka-otkaza.png"/>
           <p:cNvPicPr>
             <a:picLocks noChangeAspect="1"/>
           </p:cNvPicPr>
@@ -24144,8 +23901,8 @@
         </p:blipFill>
         <p:spPr>
           <a:xfrm>
-            <a:off x="773996" y="943356"/>
-            <a:ext cx="10640958" cy="3325299"/>
+            <a:off x="2037994" y="943356"/>
+            <a:ext cx="8112962" cy="3456827"/>
           </a:xfrm>
           <a:prstGeom prst="rect">
             <a:avLst/>
@@ -24160,8 +23917,8 @@
         </p:nvSpPr>
         <p:spPr>
           <a:xfrm>
-            <a:off x="502920" y="4433247"/>
-            <a:ext cx="11183112" cy="936244"/>
+            <a:off x="502920" y="4564775"/>
+            <a:ext cx="11183112" cy="865758"/>
           </a:xfrm>
           <a:prstGeom prst="roundRect">
             <a:avLst>
@@ -24208,8 +23965,8 @@
         </p:nvSpPr>
         <p:spPr>
           <a:xfrm>
-            <a:off x="685800" y="4616127"/>
-            <a:ext cx="4724804" cy="259587"/>
+            <a:off x="658368" y="4720223"/>
+            <a:ext cx="4698534" cy="274574"/>
           </a:xfrm>
           <a:prstGeom prst="rect">
             <a:avLst/>
@@ -24224,14 +23981,14 @@
           <a:p>
             <a:pPr algn="l">
               <a:lnSpc>
-                <a:spcPts val="1100"/>
-              </a:lnSpc>
-              <a:spcAft>
-                <a:spcPts val="0"/>
-              </a:spcAft>
-            </a:pPr>
-            <a:r>
-              <a:rPr sz="1000" b="1" i="0">
+                <a:spcPts val="1210"/>
+              </a:lnSpc>
+              <a:spcAft>
+                <a:spcPts val="0"/>
+              </a:spcAft>
+            </a:pPr>
+            <a:r>
+              <a:rPr sz="1100" b="1" i="0">
                 <a:solidFill>
                   <a:srgbClr val="6B7685"/>
                 </a:solidFill>
@@ -24250,8 +24007,8 @@
         </p:nvSpPr>
         <p:spPr>
           <a:xfrm>
-            <a:off x="5556908" y="4616127"/>
-            <a:ext cx="5799939" cy="259587"/>
+            <a:off x="5503206" y="4720223"/>
+            <a:ext cx="5881073" cy="274574"/>
           </a:xfrm>
           <a:prstGeom prst="rect">
             <a:avLst/>
@@ -24266,14 +24023,14 @@
           <a:p>
             <a:pPr algn="l">
               <a:lnSpc>
-                <a:spcPts val="1100"/>
-              </a:lnSpc>
-              <a:spcAft>
-                <a:spcPts val="0"/>
-              </a:spcAft>
-            </a:pPr>
-            <a:r>
-              <a:rPr sz="1000" b="1" i="0">
+                <a:spcPts val="1210"/>
+              </a:lnSpc>
+              <a:spcAft>
+                <a:spcPts val="0"/>
+              </a:spcAft>
+            </a:pPr>
+            <a:r>
+              <a:rPr sz="1100" b="1" i="0">
                 <a:solidFill>
                   <a:srgbClr val="6B7685"/>
                 </a:solidFill>
@@ -24292,8 +24049,8 @@
         </p:nvSpPr>
         <p:spPr>
           <a:xfrm>
-            <a:off x="685800" y="4875715"/>
-            <a:ext cx="4724804" cy="310896"/>
+            <a:off x="658368" y="4994797"/>
+            <a:ext cx="4698534" cy="280289"/>
           </a:xfrm>
           <a:prstGeom prst="rect">
             <a:avLst/>
@@ -24308,14 +24065,14 @@
           <a:p>
             <a:pPr algn="l">
               <a:lnSpc>
-                <a:spcPts val="1150"/>
-              </a:lnSpc>
-              <a:spcAft>
-                <a:spcPts val="0"/>
-              </a:spcAft>
-            </a:pPr>
-            <a:r>
-              <a:rPr sz="1000" b="0" i="0">
+                <a:spcPts val="1199"/>
+              </a:lnSpc>
+              <a:spcAft>
+                <a:spcPts val="0"/>
+              </a:spcAft>
+            </a:pPr>
+            <a:r>
+              <a:rPr sz="1100" b="0" i="0">
                 <a:solidFill>
                   <a:srgbClr val="141B2E"/>
                 </a:solidFill>
@@ -24334,8 +24091,8 @@
         </p:nvSpPr>
         <p:spPr>
           <a:xfrm>
-            <a:off x="5556908" y="4875715"/>
-            <a:ext cx="5799939" cy="310896"/>
+            <a:off x="5503206" y="4994797"/>
+            <a:ext cx="5881073" cy="280289"/>
           </a:xfrm>
           <a:prstGeom prst="rect">
             <a:avLst/>
@@ -24350,14 +24107,14 @@
           <a:p>
             <a:pPr algn="l">
               <a:lnSpc>
-                <a:spcPts val="1150"/>
-              </a:lnSpc>
-              <a:spcAft>
-                <a:spcPts val="0"/>
-              </a:spcAft>
-            </a:pPr>
-            <a:r>
-              <a:rPr sz="1000" b="0" i="0">
+                <a:spcPts val="1199"/>
+              </a:lnSpc>
+              <a:spcAft>
+                <a:spcPts val="0"/>
+              </a:spcAft>
+            </a:pPr>
+            <a:r>
+              <a:rPr sz="1100" b="0" i="0">
                 <a:solidFill>
                   <a:srgbClr val="141B2E"/>
                 </a:solidFill>
@@ -24366,7 +24123,7 @@
               <a:t>3 попытки, пауза 2 с → </a:t>
             </a:r>
             <a:r>
-              <a:rPr sz="1000" b="0" i="0">
+              <a:rPr sz="1100" b="0" i="0">
                 <a:solidFill>
                   <a:srgbClr val="141B2E"/>
                 </a:solidFill>
@@ -24375,7 +24132,7 @@
               <a:t>Continue</a:t>
             </a:r>
             <a:r>
-              <a:rPr sz="1000" b="0" i="0">
+              <a:rPr sz="1100" b="0" i="0">
                 <a:solidFill>
                   <a:srgbClr val="141B2E"/>
                 </a:solidFill>
@@ -24384,7 +24141,7 @@
               <a:t> </a:t>
             </a:r>
             <a:r>
-              <a:rPr sz="1000" b="0" i="0">
+              <a:rPr sz="1100" b="0" i="0">
                 <a:solidFill>
                   <a:srgbClr val="141B2E"/>
                 </a:solidFill>
@@ -24393,7 +24150,7 @@
               <a:t>(using</a:t>
             </a:r>
             <a:r>
-              <a:rPr sz="1000" b="0" i="0">
+              <a:rPr sz="1100" b="0" i="0">
                 <a:solidFill>
                   <a:srgbClr val="141B2E"/>
                 </a:solidFill>
@@ -24402,7 +24159,7 @@
               <a:t> </a:t>
             </a:r>
             <a:r>
-              <a:rPr sz="1000" b="0" i="0">
+              <a:rPr sz="1100" b="0" i="0">
                 <a:solidFill>
                   <a:srgbClr val="141B2E"/>
                 </a:solidFill>
@@ -24411,7 +24168,7 @@
               <a:t>error</a:t>
             </a:r>
             <a:r>
-              <a:rPr sz="1000" b="0" i="0">
+              <a:rPr sz="1100" b="0" i="0">
                 <a:solidFill>
                   <a:srgbClr val="141B2E"/>
                 </a:solidFill>
@@ -24420,7 +24177,7 @@
               <a:t> </a:t>
             </a:r>
             <a:r>
-              <a:rPr sz="1000" b="0" i="0">
+              <a:rPr sz="1100" b="0" i="0">
                 <a:solidFill>
                   <a:srgbClr val="141B2E"/>
                 </a:solidFill>
@@ -24439,8 +24196,8 @@
         </p:nvSpPr>
         <p:spPr>
           <a:xfrm>
-            <a:off x="502920" y="5534083"/>
-            <a:ext cx="11183112" cy="783063"/>
+            <a:off x="502920" y="5595126"/>
+            <a:ext cx="11183112" cy="723522"/>
           </a:xfrm>
           <a:prstGeom prst="roundRect">
             <a:avLst>
@@ -24487,8 +24244,8 @@
         </p:nvSpPr>
         <p:spPr>
           <a:xfrm>
-            <a:off x="722376" y="5662099"/>
-            <a:ext cx="10634472" cy="527031"/>
+            <a:off x="722376" y="5723142"/>
+            <a:ext cx="10634472" cy="467490"/>
           </a:xfrm>
           <a:prstGeom prst="rect">
             <a:avLst/>
@@ -24503,14 +24260,14 @@
           <a:p>
             <a:pPr algn="ctr">
               <a:lnSpc>
-                <a:spcPts val="1891"/>
+                <a:spcPts val="1647"/>
               </a:lnSpc>
               <a:spcAft>
                 <a:spcPts val="300"/>
               </a:spcAft>
             </a:pPr>
             <a:r>
-              <a:rPr sz="1550" b="1" i="0">
+              <a:rPr sz="1350" b="1" i="0">
                 <a:solidFill>
                   <a:srgbClr val="141B2E"/>
                 </a:solidFill>
@@ -24519,7 +24276,7 @@
               <a:t>Предскажите.</a:t>
             </a:r>
             <a:r>
-              <a:rPr sz="1550" b="1" i="0">
+              <a:rPr sz="1350" b="1" i="0">
                 <a:solidFill>
                   <a:srgbClr val="141B2E"/>
                 </a:solidFill>
@@ -33682,20 +33439,44 @@
           </a:p>
         </p:txBody>
       </p:sp>
-      <p:sp>
-        <p:nvSpPr>
-          <p:cNvPr id="3" name="Rounded Rectangle 2"/>
+      <p:pic>
+        <p:nvPicPr>
+          <p:cNvPr id="3" name="Picture 2" descr="n8n-holst-stage1.png"/>
+          <p:cNvPicPr>
+            <a:picLocks noChangeAspect="1"/>
+          </p:cNvPicPr>
+          <p:nvPr/>
+        </p:nvPicPr>
+        <p:blipFill>
+          <a:blip r:embed="rId2"/>
+          <a:stretch>
+            <a:fillRect/>
+          </a:stretch>
+        </p:blipFill>
+        <p:spPr>
+          <a:xfrm>
+            <a:off x="1662664" y="943356"/>
+            <a:ext cx="8863623" cy="2834924"/>
+          </a:xfrm>
+          <a:prstGeom prst="rect">
+            <a:avLst/>
+          </a:prstGeom>
+        </p:spPr>
+      </p:pic>
+      <p:sp>
+        <p:nvSpPr>
+          <p:cNvPr id="4" name="Rounded Rectangle 3"/>
           <p:cNvSpPr/>
           <p:nvPr/>
         </p:nvSpPr>
         <p:spPr>
           <a:xfrm>
-            <a:off x="502920" y="943356"/>
-            <a:ext cx="11183112" cy="3365500"/>
+            <a:off x="502920" y="3942872"/>
+            <a:ext cx="11183112" cy="1586674"/>
           </a:xfrm>
           <a:prstGeom prst="roundRect">
             <a:avLst>
-              <a:gd name="adj" fmla="val 9056"/>
+              <a:gd name="adj" fmla="val 19209"/>
             </a:avLst>
           </a:prstGeom>
           <a:solidFill>
@@ -33732,14 +33513,14 @@
       </p:sp>
       <p:sp>
         <p:nvSpPr>
-          <p:cNvPr id="4" name="TextBox 3"/>
-          <p:cNvSpPr txBox="1"/>
-          <p:nvPr/>
-        </p:nvSpPr>
-        <p:spPr>
-          <a:xfrm>
-            <a:off x="685800" y="1126236"/>
-            <a:ext cx="5064861" cy="259587"/>
+          <p:cNvPr id="5" name="TextBox 4"/>
+          <p:cNvSpPr txBox="1"/>
+          <p:nvPr/>
+        </p:nvSpPr>
+        <p:spPr>
+          <a:xfrm>
+            <a:off x="685800" y="4125752"/>
+            <a:ext cx="3756405" cy="267081"/>
           </a:xfrm>
           <a:prstGeom prst="rect">
             <a:avLst/>
@@ -33754,14 +33535,14 @@
           <a:p>
             <a:pPr algn="l">
               <a:lnSpc>
-                <a:spcPts val="1100"/>
-              </a:lnSpc>
-              <a:spcAft>
-                <a:spcPts val="0"/>
-              </a:spcAft>
-            </a:pPr>
-            <a:r>
-              <a:rPr sz="1000" b="1" i="0">
+                <a:spcPts val="1155"/>
+              </a:lnSpc>
+              <a:spcAft>
+                <a:spcPts val="0"/>
+              </a:spcAft>
+            </a:pPr>
+            <a:r>
+              <a:rPr sz="1050" b="1" i="0">
                 <a:solidFill>
                   <a:srgbClr val="6B7685"/>
                 </a:solidFill>
@@ -33774,14 +33555,14 @@
       </p:sp>
       <p:sp>
         <p:nvSpPr>
-          <p:cNvPr id="5" name="TextBox 4"/>
-          <p:cNvSpPr txBox="1"/>
-          <p:nvPr/>
-        </p:nvSpPr>
-        <p:spPr>
-          <a:xfrm>
-            <a:off x="5896965" y="1126236"/>
-            <a:ext cx="5459882" cy="259587"/>
+          <p:cNvPr id="6" name="TextBox 5"/>
+          <p:cNvSpPr txBox="1"/>
+          <p:nvPr/>
+        </p:nvSpPr>
+        <p:spPr>
+          <a:xfrm>
+            <a:off x="4588509" y="4125752"/>
+            <a:ext cx="6768338" cy="267081"/>
           </a:xfrm>
           <a:prstGeom prst="rect">
             <a:avLst/>
@@ -33796,14 +33577,14 @@
           <a:p>
             <a:pPr algn="l">
               <a:lnSpc>
-                <a:spcPts val="1100"/>
-              </a:lnSpc>
-              <a:spcAft>
-                <a:spcPts val="0"/>
-              </a:spcAft>
-            </a:pPr>
-            <a:r>
-              <a:rPr sz="1000" b="1" i="0">
+                <a:spcPts val="1155"/>
+              </a:lnSpc>
+              <a:spcAft>
+                <a:spcPts val="0"/>
+              </a:spcAft>
+            </a:pPr>
+            <a:r>
+              <a:rPr sz="1050" b="1" i="0">
                 <a:solidFill>
                   <a:srgbClr val="6B7685"/>
                 </a:solidFill>
@@ -33816,14 +33597,14 @@
       </p:sp>
       <p:sp>
         <p:nvSpPr>
-          <p:cNvPr id="6" name="TextBox 5"/>
-          <p:cNvSpPr txBox="1"/>
-          <p:nvPr/>
-        </p:nvSpPr>
-        <p:spPr>
-          <a:xfrm>
-            <a:off x="685800" y="1385824"/>
-            <a:ext cx="5064861" cy="456692"/>
+          <p:cNvPr id="7" name="TextBox 6"/>
+          <p:cNvSpPr txBox="1"/>
+          <p:nvPr/>
+        </p:nvSpPr>
+        <p:spPr>
+          <a:xfrm>
+            <a:off x="685800" y="4392833"/>
+            <a:ext cx="3756405" cy="317944"/>
           </a:xfrm>
           <a:prstGeom prst="rect">
             <a:avLst/>
@@ -33838,43 +33619,52 @@
           <a:p>
             <a:pPr algn="l">
               <a:lnSpc>
-                <a:spcPts val="1150"/>
-              </a:lnSpc>
-              <a:spcAft>
-                <a:spcPts val="0"/>
-              </a:spcAft>
-            </a:pPr>
-            <a:r>
-              <a:rPr sz="1000" b="1" i="0">
-                <a:solidFill>
-                  <a:srgbClr val="141B2E"/>
-                </a:solidFill>
-                <a:latin typeface="Arial"/>
-              </a:rPr>
-              <a:t>холст</a:t>
-            </a:r>
-            <a:r>
-              <a:rPr sz="1000" b="0" i="0">
-                <a:solidFill>
-                  <a:srgbClr val="141B2E"/>
-                </a:solidFill>
-                <a:latin typeface="Arial"/>
-              </a:rPr>
-              <a:t> — поле, на котором процесс рисуется мышкой</a:t>
-            </a:r>
-          </a:p>
-        </p:txBody>
-      </p:sp>
-      <p:sp>
-        <p:nvSpPr>
-          <p:cNvPr id="7" name="TextBox 6"/>
-          <p:cNvSpPr txBox="1"/>
-          <p:nvPr/>
-        </p:nvSpPr>
-        <p:spPr>
-          <a:xfrm>
-            <a:off x="5896965" y="1385824"/>
-            <a:ext cx="5459882" cy="456692"/>
+                <a:spcPts val="1207"/>
+              </a:lnSpc>
+              <a:spcAft>
+                <a:spcPts val="0"/>
+              </a:spcAft>
+            </a:pPr>
+            <a:r>
+              <a:rPr sz="1050" b="1" i="0">
+                <a:solidFill>
+                  <a:srgbClr val="141B2E"/>
+                </a:solidFill>
+                <a:latin typeface="Arial"/>
+              </a:rPr>
+              <a:t>учётные данные</a:t>
+            </a:r>
+            <a:r>
+              <a:rPr sz="1050" b="0" i="0">
+                <a:solidFill>
+                  <a:srgbClr val="141B2E"/>
+                </a:solidFill>
+                <a:latin typeface="Arial"/>
+              </a:rPr>
+              <a:t> живут </a:t>
+            </a:r>
+            <a:r>
+              <a:rPr sz="1050" b="1" i="0">
+                <a:solidFill>
+                  <a:srgbClr val="141B2E"/>
+                </a:solidFill>
+                <a:latin typeface="Arial"/>
+              </a:rPr>
+              <a:t>отдельно от сценария</a:t>
+            </a:r>
+          </a:p>
+        </p:txBody>
+      </p:sp>
+      <p:sp>
+        <p:nvSpPr>
+          <p:cNvPr id="8" name="TextBox 7"/>
+          <p:cNvSpPr txBox="1"/>
+          <p:nvPr/>
+        </p:nvSpPr>
+        <p:spPr>
+          <a:xfrm>
+            <a:off x="4588509" y="4392833"/>
+            <a:ext cx="6768338" cy="317944"/>
           </a:xfrm>
           <a:prstGeom prst="rect">
             <a:avLst/>
@@ -33889,33 +33679,33 @@
           <a:p>
             <a:pPr algn="l">
               <a:lnSpc>
-                <a:spcPts val="1150"/>
-              </a:lnSpc>
-              <a:spcAft>
-                <a:spcPts val="0"/>
-              </a:spcAft>
-            </a:pPr>
-            <a:r>
-              <a:rPr sz="1000" b="0" i="0">
-                <a:solidFill>
-                  <a:srgbClr val="141B2E"/>
-                </a:solidFill>
-                <a:latin typeface="Arial"/>
-              </a:rPr>
-              <a:t>процесс читается как схема, на него можно показать пальцем коллеге-непрограммисту</a:t>
+                <a:spcPts val="1207"/>
+              </a:lnSpc>
+              <a:spcAft>
+                <a:spcPts val="0"/>
+              </a:spcAft>
+            </a:pPr>
+            <a:r>
+              <a:rPr sz="1050" b="0" i="0">
+                <a:solidFill>
+                  <a:srgbClr val="141B2E"/>
+                </a:solidFill>
+                <a:latin typeface="Arial"/>
+              </a:rPr>
+              <a:t>в файле сценария ключей нет — его можно отдать коллеге; один ключ на все процессы</a:t>
             </a:r>
           </a:p>
         </p:txBody>
       </p:sp>
       <p:cxnSp>
         <p:nvCxnSpPr>
-          <p:cNvPr id="8" name="Connector 7"/>
+          <p:cNvPr id="9" name="Connector 8"/>
           <p:cNvCxnSpPr/>
           <p:nvPr/>
         </p:nvCxnSpPr>
         <p:spPr>
           <a:xfrm>
-            <a:off x="685800" y="1842516"/>
+            <a:off x="685800" y="4710777"/>
             <a:ext cx="10817352" cy="0"/>
           </a:xfrm>
           <a:prstGeom prst="line">
@@ -33944,14 +33734,14 @@
       </p:cxnSp>
       <p:sp>
         <p:nvSpPr>
-          <p:cNvPr id="9" name="TextBox 8"/>
-          <p:cNvSpPr txBox="1"/>
-          <p:nvPr/>
-        </p:nvSpPr>
-        <p:spPr>
-          <a:xfrm>
-            <a:off x="685800" y="1842516"/>
-            <a:ext cx="5064861" cy="456692"/>
+          <p:cNvPr id="10" name="TextBox 9"/>
+          <p:cNvSpPr txBox="1"/>
+          <p:nvPr/>
+        </p:nvSpPr>
+        <p:spPr>
+          <a:xfrm>
+            <a:off x="685800" y="4710777"/>
+            <a:ext cx="3756405" cy="317944"/>
           </a:xfrm>
           <a:prstGeom prst="rect">
             <a:avLst/>
@@ -33966,43 +33756,34 @@
           <a:p>
             <a:pPr algn="l">
               <a:lnSpc>
-                <a:spcPts val="1150"/>
-              </a:lnSpc>
-              <a:spcAft>
-                <a:spcPts val="0"/>
-              </a:spcAft>
-            </a:pPr>
-            <a:r>
-              <a:rPr sz="1000" b="1" i="0">
-                <a:solidFill>
-                  <a:srgbClr val="141B2E"/>
-                </a:solidFill>
-                <a:latin typeface="Arial"/>
-              </a:rPr>
-              <a:t>узел</a:t>
-            </a:r>
-            <a:r>
-              <a:rPr sz="1000" b="0" i="0">
-                <a:solidFill>
-                  <a:srgbClr val="141B2E"/>
-                </a:solidFill>
-                <a:latin typeface="Arial"/>
-              </a:rPr>
-              <a:t> — один шаг; у каждого своя карточка с параметрами</a:t>
-            </a:r>
-          </a:p>
-        </p:txBody>
-      </p:sp>
-      <p:sp>
-        <p:nvSpPr>
-          <p:cNvPr id="10" name="TextBox 9"/>
-          <p:cNvSpPr txBox="1"/>
-          <p:nvPr/>
-        </p:nvSpPr>
-        <p:spPr>
-          <a:xfrm>
-            <a:off x="5896965" y="1842516"/>
-            <a:ext cx="5459882" cy="456692"/>
+                <a:spcPts val="1207"/>
+              </a:lnSpc>
+              <a:spcAft>
+                <a:spcPts val="0"/>
+              </a:spcAft>
+            </a:pPr>
+            <a:r>
+              <a:rPr sz="1050" b="1" i="0">
+                <a:solidFill>
+                  <a:srgbClr val="141B2E"/>
+                </a:solidFill>
+                <a:latin typeface="Arial"/>
+              </a:rPr>
+              <a:t>более 400 интеграций из коробки</a:t>
+            </a:r>
+          </a:p>
+        </p:txBody>
+      </p:sp>
+      <p:sp>
+        <p:nvSpPr>
+          <p:cNvPr id="11" name="TextBox 10"/>
+          <p:cNvSpPr txBox="1"/>
+          <p:nvPr/>
+        </p:nvSpPr>
+        <p:spPr>
+          <a:xfrm>
+            <a:off x="4588509" y="4710777"/>
+            <a:ext cx="6768338" cy="317944"/>
           </a:xfrm>
           <a:prstGeom prst="rect">
             <a:avLst/>
@@ -34017,33 +33798,33 @@
           <a:p>
             <a:pPr algn="l">
               <a:lnSpc>
-                <a:spcPts val="1150"/>
-              </a:lnSpc>
-              <a:spcAft>
-                <a:spcPts val="0"/>
-              </a:spcAft>
-            </a:pPr>
-            <a:r>
-              <a:rPr sz="1000" b="0" i="0">
-                <a:solidFill>
-                  <a:srgbClr val="141B2E"/>
-                </a:solidFill>
-                <a:latin typeface="Arial"/>
-              </a:rPr>
-              <a:t>добавить шаг = поставить узел и соединить. Между правкой и проверкой нет ни сборки, ни развёртывания</a:t>
+                <a:spcPts val="1207"/>
+              </a:lnSpc>
+              <a:spcAft>
+                <a:spcPts val="0"/>
+              </a:spcAft>
+            </a:pPr>
+            <a:r>
+              <a:rPr sz="1050" b="0" i="0">
+                <a:solidFill>
+                  <a:srgbClr val="141B2E"/>
+                </a:solidFill>
+                <a:latin typeface="Arial"/>
+              </a:rPr>
+              <a:t>«взять из Таблиц и положить в Телеграм» — два узла, а не два дня с чужими API</a:t>
             </a:r>
           </a:p>
         </p:txBody>
       </p:sp>
       <p:cxnSp>
         <p:nvCxnSpPr>
-          <p:cNvPr id="11" name="Connector 10"/>
+          <p:cNvPr id="12" name="Connector 11"/>
           <p:cNvCxnSpPr/>
           <p:nvPr/>
         </p:nvCxnSpPr>
         <p:spPr>
           <a:xfrm>
-            <a:off x="685800" y="2299208"/>
+            <a:off x="685800" y="5028722"/>
             <a:ext cx="10817352" cy="0"/>
           </a:xfrm>
           <a:prstGeom prst="line">
@@ -34072,14 +33853,14 @@
       </p:cxnSp>
       <p:sp>
         <p:nvSpPr>
-          <p:cNvPr id="12" name="TextBox 11"/>
-          <p:cNvSpPr txBox="1"/>
-          <p:nvPr/>
-        </p:nvSpPr>
-        <p:spPr>
-          <a:xfrm>
-            <a:off x="685800" y="2299208"/>
-            <a:ext cx="5064861" cy="456692"/>
+          <p:cNvPr id="13" name="TextBox 12"/>
+          <p:cNvSpPr txBox="1"/>
+          <p:nvPr/>
+        </p:nvSpPr>
+        <p:spPr>
+          <a:xfrm>
+            <a:off x="685800" y="5028722"/>
+            <a:ext cx="3756405" cy="317944"/>
           </a:xfrm>
           <a:prstGeom prst="rect">
             <a:avLst/>
@@ -34094,61 +33875,34 @@
           <a:p>
             <a:pPr algn="l">
               <a:lnSpc>
-                <a:spcPts val="1150"/>
-              </a:lnSpc>
-              <a:spcAft>
-                <a:spcPts val="0"/>
-              </a:spcAft>
-            </a:pPr>
-            <a:r>
-              <a:rPr sz="1000" b="1" i="0">
-                <a:solidFill>
-                  <a:srgbClr val="141B2E"/>
-                </a:solidFill>
-                <a:latin typeface="Arial"/>
-              </a:rPr>
-              <a:t>учётные данные</a:t>
-            </a:r>
-            <a:r>
-              <a:rPr sz="1000" b="0" i="0">
-                <a:solidFill>
-                  <a:srgbClr val="141B2E"/>
-                </a:solidFill>
-                <a:latin typeface="Arial"/>
-              </a:rPr>
-              <a:t> — ключи и доступы живут </a:t>
-            </a:r>
-            <a:r>
-              <a:rPr sz="1000" b="1" i="0">
-                <a:solidFill>
-                  <a:srgbClr val="141B2E"/>
-                </a:solidFill>
-                <a:latin typeface="Arial"/>
-              </a:rPr>
-              <a:t>отдельно от сценария</a:t>
-            </a:r>
-            <a:r>
-              <a:rPr sz="1000" b="0" i="0">
-                <a:solidFill>
-                  <a:srgbClr val="141B2E"/>
-                </a:solidFill>
-                <a:latin typeface="Arial"/>
-              </a:rPr>
-              <a:t>, заводятся один раз и подключаются к узлу по имени</a:t>
-            </a:r>
-          </a:p>
-        </p:txBody>
-      </p:sp>
-      <p:sp>
-        <p:nvSpPr>
-          <p:cNvPr id="13" name="TextBox 12"/>
-          <p:cNvSpPr txBox="1"/>
-          <p:nvPr/>
-        </p:nvSpPr>
-        <p:spPr>
-          <a:xfrm>
-            <a:off x="5896965" y="2299208"/>
-            <a:ext cx="5459882" cy="456692"/>
+                <a:spcPts val="1207"/>
+              </a:lnSpc>
+              <a:spcAft>
+                <a:spcPts val="0"/>
+              </a:spcAft>
+            </a:pPr>
+            <a:r>
+              <a:rPr sz="1050" b="1" i="0">
+                <a:solidFill>
+                  <a:srgbClr val="141B2E"/>
+                </a:solidFill>
+                <a:latin typeface="Arial"/>
+              </a:rPr>
+              <a:t>форма и чат встроены</a:t>
+            </a:r>
+          </a:p>
+        </p:txBody>
+      </p:sp>
+      <p:sp>
+        <p:nvSpPr>
+          <p:cNvPr id="14" name="TextBox 13"/>
+          <p:cNvSpPr txBox="1"/>
+          <p:nvPr/>
+        </p:nvSpPr>
+        <p:spPr>
+          <a:xfrm>
+            <a:off x="4588509" y="5028722"/>
+            <a:ext cx="6768338" cy="317944"/>
           </a:xfrm>
           <a:prstGeom prst="rect">
             <a:avLst/>
@@ -34163,454 +33917,34 @@
           <a:p>
             <a:pPr algn="l">
               <a:lnSpc>
-                <a:spcPts val="1150"/>
-              </a:lnSpc>
-              <a:spcAft>
-                <a:spcPts val="0"/>
-              </a:spcAft>
-            </a:pPr>
-            <a:r>
-              <a:rPr sz="1000" b="0" i="0">
-                <a:solidFill>
-                  <a:srgbClr val="141B2E"/>
-                </a:solidFill>
-                <a:latin typeface="Arial"/>
-              </a:rPr>
-              <a:t>в файле сценария ключей нет: его можно отдать коллеге. И один ключ переиспользуется во всех процессах</a:t>
-            </a:r>
-          </a:p>
-        </p:txBody>
-      </p:sp>
-      <p:cxnSp>
-        <p:nvCxnSpPr>
-          <p:cNvPr id="14" name="Connector 13"/>
-          <p:cNvCxnSpPr/>
-          <p:nvPr/>
-        </p:nvCxnSpPr>
-        <p:spPr>
-          <a:xfrm>
-            <a:off x="685800" y="2755900"/>
-            <a:ext cx="10817352" cy="0"/>
-          </a:xfrm>
-          <a:prstGeom prst="line">
-            <a:avLst/>
-          </a:prstGeom>
-          <a:ln w="9525">
-            <a:solidFill>
-              <a:srgbClr val="E5EAF0"/>
-            </a:solidFill>
-          </a:ln>
-        </p:spPr>
-        <p:style>
-          <a:lnRef idx="2">
-            <a:schemeClr val="accent1"/>
-          </a:lnRef>
-          <a:fillRef idx="0">
-            <a:schemeClr val="accent1"/>
-          </a:fillRef>
-          <a:effectRef idx="1">
-            <a:schemeClr val="accent1"/>
-          </a:effectRef>
-          <a:fontRef idx="minor">
-            <a:schemeClr val="tx1"/>
-          </a:fontRef>
-        </p:style>
-      </p:cxnSp>
-      <p:sp>
-        <p:nvSpPr>
-          <p:cNvPr id="15" name="TextBox 14"/>
-          <p:cNvSpPr txBox="1"/>
-          <p:nvPr/>
-        </p:nvSpPr>
-        <p:spPr>
-          <a:xfrm>
-            <a:off x="685800" y="2755900"/>
-            <a:ext cx="5064861" cy="456692"/>
-          </a:xfrm>
-          <a:prstGeom prst="rect">
-            <a:avLst/>
-          </a:prstGeom>
-          <a:noFill/>
-        </p:spPr>
-        <p:txBody>
-          <a:bodyPr wrap="square" lIns="0" rIns="0" tIns="0" bIns="0" anchor="ctr">
-            <a:spAutoFit/>
-          </a:bodyPr>
-          <a:lstStyle/>
-          <a:p>
-            <a:pPr algn="l">
-              <a:lnSpc>
-                <a:spcPts val="1150"/>
-              </a:lnSpc>
-              <a:spcAft>
-                <a:spcPts val="0"/>
-              </a:spcAft>
-            </a:pPr>
-            <a:r>
-              <a:rPr sz="1000" b="1" i="0">
-                <a:solidFill>
-                  <a:srgbClr val="141B2E"/>
-                </a:solidFill>
-                <a:latin typeface="Arial"/>
-              </a:rPr>
-              <a:t>готовые интеграции</a:t>
-            </a:r>
-            <a:r>
-              <a:rPr sz="1000" b="0" i="0">
-                <a:solidFill>
-                  <a:srgbClr val="141B2E"/>
-                </a:solidFill>
-                <a:latin typeface="Arial"/>
-              </a:rPr>
-              <a:t> — </a:t>
-            </a:r>
-            <a:r>
-              <a:rPr sz="1000" b="1" i="0">
-                <a:solidFill>
-                  <a:srgbClr val="141B2E"/>
-                </a:solidFill>
-                <a:latin typeface="Arial"/>
-              </a:rPr>
-              <a:t>более 400 сервисов из коробки</a:t>
-            </a:r>
-            <a:r>
-              <a:rPr sz="1000" b="0" i="0">
-                <a:solidFill>
-                  <a:srgbClr val="141B2E"/>
-                </a:solidFill>
-                <a:latin typeface="Arial"/>
-              </a:rPr>
-              <a:t>: почта, таблицы, мессенджеры, CRM, базы, облака</a:t>
-            </a:r>
-          </a:p>
-        </p:txBody>
-      </p:sp>
-      <p:sp>
-        <p:nvSpPr>
-          <p:cNvPr id="16" name="TextBox 15"/>
-          <p:cNvSpPr txBox="1"/>
-          <p:nvPr/>
-        </p:nvSpPr>
-        <p:spPr>
-          <a:xfrm>
-            <a:off x="5896965" y="2755900"/>
-            <a:ext cx="5459882" cy="456692"/>
-          </a:xfrm>
-          <a:prstGeom prst="rect">
-            <a:avLst/>
-          </a:prstGeom>
-          <a:noFill/>
-        </p:spPr>
-        <p:txBody>
-          <a:bodyPr wrap="square" lIns="0" rIns="0" tIns="0" bIns="0" anchor="ctr">
-            <a:spAutoFit/>
-          </a:bodyPr>
-          <a:lstStyle/>
-          <a:p>
-            <a:pPr algn="l">
-              <a:lnSpc>
-                <a:spcPts val="1150"/>
-              </a:lnSpc>
-              <a:spcAft>
-                <a:spcPts val="0"/>
-              </a:spcAft>
-            </a:pPr>
-            <a:r>
-              <a:rPr sz="1000" b="0" i="0">
-                <a:solidFill>
-                  <a:srgbClr val="141B2E"/>
-                </a:solidFill>
-                <a:latin typeface="Arial"/>
-              </a:rPr>
-              <a:t>«взять из Google Таблиц и положить в Телеграм» — это два узла, а не два дня с чужими API</a:t>
-            </a:r>
-          </a:p>
-        </p:txBody>
-      </p:sp>
-      <p:cxnSp>
-        <p:nvCxnSpPr>
-          <p:cNvPr id="17" name="Connector 16"/>
-          <p:cNvCxnSpPr/>
-          <p:nvPr/>
-        </p:nvCxnSpPr>
-        <p:spPr>
-          <a:xfrm>
-            <a:off x="685800" y="3212592"/>
-            <a:ext cx="10817352" cy="0"/>
-          </a:xfrm>
-          <a:prstGeom prst="line">
-            <a:avLst/>
-          </a:prstGeom>
-          <a:ln w="9525">
-            <a:solidFill>
-              <a:srgbClr val="E5EAF0"/>
-            </a:solidFill>
-          </a:ln>
-        </p:spPr>
-        <p:style>
-          <a:lnRef idx="2">
-            <a:schemeClr val="accent1"/>
-          </a:lnRef>
-          <a:fillRef idx="0">
-            <a:schemeClr val="accent1"/>
-          </a:fillRef>
-          <a:effectRef idx="1">
-            <a:schemeClr val="accent1"/>
-          </a:effectRef>
-          <a:fontRef idx="minor">
-            <a:schemeClr val="tx1"/>
-          </a:fontRef>
-        </p:style>
-      </p:cxnSp>
-      <p:sp>
-        <p:nvSpPr>
-          <p:cNvPr id="18" name="TextBox 17"/>
-          <p:cNvSpPr txBox="1"/>
-          <p:nvPr/>
-        </p:nvSpPr>
-        <p:spPr>
-          <a:xfrm>
-            <a:off x="685800" y="3212592"/>
-            <a:ext cx="5064861" cy="456692"/>
-          </a:xfrm>
-          <a:prstGeom prst="rect">
-            <a:avLst/>
-          </a:prstGeom>
-          <a:noFill/>
-        </p:spPr>
-        <p:txBody>
-          <a:bodyPr wrap="square" lIns="0" rIns="0" tIns="0" bIns="0" anchor="ctr">
-            <a:spAutoFit/>
-          </a:bodyPr>
-          <a:lstStyle/>
-          <a:p>
-            <a:pPr algn="l">
-              <a:lnSpc>
-                <a:spcPts val="1150"/>
-              </a:lnSpc>
-              <a:spcAft>
-                <a:spcPts val="0"/>
-              </a:spcAft>
-            </a:pPr>
-            <a:r>
-              <a:rPr sz="1000" b="1" i="0">
-                <a:solidFill>
-                  <a:srgbClr val="141B2E"/>
-                </a:solidFill>
-                <a:latin typeface="Arial"/>
-              </a:rPr>
-              <a:t>простые интерфейсы</a:t>
-            </a:r>
-            <a:r>
-              <a:rPr sz="1000" b="0" i="0">
-                <a:solidFill>
-                  <a:srgbClr val="141B2E"/>
-                </a:solidFill>
-                <a:latin typeface="Arial"/>
-              </a:rPr>
-              <a:t> — форма и чат </a:t>
-            </a:r>
-            <a:r>
-              <a:rPr sz="1000" b="1" i="0">
-                <a:solidFill>
-                  <a:srgbClr val="141B2E"/>
-                </a:solidFill>
-                <a:latin typeface="Arial"/>
-              </a:rPr>
-              <a:t>встроены</a:t>
-            </a:r>
-            <a:r>
-              <a:rPr sz="1000" b="0" i="0">
-                <a:solidFill>
-                  <a:srgbClr val="141B2E"/>
-                </a:solidFill>
-                <a:latin typeface="Arial"/>
-              </a:rPr>
-              <a:t>: узел формы даёт работающую веб-страницу с полями и экраном результата</a:t>
-            </a:r>
-          </a:p>
-        </p:txBody>
-      </p:sp>
-      <p:sp>
-        <p:nvSpPr>
-          <p:cNvPr id="19" name="TextBox 18"/>
-          <p:cNvSpPr txBox="1"/>
-          <p:nvPr/>
-        </p:nvSpPr>
-        <p:spPr>
-          <a:xfrm>
-            <a:off x="5896965" y="3212592"/>
-            <a:ext cx="5459882" cy="456692"/>
-          </a:xfrm>
-          <a:prstGeom prst="rect">
-            <a:avLst/>
-          </a:prstGeom>
-          <a:noFill/>
-        </p:spPr>
-        <p:txBody>
-          <a:bodyPr wrap="square" lIns="0" rIns="0" tIns="0" bIns="0" anchor="ctr">
-            <a:spAutoFit/>
-          </a:bodyPr>
-          <a:lstStyle/>
-          <a:p>
-            <a:pPr algn="l">
-              <a:lnSpc>
-                <a:spcPts val="1150"/>
-              </a:lnSpc>
-              <a:spcAft>
-                <a:spcPts val="0"/>
-              </a:spcAft>
-            </a:pPr>
-            <a:r>
-              <a:rPr sz="1000" b="0" i="0">
-                <a:solidFill>
-                  <a:srgbClr val="141B2E"/>
-                </a:solidFill>
-                <a:latin typeface="Arial"/>
-              </a:rPr>
-              <a:t>можно отдать людям рабочий вход, не поднимая ни фронтенда, ни хостинга. Мы этим сегодня и воспользуемся</a:t>
-            </a:r>
-          </a:p>
-        </p:txBody>
-      </p:sp>
-      <p:cxnSp>
-        <p:nvCxnSpPr>
-          <p:cNvPr id="20" name="Connector 19"/>
-          <p:cNvCxnSpPr/>
-          <p:nvPr/>
-        </p:nvCxnSpPr>
-        <p:spPr>
-          <a:xfrm>
-            <a:off x="685800" y="3669284"/>
-            <a:ext cx="10817352" cy="0"/>
-          </a:xfrm>
-          <a:prstGeom prst="line">
-            <a:avLst/>
-          </a:prstGeom>
-          <a:ln w="9525">
-            <a:solidFill>
-              <a:srgbClr val="E5EAF0"/>
-            </a:solidFill>
-          </a:ln>
-        </p:spPr>
-        <p:style>
-          <a:lnRef idx="2">
-            <a:schemeClr val="accent1"/>
-          </a:lnRef>
-          <a:fillRef idx="0">
-            <a:schemeClr val="accent1"/>
-          </a:fillRef>
-          <a:effectRef idx="1">
-            <a:schemeClr val="accent1"/>
-          </a:effectRef>
-          <a:fontRef idx="minor">
-            <a:schemeClr val="tx1"/>
-          </a:fontRef>
-        </p:style>
-      </p:cxnSp>
-      <p:sp>
-        <p:nvSpPr>
-          <p:cNvPr id="21" name="TextBox 20"/>
-          <p:cNvSpPr txBox="1"/>
-          <p:nvPr/>
-        </p:nvSpPr>
-        <p:spPr>
-          <a:xfrm>
-            <a:off x="685800" y="3669284"/>
-            <a:ext cx="5064861" cy="456692"/>
-          </a:xfrm>
-          <a:prstGeom prst="rect">
-            <a:avLst/>
-          </a:prstGeom>
-          <a:noFill/>
-        </p:spPr>
-        <p:txBody>
-          <a:bodyPr wrap="square" lIns="0" rIns="0" tIns="0" bIns="0" anchor="ctr">
-            <a:spAutoFit/>
-          </a:bodyPr>
-          <a:lstStyle/>
-          <a:p>
-            <a:pPr algn="l">
-              <a:lnSpc>
-                <a:spcPts val="1150"/>
-              </a:lnSpc>
-              <a:spcAft>
-                <a:spcPts val="0"/>
-              </a:spcAft>
-            </a:pPr>
-            <a:r>
-              <a:rPr sz="1000" b="1" i="0">
-                <a:solidFill>
-                  <a:srgbClr val="141B2E"/>
-                </a:solidFill>
-                <a:latin typeface="Arial"/>
-              </a:rPr>
-              <a:t>прогон и журнал</a:t>
-            </a:r>
-            <a:r>
-              <a:rPr sz="1000" b="0" i="0">
-                <a:solidFill>
-                  <a:srgbClr val="141B2E"/>
-                </a:solidFill>
-                <a:latin typeface="Arial"/>
-              </a:rPr>
-              <a:t> — каждое исполнение сохраняется целиком, с данными на входе и выходе каждого узла</a:t>
-            </a:r>
-          </a:p>
-        </p:txBody>
-      </p:sp>
-      <p:sp>
-        <p:nvSpPr>
-          <p:cNvPr id="22" name="TextBox 21"/>
-          <p:cNvSpPr txBox="1"/>
-          <p:nvPr/>
-        </p:nvSpPr>
-        <p:spPr>
-          <a:xfrm>
-            <a:off x="5896965" y="3669284"/>
-            <a:ext cx="5459882" cy="456692"/>
-          </a:xfrm>
-          <a:prstGeom prst="rect">
-            <a:avLst/>
-          </a:prstGeom>
-          <a:noFill/>
-        </p:spPr>
-        <p:txBody>
-          <a:bodyPr wrap="square" lIns="0" rIns="0" tIns="0" bIns="0" anchor="ctr">
-            <a:spAutoFit/>
-          </a:bodyPr>
-          <a:lstStyle/>
-          <a:p>
-            <a:pPr algn="l">
-              <a:lnSpc>
-                <a:spcPts val="1150"/>
-              </a:lnSpc>
-              <a:spcAft>
-                <a:spcPts val="0"/>
-              </a:spcAft>
-            </a:pPr>
-            <a:r>
-              <a:rPr sz="1000" b="0" i="0">
-                <a:solidFill>
-                  <a:srgbClr val="141B2E"/>
-                </a:solidFill>
-                <a:latin typeface="Arial"/>
-              </a:rPr>
-              <a:t>можно открыть прогон недельной давности и посмотреть, что пришло в третий узел</a:t>
-            </a:r>
-          </a:p>
-        </p:txBody>
-      </p:sp>
-      <p:sp>
-        <p:nvSpPr>
-          <p:cNvPr id="23" name="Rounded Rectangle 22"/>
+                <a:spcPts val="1207"/>
+              </a:lnSpc>
+              <a:spcAft>
+                <a:spcPts val="0"/>
+              </a:spcAft>
+            </a:pPr>
+            <a:r>
+              <a:rPr sz="1050" b="0" i="0">
+                <a:solidFill>
+                  <a:srgbClr val="141B2E"/>
+                </a:solidFill>
+                <a:latin typeface="Arial"/>
+              </a:rPr>
+              <a:t>рабочий вход для людей без фронтенда и хостинга — мы им сегодня и пользуемся</a:t>
+            </a:r>
+          </a:p>
+        </p:txBody>
+      </p:sp>
+      <p:sp>
+        <p:nvSpPr>
+          <p:cNvPr id="15" name="Rounded Rectangle 14"/>
           <p:cNvSpPr/>
           <p:nvPr/>
         </p:nvSpPr>
         <p:spPr>
           <a:xfrm>
-            <a:off x="502920" y="4473448"/>
-            <a:ext cx="82296" cy="715263"/>
+            <a:off x="502920" y="5694138"/>
+            <a:ext cx="82296" cy="447548"/>
           </a:xfrm>
           <a:prstGeom prst="roundRect">
             <a:avLst>
@@ -34649,14 +33983,14 @@
       </p:sp>
       <p:sp>
         <p:nvSpPr>
-          <p:cNvPr id="24" name="TextBox 23"/>
-          <p:cNvSpPr txBox="1"/>
-          <p:nvPr/>
-        </p:nvSpPr>
-        <p:spPr>
-          <a:xfrm>
-            <a:off x="859536" y="4601464"/>
-            <a:ext cx="10643616" cy="459231"/>
+          <p:cNvPr id="16" name="TextBox 15"/>
+          <p:cNvSpPr txBox="1"/>
+          <p:nvPr/>
+        </p:nvSpPr>
+        <p:spPr>
+          <a:xfrm>
+            <a:off x="859536" y="5822154"/>
+            <a:ext cx="10643616" cy="191516"/>
           </a:xfrm>
           <a:prstGeom prst="rect">
             <a:avLst/>
@@ -34671,133 +34005,36 @@
           <a:p>
             <a:pPr algn="l">
               <a:lnSpc>
-                <a:spcPts val="1736"/>
+                <a:spcPts val="1364"/>
               </a:lnSpc>
               <a:spcAft>
                 <a:spcPts val="300"/>
               </a:spcAft>
             </a:pPr>
             <a:r>
-              <a:rPr sz="1400" b="1" i="0">
-                <a:solidFill>
-                  <a:srgbClr val="141B2E"/>
-                </a:solidFill>
-                <a:latin typeface="Arial"/>
-              </a:rPr>
-              <a:t>Почему он для курса:</a:t>
-            </a:r>
-            <a:r>
-              <a:rPr sz="1400" b="1" i="0">
-                <a:solidFill>
-                  <a:srgbClr val="141B2E"/>
-                </a:solidFill>
-                <a:latin typeface="Arial"/>
-              </a:rPr>
-              <a:t> ставится локально и бесплатно · ИИ-блоки в коробке, отдельной подписки не нужно · запускается по расписанию и по событию · процесс выгружается одним файлом, и этот файл вы унесёте.</a:t>
-            </a:r>
-          </a:p>
-        </p:txBody>
-      </p:sp>
-      <p:sp>
-        <p:nvSpPr>
-          <p:cNvPr id="25" name="Rounded Rectangle 24"/>
-          <p:cNvSpPr/>
-          <p:nvPr/>
-        </p:nvSpPr>
-        <p:spPr>
-          <a:xfrm>
-            <a:off x="502920" y="5353304"/>
-            <a:ext cx="82296" cy="699515"/>
-          </a:xfrm>
-          <a:prstGeom prst="roundRect">
-            <a:avLst>
-              <a:gd name="adj" fmla="val 50000"/>
-            </a:avLst>
-          </a:prstGeom>
-          <a:solidFill>
-            <a:srgbClr val="F0AB00"/>
-          </a:solidFill>
-          <a:ln>
-            <a:noFill/>
-          </a:ln>
-          <a:effectLst/>
-        </p:spPr>
-        <p:style>
-          <a:lnRef idx="1">
-            <a:schemeClr val="accent1"/>
-          </a:lnRef>
-          <a:fillRef idx="3">
-            <a:schemeClr val="accent1"/>
-          </a:fillRef>
-          <a:effectRef idx="2">
-            <a:schemeClr val="accent1"/>
-          </a:effectRef>
-          <a:fontRef idx="minor">
-            <a:schemeClr val="lt1"/>
-          </a:fontRef>
-        </p:style>
-        <p:txBody>
-          <a:bodyPr rtlCol="0" anchor="ctr"/>
-          <a:lstStyle/>
-          <a:p>
-            <a:pPr algn="ctr"/>
-          </a:p>
-        </p:txBody>
-      </p:sp>
-      <p:sp>
-        <p:nvSpPr>
-          <p:cNvPr id="26" name="TextBox 25"/>
-          <p:cNvSpPr txBox="1"/>
-          <p:nvPr/>
-        </p:nvSpPr>
-        <p:spPr>
-          <a:xfrm>
-            <a:off x="859536" y="5481320"/>
-            <a:ext cx="10643616" cy="443483"/>
-          </a:xfrm>
-          <a:prstGeom prst="rect">
-            <a:avLst/>
-          </a:prstGeom>
-          <a:noFill/>
-        </p:spPr>
-        <p:txBody>
-          <a:bodyPr wrap="square" lIns="0" rIns="0" tIns="0" bIns="0" anchor="ctr">
-            <a:spAutoFit/>
-          </a:bodyPr>
-          <a:lstStyle/>
-          <a:p>
-            <a:pPr algn="l">
-              <a:lnSpc>
-                <a:spcPts val="1673"/>
-              </a:lnSpc>
-              <a:spcAft>
-                <a:spcPts val="300"/>
-              </a:spcAft>
-            </a:pPr>
-            <a:r>
-              <a:rPr sz="1350" b="1" i="0">
-                <a:solidFill>
-                  <a:srgbClr val="141B2E"/>
-                </a:solidFill>
-                <a:latin typeface="Arial"/>
-              </a:rPr>
-              <a:t>Чего ждать не надо:</a:t>
-            </a:r>
-            <a:r>
-              <a:rPr sz="1350" b="1" i="0">
-                <a:solidFill>
-                  <a:srgbClr val="141B2E"/>
-                </a:solidFill>
-                <a:latin typeface="Arial"/>
-              </a:rPr>
-              <a:t> лицензия ядра не вполне свободная (у Activepieces свободнее) · установка без контейнера объявлена устаревшей · интерфейс меняется между версиями, поэтому схемы мы рисуем отдельно от снимков.</a:t>
-            </a:r>
-          </a:p>
-        </p:txBody>
-      </p:sp>
-      <p:sp>
-        <p:nvSpPr>
-          <p:cNvPr id="27" name="TextBox 26"/>
+              <a:rPr sz="1100" b="1" i="0">
+                <a:solidFill>
+                  <a:srgbClr val="141B2E"/>
+                </a:solidFill>
+                <a:latin typeface="Arial"/>
+              </a:rPr>
+              <a:t>Почему он:</a:t>
+            </a:r>
+            <a:r>
+              <a:rPr sz="1100" b="1" i="0">
+                <a:solidFill>
+                  <a:srgbClr val="141B2E"/>
+                </a:solidFill>
+                <a:latin typeface="Arial"/>
+              </a:rPr>
+              <a:t> ставится локально и бесплатно · запуск по расписанию и по событию · процесс выгружается одним файлом, и его вы унесёте.</a:t>
+            </a:r>
+          </a:p>
+        </p:txBody>
+      </p:sp>
+      <p:sp>
+        <p:nvSpPr>
+          <p:cNvPr id="17" name="TextBox 16"/>
           <p:cNvSpPr txBox="1"/>
           <p:nvPr/>
         </p:nvSpPr>
@@ -35658,6 +34895,94 @@
         <p:spPr>
           <a:xfrm>
             <a:off x="502920" y="4488027"/>
+            <a:ext cx="82296" cy="746760"/>
+          </a:xfrm>
+          <a:prstGeom prst="roundRect">
+            <a:avLst>
+              <a:gd name="adj" fmla="val 50000"/>
+            </a:avLst>
+          </a:prstGeom>
+          <a:solidFill>
+            <a:srgbClr val="F0AB00"/>
+          </a:solidFill>
+          <a:ln>
+            <a:noFill/>
+          </a:ln>
+          <a:effectLst/>
+        </p:spPr>
+        <p:style>
+          <a:lnRef idx="1">
+            <a:schemeClr val="accent1"/>
+          </a:lnRef>
+          <a:fillRef idx="3">
+            <a:schemeClr val="accent1"/>
+          </a:fillRef>
+          <a:effectRef idx="2">
+            <a:schemeClr val="accent1"/>
+          </a:effectRef>
+          <a:fontRef idx="minor">
+            <a:schemeClr val="lt1"/>
+          </a:fontRef>
+        </p:style>
+        <p:txBody>
+          <a:bodyPr rtlCol="0" anchor="ctr"/>
+          <a:lstStyle/>
+          <a:p>
+            <a:pPr algn="ctr"/>
+          </a:p>
+        </p:txBody>
+      </p:sp>
+      <p:sp>
+        <p:nvSpPr>
+          <p:cNvPr id="20" name="TextBox 19"/>
+          <p:cNvSpPr txBox="1"/>
+          <p:nvPr/>
+        </p:nvSpPr>
+        <p:spPr>
+          <a:xfrm>
+            <a:off x="859536" y="4616043"/>
+            <a:ext cx="10643616" cy="490727"/>
+          </a:xfrm>
+          <a:prstGeom prst="rect">
+            <a:avLst/>
+          </a:prstGeom>
+          <a:noFill/>
+        </p:spPr>
+        <p:txBody>
+          <a:bodyPr wrap="square" lIns="0" rIns="0" tIns="0" bIns="0" anchor="ctr">
+            <a:spAutoFit/>
+          </a:bodyPr>
+          <a:lstStyle/>
+          <a:p>
+            <a:pPr algn="l">
+              <a:lnSpc>
+                <a:spcPts val="1860"/>
+              </a:lnSpc>
+              <a:spcAft>
+                <a:spcPts val="300"/>
+              </a:spcAft>
+            </a:pPr>
+            <a:r>
+              <a:rPr sz="1500" b="1" i="0">
+                <a:solidFill>
+                  <a:srgbClr val="141B2E"/>
+                </a:solidFill>
+                <a:latin typeface="Arial"/>
+              </a:rPr>
+              <a:t>Четыре строки. Левая колонка — то, что вы увидите своими глазами и сочтёте успехом. Правую мы заполним сами, по одной за кейс, и вернёмся к этой таблице в конце.</a:t>
+            </a:r>
+          </a:p>
+        </p:txBody>
+      </p:sp>
+      <p:sp>
+        <p:nvSpPr>
+          <p:cNvPr id="21" name="Rounded Rectangle 20"/>
+          <p:cNvSpPr/>
+          <p:nvPr/>
+        </p:nvSpPr>
+        <p:spPr>
+          <a:xfrm>
+            <a:off x="502920" y="5465197"/>
             <a:ext cx="11183112" cy="822960"/>
           </a:xfrm>
           <a:prstGeom prst="roundRect">
@@ -35699,13 +35024,13 @@
       </p:sp>
       <p:sp>
         <p:nvSpPr>
-          <p:cNvPr id="20" name="TextBox 19"/>
-          <p:cNvSpPr txBox="1"/>
-          <p:nvPr/>
-        </p:nvSpPr>
-        <p:spPr>
-          <a:xfrm>
-            <a:off x="722376" y="4616043"/>
+          <p:cNvPr id="22" name="TextBox 21"/>
+          <p:cNvSpPr txBox="1"/>
+          <p:nvPr/>
+        </p:nvSpPr>
+        <p:spPr>
+          <a:xfrm>
+            <a:off x="722376" y="5593213"/>
             <a:ext cx="10634472" cy="566928"/>
           </a:xfrm>
           <a:prstGeom prst="rect">
@@ -35735,94 +35060,6 @@
                 <a:latin typeface="Arial"/>
               </a:rPr>
               <a:t>Вопрос занятия, и к нему мы вернёмся в конце: возьмите процесс, который у вас на работе уже работает — он работает или за него можно ручаться?</a:t>
-            </a:r>
-          </a:p>
-        </p:txBody>
-      </p:sp>
-      <p:sp>
-        <p:nvSpPr>
-          <p:cNvPr id="21" name="Rounded Rectangle 20"/>
-          <p:cNvSpPr/>
-          <p:nvPr/>
-        </p:nvSpPr>
-        <p:spPr>
-          <a:xfrm>
-            <a:off x="502920" y="5541397"/>
-            <a:ext cx="82296" cy="746760"/>
-          </a:xfrm>
-          <a:prstGeom prst="roundRect">
-            <a:avLst>
-              <a:gd name="adj" fmla="val 50000"/>
-            </a:avLst>
-          </a:prstGeom>
-          <a:solidFill>
-            <a:srgbClr val="F0AB00"/>
-          </a:solidFill>
-          <a:ln>
-            <a:noFill/>
-          </a:ln>
-          <a:effectLst/>
-        </p:spPr>
-        <p:style>
-          <a:lnRef idx="1">
-            <a:schemeClr val="accent1"/>
-          </a:lnRef>
-          <a:fillRef idx="3">
-            <a:schemeClr val="accent1"/>
-          </a:fillRef>
-          <a:effectRef idx="2">
-            <a:schemeClr val="accent1"/>
-          </a:effectRef>
-          <a:fontRef idx="minor">
-            <a:schemeClr val="lt1"/>
-          </a:fontRef>
-        </p:style>
-        <p:txBody>
-          <a:bodyPr rtlCol="0" anchor="ctr"/>
-          <a:lstStyle/>
-          <a:p>
-            <a:pPr algn="ctr"/>
-          </a:p>
-        </p:txBody>
-      </p:sp>
-      <p:sp>
-        <p:nvSpPr>
-          <p:cNvPr id="22" name="TextBox 21"/>
-          <p:cNvSpPr txBox="1"/>
-          <p:nvPr/>
-        </p:nvSpPr>
-        <p:spPr>
-          <a:xfrm>
-            <a:off x="859536" y="5669413"/>
-            <a:ext cx="10643616" cy="490727"/>
-          </a:xfrm>
-          <a:prstGeom prst="rect">
-            <a:avLst/>
-          </a:prstGeom>
-          <a:noFill/>
-        </p:spPr>
-        <p:txBody>
-          <a:bodyPr wrap="square" lIns="0" rIns="0" tIns="0" bIns="0" anchor="ctr">
-            <a:spAutoFit/>
-          </a:bodyPr>
-          <a:lstStyle/>
-          <a:p>
-            <a:pPr algn="l">
-              <a:lnSpc>
-                <a:spcPts val="1860"/>
-              </a:lnSpc>
-              <a:spcAft>
-                <a:spcPts val="300"/>
-              </a:spcAft>
-            </a:pPr>
-            <a:r>
-              <a:rPr sz="1500" b="1" i="0">
-                <a:solidFill>
-                  <a:srgbClr val="141B2E"/>
-                </a:solidFill>
-                <a:latin typeface="Arial"/>
-              </a:rPr>
-              <a:t>Четыре строки. Левая колонка — то, что вы увидите своими глазами и сочтёте успехом. Правую мы заполним сами, по одной за кейс, и вернёмся к этой таблице в конце.</a:t>
             </a:r>
           </a:p>
         </p:txBody>

--- a/library/seminars/sem-07/rendered/sem-07.pptx
+++ b/library/seminars/sem-07/rendered/sem-07.pptx
@@ -777,7 +777,13 @@
           <a:p/>
           <a:p>
             <a:r>
-              <a:t>Алгоритмическая классификация. Тут два разных зверя под одним названием. Правила и регулярные выражения — порядка пятидесяти процентов, причём в том замере на двух категориях из семи правила не дали вообще ничего, ноль. Обученная модель на своих данных — восемьдесят, восемьдесят восемь процентов, и это сильный результат. Но обученной модели нужна размеченная история: тысячи писем, у которых кто-то уже проставил правильную тему. У нашего центра её нет — в таблице лежит то, что Ольга набивала руками, и мы только что выяснили, какого оно качества.</a:t>
+              <a:t>Алгоритмическая классификация — правила и регулярные выражения. Порядка пятидесяти процентов, причём в том замере на двух категориях из семи правила не дали вообще ничего, ноль. Что они дают: предсказуемость за ноль денег и отладку глазами — одно и то же слово всегда даёт одну и ту же тему. Чего не дают: живого языка. «Хочу учиться», «а можно к вам», «счёт на ООО» — ни одного вашего ключевого слова. И вторая беда коварнее: правил становится много, и однажды два начинают противоречить друг другу, а заметить это можно только случайно.</a:t>
+            </a:r>
+          </a:p>
+          <a:p/>
+          <a:p>
+            <a:r>
+              <a:t>Если спросят про обученную классификатор-модель — она в этом ряду сильнее, восемьдесят, восемьдесят восемь процентов на реальных потоках. Я не выношу её в варианты, потому что ей нужна размеченная история: тысячи писем, у которых кто-то уже проставил правильную тему. У нашего центра её нет — в таблице лежит то, что Ольга набивала руками, и мы только что выяснили, какого оно качества. Это и есть ответ на вопрос «почему сразу модель, а не классика»: не потому, что модель лучше, а потому, что классике не на чем учиться.</a:t>
             </a:r>
           </a:p>
           <a:p/>
@@ -3697,6 +3703,12 @@
           <a:p>
             <a:r>
               <a:t>Возвращаю ключ, отправляю ещё раз. Экран обычный, строка нормальная. Один узел, две судьбы, и обе видны там, где заявку отправили.</a:t>
+            </a:r>
+          </a:p>
+          <a:p/>
+          <a:p>
+            <a:r>
+              <a:t>Перед показом, голосом: сейчас я испорчу ключ и отправлю заявку. Прежде чем смотреть на экран — как думаете, какой статус будет у прогона: «ошибка» или «успех»?</a:t>
             </a:r>
           </a:p>
         </p:txBody>
@@ -9494,7 +9506,7 @@
         <p:spPr>
           <a:xfrm>
             <a:off x="2269797" y="1126236"/>
-            <a:ext cx="2284608" cy="424433"/>
+            <a:ext cx="2193827" cy="424433"/>
           </a:xfrm>
           <a:prstGeom prst="rect">
             <a:avLst/>
@@ -9535,8 +9547,8 @@
         </p:nvSpPr>
         <p:spPr>
           <a:xfrm>
-            <a:off x="4700709" y="1126236"/>
-            <a:ext cx="2840640" cy="424433"/>
+            <a:off x="4609929" y="1126236"/>
+            <a:ext cx="2712797" cy="424433"/>
           </a:xfrm>
           <a:prstGeom prst="rect">
             <a:avLst/>
@@ -9577,8 +9589,8 @@
         </p:nvSpPr>
         <p:spPr>
           <a:xfrm>
-            <a:off x="7687654" y="1126236"/>
-            <a:ext cx="3669193" cy="424433"/>
+            <a:off x="7469031" y="1126236"/>
+            <a:ext cx="3887816" cy="424433"/>
           </a:xfrm>
           <a:prstGeom prst="rect">
             <a:avLst/>
@@ -9620,7 +9632,7 @@
         <p:spPr>
           <a:xfrm>
             <a:off x="685800" y="1550670"/>
-            <a:ext cx="1437693" cy="624649"/>
+            <a:ext cx="1437693" cy="471296"/>
           </a:xfrm>
           <a:prstGeom prst="rect">
             <a:avLst/>
@@ -9662,7 +9674,7 @@
         <p:spPr>
           <a:xfrm>
             <a:off x="2269797" y="1550670"/>
-            <a:ext cx="2284608" cy="624649"/>
+            <a:ext cx="2193827" cy="471296"/>
           </a:xfrm>
           <a:prstGeom prst="rect">
             <a:avLst/>
@@ -9712,8 +9724,8 @@
         </p:nvSpPr>
         <p:spPr>
           <a:xfrm>
-            <a:off x="4700709" y="1550670"/>
-            <a:ext cx="2840640" cy="624649"/>
+            <a:off x="4609929" y="1550670"/>
+            <a:ext cx="2712797" cy="471296"/>
           </a:xfrm>
           <a:prstGeom prst="rect">
             <a:avLst/>
@@ -9754,8 +9766,8 @@
         </p:nvSpPr>
         <p:spPr>
           <a:xfrm>
-            <a:off x="7687654" y="1550670"/>
-            <a:ext cx="3669193" cy="624649"/>
+            <a:off x="7469031" y="1550670"/>
+            <a:ext cx="3887816" cy="471296"/>
           </a:xfrm>
           <a:prstGeom prst="rect">
             <a:avLst/>
@@ -9796,7 +9808,7 @@
         </p:nvCxnSpPr>
         <p:spPr>
           <a:xfrm>
-            <a:off x="685800" y="2175319"/>
+            <a:off x="685800" y="2021966"/>
             <a:ext cx="10817352" cy="0"/>
           </a:xfrm>
           <a:prstGeom prst="line">
@@ -9831,8 +9843,8 @@
         </p:nvSpPr>
         <p:spPr>
           <a:xfrm>
-            <a:off x="685800" y="2175319"/>
-            <a:ext cx="1437693" cy="624649"/>
+            <a:off x="685800" y="2021966"/>
+            <a:ext cx="1437693" cy="778002"/>
           </a:xfrm>
           <a:prstGeom prst="rect">
             <a:avLst/>
@@ -9873,8 +9885,8 @@
         </p:nvSpPr>
         <p:spPr>
           <a:xfrm>
-            <a:off x="2269797" y="2175319"/>
-            <a:ext cx="2284608" cy="624649"/>
+            <a:off x="2269797" y="2021966"/>
+            <a:ext cx="2193827" cy="778002"/>
           </a:xfrm>
           <a:prstGeom prst="rect">
             <a:avLst/>
@@ -9911,7 +9923,7 @@
                 </a:solidFill>
                 <a:latin typeface="Arial"/>
               </a:rPr>
-              <a:t> на правилах · </a:t>
+              <a:t> на семи категориях, причём на двух из них — </a:t>
             </a:r>
             <a:r>
               <a:rPr sz="1050" b="1" i="0">
@@ -9920,8 +9932,41 @@
                 </a:solidFill>
                 <a:latin typeface="Arial"/>
               </a:rPr>
-              <a:t>80–88%</a:t>
-            </a:r>
+              <a:t>0%</a:t>
+            </a:r>
+          </a:p>
+        </p:txBody>
+      </p:sp>
+      <p:sp>
+        <p:nvSpPr>
+          <p:cNvPr id="15" name="TextBox 14"/>
+          <p:cNvSpPr txBox="1"/>
+          <p:nvPr/>
+        </p:nvSpPr>
+        <p:spPr>
+          <a:xfrm>
+            <a:off x="4609929" y="2021966"/>
+            <a:ext cx="2712797" cy="778002"/>
+          </a:xfrm>
+          <a:prstGeom prst="rect">
+            <a:avLst/>
+          </a:prstGeom>
+          <a:noFill/>
+        </p:spPr>
+        <p:txBody>
+          <a:bodyPr wrap="square" lIns="0" rIns="0" tIns="0" bIns="0" anchor="ctr">
+            <a:spAutoFit/>
+          </a:bodyPr>
+          <a:lstStyle/>
+          <a:p>
+            <a:pPr algn="l">
+              <a:lnSpc>
+                <a:spcPts val="1207"/>
+              </a:lnSpc>
+              <a:spcAft>
+                <a:spcPts val="0"/>
+              </a:spcAft>
+            </a:pPr>
             <a:r>
               <a:rPr sz="1050" b="0" i="0">
                 <a:solidFill>
@@ -9929,21 +9974,21 @@
                 </a:solidFill>
                 <a:latin typeface="Arial"/>
               </a:rPr>
-              <a:t> на обученной модели</a:t>
-            </a:r>
-          </a:p>
-        </p:txBody>
-      </p:sp>
-      <p:sp>
-        <p:nvSpPr>
-          <p:cNvPr id="15" name="TextBox 14"/>
-          <p:cNvSpPr txBox="1"/>
-          <p:nvPr/>
-        </p:nvSpPr>
-        <p:spPr>
-          <a:xfrm>
-            <a:off x="4700709" y="2175319"/>
-            <a:ext cx="2840640" cy="624649"/>
+              <a:t>предсказуема, дёшева и отлаживается глазами: одно слово всегда даёт одну тему</a:t>
+            </a:r>
+          </a:p>
+        </p:txBody>
+      </p:sp>
+      <p:sp>
+        <p:nvSpPr>
+          <p:cNvPr id="16" name="TextBox 15"/>
+          <p:cNvSpPr txBox="1"/>
+          <p:nvPr/>
+        </p:nvSpPr>
+        <p:spPr>
+          <a:xfrm>
+            <a:off x="7469031" y="2021966"/>
+            <a:ext cx="3887816" cy="778002"/>
           </a:xfrm>
           <a:prstGeom prst="rect">
             <a:avLst/>
@@ -9971,49 +10016,7 @@
                 </a:solidFill>
                 <a:latin typeface="Arial"/>
               </a:rPr>
-              <a:t>предсказуема и дёшева в прогоне; обученная модель на своих данных сильна</a:t>
-            </a:r>
-          </a:p>
-        </p:txBody>
-      </p:sp>
-      <p:sp>
-        <p:nvSpPr>
-          <p:cNvPr id="16" name="TextBox 15"/>
-          <p:cNvSpPr txBox="1"/>
-          <p:nvPr/>
-        </p:nvSpPr>
-        <p:spPr>
-          <a:xfrm>
-            <a:off x="7687654" y="2175319"/>
-            <a:ext cx="3669193" cy="624649"/>
-          </a:xfrm>
-          <a:prstGeom prst="rect">
-            <a:avLst/>
-          </a:prstGeom>
-          <a:noFill/>
-        </p:spPr>
-        <p:txBody>
-          <a:bodyPr wrap="square" lIns="0" rIns="0" tIns="0" bIns="0" anchor="ctr">
-            <a:spAutoFit/>
-          </a:bodyPr>
-          <a:lstStyle/>
-          <a:p>
-            <a:pPr algn="l">
-              <a:lnSpc>
-                <a:spcPts val="1207"/>
-              </a:lnSpc>
-              <a:spcAft>
-                <a:spcPts val="0"/>
-              </a:spcAft>
-            </a:pPr>
-            <a:r>
-              <a:rPr sz="1050" b="0" i="0">
-                <a:solidFill>
-                  <a:srgbClr val="141B2E"/>
-                </a:solidFill>
-                <a:latin typeface="Arial"/>
-              </a:rPr>
-              <a:t>правила ломаются на живом языке; обученной модели нужна размеченная история, которой у центра нет</a:t>
+              <a:t>ломается на живом языке: «а можно к вам», «счёт на ООО» — ни одного ключевого слова. Правил становится много, и они начинают противоречить друг другу</a:t>
             </a:r>
           </a:p>
         </p:txBody>
@@ -10026,7 +10029,7 @@
         </p:nvCxnSpPr>
         <p:spPr>
           <a:xfrm>
-            <a:off x="685800" y="2799969"/>
+            <a:off x="685800" y="2799968"/>
             <a:ext cx="10817352" cy="0"/>
           </a:xfrm>
           <a:prstGeom prst="line">
@@ -10061,7 +10064,7 @@
         </p:nvSpPr>
         <p:spPr>
           <a:xfrm>
-            <a:off x="685800" y="2799969"/>
+            <a:off x="685800" y="2799968"/>
             <a:ext cx="1437693" cy="624649"/>
           </a:xfrm>
           <a:prstGeom prst="rect">
@@ -10103,8 +10106,8 @@
         </p:nvSpPr>
         <p:spPr>
           <a:xfrm>
-            <a:off x="2269797" y="2799969"/>
-            <a:ext cx="2284608" cy="624649"/>
+            <a:off x="2269797" y="2799968"/>
+            <a:ext cx="2193827" cy="624649"/>
           </a:xfrm>
           <a:prstGeom prst="rect">
             <a:avLst/>
@@ -10154,8 +10157,8 @@
         </p:nvSpPr>
         <p:spPr>
           <a:xfrm>
-            <a:off x="4700709" y="2799969"/>
-            <a:ext cx="2840640" cy="624649"/>
+            <a:off x="4609929" y="2799968"/>
+            <a:ext cx="2712797" cy="624649"/>
           </a:xfrm>
           <a:prstGeom prst="rect">
             <a:avLst/>
@@ -10214,8 +10217,8 @@
         </p:nvSpPr>
         <p:spPr>
           <a:xfrm>
-            <a:off x="7687654" y="2799969"/>
-            <a:ext cx="3669193" cy="624649"/>
+            <a:off x="7469031" y="2799968"/>
+            <a:ext cx="3887816" cy="624649"/>
           </a:xfrm>
           <a:prstGeom prst="rect">
             <a:avLst/>
@@ -10334,7 +10337,7 @@
         <p:spPr>
           <a:xfrm>
             <a:off x="2269797" y="3424618"/>
-            <a:ext cx="2284608" cy="778002"/>
+            <a:ext cx="2193827" cy="778002"/>
           </a:xfrm>
           <a:prstGeom prst="rect">
             <a:avLst/>
@@ -10384,8 +10387,8 @@
         </p:nvSpPr>
         <p:spPr>
           <a:xfrm>
-            <a:off x="4700709" y="3424618"/>
-            <a:ext cx="2840640" cy="778002"/>
+            <a:off x="4609929" y="3424618"/>
+            <a:ext cx="2712797" cy="778002"/>
           </a:xfrm>
           <a:prstGeom prst="rect">
             <a:avLst/>
@@ -10444,8 +10447,8 @@
         </p:nvSpPr>
         <p:spPr>
           <a:xfrm>
-            <a:off x="7687654" y="3424618"/>
-            <a:ext cx="3669193" cy="778002"/>
+            <a:off x="7469031" y="3424618"/>
+            <a:ext cx="3887816" cy="778002"/>
           </a:xfrm>
           <a:prstGeom prst="rect">
             <a:avLst/>
@@ -10487,7 +10490,7 @@
         <p:spPr>
           <a:xfrm>
             <a:off x="502920" y="4550092"/>
-            <a:ext cx="82296" cy="794004"/>
+            <a:ext cx="82296" cy="780625"/>
           </a:xfrm>
           <a:prstGeom prst="roundRect">
             <a:avLst>
@@ -10533,7 +10536,7 @@
         <p:spPr>
           <a:xfrm>
             <a:off x="859536" y="4678108"/>
-            <a:ext cx="10643616" cy="537972"/>
+            <a:ext cx="10643616" cy="524593"/>
           </a:xfrm>
           <a:prstGeom prst="rect">
             <a:avLst/>
@@ -10619,8 +10622,8 @@
         </p:nvSpPr>
         <p:spPr>
           <a:xfrm>
-            <a:off x="502920" y="5508688"/>
-            <a:ext cx="82296" cy="794004"/>
+            <a:off x="502920" y="5495310"/>
+            <a:ext cx="82296" cy="780625"/>
           </a:xfrm>
           <a:prstGeom prst="roundRect">
             <a:avLst>
@@ -10665,8 +10668,8 @@
         </p:nvSpPr>
         <p:spPr>
           <a:xfrm>
-            <a:off x="859536" y="5636704"/>
-            <a:ext cx="10643616" cy="537972"/>
+            <a:off x="859536" y="5623326"/>
+            <a:ext cx="10643616" cy="524593"/>
           </a:xfrm>
           <a:prstGeom prst="rect">
             <a:avLst/>
@@ -12778,200 +12781,6 @@
         <p:spPr>
           <a:xfrm>
             <a:off x="502920" y="1017794"/>
-            <a:ext cx="82296" cy="982980"/>
-          </a:xfrm>
-          <a:prstGeom prst="roundRect">
-            <a:avLst>
-              <a:gd name="adj" fmla="val 50000"/>
-            </a:avLst>
-          </a:prstGeom>
-          <a:solidFill>
-            <a:srgbClr val="F0AB00"/>
-          </a:solidFill>
-          <a:ln>
-            <a:noFill/>
-          </a:ln>
-          <a:effectLst/>
-        </p:spPr>
-        <p:style>
-          <a:lnRef idx="1">
-            <a:schemeClr val="accent1"/>
-          </a:lnRef>
-          <a:fillRef idx="3">
-            <a:schemeClr val="accent1"/>
-          </a:fillRef>
-          <a:effectRef idx="2">
-            <a:schemeClr val="accent1"/>
-          </a:effectRef>
-          <a:fontRef idx="minor">
-            <a:schemeClr val="lt1"/>
-          </a:fontRef>
-        </p:style>
-        <p:txBody>
-          <a:bodyPr rtlCol="0" anchor="ctr"/>
-          <a:lstStyle/>
-          <a:p>
-            <a:pPr algn="ctr"/>
-          </a:p>
-        </p:txBody>
-      </p:sp>
-      <p:sp>
-        <p:nvSpPr>
-          <p:cNvPr id="4" name="TextBox 3"/>
-          <p:cNvSpPr txBox="1"/>
-          <p:nvPr/>
-        </p:nvSpPr>
-        <p:spPr>
-          <a:xfrm>
-            <a:off x="859536" y="1145810"/>
-            <a:ext cx="10643616" cy="726948"/>
-          </a:xfrm>
-          <a:prstGeom prst="rect">
-            <a:avLst/>
-          </a:prstGeom>
-          <a:noFill/>
-        </p:spPr>
-        <p:txBody>
-          <a:bodyPr wrap="square" lIns="0" rIns="0" tIns="0" bIns="0" anchor="ctr">
-            <a:spAutoFit/>
-          </a:bodyPr>
-          <a:lstStyle/>
-          <a:p>
-            <a:pPr algn="l">
-              <a:lnSpc>
-                <a:spcPts val="1860"/>
-              </a:lnSpc>
-              <a:spcAft>
-                <a:spcPts val="300"/>
-              </a:spcAft>
-            </a:pPr>
-            <a:r>
-              <a:rPr sz="1500" b="1" i="0">
-                <a:solidFill>
-                  <a:srgbClr val="141B2E"/>
-                </a:solidFill>
-                <a:latin typeface="Arial"/>
-              </a:rPr>
-              <a:t>Предел, после которого список перестаёт работать: в нём нет «иначе».</a:t>
-            </a:r>
-            <a:r>
-              <a:rPr sz="1500" b="1" i="0">
-                <a:solidFill>
-                  <a:srgbClr val="141B2E"/>
-                </a:solidFill>
-                <a:latin typeface="Arial"/>
-              </a:rPr>
-              <a:t> Список без значения «другое» и «не указано» не отказывает — он заставляет модель выбрать ближайшее. Вы получите законное значение на заявке, которой в вашем списке не место, и не узнаете об этом никогда.</a:t>
-            </a:r>
-          </a:p>
-        </p:txBody>
-      </p:sp>
-      <p:sp>
-        <p:nvSpPr>
-          <p:cNvPr id="5" name="Rounded Rectangle 4"/>
-          <p:cNvSpPr/>
-          <p:nvPr/>
-        </p:nvSpPr>
-        <p:spPr>
-          <a:xfrm>
-            <a:off x="502920" y="2351464"/>
-            <a:ext cx="82296" cy="982980"/>
-          </a:xfrm>
-          <a:prstGeom prst="roundRect">
-            <a:avLst>
-              <a:gd name="adj" fmla="val 50000"/>
-            </a:avLst>
-          </a:prstGeom>
-          <a:solidFill>
-            <a:srgbClr val="F0AB00"/>
-          </a:solidFill>
-          <a:ln>
-            <a:noFill/>
-          </a:ln>
-          <a:effectLst/>
-        </p:spPr>
-        <p:style>
-          <a:lnRef idx="1">
-            <a:schemeClr val="accent1"/>
-          </a:lnRef>
-          <a:fillRef idx="3">
-            <a:schemeClr val="accent1"/>
-          </a:fillRef>
-          <a:effectRef idx="2">
-            <a:schemeClr val="accent1"/>
-          </a:effectRef>
-          <a:fontRef idx="minor">
-            <a:schemeClr val="lt1"/>
-          </a:fontRef>
-        </p:style>
-        <p:txBody>
-          <a:bodyPr rtlCol="0" anchor="ctr"/>
-          <a:lstStyle/>
-          <a:p>
-            <a:pPr algn="ctr"/>
-          </a:p>
-        </p:txBody>
-      </p:sp>
-      <p:sp>
-        <p:nvSpPr>
-          <p:cNvPr id="6" name="TextBox 5"/>
-          <p:cNvSpPr txBox="1"/>
-          <p:nvPr/>
-        </p:nvSpPr>
-        <p:spPr>
-          <a:xfrm>
-            <a:off x="859536" y="2479480"/>
-            <a:ext cx="10643616" cy="726948"/>
-          </a:xfrm>
-          <a:prstGeom prst="rect">
-            <a:avLst/>
-          </a:prstGeom>
-          <a:noFill/>
-        </p:spPr>
-        <p:txBody>
-          <a:bodyPr wrap="square" lIns="0" rIns="0" tIns="0" bIns="0" anchor="ctr">
-            <a:spAutoFit/>
-          </a:bodyPr>
-          <a:lstStyle/>
-          <a:p>
-            <a:pPr algn="l">
-              <a:lnSpc>
-                <a:spcPts val="1860"/>
-              </a:lnSpc>
-              <a:spcAft>
-                <a:spcPts val="300"/>
-              </a:spcAft>
-            </a:pPr>
-            <a:r>
-              <a:rPr sz="1500" b="1" i="0">
-                <a:solidFill>
-                  <a:srgbClr val="141B2E"/>
-                </a:solidFill>
-                <a:latin typeface="Arial"/>
-              </a:rPr>
-              <a:t>Первая строка оси закрыта.</a:t>
-            </a:r>
-            <a:r>
-              <a:rPr sz="1500" b="1" i="0">
-                <a:solidFill>
-                  <a:srgbClr val="141B2E"/>
-                </a:solidFill>
-                <a:latin typeface="Arial"/>
-              </a:rPr>
-              <a:t> Три узла заявку довозят. Тема при этом будет какой угодно, срочности не будет вовсе — ручаться нечем. Разница между «работает» и «можно ручаться» здесь ровно в двух узлах: тот, что сверяет со списком, и тот, что показывает результат.</a:t>
-            </a:r>
-          </a:p>
-        </p:txBody>
-      </p:sp>
-      <p:sp>
-        <p:nvSpPr>
-          <p:cNvPr id="7" name="Rounded Rectangle 6"/>
-          <p:cNvSpPr/>
-          <p:nvPr/>
-        </p:nvSpPr>
-        <p:spPr>
-          <a:xfrm>
-            <a:off x="502920" y="3685133"/>
             <a:ext cx="5454396" cy="2530856"/>
           </a:xfrm>
           <a:prstGeom prst="roundRect">
@@ -13013,13 +12822,13 @@
       </p:sp>
       <p:sp>
         <p:nvSpPr>
-          <p:cNvPr id="8" name="TextBox 7"/>
-          <p:cNvSpPr txBox="1"/>
-          <p:nvPr/>
-        </p:nvSpPr>
-        <p:spPr>
-          <a:xfrm>
-            <a:off x="685800" y="3794861"/>
+          <p:cNvPr id="4" name="TextBox 3"/>
+          <p:cNvSpPr txBox="1"/>
+          <p:nvPr/>
+        </p:nvSpPr>
+        <p:spPr>
+          <a:xfrm>
+            <a:off x="685800" y="1127522"/>
             <a:ext cx="5088636" cy="274320"/>
           </a:xfrm>
           <a:prstGeom prst="rect">
@@ -13048,20 +12857,20 @@
                 </a:solidFill>
                 <a:latin typeface="Arial"/>
               </a:rPr>
-              <a:t>ЗАКРЫТЫЙ СПИСОК **НУЖЕН**</a:t>
-            </a:r>
-          </a:p>
-        </p:txBody>
-      </p:sp>
-      <p:sp>
-        <p:nvSpPr>
-          <p:cNvPr id="9" name="TextBox 8"/>
-          <p:cNvSpPr txBox="1"/>
-          <p:nvPr/>
-        </p:nvSpPr>
-        <p:spPr>
-          <a:xfrm>
-            <a:off x="685800" y="4069181"/>
+              <a:t>ЗАКРЫТЫЙ СПИСОК НУЖЕН</a:t>
+            </a:r>
+          </a:p>
+        </p:txBody>
+      </p:sp>
+      <p:sp>
+        <p:nvSpPr>
+          <p:cNvPr id="5" name="TextBox 4"/>
+          <p:cNvSpPr txBox="1"/>
+          <p:nvPr/>
+        </p:nvSpPr>
+        <p:spPr>
+          <a:xfrm>
+            <a:off x="685800" y="1401842"/>
             <a:ext cx="5088636" cy="490982"/>
           </a:xfrm>
           <a:prstGeom prst="rect">
@@ -13097,13 +12906,13 @@
       </p:sp>
       <p:cxnSp>
         <p:nvCxnSpPr>
-          <p:cNvPr id="10" name="Connector 9"/>
+          <p:cNvPr id="6" name="Connector 5"/>
           <p:cNvCxnSpPr/>
           <p:nvPr/>
         </p:nvCxnSpPr>
         <p:spPr>
           <a:xfrm>
-            <a:off x="685800" y="4560163"/>
+            <a:off x="685800" y="1892824"/>
             <a:ext cx="5088636" cy="0"/>
           </a:xfrm>
           <a:prstGeom prst="line">
@@ -13132,13 +12941,13 @@
       </p:cxnSp>
       <p:sp>
         <p:nvSpPr>
-          <p:cNvPr id="11" name="TextBox 10"/>
-          <p:cNvSpPr txBox="1"/>
-          <p:nvPr/>
-        </p:nvSpPr>
-        <p:spPr>
-          <a:xfrm>
-            <a:off x="685800" y="4560163"/>
+          <p:cNvPr id="7" name="TextBox 6"/>
+          <p:cNvSpPr txBox="1"/>
+          <p:nvPr/>
+        </p:nvSpPr>
+        <p:spPr>
+          <a:xfrm>
+            <a:off x="685800" y="1892824"/>
             <a:ext cx="5088636" cy="318642"/>
           </a:xfrm>
           <a:prstGeom prst="rect">
@@ -13174,13 +12983,13 @@
       </p:sp>
       <p:cxnSp>
         <p:nvCxnSpPr>
-          <p:cNvPr id="12" name="Connector 11"/>
+          <p:cNvPr id="8" name="Connector 7"/>
           <p:cNvCxnSpPr/>
           <p:nvPr/>
         </p:nvCxnSpPr>
         <p:spPr>
           <a:xfrm>
-            <a:off x="685800" y="4878806"/>
+            <a:off x="685800" y="2211467"/>
             <a:ext cx="5088636" cy="0"/>
           </a:xfrm>
           <a:prstGeom prst="line">
@@ -13209,13 +13018,13 @@
       </p:cxnSp>
       <p:sp>
         <p:nvSpPr>
-          <p:cNvPr id="13" name="TextBox 12"/>
-          <p:cNvSpPr txBox="1"/>
-          <p:nvPr/>
-        </p:nvSpPr>
-        <p:spPr>
-          <a:xfrm>
-            <a:off x="685800" y="4878806"/>
+          <p:cNvPr id="9" name="TextBox 8"/>
+          <p:cNvSpPr txBox="1"/>
+          <p:nvPr/>
+        </p:nvSpPr>
+        <p:spPr>
+          <a:xfrm>
+            <a:off x="685800" y="2211467"/>
             <a:ext cx="5088636" cy="490982"/>
           </a:xfrm>
           <a:prstGeom prst="rect">
@@ -13251,13 +13060,13 @@
       </p:sp>
       <p:cxnSp>
         <p:nvCxnSpPr>
-          <p:cNvPr id="14" name="Connector 13"/>
+          <p:cNvPr id="10" name="Connector 9"/>
           <p:cNvCxnSpPr/>
           <p:nvPr/>
         </p:nvCxnSpPr>
         <p:spPr>
           <a:xfrm>
-            <a:off x="685800" y="5369788"/>
+            <a:off x="685800" y="2702449"/>
             <a:ext cx="5088636" cy="0"/>
           </a:xfrm>
           <a:prstGeom prst="line">
@@ -13286,13 +13095,13 @@
       </p:cxnSp>
       <p:sp>
         <p:nvSpPr>
-          <p:cNvPr id="15" name="TextBox 14"/>
-          <p:cNvSpPr txBox="1"/>
-          <p:nvPr/>
-        </p:nvSpPr>
-        <p:spPr>
-          <a:xfrm>
-            <a:off x="685800" y="5369788"/>
+          <p:cNvPr id="11" name="TextBox 10"/>
+          <p:cNvSpPr txBox="1"/>
+          <p:nvPr/>
+        </p:nvSpPr>
+        <p:spPr>
+          <a:xfrm>
+            <a:off x="685800" y="2702449"/>
             <a:ext cx="5088636" cy="318642"/>
           </a:xfrm>
           <a:prstGeom prst="rect">
@@ -13328,13 +13137,13 @@
       </p:sp>
       <p:sp>
         <p:nvSpPr>
-          <p:cNvPr id="16" name="Rounded Rectangle 15"/>
+          <p:cNvPr id="12" name="Rounded Rectangle 11"/>
           <p:cNvSpPr/>
           <p:nvPr/>
         </p:nvSpPr>
         <p:spPr>
           <a:xfrm>
-            <a:off x="6231636" y="3685133"/>
+            <a:off x="6231636" y="1017794"/>
             <a:ext cx="5454396" cy="2530856"/>
           </a:xfrm>
           <a:prstGeom prst="roundRect">
@@ -13376,13 +13185,13 @@
       </p:sp>
       <p:sp>
         <p:nvSpPr>
-          <p:cNvPr id="17" name="TextBox 16"/>
-          <p:cNvSpPr txBox="1"/>
-          <p:nvPr/>
-        </p:nvSpPr>
-        <p:spPr>
-          <a:xfrm>
-            <a:off x="6414516" y="3794861"/>
+          <p:cNvPr id="13" name="TextBox 12"/>
+          <p:cNvSpPr txBox="1"/>
+          <p:nvPr/>
+        </p:nvSpPr>
+        <p:spPr>
+          <a:xfrm>
+            <a:off x="6414516" y="1127522"/>
             <a:ext cx="5088636" cy="274320"/>
           </a:xfrm>
           <a:prstGeom prst="rect">
@@ -13411,20 +13220,20 @@
                 </a:solidFill>
                 <a:latin typeface="Arial"/>
               </a:rPr>
-              <a:t>ЗАКРЫТЫЙ СПИСОК **НЕ НУЖЕН**</a:t>
-            </a:r>
-          </a:p>
-        </p:txBody>
-      </p:sp>
-      <p:sp>
-        <p:nvSpPr>
-          <p:cNvPr id="18" name="TextBox 17"/>
-          <p:cNvSpPr txBox="1"/>
-          <p:nvPr/>
-        </p:nvSpPr>
-        <p:spPr>
-          <a:xfrm>
-            <a:off x="6414516" y="4069181"/>
+              <a:t>ЗАКРЫТЫЙ СПИСОК НЕ НУЖЕН</a:t>
+            </a:r>
+          </a:p>
+        </p:txBody>
+      </p:sp>
+      <p:sp>
+        <p:nvSpPr>
+          <p:cNvPr id="14" name="TextBox 13"/>
+          <p:cNvSpPr txBox="1"/>
+          <p:nvPr/>
+        </p:nvSpPr>
+        <p:spPr>
+          <a:xfrm>
+            <a:off x="6414516" y="1401842"/>
             <a:ext cx="5088636" cy="490982"/>
           </a:xfrm>
           <a:prstGeom prst="rect">
@@ -13460,13 +13269,13 @@
       </p:sp>
       <p:cxnSp>
         <p:nvCxnSpPr>
-          <p:cNvPr id="19" name="Connector 18"/>
+          <p:cNvPr id="15" name="Connector 14"/>
           <p:cNvCxnSpPr/>
           <p:nvPr/>
         </p:nvCxnSpPr>
         <p:spPr>
           <a:xfrm>
-            <a:off x="6414516" y="4560163"/>
+            <a:off x="6414516" y="1892824"/>
             <a:ext cx="5088636" cy="0"/>
           </a:xfrm>
           <a:prstGeom prst="line">
@@ -13495,13 +13304,13 @@
       </p:cxnSp>
       <p:sp>
         <p:nvSpPr>
-          <p:cNvPr id="20" name="TextBox 19"/>
-          <p:cNvSpPr txBox="1"/>
-          <p:nvPr/>
-        </p:nvSpPr>
-        <p:spPr>
-          <a:xfrm>
-            <a:off x="6414516" y="4560163"/>
+          <p:cNvPr id="16" name="TextBox 15"/>
+          <p:cNvSpPr txBox="1"/>
+          <p:nvPr/>
+        </p:nvSpPr>
+        <p:spPr>
+          <a:xfrm>
+            <a:off x="6414516" y="1892824"/>
             <a:ext cx="5088636" cy="490982"/>
           </a:xfrm>
           <a:prstGeom prst="rect">
@@ -13537,13 +13346,13 @@
       </p:sp>
       <p:cxnSp>
         <p:nvCxnSpPr>
-          <p:cNvPr id="21" name="Connector 20"/>
+          <p:cNvPr id="17" name="Connector 16"/>
           <p:cNvCxnSpPr/>
           <p:nvPr/>
         </p:nvCxnSpPr>
         <p:spPr>
           <a:xfrm>
-            <a:off x="6414516" y="5051145"/>
+            <a:off x="6414516" y="2383806"/>
             <a:ext cx="5088636" cy="0"/>
           </a:xfrm>
           <a:prstGeom prst="line">
@@ -13572,13 +13381,13 @@
       </p:cxnSp>
       <p:sp>
         <p:nvSpPr>
-          <p:cNvPr id="22" name="TextBox 21"/>
-          <p:cNvSpPr txBox="1"/>
-          <p:nvPr/>
-        </p:nvSpPr>
-        <p:spPr>
-          <a:xfrm>
-            <a:off x="6414516" y="5051145"/>
+          <p:cNvPr id="18" name="TextBox 17"/>
+          <p:cNvSpPr txBox="1"/>
+          <p:nvPr/>
+        </p:nvSpPr>
+        <p:spPr>
+          <a:xfrm>
+            <a:off x="6414516" y="2383806"/>
             <a:ext cx="5088636" cy="490982"/>
           </a:xfrm>
           <a:prstGeom prst="rect">
@@ -13614,13 +13423,13 @@
       </p:sp>
       <p:cxnSp>
         <p:nvCxnSpPr>
-          <p:cNvPr id="23" name="Connector 22"/>
+          <p:cNvPr id="19" name="Connector 18"/>
           <p:cNvCxnSpPr/>
           <p:nvPr/>
         </p:nvCxnSpPr>
         <p:spPr>
           <a:xfrm>
-            <a:off x="6414516" y="5542127"/>
+            <a:off x="6414516" y="2874788"/>
             <a:ext cx="5088636" cy="0"/>
           </a:xfrm>
           <a:prstGeom prst="line">
@@ -13649,14 +13458,199 @@
       </p:cxnSp>
       <p:sp>
         <p:nvSpPr>
+          <p:cNvPr id="20" name="TextBox 19"/>
+          <p:cNvSpPr txBox="1"/>
+          <p:nvPr/>
+        </p:nvSpPr>
+        <p:spPr>
+          <a:xfrm>
+            <a:off x="6414516" y="2874788"/>
+            <a:ext cx="5088636" cy="490982"/>
+          </a:xfrm>
+          <a:prstGeom prst="rect">
+            <a:avLst/>
+          </a:prstGeom>
+          <a:noFill/>
+        </p:spPr>
+        <p:txBody>
+          <a:bodyPr wrap="square" lIns="0" rIns="0" tIns="0" bIns="0" anchor="ctr">
+            <a:spAutoFit/>
+          </a:bodyPr>
+          <a:lstStyle/>
+          <a:p>
+            <a:pPr algn="l">
+              <a:lnSpc>
+                <a:spcPts val="1356"/>
+              </a:lnSpc>
+              <a:spcAft>
+                <a:spcPts val="0"/>
+              </a:spcAft>
+            </a:pPr>
+            <a:r>
+              <a:rPr sz="1150" b="0" i="0">
+                <a:solidFill>
+                  <a:srgbClr val="141B2E"/>
+                </a:solidFill>
+                <a:latin typeface="Arial"/>
+              </a:rPr>
+              <a:t>двадцать обращений в неделю, пять минут в день, и так будет дальше</a:t>
+            </a:r>
+          </a:p>
+        </p:txBody>
+      </p:sp>
+      <p:sp>
+        <p:nvSpPr>
+          <p:cNvPr id="21" name="Rounded Rectangle 20"/>
+          <p:cNvSpPr/>
+          <p:nvPr/>
+        </p:nvSpPr>
+        <p:spPr>
+          <a:xfrm>
+            <a:off x="502920" y="3899340"/>
+            <a:ext cx="82296" cy="982980"/>
+          </a:xfrm>
+          <a:prstGeom prst="roundRect">
+            <a:avLst>
+              <a:gd name="adj" fmla="val 50000"/>
+            </a:avLst>
+          </a:prstGeom>
+          <a:solidFill>
+            <a:srgbClr val="F0AB00"/>
+          </a:solidFill>
+          <a:ln>
+            <a:noFill/>
+          </a:ln>
+          <a:effectLst/>
+        </p:spPr>
+        <p:style>
+          <a:lnRef idx="1">
+            <a:schemeClr val="accent1"/>
+          </a:lnRef>
+          <a:fillRef idx="3">
+            <a:schemeClr val="accent1"/>
+          </a:fillRef>
+          <a:effectRef idx="2">
+            <a:schemeClr val="accent1"/>
+          </a:effectRef>
+          <a:fontRef idx="minor">
+            <a:schemeClr val="lt1"/>
+          </a:fontRef>
+        </p:style>
+        <p:txBody>
+          <a:bodyPr rtlCol="0" anchor="ctr"/>
+          <a:lstStyle/>
+          <a:p>
+            <a:pPr algn="ctr"/>
+          </a:p>
+        </p:txBody>
+      </p:sp>
+      <p:sp>
+        <p:nvSpPr>
+          <p:cNvPr id="22" name="TextBox 21"/>
+          <p:cNvSpPr txBox="1"/>
+          <p:nvPr/>
+        </p:nvSpPr>
+        <p:spPr>
+          <a:xfrm>
+            <a:off x="859536" y="4027356"/>
+            <a:ext cx="10643616" cy="726948"/>
+          </a:xfrm>
+          <a:prstGeom prst="rect">
+            <a:avLst/>
+          </a:prstGeom>
+          <a:noFill/>
+        </p:spPr>
+        <p:txBody>
+          <a:bodyPr wrap="square" lIns="0" rIns="0" tIns="0" bIns="0" anchor="ctr">
+            <a:spAutoFit/>
+          </a:bodyPr>
+          <a:lstStyle/>
+          <a:p>
+            <a:pPr algn="l">
+              <a:lnSpc>
+                <a:spcPts val="1860"/>
+              </a:lnSpc>
+              <a:spcAft>
+                <a:spcPts val="300"/>
+              </a:spcAft>
+            </a:pPr>
+            <a:r>
+              <a:rPr sz="1500" b="1" i="0">
+                <a:solidFill>
+                  <a:srgbClr val="141B2E"/>
+                </a:solidFill>
+                <a:latin typeface="Arial"/>
+              </a:rPr>
+              <a:t>Предел, после которого список перестаёт работать: в нём нет «иначе».</a:t>
+            </a:r>
+            <a:r>
+              <a:rPr sz="1500" b="1" i="0">
+                <a:solidFill>
+                  <a:srgbClr val="141B2E"/>
+                </a:solidFill>
+                <a:latin typeface="Arial"/>
+              </a:rPr>
+              <a:t> Список без значения «другое» и «не указано» не отказывает — он заставляет модель выбрать ближайшее. Вы получите законное значение на заявке, которой в вашем списке не место, и не узнаете об этом никогда.</a:t>
+            </a:r>
+          </a:p>
+        </p:txBody>
+      </p:sp>
+      <p:sp>
+        <p:nvSpPr>
+          <p:cNvPr id="23" name="Rounded Rectangle 22"/>
+          <p:cNvSpPr/>
+          <p:nvPr/>
+        </p:nvSpPr>
+        <p:spPr>
+          <a:xfrm>
+            <a:off x="502920" y="5233009"/>
+            <a:ext cx="82296" cy="982980"/>
+          </a:xfrm>
+          <a:prstGeom prst="roundRect">
+            <a:avLst>
+              <a:gd name="adj" fmla="val 50000"/>
+            </a:avLst>
+          </a:prstGeom>
+          <a:solidFill>
+            <a:srgbClr val="F0AB00"/>
+          </a:solidFill>
+          <a:ln>
+            <a:noFill/>
+          </a:ln>
+          <a:effectLst/>
+        </p:spPr>
+        <p:style>
+          <a:lnRef idx="1">
+            <a:schemeClr val="accent1"/>
+          </a:lnRef>
+          <a:fillRef idx="3">
+            <a:schemeClr val="accent1"/>
+          </a:fillRef>
+          <a:effectRef idx="2">
+            <a:schemeClr val="accent1"/>
+          </a:effectRef>
+          <a:fontRef idx="minor">
+            <a:schemeClr val="lt1"/>
+          </a:fontRef>
+        </p:style>
+        <p:txBody>
+          <a:bodyPr rtlCol="0" anchor="ctr"/>
+          <a:lstStyle/>
+          <a:p>
+            <a:pPr algn="ctr"/>
+          </a:p>
+        </p:txBody>
+      </p:sp>
+      <p:sp>
+        <p:nvSpPr>
           <p:cNvPr id="24" name="TextBox 23"/>
           <p:cNvSpPr txBox="1"/>
           <p:nvPr/>
         </p:nvSpPr>
         <p:spPr>
           <a:xfrm>
-            <a:off x="6414516" y="5542127"/>
-            <a:ext cx="5088636" cy="490982"/>
+            <a:off x="859536" y="5361025"/>
+            <a:ext cx="10643616" cy="726948"/>
           </a:xfrm>
           <a:prstGeom prst="rect">
             <a:avLst/>
@@ -13671,20 +13665,29 @@
           <a:p>
             <a:pPr algn="l">
               <a:lnSpc>
-                <a:spcPts val="1356"/>
-              </a:lnSpc>
-              <a:spcAft>
-                <a:spcPts val="0"/>
-              </a:spcAft>
-            </a:pPr>
-            <a:r>
-              <a:rPr sz="1150" b="0" i="0">
-                <a:solidFill>
-                  <a:srgbClr val="141B2E"/>
-                </a:solidFill>
-                <a:latin typeface="Arial"/>
-              </a:rPr>
-              <a:t>двадцать обращений в неделю, пять минут в день, и так будет дальше</a:t>
+                <a:spcPts val="1860"/>
+              </a:lnSpc>
+              <a:spcAft>
+                <a:spcPts val="300"/>
+              </a:spcAft>
+            </a:pPr>
+            <a:r>
+              <a:rPr sz="1500" b="1" i="0">
+                <a:solidFill>
+                  <a:srgbClr val="141B2E"/>
+                </a:solidFill>
+                <a:latin typeface="Arial"/>
+              </a:rPr>
+              <a:t>Первая строка оси закрыта.</a:t>
+            </a:r>
+            <a:r>
+              <a:rPr sz="1500" b="1" i="0">
+                <a:solidFill>
+                  <a:srgbClr val="141B2E"/>
+                </a:solidFill>
+                <a:latin typeface="Arial"/>
+              </a:rPr>
+              <a:t> Три узла заявку довозят. Тема при этом будет какой угодно, срочности не будет вовсе — ручаться нечем. Разница между «работает» и «можно ручаться» здесь ровно в двух узлах: тот, что сверяет со списком, и тот, что показывает результат.</a:t>
             </a:r>
           </a:p>
         </p:txBody>
@@ -18744,218 +18747,6 @@
         <p:spPr>
           <a:xfrm>
             <a:off x="502920" y="1040773"/>
-            <a:ext cx="82296" cy="982980"/>
-          </a:xfrm>
-          <a:prstGeom prst="roundRect">
-            <a:avLst>
-              <a:gd name="adj" fmla="val 50000"/>
-            </a:avLst>
-          </a:prstGeom>
-          <a:solidFill>
-            <a:srgbClr val="F0AB00"/>
-          </a:solidFill>
-          <a:ln>
-            <a:noFill/>
-          </a:ln>
-          <a:effectLst/>
-        </p:spPr>
-        <p:style>
-          <a:lnRef idx="1">
-            <a:schemeClr val="accent1"/>
-          </a:lnRef>
-          <a:fillRef idx="3">
-            <a:schemeClr val="accent1"/>
-          </a:fillRef>
-          <a:effectRef idx="2">
-            <a:schemeClr val="accent1"/>
-          </a:effectRef>
-          <a:fontRef idx="minor">
-            <a:schemeClr val="lt1"/>
-          </a:fontRef>
-        </p:style>
-        <p:txBody>
-          <a:bodyPr rtlCol="0" anchor="ctr"/>
-          <a:lstStyle/>
-          <a:p>
-            <a:pPr algn="ctr"/>
-          </a:p>
-        </p:txBody>
-      </p:sp>
-      <p:sp>
-        <p:nvSpPr>
-          <p:cNvPr id="4" name="TextBox 3"/>
-          <p:cNvSpPr txBox="1"/>
-          <p:nvPr/>
-        </p:nvSpPr>
-        <p:spPr>
-          <a:xfrm>
-            <a:off x="859536" y="1168789"/>
-            <a:ext cx="10643616" cy="726948"/>
-          </a:xfrm>
-          <a:prstGeom prst="rect">
-            <a:avLst/>
-          </a:prstGeom>
-          <a:noFill/>
-        </p:spPr>
-        <p:txBody>
-          <a:bodyPr wrap="square" lIns="0" rIns="0" tIns="0" bIns="0" anchor="ctr">
-            <a:spAutoFit/>
-          </a:bodyPr>
-          <a:lstStyle/>
-          <a:p>
-            <a:pPr algn="l">
-              <a:lnSpc>
-                <a:spcPts val="1860"/>
-              </a:lnSpc>
-              <a:spcAft>
-                <a:spcPts val="300"/>
-              </a:spcAft>
-            </a:pPr>
-            <a:r>
-              <a:rPr sz="1500" b="1" i="0">
-                <a:solidFill>
-                  <a:srgbClr val="141B2E"/>
-                </a:solidFill>
-                <a:latin typeface="Arial"/>
-              </a:rPr>
-              <a:t>Предел: учёт без договорённости.</a:t>
-            </a:r>
-            <a:r>
-              <a:rPr sz="1500" b="1" i="0">
-                <a:solidFill>
-                  <a:srgbClr val="141B2E"/>
-                </a:solidFill>
-                <a:latin typeface="Arial"/>
-              </a:rPr>
-              <a:t> Расщепление создаёт вопрос «что считать выполненной заявкой», и ответ на него процесс дать не может — его даёт команда. Две строки без такой договорённости хуже одной: по ним нельзя ни отчитаться, ни понять, кто кому звонит.</a:t>
-            </a:r>
-          </a:p>
-        </p:txBody>
-      </p:sp>
-      <p:sp>
-        <p:nvSpPr>
-          <p:cNvPr id="5" name="Rounded Rectangle 4"/>
-          <p:cNvSpPr/>
-          <p:nvPr/>
-        </p:nvSpPr>
-        <p:spPr>
-          <a:xfrm>
-            <a:off x="502920" y="2431889"/>
-            <a:ext cx="82296" cy="982980"/>
-          </a:xfrm>
-          <a:prstGeom prst="roundRect">
-            <a:avLst>
-              <a:gd name="adj" fmla="val 50000"/>
-            </a:avLst>
-          </a:prstGeom>
-          <a:solidFill>
-            <a:srgbClr val="F0AB00"/>
-          </a:solidFill>
-          <a:ln>
-            <a:noFill/>
-          </a:ln>
-          <a:effectLst/>
-        </p:spPr>
-        <p:style>
-          <a:lnRef idx="1">
-            <a:schemeClr val="accent1"/>
-          </a:lnRef>
-          <a:fillRef idx="3">
-            <a:schemeClr val="accent1"/>
-          </a:fillRef>
-          <a:effectRef idx="2">
-            <a:schemeClr val="accent1"/>
-          </a:effectRef>
-          <a:fontRef idx="minor">
-            <a:schemeClr val="lt1"/>
-          </a:fontRef>
-        </p:style>
-        <p:txBody>
-          <a:bodyPr rtlCol="0" anchor="ctr"/>
-          <a:lstStyle/>
-          <a:p>
-            <a:pPr algn="ctr"/>
-          </a:p>
-        </p:txBody>
-      </p:sp>
-      <p:sp>
-        <p:nvSpPr>
-          <p:cNvPr id="6" name="TextBox 5"/>
-          <p:cNvSpPr txBox="1"/>
-          <p:nvPr/>
-        </p:nvSpPr>
-        <p:spPr>
-          <a:xfrm>
-            <a:off x="859536" y="2559905"/>
-            <a:ext cx="10643616" cy="726948"/>
-          </a:xfrm>
-          <a:prstGeom prst="rect">
-            <a:avLst/>
-          </a:prstGeom>
-          <a:noFill/>
-        </p:spPr>
-        <p:txBody>
-          <a:bodyPr wrap="square" lIns="0" rIns="0" tIns="0" bIns="0" anchor="ctr">
-            <a:spAutoFit/>
-          </a:bodyPr>
-          <a:lstStyle/>
-          <a:p>
-            <a:pPr algn="l">
-              <a:lnSpc>
-                <a:spcPts val="1860"/>
-              </a:lnSpc>
-              <a:spcAft>
-                <a:spcPts val="300"/>
-              </a:spcAft>
-            </a:pPr>
-            <a:r>
-              <a:rPr sz="1500" b="1" i="0">
-                <a:solidFill>
-                  <a:srgbClr val="141B2E"/>
-                </a:solidFill>
-                <a:latin typeface="Arial"/>
-              </a:rPr>
-              <a:t>Вторая строка оси закрыта.</a:t>
-            </a:r>
-            <a:r>
-              <a:rPr sz="1500" b="1" i="0">
-                <a:solidFill>
-                  <a:srgbClr val="141B2E"/>
-                </a:solidFill>
-                <a:latin typeface="Arial"/>
-              </a:rPr>
-              <a:t> Клетка заполнена, значение законное — и это выглядит успехом. Чем оказалось: </a:t>
-            </a:r>
-            <a:r>
-              <a:rPr sz="1500" b="1" i="0">
-                <a:solidFill>
-                  <a:srgbClr val="141B2E"/>
-                </a:solidFill>
-                <a:latin typeface="Arial"/>
-              </a:rPr>
-              <a:t>в заявке было две темы, а записали одну, и вторая не осталась нигде</a:t>
-            </a:r>
-            <a:r>
-              <a:rPr sz="1500" b="1" i="0">
-                <a:solidFill>
-                  <a:srgbClr val="141B2E"/>
-                </a:solidFill>
-                <a:latin typeface="Arial"/>
-              </a:rPr>
-              <a:t> — ни в таблице, ни в журнале, ни на экране.</a:t>
-            </a:r>
-          </a:p>
-        </p:txBody>
-      </p:sp>
-      <p:sp>
-        <p:nvSpPr>
-          <p:cNvPr id="7" name="Rounded Rectangle 6"/>
-          <p:cNvSpPr/>
-          <p:nvPr/>
-        </p:nvSpPr>
-        <p:spPr>
-          <a:xfrm>
-            <a:off x="502920" y="3823004"/>
             <a:ext cx="5454396" cy="2358517"/>
           </a:xfrm>
           <a:prstGeom prst="roundRect">
@@ -18997,13 +18788,13 @@
       </p:sp>
       <p:sp>
         <p:nvSpPr>
-          <p:cNvPr id="8" name="TextBox 7"/>
-          <p:cNvSpPr txBox="1"/>
-          <p:nvPr/>
-        </p:nvSpPr>
-        <p:spPr>
-          <a:xfrm>
-            <a:off x="685800" y="3932732"/>
+          <p:cNvPr id="4" name="TextBox 3"/>
+          <p:cNvSpPr txBox="1"/>
+          <p:nvPr/>
+        </p:nvSpPr>
+        <p:spPr>
+          <a:xfrm>
+            <a:off x="685800" y="1150501"/>
             <a:ext cx="5088636" cy="274320"/>
           </a:xfrm>
           <a:prstGeom prst="rect">
@@ -19032,20 +18823,20 @@
                 </a:solidFill>
                 <a:latin typeface="Arial"/>
               </a:rPr>
-              <a:t>РАСЩЕПЛЯТЬ **НУЖНО**</a:t>
-            </a:r>
-          </a:p>
-        </p:txBody>
-      </p:sp>
-      <p:sp>
-        <p:nvSpPr>
-          <p:cNvPr id="9" name="TextBox 8"/>
-          <p:cNvSpPr txBox="1"/>
-          <p:nvPr/>
-        </p:nvSpPr>
-        <p:spPr>
-          <a:xfrm>
-            <a:off x="685800" y="4207052"/>
+              <a:t>РАСЩЕПЛЯТЬ НУЖНО</a:t>
+            </a:r>
+          </a:p>
+        </p:txBody>
+      </p:sp>
+      <p:sp>
+        <p:nvSpPr>
+          <p:cNvPr id="5" name="TextBox 4"/>
+          <p:cNvSpPr txBox="1"/>
+          <p:nvPr/>
+        </p:nvSpPr>
+        <p:spPr>
+          <a:xfrm>
+            <a:off x="685800" y="1424821"/>
             <a:ext cx="5088636" cy="490982"/>
           </a:xfrm>
           <a:prstGeom prst="rect">
@@ -19081,13 +18872,13 @@
       </p:sp>
       <p:cxnSp>
         <p:nvCxnSpPr>
-          <p:cNvPr id="10" name="Connector 9"/>
+          <p:cNvPr id="6" name="Connector 5"/>
           <p:cNvCxnSpPr/>
           <p:nvPr/>
         </p:nvCxnSpPr>
         <p:spPr>
           <a:xfrm>
-            <a:off x="685800" y="4698034"/>
+            <a:off x="685800" y="1915803"/>
             <a:ext cx="5088636" cy="0"/>
           </a:xfrm>
           <a:prstGeom prst="line">
@@ -19116,13 +18907,13 @@
       </p:cxnSp>
       <p:sp>
         <p:nvSpPr>
-          <p:cNvPr id="11" name="TextBox 10"/>
-          <p:cNvSpPr txBox="1"/>
-          <p:nvPr/>
-        </p:nvSpPr>
-        <p:spPr>
-          <a:xfrm>
-            <a:off x="685800" y="4698034"/>
+          <p:cNvPr id="7" name="TextBox 6"/>
+          <p:cNvSpPr txBox="1"/>
+          <p:nvPr/>
+        </p:nvSpPr>
+        <p:spPr>
+          <a:xfrm>
+            <a:off x="685800" y="1915803"/>
             <a:ext cx="5088636" cy="490982"/>
           </a:xfrm>
           <a:prstGeom prst="rect">
@@ -19158,13 +18949,13 @@
       </p:sp>
       <p:cxnSp>
         <p:nvCxnSpPr>
-          <p:cNvPr id="12" name="Connector 11"/>
+          <p:cNvPr id="8" name="Connector 7"/>
           <p:cNvCxnSpPr/>
           <p:nvPr/>
         </p:nvCxnSpPr>
         <p:spPr>
           <a:xfrm>
-            <a:off x="685800" y="5189016"/>
+            <a:off x="685800" y="2406785"/>
             <a:ext cx="5088636" cy="0"/>
           </a:xfrm>
           <a:prstGeom prst="line">
@@ -19193,13 +18984,13 @@
       </p:cxnSp>
       <p:sp>
         <p:nvSpPr>
-          <p:cNvPr id="13" name="TextBox 12"/>
-          <p:cNvSpPr txBox="1"/>
-          <p:nvPr/>
-        </p:nvSpPr>
-        <p:spPr>
-          <a:xfrm>
-            <a:off x="685800" y="5189016"/>
+          <p:cNvPr id="9" name="TextBox 8"/>
+          <p:cNvSpPr txBox="1"/>
+          <p:nvPr/>
+        </p:nvSpPr>
+        <p:spPr>
+          <a:xfrm>
+            <a:off x="685800" y="2406785"/>
             <a:ext cx="5088636" cy="490982"/>
           </a:xfrm>
           <a:prstGeom prst="rect">
@@ -19235,13 +19026,13 @@
       </p:sp>
       <p:cxnSp>
         <p:nvCxnSpPr>
-          <p:cNvPr id="14" name="Connector 13"/>
+          <p:cNvPr id="10" name="Connector 9"/>
           <p:cNvCxnSpPr/>
           <p:nvPr/>
         </p:nvCxnSpPr>
         <p:spPr>
           <a:xfrm>
-            <a:off x="685800" y="5679998"/>
+            <a:off x="685800" y="2897767"/>
             <a:ext cx="5088636" cy="0"/>
           </a:xfrm>
           <a:prstGeom prst="line">
@@ -19270,13 +19061,13 @@
       </p:cxnSp>
       <p:sp>
         <p:nvSpPr>
-          <p:cNvPr id="15" name="TextBox 14"/>
-          <p:cNvSpPr txBox="1"/>
-          <p:nvPr/>
-        </p:nvSpPr>
-        <p:spPr>
-          <a:xfrm>
-            <a:off x="685800" y="5679998"/>
+          <p:cNvPr id="11" name="TextBox 10"/>
+          <p:cNvSpPr txBox="1"/>
+          <p:nvPr/>
+        </p:nvSpPr>
+        <p:spPr>
+          <a:xfrm>
+            <a:off x="685800" y="2897767"/>
             <a:ext cx="5088636" cy="318642"/>
           </a:xfrm>
           <a:prstGeom prst="rect">
@@ -19312,13 +19103,13 @@
       </p:sp>
       <p:sp>
         <p:nvSpPr>
-          <p:cNvPr id="16" name="Rounded Rectangle 15"/>
+          <p:cNvPr id="12" name="Rounded Rectangle 11"/>
           <p:cNvSpPr/>
           <p:nvPr/>
         </p:nvSpPr>
         <p:spPr>
           <a:xfrm>
-            <a:off x="6231636" y="3823004"/>
+            <a:off x="6231636" y="1040773"/>
             <a:ext cx="5454396" cy="2358517"/>
           </a:xfrm>
           <a:prstGeom prst="roundRect">
@@ -19360,13 +19151,13 @@
       </p:sp>
       <p:sp>
         <p:nvSpPr>
-          <p:cNvPr id="17" name="TextBox 16"/>
-          <p:cNvSpPr txBox="1"/>
-          <p:nvPr/>
-        </p:nvSpPr>
-        <p:spPr>
-          <a:xfrm>
-            <a:off x="6414516" y="3932732"/>
+          <p:cNvPr id="13" name="TextBox 12"/>
+          <p:cNvSpPr txBox="1"/>
+          <p:nvPr/>
+        </p:nvSpPr>
+        <p:spPr>
+          <a:xfrm>
+            <a:off x="6414516" y="1150501"/>
             <a:ext cx="5088636" cy="274320"/>
           </a:xfrm>
           <a:prstGeom prst="rect">
@@ -19395,20 +19186,20 @@
                 </a:solidFill>
                 <a:latin typeface="Arial"/>
               </a:rPr>
-              <a:t>РАСЩЕПЛЯТЬ **НЕ НУЖНО**</a:t>
-            </a:r>
-          </a:p>
-        </p:txBody>
-      </p:sp>
-      <p:sp>
-        <p:nvSpPr>
-          <p:cNvPr id="18" name="TextBox 17"/>
-          <p:cNvSpPr txBox="1"/>
-          <p:nvPr/>
-        </p:nvSpPr>
-        <p:spPr>
-          <a:xfrm>
-            <a:off x="6414516" y="4207052"/>
+              <a:t>РАСЩЕПЛЯТЬ НЕ НУЖНО</a:t>
+            </a:r>
+          </a:p>
+        </p:txBody>
+      </p:sp>
+      <p:sp>
+        <p:nvSpPr>
+          <p:cNvPr id="14" name="TextBox 13"/>
+          <p:cNvSpPr txBox="1"/>
+          <p:nvPr/>
+        </p:nvSpPr>
+        <p:spPr>
+          <a:xfrm>
+            <a:off x="6414516" y="1424821"/>
             <a:ext cx="5088636" cy="490982"/>
           </a:xfrm>
           <a:prstGeom prst="rect">
@@ -19444,13 +19235,13 @@
       </p:sp>
       <p:cxnSp>
         <p:nvCxnSpPr>
-          <p:cNvPr id="19" name="Connector 18"/>
+          <p:cNvPr id="15" name="Connector 14"/>
           <p:cNvCxnSpPr/>
           <p:nvPr/>
         </p:nvCxnSpPr>
         <p:spPr>
           <a:xfrm>
-            <a:off x="6414516" y="4698034"/>
+            <a:off x="6414516" y="1915803"/>
             <a:ext cx="5088636" cy="0"/>
           </a:xfrm>
           <a:prstGeom prst="line">
@@ -19479,13 +19270,13 @@
       </p:cxnSp>
       <p:sp>
         <p:nvSpPr>
-          <p:cNvPr id="20" name="TextBox 19"/>
-          <p:cNvSpPr txBox="1"/>
-          <p:nvPr/>
-        </p:nvSpPr>
-        <p:spPr>
-          <a:xfrm>
-            <a:off x="6414516" y="4698034"/>
+          <p:cNvPr id="16" name="TextBox 15"/>
+          <p:cNvSpPr txBox="1"/>
+          <p:nvPr/>
+        </p:nvSpPr>
+        <p:spPr>
+          <a:xfrm>
+            <a:off x="6414516" y="1915803"/>
             <a:ext cx="5088636" cy="490982"/>
           </a:xfrm>
           <a:prstGeom prst="rect">
@@ -19521,13 +19312,13 @@
       </p:sp>
       <p:cxnSp>
         <p:nvCxnSpPr>
-          <p:cNvPr id="21" name="Connector 20"/>
+          <p:cNvPr id="17" name="Connector 16"/>
           <p:cNvCxnSpPr/>
           <p:nvPr/>
         </p:nvCxnSpPr>
         <p:spPr>
           <a:xfrm>
-            <a:off x="6414516" y="5189016"/>
+            <a:off x="6414516" y="2406785"/>
             <a:ext cx="5088636" cy="0"/>
           </a:xfrm>
           <a:prstGeom prst="line">
@@ -19556,13 +19347,13 @@
       </p:cxnSp>
       <p:sp>
         <p:nvSpPr>
-          <p:cNvPr id="22" name="TextBox 21"/>
-          <p:cNvSpPr txBox="1"/>
-          <p:nvPr/>
-        </p:nvSpPr>
-        <p:spPr>
-          <a:xfrm>
-            <a:off x="6414516" y="5189016"/>
+          <p:cNvPr id="18" name="TextBox 17"/>
+          <p:cNvSpPr txBox="1"/>
+          <p:nvPr/>
+        </p:nvSpPr>
+        <p:spPr>
+          <a:xfrm>
+            <a:off x="6414516" y="2406785"/>
             <a:ext cx="5088636" cy="490982"/>
           </a:xfrm>
           <a:prstGeom prst="rect">
@@ -19598,13 +19389,13 @@
       </p:sp>
       <p:cxnSp>
         <p:nvCxnSpPr>
-          <p:cNvPr id="23" name="Connector 22"/>
+          <p:cNvPr id="19" name="Connector 18"/>
           <p:cNvCxnSpPr/>
           <p:nvPr/>
         </p:nvCxnSpPr>
         <p:spPr>
           <a:xfrm>
-            <a:off x="6414516" y="5679998"/>
+            <a:off x="6414516" y="2897767"/>
             <a:ext cx="5088636" cy="0"/>
           </a:xfrm>
           <a:prstGeom prst="line">
@@ -19633,14 +19424,199 @@
       </p:cxnSp>
       <p:sp>
         <p:nvSpPr>
+          <p:cNvPr id="20" name="TextBox 19"/>
+          <p:cNvSpPr txBox="1"/>
+          <p:nvPr/>
+        </p:nvSpPr>
+        <p:spPr>
+          <a:xfrm>
+            <a:off x="6414516" y="2897767"/>
+            <a:ext cx="5088636" cy="318642"/>
+          </a:xfrm>
+          <a:prstGeom prst="rect">
+            <a:avLst/>
+          </a:prstGeom>
+          <a:noFill/>
+        </p:spPr>
+        <p:txBody>
+          <a:bodyPr wrap="square" lIns="0" rIns="0" tIns="0" bIns="0" anchor="ctr">
+            <a:spAutoFit/>
+          </a:bodyPr>
+          <a:lstStyle/>
+          <a:p>
+            <a:pPr algn="l">
+              <a:lnSpc>
+                <a:spcPts val="1356"/>
+              </a:lnSpc>
+              <a:spcAft>
+                <a:spcPts val="0"/>
+              </a:spcAft>
+            </a:pPr>
+            <a:r>
+              <a:rPr sz="1150" b="0" i="0">
+                <a:solidFill>
+                  <a:srgbClr val="141B2E"/>
+                </a:solidFill>
+                <a:latin typeface="Arial"/>
+              </a:rPr>
+              <a:t>двойной звонок клиенту дороже, чем задержка по второй теме</a:t>
+            </a:r>
+          </a:p>
+        </p:txBody>
+      </p:sp>
+      <p:sp>
+        <p:nvSpPr>
+          <p:cNvPr id="21" name="Rounded Rectangle 20"/>
+          <p:cNvSpPr/>
+          <p:nvPr/>
+        </p:nvSpPr>
+        <p:spPr>
+          <a:xfrm>
+            <a:off x="502920" y="3807426"/>
+            <a:ext cx="82296" cy="982980"/>
+          </a:xfrm>
+          <a:prstGeom prst="roundRect">
+            <a:avLst>
+              <a:gd name="adj" fmla="val 50000"/>
+            </a:avLst>
+          </a:prstGeom>
+          <a:solidFill>
+            <a:srgbClr val="F0AB00"/>
+          </a:solidFill>
+          <a:ln>
+            <a:noFill/>
+          </a:ln>
+          <a:effectLst/>
+        </p:spPr>
+        <p:style>
+          <a:lnRef idx="1">
+            <a:schemeClr val="accent1"/>
+          </a:lnRef>
+          <a:fillRef idx="3">
+            <a:schemeClr val="accent1"/>
+          </a:fillRef>
+          <a:effectRef idx="2">
+            <a:schemeClr val="accent1"/>
+          </a:effectRef>
+          <a:fontRef idx="minor">
+            <a:schemeClr val="lt1"/>
+          </a:fontRef>
+        </p:style>
+        <p:txBody>
+          <a:bodyPr rtlCol="0" anchor="ctr"/>
+          <a:lstStyle/>
+          <a:p>
+            <a:pPr algn="ctr"/>
+          </a:p>
+        </p:txBody>
+      </p:sp>
+      <p:sp>
+        <p:nvSpPr>
+          <p:cNvPr id="22" name="TextBox 21"/>
+          <p:cNvSpPr txBox="1"/>
+          <p:nvPr/>
+        </p:nvSpPr>
+        <p:spPr>
+          <a:xfrm>
+            <a:off x="859536" y="3935442"/>
+            <a:ext cx="10643616" cy="726948"/>
+          </a:xfrm>
+          <a:prstGeom prst="rect">
+            <a:avLst/>
+          </a:prstGeom>
+          <a:noFill/>
+        </p:spPr>
+        <p:txBody>
+          <a:bodyPr wrap="square" lIns="0" rIns="0" tIns="0" bIns="0" anchor="ctr">
+            <a:spAutoFit/>
+          </a:bodyPr>
+          <a:lstStyle/>
+          <a:p>
+            <a:pPr algn="l">
+              <a:lnSpc>
+                <a:spcPts val="1860"/>
+              </a:lnSpc>
+              <a:spcAft>
+                <a:spcPts val="300"/>
+              </a:spcAft>
+            </a:pPr>
+            <a:r>
+              <a:rPr sz="1500" b="1" i="0">
+                <a:solidFill>
+                  <a:srgbClr val="141B2E"/>
+                </a:solidFill>
+                <a:latin typeface="Arial"/>
+              </a:rPr>
+              <a:t>Предел: учёт без договорённости.</a:t>
+            </a:r>
+            <a:r>
+              <a:rPr sz="1500" b="1" i="0">
+                <a:solidFill>
+                  <a:srgbClr val="141B2E"/>
+                </a:solidFill>
+                <a:latin typeface="Arial"/>
+              </a:rPr>
+              <a:t> Расщепление создаёт вопрос «что считать выполненной заявкой», и ответ на него процесс дать не может — его даёт команда. Две строки без такой договорённости хуже одной: по ним нельзя ни отчитаться, ни понять, кто кому звонит.</a:t>
+            </a:r>
+          </a:p>
+        </p:txBody>
+      </p:sp>
+      <p:sp>
+        <p:nvSpPr>
+          <p:cNvPr id="23" name="Rounded Rectangle 22"/>
+          <p:cNvSpPr/>
+          <p:nvPr/>
+        </p:nvSpPr>
+        <p:spPr>
+          <a:xfrm>
+            <a:off x="502920" y="5198541"/>
+            <a:ext cx="82296" cy="982980"/>
+          </a:xfrm>
+          <a:prstGeom prst="roundRect">
+            <a:avLst>
+              <a:gd name="adj" fmla="val 50000"/>
+            </a:avLst>
+          </a:prstGeom>
+          <a:solidFill>
+            <a:srgbClr val="F0AB00"/>
+          </a:solidFill>
+          <a:ln>
+            <a:noFill/>
+          </a:ln>
+          <a:effectLst/>
+        </p:spPr>
+        <p:style>
+          <a:lnRef idx="1">
+            <a:schemeClr val="accent1"/>
+          </a:lnRef>
+          <a:fillRef idx="3">
+            <a:schemeClr val="accent1"/>
+          </a:fillRef>
+          <a:effectRef idx="2">
+            <a:schemeClr val="accent1"/>
+          </a:effectRef>
+          <a:fontRef idx="minor">
+            <a:schemeClr val="lt1"/>
+          </a:fontRef>
+        </p:style>
+        <p:txBody>
+          <a:bodyPr rtlCol="0" anchor="ctr"/>
+          <a:lstStyle/>
+          <a:p>
+            <a:pPr algn="ctr"/>
+          </a:p>
+        </p:txBody>
+      </p:sp>
+      <p:sp>
+        <p:nvSpPr>
           <p:cNvPr id="24" name="TextBox 23"/>
           <p:cNvSpPr txBox="1"/>
           <p:nvPr/>
         </p:nvSpPr>
         <p:spPr>
           <a:xfrm>
-            <a:off x="6414516" y="5679998"/>
-            <a:ext cx="5088636" cy="318642"/>
+            <a:off x="859536" y="5326557"/>
+            <a:ext cx="10643616" cy="726948"/>
           </a:xfrm>
           <a:prstGeom prst="rect">
             <a:avLst/>
@@ -19655,20 +19631,47 @@
           <a:p>
             <a:pPr algn="l">
               <a:lnSpc>
-                <a:spcPts val="1356"/>
-              </a:lnSpc>
-              <a:spcAft>
-                <a:spcPts val="0"/>
-              </a:spcAft>
-            </a:pPr>
-            <a:r>
-              <a:rPr sz="1150" b="0" i="0">
-                <a:solidFill>
-                  <a:srgbClr val="141B2E"/>
-                </a:solidFill>
-                <a:latin typeface="Arial"/>
-              </a:rPr>
-              <a:t>двойной звонок клиенту дороже, чем задержка по второй теме</a:t>
+                <a:spcPts val="1860"/>
+              </a:lnSpc>
+              <a:spcAft>
+                <a:spcPts val="300"/>
+              </a:spcAft>
+            </a:pPr>
+            <a:r>
+              <a:rPr sz="1500" b="1" i="0">
+                <a:solidFill>
+                  <a:srgbClr val="141B2E"/>
+                </a:solidFill>
+                <a:latin typeface="Arial"/>
+              </a:rPr>
+              <a:t>Вторая строка оси закрыта.</a:t>
+            </a:r>
+            <a:r>
+              <a:rPr sz="1500" b="1" i="0">
+                <a:solidFill>
+                  <a:srgbClr val="141B2E"/>
+                </a:solidFill>
+                <a:latin typeface="Arial"/>
+              </a:rPr>
+              <a:t> Клетка заполнена, значение законное — и это выглядит успехом. Чем оказалось: </a:t>
+            </a:r>
+            <a:r>
+              <a:rPr sz="1500" b="1" i="0">
+                <a:solidFill>
+                  <a:srgbClr val="141B2E"/>
+                </a:solidFill>
+                <a:latin typeface="Arial"/>
+              </a:rPr>
+              <a:t>в заявке было две темы, а записали одну, и вторая не осталась нигде</a:t>
+            </a:r>
+            <a:r>
+              <a:rPr sz="1500" b="1" i="0">
+                <a:solidFill>
+                  <a:srgbClr val="141B2E"/>
+                </a:solidFill>
+                <a:latin typeface="Arial"/>
+              </a:rPr>
+              <a:t> — ни в таблице, ни в журнале, ни на экране.</a:t>
             </a:r>
           </a:p>
         </p:txBody>
@@ -21048,7 +21051,7 @@
         </p:nvSpPr>
         <p:spPr>
           <a:xfrm>
-            <a:off x="502920" y="1622602"/>
+            <a:off x="502920" y="2080260"/>
             <a:ext cx="11183112" cy="822960"/>
           </a:xfrm>
           <a:prstGeom prst="roundRect">
@@ -21096,7 +21099,7 @@
         </p:nvSpPr>
         <p:spPr>
           <a:xfrm>
-            <a:off x="722376" y="1750618"/>
+            <a:off x="722376" y="2208276"/>
             <a:ext cx="10634472" cy="566928"/>
           </a:xfrm>
           <a:prstGeom prst="rect">
@@ -21138,98 +21141,7 @@
         </p:nvSpPr>
         <p:spPr>
           <a:xfrm>
-            <a:off x="502920" y="3113074"/>
-            <a:ext cx="2686050" cy="1051560"/>
-          </a:xfrm>
-          <a:prstGeom prst="roundRect">
-            <a:avLst>
-              <a:gd name="adj" fmla="val 25000"/>
-            </a:avLst>
-          </a:prstGeom>
-          <a:solidFill>
-            <a:srgbClr val="FEF5E0"/>
-          </a:solidFill>
-          <a:ln w="19050">
-            <a:solidFill>
-              <a:srgbClr val="8A6200"/>
-            </a:solidFill>
-            <a:prstDash val="dash"/>
-          </a:ln>
-          <a:effectLst/>
-        </p:spPr>
-        <p:style>
-          <a:lnRef idx="1">
-            <a:schemeClr val="accent1"/>
-          </a:lnRef>
-          <a:fillRef idx="3">
-            <a:schemeClr val="accent1"/>
-          </a:fillRef>
-          <a:effectRef idx="2">
-            <a:schemeClr val="accent1"/>
-          </a:effectRef>
-          <a:fontRef idx="minor">
-            <a:schemeClr val="lt1"/>
-          </a:fontRef>
-        </p:style>
-        <p:txBody>
-          <a:bodyPr rtlCol="0" anchor="ctr"/>
-          <a:lstStyle/>
-          <a:p>
-            <a:pPr algn="ctr"/>
-          </a:p>
-        </p:txBody>
-      </p:sp>
-      <p:sp>
-        <p:nvSpPr>
-          <p:cNvPr id="6" name="TextBox 5"/>
-          <p:cNvSpPr txBox="1"/>
-          <p:nvPr/>
-        </p:nvSpPr>
-        <p:spPr>
-          <a:xfrm>
-            <a:off x="612648" y="3113074"/>
-            <a:ext cx="2466594" cy="1051560"/>
-          </a:xfrm>
-          <a:prstGeom prst="rect">
-            <a:avLst/>
-          </a:prstGeom>
-          <a:noFill/>
-        </p:spPr>
-        <p:txBody>
-          <a:bodyPr wrap="square" lIns="0" rIns="0" tIns="0" bIns="0" anchor="ctr">
-            <a:spAutoFit/>
-          </a:bodyPr>
-          <a:lstStyle/>
-          <a:p>
-            <a:pPr algn="ctr">
-              <a:lnSpc>
-                <a:spcPts val="1565"/>
-              </a:lnSpc>
-              <a:spcAft>
-                <a:spcPts val="0"/>
-              </a:spcAft>
-            </a:pPr>
-            <a:r>
-              <a:rPr sz="1350" b="1" i="0">
-                <a:solidFill>
-                  <a:srgbClr val="8A6200"/>
-                </a:solidFill>
-                <a:latin typeface="Arial"/>
-              </a:rPr>
-              <a:t>остановить весь процесс</a:t>
-            </a:r>
-          </a:p>
-        </p:txBody>
-      </p:sp>
-      <p:sp>
-        <p:nvSpPr>
-          <p:cNvPr id="7" name="Rounded Rectangle 6"/>
-          <p:cNvSpPr/>
-          <p:nvPr/>
-        </p:nvSpPr>
-        <p:spPr>
-          <a:xfrm>
-            <a:off x="3335274" y="3113074"/>
+            <a:off x="502920" y="3570732"/>
             <a:ext cx="2686050" cy="1051560"/>
           </a:xfrm>
           <a:prstGeom prst="roundRect">
@@ -21271,13 +21183,13 @@
       </p:sp>
       <p:sp>
         <p:nvSpPr>
-          <p:cNvPr id="8" name="TextBox 7"/>
-          <p:cNvSpPr txBox="1"/>
-          <p:nvPr/>
-        </p:nvSpPr>
-        <p:spPr>
-          <a:xfrm>
-            <a:off x="3445002" y="3113074"/>
+          <p:cNvPr id="6" name="TextBox 5"/>
+          <p:cNvSpPr txBox="1"/>
+          <p:nvPr/>
+        </p:nvSpPr>
+        <p:spPr>
+          <a:xfrm>
+            <a:off x="612648" y="3570732"/>
             <a:ext cx="2466594" cy="1051560"/>
           </a:xfrm>
           <a:prstGeom prst="rect">
@@ -21306,20 +21218,20 @@
                 </a:solidFill>
                 <a:latin typeface="Arial"/>
               </a:rPr>
-              <a:t>пропустить и идти дальше</a:t>
-            </a:r>
-          </a:p>
-        </p:txBody>
-      </p:sp>
-      <p:sp>
-        <p:nvSpPr>
-          <p:cNvPr id="9" name="Rounded Rectangle 8"/>
+              <a:t>остановить весь процесс</a:t>
+            </a:r>
+          </a:p>
+        </p:txBody>
+      </p:sp>
+      <p:sp>
+        <p:nvSpPr>
+          <p:cNvPr id="7" name="Rounded Rectangle 6"/>
           <p:cNvSpPr/>
           <p:nvPr/>
         </p:nvSpPr>
         <p:spPr>
           <a:xfrm>
-            <a:off x="6167628" y="3113074"/>
+            <a:off x="3335274" y="3570732"/>
             <a:ext cx="2686050" cy="1051560"/>
           </a:xfrm>
           <a:prstGeom prst="roundRect">
@@ -21361,13 +21273,13 @@
       </p:sp>
       <p:sp>
         <p:nvSpPr>
-          <p:cNvPr id="10" name="TextBox 9"/>
-          <p:cNvSpPr txBox="1"/>
-          <p:nvPr/>
-        </p:nvSpPr>
-        <p:spPr>
-          <a:xfrm>
-            <a:off x="6277356" y="3113074"/>
+          <p:cNvPr id="8" name="TextBox 7"/>
+          <p:cNvSpPr txBox="1"/>
+          <p:nvPr/>
+        </p:nvSpPr>
+        <p:spPr>
+          <a:xfrm>
+            <a:off x="3445002" y="3570732"/>
             <a:ext cx="2466594" cy="1051560"/>
           </a:xfrm>
           <a:prstGeom prst="rect">
@@ -21396,20 +21308,20 @@
                 </a:solidFill>
                 <a:latin typeface="Arial"/>
               </a:rPr>
-              <a:t>повторить</a:t>
-            </a:r>
-          </a:p>
-        </p:txBody>
-      </p:sp>
-      <p:sp>
-        <p:nvSpPr>
-          <p:cNvPr id="11" name="Rounded Rectangle 10"/>
+              <a:t>пропустить и идти дальше</a:t>
+            </a:r>
+          </a:p>
+        </p:txBody>
+      </p:sp>
+      <p:sp>
+        <p:nvSpPr>
+          <p:cNvPr id="9" name="Rounded Rectangle 8"/>
           <p:cNvSpPr/>
           <p:nvPr/>
         </p:nvSpPr>
         <p:spPr>
           <a:xfrm>
-            <a:off x="8999982" y="3113074"/>
+            <a:off x="6167628" y="3570732"/>
             <a:ext cx="2686050" cy="1051560"/>
           </a:xfrm>
           <a:prstGeom prst="roundRect">
@@ -21451,13 +21363,13 @@
       </p:sp>
       <p:sp>
         <p:nvSpPr>
-          <p:cNvPr id="12" name="TextBox 11"/>
-          <p:cNvSpPr txBox="1"/>
-          <p:nvPr/>
-        </p:nvSpPr>
-        <p:spPr>
-          <a:xfrm>
-            <a:off x="9109710" y="3113074"/>
+          <p:cNvPr id="10" name="TextBox 9"/>
+          <p:cNvSpPr txBox="1"/>
+          <p:nvPr/>
+        </p:nvSpPr>
+        <p:spPr>
+          <a:xfrm>
+            <a:off x="6277356" y="3570732"/>
             <a:ext cx="2466594" cy="1051560"/>
           </a:xfrm>
           <a:prstGeom prst="rect">
@@ -21486,21 +21398,21 @@
                 </a:solidFill>
                 <a:latin typeface="Arial"/>
               </a:rPr>
-              <a:t>отдельная ветка</a:t>
-            </a:r>
-          </a:p>
-        </p:txBody>
-      </p:sp>
-      <p:sp>
-        <p:nvSpPr>
-          <p:cNvPr id="13" name="Rounded Rectangle 12"/>
+              <a:t>повторить</a:t>
+            </a:r>
+          </a:p>
+        </p:txBody>
+      </p:sp>
+      <p:sp>
+        <p:nvSpPr>
+          <p:cNvPr id="11" name="Rounded Rectangle 10"/>
           <p:cNvSpPr/>
           <p:nvPr/>
         </p:nvSpPr>
         <p:spPr>
           <a:xfrm>
-            <a:off x="502920" y="4832146"/>
-            <a:ext cx="11183112" cy="476631"/>
+            <a:off x="8999982" y="3570732"/>
+            <a:ext cx="2686050" cy="1051560"/>
           </a:xfrm>
           <a:prstGeom prst="roundRect">
             <a:avLst>
@@ -21508,11 +21420,11 @@
             </a:avLst>
           </a:prstGeom>
           <a:solidFill>
-            <a:srgbClr val="E0F1F2"/>
+            <a:srgbClr val="F4F7FA"/>
           </a:solidFill>
-          <a:ln w="13970">
+          <a:ln w="15240">
             <a:solidFill>
-              <a:srgbClr val="028090"/>
+              <a:srgbClr val="E5EAF0"/>
             </a:solidFill>
           </a:ln>
           <a:effectLst/>
@@ -21541,60 +21453,14 @@
       </p:sp>
       <p:sp>
         <p:nvSpPr>
-          <p:cNvPr id="14" name="Rounded Rectangle 13"/>
-          <p:cNvSpPr/>
-          <p:nvPr/>
-        </p:nvSpPr>
-        <p:spPr>
-          <a:xfrm>
-            <a:off x="521208" y="4887010"/>
-            <a:ext cx="64008" cy="366903"/>
-          </a:xfrm>
-          <a:prstGeom prst="roundRect">
-            <a:avLst>
-              <a:gd name="adj" fmla="val 50000"/>
-            </a:avLst>
-          </a:prstGeom>
-          <a:solidFill>
-            <a:srgbClr val="028090"/>
-          </a:solidFill>
-          <a:ln>
-            <a:noFill/>
-          </a:ln>
-          <a:effectLst/>
-        </p:spPr>
-        <p:style>
-          <a:lnRef idx="1">
-            <a:schemeClr val="accent1"/>
-          </a:lnRef>
-          <a:fillRef idx="3">
-            <a:schemeClr val="accent1"/>
-          </a:fillRef>
-          <a:effectRef idx="2">
-            <a:schemeClr val="accent1"/>
-          </a:effectRef>
-          <a:fontRef idx="minor">
-            <a:schemeClr val="lt1"/>
-          </a:fontRef>
-        </p:style>
-        <p:txBody>
-          <a:bodyPr rtlCol="0" anchor="ctr"/>
-          <a:lstStyle/>
-          <a:p>
-            <a:pPr algn="ctr"/>
-          </a:p>
-        </p:txBody>
-      </p:sp>
-      <p:sp>
-        <p:nvSpPr>
-          <p:cNvPr id="15" name="TextBox 14"/>
-          <p:cNvSpPr txBox="1"/>
-          <p:nvPr/>
-        </p:nvSpPr>
-        <p:spPr>
-          <a:xfrm>
-            <a:off x="804672" y="4969306"/>
-            <a:ext cx="10643616" cy="202311"/>
+          <p:cNvPr id="12" name="TextBox 11"/>
+          <p:cNvSpPr txBox="1"/>
+          <p:nvPr/>
+        </p:nvSpPr>
+        <p:spPr>
+          <a:xfrm>
+            <a:off x="9109710" y="3570732"/>
+            <a:ext cx="2466594" cy="1051560"/>
           </a:xfrm>
           <a:prstGeom prst="rect">
             <a:avLst/>
@@ -21607,29 +21473,29 @@
           </a:bodyPr>
           <a:lstStyle/>
           <a:p>
-            <a:pPr algn="l">
-              <a:lnSpc>
-                <a:spcPts val="1593"/>
-              </a:lnSpc>
-              <a:spcAft>
-                <a:spcPts val="300"/>
-              </a:spcAft>
-            </a:pPr>
-            <a:r>
-              <a:rPr sz="1350" b="0" i="0">
-                <a:solidFill>
-                  <a:srgbClr val="141B2E"/>
-                </a:solidFill>
-                <a:latin typeface="Arial"/>
-              </a:rPr>
-              <a:t>Дальше по процессу у нас запись в таблицу. Держите это в уме, выбирая.</a:t>
-            </a:r>
-          </a:p>
-        </p:txBody>
-      </p:sp>
-      <p:sp>
-        <p:nvSpPr>
-          <p:cNvPr id="16" name="TextBox 15"/>
+            <a:pPr algn="ctr">
+              <a:lnSpc>
+                <a:spcPts val="1565"/>
+              </a:lnSpc>
+              <a:spcAft>
+                <a:spcPts val="0"/>
+              </a:spcAft>
+            </a:pPr>
+            <a:r>
+              <a:rPr sz="1350" b="1" i="0">
+                <a:solidFill>
+                  <a:srgbClr val="141B2E"/>
+                </a:solidFill>
+                <a:latin typeface="Arial"/>
+              </a:rPr>
+              <a:t>отдельная ветка</a:t>
+            </a:r>
+          </a:p>
+        </p:txBody>
+      </p:sp>
+      <p:sp>
+        <p:nvSpPr>
+          <p:cNvPr id="13" name="TextBox 12"/>
           <p:cNvSpPr txBox="1"/>
           <p:nvPr/>
         </p:nvSpPr>
@@ -24003,8 +23869,8 @@
         </p:blipFill>
         <p:spPr>
           <a:xfrm>
-            <a:off x="2037994" y="943356"/>
-            <a:ext cx="8112962" cy="3456827"/>
+            <a:off x="1480488" y="1001915"/>
+            <a:ext cx="9227975" cy="3931920"/>
           </a:xfrm>
           <a:prstGeom prst="rect">
             <a:avLst/>
@@ -24019,8 +23885,8 @@
         </p:nvSpPr>
         <p:spPr>
           <a:xfrm>
-            <a:off x="502920" y="4564775"/>
-            <a:ext cx="11183112" cy="865758"/>
+            <a:off x="502920" y="5244826"/>
+            <a:ext cx="11183112" cy="994981"/>
           </a:xfrm>
           <a:prstGeom prst="roundRect">
             <a:avLst>
@@ -24067,8 +23933,8 @@
         </p:nvSpPr>
         <p:spPr>
           <a:xfrm>
-            <a:off x="658368" y="4720223"/>
-            <a:ext cx="4698534" cy="274574"/>
+            <a:off x="685800" y="5427706"/>
+            <a:ext cx="4444338" cy="282067"/>
           </a:xfrm>
           <a:prstGeom prst="rect">
             <a:avLst/>
@@ -24083,14 +23949,14 @@
           <a:p>
             <a:pPr algn="l">
               <a:lnSpc>
-                <a:spcPts val="1210"/>
+                <a:spcPts val="1265"/>
               </a:lnSpc>
               <a:spcAft>
                 <a:spcPts val="0"/>
               </a:spcAft>
             </a:pPr>
             <a:r>
-              <a:rPr sz="1100" b="1" i="0">
+              <a:rPr sz="1150" b="1" i="0">
                 <a:solidFill>
                   <a:srgbClr val="6B7685"/>
                 </a:solidFill>
@@ -24109,8 +23975,8 @@
         </p:nvSpPr>
         <p:spPr>
           <a:xfrm>
-            <a:off x="5503206" y="4720223"/>
-            <a:ext cx="5881073" cy="274574"/>
+            <a:off x="5276442" y="5427706"/>
+            <a:ext cx="6080405" cy="282067"/>
           </a:xfrm>
           <a:prstGeom prst="rect">
             <a:avLst/>
@@ -24125,14 +23991,14 @@
           <a:p>
             <a:pPr algn="l">
               <a:lnSpc>
-                <a:spcPts val="1210"/>
+                <a:spcPts val="1265"/>
               </a:lnSpc>
               <a:spcAft>
                 <a:spcPts val="0"/>
               </a:spcAft>
             </a:pPr>
             <a:r>
-              <a:rPr sz="1100" b="1" i="0">
+              <a:rPr sz="1150" b="1" i="0">
                 <a:solidFill>
                   <a:srgbClr val="6B7685"/>
                 </a:solidFill>
@@ -24151,8 +24017,8 @@
         </p:nvSpPr>
         <p:spPr>
           <a:xfrm>
-            <a:off x="658368" y="4994797"/>
-            <a:ext cx="4698534" cy="280289"/>
+            <a:off x="685800" y="5709773"/>
+            <a:ext cx="4444338" cy="347154"/>
           </a:xfrm>
           <a:prstGeom prst="rect">
             <a:avLst/>
@@ -24167,14 +24033,14 @@
           <a:p>
             <a:pPr algn="l">
               <a:lnSpc>
-                <a:spcPts val="1199"/>
+                <a:spcPts val="1437"/>
               </a:lnSpc>
               <a:spcAft>
                 <a:spcPts val="0"/>
               </a:spcAft>
             </a:pPr>
             <a:r>
-              <a:rPr sz="1100" b="0" i="0">
+              <a:rPr sz="1250" b="0" i="0">
                 <a:solidFill>
                   <a:srgbClr val="141B2E"/>
                 </a:solidFill>
@@ -24193,8 +24059,8 @@
         </p:nvSpPr>
         <p:spPr>
           <a:xfrm>
-            <a:off x="5503206" y="4994797"/>
-            <a:ext cx="5881073" cy="280289"/>
+            <a:off x="5276442" y="5709773"/>
+            <a:ext cx="6080405" cy="347154"/>
           </a:xfrm>
           <a:prstGeom prst="rect">
             <a:avLst/>
@@ -24209,14 +24075,14 @@
           <a:p>
             <a:pPr algn="l">
               <a:lnSpc>
-                <a:spcPts val="1199"/>
+                <a:spcPts val="1437"/>
               </a:lnSpc>
               <a:spcAft>
                 <a:spcPts val="0"/>
               </a:spcAft>
             </a:pPr>
             <a:r>
-              <a:rPr sz="1100" b="0" i="0">
+              <a:rPr sz="1250" b="0" i="0">
                 <a:solidFill>
                   <a:srgbClr val="141B2E"/>
                 </a:solidFill>
@@ -24225,7 +24091,7 @@
               <a:t>3 попытки, пауза 2 с → </a:t>
             </a:r>
             <a:r>
-              <a:rPr sz="1100" b="0" i="0">
+              <a:rPr sz="1250" b="0" i="0">
                 <a:solidFill>
                   <a:srgbClr val="141B2E"/>
                 </a:solidFill>
@@ -24234,7 +24100,7 @@
               <a:t>Continue</a:t>
             </a:r>
             <a:r>
-              <a:rPr sz="1100" b="0" i="0">
+              <a:rPr sz="1250" b="0" i="0">
                 <a:solidFill>
                   <a:srgbClr val="141B2E"/>
                 </a:solidFill>
@@ -24243,7 +24109,7 @@
               <a:t> </a:t>
             </a:r>
             <a:r>
-              <a:rPr sz="1100" b="0" i="0">
+              <a:rPr sz="1250" b="0" i="0">
                 <a:solidFill>
                   <a:srgbClr val="141B2E"/>
                 </a:solidFill>
@@ -24252,7 +24118,7 @@
               <a:t>(using</a:t>
             </a:r>
             <a:r>
-              <a:rPr sz="1100" b="0" i="0">
+              <a:rPr sz="1250" b="0" i="0">
                 <a:solidFill>
                   <a:srgbClr val="141B2E"/>
                 </a:solidFill>
@@ -24261,7 +24127,7 @@
               <a:t> </a:t>
             </a:r>
             <a:r>
-              <a:rPr sz="1100" b="0" i="0">
+              <a:rPr sz="1250" b="0" i="0">
                 <a:solidFill>
                   <a:srgbClr val="141B2E"/>
                 </a:solidFill>
@@ -24270,7 +24136,7 @@
               <a:t>error</a:t>
             </a:r>
             <a:r>
-              <a:rPr sz="1100" b="0" i="0">
+              <a:rPr sz="1250" b="0" i="0">
                 <a:solidFill>
                   <a:srgbClr val="141B2E"/>
                 </a:solidFill>
@@ -24279,7 +24145,7 @@
               <a:t> </a:t>
             </a:r>
             <a:r>
-              <a:rPr sz="1100" b="0" i="0">
+              <a:rPr sz="1250" b="0" i="0">
                 <a:solidFill>
                   <a:srgbClr val="141B2E"/>
                 </a:solidFill>
@@ -24292,106 +24158,7 @@
       </p:sp>
       <p:sp>
         <p:nvSpPr>
-          <p:cNvPr id="9" name="Rounded Rectangle 8"/>
-          <p:cNvSpPr/>
-          <p:nvPr/>
-        </p:nvSpPr>
-        <p:spPr>
-          <a:xfrm>
-            <a:off x="502920" y="5595126"/>
-            <a:ext cx="11183112" cy="723522"/>
-          </a:xfrm>
-          <a:prstGeom prst="roundRect">
-            <a:avLst>
-              <a:gd name="adj" fmla="val 10000"/>
-            </a:avLst>
-          </a:prstGeom>
-          <a:solidFill>
-            <a:srgbClr val="FEF5E0"/>
-          </a:solidFill>
-          <a:ln w="19050">
-            <a:solidFill>
-              <a:srgbClr val="F0AB00"/>
-            </a:solidFill>
-          </a:ln>
-          <a:effectLst/>
-        </p:spPr>
-        <p:style>
-          <a:lnRef idx="1">
-            <a:schemeClr val="accent1"/>
-          </a:lnRef>
-          <a:fillRef idx="3">
-            <a:schemeClr val="accent1"/>
-          </a:fillRef>
-          <a:effectRef idx="2">
-            <a:schemeClr val="accent1"/>
-          </a:effectRef>
-          <a:fontRef idx="minor">
-            <a:schemeClr val="lt1"/>
-          </a:fontRef>
-        </p:style>
-        <p:txBody>
-          <a:bodyPr rtlCol="0" anchor="ctr"/>
-          <a:lstStyle/>
-          <a:p>
-            <a:pPr algn="ctr"/>
-          </a:p>
-        </p:txBody>
-      </p:sp>
-      <p:sp>
-        <p:nvSpPr>
-          <p:cNvPr id="10" name="TextBox 9"/>
-          <p:cNvSpPr txBox="1"/>
-          <p:nvPr/>
-        </p:nvSpPr>
-        <p:spPr>
-          <a:xfrm>
-            <a:off x="722376" y="5723142"/>
-            <a:ext cx="10634472" cy="467490"/>
-          </a:xfrm>
-          <a:prstGeom prst="rect">
-            <a:avLst/>
-          </a:prstGeom>
-          <a:noFill/>
-        </p:spPr>
-        <p:txBody>
-          <a:bodyPr wrap="square" lIns="0" rIns="0" tIns="0" bIns="0" anchor="ctr">
-            <a:spAutoFit/>
-          </a:bodyPr>
-          <a:lstStyle/>
-          <a:p>
-            <a:pPr algn="ctr">
-              <a:lnSpc>
-                <a:spcPts val="1647"/>
-              </a:lnSpc>
-              <a:spcAft>
-                <a:spcPts val="300"/>
-              </a:spcAft>
-            </a:pPr>
-            <a:r>
-              <a:rPr sz="1350" b="1" i="0">
-                <a:solidFill>
-                  <a:srgbClr val="141B2E"/>
-                </a:solidFill>
-                <a:latin typeface="Arial"/>
-              </a:rPr>
-              <a:t>Предскажите.</a:t>
-            </a:r>
-            <a:r>
-              <a:rPr sz="1350" b="1" i="0">
-                <a:solidFill>
-                  <a:srgbClr val="141B2E"/>
-                </a:solidFill>
-                <a:latin typeface="Arial"/>
-              </a:rPr>
-              <a:t> Сейчас испорчу ключ и отправлю заявку. Какой статус будет у прогона — «ошибка» или «успех»?</a:t>
-            </a:r>
-          </a:p>
-        </p:txBody>
-      </p:sp>
-      <p:sp>
-        <p:nvSpPr>
-          <p:cNvPr id="11" name="TextBox 10"/>
+          <p:cNvPr id="9" name="TextBox 8"/>
           <p:cNvSpPr txBox="1"/>
           <p:nvPr/>
         </p:nvSpPr>
@@ -24508,297 +24275,6 @@
         <p:spPr>
           <a:xfrm>
             <a:off x="502920" y="943356"/>
-            <a:ext cx="82296" cy="699515"/>
-          </a:xfrm>
-          <a:prstGeom prst="roundRect">
-            <a:avLst>
-              <a:gd name="adj" fmla="val 50000"/>
-            </a:avLst>
-          </a:prstGeom>
-          <a:solidFill>
-            <a:srgbClr val="F0AB00"/>
-          </a:solidFill>
-          <a:ln>
-            <a:noFill/>
-          </a:ln>
-          <a:effectLst/>
-        </p:spPr>
-        <p:style>
-          <a:lnRef idx="1">
-            <a:schemeClr val="accent1"/>
-          </a:lnRef>
-          <a:fillRef idx="3">
-            <a:schemeClr val="accent1"/>
-          </a:fillRef>
-          <a:effectRef idx="2">
-            <a:schemeClr val="accent1"/>
-          </a:effectRef>
-          <a:fontRef idx="minor">
-            <a:schemeClr val="lt1"/>
-          </a:fontRef>
-        </p:style>
-        <p:txBody>
-          <a:bodyPr rtlCol="0" anchor="ctr"/>
-          <a:lstStyle/>
-          <a:p>
-            <a:pPr algn="ctr"/>
-          </a:p>
-        </p:txBody>
-      </p:sp>
-      <p:sp>
-        <p:nvSpPr>
-          <p:cNvPr id="4" name="TextBox 3"/>
-          <p:cNvSpPr txBox="1"/>
-          <p:nvPr/>
-        </p:nvSpPr>
-        <p:spPr>
-          <a:xfrm>
-            <a:off x="859536" y="1071372"/>
-            <a:ext cx="10643616" cy="443483"/>
-          </a:xfrm>
-          <a:prstGeom prst="rect">
-            <a:avLst/>
-          </a:prstGeom>
-          <a:noFill/>
-        </p:spPr>
-        <p:txBody>
-          <a:bodyPr wrap="square" lIns="0" rIns="0" tIns="0" bIns="0" anchor="ctr">
-            <a:spAutoFit/>
-          </a:bodyPr>
-          <a:lstStyle/>
-          <a:p>
-            <a:pPr algn="l">
-              <a:lnSpc>
-                <a:spcPts val="1673"/>
-              </a:lnSpc>
-              <a:spcAft>
-                <a:spcPts val="300"/>
-              </a:spcAft>
-            </a:pPr>
-            <a:r>
-              <a:rPr sz="1350" b="1" i="0">
-                <a:solidFill>
-                  <a:srgbClr val="141B2E"/>
-                </a:solidFill>
-                <a:latin typeface="Arial"/>
-              </a:rPr>
-              <a:t>Три попытки на каждом из пяти слоёв дают 243-кратную нагрузку на нижний.</a:t>
-            </a:r>
-            <a:r>
-              <a:rPr sz="1350" b="1" i="0">
-                <a:solidFill>
-                  <a:srgbClr val="141B2E"/>
-                </a:solidFill>
-                <a:latin typeface="Arial"/>
-              </a:rPr>
-              <a:t> Поэтому повторяют в одном месте — и там, где знают, что повторять безопасно.</a:t>
-            </a:r>
-          </a:p>
-        </p:txBody>
-      </p:sp>
-      <p:sp>
-        <p:nvSpPr>
-          <p:cNvPr id="5" name="Rounded Rectangle 4"/>
-          <p:cNvSpPr/>
-          <p:nvPr/>
-        </p:nvSpPr>
-        <p:spPr>
-          <a:xfrm>
-            <a:off x="502920" y="1807464"/>
-            <a:ext cx="82296" cy="912114"/>
-          </a:xfrm>
-          <a:prstGeom prst="roundRect">
-            <a:avLst>
-              <a:gd name="adj" fmla="val 50000"/>
-            </a:avLst>
-          </a:prstGeom>
-          <a:solidFill>
-            <a:srgbClr val="F0AB00"/>
-          </a:solidFill>
-          <a:ln>
-            <a:noFill/>
-          </a:ln>
-          <a:effectLst/>
-        </p:spPr>
-        <p:style>
-          <a:lnRef idx="1">
-            <a:schemeClr val="accent1"/>
-          </a:lnRef>
-          <a:fillRef idx="3">
-            <a:schemeClr val="accent1"/>
-          </a:fillRef>
-          <a:effectRef idx="2">
-            <a:schemeClr val="accent1"/>
-          </a:effectRef>
-          <a:fontRef idx="minor">
-            <a:schemeClr val="lt1"/>
-          </a:fontRef>
-        </p:style>
-        <p:txBody>
-          <a:bodyPr rtlCol="0" anchor="ctr"/>
-          <a:lstStyle/>
-          <a:p>
-            <a:pPr algn="ctr"/>
-          </a:p>
-        </p:txBody>
-      </p:sp>
-      <p:sp>
-        <p:nvSpPr>
-          <p:cNvPr id="6" name="TextBox 5"/>
-          <p:cNvSpPr txBox="1"/>
-          <p:nvPr/>
-        </p:nvSpPr>
-        <p:spPr>
-          <a:xfrm>
-            <a:off x="859536" y="1935480"/>
-            <a:ext cx="10643616" cy="656082"/>
-          </a:xfrm>
-          <a:prstGeom prst="rect">
-            <a:avLst/>
-          </a:prstGeom>
-          <a:noFill/>
-        </p:spPr>
-        <p:txBody>
-          <a:bodyPr wrap="square" lIns="0" rIns="0" tIns="0" bIns="0" anchor="ctr">
-            <a:spAutoFit/>
-          </a:bodyPr>
-          <a:lstStyle/>
-          <a:p>
-            <a:pPr algn="l">
-              <a:lnSpc>
-                <a:spcPts val="1673"/>
-              </a:lnSpc>
-              <a:spcAft>
-                <a:spcPts val="300"/>
-              </a:spcAft>
-            </a:pPr>
-            <a:r>
-              <a:rPr sz="1350" b="1" i="0">
-                <a:solidFill>
-                  <a:srgbClr val="141B2E"/>
-                </a:solidFill>
-                <a:latin typeface="Arial"/>
-              </a:rPr>
-              <a:t>Предел: отказ, которому некуда идти.</a:t>
-            </a:r>
-            <a:r>
-              <a:rPr sz="1350" b="1" i="0">
-                <a:solidFill>
-                  <a:srgbClr val="141B2E"/>
-                </a:solidFill>
-                <a:latin typeface="Arial"/>
-              </a:rPr>
-              <a:t> Такой отказ не исчезает — он превращается в отсутствие записи, а отсутствие записи не мониторит никто: ни один сторож не умеет сработать на то, чего нет. Отсюда и двое суток пропуска.</a:t>
-            </a:r>
-          </a:p>
-        </p:txBody>
-      </p:sp>
-      <p:sp>
-        <p:nvSpPr>
-          <p:cNvPr id="7" name="Rounded Rectangle 6"/>
-          <p:cNvSpPr/>
-          <p:nvPr/>
-        </p:nvSpPr>
-        <p:spPr>
-          <a:xfrm>
-            <a:off x="502920" y="2884170"/>
-            <a:ext cx="82296" cy="699515"/>
-          </a:xfrm>
-          <a:prstGeom prst="roundRect">
-            <a:avLst>
-              <a:gd name="adj" fmla="val 50000"/>
-            </a:avLst>
-          </a:prstGeom>
-          <a:solidFill>
-            <a:srgbClr val="F0AB00"/>
-          </a:solidFill>
-          <a:ln>
-            <a:noFill/>
-          </a:ln>
-          <a:effectLst/>
-        </p:spPr>
-        <p:style>
-          <a:lnRef idx="1">
-            <a:schemeClr val="accent1"/>
-          </a:lnRef>
-          <a:fillRef idx="3">
-            <a:schemeClr val="accent1"/>
-          </a:fillRef>
-          <a:effectRef idx="2">
-            <a:schemeClr val="accent1"/>
-          </a:effectRef>
-          <a:fontRef idx="minor">
-            <a:schemeClr val="lt1"/>
-          </a:fontRef>
-        </p:style>
-        <p:txBody>
-          <a:bodyPr rtlCol="0" anchor="ctr"/>
-          <a:lstStyle/>
-          <a:p>
-            <a:pPr algn="ctr"/>
-          </a:p>
-        </p:txBody>
-      </p:sp>
-      <p:sp>
-        <p:nvSpPr>
-          <p:cNvPr id="8" name="TextBox 7"/>
-          <p:cNvSpPr txBox="1"/>
-          <p:nvPr/>
-        </p:nvSpPr>
-        <p:spPr>
-          <a:xfrm>
-            <a:off x="859536" y="3012186"/>
-            <a:ext cx="10643616" cy="443483"/>
-          </a:xfrm>
-          <a:prstGeom prst="rect">
-            <a:avLst/>
-          </a:prstGeom>
-          <a:noFill/>
-        </p:spPr>
-        <p:txBody>
-          <a:bodyPr wrap="square" lIns="0" rIns="0" tIns="0" bIns="0" anchor="ctr">
-            <a:spAutoFit/>
-          </a:bodyPr>
-          <a:lstStyle/>
-          <a:p>
-            <a:pPr algn="l">
-              <a:lnSpc>
-                <a:spcPts val="1673"/>
-              </a:lnSpc>
-              <a:spcAft>
-                <a:spcPts val="300"/>
-              </a:spcAft>
-            </a:pPr>
-            <a:r>
-              <a:rPr sz="1350" b="1" i="0">
-                <a:solidFill>
-                  <a:srgbClr val="141B2E"/>
-                </a:solidFill>
-                <a:latin typeface="Arial"/>
-              </a:rPr>
-              <a:t>Третья строка оси закрыта.</a:t>
-            </a:r>
-            <a:r>
-              <a:rPr sz="1350" b="1" i="0">
-                <a:solidFill>
-                  <a:srgbClr val="141B2E"/>
-                </a:solidFill>
-                <a:latin typeface="Arial"/>
-              </a:rPr>
-              <a:t> Прогон зелёный, в журнале ни одной ошибки — выглядит успехом. Чем оказалось: три отказа подряд и заявки за выходные неразобранные.</a:t>
-            </a:r>
-          </a:p>
-        </p:txBody>
-      </p:sp>
-      <p:sp>
-        <p:nvSpPr>
-          <p:cNvPr id="9" name="Rounded Rectangle 8"/>
-          <p:cNvSpPr/>
-          <p:nvPr/>
-        </p:nvSpPr>
-        <p:spPr>
-          <a:xfrm>
-            <a:off x="502920" y="3748278"/>
             <a:ext cx="5454396" cy="2358517"/>
           </a:xfrm>
           <a:prstGeom prst="roundRect">
@@ -24840,13 +24316,13 @@
       </p:sp>
       <p:sp>
         <p:nvSpPr>
-          <p:cNvPr id="10" name="TextBox 9"/>
-          <p:cNvSpPr txBox="1"/>
-          <p:nvPr/>
-        </p:nvSpPr>
-        <p:spPr>
-          <a:xfrm>
-            <a:off x="685800" y="3858006"/>
+          <p:cNvPr id="4" name="TextBox 3"/>
+          <p:cNvSpPr txBox="1"/>
+          <p:nvPr/>
+        </p:nvSpPr>
+        <p:spPr>
+          <a:xfrm>
+            <a:off x="685800" y="1053084"/>
             <a:ext cx="5088636" cy="274320"/>
           </a:xfrm>
           <a:prstGeom prst="rect">
@@ -24875,20 +24351,20 @@
                 </a:solidFill>
                 <a:latin typeface="Arial"/>
               </a:rPr>
-              <a:t>ПОВТОРЯТЬ **НУЖНО**</a:t>
-            </a:r>
-          </a:p>
-        </p:txBody>
-      </p:sp>
-      <p:sp>
-        <p:nvSpPr>
-          <p:cNvPr id="11" name="TextBox 10"/>
-          <p:cNvSpPr txBox="1"/>
-          <p:nvPr/>
-        </p:nvSpPr>
-        <p:spPr>
-          <a:xfrm>
-            <a:off x="685800" y="4132326"/>
+              <a:t>ПОВТОРЯТЬ НУЖНО</a:t>
+            </a:r>
+          </a:p>
+        </p:txBody>
+      </p:sp>
+      <p:sp>
+        <p:nvSpPr>
+          <p:cNvPr id="5" name="TextBox 4"/>
+          <p:cNvSpPr txBox="1"/>
+          <p:nvPr/>
+        </p:nvSpPr>
+        <p:spPr>
+          <a:xfrm>
+            <a:off x="685800" y="1327404"/>
             <a:ext cx="5088636" cy="490982"/>
           </a:xfrm>
           <a:prstGeom prst="rect">
@@ -24924,13 +24400,13 @@
       </p:sp>
       <p:cxnSp>
         <p:nvCxnSpPr>
-          <p:cNvPr id="12" name="Connector 11"/>
+          <p:cNvPr id="6" name="Connector 5"/>
           <p:cNvCxnSpPr/>
           <p:nvPr/>
         </p:nvCxnSpPr>
         <p:spPr>
           <a:xfrm>
-            <a:off x="685800" y="4623308"/>
+            <a:off x="685800" y="1818386"/>
             <a:ext cx="5088636" cy="0"/>
           </a:xfrm>
           <a:prstGeom prst="line">
@@ -24959,13 +24435,13 @@
       </p:cxnSp>
       <p:sp>
         <p:nvSpPr>
-          <p:cNvPr id="13" name="TextBox 12"/>
-          <p:cNvSpPr txBox="1"/>
-          <p:nvPr/>
-        </p:nvSpPr>
-        <p:spPr>
-          <a:xfrm>
-            <a:off x="685800" y="4623308"/>
+          <p:cNvPr id="7" name="TextBox 6"/>
+          <p:cNvSpPr txBox="1"/>
+          <p:nvPr/>
+        </p:nvSpPr>
+        <p:spPr>
+          <a:xfrm>
+            <a:off x="685800" y="1818386"/>
             <a:ext cx="5088636" cy="663321"/>
           </a:xfrm>
           <a:prstGeom prst="rect">
@@ -25001,13 +24477,13 @@
       </p:sp>
       <p:cxnSp>
         <p:nvCxnSpPr>
-          <p:cNvPr id="14" name="Connector 13"/>
+          <p:cNvPr id="8" name="Connector 7"/>
           <p:cNvCxnSpPr/>
           <p:nvPr/>
         </p:nvCxnSpPr>
         <p:spPr>
           <a:xfrm>
-            <a:off x="685800" y="5286629"/>
+            <a:off x="685800" y="2481707"/>
             <a:ext cx="5088636" cy="0"/>
           </a:xfrm>
           <a:prstGeom prst="line">
@@ -25036,13 +24512,13 @@
       </p:cxnSp>
       <p:sp>
         <p:nvSpPr>
-          <p:cNvPr id="15" name="TextBox 14"/>
-          <p:cNvSpPr txBox="1"/>
-          <p:nvPr/>
-        </p:nvSpPr>
-        <p:spPr>
-          <a:xfrm>
-            <a:off x="685800" y="5286629"/>
+          <p:cNvPr id="9" name="TextBox 8"/>
+          <p:cNvSpPr txBox="1"/>
+          <p:nvPr/>
+        </p:nvSpPr>
+        <p:spPr>
+          <a:xfrm>
+            <a:off x="685800" y="2481707"/>
             <a:ext cx="5088636" cy="318642"/>
           </a:xfrm>
           <a:prstGeom prst="rect">
@@ -25078,13 +24554,13 @@
       </p:sp>
       <p:cxnSp>
         <p:nvCxnSpPr>
-          <p:cNvPr id="16" name="Connector 15"/>
+          <p:cNvPr id="10" name="Connector 9"/>
           <p:cNvCxnSpPr/>
           <p:nvPr/>
         </p:nvCxnSpPr>
         <p:spPr>
           <a:xfrm>
-            <a:off x="685800" y="5605272"/>
+            <a:off x="685800" y="2800350"/>
             <a:ext cx="5088636" cy="0"/>
           </a:xfrm>
           <a:prstGeom prst="line">
@@ -25113,13 +24589,13 @@
       </p:cxnSp>
       <p:sp>
         <p:nvSpPr>
-          <p:cNvPr id="17" name="TextBox 16"/>
-          <p:cNvSpPr txBox="1"/>
-          <p:nvPr/>
-        </p:nvSpPr>
-        <p:spPr>
-          <a:xfrm>
-            <a:off x="685800" y="5605272"/>
+          <p:cNvPr id="11" name="TextBox 10"/>
+          <p:cNvSpPr txBox="1"/>
+          <p:nvPr/>
+        </p:nvSpPr>
+        <p:spPr>
+          <a:xfrm>
+            <a:off x="685800" y="2800350"/>
             <a:ext cx="5088636" cy="318642"/>
           </a:xfrm>
           <a:prstGeom prst="rect">
@@ -25155,13 +24631,13 @@
       </p:sp>
       <p:sp>
         <p:nvSpPr>
-          <p:cNvPr id="18" name="Rounded Rectangle 17"/>
+          <p:cNvPr id="12" name="Rounded Rectangle 11"/>
           <p:cNvSpPr/>
           <p:nvPr/>
         </p:nvSpPr>
         <p:spPr>
           <a:xfrm>
-            <a:off x="6231636" y="3748278"/>
+            <a:off x="6231636" y="943356"/>
             <a:ext cx="5454396" cy="2358517"/>
           </a:xfrm>
           <a:prstGeom prst="roundRect">
@@ -25203,13 +24679,13 @@
       </p:sp>
       <p:sp>
         <p:nvSpPr>
-          <p:cNvPr id="19" name="TextBox 18"/>
-          <p:cNvSpPr txBox="1"/>
-          <p:nvPr/>
-        </p:nvSpPr>
-        <p:spPr>
-          <a:xfrm>
-            <a:off x="6414516" y="3858006"/>
+          <p:cNvPr id="13" name="TextBox 12"/>
+          <p:cNvSpPr txBox="1"/>
+          <p:nvPr/>
+        </p:nvSpPr>
+        <p:spPr>
+          <a:xfrm>
+            <a:off x="6414516" y="1053084"/>
             <a:ext cx="5088636" cy="274320"/>
           </a:xfrm>
           <a:prstGeom prst="rect">
@@ -25238,20 +24714,20 @@
                 </a:solidFill>
                 <a:latin typeface="Arial"/>
               </a:rPr>
-              <a:t>ПОВТОРЯТЬ **НЕЛЬЗЯ**</a:t>
-            </a:r>
-          </a:p>
-        </p:txBody>
-      </p:sp>
-      <p:sp>
-        <p:nvSpPr>
-          <p:cNvPr id="20" name="TextBox 19"/>
-          <p:cNvSpPr txBox="1"/>
-          <p:nvPr/>
-        </p:nvSpPr>
-        <p:spPr>
-          <a:xfrm>
-            <a:off x="6414516" y="4132326"/>
+              <a:t>ПОВТОРЯТЬ НЕЛЬЗЯ</a:t>
+            </a:r>
+          </a:p>
+        </p:txBody>
+      </p:sp>
+      <p:sp>
+        <p:nvSpPr>
+          <p:cNvPr id="14" name="TextBox 13"/>
+          <p:cNvSpPr txBox="1"/>
+          <p:nvPr/>
+        </p:nvSpPr>
+        <p:spPr>
+          <a:xfrm>
+            <a:off x="6414516" y="1327404"/>
             <a:ext cx="5088636" cy="475996"/>
           </a:xfrm>
           <a:prstGeom prst="rect">
@@ -25287,13 +24763,13 @@
       </p:sp>
       <p:cxnSp>
         <p:nvCxnSpPr>
-          <p:cNvPr id="21" name="Connector 20"/>
+          <p:cNvPr id="15" name="Connector 14"/>
           <p:cNvCxnSpPr/>
           <p:nvPr/>
         </p:nvCxnSpPr>
         <p:spPr>
           <a:xfrm>
-            <a:off x="6414516" y="4608322"/>
+            <a:off x="6414516" y="1803400"/>
             <a:ext cx="5088636" cy="0"/>
           </a:xfrm>
           <a:prstGeom prst="line">
@@ -25322,13 +24798,13 @@
       </p:cxnSp>
       <p:sp>
         <p:nvSpPr>
-          <p:cNvPr id="22" name="TextBox 21"/>
-          <p:cNvSpPr txBox="1"/>
-          <p:nvPr/>
-        </p:nvSpPr>
-        <p:spPr>
-          <a:xfrm>
-            <a:off x="6414516" y="4608322"/>
+          <p:cNvPr id="16" name="TextBox 15"/>
+          <p:cNvSpPr txBox="1"/>
+          <p:nvPr/>
+        </p:nvSpPr>
+        <p:spPr>
+          <a:xfrm>
+            <a:off x="6414516" y="1803400"/>
             <a:ext cx="5088636" cy="475996"/>
           </a:xfrm>
           <a:prstGeom prst="rect">
@@ -25364,13 +24840,13 @@
       </p:sp>
       <p:cxnSp>
         <p:nvCxnSpPr>
-          <p:cNvPr id="23" name="Connector 22"/>
+          <p:cNvPr id="17" name="Connector 16"/>
           <p:cNvCxnSpPr/>
           <p:nvPr/>
         </p:nvCxnSpPr>
         <p:spPr>
           <a:xfrm>
-            <a:off x="6414516" y="5084318"/>
+            <a:off x="6414516" y="2279396"/>
             <a:ext cx="5088636" cy="0"/>
           </a:xfrm>
           <a:prstGeom prst="line">
@@ -25399,13 +24875,13 @@
       </p:cxnSp>
       <p:sp>
         <p:nvSpPr>
-          <p:cNvPr id="24" name="TextBox 23"/>
-          <p:cNvSpPr txBox="1"/>
-          <p:nvPr/>
-        </p:nvSpPr>
-        <p:spPr>
-          <a:xfrm>
-            <a:off x="6414516" y="5084318"/>
+          <p:cNvPr id="18" name="TextBox 17"/>
+          <p:cNvSpPr txBox="1"/>
+          <p:nvPr/>
+        </p:nvSpPr>
+        <p:spPr>
+          <a:xfrm>
+            <a:off x="6414516" y="2279396"/>
             <a:ext cx="5088636" cy="311150"/>
           </a:xfrm>
           <a:prstGeom prst="rect">
@@ -25441,13 +24917,13 @@
       </p:sp>
       <p:cxnSp>
         <p:nvCxnSpPr>
-          <p:cNvPr id="25" name="Connector 24"/>
+          <p:cNvPr id="19" name="Connector 18"/>
           <p:cNvCxnSpPr/>
           <p:nvPr/>
         </p:nvCxnSpPr>
         <p:spPr>
           <a:xfrm>
-            <a:off x="6414516" y="5395468"/>
+            <a:off x="6414516" y="2590546"/>
             <a:ext cx="5088636" cy="0"/>
           </a:xfrm>
           <a:prstGeom prst="line">
@@ -25476,14 +24952,296 @@
       </p:cxnSp>
       <p:sp>
         <p:nvSpPr>
+          <p:cNvPr id="20" name="TextBox 19"/>
+          <p:cNvSpPr txBox="1"/>
+          <p:nvPr/>
+        </p:nvSpPr>
+        <p:spPr>
+          <a:xfrm>
+            <a:off x="6414516" y="2590546"/>
+            <a:ext cx="5088636" cy="475996"/>
+          </a:xfrm>
+          <a:prstGeom prst="rect">
+            <a:avLst/>
+          </a:prstGeom>
+          <a:noFill/>
+        </p:spPr>
+        <p:txBody>
+          <a:bodyPr wrap="square" lIns="0" rIns="0" tIns="0" bIns="0" anchor="ctr">
+            <a:spAutoFit/>
+          </a:bodyPr>
+          <a:lstStyle/>
+          <a:p>
+            <a:pPr algn="l">
+              <a:lnSpc>
+                <a:spcPts val="1297"/>
+              </a:lnSpc>
+              <a:spcAft>
+                <a:spcPts val="0"/>
+              </a:spcAft>
+            </a:pPr>
+            <a:r>
+              <a:rPr sz="1100" b="0" i="0">
+                <a:solidFill>
+                  <a:srgbClr val="141B2E"/>
+                </a:solidFill>
+                <a:latin typeface="Arial"/>
+              </a:rPr>
+              <a:t>задержка фиксированная: все клиенты повторят синхронно и добьют сервис, который начал подниматься</a:t>
+            </a:r>
+          </a:p>
+        </p:txBody>
+      </p:sp>
+      <p:sp>
+        <p:nvSpPr>
+          <p:cNvPr id="21" name="Rounded Rectangle 20"/>
+          <p:cNvSpPr/>
+          <p:nvPr/>
+        </p:nvSpPr>
+        <p:spPr>
+          <a:xfrm>
+            <a:off x="502920" y="3466465"/>
+            <a:ext cx="82296" cy="699515"/>
+          </a:xfrm>
+          <a:prstGeom prst="roundRect">
+            <a:avLst>
+              <a:gd name="adj" fmla="val 50000"/>
+            </a:avLst>
+          </a:prstGeom>
+          <a:solidFill>
+            <a:srgbClr val="F0AB00"/>
+          </a:solidFill>
+          <a:ln>
+            <a:noFill/>
+          </a:ln>
+          <a:effectLst/>
+        </p:spPr>
+        <p:style>
+          <a:lnRef idx="1">
+            <a:schemeClr val="accent1"/>
+          </a:lnRef>
+          <a:fillRef idx="3">
+            <a:schemeClr val="accent1"/>
+          </a:fillRef>
+          <a:effectRef idx="2">
+            <a:schemeClr val="accent1"/>
+          </a:effectRef>
+          <a:fontRef idx="minor">
+            <a:schemeClr val="lt1"/>
+          </a:fontRef>
+        </p:style>
+        <p:txBody>
+          <a:bodyPr rtlCol="0" anchor="ctr"/>
+          <a:lstStyle/>
+          <a:p>
+            <a:pPr algn="ctr"/>
+          </a:p>
+        </p:txBody>
+      </p:sp>
+      <p:sp>
+        <p:nvSpPr>
+          <p:cNvPr id="22" name="TextBox 21"/>
+          <p:cNvSpPr txBox="1"/>
+          <p:nvPr/>
+        </p:nvSpPr>
+        <p:spPr>
+          <a:xfrm>
+            <a:off x="859536" y="3594481"/>
+            <a:ext cx="10643616" cy="443483"/>
+          </a:xfrm>
+          <a:prstGeom prst="rect">
+            <a:avLst/>
+          </a:prstGeom>
+          <a:noFill/>
+        </p:spPr>
+        <p:txBody>
+          <a:bodyPr wrap="square" lIns="0" rIns="0" tIns="0" bIns="0" anchor="ctr">
+            <a:spAutoFit/>
+          </a:bodyPr>
+          <a:lstStyle/>
+          <a:p>
+            <a:pPr algn="l">
+              <a:lnSpc>
+                <a:spcPts val="1673"/>
+              </a:lnSpc>
+              <a:spcAft>
+                <a:spcPts val="300"/>
+              </a:spcAft>
+            </a:pPr>
+            <a:r>
+              <a:rPr sz="1350" b="1" i="0">
+                <a:solidFill>
+                  <a:srgbClr val="141B2E"/>
+                </a:solidFill>
+                <a:latin typeface="Arial"/>
+              </a:rPr>
+              <a:t>Три попытки на каждом из пяти слоёв дают 243-кратную нагрузку на нижний.</a:t>
+            </a:r>
+            <a:r>
+              <a:rPr sz="1350" b="1" i="0">
+                <a:solidFill>
+                  <a:srgbClr val="141B2E"/>
+                </a:solidFill>
+                <a:latin typeface="Arial"/>
+              </a:rPr>
+              <a:t> Поэтому повторяют в одном месте — и там, где знают, что повторять безопасно.</a:t>
+            </a:r>
+          </a:p>
+        </p:txBody>
+      </p:sp>
+      <p:sp>
+        <p:nvSpPr>
+          <p:cNvPr id="23" name="Rounded Rectangle 22"/>
+          <p:cNvSpPr/>
+          <p:nvPr/>
+        </p:nvSpPr>
+        <p:spPr>
+          <a:xfrm>
+            <a:off x="502920" y="4330573"/>
+            <a:ext cx="82296" cy="912114"/>
+          </a:xfrm>
+          <a:prstGeom prst="roundRect">
+            <a:avLst>
+              <a:gd name="adj" fmla="val 50000"/>
+            </a:avLst>
+          </a:prstGeom>
+          <a:solidFill>
+            <a:srgbClr val="F0AB00"/>
+          </a:solidFill>
+          <a:ln>
+            <a:noFill/>
+          </a:ln>
+          <a:effectLst/>
+        </p:spPr>
+        <p:style>
+          <a:lnRef idx="1">
+            <a:schemeClr val="accent1"/>
+          </a:lnRef>
+          <a:fillRef idx="3">
+            <a:schemeClr val="accent1"/>
+          </a:fillRef>
+          <a:effectRef idx="2">
+            <a:schemeClr val="accent1"/>
+          </a:effectRef>
+          <a:fontRef idx="minor">
+            <a:schemeClr val="lt1"/>
+          </a:fontRef>
+        </p:style>
+        <p:txBody>
+          <a:bodyPr rtlCol="0" anchor="ctr"/>
+          <a:lstStyle/>
+          <a:p>
+            <a:pPr algn="ctr"/>
+          </a:p>
+        </p:txBody>
+      </p:sp>
+      <p:sp>
+        <p:nvSpPr>
+          <p:cNvPr id="24" name="TextBox 23"/>
+          <p:cNvSpPr txBox="1"/>
+          <p:nvPr/>
+        </p:nvSpPr>
+        <p:spPr>
+          <a:xfrm>
+            <a:off x="859536" y="4458589"/>
+            <a:ext cx="10643616" cy="656082"/>
+          </a:xfrm>
+          <a:prstGeom prst="rect">
+            <a:avLst/>
+          </a:prstGeom>
+          <a:noFill/>
+        </p:spPr>
+        <p:txBody>
+          <a:bodyPr wrap="square" lIns="0" rIns="0" tIns="0" bIns="0" anchor="ctr">
+            <a:spAutoFit/>
+          </a:bodyPr>
+          <a:lstStyle/>
+          <a:p>
+            <a:pPr algn="l">
+              <a:lnSpc>
+                <a:spcPts val="1673"/>
+              </a:lnSpc>
+              <a:spcAft>
+                <a:spcPts val="300"/>
+              </a:spcAft>
+            </a:pPr>
+            <a:r>
+              <a:rPr sz="1350" b="1" i="0">
+                <a:solidFill>
+                  <a:srgbClr val="141B2E"/>
+                </a:solidFill>
+                <a:latin typeface="Arial"/>
+              </a:rPr>
+              <a:t>Предел: отказ, которому некуда идти.</a:t>
+            </a:r>
+            <a:r>
+              <a:rPr sz="1350" b="1" i="0">
+                <a:solidFill>
+                  <a:srgbClr val="141B2E"/>
+                </a:solidFill>
+                <a:latin typeface="Arial"/>
+              </a:rPr>
+              <a:t> Такой отказ не исчезает — он превращается в отсутствие записи, а отсутствие записи не мониторит никто: ни один сторож не умеет сработать на то, чего нет. Отсюда и двое суток пропуска.</a:t>
+            </a:r>
+          </a:p>
+        </p:txBody>
+      </p:sp>
+      <p:sp>
+        <p:nvSpPr>
+          <p:cNvPr id="25" name="Rounded Rectangle 24"/>
+          <p:cNvSpPr/>
+          <p:nvPr/>
+        </p:nvSpPr>
+        <p:spPr>
+          <a:xfrm>
+            <a:off x="502920" y="5407279"/>
+            <a:ext cx="82296" cy="699515"/>
+          </a:xfrm>
+          <a:prstGeom prst="roundRect">
+            <a:avLst>
+              <a:gd name="adj" fmla="val 50000"/>
+            </a:avLst>
+          </a:prstGeom>
+          <a:solidFill>
+            <a:srgbClr val="F0AB00"/>
+          </a:solidFill>
+          <a:ln>
+            <a:noFill/>
+          </a:ln>
+          <a:effectLst/>
+        </p:spPr>
+        <p:style>
+          <a:lnRef idx="1">
+            <a:schemeClr val="accent1"/>
+          </a:lnRef>
+          <a:fillRef idx="3">
+            <a:schemeClr val="accent1"/>
+          </a:fillRef>
+          <a:effectRef idx="2">
+            <a:schemeClr val="accent1"/>
+          </a:effectRef>
+          <a:fontRef idx="minor">
+            <a:schemeClr val="lt1"/>
+          </a:fontRef>
+        </p:style>
+        <p:txBody>
+          <a:bodyPr rtlCol="0" anchor="ctr"/>
+          <a:lstStyle/>
+          <a:p>
+            <a:pPr algn="ctr"/>
+          </a:p>
+        </p:txBody>
+      </p:sp>
+      <p:sp>
+        <p:nvSpPr>
           <p:cNvPr id="26" name="TextBox 25"/>
           <p:cNvSpPr txBox="1"/>
           <p:nvPr/>
         </p:nvSpPr>
         <p:spPr>
           <a:xfrm>
-            <a:off x="6414516" y="5395468"/>
-            <a:ext cx="5088636" cy="475996"/>
+            <a:off x="859536" y="5535295"/>
+            <a:ext cx="10643616" cy="443483"/>
           </a:xfrm>
           <a:prstGeom prst="rect">
             <a:avLst/>
@@ -25498,20 +25256,29 @@
           <a:p>
             <a:pPr algn="l">
               <a:lnSpc>
-                <a:spcPts val="1297"/>
-              </a:lnSpc>
-              <a:spcAft>
-                <a:spcPts val="0"/>
-              </a:spcAft>
-            </a:pPr>
-            <a:r>
-              <a:rPr sz="1100" b="0" i="0">
-                <a:solidFill>
-                  <a:srgbClr val="141B2E"/>
-                </a:solidFill>
-                <a:latin typeface="Arial"/>
-              </a:rPr>
-              <a:t>задержка фиксированная: все клиенты повторят синхронно и добьют сервис, который начал подниматься</a:t>
+                <a:spcPts val="1673"/>
+              </a:lnSpc>
+              <a:spcAft>
+                <a:spcPts val="300"/>
+              </a:spcAft>
+            </a:pPr>
+            <a:r>
+              <a:rPr sz="1350" b="1" i="0">
+                <a:solidFill>
+                  <a:srgbClr val="141B2E"/>
+                </a:solidFill>
+                <a:latin typeface="Arial"/>
+              </a:rPr>
+              <a:t>Третья строка оси закрыта.</a:t>
+            </a:r>
+            <a:r>
+              <a:rPr sz="1350" b="1" i="0">
+                <a:solidFill>
+                  <a:srgbClr val="141B2E"/>
+                </a:solidFill>
+                <a:latin typeface="Arial"/>
+              </a:rPr>
+              <a:t> Прогон зелёный, в журнале ни одной ошибки — выглядит успехом. Чем оказалось: три отказа подряд и заявки за выходные неразобранные.</a:t>
             </a:r>
           </a:p>
         </p:txBody>
@@ -27082,13 +26849,12 @@
             </a:avLst>
           </a:prstGeom>
           <a:solidFill>
-            <a:srgbClr val="FEF5E0"/>
+            <a:srgbClr val="F4F7FA"/>
           </a:solidFill>
-          <a:ln w="19050">
+          <a:ln w="15240">
             <a:solidFill>
-              <a:srgbClr val="8A6200"/>
+              <a:srgbClr val="E5EAF0"/>
             </a:solidFill>
-            <a:prstDash val="dash"/>
           </a:ln>
           <a:effectLst/>
         </p:spPr>
@@ -27147,7 +26913,7 @@
             <a:r>
               <a:rPr sz="1350" b="1" i="0">
                 <a:solidFill>
-                  <a:srgbClr val="8A6200"/>
+                  <a:srgbClr val="141B2E"/>
                 </a:solidFill>
                 <a:latin typeface="Arial"/>
               </a:rPr>
@@ -28736,218 +28502,6 @@
         <p:spPr>
           <a:xfrm>
             <a:off x="502920" y="1017794"/>
-            <a:ext cx="82296" cy="1219200"/>
-          </a:xfrm>
-          <a:prstGeom prst="roundRect">
-            <a:avLst>
-              <a:gd name="adj" fmla="val 50000"/>
-            </a:avLst>
-          </a:prstGeom>
-          <a:solidFill>
-            <a:srgbClr val="F0AB00"/>
-          </a:solidFill>
-          <a:ln>
-            <a:noFill/>
-          </a:ln>
-          <a:effectLst/>
-        </p:spPr>
-        <p:style>
-          <a:lnRef idx="1">
-            <a:schemeClr val="accent1"/>
-          </a:lnRef>
-          <a:fillRef idx="3">
-            <a:schemeClr val="accent1"/>
-          </a:fillRef>
-          <a:effectRef idx="2">
-            <a:schemeClr val="accent1"/>
-          </a:effectRef>
-          <a:fontRef idx="minor">
-            <a:schemeClr val="lt1"/>
-          </a:fontRef>
-        </p:style>
-        <p:txBody>
-          <a:bodyPr rtlCol="0" anchor="ctr"/>
-          <a:lstStyle/>
-          <a:p>
-            <a:pPr algn="ctr"/>
-          </a:p>
-        </p:txBody>
-      </p:sp>
-      <p:sp>
-        <p:nvSpPr>
-          <p:cNvPr id="4" name="TextBox 3"/>
-          <p:cNvSpPr txBox="1"/>
-          <p:nvPr/>
-        </p:nvSpPr>
-        <p:spPr>
-          <a:xfrm>
-            <a:off x="859536" y="1145810"/>
-            <a:ext cx="10643616" cy="963168"/>
-          </a:xfrm>
-          <a:prstGeom prst="rect">
-            <a:avLst/>
-          </a:prstGeom>
-          <a:noFill/>
-        </p:spPr>
-        <p:txBody>
-          <a:bodyPr wrap="square" lIns="0" rIns="0" tIns="0" bIns="0" anchor="ctr">
-            <a:spAutoFit/>
-          </a:bodyPr>
-          <a:lstStyle/>
-          <a:p>
-            <a:pPr algn="l">
-              <a:lnSpc>
-                <a:spcPts val="1860"/>
-              </a:lnSpc>
-              <a:spcAft>
-                <a:spcPts val="300"/>
-              </a:spcAft>
-            </a:pPr>
-            <a:r>
-              <a:rPr sz="1500" b="1" i="0">
-                <a:solidFill>
-                  <a:srgbClr val="141B2E"/>
-                </a:solidFill>
-                <a:latin typeface="Arial"/>
-              </a:rPr>
-              <a:t>Предел: вместе с файлом сценария уезжает больше, чем кажется.</a:t>
-            </a:r>
-            <a:r>
-              <a:rPr sz="1500" b="1" i="0">
-                <a:solidFill>
-                  <a:srgbClr val="141B2E"/>
-                </a:solidFill>
-                <a:latin typeface="Arial"/>
-              </a:rPr>
-              <a:t> Секретов в нём нет — пароли и ключи инструмент хранит отдельно. А идентификаторы и имена подключений, адреса, пути, имена таблиц и внутренних сервисов — есть. Правило, которое стоит выполнять механически: </a:t>
-            </a:r>
-            <a:r>
-              <a:rPr sz="1500" b="1" i="0">
-                <a:solidFill>
-                  <a:srgbClr val="141B2E"/>
-                </a:solidFill>
-                <a:latin typeface="Arial"/>
-              </a:rPr>
-              <a:t>прежде чем отдать файл сценария — откройте его и прочитайте глазами.</a:t>
-            </a:r>
-            <a:r>
-              <a:rPr sz="1500" b="1" i="0">
-                <a:solidFill>
-                  <a:srgbClr val="141B2E"/>
-                </a:solidFill>
-                <a:latin typeface="Arial"/>
-              </a:rPr>
-              <a:t> Это тридцать секунд.</a:t>
-            </a:r>
-          </a:p>
-        </p:txBody>
-      </p:sp>
-      <p:sp>
-        <p:nvSpPr>
-          <p:cNvPr id="5" name="Rounded Rectangle 4"/>
-          <p:cNvSpPr/>
-          <p:nvPr/>
-        </p:nvSpPr>
-        <p:spPr>
-          <a:xfrm>
-            <a:off x="502920" y="2587684"/>
-            <a:ext cx="82296" cy="746760"/>
-          </a:xfrm>
-          <a:prstGeom prst="roundRect">
-            <a:avLst>
-              <a:gd name="adj" fmla="val 50000"/>
-            </a:avLst>
-          </a:prstGeom>
-          <a:solidFill>
-            <a:srgbClr val="F0AB00"/>
-          </a:solidFill>
-          <a:ln>
-            <a:noFill/>
-          </a:ln>
-          <a:effectLst/>
-        </p:spPr>
-        <p:style>
-          <a:lnRef idx="1">
-            <a:schemeClr val="accent1"/>
-          </a:lnRef>
-          <a:fillRef idx="3">
-            <a:schemeClr val="accent1"/>
-          </a:fillRef>
-          <a:effectRef idx="2">
-            <a:schemeClr val="accent1"/>
-          </a:effectRef>
-          <a:fontRef idx="minor">
-            <a:schemeClr val="lt1"/>
-          </a:fontRef>
-        </p:style>
-        <p:txBody>
-          <a:bodyPr rtlCol="0" anchor="ctr"/>
-          <a:lstStyle/>
-          <a:p>
-            <a:pPr algn="ctr"/>
-          </a:p>
-        </p:txBody>
-      </p:sp>
-      <p:sp>
-        <p:nvSpPr>
-          <p:cNvPr id="6" name="TextBox 5"/>
-          <p:cNvSpPr txBox="1"/>
-          <p:nvPr/>
-        </p:nvSpPr>
-        <p:spPr>
-          <a:xfrm>
-            <a:off x="859536" y="2715700"/>
-            <a:ext cx="10643616" cy="490727"/>
-          </a:xfrm>
-          <a:prstGeom prst="rect">
-            <a:avLst/>
-          </a:prstGeom>
-          <a:noFill/>
-        </p:spPr>
-        <p:txBody>
-          <a:bodyPr wrap="square" lIns="0" rIns="0" tIns="0" bIns="0" anchor="ctr">
-            <a:spAutoFit/>
-          </a:bodyPr>
-          <a:lstStyle/>
-          <a:p>
-            <a:pPr algn="l">
-              <a:lnSpc>
-                <a:spcPts val="1860"/>
-              </a:lnSpc>
-              <a:spcAft>
-                <a:spcPts val="300"/>
-              </a:spcAft>
-            </a:pPr>
-            <a:r>
-              <a:rPr sz="1500" b="1" i="0">
-                <a:solidFill>
-                  <a:srgbClr val="141B2E"/>
-                </a:solidFill>
-                <a:latin typeface="Arial"/>
-              </a:rPr>
-              <a:t>Четвёртая строка оси закрыта.</a:t>
-            </a:r>
-            <a:r>
-              <a:rPr sz="1500" b="1" i="0">
-                <a:solidFill>
-                  <a:srgbClr val="141B2E"/>
-                </a:solidFill>
-                <a:latin typeface="Arial"/>
-              </a:rPr>
-              <a:t> Правка на холсте есть, никто её не откатывал — выглядит успехом. Чем оказалось: сутки работы по старой версии.</a:t>
-            </a:r>
-          </a:p>
-        </p:txBody>
-      </p:sp>
-      <p:sp>
-        <p:nvSpPr>
-          <p:cNvPr id="7" name="Rounded Rectangle 6"/>
-          <p:cNvSpPr/>
-          <p:nvPr/>
-        </p:nvSpPr>
-        <p:spPr>
-          <a:xfrm>
-            <a:off x="502920" y="3685133"/>
             <a:ext cx="5454396" cy="2530856"/>
           </a:xfrm>
           <a:prstGeom prst="roundRect">
@@ -28989,13 +28543,13 @@
       </p:sp>
       <p:sp>
         <p:nvSpPr>
-          <p:cNvPr id="8" name="TextBox 7"/>
-          <p:cNvSpPr txBox="1"/>
-          <p:nvPr/>
-        </p:nvSpPr>
-        <p:spPr>
-          <a:xfrm>
-            <a:off x="685800" y="3794861"/>
+          <p:cNvPr id="4" name="TextBox 3"/>
+          <p:cNvSpPr txBox="1"/>
+          <p:nvPr/>
+        </p:nvSpPr>
+        <p:spPr>
+          <a:xfrm>
+            <a:off x="685800" y="1127522"/>
             <a:ext cx="5088636" cy="274320"/>
           </a:xfrm>
           <a:prstGeom prst="rect">
@@ -29024,20 +28578,20 @@
                 </a:solidFill>
                 <a:latin typeface="Arial"/>
               </a:rPr>
-              <a:t>НУЖНА ПРОВЕРКА **НАСТОЯЩИМ СОБЫТИЕМ**</a:t>
-            </a:r>
-          </a:p>
-        </p:txBody>
-      </p:sp>
-      <p:sp>
-        <p:nvSpPr>
-          <p:cNvPr id="9" name="TextBox 8"/>
-          <p:cNvSpPr txBox="1"/>
-          <p:nvPr/>
-        </p:nvSpPr>
-        <p:spPr>
-          <a:xfrm>
-            <a:off x="685800" y="4069181"/>
+              <a:t>НУЖНА ПРОВЕРКА НАСТОЯЩИМ СОБЫТИЕМ</a:t>
+            </a:r>
+          </a:p>
+        </p:txBody>
+      </p:sp>
+      <p:sp>
+        <p:nvSpPr>
+          <p:cNvPr id="5" name="TextBox 4"/>
+          <p:cNvSpPr txBox="1"/>
+          <p:nvPr/>
+        </p:nvSpPr>
+        <p:spPr>
+          <a:xfrm>
+            <a:off x="685800" y="1401842"/>
             <a:ext cx="5088636" cy="490982"/>
           </a:xfrm>
           <a:prstGeom prst="rect">
@@ -29073,13 +28627,13 @@
       </p:sp>
       <p:cxnSp>
         <p:nvCxnSpPr>
-          <p:cNvPr id="10" name="Connector 9"/>
+          <p:cNvPr id="6" name="Connector 5"/>
           <p:cNvCxnSpPr/>
           <p:nvPr/>
         </p:nvCxnSpPr>
         <p:spPr>
           <a:xfrm>
-            <a:off x="685800" y="4560163"/>
+            <a:off x="685800" y="1892824"/>
             <a:ext cx="5088636" cy="0"/>
           </a:xfrm>
           <a:prstGeom prst="line">
@@ -29108,13 +28662,13 @@
       </p:cxnSp>
       <p:sp>
         <p:nvSpPr>
-          <p:cNvPr id="11" name="TextBox 10"/>
-          <p:cNvSpPr txBox="1"/>
-          <p:nvPr/>
-        </p:nvSpPr>
-        <p:spPr>
-          <a:xfrm>
-            <a:off x="685800" y="4560163"/>
+          <p:cNvPr id="7" name="TextBox 6"/>
+          <p:cNvSpPr txBox="1"/>
+          <p:nvPr/>
+        </p:nvSpPr>
+        <p:spPr>
+          <a:xfrm>
+            <a:off x="685800" y="1892824"/>
             <a:ext cx="5088636" cy="490982"/>
           </a:xfrm>
           <a:prstGeom prst="rect">
@@ -29150,13 +28704,13 @@
       </p:sp>
       <p:cxnSp>
         <p:nvCxnSpPr>
-          <p:cNvPr id="12" name="Connector 11"/>
+          <p:cNvPr id="8" name="Connector 7"/>
           <p:cNvCxnSpPr/>
           <p:nvPr/>
         </p:nvCxnSpPr>
         <p:spPr>
           <a:xfrm>
-            <a:off x="685800" y="5051145"/>
+            <a:off x="685800" y="2383806"/>
             <a:ext cx="5088636" cy="0"/>
           </a:xfrm>
           <a:prstGeom prst="line">
@@ -29185,13 +28739,13 @@
       </p:cxnSp>
       <p:sp>
         <p:nvSpPr>
-          <p:cNvPr id="13" name="TextBox 12"/>
-          <p:cNvSpPr txBox="1"/>
-          <p:nvPr/>
-        </p:nvSpPr>
-        <p:spPr>
-          <a:xfrm>
-            <a:off x="685800" y="5051145"/>
+          <p:cNvPr id="9" name="TextBox 8"/>
+          <p:cNvSpPr txBox="1"/>
+          <p:nvPr/>
+        </p:nvSpPr>
+        <p:spPr>
+          <a:xfrm>
+            <a:off x="685800" y="2383806"/>
             <a:ext cx="5088636" cy="490982"/>
           </a:xfrm>
           <a:prstGeom prst="rect">
@@ -29227,13 +28781,13 @@
       </p:sp>
       <p:cxnSp>
         <p:nvCxnSpPr>
-          <p:cNvPr id="14" name="Connector 13"/>
+          <p:cNvPr id="10" name="Connector 9"/>
           <p:cNvCxnSpPr/>
           <p:nvPr/>
         </p:nvCxnSpPr>
         <p:spPr>
           <a:xfrm>
-            <a:off x="685800" y="5542127"/>
+            <a:off x="685800" y="2874788"/>
             <a:ext cx="5088636" cy="0"/>
           </a:xfrm>
           <a:prstGeom prst="line">
@@ -29262,13 +28816,13 @@
       </p:cxnSp>
       <p:sp>
         <p:nvSpPr>
-          <p:cNvPr id="15" name="TextBox 14"/>
-          <p:cNvSpPr txBox="1"/>
-          <p:nvPr/>
-        </p:nvSpPr>
-        <p:spPr>
-          <a:xfrm>
-            <a:off x="685800" y="5542127"/>
+          <p:cNvPr id="11" name="TextBox 10"/>
+          <p:cNvSpPr txBox="1"/>
+          <p:nvPr/>
+        </p:nvSpPr>
+        <p:spPr>
+          <a:xfrm>
+            <a:off x="685800" y="2874788"/>
             <a:ext cx="5088636" cy="490982"/>
           </a:xfrm>
           <a:prstGeom prst="rect">
@@ -29304,13 +28858,13 @@
       </p:sp>
       <p:sp>
         <p:nvSpPr>
-          <p:cNvPr id="16" name="Rounded Rectangle 15"/>
+          <p:cNvPr id="12" name="Rounded Rectangle 11"/>
           <p:cNvSpPr/>
           <p:nvPr/>
         </p:nvSpPr>
         <p:spPr>
           <a:xfrm>
-            <a:off x="6231636" y="3685133"/>
+            <a:off x="6231636" y="1017794"/>
             <a:ext cx="5454396" cy="2530856"/>
           </a:xfrm>
           <a:prstGeom prst="roundRect">
@@ -29352,13 +28906,13 @@
       </p:sp>
       <p:sp>
         <p:nvSpPr>
-          <p:cNvPr id="17" name="TextBox 16"/>
-          <p:cNvSpPr txBox="1"/>
-          <p:nvPr/>
-        </p:nvSpPr>
-        <p:spPr>
-          <a:xfrm>
-            <a:off x="6414516" y="3794861"/>
+          <p:cNvPr id="13" name="TextBox 12"/>
+          <p:cNvSpPr txBox="1"/>
+          <p:nvPr/>
+        </p:nvSpPr>
+        <p:spPr>
+          <a:xfrm>
+            <a:off x="6414516" y="1127522"/>
             <a:ext cx="5088636" cy="274320"/>
           </a:xfrm>
           <a:prstGeom prst="rect">
@@ -29387,20 +28941,20 @@
                 </a:solidFill>
                 <a:latin typeface="Arial"/>
               </a:rPr>
-              <a:t>ХВАТИТ **РУЧНОГО ЗАПУСКА**</a:t>
-            </a:r>
-          </a:p>
-        </p:txBody>
-      </p:sp>
-      <p:sp>
-        <p:nvSpPr>
-          <p:cNvPr id="18" name="TextBox 17"/>
-          <p:cNvSpPr txBox="1"/>
-          <p:nvPr/>
-        </p:nvSpPr>
-        <p:spPr>
-          <a:xfrm>
-            <a:off x="6414516" y="4069181"/>
+              <a:t>ХВАТИТ РУЧНОГО ЗАПУСКА</a:t>
+            </a:r>
+          </a:p>
+        </p:txBody>
+      </p:sp>
+      <p:sp>
+        <p:nvSpPr>
+          <p:cNvPr id="14" name="TextBox 13"/>
+          <p:cNvSpPr txBox="1"/>
+          <p:nvPr/>
+        </p:nvSpPr>
+        <p:spPr>
+          <a:xfrm>
+            <a:off x="6414516" y="1401842"/>
             <a:ext cx="5088636" cy="490982"/>
           </a:xfrm>
           <a:prstGeom prst="rect">
@@ -29436,13 +28990,13 @@
       </p:sp>
       <p:cxnSp>
         <p:nvCxnSpPr>
-          <p:cNvPr id="19" name="Connector 18"/>
+          <p:cNvPr id="15" name="Connector 14"/>
           <p:cNvCxnSpPr/>
           <p:nvPr/>
         </p:nvCxnSpPr>
         <p:spPr>
           <a:xfrm>
-            <a:off x="6414516" y="4560163"/>
+            <a:off x="6414516" y="1892824"/>
             <a:ext cx="5088636" cy="0"/>
           </a:xfrm>
           <a:prstGeom prst="line">
@@ -29471,13 +29025,13 @@
       </p:cxnSp>
       <p:sp>
         <p:nvSpPr>
-          <p:cNvPr id="20" name="TextBox 19"/>
-          <p:cNvSpPr txBox="1"/>
-          <p:nvPr/>
-        </p:nvSpPr>
-        <p:spPr>
-          <a:xfrm>
-            <a:off x="6414516" y="4560163"/>
+          <p:cNvPr id="16" name="TextBox 15"/>
+          <p:cNvSpPr txBox="1"/>
+          <p:nvPr/>
+        </p:nvSpPr>
+        <p:spPr>
+          <a:xfrm>
+            <a:off x="6414516" y="1892824"/>
             <a:ext cx="5088636" cy="318642"/>
           </a:xfrm>
           <a:prstGeom prst="rect">
@@ -29513,13 +29067,13 @@
       </p:sp>
       <p:cxnSp>
         <p:nvCxnSpPr>
-          <p:cNvPr id="21" name="Connector 20"/>
+          <p:cNvPr id="17" name="Connector 16"/>
           <p:cNvCxnSpPr/>
           <p:nvPr/>
         </p:nvCxnSpPr>
         <p:spPr>
           <a:xfrm>
-            <a:off x="6414516" y="4878806"/>
+            <a:off x="6414516" y="2211467"/>
             <a:ext cx="5088636" cy="0"/>
           </a:xfrm>
           <a:prstGeom prst="line">
@@ -29548,13 +29102,13 @@
       </p:cxnSp>
       <p:sp>
         <p:nvSpPr>
-          <p:cNvPr id="22" name="TextBox 21"/>
-          <p:cNvSpPr txBox="1"/>
-          <p:nvPr/>
-        </p:nvSpPr>
-        <p:spPr>
-          <a:xfrm>
-            <a:off x="6414516" y="4878806"/>
+          <p:cNvPr id="18" name="TextBox 17"/>
+          <p:cNvSpPr txBox="1"/>
+          <p:nvPr/>
+        </p:nvSpPr>
+        <p:spPr>
+          <a:xfrm>
+            <a:off x="6414516" y="2211467"/>
             <a:ext cx="5088636" cy="318642"/>
           </a:xfrm>
           <a:prstGeom prst="rect">
@@ -29590,13 +29144,13 @@
       </p:sp>
       <p:cxnSp>
         <p:nvCxnSpPr>
-          <p:cNvPr id="23" name="Connector 22"/>
+          <p:cNvPr id="19" name="Connector 18"/>
           <p:cNvCxnSpPr/>
           <p:nvPr/>
         </p:nvCxnSpPr>
         <p:spPr>
           <a:xfrm>
-            <a:off x="6414516" y="5197449"/>
+            <a:off x="6414516" y="2530110"/>
             <a:ext cx="5088636" cy="0"/>
           </a:xfrm>
           <a:prstGeom prst="line">
@@ -29625,14 +29179,217 @@
       </p:cxnSp>
       <p:sp>
         <p:nvSpPr>
+          <p:cNvPr id="20" name="TextBox 19"/>
+          <p:cNvSpPr txBox="1"/>
+          <p:nvPr/>
+        </p:nvSpPr>
+        <p:spPr>
+          <a:xfrm>
+            <a:off x="6414516" y="2530110"/>
+            <a:ext cx="5088636" cy="318642"/>
+          </a:xfrm>
+          <a:prstGeom prst="rect">
+            <a:avLst/>
+          </a:prstGeom>
+          <a:noFill/>
+        </p:spPr>
+        <p:txBody>
+          <a:bodyPr wrap="square" lIns="0" rIns="0" tIns="0" bIns="0" anchor="ctr">
+            <a:spAutoFit/>
+          </a:bodyPr>
+          <a:lstStyle/>
+          <a:p>
+            <a:pPr algn="l">
+              <a:lnSpc>
+                <a:spcPts val="1356"/>
+              </a:lnSpc>
+              <a:spcAft>
+                <a:spcPts val="0"/>
+              </a:spcAft>
+            </a:pPr>
+            <a:r>
+              <a:rPr sz="1150" b="0" i="0">
+                <a:solidFill>
+                  <a:srgbClr val="141B2E"/>
+                </a:solidFill>
+                <a:latin typeface="Arial"/>
+              </a:rPr>
+              <a:t>один элемент, одна заявка, один файл</a:t>
+            </a:r>
+          </a:p>
+        </p:txBody>
+      </p:sp>
+      <p:sp>
+        <p:nvSpPr>
+          <p:cNvPr id="21" name="Rounded Rectangle 20"/>
+          <p:cNvSpPr/>
+          <p:nvPr/>
+        </p:nvSpPr>
+        <p:spPr>
+          <a:xfrm>
+            <a:off x="502920" y="3899340"/>
+            <a:ext cx="82296" cy="1219200"/>
+          </a:xfrm>
+          <a:prstGeom prst="roundRect">
+            <a:avLst>
+              <a:gd name="adj" fmla="val 50000"/>
+            </a:avLst>
+          </a:prstGeom>
+          <a:solidFill>
+            <a:srgbClr val="F0AB00"/>
+          </a:solidFill>
+          <a:ln>
+            <a:noFill/>
+          </a:ln>
+          <a:effectLst/>
+        </p:spPr>
+        <p:style>
+          <a:lnRef idx="1">
+            <a:schemeClr val="accent1"/>
+          </a:lnRef>
+          <a:fillRef idx="3">
+            <a:schemeClr val="accent1"/>
+          </a:fillRef>
+          <a:effectRef idx="2">
+            <a:schemeClr val="accent1"/>
+          </a:effectRef>
+          <a:fontRef idx="minor">
+            <a:schemeClr val="lt1"/>
+          </a:fontRef>
+        </p:style>
+        <p:txBody>
+          <a:bodyPr rtlCol="0" anchor="ctr"/>
+          <a:lstStyle/>
+          <a:p>
+            <a:pPr algn="ctr"/>
+          </a:p>
+        </p:txBody>
+      </p:sp>
+      <p:sp>
+        <p:nvSpPr>
+          <p:cNvPr id="22" name="TextBox 21"/>
+          <p:cNvSpPr txBox="1"/>
+          <p:nvPr/>
+        </p:nvSpPr>
+        <p:spPr>
+          <a:xfrm>
+            <a:off x="859536" y="4027356"/>
+            <a:ext cx="10643616" cy="963168"/>
+          </a:xfrm>
+          <a:prstGeom prst="rect">
+            <a:avLst/>
+          </a:prstGeom>
+          <a:noFill/>
+        </p:spPr>
+        <p:txBody>
+          <a:bodyPr wrap="square" lIns="0" rIns="0" tIns="0" bIns="0" anchor="ctr">
+            <a:spAutoFit/>
+          </a:bodyPr>
+          <a:lstStyle/>
+          <a:p>
+            <a:pPr algn="l">
+              <a:lnSpc>
+                <a:spcPts val="1860"/>
+              </a:lnSpc>
+              <a:spcAft>
+                <a:spcPts val="300"/>
+              </a:spcAft>
+            </a:pPr>
+            <a:r>
+              <a:rPr sz="1500" b="1" i="0">
+                <a:solidFill>
+                  <a:srgbClr val="141B2E"/>
+                </a:solidFill>
+                <a:latin typeface="Arial"/>
+              </a:rPr>
+              <a:t>Предел: вместе с файлом сценария уезжает больше, чем кажется.</a:t>
+            </a:r>
+            <a:r>
+              <a:rPr sz="1500" b="1" i="0">
+                <a:solidFill>
+                  <a:srgbClr val="141B2E"/>
+                </a:solidFill>
+                <a:latin typeface="Arial"/>
+              </a:rPr>
+              <a:t> Секретов в нём нет — пароли и ключи инструмент хранит отдельно. А идентификаторы и имена подключений, адреса, пути, имена таблиц и внутренних сервисов — есть. Правило, которое стоит выполнять механически: </a:t>
+            </a:r>
+            <a:r>
+              <a:rPr sz="1500" b="1" i="0">
+                <a:solidFill>
+                  <a:srgbClr val="141B2E"/>
+                </a:solidFill>
+                <a:latin typeface="Arial"/>
+              </a:rPr>
+              <a:t>прежде чем отдать файл сценария — откройте его и прочитайте глазами.</a:t>
+            </a:r>
+            <a:r>
+              <a:rPr sz="1500" b="1" i="0">
+                <a:solidFill>
+                  <a:srgbClr val="141B2E"/>
+                </a:solidFill>
+                <a:latin typeface="Arial"/>
+              </a:rPr>
+              <a:t> Это тридцать секунд.</a:t>
+            </a:r>
+          </a:p>
+        </p:txBody>
+      </p:sp>
+      <p:sp>
+        <p:nvSpPr>
+          <p:cNvPr id="23" name="Rounded Rectangle 22"/>
+          <p:cNvSpPr/>
+          <p:nvPr/>
+        </p:nvSpPr>
+        <p:spPr>
+          <a:xfrm>
+            <a:off x="502920" y="5469229"/>
+            <a:ext cx="82296" cy="746760"/>
+          </a:xfrm>
+          <a:prstGeom prst="roundRect">
+            <a:avLst>
+              <a:gd name="adj" fmla="val 50000"/>
+            </a:avLst>
+          </a:prstGeom>
+          <a:solidFill>
+            <a:srgbClr val="F0AB00"/>
+          </a:solidFill>
+          <a:ln>
+            <a:noFill/>
+          </a:ln>
+          <a:effectLst/>
+        </p:spPr>
+        <p:style>
+          <a:lnRef idx="1">
+            <a:schemeClr val="accent1"/>
+          </a:lnRef>
+          <a:fillRef idx="3">
+            <a:schemeClr val="accent1"/>
+          </a:fillRef>
+          <a:effectRef idx="2">
+            <a:schemeClr val="accent1"/>
+          </a:effectRef>
+          <a:fontRef idx="minor">
+            <a:schemeClr val="lt1"/>
+          </a:fontRef>
+        </p:style>
+        <p:txBody>
+          <a:bodyPr rtlCol="0" anchor="ctr"/>
+          <a:lstStyle/>
+          <a:p>
+            <a:pPr algn="ctr"/>
+          </a:p>
+        </p:txBody>
+      </p:sp>
+      <p:sp>
+        <p:nvSpPr>
           <p:cNvPr id="24" name="TextBox 23"/>
           <p:cNvSpPr txBox="1"/>
           <p:nvPr/>
         </p:nvSpPr>
         <p:spPr>
           <a:xfrm>
-            <a:off x="6414516" y="5197449"/>
-            <a:ext cx="5088636" cy="318642"/>
+            <a:off x="859536" y="5597245"/>
+            <a:ext cx="10643616" cy="490727"/>
           </a:xfrm>
           <a:prstGeom prst="rect">
             <a:avLst/>
@@ -29647,20 +29404,29 @@
           <a:p>
             <a:pPr algn="l">
               <a:lnSpc>
-                <a:spcPts val="1356"/>
-              </a:lnSpc>
-              <a:spcAft>
-                <a:spcPts val="0"/>
-              </a:spcAft>
-            </a:pPr>
-            <a:r>
-              <a:rPr sz="1150" b="0" i="0">
-                <a:solidFill>
-                  <a:srgbClr val="141B2E"/>
-                </a:solidFill>
-                <a:latin typeface="Arial"/>
-              </a:rPr>
-              <a:t>один элемент, одна заявка, один файл</a:t>
+                <a:spcPts val="1860"/>
+              </a:lnSpc>
+              <a:spcAft>
+                <a:spcPts val="300"/>
+              </a:spcAft>
+            </a:pPr>
+            <a:r>
+              <a:rPr sz="1500" b="1" i="0">
+                <a:solidFill>
+                  <a:srgbClr val="141B2E"/>
+                </a:solidFill>
+                <a:latin typeface="Arial"/>
+              </a:rPr>
+              <a:t>Четвёртая строка оси закрыта.</a:t>
+            </a:r>
+            <a:r>
+              <a:rPr sz="1500" b="1" i="0">
+                <a:solidFill>
+                  <a:srgbClr val="141B2E"/>
+                </a:solidFill>
+                <a:latin typeface="Arial"/>
+              </a:rPr>
+              <a:t> Правка на холсте есть, никто её не откатывал — выглядит успехом. Чем оказалось: сутки работы по старой версии.</a:t>
             </a:r>
           </a:p>
         </p:txBody>
@@ -32848,12 +32614,12 @@
         </p:nvSpPr>
         <p:spPr>
           <a:xfrm>
-            <a:off x="502920" y="1490522"/>
-            <a:ext cx="11183112" cy="2602102"/>
+            <a:off x="502920" y="1636572"/>
+            <a:ext cx="11183112" cy="2236977"/>
           </a:xfrm>
           <a:prstGeom prst="roundRect">
             <a:avLst>
-              <a:gd name="adj" fmla="val 11713"/>
+              <a:gd name="adj" fmla="val 13625"/>
             </a:avLst>
           </a:prstGeom>
           <a:solidFill>
@@ -32896,8 +32662,8 @@
         </p:nvSpPr>
         <p:spPr>
           <a:xfrm>
-            <a:off x="685800" y="1673402"/>
-            <a:ext cx="4976440" cy="282067"/>
+            <a:off x="685800" y="1819452"/>
+            <a:ext cx="4986861" cy="282067"/>
           </a:xfrm>
           <a:prstGeom prst="rect">
             <a:avLst/>
@@ -32938,8 +32704,8 @@
         </p:nvSpPr>
         <p:spPr>
           <a:xfrm>
-            <a:off x="5808544" y="1673402"/>
-            <a:ext cx="3365888" cy="282067"/>
+            <a:off x="5818965" y="1819452"/>
+            <a:ext cx="3462328" cy="282067"/>
           </a:xfrm>
           <a:prstGeom prst="rect">
             <a:avLst/>
@@ -32980,8 +32746,8 @@
         </p:nvSpPr>
         <p:spPr>
           <a:xfrm>
-            <a:off x="9320737" y="1673402"/>
-            <a:ext cx="2036110" cy="282067"/>
+            <a:off x="9427597" y="1819452"/>
+            <a:ext cx="1929250" cy="282067"/>
           </a:xfrm>
           <a:prstGeom prst="rect">
             <a:avLst/>
@@ -33022,8 +32788,8 @@
         </p:nvSpPr>
         <p:spPr>
           <a:xfrm>
-            <a:off x="685800" y="1955469"/>
-            <a:ext cx="4976440" cy="712279"/>
+            <a:off x="685800" y="2101519"/>
+            <a:ext cx="4986861" cy="529717"/>
           </a:xfrm>
           <a:prstGeom prst="rect">
             <a:avLst/>
@@ -33060,7 +32826,7 @@
                 </a:solidFill>
                 <a:latin typeface="Arial"/>
               </a:rPr>
-              <a:t>&lt;br&gt;возьми оттуда, преобразуй, положи сюда, уведоми</a:t>
+              <a:t> — возьми оттуда, преобразуй, положи сюда, уведоми</a:t>
             </a:r>
           </a:p>
         </p:txBody>
@@ -33073,8 +32839,8 @@
         </p:nvSpPr>
         <p:spPr>
           <a:xfrm>
-            <a:off x="5808544" y="1955469"/>
-            <a:ext cx="3365888" cy="712279"/>
+            <a:off x="5818965" y="2101519"/>
+            <a:ext cx="3462328" cy="529717"/>
           </a:xfrm>
           <a:prstGeom prst="rect">
             <a:avLst/>
@@ -33115,8 +32881,8 @@
         </p:nvSpPr>
         <p:spPr>
           <a:xfrm>
-            <a:off x="9320737" y="1955469"/>
-            <a:ext cx="2036110" cy="712279"/>
+            <a:off x="9427597" y="2101519"/>
+            <a:ext cx="1929250" cy="529717"/>
           </a:xfrm>
           <a:prstGeom prst="rect">
             <a:avLst/>
@@ -33153,7 +32919,7 @@
                 </a:solidFill>
                 <a:latin typeface="Arial"/>
               </a:rPr>
-              <a:t> · Activepieces&lt;br&gt;Make · Zapier</a:t>
+              <a:t> · Activepieces · Make · Zapier</a:t>
             </a:r>
           </a:p>
         </p:txBody>
@@ -33166,7 +32932,7 @@
         </p:nvCxnSpPr>
         <p:spPr>
           <a:xfrm>
-            <a:off x="685800" y="2667749"/>
+            <a:off x="685800" y="2631236"/>
             <a:ext cx="10817352" cy="0"/>
           </a:xfrm>
           <a:prstGeom prst="line">
@@ -33201,8 +32967,8 @@
         </p:nvSpPr>
         <p:spPr>
           <a:xfrm>
-            <a:off x="685800" y="2667749"/>
-            <a:ext cx="4976440" cy="712279"/>
+            <a:off x="685800" y="2631236"/>
+            <a:ext cx="4986861" cy="529717"/>
           </a:xfrm>
           <a:prstGeom prst="rect">
             <a:avLst/>
@@ -33239,7 +33005,7 @@
                 </a:solidFill>
                 <a:latin typeface="Arial"/>
               </a:rPr>
-              <a:t>&lt;br&gt;дай инструменты и проверки, поручи задачу</a:t>
+              <a:t> — дай инструменты и проверки, поручи задачу</a:t>
             </a:r>
           </a:p>
         </p:txBody>
@@ -33252,8 +33018,8 @@
         </p:nvSpPr>
         <p:spPr>
           <a:xfrm>
-            <a:off x="5808544" y="2667749"/>
-            <a:ext cx="3365888" cy="712279"/>
+            <a:off x="5818965" y="2631236"/>
+            <a:ext cx="3462328" cy="529717"/>
           </a:xfrm>
           <a:prstGeom prst="rect">
             <a:avLst/>
@@ -33294,8 +33060,8 @@
         </p:nvSpPr>
         <p:spPr>
           <a:xfrm>
-            <a:off x="9320737" y="2667749"/>
-            <a:ext cx="2036110" cy="712279"/>
+            <a:off x="9427597" y="2631236"/>
+            <a:ext cx="1929250" cy="529717"/>
           </a:xfrm>
           <a:prstGeom prst="rect">
             <a:avLst/>
@@ -33323,7 +33089,7 @@
                 </a:solidFill>
                 <a:latin typeface="Arial"/>
               </a:rPr>
-              <a:t>sim · Agent Builder&lt;br&gt;у крупных поставщиков</a:t>
+              <a:t>sim · Agent Builder у крупных поставщиков</a:t>
             </a:r>
           </a:p>
         </p:txBody>
@@ -33336,7 +33102,7 @@
         </p:nvCxnSpPr>
         <p:spPr>
           <a:xfrm>
-            <a:off x="685800" y="3380028"/>
+            <a:off x="685800" y="3160953"/>
             <a:ext cx="10817352" cy="0"/>
           </a:xfrm>
           <a:prstGeom prst="line">
@@ -33371,8 +33137,8 @@
         </p:nvSpPr>
         <p:spPr>
           <a:xfrm>
-            <a:off x="685800" y="3380028"/>
-            <a:ext cx="4976440" cy="529717"/>
+            <a:off x="685800" y="3160953"/>
+            <a:ext cx="4986861" cy="529717"/>
           </a:xfrm>
           <a:prstGeom prst="rect">
             <a:avLst/>
@@ -33409,7 +33175,7 @@
                 </a:solidFill>
                 <a:latin typeface="Arial"/>
               </a:rPr>
-              <a:t>&lt;br&gt;цепочка вызовов, поиск по документам, память диалога</a:t>
+              <a:t> — цепочка вызовов, поиск по документам, память диалога</a:t>
             </a:r>
           </a:p>
         </p:txBody>
@@ -33422,8 +33188,8 @@
         </p:nvSpPr>
         <p:spPr>
           <a:xfrm>
-            <a:off x="5808544" y="3380028"/>
-            <a:ext cx="3365888" cy="529717"/>
+            <a:off x="5818965" y="3160953"/>
+            <a:ext cx="3462328" cy="529717"/>
           </a:xfrm>
           <a:prstGeom prst="rect">
             <a:avLst/>
@@ -33464,8 +33230,8 @@
         </p:nvSpPr>
         <p:spPr>
           <a:xfrm>
-            <a:off x="9320737" y="3380028"/>
-            <a:ext cx="2036110" cy="529717"/>
+            <a:off x="9427597" y="3160953"/>
+            <a:ext cx="1929250" cy="529717"/>
           </a:xfrm>
           <a:prstGeom prst="rect">
             <a:avLst/>
@@ -33506,7 +33272,7 @@
         </p:nvSpPr>
         <p:spPr>
           <a:xfrm>
-            <a:off x="502920" y="4760137"/>
+            <a:off x="502920" y="4541062"/>
             <a:ext cx="82296" cy="746760"/>
           </a:xfrm>
           <a:prstGeom prst="roundRect">
@@ -33552,7 +33318,7 @@
         </p:nvSpPr>
         <p:spPr>
           <a:xfrm>
-            <a:off x="859536" y="4888153"/>
+            <a:off x="859536" y="4669078"/>
             <a:ext cx="10643616" cy="490727"/>
           </a:xfrm>
           <a:prstGeom prst="rect">

--- a/library/seminars/sem-07/rendered/sem-07.pptx
+++ b/library/seminars/sem-07/rendered/sem-07.pptx
@@ -47,6 +47,7 @@
     <p:sldId id="295" r:id="rId47"/>
     <p:sldId id="296" r:id="rId48"/>
     <p:sldId id="297" r:id="rId49"/>
+    <p:sldId id="298" r:id="rId50"/>
   </p:sldIdLst>
   <p:sldSz cx="12191695" cy="6858000" type="screen4x3"/>
   <p:notesSz cx="6858000" cy="9144000"/>
@@ -3911,13 +3912,38 @@
           <a:lstStyle/>
           <a:p>
             <a:r>
-              <a:t>Четвёртый кейс, и он единственный, где мы ничего не будем достраивать. Процесс уже собран, работает и проверен.</a:t>
+              <a:t>Четвёртый кейс — тот самый вопрос, который задаёт каждый, кто собрал такой процесс и посмотрел на результат внимательно.</a:t>
             </a:r>
           </a:p>
           <a:p/>
           <a:p>
             <a:r>
-              <a:t>Здесь мы разберём другое: почему собранное работает не так, как выглядит, — и почему проверка, которой мы пользовались весь последний час, этого не показывает.</a:t>
+              <a:t>Всё, что мы делали до сих пор, защищало </a:t>
+            </a:r>
+            <a:r>
+              <a:rPr b="1"/>
+              <a:t>форму</a:t>
+            </a:r>
+            <a:r>
+              <a:t>. Значение не пустое. Значение из справочника. Прогон не упал, а если упал — заявка не потерялась. Три строки оси закрыты, и все три про форму.</a:t>
+            </a:r>
+          </a:p>
+          <a:p/>
+          <a:p>
+            <a:r>
+              <a:t>А теперь Ольга смотрит в таблицу и говорит: тут написано «курс», а человек спрашивал про счёт. И так раза три за день.</a:t>
+            </a:r>
+          </a:p>
+          <a:p/>
+          <a:p>
+            <a:r>
+              <a:t>Процесс отработал правильно во всех смыслах, которые мы умеем проверять. Значение законное, из списка, записано. Оно просто неверное — и ни один наш сторож этого не ловит, потому что все они проверяют форму, а не смысл.</a:t>
+            </a:r>
+          </a:p>
+          <a:p/>
+          <a:p>
+            <a:r>
+              <a:t>Что с этим делать — разбираем весь оставшийся час.</a:t>
             </a:r>
           </a:p>
         </p:txBody>
@@ -3987,76 +4013,77 @@
           <a:lstStyle/>
           <a:p>
             <a:r>
-              <a:t>Сцена четвёртого кейса, и это единственный кейс, где мы ничего не будем достраивать: здесь мы разберём, почему уже собранное работает не так, как выглядит.</a:t>
+              <a:t>Смотрим на конкретную заявку, потому что «модель ошибается» — слишком общие слова, чтобы с ними что-то делать.</a:t>
             </a:r>
           </a:p>
           <a:p/>
           <a:p>
             <a:r>
-              <a:t>И здесь у истории есть лицо, та же администратор. Она говорит: тема определяется слишком общо — «курс» стоит там, где речь про конкретную программу, и заявки уходят не тому человеку.</a:t>
+              <a:t>Вот текст: «Подскажите, сколько стоит обучение для группы из восьми человек, и можно ли выставить счёт на ООО?»</a:t>
             </a:r>
           </a:p>
           <a:p/>
           <a:p>
             <a:r>
-              <a:t>Вы поправили формулировку запроса в узле извлечения. В карточке стоит новый текст, никто его не откатывал.</a:t>
+              <a:t>Процесс записал тему «курс», срочность «не указано». Посмотрите на это как инженер: придраться не к чему. Значение из справочника — мы это гарантировали узлом сверки. Клетка не пустая — гарантировали. Прогон зелёный, в журнале чисто — про это был весь третий кейс.</a:t>
             </a:r>
           </a:p>
           <a:p/>
           <a:p>
             <a:r>
-              <a:t>Проверили ручным запуском на трёх её заявках, при ней. Все три разобраны правильно, именно так, как она просила. Закрыли и пошли дальше — и, обратите внимание, сделали всё, что обычно считается достаточным, и даже показали человеку результат.</a:t>
+              <a:t>А человеку нужен счёт. Слово «обучение» стоит в первом предложении, и модель зацепилась за него; дело — во втором. Это «оплата», и заявка должна была уйти в бухгалтерию.</a:t>
             </a:r>
           </a:p>
           <a:p/>
           <a:p>
             <a:r>
-              <a:t>На следующий день она открывает таблицу за сутки. Все заявки разобраны по-старому. Ни одной по новой формулировке — и она приходит с этим к вам.</a:t>
+              <a:t>Что происходит дальше, вы уже знаете из первого кейса. Заявка попала в список к тому, кто обзванивает интересующихся курсами. Он звонит, выясняет, что речь про счёт, передаёт в бухгалтерию. Лишняя передача — день. День просрочки снижает вероятность, что человек купит.</a:t>
             </a:r>
           </a:p>
           <a:p/>
           <a:p>
             <a:r>
-              <a:t>Вы открываете холст: правка на месте. Запускаете руками: снова правильно. И объяснить ей это нечем.</a:t>
+              <a:t>Теперь главное, ради чего этот кейс стоит после трёх предыдущих. Все три сторожа, которые мы построили, </a:t>
+            </a:r>
+            <a:r>
+              <a:rPr b="1"/>
+              <a:t>молчат — и все три правы</a:t>
+            </a:r>
+            <a:r>
+              <a:t>. Пустых клеток нет. Посторонних значений нет. Отказов нет. Мы всё занятие учились проверять </a:t>
+            </a:r>
+            <a:r>
+              <a:rPr b="1"/>
+              <a:t>форму</a:t>
+            </a:r>
+            <a:r>
+              <a:t> ответа и ни разу не проверили его </a:t>
+            </a:r>
+            <a:r>
+              <a:rPr b="1"/>
+              <a:t>смысл</a:t>
+            </a:r>
+            <a:r>
+              <a:t>.</a:t>
             </a:r>
           </a:p>
           <a:p/>
           <a:p>
             <a:r>
-              <a:t>Вот эти два утверждения и держат кейс: </a:t>
+              <a:t>И есть вещь похуже самой ошибки. Ольга её заметила — глазами, случайно, потому что она помнит эту заявку. Записать её некуда: в таблице нет столбца, куда можно поставить отметку «тема неверная». Значит, завтра эта ошибка не существует ни для кого. Мы не знаем, случается она раз в день или двадцать раз в день. А без этого </a:t>
             </a:r>
             <a:r>
               <a:rPr b="1"/>
-              <a:t>правка есть и работает</a:t>
-            </a:r>
-            <a:r>
-              <a:t> — и </a:t>
-            </a:r>
-            <a:r>
-              <a:rPr b="1"/>
-              <a:t>в бою её нет</a:t>
-            </a:r>
-            <a:r>
-              <a:t>. Оба верны одновременно, и это не чья-то забывчивость и не чья-то ошибка.</a:t>
+              <a:t>любое улучшение, которое мы сейчас придумаем, будет верой, а не инженерией</a:t>
+            </a:r>
+            <a:r>
+              <a:t>: мы не сможем сказать, стало лучше или хуже.</a:t>
             </a:r>
           </a:p>
           <a:p/>
           <a:p>
             <a:r>
-              <a:t>И самое неприятное в этой сцене: проверка руками показывала правильный результат всё это время, и показывала </a:t>
-            </a:r>
-            <a:r>
-              <a:rPr b="1"/>
-              <a:t>честно</a:t>
-            </a:r>
-            <a:r>
-              <a:t>. Она не врала. Она просто проверяла не то, что работало в бою.</a:t>
-            </a:r>
-          </a:p>
-          <a:p/>
-          <a:p>
-            <a:r>
-              <a:t>Я ставлю этот кейс последним намеренно. На первых трёх мы собирали, и всё, что собирали, проверяли ручным запуском — тем самым способом, который здесь оказывается недостаточным. Скажи я про это в начале, вы бы запомнили правило. А сейчас вы сначала увидели цену его незнания.</a:t>
+              <a:t>Вопрос.</a:t>
             </a:r>
           </a:p>
         </p:txBody>
@@ -4126,25 +4153,51 @@
           <a:lstStyle/>
           <a:p>
             <a:r>
-              <a:t>Вопрос четвёртый, и голосуем так же: один вариант, довод.</a:t>
+              <a:t>Вопрос четвёртый, и он единственный за занятие, который про </a:t>
+            </a:r>
+            <a:r>
+              <a:rPr b="1"/>
+              <a:t>смысл</a:t>
+            </a:r>
+            <a:r>
+              <a:t>, а не про устройство.</a:t>
             </a:r>
           </a:p>
           <a:p/>
           <a:p>
             <a:r>
-              <a:t>Правку не сохранили — забыли нажать кнопку, бывает. Сохранили, но не опубликовали — есть какой-то отдельный шаг, который не сделали. Кэш — где-то лежит старая версия, само пройдёт. Ручной запуск и боевой — разные пути, и правка попала только в один из них.</a:t>
+              <a:t>Как сделать, чтобы тема определялась верно чаще?</a:t>
             </a:r>
           </a:p>
           <a:p/>
           <a:p>
             <a:r>
-              <a:t>Выбирайте и формулируйте довод. В разборе будет неожиданное — про то, сколько здесь правильных ответов.</a:t>
+              <a:t>Четыре карточки. Усилить запрос — то есть переписать то, что мы говорим модели о категориях. Вторая модель проверяет первую. Алгоритмические правила поверх ответа модели. И четвёртая — взять модель помощнее.</a:t>
             </a:r>
           </a:p>
           <a:p/>
           <a:p>
             <a:r>
-              <a:t>И тот, кто выберет первую, пусть скажет: а вы вообще видели в этом инструменте кнопку «Сохранить»? Вспомните последний час. Мы тут собрали три процесса, и ни один из нас ни разу ничего не сохранял.</a:t>
+              <a:t>Как и раньше: правильных ответов здесь больше одного, все четыре живут в настоящих системах, и они не исключают друг друга — в зрелых системах обычно стоят два или три сразу. Разбирать будем, что каждый даёт, сколько стоит и когда окупается.</a:t>
+            </a:r>
+          </a:p>
+          <a:p/>
+          <a:p>
+            <a:r>
+              <a:t>Пятнадцать секунд, потом по рукам.</a:t>
+            </a:r>
+          </a:p>
+          <a:p/>
+          <a:p>
+            <a:r>
+              <a:t>И пока выбирают, держите в голове то, чем кончился прошлый экран: </a:t>
+            </a:r>
+            <a:r>
+              <a:rPr b="1"/>
+              <a:t>мы пока не умеем измерить, стало ли лучше.</a:t>
+            </a:r>
+            <a:r>
+              <a:t> К этому вернёмся в решении.</a:t>
             </a:r>
           </a:p>
         </p:txBody>
@@ -4214,46 +4267,73 @@
           <a:lstStyle/>
           <a:p>
             <a:r>
-              <a:t>Этот кейс отличается от трёх предыдущих: в нём ничего не надо собирать, и предмет его — не узел, а состояние сценария.</a:t>
+              <a:t>Разбираем. Как и прежде, ни один из четырёх не глуп, и они не исключают друг друга.</a:t>
             </a:r>
           </a:p>
           <a:p/>
           <a:p>
             <a:r>
-              <a:t>Смотрите в правый верхний угол редактора. Там написано </a:t>
-            </a:r>
-            <a:r>
-              <a:rPr>
-                <a:latin typeface="Consolas"/>
-              </a:rPr>
-              <a:t>Published</a:t>
-            </a:r>
-            <a:r>
-              <a:t>. Всё это занятие оно там и было, и, подозреваю, никто из вас на него не смотрел — я тоже не смотрю, когда работаю.</a:t>
+              <a:t>Усилить запрос. Это значит переписать то, что мы говорим модели: не просто перечислить четыре темы, а объяснить словами, чем они отличаются, и дать примеры настоящих заявок с правильными ответами. Прирост измеряли: на задаче разбора обращений с четырьмя категориями без примеров выходило ноль тридцать пять, с двенадцатью примерами — ноль сорок один, лучшая сборка дала ноль сорок восемь. Это пять-двенадцать пунктов. Цена — час вашей работы один раз.</a:t>
             </a:r>
           </a:p>
           <a:p/>
           <a:p>
             <a:r>
-              <a:t>Что оно означает. У сценария есть две версии одновременно. Та, что открыта у вас в редакторе, — черновик: он сохраняется сам, постоянно, кнопки «Сохранить» в этом инструменте нет вовсе. И опубликованная — та, по которой идут боевые прогоны.</a:t>
+              <a:t>Вторая модель проверяет первую. В замеренном варианте разбирали одну заявку четырьмя разными запросами и брали то, что чаще совпало: ноль пятьдесят семь превратилось в ноль шестьдесят один. Прирост скромнее, чем от примеров, а цена выше: каждый прогон вдвое дороже и вдвое дольше, и надо решить, что делать, когда две модели не согласны. Этот способ хорош не ради среднего прироста, а против </a:t>
+            </a:r>
+            <a:r>
+              <a:rPr b="1"/>
+              <a:t>разовых срывов</a:t>
+            </a:r>
+            <a:r>
+              <a:t>: когда модель один раз из ста отвечает ерундой, вторая это ловит.</a:t>
             </a:r>
           </a:p>
           <a:p/>
           <a:p>
             <a:r>
-              <a:t>Рядом со значком есть стрелка вниз. Под ней и живёт действие, которым правка уходит в бой. Одно действие, которое надо не забыть сделать.</a:t>
+              <a:t>Алгоритмические правила поверх. Не вместо модели, а после неё: есть в тексте слово «счёт» или «ООО» — тема «оплата», что бы ни сказала модель. Замерено как добавка к обученной модели: плюс два-три пункта, предсказуемо и дёшево. Наш случай, кстати, ровно такой — заявка про счёт. Ограничение известно из первого кейса: правил становится много, они начинают противоречить друг другу, а живой язык всё равно шире любого их набора.</a:t>
             </a:r>
           </a:p>
           <a:p/>
           <a:p>
             <a:r>
-              <a:t>Вот и весь ответ на вопрос, с которого кейс начался: правка на холсте есть, в бою её нет, и оба утверждения верны. Между ними — этот значок и эта стрелка.</a:t>
+              <a:t>Модель помощнее. Обычно действительно лучше, особенно на длинном и запутанном тексте. Но платите вы за неё </a:t>
+            </a:r>
+            <a:r>
+              <a:rPr b="1"/>
+              <a:t>на каждом прогоне и навсегда</a:t>
+            </a:r>
+            <a:r>
+              <a:t>, а на коротких заявках вроде наших разница часто в пределах шума. Это не запрет — это предупреждение, что здесь легко купить спокойствие вместо качества.</a:t>
             </a:r>
           </a:p>
           <a:p/>
           <a:p>
             <a:r>
-              <a:t>Дальше разберём, что из четырёх карточек это объясняет, а что нет.</a:t>
+              <a:t>Если спросят про пятый способ — дообучить свою модель на своих данных. Он сильный: в сравнениях дообученная небольшая модель обгоняла большую без примеров во всех проверенных случаях. Но ему нужна размеченная история: тысячи заявок с правильными темами. У центра её нет — и вот тут всё сходится с тем, что мы сейчас сделаем.</a:t>
+            </a:r>
+          </a:p>
+          <a:p/>
+          <a:p>
+            <a:r>
+              <a:t>Теперь поворот. Первые три способа стоят один раз, четвёртый — каждый день. Отсюда порядок, в котором их почти всегда применяют: сначала запрос, потом правила на узкие случаи, потом вторая модель там, где цена ошибки высока, и только потом более дорогая модель.</a:t>
+            </a:r>
+          </a:p>
+          <a:p/>
+          <a:p>
+            <a:r>
+              <a:t>И последнее, без чего всё это бессмысленно. Ни один из четырёх способов вы не сможете оценить, пока ошибки нигде не отмечаются. Вы поменяете запрос, посмотрите на три заявки, вам покажется, что стало лучше, — и это будет вера, а не измерение. Поэтому в решении будет две части, и вторая важнее первой.</a:t>
+            </a:r>
+          </a:p>
+          <a:p/>
+          <a:p>
+            <a:r>
+              <a:rPr b="1"/>
+              <a:t>Источники:</a:t>
+            </a:r>
+            <a:r>
+              <a:t> примеры в запросе 0,351 → 0,406 → 0,475 — arXiv:2605.15680, macro-F1, четыре класса. Голосование четырьмя запросами 0,57 → 0,61 — CEUR Vol-3551 paper 4, настоящий поток. Правила как добавка +2-3 п.п. — arXiv:1808.02636. Дообученная модель против модели без примеров — arXiv:2406.08660.</a:t>
             </a:r>
           </a:p>
         </p:txBody>
@@ -4323,50 +4403,84 @@
           <a:lstStyle/>
           <a:p>
             <a:r>
-              <a:t>И сразу то, что я придержал: </a:t>
+              <a:t>Решение из двух частей, и вторая важнее первой — хотя выглядит мельче.</a:t>
+            </a:r>
+          </a:p>
+          <a:p/>
+          <a:p>
+            <a:r>
+              <a:t>Первая часть: усиливаем запрос. Обратите внимание на рисунок — это тот же узел извлечения, который мы настраивали в первом кейсе. Новых узлов не появляется, меняется текст внутри поля, которое вы уже видели. Дописываем туда три вещи.</a:t>
+            </a:r>
+          </a:p>
+          <a:p/>
+          <a:p>
+            <a:r>
+              <a:t>Описания категорий словами. Было просто «о чём заявка». Становится: «оплата — человек спрашивает про счёт, реквизиты, безналичный расчёт или возврат денег, даже если в той же фразе упомянут курс». Вот эта оговорка — «даже если упомянут курс» — и чинит нашу заявку. Заметьте, что я не угадал её: она взята из разобранной ошибки.</a:t>
+            </a:r>
+          </a:p>
+          <a:p/>
+          <a:p>
+            <a:r>
+              <a:t>Примеры заявок прямо в запросе. Три-пять настоящих коротких заявок с правильным ответом. И здесь есть тонкость, которая решает всё: примеры должны быть </a:t>
             </a:r>
             <a:r>
               <a:rPr b="1"/>
-              <a:t>правильных карточек здесь две</a:t>
-            </a:r>
-            <a:r>
-              <a:t> — не потому, что я схитрил с формулировками, а потому что две из четырёх описывают одно явление с разных сторон. Сначала механика, в ней три утверждения, и из неё обе станут видны.</a:t>
+              <a:t>трудные</a:t>
+            </a:r>
+            <a:r>
+              <a:t>, а не очевидные. Пример «хочу на курс по аналитике — тема курс» не добавляет ничего: это модель и так знает. Пример «сколько стоит обучение и можно ли счёт на ООО — тема оплата» стоит десятка очевидных.</a:t>
             </a:r>
           </a:p>
           <a:p/>
           <a:p>
             <a:r>
-              <a:t>Первое: правки сохраняются сами и постоянно, в черновик. Кнопки «Сохранить» в этом инструменте нет вовсе — вы её не искали, потому что она не нужна.</a:t>
+              <a:t>Правило воздержания. Дописываем: если подходит больше одной темы и ни одна не очевидна — ставь «не определено». Это законный отказ из второго кейса, только включается он теперь не по пустоте, а по неуверенности. Цена честная: таких заявок станет больше, и их будет разбирать человек. Зато уверенно неверных станет меньше, а это, как мы выяснили, самая дорогая ошибка.</a:t>
             </a:r>
           </a:p>
           <a:p/>
           <a:p>
             <a:r>
-              <a:t>Второе: в боевой режим правка уходит отдельным действием, которое называется Publish.</a:t>
+              <a:t>Теперь вторая часть, и ради неё стоило разбирать весь кейс. </a:t>
+            </a:r>
+            <a:r>
+              <a:rPr b="1"/>
+              <a:t>Добавляем в таблицу столбец `topic_wrong`</a:t>
+            </a:r>
+            <a:r>
+              <a:t> — один флажок. Ольга, увидев неверную тему, ставит галочку. Всё.</a:t>
             </a:r>
           </a:p>
           <a:p/>
           <a:p>
             <a:r>
-              <a:t>Третье, и оно главное: боевые прогоны исполняют опубликованную версию, а не ту, что открыта у вас в редакторе. Это две разные версии сценария, обе существуют одновременно, и обе живые.</a:t>
+              <a:t>Что это даёт. Первое: с завтрашнего дня у вас есть </a:t>
+            </a:r>
+            <a:r>
+              <a:rPr b="1"/>
+              <a:t>число</a:t>
+            </a:r>
+            <a:r>
+              <a:t> — доля ошибок за неделю. Не ощущение «вроде часто», а доля. Второе: любое следующее улучшение становится проверяемым — поменяли запрос, посмотрели долю через неделю, сравнили. Третье, и самое ценное в долгую: через месяц у вас накопится список заявок, которые разобраны неверно, с правильным ответом от человека. Это и есть </a:t>
+            </a:r>
+            <a:r>
+              <a:rPr b="1"/>
+              <a:t>та самая размеченная история</a:t>
+            </a:r>
+            <a:r>
+              <a:t>, которой у центра не было, — и именно её не хватало и обученной модели, и хорошим примерам в запросе. Она появляется сама, из работы, если один раз завести столбец.</a:t>
             </a:r>
           </a:p>
           <a:p/>
           <a:p>
             <a:r>
-              <a:t>Теперь понятно, почему верны вторая и четвёртая карточки и почему это одно и то же. Вторая говорит, чего не сделали: не опубликовали. Четвёртая говорит, как это устроено: ручной запуск идёт по черновику, боевой — по опубликованному. Одно явление, два описания.</a:t>
-            </a:r>
-          </a:p>
-          <a:p/>
-          <a:p>
-            <a:r>
-              <a:t>Первая неверна: сохранять нечего. Третья неверна, и это полезная неверность — ждать можно сутки, ничего не изменится, потому что никакого кэша здесь нет. Есть две версии, и одна из них старая по вашему же решению.</a:t>
-            </a:r>
-          </a:p>
-          <a:p/>
-          <a:p>
-            <a:r>
-              <a:t>Отдельно про слово. Раньше в этом инструменте была кнопка «Активировать», и многие курсы и статьи до сих пор говорят «активируй сценарий». В версии 2 этого слова в интерфейсе нет: его место занял Publish, и значит он другое. Активация включала сценарий; публикация выкладывает версию. Если найдёте инструкцию со словом «активировать» — она про старую версию, и дальше в ней могут быть расхождения серьёзнее одного слова.</a:t>
+              <a:t>И обратная сторона, про которую надо сказать честно, потому что она такая же, как у очереди «не определено» из второго кейса: </a:t>
+            </a:r>
+            <a:r>
+              <a:rPr b="1"/>
+              <a:t>столбец, в который никто не ставит галочки, бесполезен ровно так же, как его отсутствие.</a:t>
+            </a:r>
+            <a:r>
+              <a:t> Отметка должна стоить человеку один клик и быть на том же экране, где он и так работает. Если ради неё надо открыть другую систему — её не будет.</a:t>
             </a:r>
           </a:p>
         </p:txBody>
@@ -4436,56 +4550,130 @@
           <a:lstStyle/>
           <a:p>
             <a:r>
-              <a:t>Критерий четвёртого кейса — про то, что проверять настоящим событием, а что хватит проверить руками. Это разделение экономит часы, и его почти никто не делает сознательно.</a:t>
+              <a:t>Критерий, прямой формой: когда хватит усиления запроса, а когда нужно что-то сверх него.</a:t>
             </a:r>
           </a:p>
           <a:p/>
           <a:p>
             <a:r>
-              <a:t>Настоящим событием проверяют обработчик ошибок. Его триггер срабатывает только на автоматическом прогоне: нажмёте «выполнить» — не произойдёт ничего, вообще ничего, и это правильное поведение. На следующем занятии мы это соберём, и я говорю заранее, чтобы там не разбираться полчаса.</a:t>
+              <a:t>Хватит запроса, если ошибки </a:t>
+            </a:r>
+            <a:r>
+              <a:rPr b="1"/>
+              <a:t>разные и каждая объяснима словами</a:t>
+            </a:r>
+            <a:r>
+              <a:t>. Наш случай ровно такой: модель не знала, что вопрос про счёт — это оплата, даже когда рядом стоит слово «обучение». Это чинится одной фразой в описании категории.</a:t>
             </a:r>
           </a:p>
           <a:p/>
           <a:p>
             <a:r>
-              <a:t>Так же — расписание. Сработает ли в нужный момент, и, что важнее, что будет, если прогон не успел закончиться до следующего запуска. Руками этого не увидеть.</a:t>
+              <a:t>Хватит, если вы </a:t>
+            </a:r>
+            <a:r>
+              <a:rPr b="1"/>
+              <a:t>можете назвать правильный ответ</a:t>
+            </a:r>
+            <a:r>
+              <a:t> для каждой разобранной ошибки. Это звучит очевидно, но часто оказывается неправдой: половина «ошибок модели» на разборе оказывается заявками, про которые два человека в команде спорят, какая там тема. Такое запросом не чинится — сначала договоритесь сами.</a:t>
             </a:r>
           </a:p>
           <a:p/>
           <a:p>
             <a:r>
-              <a:t>Так же — реакция на вызов чужой системы: тот ли адрес, та ли авторизация, тот ли формат. И поведение на объёме: тут неожиданно наоборот, ручной прогон </a:t>
+              <a:t>Хватит, если заявки </a:t>
             </a:r>
             <a:r>
               <a:rPr b="1"/>
-              <a:t>тяжелее</a:t>
-            </a:r>
-            <a:r>
-              <a:t> боевого, потому что инструмент копирует все промежуточные данные, чтобы показать их вам. На больших объёмах ручной падает там, где боевой проходит. То есть «проверил руками — упало» тоже не всегда правда о бое.</a:t>
+              <a:t>короткие и однородные</a:t>
+            </a:r>
+            <a:r>
+              <a:t>. На них разница между моделями обычно в пределах шума, и платить за более сильную незачем.</a:t>
             </a:r>
           </a:p>
           <a:p/>
           <a:p>
             <a:r>
-              <a:t>Руками хватает проверять логику шагов на обычных данных, форму и её поля, выражения и преобразования — всё, что видно прямо в данных узла.</a:t>
+              <a:t>И хватит, если у вас </a:t>
+            </a:r>
+            <a:r>
+              <a:rPr b="1"/>
+              <a:t>нет размеченной истории</a:t>
+            </a:r>
+            <a:r>
+              <a:t>: запрос — единственный способ, который работает без неё.</a:t>
             </a:r>
           </a:p>
           <a:p/>
           <a:p>
             <a:r>
-              <a:t>Предел этого кейса — единственный пункт занятия про безопасность, и он нужен вам прямо сегодня, потому что файл вы унесёте. Вместе с файлом сценария уезжает больше, чем кажется. Секретов в нём нет: пароли и ключи инструмент хранит отдельно, в файл они не попадают. А вот идентификаторы и имена подключений, адреса, пути, имена таблиц и внутренних сервисов — попадают. Я это обнаружил на нашем же файле: студенческий пришлось собирать отдельно, со снятыми привязками, иначе он утащил бы ссылки на мой стенд.</a:t>
+              <a:t>Теперь обратная сторона. Нужно что-то сверх запроса, если </a:t>
+            </a:r>
+            <a:r>
+              <a:rPr b="1"/>
+              <a:t>одна и та же ошибка повторяется дословно</a:t>
+            </a:r>
+            <a:r>
+              <a:t>. Тут дешевле поставить правило, чем уговаривать модель: есть слово «счёт» — тема «оплата», и закрыли вопрос.</a:t>
             </a:r>
           </a:p>
           <a:p/>
           <a:p>
             <a:r>
-              <a:t>Правило простое, и выполняйте его механически, без размышлений: прежде чем отдать файл сценария кому-то — откройте его и прочитайте глазами. Тридцать секунд. Паролей там нет, а лишнее бывает, и чаще всего это лишнее про вашу инфраструктуру.</a:t>
+              <a:t>Нужно, если </a:t>
+            </a:r>
+            <a:r>
+              <a:rPr b="1"/>
+              <a:t>цена одной ошибки высока</a:t>
+            </a:r>
+            <a:r>
+              <a:t>: деньги, здоровье, юридические последствия. Там вторая проверка окупается, даже если средний прирост у неё скромный, — потому что вы покупаете не средний прирост, а защиту от разового срыва.</a:t>
             </a:r>
           </a:p>
           <a:p/>
           <a:p>
             <a:r>
-              <a:t>Четвёртая строка оси. Правка на холсте есть, никто её не откатывал — выглядит успехом, и выглядит настолько убедительно, что проверять не хочется. Чем оказалось: сутки работы по старой версии.</a:t>
+              <a:t>Нужно, если </a:t>
+            </a:r>
+            <a:r>
+              <a:rPr b="1"/>
+              <a:t>текст длинный и запутанный</a:t>
+            </a:r>
+            <a:r>
+              <a:t> — тогда более сильная модель действительно даёт заметную разницу.</a:t>
+            </a:r>
+          </a:p>
+          <a:p/>
+          <a:p>
+            <a:r>
+              <a:t>И нужно, если </a:t>
+            </a:r>
+            <a:r>
+              <a:rPr b="1"/>
+              <a:t>история накопилась</a:t>
+            </a:r>
+            <a:r>
+              <a:t>: тысячи заявок с правильными ответами делают дообучение осмысленным. Заметьте, что эта строка появляется у вас сама, если сегодня завести столбец отметки.</a:t>
+            </a:r>
+          </a:p>
+          <a:p/>
+          <a:p>
+            <a:r>
+              <a:t>Предел, за которым всё это перестаёт быть инженерией: </a:t>
+            </a:r>
+            <a:r>
+              <a:rPr b="1"/>
+              <a:t>улучшение без замера</a:t>
+            </a:r>
+            <a:r>
+              <a:t>. Пока ошибки нигде не отмечаются, любой из четырёх способов даёт вам ощущение, а не результат. Поэтому порядок именно такой: сначала столбец отметки, потом улучшения. Иначе вы будете честно работать и не сможете сказать, помогло ли.</a:t>
+            </a:r>
+          </a:p>
+          <a:p/>
+          <a:p>
+            <a:r>
+              <a:t>Закрываем четвёртую строку. Что выглядело успехом: значение из справочника, прогон зелёный, в журнале чисто. Чем оказалось: тема неверная — и узнать об этом неоткуда, потому что все три сторожа, которые мы построили, проверяют форму ответа, а не его смысл. Четвёртый сторож — человек, и ему нужен один столбец.</a:t>
             </a:r>
           </a:p>
         </p:txBody>
@@ -4680,49 +4868,84 @@
           <a:lstStyle/>
           <a:p>
             <a:r>
-              <a:t>Возвращаемся к таблице, с которой начинали. Правая колонка больше не пустая, и заполняли её не мои слова, а экран.</a:t>
+              <a:t>Последнее устройство за сегодня, и оно занимает один экран, хотя стоит целого вечера отладки у того, кто про него не знает.</a:t>
             </a:r>
           </a:p>
           <a:p/>
           <a:p>
             <a:r>
-              <a:t>Три узла — заявка доезжает до таблицы. Чем оказалось: тема будет какой угодно, срочности не будет вовсе. Мы это видели в первом кейсе до того, как поставили справочник.</a:t>
+              <a:t>Правки на холсте сохраняются </a:t>
+            </a:r>
+            <a:r>
+              <a:rPr b="1"/>
+              <a:t>сами</a:t>
+            </a:r>
+            <a:r>
+              <a:t>, постоянно, в черновик. Кнопки «Сохранить» в интерфейсе нет вовсе. Это удобно и это же создаёт ровно ту уверенность, из-за которой люди потом теряют сутки: раз сохранять не надо, значит, всё уже работает.</a:t>
             </a:r>
           </a:p>
           <a:p/>
           <a:p>
             <a:r>
-              <a:t>Клетка заполнена, значение законное. Чем оказалось: вторая тема заявки исчезла молча. Мы отправили заявку про перенос и оплату и увидели на экране одну тему.</a:t>
+              <a:t>Не работает. В бой правка уходит </a:t>
+            </a:r>
+            <a:r>
+              <a:rPr b="1"/>
+              <a:t>отдельным действием</a:t>
+            </a:r>
+            <a:r>
+              <a:t> — Publish, вот этот значок на полосе сверху. До него боевые прогоны исполняют предыдущую опубликованную версию.</a:t>
             </a:r>
           </a:p>
           <a:p/>
           <a:p>
             <a:r>
-              <a:t>Прогон зелёный, ни одной ошибки в журнале. Чем оказалось: три отказа подряд и заявки за выходные неразобранные. Я при вас испортил ключ и мы вместе смотрели, как статус прогона остался успешным.</a:t>
+              <a:t>А теперь то, что делает эту ошибку по-настоящему коварной. </a:t>
+            </a:r>
+            <a:r>
+              <a:rPr b="1"/>
+              <a:t>Ручной запуск идёт по черновику. Боевые прогоны — по опубликованной версии.</a:t>
+            </a:r>
+            <a:r>
+              <a:t> То есть вы правите, запускаете руками, видите правильный результат, показываете его заказчику — и всё это честно. Просто проверяли вы не то, что работает в бою. Расхождение может жить сутками: на холсте правка есть, никто её не откатывал, а в таблице все заявки разобраны по-старому.</a:t>
             </a:r>
           </a:p>
           <a:p/>
           <a:p>
             <a:r>
-              <a:t>Правка на холсте есть, никто её не откатывал. Чем оказалось: сутки работы по старой версии, потому что опубликовать — отдельное действие.</a:t>
+              <a:t>Кстати, слова «активировать» в этой версии больше нет — его место занял Publish, и значит он другое. Если вы читали инструкцию годичной давности, перечитайте этот кусок.</a:t>
             </a:r>
           </a:p>
           <a:p/>
           <a:p>
             <a:r>
-              <a:t>Теперь главное, ради чего мы заполняли эту таблицу. Разница между «работает» и «можно ручаться» — это и есть четыре строки справа, и каждая из них проверяется руками за несколько минут. Если вы вернётесь к любому своему процессу и пройдёте по ним — занятие удалось, даже если вы забудете, как называется каждый узел.</a:t>
+              <a:t>Отсюда правило про проверку. Руками проверяется логика шагов: что пришло, что вернулось, что записалось, правильно ли посчиталось выражение. Этого достаточно, чтобы отладить процесс, и недостаточно, чтобы выпустить его в бой.</a:t>
             </a:r>
           </a:p>
           <a:p/>
           <a:p>
             <a:r>
-              <a:t>Проверить это можно четырьмя способами, которые вы теперь знаете, и ни один не требует верить мне на слово. Первый: посмотрите, может ли результат шага оказаться значением вне списка. Второй: посмотрите, что происходит с тем, что в список не влезло. Третий: посмотрите, чем отличается «прогон завершился» от «результат годен», и что у вас проверяет второе. Четвёртый: посмотрите, что сейчас работает в бою и совпадает ли это с тем, что открыто у вас в редакторе.</a:t>
+              <a:t>Настоящим событием проверяется четыре вещи. Обработчик ошибок — его триггер при ручном запуске не срабатывает </a:t>
+            </a:r>
+            <a:r>
+              <a:rPr b="1"/>
+              <a:t>вовсе</a:t>
+            </a:r>
+            <a:r>
+              <a:t>, то есть вы не проверите его никак, кроме как уронив настоящий прогон. Расписание — сработает ли в нужный момент и что будет, если прогон не успел до следующего. Обращение к чужой системе — тот ли адрес, та ли авторизация, тот ли формат. И поведение на объёме: ручной прогон копирует данные для показа и на больших объёмах падает там, где боевой спокойно проходит.</a:t>
             </a:r>
           </a:p>
           <a:p/>
           <a:p>
             <a:r>
-              <a:t>Если вы зададите эти четыре вопроса своему процессу на этой неделе — занятие удалось, даже если имена блоков вы забудете к пятнице.</a:t>
+              <a:t>И последнее — про передачу, потому что файл процесса вы сегодня унесёте. Секретов в нём нет: ключи и доступы инструмент хранит отдельно, мы это видели на экране учётных данных. А вот имена подключений, адреса, пути, названия таблиц и внутренних сервисов в нём есть. Правило, которое стоит выполнять механически, не раздумывая: </a:t>
+            </a:r>
+            <a:r>
+              <a:rPr b="1"/>
+              <a:t>прежде чем отдать файл сценария кому бы то ни было — откройте его и прочитайте глазами.</a:t>
+            </a:r>
+            <a:r>
+              <a:t> Тридцать секунд.</a:t>
             </a:r>
           </a:p>
         </p:txBody>
@@ -4792,43 +5015,49 @@
           <a:lstStyle/>
           <a:p>
             <a:r>
-              <a:t>Соберём, что получилось за полтора часа.</a:t>
+              <a:t>Возвращаемся к таблице, с которой начинали. Правая колонка больше не пустая, и заполняли её не мои слова, а экран.</a:t>
             </a:r>
           </a:p>
           <a:p/>
           <a:p>
             <a:r>
-              <a:t>Форма принимает заявку и сама объясняет человеку, что с его текстом произойдёт. Узел извлечения достаёт тему, срочность, контакт из текста и пометку о других темах — всё по схеме с перечислением. Справочник сверяет и не оставляет ни пустых клеток, ни значений вне списка. Строка уходит в таблицу. Экран результата печатает всю дорогу в том же окне. А на узле извлечения стоят повтор и вторая ветка, так что отказ вызова тоже доезжает — с пометкой, а не в тишину.</a:t>
+              <a:t>Три узла — заявка доезжает до таблицы. Чем оказалось: тема будет какой угодно, срочности не будет вовсе. Мы это видели в первом кейсе до того, как поставили справочник.</a:t>
             </a:r>
           </a:p>
           <a:p/>
           <a:p>
             <a:r>
-              <a:t>Это не учебная заготовка. Такой процесс можно поставить в небольшом центре, и он будет приносить пользу, пока поток не вырастет. За каждую строку в этой таблице можно отвечать — ровно это мы и обсуждали в первом кейсе.</a:t>
+              <a:t>Клетка заполнена, значение законное. Чем оказалось: вторая тема заявки исчезла молча. Мы отправили заявку про перенос и оплату и увидели на экране одну тему.</a:t>
             </a:r>
           </a:p>
           <a:p/>
           <a:p>
             <a:r>
-              <a:t>Файл называется так, как на экране. Ставится одним импортом через меню сценария. Что нужно с вашей стороны: свой n8n и ключ провайдера модели. Инструкция по подъёму идёт вместе с файлом, там оба способа — с контейнером и без.</a:t>
+              <a:t>Прогон зелёный, ни одной ошибки в журнале. Чем оказалось: три отказа подряд и заявки за выходные неразобранные. Я при вас испортил ключ и мы вместе смотрели, как статус прогона остался успешным.</a:t>
             </a:r>
           </a:p>
           <a:p/>
           <a:p>
             <a:r>
-              <a:t>Два узла в файле придётся настроить самим, и это сделано намеренно: в узле модели пустые учётные данные, в узле таблицы — пустой выбор таблицы. Мой стенд вам недоступен, и чужой идентификатор в этих полях выглядел бы сломанным узлом — десять минут недоумения на ровном месте.</a:t>
+              <a:t>Значение из справочника, прогон зелёный, в журнале чисто. Чем оказалось: тема неверная — и узнать об этом неоткуда. Это самая неприятная строка из четырёх, потому что первые три сторожа мы построили сами и они работают, а ловят они форму ответа, а не его смысл. Смысл ловит человек, и ему для этого нужен один столбец в таблице.</a:t>
             </a:r>
           </a:p>
           <a:p/>
           <a:p>
             <a:r>
-              <a:t>Задание на дом не письменное, и его никто не проверяет. Просьба такая: поставьте, отправьте три заявки, похожие на вашу настоящую работу, и посмотрите на экран результата. Где развалится первым? Оно развалится, у меня на этот счёт иллюзий нет.</a:t>
+              <a:t>Теперь главное, ради чего мы заполняли эту таблицу. Разница между «работает» и «можно ручаться» — это и есть четыре строки справа, и каждая из них проверяется руками за несколько минут. Если вы вернётесь к любому своему процессу и пройдёте по ним — занятие удалось, даже если вы забудете, как называется каждый узел.</a:t>
             </a:r>
           </a:p>
           <a:p/>
           <a:p>
             <a:r>
-              <a:t>С этого мы и начнём следующее занятие.</a:t>
+              <a:t>Проверить это можно четырьмя способами, которые вы теперь знаете, и ни один не требует верить мне на слово. Первый: посмотрите, может ли результат шага оказаться значением вне списка. Второй: посмотрите, что происходит с тем, что в список не влезло. Третий: посмотрите, чем отличается «прогон завершился» от «результат годен», и что у вас проверяет второе. Четвёртый: посмотрите, что сейчас работает в бою и совпадает ли это с тем, что открыто у вас в редакторе.</a:t>
+            </a:r>
+          </a:p>
+          <a:p/>
+          <a:p>
+            <a:r>
+              <a:t>Если вы зададите эти четыре вопроса своему процессу на этой неделе — занятие удалось, даже если имена блоков вы забудете к пятнице.</a:t>
             </a:r>
           </a:p>
         </p:txBody>
@@ -4898,6 +5127,112 @@
           <a:lstStyle/>
           <a:p>
             <a:r>
+              <a:t>Соберём, что получилось за полтора часа.</a:t>
+            </a:r>
+          </a:p>
+          <a:p/>
+          <a:p>
+            <a:r>
+              <a:t>Форма принимает заявку и сама объясняет человеку, что с его текстом произойдёт. Узел извлечения достаёт тему, срочность, контакт из текста и пометку о других темах — всё по схеме с перечислением. Справочник сверяет и не оставляет ни пустых клеток, ни значений вне списка. Строка уходит в таблицу. Экран результата печатает всю дорогу в том же окне. А на узле извлечения стоят повтор и вторая ветка, так что отказ вызова тоже доезжает — с пометкой, а не в тишину.</a:t>
+            </a:r>
+          </a:p>
+          <a:p/>
+          <a:p>
+            <a:r>
+              <a:t>Это не учебная заготовка. Такой процесс можно поставить в небольшом центре, и он будет приносить пользу, пока поток не вырастет. За каждую строку в этой таблице можно отвечать — ровно это мы и обсуждали в первом кейсе.</a:t>
+            </a:r>
+          </a:p>
+          <a:p/>
+          <a:p>
+            <a:r>
+              <a:t>Файл называется так, как на экране. Ставится одним импортом через меню сценария. Что нужно с вашей стороны: свой n8n и ключ провайдера модели. Инструкция по подъёму идёт вместе с файлом, там оба способа — с контейнером и без.</a:t>
+            </a:r>
+          </a:p>
+          <a:p/>
+          <a:p>
+            <a:r>
+              <a:t>Два узла в файле придётся настроить самим, и это сделано намеренно: в узле модели пустые учётные данные, в узле таблицы — пустой выбор таблицы. Мой стенд вам недоступен, и чужой идентификатор в этих полях выглядел бы сломанным узлом — десять минут недоумения на ровном месте.</a:t>
+            </a:r>
+          </a:p>
+          <a:p/>
+          <a:p>
+            <a:r>
+              <a:t>Задание на дом не письменное, и его никто не проверяет. Просьба такая: поставьте, отправьте три заявки, похожие на вашу настоящую работу, и посмотрите на экран результата. Где развалится первым? Оно развалится, у меня на этот счёт иллюзий нет.</a:t>
+            </a:r>
+          </a:p>
+          <a:p/>
+          <a:p>
+            <a:r>
+              <a:t>С этого мы и начнём следующее занятие.</a:t>
+            </a:r>
+          </a:p>
+        </p:txBody>
+      </p:sp>
+      <p:sp>
+        <p:nvSpPr>
+          <p:cNvPr id="4" name="Slide Number Placeholder 3"/>
+          <p:cNvSpPr>
+            <a:spLocks noGrp="1"/>
+          </p:cNvSpPr>
+          <p:nvPr>
+            <p:ph type="sldNum" idx="5" sz="quarter"/>
+          </p:nvPr>
+        </p:nvSpPr>
+        <p:spPr/>
+      </p:sp>
+    </p:spTree>
+  </p:cSld>
+  <p:clrMapOvr>
+    <a:masterClrMapping/>
+  </p:clrMapOvr>
+</p:notes>
+</file>
+
+<file path=ppt/notesSlides/notesSlide43.xml><?xml version="1.0" encoding="utf-8"?>
+<p:notes xmlns:a="http://schemas.openxmlformats.org/drawingml/2006/main" xmlns:p="http://schemas.openxmlformats.org/presentationml/2006/main" xmlns:r="http://schemas.openxmlformats.org/officeDocument/2006/relationships">
+  <p:cSld>
+    <p:spTree>
+      <p:nvGrpSpPr>
+        <p:cNvPr id="1" name=""/>
+        <p:cNvGrpSpPr/>
+        <p:nvPr/>
+      </p:nvGrpSpPr>
+      <p:grpSpPr>
+        <a:xfrm>
+          <a:off x="0" y="0"/>
+          <a:ext cx="0" cy="0"/>
+          <a:chOff x="0" y="0"/>
+          <a:chExt cx="0" cy="0"/>
+        </a:xfrm>
+      </p:grpSpPr>
+      <p:sp>
+        <p:nvSpPr>
+          <p:cNvPr id="2" name="Slide Image Placeholder 1"/>
+          <p:cNvSpPr>
+            <a:spLocks noGrp="1"/>
+          </p:cNvSpPr>
+          <p:nvPr>
+            <p:ph type="sldImg" idx="2"/>
+          </p:nvPr>
+        </p:nvSpPr>
+        <p:spPr/>
+      </p:sp>
+      <p:sp>
+        <p:nvSpPr>
+          <p:cNvPr id="3" name="Notes Placeholder 2"/>
+          <p:cNvSpPr>
+            <a:spLocks noGrp="1"/>
+          </p:cNvSpPr>
+          <p:nvPr>
+            <p:ph type="body" idx="3" sz="quarter"/>
+          </p:nvPr>
+        </p:nvSpPr>
+        <p:spPr/>
+        <p:txBody>
+          <a:bodyPr/>
+          <a:lstStyle/>
+          <a:p>
+            <a:r>
               <a:t>Чем мы заканчиваем и чего нам не хватает.</a:t>
             </a:r>
           </a:p>
@@ -5310,7 +5645,7 @@
           <a:p/>
           <a:p>
             <a:r>
-              <a:t>Кейс четвёртый: публикация. Чем отличается то, что вы правите на холсте, от того, что работает в бою, и как передать процесс другому человеку.</a:t>
+              <a:t>Кейс четвёртый: тема определена неверно. Значение законное, из справочника, прогон зелёный — а тема не та. Разберём, чем поднимают качество распознавания и почему без одного столбца в таблице ни одно улучшение не проверяется. После него — один экран про публикацию: чем то, что вы правите на холсте, отличается от того, что работает в бою.</a:t>
             </a:r>
           </a:p>
           <a:p/>
@@ -5322,7 +5657,7 @@
           <a:p/>
           <a:p>
             <a:r>
-              <a:t>Третья колонка — то, что вы увидите своими глазами после каждого кейса и совершенно справедливо сочтёте успехом. Заявка доехала до таблицы. Клетка заполнена, и значение в ней законное. Прогон зелёный, ни одной ошибки в журнале. Правка на холсте стоит, никто её не откатывал.</a:t>
+              <a:t>Третья колонка — то, что вы увидите своими глазами после каждого кейса и совершенно справедливо сочтёте успехом. Заявка доехала до таблицы. Клетка заполнена, и значение в ней законное. Прогон зелёный, ни одной ошибки в журнале. Значение из справочника, и прогон зелёный.</a:t>
             </a:r>
           </a:p>
           <a:p/>
@@ -8855,7 +9190,7 @@
         </p:nvSpPr>
         <p:spPr>
           <a:xfrm>
-            <a:off x="502920" y="1978761"/>
+            <a:off x="502920" y="2071878"/>
             <a:ext cx="11183112" cy="822960"/>
           </a:xfrm>
           <a:prstGeom prst="roundRect">
@@ -8903,7 +9238,7 @@
         </p:nvSpPr>
         <p:spPr>
           <a:xfrm>
-            <a:off x="722376" y="2106777"/>
+            <a:off x="722376" y="2199894"/>
             <a:ext cx="10634472" cy="566928"/>
           </a:xfrm>
           <a:prstGeom prst="rect">
@@ -8945,12 +9280,12 @@
         </p:nvSpPr>
         <p:spPr>
           <a:xfrm>
-            <a:off x="502920" y="3469233"/>
-            <a:ext cx="2686050" cy="1305306"/>
+            <a:off x="502920" y="3562350"/>
+            <a:ext cx="2686050" cy="1636775"/>
           </a:xfrm>
           <a:prstGeom prst="roundRect">
             <a:avLst>
-              <a:gd name="adj" fmla="val 23350"/>
+              <a:gd name="adj" fmla="val 18621"/>
             </a:avLst>
           </a:prstGeom>
           <a:solidFill>
@@ -8993,8 +9328,8 @@
         </p:nvSpPr>
         <p:spPr>
           <a:xfrm>
-            <a:off x="612648" y="3469233"/>
-            <a:ext cx="2466594" cy="1305306"/>
+            <a:off x="612648" y="3562350"/>
+            <a:ext cx="2466594" cy="1636775"/>
           </a:xfrm>
           <a:prstGeom prst="rect">
             <a:avLst/>
@@ -9009,14 +9344,14 @@
           <a:p>
             <a:pPr algn="ctr">
               <a:lnSpc>
-                <a:spcPts val="1565"/>
+                <a:spcPts val="1739"/>
               </a:lnSpc>
               <a:spcAft>
                 <a:spcPts val="0"/>
               </a:spcAft>
             </a:pPr>
             <a:r>
-              <a:rPr sz="1350" b="1" i="0">
+              <a:rPr sz="1500" b="1" i="0">
                 <a:solidFill>
                   <a:srgbClr val="141B2E"/>
                 </a:solidFill>
@@ -9035,12 +9370,12 @@
         </p:nvSpPr>
         <p:spPr>
           <a:xfrm>
-            <a:off x="3335274" y="3469233"/>
-            <a:ext cx="2686050" cy="1305306"/>
+            <a:off x="3335274" y="3562350"/>
+            <a:ext cx="2686050" cy="1636775"/>
           </a:xfrm>
           <a:prstGeom prst="roundRect">
             <a:avLst>
-              <a:gd name="adj" fmla="val 23350"/>
+              <a:gd name="adj" fmla="val 18621"/>
             </a:avLst>
           </a:prstGeom>
           <a:solidFill>
@@ -9083,8 +9418,8 @@
         </p:nvSpPr>
         <p:spPr>
           <a:xfrm>
-            <a:off x="3445002" y="3469233"/>
-            <a:ext cx="2466594" cy="1305306"/>
+            <a:off x="3445002" y="3562350"/>
+            <a:ext cx="2466594" cy="1636775"/>
           </a:xfrm>
           <a:prstGeom prst="rect">
             <a:avLst/>
@@ -9099,14 +9434,14 @@
           <a:p>
             <a:pPr algn="ctr">
               <a:lnSpc>
-                <a:spcPts val="1565"/>
+                <a:spcPts val="1739"/>
               </a:lnSpc>
               <a:spcAft>
                 <a:spcPts val="0"/>
               </a:spcAft>
             </a:pPr>
             <a:r>
-              <a:rPr sz="1350" b="1" i="0">
+              <a:rPr sz="1500" b="1" i="0">
                 <a:solidFill>
                   <a:srgbClr val="141B2E"/>
                 </a:solidFill>
@@ -9125,12 +9460,12 @@
         </p:nvSpPr>
         <p:spPr>
           <a:xfrm>
-            <a:off x="6167628" y="3469233"/>
-            <a:ext cx="2686050" cy="1305306"/>
+            <a:off x="6167628" y="3562350"/>
+            <a:ext cx="2686050" cy="1636775"/>
           </a:xfrm>
           <a:prstGeom prst="roundRect">
             <a:avLst>
-              <a:gd name="adj" fmla="val 23350"/>
+              <a:gd name="adj" fmla="val 18621"/>
             </a:avLst>
           </a:prstGeom>
           <a:solidFill>
@@ -9173,8 +9508,8 @@
         </p:nvSpPr>
         <p:spPr>
           <a:xfrm>
-            <a:off x="6277356" y="3469233"/>
-            <a:ext cx="2466594" cy="1305306"/>
+            <a:off x="6277356" y="3562350"/>
+            <a:ext cx="2466594" cy="1636775"/>
           </a:xfrm>
           <a:prstGeom prst="rect">
             <a:avLst/>
@@ -9189,14 +9524,14 @@
           <a:p>
             <a:pPr algn="ctr">
               <a:lnSpc>
-                <a:spcPts val="1565"/>
+                <a:spcPts val="1739"/>
               </a:lnSpc>
               <a:spcAft>
                 <a:spcPts val="0"/>
               </a:spcAft>
             </a:pPr>
             <a:r>
-              <a:rPr sz="1350" b="1" i="0">
+              <a:rPr sz="1500" b="1" i="0">
                 <a:solidFill>
                   <a:srgbClr val="141B2E"/>
                 </a:solidFill>
@@ -9215,12 +9550,12 @@
         </p:nvSpPr>
         <p:spPr>
           <a:xfrm>
-            <a:off x="8999982" y="3469233"/>
-            <a:ext cx="2686050" cy="1305306"/>
+            <a:off x="8999982" y="3562350"/>
+            <a:ext cx="2686050" cy="1636775"/>
           </a:xfrm>
           <a:prstGeom prst="roundRect">
             <a:avLst>
-              <a:gd name="adj" fmla="val 23350"/>
+              <a:gd name="adj" fmla="val 18621"/>
             </a:avLst>
           </a:prstGeom>
           <a:solidFill>
@@ -9263,8 +9598,8 @@
         </p:nvSpPr>
         <p:spPr>
           <a:xfrm>
-            <a:off x="9109710" y="3469233"/>
-            <a:ext cx="2466594" cy="1305306"/>
+            <a:off x="9109710" y="3562350"/>
+            <a:ext cx="2466594" cy="1636775"/>
           </a:xfrm>
           <a:prstGeom prst="rect">
             <a:avLst/>
@@ -9279,14 +9614,14 @@
           <a:p>
             <a:pPr algn="ctr">
               <a:lnSpc>
-                <a:spcPts val="1565"/>
+                <a:spcPts val="1739"/>
               </a:lnSpc>
               <a:spcAft>
                 <a:spcPts val="0"/>
               </a:spcAft>
             </a:pPr>
             <a:r>
-              <a:rPr sz="1350" b="1" i="0">
+              <a:rPr sz="1500" b="1" i="0">
                 <a:solidFill>
                   <a:srgbClr val="141B2E"/>
                 </a:solidFill>
@@ -15404,7 +15739,7 @@
         </p:nvSpPr>
         <p:spPr>
           <a:xfrm>
-            <a:off x="502920" y="2080260"/>
+            <a:off x="502920" y="2113026"/>
             <a:ext cx="11183112" cy="822960"/>
           </a:xfrm>
           <a:prstGeom prst="roundRect">
@@ -15452,7 +15787,7 @@
         </p:nvSpPr>
         <p:spPr>
           <a:xfrm>
-            <a:off x="722376" y="2208276"/>
+            <a:off x="722376" y="2241042"/>
             <a:ext cx="10634472" cy="566928"/>
           </a:xfrm>
           <a:prstGeom prst="rect">
@@ -15494,12 +15829,12 @@
         </p:nvSpPr>
         <p:spPr>
           <a:xfrm>
-            <a:off x="502920" y="3570732"/>
-            <a:ext cx="2686050" cy="1051560"/>
+            <a:off x="502920" y="3603498"/>
+            <a:ext cx="2686050" cy="1554480"/>
           </a:xfrm>
           <a:prstGeom prst="roundRect">
             <a:avLst>
-              <a:gd name="adj" fmla="val 25000"/>
+              <a:gd name="adj" fmla="val 19607"/>
             </a:avLst>
           </a:prstGeom>
           <a:solidFill>
@@ -15542,8 +15877,8 @@
         </p:nvSpPr>
         <p:spPr>
           <a:xfrm>
-            <a:off x="612648" y="3570732"/>
-            <a:ext cx="2466594" cy="1051560"/>
+            <a:off x="612648" y="3603498"/>
+            <a:ext cx="2466594" cy="1554480"/>
           </a:xfrm>
           <a:prstGeom prst="rect">
             <a:avLst/>
@@ -15558,14 +15893,14 @@
           <a:p>
             <a:pPr algn="ctr">
               <a:lnSpc>
-                <a:spcPts val="1565"/>
+                <a:spcPts val="1739"/>
               </a:lnSpc>
               <a:spcAft>
                 <a:spcPts val="0"/>
               </a:spcAft>
             </a:pPr>
             <a:r>
-              <a:rPr sz="1350" b="1" i="0">
+              <a:rPr sz="1500" b="1" i="0">
                 <a:solidFill>
                   <a:srgbClr val="141B2E"/>
                 </a:solidFill>
@@ -15584,12 +15919,12 @@
         </p:nvSpPr>
         <p:spPr>
           <a:xfrm>
-            <a:off x="3335274" y="3570732"/>
-            <a:ext cx="2686050" cy="1051560"/>
+            <a:off x="3335274" y="3603498"/>
+            <a:ext cx="2686050" cy="1554480"/>
           </a:xfrm>
           <a:prstGeom prst="roundRect">
             <a:avLst>
-              <a:gd name="adj" fmla="val 25000"/>
+              <a:gd name="adj" fmla="val 19607"/>
             </a:avLst>
           </a:prstGeom>
           <a:solidFill>
@@ -15632,8 +15967,8 @@
         </p:nvSpPr>
         <p:spPr>
           <a:xfrm>
-            <a:off x="3445002" y="3570732"/>
-            <a:ext cx="2466594" cy="1051560"/>
+            <a:off x="3445002" y="3603498"/>
+            <a:ext cx="2466594" cy="1554480"/>
           </a:xfrm>
           <a:prstGeom prst="rect">
             <a:avLst/>
@@ -15648,14 +15983,14 @@
           <a:p>
             <a:pPr algn="ctr">
               <a:lnSpc>
-                <a:spcPts val="1565"/>
+                <a:spcPts val="1739"/>
               </a:lnSpc>
               <a:spcAft>
                 <a:spcPts val="0"/>
               </a:spcAft>
             </a:pPr>
             <a:r>
-              <a:rPr sz="1350" b="1" i="0">
+              <a:rPr sz="1500" b="1" i="0">
                 <a:solidFill>
                   <a:srgbClr val="141B2E"/>
                 </a:solidFill>
@@ -15674,12 +16009,12 @@
         </p:nvSpPr>
         <p:spPr>
           <a:xfrm>
-            <a:off x="6167628" y="3570732"/>
-            <a:ext cx="2686050" cy="1051560"/>
+            <a:off x="6167628" y="3603498"/>
+            <a:ext cx="2686050" cy="1554480"/>
           </a:xfrm>
           <a:prstGeom prst="roundRect">
             <a:avLst>
-              <a:gd name="adj" fmla="val 25000"/>
+              <a:gd name="adj" fmla="val 19607"/>
             </a:avLst>
           </a:prstGeom>
           <a:solidFill>
@@ -15722,8 +16057,8 @@
         </p:nvSpPr>
         <p:spPr>
           <a:xfrm>
-            <a:off x="6277356" y="3570732"/>
-            <a:ext cx="2466594" cy="1051560"/>
+            <a:off x="6277356" y="3603498"/>
+            <a:ext cx="2466594" cy="1554480"/>
           </a:xfrm>
           <a:prstGeom prst="rect">
             <a:avLst/>
@@ -15738,14 +16073,14 @@
           <a:p>
             <a:pPr algn="ctr">
               <a:lnSpc>
-                <a:spcPts val="1565"/>
+                <a:spcPts val="1739"/>
               </a:lnSpc>
               <a:spcAft>
                 <a:spcPts val="0"/>
               </a:spcAft>
             </a:pPr>
             <a:r>
-              <a:rPr sz="1350" b="1" i="0">
+              <a:rPr sz="1500" b="1" i="0">
                 <a:solidFill>
                   <a:srgbClr val="141B2E"/>
                 </a:solidFill>
@@ -15764,12 +16099,12 @@
         </p:nvSpPr>
         <p:spPr>
           <a:xfrm>
-            <a:off x="8999982" y="3570732"/>
-            <a:ext cx="2686050" cy="1051560"/>
+            <a:off x="8999982" y="3603498"/>
+            <a:ext cx="2686050" cy="1554480"/>
           </a:xfrm>
           <a:prstGeom prst="roundRect">
             <a:avLst>
-              <a:gd name="adj" fmla="val 25000"/>
+              <a:gd name="adj" fmla="val 19607"/>
             </a:avLst>
           </a:prstGeom>
           <a:solidFill>
@@ -15812,8 +16147,8 @@
         </p:nvSpPr>
         <p:spPr>
           <a:xfrm>
-            <a:off x="9109710" y="3570732"/>
-            <a:ext cx="2466594" cy="1051560"/>
+            <a:off x="9109710" y="3603498"/>
+            <a:ext cx="2466594" cy="1554480"/>
           </a:xfrm>
           <a:prstGeom prst="rect">
             <a:avLst/>
@@ -15828,14 +16163,14 @@
           <a:p>
             <a:pPr algn="ctr">
               <a:lnSpc>
-                <a:spcPts val="1565"/>
+                <a:spcPts val="1739"/>
               </a:lnSpc>
               <a:spcAft>
                 <a:spcPts val="0"/>
               </a:spcAft>
             </a:pPr>
             <a:r>
-              <a:rPr sz="1350" b="1" i="0">
+              <a:rPr sz="1500" b="1" i="0">
                 <a:solidFill>
                   <a:srgbClr val="141B2E"/>
                 </a:solidFill>
@@ -21051,7 +21386,7 @@
         </p:nvSpPr>
         <p:spPr>
           <a:xfrm>
-            <a:off x="502920" y="2080260"/>
+            <a:off x="502920" y="2113026"/>
             <a:ext cx="11183112" cy="822960"/>
           </a:xfrm>
           <a:prstGeom prst="roundRect">
@@ -21099,7 +21434,7 @@
         </p:nvSpPr>
         <p:spPr>
           <a:xfrm>
-            <a:off x="722376" y="2208276"/>
+            <a:off x="722376" y="2241042"/>
             <a:ext cx="10634472" cy="566928"/>
           </a:xfrm>
           <a:prstGeom prst="rect">
@@ -21141,12 +21476,12 @@
         </p:nvSpPr>
         <p:spPr>
           <a:xfrm>
-            <a:off x="502920" y="3570732"/>
-            <a:ext cx="2686050" cy="1051560"/>
+            <a:off x="502920" y="3603498"/>
+            <a:ext cx="2686050" cy="1554480"/>
           </a:xfrm>
           <a:prstGeom prst="roundRect">
             <a:avLst>
-              <a:gd name="adj" fmla="val 25000"/>
+              <a:gd name="adj" fmla="val 19607"/>
             </a:avLst>
           </a:prstGeom>
           <a:solidFill>
@@ -21189,8 +21524,8 @@
         </p:nvSpPr>
         <p:spPr>
           <a:xfrm>
-            <a:off x="612648" y="3570732"/>
-            <a:ext cx="2466594" cy="1051560"/>
+            <a:off x="612648" y="3603498"/>
+            <a:ext cx="2466594" cy="1554480"/>
           </a:xfrm>
           <a:prstGeom prst="rect">
             <a:avLst/>
@@ -21205,14 +21540,14 @@
           <a:p>
             <a:pPr algn="ctr">
               <a:lnSpc>
-                <a:spcPts val="1565"/>
+                <a:spcPts val="1739"/>
               </a:lnSpc>
               <a:spcAft>
                 <a:spcPts val="0"/>
               </a:spcAft>
             </a:pPr>
             <a:r>
-              <a:rPr sz="1350" b="1" i="0">
+              <a:rPr sz="1500" b="1" i="0">
                 <a:solidFill>
                   <a:srgbClr val="141B2E"/>
                 </a:solidFill>
@@ -21231,12 +21566,12 @@
         </p:nvSpPr>
         <p:spPr>
           <a:xfrm>
-            <a:off x="3335274" y="3570732"/>
-            <a:ext cx="2686050" cy="1051560"/>
+            <a:off x="3335274" y="3603498"/>
+            <a:ext cx="2686050" cy="1554480"/>
           </a:xfrm>
           <a:prstGeom prst="roundRect">
             <a:avLst>
-              <a:gd name="adj" fmla="val 25000"/>
+              <a:gd name="adj" fmla="val 19607"/>
             </a:avLst>
           </a:prstGeom>
           <a:solidFill>
@@ -21279,8 +21614,8 @@
         </p:nvSpPr>
         <p:spPr>
           <a:xfrm>
-            <a:off x="3445002" y="3570732"/>
-            <a:ext cx="2466594" cy="1051560"/>
+            <a:off x="3445002" y="3603498"/>
+            <a:ext cx="2466594" cy="1554480"/>
           </a:xfrm>
           <a:prstGeom prst="rect">
             <a:avLst/>
@@ -21295,14 +21630,14 @@
           <a:p>
             <a:pPr algn="ctr">
               <a:lnSpc>
-                <a:spcPts val="1565"/>
+                <a:spcPts val="1739"/>
               </a:lnSpc>
               <a:spcAft>
                 <a:spcPts val="0"/>
               </a:spcAft>
             </a:pPr>
             <a:r>
-              <a:rPr sz="1350" b="1" i="0">
+              <a:rPr sz="1500" b="1" i="0">
                 <a:solidFill>
                   <a:srgbClr val="141B2E"/>
                 </a:solidFill>
@@ -21321,12 +21656,12 @@
         </p:nvSpPr>
         <p:spPr>
           <a:xfrm>
-            <a:off x="6167628" y="3570732"/>
-            <a:ext cx="2686050" cy="1051560"/>
+            <a:off x="6167628" y="3603498"/>
+            <a:ext cx="2686050" cy="1554480"/>
           </a:xfrm>
           <a:prstGeom prst="roundRect">
             <a:avLst>
-              <a:gd name="adj" fmla="val 25000"/>
+              <a:gd name="adj" fmla="val 19607"/>
             </a:avLst>
           </a:prstGeom>
           <a:solidFill>
@@ -21369,8 +21704,8 @@
         </p:nvSpPr>
         <p:spPr>
           <a:xfrm>
-            <a:off x="6277356" y="3570732"/>
-            <a:ext cx="2466594" cy="1051560"/>
+            <a:off x="6277356" y="3603498"/>
+            <a:ext cx="2466594" cy="1554480"/>
           </a:xfrm>
           <a:prstGeom prst="rect">
             <a:avLst/>
@@ -21385,14 +21720,14 @@
           <a:p>
             <a:pPr algn="ctr">
               <a:lnSpc>
-                <a:spcPts val="1565"/>
+                <a:spcPts val="1739"/>
               </a:lnSpc>
               <a:spcAft>
                 <a:spcPts val="0"/>
               </a:spcAft>
             </a:pPr>
             <a:r>
-              <a:rPr sz="1350" b="1" i="0">
+              <a:rPr sz="1500" b="1" i="0">
                 <a:solidFill>
                   <a:srgbClr val="141B2E"/>
                 </a:solidFill>
@@ -21411,12 +21746,12 @@
         </p:nvSpPr>
         <p:spPr>
           <a:xfrm>
-            <a:off x="8999982" y="3570732"/>
-            <a:ext cx="2686050" cy="1051560"/>
+            <a:off x="8999982" y="3603498"/>
+            <a:ext cx="2686050" cy="1554480"/>
           </a:xfrm>
           <a:prstGeom prst="roundRect">
             <a:avLst>
-              <a:gd name="adj" fmla="val 25000"/>
+              <a:gd name="adj" fmla="val 19607"/>
             </a:avLst>
           </a:prstGeom>
           <a:solidFill>
@@ -21459,8 +21794,8 @@
         </p:nvSpPr>
         <p:spPr>
           <a:xfrm>
-            <a:off x="9109710" y="3570732"/>
-            <a:ext cx="2466594" cy="1051560"/>
+            <a:off x="9109710" y="3603498"/>
+            <a:ext cx="2466594" cy="1554480"/>
           </a:xfrm>
           <a:prstGeom prst="rect">
             <a:avLst/>
@@ -21475,14 +21810,14 @@
           <a:p>
             <a:pPr algn="ctr">
               <a:lnSpc>
-                <a:spcPts val="1565"/>
+                <a:spcPts val="1739"/>
               </a:lnSpc>
               <a:spcAft>
                 <a:spcPts val="0"/>
               </a:spcAft>
             </a:pPr>
             <a:r>
-              <a:rPr sz="1350" b="1" i="0">
+              <a:rPr sz="1500" b="1" i="0">
                 <a:solidFill>
                   <a:srgbClr val="141B2E"/>
                 </a:solidFill>
@@ -25406,7 +25741,7 @@
         </p:nvSpPr>
         <p:spPr>
           <a:xfrm>
-            <a:off x="1234440" y="2735326"/>
+            <a:off x="1234440" y="2850896"/>
             <a:ext cx="9692640" cy="449580"/>
           </a:xfrm>
           <a:prstGeom prst="rect">
@@ -25435,7 +25770,7 @@
                 </a:solidFill>
                 <a:latin typeface="Arial"/>
               </a:rPr>
-              <a:t>Кейс 4. Версия, которая работает в бою</a:t>
+              <a:t>Кейс 4. Тема определена неверно</a:t>
             </a:r>
           </a:p>
         </p:txBody>
@@ -25448,8 +25783,8 @@
         </p:nvSpPr>
         <p:spPr>
           <a:xfrm>
-            <a:off x="1234440" y="3367786"/>
-            <a:ext cx="9692640" cy="663448"/>
+            <a:off x="1234440" y="3483356"/>
+            <a:ext cx="9692640" cy="432307"/>
           </a:xfrm>
           <a:prstGeom prst="rect">
             <a:avLst/>
@@ -25477,7 +25812,7 @@
                 </a:solidFill>
                 <a:latin typeface="Arial"/>
               </a:rPr>
-              <a:t>На холсте промпт поправлен, проверен ручным запуском и никем не откатывался. В таблице за сутки все заявки разобраны по-старому.</a:t>
+              <a:t>«Тут написано „курс“, а человек про счёт спрашивал. И так раза три за день.»</a:t>
             </a:r>
           </a:p>
         </p:txBody>
@@ -25939,7 +26274,7 @@
                 </a:solidFill>
                 <a:latin typeface="Arial"/>
               </a:rPr>
-              <a:t>Правка на холсте и то, что работает в бою</a:t>
+              <a:t>Что значит «тема не та»</a:t>
             </a:r>
           </a:p>
         </p:txBody>
@@ -25952,590 +26287,8 @@
         </p:nvSpPr>
         <p:spPr>
           <a:xfrm>
-            <a:off x="502920" y="1424686"/>
-            <a:ext cx="11183112" cy="2766695"/>
-          </a:xfrm>
-          <a:prstGeom prst="roundRect">
-            <a:avLst>
-              <a:gd name="adj" fmla="val 11016"/>
-            </a:avLst>
-          </a:prstGeom>
-          <a:solidFill>
-            <a:srgbClr val="FFFFFF"/>
-          </a:solidFill>
-          <a:ln w="17780">
-            <a:solidFill>
-              <a:srgbClr val="1C7293"/>
-            </a:solidFill>
-          </a:ln>
-          <a:effectLst/>
-        </p:spPr>
-        <p:style>
-          <a:lnRef idx="1">
-            <a:schemeClr val="accent1"/>
-          </a:lnRef>
-          <a:fillRef idx="3">
-            <a:schemeClr val="accent1"/>
-          </a:fillRef>
-          <a:effectRef idx="2">
-            <a:schemeClr val="accent1"/>
-          </a:effectRef>
-          <a:fontRef idx="minor">
-            <a:schemeClr val="lt1"/>
-          </a:fontRef>
-        </p:style>
-        <p:txBody>
-          <a:bodyPr rtlCol="0" anchor="ctr"/>
-          <a:lstStyle/>
-          <a:p>
-            <a:pPr algn="ctr"/>
-          </a:p>
-        </p:txBody>
-      </p:sp>
-      <p:sp>
-        <p:nvSpPr>
-          <p:cNvPr id="4" name="TextBox 3"/>
-          <p:cNvSpPr txBox="1"/>
-          <p:nvPr/>
-        </p:nvSpPr>
-        <p:spPr>
-          <a:xfrm>
-            <a:off x="685800" y="1607566"/>
-            <a:ext cx="5606899" cy="282067"/>
-          </a:xfrm>
-          <a:prstGeom prst="rect">
-            <a:avLst/>
-          </a:prstGeom>
-          <a:noFill/>
-        </p:spPr>
-        <p:txBody>
-          <a:bodyPr wrap="square" lIns="0" rIns="0" tIns="0" bIns="0" anchor="t">
-            <a:spAutoFit/>
-          </a:bodyPr>
-          <a:lstStyle/>
-          <a:p>
-            <a:pPr algn="l">
-              <a:lnSpc>
-                <a:spcPts val="1265"/>
-              </a:lnSpc>
-              <a:spcAft>
-                <a:spcPts val="0"/>
-              </a:spcAft>
-            </a:pPr>
-            <a:r>
-              <a:rPr sz="1150" b="1" i="0">
-                <a:solidFill>
-                  <a:srgbClr val="6B7685"/>
-                </a:solidFill>
-                <a:latin typeface="Arial"/>
-              </a:rPr>
-              <a:t>ЧТО СДЕЛАЛИ</a:t>
-            </a:r>
-          </a:p>
-        </p:txBody>
-      </p:sp>
-      <p:sp>
-        <p:nvSpPr>
-          <p:cNvPr id="5" name="TextBox 4"/>
-          <p:cNvSpPr txBox="1"/>
-          <p:nvPr/>
-        </p:nvSpPr>
-        <p:spPr>
-          <a:xfrm>
-            <a:off x="6439003" y="1607566"/>
-            <a:ext cx="4917844" cy="282067"/>
-          </a:xfrm>
-          <a:prstGeom prst="rect">
-            <a:avLst/>
-          </a:prstGeom>
-          <a:noFill/>
-        </p:spPr>
-        <p:txBody>
-          <a:bodyPr wrap="square" lIns="0" rIns="0" tIns="0" bIns="0" anchor="t">
-            <a:spAutoFit/>
-          </a:bodyPr>
-          <a:lstStyle/>
-          <a:p>
-            <a:pPr algn="l">
-              <a:lnSpc>
-                <a:spcPts val="1265"/>
-              </a:lnSpc>
-              <a:spcAft>
-                <a:spcPts val="0"/>
-              </a:spcAft>
-            </a:pPr>
-            <a:r>
-              <a:rPr sz="1150" b="1" i="0">
-                <a:solidFill>
-                  <a:srgbClr val="6B7685"/>
-                </a:solidFill>
-                <a:latin typeface="Arial"/>
-              </a:rPr>
-              <a:t>ЧТО ПОЛУЧИЛОСЬ</a:t>
-            </a:r>
-          </a:p>
-        </p:txBody>
-      </p:sp>
-      <p:sp>
-        <p:nvSpPr>
-          <p:cNvPr id="6" name="TextBox 5"/>
-          <p:cNvSpPr txBox="1"/>
-          <p:nvPr/>
-        </p:nvSpPr>
-        <p:spPr>
-          <a:xfrm>
-            <a:off x="685800" y="1889633"/>
-            <a:ext cx="5606899" cy="712279"/>
-          </a:xfrm>
-          <a:prstGeom prst="rect">
-            <a:avLst/>
-          </a:prstGeom>
-          <a:noFill/>
-        </p:spPr>
-        <p:txBody>
-          <a:bodyPr wrap="square" lIns="0" rIns="0" tIns="0" bIns="0" anchor="ctr">
-            <a:spAutoFit/>
-          </a:bodyPr>
-          <a:lstStyle/>
-          <a:p>
-            <a:pPr algn="l">
-              <a:lnSpc>
-                <a:spcPts val="1437"/>
-              </a:lnSpc>
-              <a:spcAft>
-                <a:spcPts val="0"/>
-              </a:spcAft>
-            </a:pPr>
-            <a:r>
-              <a:rPr sz="1250" b="0" i="0">
-                <a:solidFill>
-                  <a:srgbClr val="141B2E"/>
-                </a:solidFill>
-                <a:latin typeface="Arial"/>
-              </a:rPr>
-              <a:t>администратор сказала: тема определяется слишком общо, «курс» стоит там, где речь про конкретную программу. Вы поправили формулировку запроса в узле извлечения</a:t>
-            </a:r>
-          </a:p>
-        </p:txBody>
-      </p:sp>
-      <p:sp>
-        <p:nvSpPr>
-          <p:cNvPr id="7" name="TextBox 6"/>
-          <p:cNvSpPr txBox="1"/>
-          <p:nvPr/>
-        </p:nvSpPr>
-        <p:spPr>
-          <a:xfrm>
-            <a:off x="6439003" y="1889633"/>
-            <a:ext cx="4917844" cy="712279"/>
-          </a:xfrm>
-          <a:prstGeom prst="rect">
-            <a:avLst/>
-          </a:prstGeom>
-          <a:noFill/>
-        </p:spPr>
-        <p:txBody>
-          <a:bodyPr wrap="square" lIns="0" rIns="0" tIns="0" bIns="0" anchor="ctr">
-            <a:spAutoFit/>
-          </a:bodyPr>
-          <a:lstStyle/>
-          <a:p>
-            <a:pPr algn="l">
-              <a:lnSpc>
-                <a:spcPts val="1437"/>
-              </a:lnSpc>
-              <a:spcAft>
-                <a:spcPts val="0"/>
-              </a:spcAft>
-            </a:pPr>
-            <a:r>
-              <a:rPr sz="1250" b="0" i="0">
-                <a:solidFill>
-                  <a:srgbClr val="141B2E"/>
-                </a:solidFill>
-                <a:latin typeface="Arial"/>
-              </a:rPr>
-              <a:t>в карточке узла новый текст, никто его не откатывал</a:t>
-            </a:r>
-          </a:p>
-        </p:txBody>
-      </p:sp>
-      <p:cxnSp>
-        <p:nvCxnSpPr>
-          <p:cNvPr id="8" name="Connector 7"/>
-          <p:cNvCxnSpPr/>
-          <p:nvPr/>
-        </p:nvCxnSpPr>
-        <p:spPr>
-          <a:xfrm>
-            <a:off x="685800" y="2601912"/>
-            <a:ext cx="10817352" cy="0"/>
-          </a:xfrm>
-          <a:prstGeom prst="line">
-            <a:avLst/>
-          </a:prstGeom>
-          <a:ln w="9525">
-            <a:solidFill>
-              <a:srgbClr val="E5EAF0"/>
-            </a:solidFill>
-          </a:ln>
-        </p:spPr>
-        <p:style>
-          <a:lnRef idx="2">
-            <a:schemeClr val="accent1"/>
-          </a:lnRef>
-          <a:fillRef idx="0">
-            <a:schemeClr val="accent1"/>
-          </a:fillRef>
-          <a:effectRef idx="1">
-            <a:schemeClr val="accent1"/>
-          </a:effectRef>
-          <a:fontRef idx="minor">
-            <a:schemeClr val="tx1"/>
-          </a:fontRef>
-        </p:style>
-      </p:cxnSp>
-      <p:sp>
-        <p:nvSpPr>
-          <p:cNvPr id="9" name="TextBox 8"/>
-          <p:cNvSpPr txBox="1"/>
-          <p:nvPr/>
-        </p:nvSpPr>
-        <p:spPr>
-          <a:xfrm>
-            <a:off x="685800" y="2601912"/>
-            <a:ext cx="5606899" cy="529717"/>
-          </a:xfrm>
-          <a:prstGeom prst="rect">
-            <a:avLst/>
-          </a:prstGeom>
-          <a:noFill/>
-        </p:spPr>
-        <p:txBody>
-          <a:bodyPr wrap="square" lIns="0" rIns="0" tIns="0" bIns="0" anchor="ctr">
-            <a:spAutoFit/>
-          </a:bodyPr>
-          <a:lstStyle/>
-          <a:p>
-            <a:pPr algn="l">
-              <a:lnSpc>
-                <a:spcPts val="1437"/>
-              </a:lnSpc>
-              <a:spcAft>
-                <a:spcPts val="0"/>
-              </a:spcAft>
-            </a:pPr>
-            <a:r>
-              <a:rPr sz="1250" b="0" i="0">
-                <a:solidFill>
-                  <a:srgbClr val="141B2E"/>
-                </a:solidFill>
-                <a:latin typeface="Arial"/>
-              </a:rPr>
-              <a:t>вы проверили ручным запуском на трёх её заявках, при ней</a:t>
-            </a:r>
-          </a:p>
-        </p:txBody>
-      </p:sp>
-      <p:sp>
-        <p:nvSpPr>
-          <p:cNvPr id="10" name="TextBox 9"/>
-          <p:cNvSpPr txBox="1"/>
-          <p:nvPr/>
-        </p:nvSpPr>
-        <p:spPr>
-          <a:xfrm>
-            <a:off x="6439003" y="2601912"/>
-            <a:ext cx="4917844" cy="529717"/>
-          </a:xfrm>
-          <a:prstGeom prst="rect">
-            <a:avLst/>
-          </a:prstGeom>
-          <a:noFill/>
-        </p:spPr>
-        <p:txBody>
-          <a:bodyPr wrap="square" lIns="0" rIns="0" tIns="0" bIns="0" anchor="ctr">
-            <a:spAutoFit/>
-          </a:bodyPr>
-          <a:lstStyle/>
-          <a:p>
-            <a:pPr algn="l">
-              <a:lnSpc>
-                <a:spcPts val="1437"/>
-              </a:lnSpc>
-              <a:spcAft>
-                <a:spcPts val="0"/>
-              </a:spcAft>
-            </a:pPr>
-            <a:r>
-              <a:rPr sz="1250" b="0" i="0">
-                <a:solidFill>
-                  <a:srgbClr val="141B2E"/>
-                </a:solidFill>
-                <a:latin typeface="Arial"/>
-              </a:rPr>
-              <a:t>все три разобраны правильно, именно так, как она просила. Закрыли, пошли дальше</a:t>
-            </a:r>
-          </a:p>
-        </p:txBody>
-      </p:sp>
-      <p:cxnSp>
-        <p:nvCxnSpPr>
-          <p:cNvPr id="11" name="Connector 10"/>
-          <p:cNvCxnSpPr/>
-          <p:nvPr/>
-        </p:nvCxnSpPr>
-        <p:spPr>
-          <a:xfrm>
-            <a:off x="685800" y="3131629"/>
-            <a:ext cx="10817352" cy="0"/>
-          </a:xfrm>
-          <a:prstGeom prst="line">
-            <a:avLst/>
-          </a:prstGeom>
-          <a:ln w="9525">
-            <a:solidFill>
-              <a:srgbClr val="E5EAF0"/>
-            </a:solidFill>
-          </a:ln>
-        </p:spPr>
-        <p:style>
-          <a:lnRef idx="2">
-            <a:schemeClr val="accent1"/>
-          </a:lnRef>
-          <a:fillRef idx="0">
-            <a:schemeClr val="accent1"/>
-          </a:fillRef>
-          <a:effectRef idx="1">
-            <a:schemeClr val="accent1"/>
-          </a:effectRef>
-          <a:fontRef idx="minor">
-            <a:schemeClr val="tx1"/>
-          </a:fontRef>
-        </p:style>
-      </p:cxnSp>
-      <p:sp>
-        <p:nvSpPr>
-          <p:cNvPr id="12" name="TextBox 11"/>
-          <p:cNvSpPr txBox="1"/>
-          <p:nvPr/>
-        </p:nvSpPr>
-        <p:spPr>
-          <a:xfrm>
-            <a:off x="685800" y="3131629"/>
-            <a:ext cx="5606899" cy="529717"/>
-          </a:xfrm>
-          <a:prstGeom prst="rect">
-            <a:avLst/>
-          </a:prstGeom>
-          <a:noFill/>
-        </p:spPr>
-        <p:txBody>
-          <a:bodyPr wrap="square" lIns="0" rIns="0" tIns="0" bIns="0" anchor="ctr">
-            <a:spAutoFit/>
-          </a:bodyPr>
-          <a:lstStyle/>
-          <a:p>
-            <a:pPr algn="l">
-              <a:lnSpc>
-                <a:spcPts val="1437"/>
-              </a:lnSpc>
-              <a:spcAft>
-                <a:spcPts val="0"/>
-              </a:spcAft>
-            </a:pPr>
-            <a:r>
-              <a:rPr sz="1250" b="0" i="0">
-                <a:solidFill>
-                  <a:srgbClr val="141B2E"/>
-                </a:solidFill>
-                <a:latin typeface="Arial"/>
-              </a:rPr>
-              <a:t>на следующий день она открывает таблицу за сутки</a:t>
-            </a:r>
-          </a:p>
-        </p:txBody>
-      </p:sp>
-      <p:sp>
-        <p:nvSpPr>
-          <p:cNvPr id="13" name="TextBox 12"/>
-          <p:cNvSpPr txBox="1"/>
-          <p:nvPr/>
-        </p:nvSpPr>
-        <p:spPr>
-          <a:xfrm>
-            <a:off x="6439003" y="3131629"/>
-            <a:ext cx="4917844" cy="529717"/>
-          </a:xfrm>
-          <a:prstGeom prst="rect">
-            <a:avLst/>
-          </a:prstGeom>
-          <a:noFill/>
-        </p:spPr>
-        <p:txBody>
-          <a:bodyPr wrap="square" lIns="0" rIns="0" tIns="0" bIns="0" anchor="ctr">
-            <a:spAutoFit/>
-          </a:bodyPr>
-          <a:lstStyle/>
-          <a:p>
-            <a:pPr algn="l">
-              <a:lnSpc>
-                <a:spcPts val="1437"/>
-              </a:lnSpc>
-              <a:spcAft>
-                <a:spcPts val="0"/>
-              </a:spcAft>
-            </a:pPr>
-            <a:r>
-              <a:rPr sz="1250" b="1" i="0">
-                <a:solidFill>
-                  <a:srgbClr val="141B2E"/>
-                </a:solidFill>
-                <a:latin typeface="Arial"/>
-              </a:rPr>
-              <a:t>все заявки разобраны по-старому.</a:t>
-            </a:r>
-            <a:r>
-              <a:rPr sz="1250" b="0" i="0">
-                <a:solidFill>
-                  <a:srgbClr val="141B2E"/>
-                </a:solidFill>
-                <a:latin typeface="Arial"/>
-              </a:rPr>
-              <a:t> Ни одной по новой формулировке — и она приходит с этим к вам</a:t>
-            </a:r>
-          </a:p>
-        </p:txBody>
-      </p:sp>
-      <p:cxnSp>
-        <p:nvCxnSpPr>
-          <p:cNvPr id="14" name="Connector 13"/>
-          <p:cNvCxnSpPr/>
-          <p:nvPr/>
-        </p:nvCxnSpPr>
-        <p:spPr>
-          <a:xfrm>
-            <a:off x="685800" y="3661346"/>
-            <a:ext cx="10817352" cy="0"/>
-          </a:xfrm>
-          <a:prstGeom prst="line">
-            <a:avLst/>
-          </a:prstGeom>
-          <a:ln w="9525">
-            <a:solidFill>
-              <a:srgbClr val="E5EAF0"/>
-            </a:solidFill>
-          </a:ln>
-        </p:spPr>
-        <p:style>
-          <a:lnRef idx="2">
-            <a:schemeClr val="accent1"/>
-          </a:lnRef>
-          <a:fillRef idx="0">
-            <a:schemeClr val="accent1"/>
-          </a:fillRef>
-          <a:effectRef idx="1">
-            <a:schemeClr val="accent1"/>
-          </a:effectRef>
-          <a:fontRef idx="minor">
-            <a:schemeClr val="tx1"/>
-          </a:fontRef>
-        </p:style>
-      </p:cxnSp>
-      <p:sp>
-        <p:nvSpPr>
-          <p:cNvPr id="15" name="TextBox 14"/>
-          <p:cNvSpPr txBox="1"/>
-          <p:nvPr/>
-        </p:nvSpPr>
-        <p:spPr>
-          <a:xfrm>
-            <a:off x="685800" y="3661346"/>
-            <a:ext cx="5606899" cy="347154"/>
-          </a:xfrm>
-          <a:prstGeom prst="rect">
-            <a:avLst/>
-          </a:prstGeom>
-          <a:noFill/>
-        </p:spPr>
-        <p:txBody>
-          <a:bodyPr wrap="square" lIns="0" rIns="0" tIns="0" bIns="0" anchor="ctr">
-            <a:spAutoFit/>
-          </a:bodyPr>
-          <a:lstStyle/>
-          <a:p>
-            <a:pPr algn="l">
-              <a:lnSpc>
-                <a:spcPts val="1437"/>
-              </a:lnSpc>
-              <a:spcAft>
-                <a:spcPts val="0"/>
-              </a:spcAft>
-            </a:pPr>
-            <a:r>
-              <a:rPr sz="1250" b="0" i="0">
-                <a:solidFill>
-                  <a:srgbClr val="141B2E"/>
-                </a:solidFill>
-                <a:latin typeface="Arial"/>
-              </a:rPr>
-              <a:t>вы открываете холст, запускаете руками ещё раз</a:t>
-            </a:r>
-          </a:p>
-        </p:txBody>
-      </p:sp>
-      <p:sp>
-        <p:nvSpPr>
-          <p:cNvPr id="16" name="TextBox 15"/>
-          <p:cNvSpPr txBox="1"/>
-          <p:nvPr/>
-        </p:nvSpPr>
-        <p:spPr>
-          <a:xfrm>
-            <a:off x="6439003" y="3661346"/>
-            <a:ext cx="4917844" cy="347154"/>
-          </a:xfrm>
-          <a:prstGeom prst="rect">
-            <a:avLst/>
-          </a:prstGeom>
-          <a:noFill/>
-        </p:spPr>
-        <p:txBody>
-          <a:bodyPr wrap="square" lIns="0" rIns="0" tIns="0" bIns="0" anchor="ctr">
-            <a:spAutoFit/>
-          </a:bodyPr>
-          <a:lstStyle/>
-          <a:p>
-            <a:pPr algn="l">
-              <a:lnSpc>
-                <a:spcPts val="1437"/>
-              </a:lnSpc>
-              <a:spcAft>
-                <a:spcPts val="0"/>
-              </a:spcAft>
-            </a:pPr>
-            <a:r>
-              <a:rPr sz="1250" b="0" i="0">
-                <a:solidFill>
-                  <a:srgbClr val="141B2E"/>
-                </a:solidFill>
-                <a:latin typeface="Arial"/>
-              </a:rPr>
-              <a:t>снова правильно. И теперь объяснить это ей нечем</a:t>
-            </a:r>
-          </a:p>
-        </p:txBody>
-      </p:sp>
-      <p:sp>
-        <p:nvSpPr>
-          <p:cNvPr id="17" name="Rounded Rectangle 16"/>
-          <p:cNvSpPr/>
-          <p:nvPr/>
-        </p:nvSpPr>
-        <p:spPr>
-          <a:xfrm>
-            <a:off x="502920" y="4858893"/>
-            <a:ext cx="82296" cy="746760"/>
+            <a:off x="502920" y="1024940"/>
+            <a:ext cx="82296" cy="1295400"/>
           </a:xfrm>
           <a:prstGeom prst="roundRect">
             <a:avLst>
@@ -26574,14 +26327,14 @@
       </p:sp>
       <p:sp>
         <p:nvSpPr>
-          <p:cNvPr id="18" name="TextBox 17"/>
-          <p:cNvSpPr txBox="1"/>
-          <p:nvPr/>
-        </p:nvSpPr>
-        <p:spPr>
-          <a:xfrm>
-            <a:off x="859536" y="4986909"/>
-            <a:ext cx="10643616" cy="490727"/>
+          <p:cNvPr id="4" name="TextBox 3"/>
+          <p:cNvSpPr txBox="1"/>
+          <p:nvPr/>
+        </p:nvSpPr>
+        <p:spPr>
+          <a:xfrm>
+            <a:off x="859536" y="1152956"/>
+            <a:ext cx="10643616" cy="1039368"/>
           </a:xfrm>
           <a:prstGeom prst="rect">
             <a:avLst/>
@@ -26609,7 +26362,7 @@
                 </a:solidFill>
                 <a:latin typeface="Arial"/>
               </a:rPr>
-              <a:t>Проверка руками показывала правильный результат </a:t>
+              <a:t>Заявка:</a:t>
             </a:r>
             <a:r>
               <a:rPr sz="1500" b="1" i="0">
@@ -26618,8 +26371,18 @@
                 </a:solidFill>
                 <a:latin typeface="Arial"/>
               </a:rPr>
-              <a:t>всё это время</a:t>
-            </a:r>
+              <a:t> «Подскажите, сколько стоит обучение для группы из восьми человек, и можно ли выставить счёт на ООО?»</a:t>
+            </a:r>
+          </a:p>
+          <a:p>
+            <a:pPr algn="l">
+              <a:lnSpc>
+                <a:spcPts val="1860"/>
+              </a:lnSpc>
+              <a:spcAft>
+                <a:spcPts val="300"/>
+              </a:spcAft>
+            </a:pPr>
             <a:r>
               <a:rPr sz="1500" b="1" i="0">
                 <a:solidFill>
@@ -26627,14 +26390,676 @@
                 </a:solidFill>
                 <a:latin typeface="Arial"/>
               </a:rPr>
-              <a:t> — и показывала честно. Она просто проверяла не то, что работало в бою.</a:t>
-            </a:r>
-          </a:p>
-        </p:txBody>
-      </p:sp>
-      <p:sp>
-        <p:nvSpPr>
-          <p:cNvPr id="19" name="TextBox 18"/>
+              <a:t>Процесс записал:</a:t>
+            </a:r>
+            <a:r>
+              <a:rPr sz="1500" b="1" i="0">
+                <a:solidFill>
+                  <a:srgbClr val="141B2E"/>
+                </a:solidFill>
+                <a:latin typeface="Arial"/>
+              </a:rPr>
+              <a:t> тема </a:t>
+            </a:r>
+            <a:r>
+              <a:rPr sz="1500" b="1" i="0">
+                <a:solidFill>
+                  <a:srgbClr val="141B2E"/>
+                </a:solidFill>
+                <a:latin typeface="Consolas"/>
+              </a:rPr>
+              <a:t>курс</a:t>
+            </a:r>
+            <a:r>
+              <a:rPr sz="1500" b="1" i="0">
+                <a:solidFill>
+                  <a:srgbClr val="141B2E"/>
+                </a:solidFill>
+                <a:latin typeface="Arial"/>
+              </a:rPr>
+              <a:t>, срочность </a:t>
+            </a:r>
+            <a:r>
+              <a:rPr sz="1500" b="1" i="0">
+                <a:solidFill>
+                  <a:srgbClr val="141B2E"/>
+                </a:solidFill>
+                <a:latin typeface="Consolas"/>
+              </a:rPr>
+              <a:t>не</a:t>
+            </a:r>
+            <a:r>
+              <a:rPr sz="1500" b="1" i="0">
+                <a:solidFill>
+                  <a:srgbClr val="141B2E"/>
+                </a:solidFill>
+                <a:latin typeface="Arial"/>
+              </a:rPr>
+              <a:t> </a:t>
+            </a:r>
+            <a:r>
+              <a:rPr sz="1500" b="1" i="0">
+                <a:solidFill>
+                  <a:srgbClr val="141B2E"/>
+                </a:solidFill>
+                <a:latin typeface="Consolas"/>
+              </a:rPr>
+              <a:t>указано</a:t>
+            </a:r>
+            <a:r>
+              <a:rPr sz="1500" b="1" i="0">
+                <a:solidFill>
+                  <a:srgbClr val="141B2E"/>
+                </a:solidFill>
+                <a:latin typeface="Arial"/>
+              </a:rPr>
+              <a:t>.</a:t>
+            </a:r>
+          </a:p>
+          <a:p>
+            <a:pPr algn="l">
+              <a:lnSpc>
+                <a:spcPts val="1860"/>
+              </a:lnSpc>
+              <a:spcAft>
+                <a:spcPts val="300"/>
+              </a:spcAft>
+            </a:pPr>
+            <a:r>
+              <a:rPr sz="1500" b="1" i="0">
+                <a:solidFill>
+                  <a:srgbClr val="141B2E"/>
+                </a:solidFill>
+                <a:latin typeface="Arial"/>
+              </a:rPr>
+              <a:t>На самом деле:</a:t>
+            </a:r>
+            <a:r>
+              <a:rPr sz="1500" b="1" i="0">
+                <a:solidFill>
+                  <a:srgbClr val="141B2E"/>
+                </a:solidFill>
+                <a:latin typeface="Arial"/>
+              </a:rPr>
+              <a:t> человеку нужен счёт. Это </a:t>
+            </a:r>
+            <a:r>
+              <a:rPr sz="1500" b="1" i="0">
+                <a:solidFill>
+                  <a:srgbClr val="141B2E"/>
+                </a:solidFill>
+                <a:latin typeface="Consolas"/>
+              </a:rPr>
+              <a:t>оплата</a:t>
+            </a:r>
+            <a:r>
+              <a:rPr sz="1500" b="1" i="0">
+                <a:solidFill>
+                  <a:srgbClr val="141B2E"/>
+                </a:solidFill>
+                <a:latin typeface="Arial"/>
+              </a:rPr>
+              <a:t>, и заявка должна была уйти в бухгалтерию.</a:t>
+            </a:r>
+          </a:p>
+        </p:txBody>
+      </p:sp>
+      <p:sp>
+        <p:nvSpPr>
+          <p:cNvPr id="5" name="Rounded Rectangle 4"/>
+          <p:cNvSpPr/>
+          <p:nvPr/>
+        </p:nvSpPr>
+        <p:spPr>
+          <a:xfrm>
+            <a:off x="502920" y="2688894"/>
+            <a:ext cx="11183112" cy="2164842"/>
+          </a:xfrm>
+          <a:prstGeom prst="roundRect">
+            <a:avLst>
+              <a:gd name="adj" fmla="val 14079"/>
+            </a:avLst>
+          </a:prstGeom>
+          <a:solidFill>
+            <a:srgbClr val="F4F7FA"/>
+          </a:solidFill>
+          <a:ln w="15240">
+            <a:solidFill>
+              <a:srgbClr val="E5EAF0"/>
+            </a:solidFill>
+          </a:ln>
+          <a:effectLst/>
+        </p:spPr>
+        <p:style>
+          <a:lnRef idx="1">
+            <a:schemeClr val="accent1"/>
+          </a:lnRef>
+          <a:fillRef idx="3">
+            <a:schemeClr val="accent1"/>
+          </a:fillRef>
+          <a:effectRef idx="2">
+            <a:schemeClr val="accent1"/>
+          </a:effectRef>
+          <a:fontRef idx="minor">
+            <a:schemeClr val="lt1"/>
+          </a:fontRef>
+        </p:style>
+        <p:txBody>
+          <a:bodyPr rtlCol="0" anchor="ctr"/>
+          <a:lstStyle/>
+          <a:p>
+            <a:pPr algn="ctr"/>
+          </a:p>
+        </p:txBody>
+      </p:sp>
+      <p:sp>
+        <p:nvSpPr>
+          <p:cNvPr id="6" name="TextBox 5"/>
+          <p:cNvSpPr txBox="1"/>
+          <p:nvPr/>
+        </p:nvSpPr>
+        <p:spPr>
+          <a:xfrm>
+            <a:off x="722376" y="2908350"/>
+            <a:ext cx="329184" cy="532638"/>
+          </a:xfrm>
+          <a:prstGeom prst="rect">
+            <a:avLst/>
+          </a:prstGeom>
+          <a:noFill/>
+        </p:spPr>
+        <p:txBody>
+          <a:bodyPr wrap="square" lIns="0" rIns="0" tIns="0" bIns="0" anchor="ctr">
+            <a:spAutoFit/>
+          </a:bodyPr>
+          <a:lstStyle/>
+          <a:p>
+            <a:pPr algn="l">
+              <a:lnSpc>
+                <a:spcPts val="1829"/>
+              </a:lnSpc>
+              <a:spcAft>
+                <a:spcPts val="0"/>
+              </a:spcAft>
+            </a:pPr>
+            <a:r>
+              <a:rPr sz="1550" b="1" i="0">
+                <a:solidFill>
+                  <a:srgbClr val="028090"/>
+                </a:solidFill>
+                <a:latin typeface="Arial"/>
+              </a:rPr>
+              <a:t>1</a:t>
+            </a:r>
+          </a:p>
+        </p:txBody>
+      </p:sp>
+      <p:sp>
+        <p:nvSpPr>
+          <p:cNvPr id="7" name="TextBox 6"/>
+          <p:cNvSpPr txBox="1"/>
+          <p:nvPr/>
+        </p:nvSpPr>
+        <p:spPr>
+          <a:xfrm>
+            <a:off x="1106424" y="2908350"/>
+            <a:ext cx="10360152" cy="532638"/>
+          </a:xfrm>
+          <a:prstGeom prst="rect">
+            <a:avLst/>
+          </a:prstGeom>
+          <a:noFill/>
+        </p:spPr>
+        <p:txBody>
+          <a:bodyPr wrap="square" lIns="0" rIns="0" tIns="0" bIns="0" anchor="ctr">
+            <a:spAutoFit/>
+          </a:bodyPr>
+          <a:lstStyle/>
+          <a:p>
+            <a:pPr algn="l">
+              <a:lnSpc>
+                <a:spcPts val="1593"/>
+              </a:lnSpc>
+              <a:spcAft>
+                <a:spcPts val="0"/>
+              </a:spcAft>
+            </a:pPr>
+            <a:r>
+              <a:rPr sz="1350" b="0" i="0">
+                <a:solidFill>
+                  <a:srgbClr val="141B2E"/>
+                </a:solidFill>
+                <a:latin typeface="Arial"/>
+              </a:rPr>
+              <a:t>Модель увидела в первом предложении «обучение» и «стоит» — и выбрала </a:t>
+            </a:r>
+            <a:r>
+              <a:rPr sz="1350" b="0" i="0">
+                <a:solidFill>
+                  <a:srgbClr val="141B2E"/>
+                </a:solidFill>
+                <a:latin typeface="Consolas"/>
+              </a:rPr>
+              <a:t>курс</a:t>
+            </a:r>
+            <a:r>
+              <a:rPr sz="1350" b="0" i="0">
+                <a:solidFill>
+                  <a:srgbClr val="141B2E"/>
+                </a:solidFill>
+                <a:latin typeface="Arial"/>
+              </a:rPr>
+              <a:t>. Значение законное, из справочника.</a:t>
+            </a:r>
+          </a:p>
+        </p:txBody>
+      </p:sp>
+      <p:sp>
+        <p:nvSpPr>
+          <p:cNvPr id="8" name="TextBox 7"/>
+          <p:cNvSpPr txBox="1"/>
+          <p:nvPr/>
+        </p:nvSpPr>
+        <p:spPr>
+          <a:xfrm>
+            <a:off x="722376" y="3440988"/>
+            <a:ext cx="329184" cy="330327"/>
+          </a:xfrm>
+          <a:prstGeom prst="rect">
+            <a:avLst/>
+          </a:prstGeom>
+          <a:noFill/>
+        </p:spPr>
+        <p:txBody>
+          <a:bodyPr wrap="square" lIns="0" rIns="0" tIns="0" bIns="0" anchor="ctr">
+            <a:spAutoFit/>
+          </a:bodyPr>
+          <a:lstStyle/>
+          <a:p>
+            <a:pPr algn="l">
+              <a:lnSpc>
+                <a:spcPts val="1829"/>
+              </a:lnSpc>
+              <a:spcAft>
+                <a:spcPts val="0"/>
+              </a:spcAft>
+            </a:pPr>
+            <a:r>
+              <a:rPr sz="1550" b="1" i="0">
+                <a:solidFill>
+                  <a:srgbClr val="028090"/>
+                </a:solidFill>
+                <a:latin typeface="Arial"/>
+              </a:rPr>
+              <a:t>2</a:t>
+            </a:r>
+          </a:p>
+        </p:txBody>
+      </p:sp>
+      <p:sp>
+        <p:nvSpPr>
+          <p:cNvPr id="9" name="TextBox 8"/>
+          <p:cNvSpPr txBox="1"/>
+          <p:nvPr/>
+        </p:nvSpPr>
+        <p:spPr>
+          <a:xfrm>
+            <a:off x="1106424" y="3440988"/>
+            <a:ext cx="10360152" cy="330327"/>
+          </a:xfrm>
+          <a:prstGeom prst="rect">
+            <a:avLst/>
+          </a:prstGeom>
+          <a:noFill/>
+        </p:spPr>
+        <p:txBody>
+          <a:bodyPr wrap="square" lIns="0" rIns="0" tIns="0" bIns="0" anchor="ctr">
+            <a:spAutoFit/>
+          </a:bodyPr>
+          <a:lstStyle/>
+          <a:p>
+            <a:pPr algn="l">
+              <a:lnSpc>
+                <a:spcPts val="1593"/>
+              </a:lnSpc>
+              <a:spcAft>
+                <a:spcPts val="0"/>
+              </a:spcAft>
+            </a:pPr>
+            <a:r>
+              <a:rPr sz="1350" b="0" i="0">
+                <a:solidFill>
+                  <a:srgbClr val="141B2E"/>
+                </a:solidFill>
+                <a:latin typeface="Arial"/>
+              </a:rPr>
+              <a:t>Заявка легла в список к тому, кто обзванивает интересующихся курсами.</a:t>
+            </a:r>
+          </a:p>
+        </p:txBody>
+      </p:sp>
+      <p:sp>
+        <p:nvSpPr>
+          <p:cNvPr id="10" name="TextBox 9"/>
+          <p:cNvSpPr txBox="1"/>
+          <p:nvPr/>
+        </p:nvSpPr>
+        <p:spPr>
+          <a:xfrm>
+            <a:off x="722376" y="3771315"/>
+            <a:ext cx="329184" cy="532638"/>
+          </a:xfrm>
+          <a:prstGeom prst="rect">
+            <a:avLst/>
+          </a:prstGeom>
+          <a:noFill/>
+        </p:spPr>
+        <p:txBody>
+          <a:bodyPr wrap="square" lIns="0" rIns="0" tIns="0" bIns="0" anchor="ctr">
+            <a:spAutoFit/>
+          </a:bodyPr>
+          <a:lstStyle/>
+          <a:p>
+            <a:pPr algn="l">
+              <a:lnSpc>
+                <a:spcPts val="1829"/>
+              </a:lnSpc>
+              <a:spcAft>
+                <a:spcPts val="0"/>
+              </a:spcAft>
+            </a:pPr>
+            <a:r>
+              <a:rPr sz="1550" b="1" i="0">
+                <a:solidFill>
+                  <a:srgbClr val="028090"/>
+                </a:solidFill>
+                <a:latin typeface="Arial"/>
+              </a:rPr>
+              <a:t>3</a:t>
+            </a:r>
+          </a:p>
+        </p:txBody>
+      </p:sp>
+      <p:sp>
+        <p:nvSpPr>
+          <p:cNvPr id="11" name="TextBox 10"/>
+          <p:cNvSpPr txBox="1"/>
+          <p:nvPr/>
+        </p:nvSpPr>
+        <p:spPr>
+          <a:xfrm>
+            <a:off x="1106424" y="3771315"/>
+            <a:ext cx="10360152" cy="532638"/>
+          </a:xfrm>
+          <a:prstGeom prst="rect">
+            <a:avLst/>
+          </a:prstGeom>
+          <a:noFill/>
+        </p:spPr>
+        <p:txBody>
+          <a:bodyPr wrap="square" lIns="0" rIns="0" tIns="0" bIns="0" anchor="ctr">
+            <a:spAutoFit/>
+          </a:bodyPr>
+          <a:lstStyle/>
+          <a:p>
+            <a:pPr algn="l">
+              <a:lnSpc>
+                <a:spcPts val="1593"/>
+              </a:lnSpc>
+              <a:spcAft>
+                <a:spcPts val="0"/>
+              </a:spcAft>
+            </a:pPr>
+            <a:r>
+              <a:rPr sz="1350" b="0" i="0">
+                <a:solidFill>
+                  <a:srgbClr val="141B2E"/>
+                </a:solidFill>
+                <a:latin typeface="Arial"/>
+              </a:rPr>
+              <a:t>Он звонит, выясняет, что нужен счёт, и передаёт в бухгалтерию. Это та самая лишняя передача из кейса 1 — день.</a:t>
+            </a:r>
+          </a:p>
+        </p:txBody>
+      </p:sp>
+      <p:sp>
+        <p:nvSpPr>
+          <p:cNvPr id="12" name="TextBox 11"/>
+          <p:cNvSpPr txBox="1"/>
+          <p:nvPr/>
+        </p:nvSpPr>
+        <p:spPr>
+          <a:xfrm>
+            <a:off x="722376" y="4303953"/>
+            <a:ext cx="329184" cy="330327"/>
+          </a:xfrm>
+          <a:prstGeom prst="rect">
+            <a:avLst/>
+          </a:prstGeom>
+          <a:noFill/>
+        </p:spPr>
+        <p:txBody>
+          <a:bodyPr wrap="square" lIns="0" rIns="0" tIns="0" bIns="0" anchor="ctr">
+            <a:spAutoFit/>
+          </a:bodyPr>
+          <a:lstStyle/>
+          <a:p>
+            <a:pPr algn="l">
+              <a:lnSpc>
+                <a:spcPts val="1829"/>
+              </a:lnSpc>
+              <a:spcAft>
+                <a:spcPts val="0"/>
+              </a:spcAft>
+            </a:pPr>
+            <a:r>
+              <a:rPr sz="1550" b="1" i="0">
+                <a:solidFill>
+                  <a:srgbClr val="028090"/>
+                </a:solidFill>
+                <a:latin typeface="Arial"/>
+              </a:rPr>
+              <a:t>4</a:t>
+            </a:r>
+          </a:p>
+        </p:txBody>
+      </p:sp>
+      <p:sp>
+        <p:nvSpPr>
+          <p:cNvPr id="13" name="TextBox 12"/>
+          <p:cNvSpPr txBox="1"/>
+          <p:nvPr/>
+        </p:nvSpPr>
+        <p:spPr>
+          <a:xfrm>
+            <a:off x="1106424" y="4303953"/>
+            <a:ext cx="10360152" cy="330327"/>
+          </a:xfrm>
+          <a:prstGeom prst="rect">
+            <a:avLst/>
+          </a:prstGeom>
+          <a:noFill/>
+        </p:spPr>
+        <p:txBody>
+          <a:bodyPr wrap="square" lIns="0" rIns="0" tIns="0" bIns="0" anchor="ctr">
+            <a:spAutoFit/>
+          </a:bodyPr>
+          <a:lstStyle/>
+          <a:p>
+            <a:pPr algn="l">
+              <a:lnSpc>
+                <a:spcPts val="1593"/>
+              </a:lnSpc>
+              <a:spcAft>
+                <a:spcPts val="0"/>
+              </a:spcAft>
+            </a:pPr>
+            <a:r>
+              <a:rPr sz="1350" b="0" i="0">
+                <a:solidFill>
+                  <a:srgbClr val="141B2E"/>
+                </a:solidFill>
+                <a:latin typeface="Arial"/>
+              </a:rPr>
+              <a:t>Ольга замечает ошибку в таблице глазами. </a:t>
+            </a:r>
+            <a:r>
+              <a:rPr sz="1350" b="1" i="0">
+                <a:solidFill>
+                  <a:srgbClr val="141B2E"/>
+                </a:solidFill>
+                <a:latin typeface="Arial"/>
+              </a:rPr>
+              <a:t>И не может никуда её записать:</a:t>
+            </a:r>
+            <a:r>
+              <a:rPr sz="1350" b="0" i="0">
+                <a:solidFill>
+                  <a:srgbClr val="141B2E"/>
+                </a:solidFill>
+                <a:latin typeface="Arial"/>
+              </a:rPr>
+              <a:t> столбца для этого нет.</a:t>
+            </a:r>
+          </a:p>
+        </p:txBody>
+      </p:sp>
+      <p:sp>
+        <p:nvSpPr>
+          <p:cNvPr id="14" name="Rounded Rectangle 13"/>
+          <p:cNvSpPr/>
+          <p:nvPr/>
+        </p:nvSpPr>
+        <p:spPr>
+          <a:xfrm>
+            <a:off x="502920" y="5222290"/>
+            <a:ext cx="82296" cy="982980"/>
+          </a:xfrm>
+          <a:prstGeom prst="roundRect">
+            <a:avLst>
+              <a:gd name="adj" fmla="val 50000"/>
+            </a:avLst>
+          </a:prstGeom>
+          <a:solidFill>
+            <a:srgbClr val="F0AB00"/>
+          </a:solidFill>
+          <a:ln>
+            <a:noFill/>
+          </a:ln>
+          <a:effectLst/>
+        </p:spPr>
+        <p:style>
+          <a:lnRef idx="1">
+            <a:schemeClr val="accent1"/>
+          </a:lnRef>
+          <a:fillRef idx="3">
+            <a:schemeClr val="accent1"/>
+          </a:fillRef>
+          <a:effectRef idx="2">
+            <a:schemeClr val="accent1"/>
+          </a:effectRef>
+          <a:fontRef idx="minor">
+            <a:schemeClr val="lt1"/>
+          </a:fontRef>
+        </p:style>
+        <p:txBody>
+          <a:bodyPr rtlCol="0" anchor="ctr"/>
+          <a:lstStyle/>
+          <a:p>
+            <a:pPr algn="ctr"/>
+          </a:p>
+        </p:txBody>
+      </p:sp>
+      <p:sp>
+        <p:nvSpPr>
+          <p:cNvPr id="15" name="TextBox 14"/>
+          <p:cNvSpPr txBox="1"/>
+          <p:nvPr/>
+        </p:nvSpPr>
+        <p:spPr>
+          <a:xfrm>
+            <a:off x="859536" y="5350306"/>
+            <a:ext cx="10643616" cy="726948"/>
+          </a:xfrm>
+          <a:prstGeom prst="rect">
+            <a:avLst/>
+          </a:prstGeom>
+          <a:noFill/>
+        </p:spPr>
+        <p:txBody>
+          <a:bodyPr wrap="square" lIns="0" rIns="0" tIns="0" bIns="0" anchor="ctr">
+            <a:spAutoFit/>
+          </a:bodyPr>
+          <a:lstStyle/>
+          <a:p>
+            <a:pPr algn="l">
+              <a:lnSpc>
+                <a:spcPts val="1860"/>
+              </a:lnSpc>
+              <a:spcAft>
+                <a:spcPts val="300"/>
+              </a:spcAft>
+            </a:pPr>
+            <a:r>
+              <a:rPr sz="1500" b="1" i="0">
+                <a:solidFill>
+                  <a:srgbClr val="141B2E"/>
+                </a:solidFill>
+                <a:latin typeface="Arial"/>
+              </a:rPr>
+              <a:t>Три наших сторожа молчат, и все три правы.</a:t>
+            </a:r>
+            <a:r>
+              <a:rPr sz="1500" b="1" i="0">
+                <a:solidFill>
+                  <a:srgbClr val="141B2E"/>
+                </a:solidFill>
+                <a:latin typeface="Arial"/>
+              </a:rPr>
+              <a:t> Значение не пустое, значение из справочника, прогон зелёный. Мы научились проверять форму ответа — </a:t>
+            </a:r>
+            <a:r>
+              <a:rPr sz="1500" b="1" i="0">
+                <a:solidFill>
+                  <a:srgbClr val="141B2E"/>
+                </a:solidFill>
+                <a:latin typeface="Arial"/>
+              </a:rPr>
+              <a:t>и ни разу не проверили его смысл</a:t>
+            </a:r>
+            <a:r>
+              <a:rPr sz="1500" b="1" i="0">
+                <a:solidFill>
+                  <a:srgbClr val="141B2E"/>
+                </a:solidFill>
+                <a:latin typeface="Arial"/>
+              </a:rPr>
+              <a:t>. Хуже другое: пока ошибка нигде не отмечена, </a:t>
+            </a:r>
+            <a:r>
+              <a:rPr sz="1500" b="1" i="0">
+                <a:solidFill>
+                  <a:srgbClr val="141B2E"/>
+                </a:solidFill>
+                <a:latin typeface="Arial"/>
+              </a:rPr>
+              <a:t>мы не знаем даже, как часто она случается</a:t>
+            </a:r>
+            <a:r>
+              <a:rPr sz="1500" b="1" i="0">
+                <a:solidFill>
+                  <a:srgbClr val="141B2E"/>
+                </a:solidFill>
+                <a:latin typeface="Arial"/>
+              </a:rPr>
+              <a:t>.</a:t>
+            </a:r>
+          </a:p>
+        </p:txBody>
+      </p:sp>
+      <p:sp>
+        <p:nvSpPr>
+          <p:cNvPr id="16" name="TextBox 15"/>
           <p:cNvSpPr txBox="1"/>
           <p:nvPr/>
         </p:nvSpPr>
@@ -26737,7 +27162,7 @@
                 </a:solidFill>
                 <a:latin typeface="Arial"/>
               </a:rPr>
-              <a:t>Почему в бою работает прежняя версия</a:t>
+              <a:t>Как поднять качество распознавания</a:t>
             </a:r>
           </a:p>
         </p:txBody>
@@ -26750,7 +27175,7 @@
         </p:nvSpPr>
         <p:spPr>
           <a:xfrm>
-            <a:off x="502920" y="2080260"/>
+            <a:off x="502920" y="2113026"/>
             <a:ext cx="11183112" cy="822960"/>
           </a:xfrm>
           <a:prstGeom prst="roundRect">
@@ -26798,7 +27223,7 @@
         </p:nvSpPr>
         <p:spPr>
           <a:xfrm>
-            <a:off x="722376" y="2208276"/>
+            <a:off x="722376" y="2241042"/>
             <a:ext cx="10634472" cy="566928"/>
           </a:xfrm>
           <a:prstGeom prst="rect">
@@ -26827,7 +27252,7 @@
                 </a:solidFill>
                 <a:latin typeface="Arial"/>
               </a:rPr>
-              <a:t>Почему боевые прогоны идут по старому варианту?</a:t>
+              <a:t>Как сделать, чтобы тема определялась верно чаще?</a:t>
             </a:r>
           </a:p>
         </p:txBody>
@@ -26840,12 +27265,12 @@
         </p:nvSpPr>
         <p:spPr>
           <a:xfrm>
-            <a:off x="502920" y="3570732"/>
-            <a:ext cx="2686050" cy="1051560"/>
+            <a:off x="502920" y="3603498"/>
+            <a:ext cx="2686050" cy="1554480"/>
           </a:xfrm>
           <a:prstGeom prst="roundRect">
             <a:avLst>
-              <a:gd name="adj" fmla="val 25000"/>
+              <a:gd name="adj" fmla="val 19607"/>
             </a:avLst>
           </a:prstGeom>
           <a:solidFill>
@@ -26888,8 +27313,8 @@
         </p:nvSpPr>
         <p:spPr>
           <a:xfrm>
-            <a:off x="612648" y="3570732"/>
-            <a:ext cx="2466594" cy="1051560"/>
+            <a:off x="612648" y="3603498"/>
+            <a:ext cx="2466594" cy="1554480"/>
           </a:xfrm>
           <a:prstGeom prst="rect">
             <a:avLst/>
@@ -26904,20 +27329,20 @@
           <a:p>
             <a:pPr algn="ctr">
               <a:lnSpc>
-                <a:spcPts val="1565"/>
+                <a:spcPts val="1739"/>
               </a:lnSpc>
               <a:spcAft>
                 <a:spcPts val="0"/>
               </a:spcAft>
             </a:pPr>
             <a:r>
-              <a:rPr sz="1350" b="1" i="0">
-                <a:solidFill>
-                  <a:srgbClr val="141B2E"/>
-                </a:solidFill>
-                <a:latin typeface="Arial"/>
-              </a:rPr>
-              <a:t>правку не сохранили</a:t>
+              <a:rPr sz="1500" b="1" i="0">
+                <a:solidFill>
+                  <a:srgbClr val="141B2E"/>
+                </a:solidFill>
+                <a:latin typeface="Arial"/>
+              </a:rPr>
+              <a:t>усилить запрос</a:t>
             </a:r>
           </a:p>
         </p:txBody>
@@ -26930,12 +27355,12 @@
         </p:nvSpPr>
         <p:spPr>
           <a:xfrm>
-            <a:off x="3335274" y="3570732"/>
-            <a:ext cx="2686050" cy="1051560"/>
+            <a:off x="3335274" y="3603498"/>
+            <a:ext cx="2686050" cy="1554480"/>
           </a:xfrm>
           <a:prstGeom prst="roundRect">
             <a:avLst>
-              <a:gd name="adj" fmla="val 25000"/>
+              <a:gd name="adj" fmla="val 19607"/>
             </a:avLst>
           </a:prstGeom>
           <a:solidFill>
@@ -26978,8 +27403,8 @@
         </p:nvSpPr>
         <p:spPr>
           <a:xfrm>
-            <a:off x="3445002" y="3570732"/>
-            <a:ext cx="2466594" cy="1051560"/>
+            <a:off x="3445002" y="3603498"/>
+            <a:ext cx="2466594" cy="1554480"/>
           </a:xfrm>
           <a:prstGeom prst="rect">
             <a:avLst/>
@@ -26994,20 +27419,20 @@
           <a:p>
             <a:pPr algn="ctr">
               <a:lnSpc>
-                <a:spcPts val="1565"/>
+                <a:spcPts val="1739"/>
               </a:lnSpc>
               <a:spcAft>
                 <a:spcPts val="0"/>
               </a:spcAft>
             </a:pPr>
             <a:r>
-              <a:rPr sz="1350" b="1" i="0">
-                <a:solidFill>
-                  <a:srgbClr val="141B2E"/>
-                </a:solidFill>
-                <a:latin typeface="Arial"/>
-              </a:rPr>
-              <a:t>сохранили, но не опубликовали</a:t>
+              <a:rPr sz="1500" b="1" i="0">
+                <a:solidFill>
+                  <a:srgbClr val="141B2E"/>
+                </a:solidFill>
+                <a:latin typeface="Arial"/>
+              </a:rPr>
+              <a:t>вторая модель проверяет первую</a:t>
             </a:r>
           </a:p>
         </p:txBody>
@@ -27020,12 +27445,12 @@
         </p:nvSpPr>
         <p:spPr>
           <a:xfrm>
-            <a:off x="6167628" y="3570732"/>
-            <a:ext cx="2686050" cy="1051560"/>
+            <a:off x="6167628" y="3603498"/>
+            <a:ext cx="2686050" cy="1554480"/>
           </a:xfrm>
           <a:prstGeom prst="roundRect">
             <a:avLst>
-              <a:gd name="adj" fmla="val 25000"/>
+              <a:gd name="adj" fmla="val 19607"/>
             </a:avLst>
           </a:prstGeom>
           <a:solidFill>
@@ -27068,8 +27493,8 @@
         </p:nvSpPr>
         <p:spPr>
           <a:xfrm>
-            <a:off x="6277356" y="3570732"/>
-            <a:ext cx="2466594" cy="1051560"/>
+            <a:off x="6277356" y="3603498"/>
+            <a:ext cx="2466594" cy="1554480"/>
           </a:xfrm>
           <a:prstGeom prst="rect">
             <a:avLst/>
@@ -27084,20 +27509,20 @@
           <a:p>
             <a:pPr algn="ctr">
               <a:lnSpc>
-                <a:spcPts val="1565"/>
+                <a:spcPts val="1739"/>
               </a:lnSpc>
               <a:spcAft>
                 <a:spcPts val="0"/>
               </a:spcAft>
             </a:pPr>
             <a:r>
-              <a:rPr sz="1350" b="1" i="0">
-                <a:solidFill>
-                  <a:srgbClr val="141B2E"/>
-                </a:solidFill>
-                <a:latin typeface="Arial"/>
-              </a:rPr>
-              <a:t>кэш, надо подождать</a:t>
+              <a:rPr sz="1500" b="1" i="0">
+                <a:solidFill>
+                  <a:srgbClr val="141B2E"/>
+                </a:solidFill>
+                <a:latin typeface="Arial"/>
+              </a:rPr>
+              <a:t>алгоритмические правила поверх</a:t>
             </a:r>
           </a:p>
         </p:txBody>
@@ -27110,12 +27535,12 @@
         </p:nvSpPr>
         <p:spPr>
           <a:xfrm>
-            <a:off x="8999982" y="3570732"/>
-            <a:ext cx="2686050" cy="1051560"/>
+            <a:off x="8999982" y="3603498"/>
+            <a:ext cx="2686050" cy="1554480"/>
           </a:xfrm>
           <a:prstGeom prst="roundRect">
             <a:avLst>
-              <a:gd name="adj" fmla="val 25000"/>
+              <a:gd name="adj" fmla="val 19607"/>
             </a:avLst>
           </a:prstGeom>
           <a:solidFill>
@@ -27158,8 +27583,8 @@
         </p:nvSpPr>
         <p:spPr>
           <a:xfrm>
-            <a:off x="9109710" y="3570732"/>
-            <a:ext cx="2466594" cy="1051560"/>
+            <a:off x="9109710" y="3603498"/>
+            <a:ext cx="2466594" cy="1554480"/>
           </a:xfrm>
           <a:prstGeom prst="rect">
             <a:avLst/>
@@ -27174,20 +27599,20 @@
           <a:p>
             <a:pPr algn="ctr">
               <a:lnSpc>
-                <a:spcPts val="1565"/>
+                <a:spcPts val="1739"/>
               </a:lnSpc>
               <a:spcAft>
                 <a:spcPts val="0"/>
               </a:spcAft>
             </a:pPr>
             <a:r>
-              <a:rPr sz="1350" b="1" i="0">
-                <a:solidFill>
-                  <a:srgbClr val="141B2E"/>
-                </a:solidFill>
-                <a:latin typeface="Arial"/>
-              </a:rPr>
-              <a:t>ручной и боевой — разные пути</a:t>
+              <a:rPr sz="1500" b="1" i="0">
+                <a:solidFill>
+                  <a:srgbClr val="141B2E"/>
+                </a:solidFill>
+                <a:latin typeface="Arial"/>
+              </a:rPr>
+              <a:t>модель помощнее</a:t>
             </a:r>
           </a:p>
         </p:txBody>
@@ -27297,45 +27722,867 @@
                 </a:solidFill>
                 <a:latin typeface="Arial"/>
               </a:rPr>
-              <a:t>Где это видно на экране</a:t>
-            </a:r>
-          </a:p>
-        </p:txBody>
-      </p:sp>
-      <p:pic>
-        <p:nvPicPr>
-          <p:cNvPr id="3" name="Picture 2" descr="obzor-k4.png"/>
-          <p:cNvPicPr>
-            <a:picLocks noChangeAspect="1"/>
-          </p:cNvPicPr>
-          <p:nvPr/>
-        </p:nvPicPr>
-        <p:blipFill>
-          <a:blip r:embed="rId2"/>
-          <a:stretch>
-            <a:fillRect/>
-          </a:stretch>
-        </p:blipFill>
-        <p:spPr>
-          <a:xfrm>
-            <a:off x="502920" y="1324959"/>
-            <a:ext cx="11183112" cy="3252231"/>
-          </a:xfrm>
-          <a:prstGeom prst="rect">
-            <a:avLst/>
-          </a:prstGeom>
-        </p:spPr>
-      </p:pic>
-      <p:sp>
-        <p:nvSpPr>
-          <p:cNvPr id="4" name="Rounded Rectangle 3"/>
+              <a:t>Что даёт каждый способ</a:t>
+            </a:r>
+          </a:p>
+        </p:txBody>
+      </p:sp>
+      <p:sp>
+        <p:nvSpPr>
+          <p:cNvPr id="3" name="Rounded Rectangle 2"/>
           <p:cNvSpPr/>
           <p:nvPr/>
         </p:nvSpPr>
         <p:spPr>
           <a:xfrm>
-            <a:off x="502920" y="5244702"/>
-            <a:ext cx="82296" cy="510540"/>
+            <a:off x="502920" y="993504"/>
+            <a:ext cx="11183112" cy="2949257"/>
+          </a:xfrm>
+          <a:prstGeom prst="roundRect">
+            <a:avLst>
+              <a:gd name="adj" fmla="val 10334"/>
+            </a:avLst>
+          </a:prstGeom>
+          <a:solidFill>
+            <a:srgbClr val="FFFFFF"/>
+          </a:solidFill>
+          <a:ln w="17780">
+            <a:solidFill>
+              <a:srgbClr val="1C7293"/>
+            </a:solidFill>
+          </a:ln>
+          <a:effectLst/>
+        </p:spPr>
+        <p:style>
+          <a:lnRef idx="1">
+            <a:schemeClr val="accent1"/>
+          </a:lnRef>
+          <a:fillRef idx="3">
+            <a:schemeClr val="accent1"/>
+          </a:fillRef>
+          <a:effectRef idx="2">
+            <a:schemeClr val="accent1"/>
+          </a:effectRef>
+          <a:fontRef idx="minor">
+            <a:schemeClr val="lt1"/>
+          </a:fontRef>
+        </p:style>
+        <p:txBody>
+          <a:bodyPr rtlCol="0" anchor="ctr"/>
+          <a:lstStyle/>
+          <a:p>
+            <a:pPr algn="ctr"/>
+          </a:p>
+        </p:txBody>
+      </p:sp>
+      <p:sp>
+        <p:nvSpPr>
+          <p:cNvPr id="4" name="TextBox 3"/>
+          <p:cNvSpPr txBox="1"/>
+          <p:nvPr/>
+        </p:nvSpPr>
+        <p:spPr>
+          <a:xfrm>
+            <a:off x="685800" y="1176384"/>
+            <a:ext cx="1510718" cy="282067"/>
+          </a:xfrm>
+          <a:prstGeom prst="rect">
+            <a:avLst/>
+          </a:prstGeom>
+          <a:noFill/>
+        </p:spPr>
+        <p:txBody>
+          <a:bodyPr wrap="square" lIns="0" rIns="0" tIns="0" bIns="0" anchor="t">
+            <a:spAutoFit/>
+          </a:bodyPr>
+          <a:lstStyle/>
+          <a:p>
+            <a:pPr algn="l">
+              <a:lnSpc>
+                <a:spcPts val="1265"/>
+              </a:lnSpc>
+              <a:spcAft>
+                <a:spcPts val="0"/>
+              </a:spcAft>
+            </a:pPr>
+            <a:r>
+              <a:rPr sz="1150" b="1" i="0">
+                <a:solidFill>
+                  <a:srgbClr val="6B7685"/>
+                </a:solidFill>
+                <a:latin typeface="Arial"/>
+              </a:rPr>
+              <a:t>СПОСОБ</a:t>
+            </a:r>
+          </a:p>
+        </p:txBody>
+      </p:sp>
+      <p:sp>
+        <p:nvSpPr>
+          <p:cNvPr id="5" name="TextBox 4"/>
+          <p:cNvSpPr txBox="1"/>
+          <p:nvPr/>
+        </p:nvSpPr>
+        <p:spPr>
+          <a:xfrm>
+            <a:off x="2342822" y="1176384"/>
+            <a:ext cx="4005985" cy="282067"/>
+          </a:xfrm>
+          <a:prstGeom prst="rect">
+            <a:avLst/>
+          </a:prstGeom>
+          <a:noFill/>
+        </p:spPr>
+        <p:txBody>
+          <a:bodyPr wrap="square" lIns="0" rIns="0" tIns="0" bIns="0" anchor="t">
+            <a:spAutoFit/>
+          </a:bodyPr>
+          <a:lstStyle/>
+          <a:p>
+            <a:pPr algn="l">
+              <a:lnSpc>
+                <a:spcPts val="1265"/>
+              </a:lnSpc>
+              <a:spcAft>
+                <a:spcPts val="0"/>
+              </a:spcAft>
+            </a:pPr>
+            <a:r>
+              <a:rPr sz="1150" b="1" i="0">
+                <a:solidFill>
+                  <a:srgbClr val="6B7685"/>
+                </a:solidFill>
+                <a:latin typeface="Arial"/>
+              </a:rPr>
+              <a:t>ЧТО ДАЁТ</a:t>
+            </a:r>
+          </a:p>
+        </p:txBody>
+      </p:sp>
+      <p:sp>
+        <p:nvSpPr>
+          <p:cNvPr id="6" name="TextBox 5"/>
+          <p:cNvSpPr txBox="1"/>
+          <p:nvPr/>
+        </p:nvSpPr>
+        <p:spPr>
+          <a:xfrm>
+            <a:off x="6495112" y="1176384"/>
+            <a:ext cx="4861735" cy="282067"/>
+          </a:xfrm>
+          <a:prstGeom prst="rect">
+            <a:avLst/>
+          </a:prstGeom>
+          <a:noFill/>
+        </p:spPr>
+        <p:txBody>
+          <a:bodyPr wrap="square" lIns="0" rIns="0" tIns="0" bIns="0" anchor="t">
+            <a:spAutoFit/>
+          </a:bodyPr>
+          <a:lstStyle/>
+          <a:p>
+            <a:pPr algn="l">
+              <a:lnSpc>
+                <a:spcPts val="1265"/>
+              </a:lnSpc>
+              <a:spcAft>
+                <a:spcPts val="0"/>
+              </a:spcAft>
+            </a:pPr>
+            <a:r>
+              <a:rPr sz="1150" b="1" i="0">
+                <a:solidFill>
+                  <a:srgbClr val="6B7685"/>
+                </a:solidFill>
+                <a:latin typeface="Arial"/>
+              </a:rPr>
+              <a:t>ЧЕМ ПЛАТИМ</a:t>
+            </a:r>
+          </a:p>
+        </p:txBody>
+      </p:sp>
+      <p:sp>
+        <p:nvSpPr>
+          <p:cNvPr id="7" name="TextBox 6"/>
+          <p:cNvSpPr txBox="1"/>
+          <p:nvPr/>
+        </p:nvSpPr>
+        <p:spPr>
+          <a:xfrm>
+            <a:off x="685800" y="1458451"/>
+            <a:ext cx="1510718" cy="529717"/>
+          </a:xfrm>
+          <a:prstGeom prst="rect">
+            <a:avLst/>
+          </a:prstGeom>
+          <a:noFill/>
+        </p:spPr>
+        <p:txBody>
+          <a:bodyPr wrap="square" lIns="0" rIns="0" tIns="0" bIns="0" anchor="ctr">
+            <a:spAutoFit/>
+          </a:bodyPr>
+          <a:lstStyle/>
+          <a:p>
+            <a:pPr algn="l">
+              <a:lnSpc>
+                <a:spcPts val="1437"/>
+              </a:lnSpc>
+              <a:spcAft>
+                <a:spcPts val="0"/>
+              </a:spcAft>
+            </a:pPr>
+            <a:r>
+              <a:rPr sz="1250" b="1" i="0">
+                <a:solidFill>
+                  <a:srgbClr val="141B2E"/>
+                </a:solidFill>
+                <a:latin typeface="Arial"/>
+              </a:rPr>
+              <a:t>усилить запрос</a:t>
+            </a:r>
+          </a:p>
+        </p:txBody>
+      </p:sp>
+      <p:sp>
+        <p:nvSpPr>
+          <p:cNvPr id="8" name="TextBox 7"/>
+          <p:cNvSpPr txBox="1"/>
+          <p:nvPr/>
+        </p:nvSpPr>
+        <p:spPr>
+          <a:xfrm>
+            <a:off x="2342822" y="1458451"/>
+            <a:ext cx="4005985" cy="529717"/>
+          </a:xfrm>
+          <a:prstGeom prst="rect">
+            <a:avLst/>
+          </a:prstGeom>
+          <a:noFill/>
+        </p:spPr>
+        <p:txBody>
+          <a:bodyPr wrap="square" lIns="0" rIns="0" tIns="0" bIns="0" anchor="ctr">
+            <a:spAutoFit/>
+          </a:bodyPr>
+          <a:lstStyle/>
+          <a:p>
+            <a:pPr algn="l">
+              <a:lnSpc>
+                <a:spcPts val="1437"/>
+              </a:lnSpc>
+              <a:spcAft>
+                <a:spcPts val="0"/>
+              </a:spcAft>
+            </a:pPr>
+            <a:r>
+              <a:rPr sz="1250" b="1" i="0">
+                <a:solidFill>
+                  <a:srgbClr val="141B2E"/>
+                </a:solidFill>
+                <a:latin typeface="Arial"/>
+              </a:rPr>
+              <a:t>+5–12 п.п.</a:t>
+            </a:r>
+            <a:r>
+              <a:rPr sz="1250" b="0" i="0">
+                <a:solidFill>
+                  <a:srgbClr val="141B2E"/>
+                </a:solidFill>
+                <a:latin typeface="Arial"/>
+              </a:rPr>
+              <a:t> от примеров: 0,35 без примеров → 0,41 на двенадцати, лучшая сборка 0,48</a:t>
+            </a:r>
+          </a:p>
+        </p:txBody>
+      </p:sp>
+      <p:sp>
+        <p:nvSpPr>
+          <p:cNvPr id="9" name="TextBox 8"/>
+          <p:cNvSpPr txBox="1"/>
+          <p:nvPr/>
+        </p:nvSpPr>
+        <p:spPr>
+          <a:xfrm>
+            <a:off x="6495112" y="1458451"/>
+            <a:ext cx="4861735" cy="529717"/>
+          </a:xfrm>
+          <a:prstGeom prst="rect">
+            <a:avLst/>
+          </a:prstGeom>
+          <a:noFill/>
+        </p:spPr>
+        <p:txBody>
+          <a:bodyPr wrap="square" lIns="0" rIns="0" tIns="0" bIns="0" anchor="ctr">
+            <a:spAutoFit/>
+          </a:bodyPr>
+          <a:lstStyle/>
+          <a:p>
+            <a:pPr algn="l">
+              <a:lnSpc>
+                <a:spcPts val="1437"/>
+              </a:lnSpc>
+              <a:spcAft>
+                <a:spcPts val="0"/>
+              </a:spcAft>
+            </a:pPr>
+            <a:r>
+              <a:rPr sz="1250" b="0" i="0">
+                <a:solidFill>
+                  <a:srgbClr val="141B2E"/>
+                </a:solidFill>
+                <a:latin typeface="Arial"/>
+              </a:rPr>
+              <a:t>час работы один раз; запрос становится длиннее, и его надо держать в порядке</a:t>
+            </a:r>
+          </a:p>
+        </p:txBody>
+      </p:sp>
+      <p:cxnSp>
+        <p:nvCxnSpPr>
+          <p:cNvPr id="10" name="Connector 9"/>
+          <p:cNvCxnSpPr/>
+          <p:nvPr/>
+        </p:nvCxnSpPr>
+        <p:spPr>
+          <a:xfrm>
+            <a:off x="685800" y="1988168"/>
+            <a:ext cx="10817352" cy="0"/>
+          </a:xfrm>
+          <a:prstGeom prst="line">
+            <a:avLst/>
+          </a:prstGeom>
+          <a:ln w="9525">
+            <a:solidFill>
+              <a:srgbClr val="E5EAF0"/>
+            </a:solidFill>
+          </a:ln>
+        </p:spPr>
+        <p:style>
+          <a:lnRef idx="2">
+            <a:schemeClr val="accent1"/>
+          </a:lnRef>
+          <a:fillRef idx="0">
+            <a:schemeClr val="accent1"/>
+          </a:fillRef>
+          <a:effectRef idx="1">
+            <a:schemeClr val="accent1"/>
+          </a:effectRef>
+          <a:fontRef idx="minor">
+            <a:schemeClr val="tx1"/>
+          </a:fontRef>
+        </p:style>
+      </p:cxnSp>
+      <p:sp>
+        <p:nvSpPr>
+          <p:cNvPr id="11" name="TextBox 10"/>
+          <p:cNvSpPr txBox="1"/>
+          <p:nvPr/>
+        </p:nvSpPr>
+        <p:spPr>
+          <a:xfrm>
+            <a:off x="685800" y="1988168"/>
+            <a:ext cx="1510718" cy="712279"/>
+          </a:xfrm>
+          <a:prstGeom prst="rect">
+            <a:avLst/>
+          </a:prstGeom>
+          <a:noFill/>
+        </p:spPr>
+        <p:txBody>
+          <a:bodyPr wrap="square" lIns="0" rIns="0" tIns="0" bIns="0" anchor="ctr">
+            <a:spAutoFit/>
+          </a:bodyPr>
+          <a:lstStyle/>
+          <a:p>
+            <a:pPr algn="l">
+              <a:lnSpc>
+                <a:spcPts val="1437"/>
+              </a:lnSpc>
+              <a:spcAft>
+                <a:spcPts val="0"/>
+              </a:spcAft>
+            </a:pPr>
+            <a:r>
+              <a:rPr sz="1250" b="1" i="0">
+                <a:solidFill>
+                  <a:srgbClr val="141B2E"/>
+                </a:solidFill>
+                <a:latin typeface="Arial"/>
+              </a:rPr>
+              <a:t>вторая модель проверяет первую</a:t>
+            </a:r>
+          </a:p>
+        </p:txBody>
+      </p:sp>
+      <p:sp>
+        <p:nvSpPr>
+          <p:cNvPr id="12" name="TextBox 11"/>
+          <p:cNvSpPr txBox="1"/>
+          <p:nvPr/>
+        </p:nvSpPr>
+        <p:spPr>
+          <a:xfrm>
+            <a:off x="2342822" y="1988168"/>
+            <a:ext cx="4005985" cy="712279"/>
+          </a:xfrm>
+          <a:prstGeom prst="rect">
+            <a:avLst/>
+          </a:prstGeom>
+          <a:noFill/>
+        </p:spPr>
+        <p:txBody>
+          <a:bodyPr wrap="square" lIns="0" rIns="0" tIns="0" bIns="0" anchor="ctr">
+            <a:spAutoFit/>
+          </a:bodyPr>
+          <a:lstStyle/>
+          <a:p>
+            <a:pPr algn="l">
+              <a:lnSpc>
+                <a:spcPts val="1437"/>
+              </a:lnSpc>
+              <a:spcAft>
+                <a:spcPts val="0"/>
+              </a:spcAft>
+            </a:pPr>
+            <a:r>
+              <a:rPr sz="1250" b="1" i="0">
+                <a:solidFill>
+                  <a:srgbClr val="141B2E"/>
+                </a:solidFill>
+                <a:latin typeface="Arial"/>
+              </a:rPr>
+              <a:t>0,57 → 0,61</a:t>
+            </a:r>
+            <a:r>
+              <a:rPr sz="1250" b="0" i="0">
+                <a:solidFill>
+                  <a:srgbClr val="141B2E"/>
+                </a:solidFill>
+                <a:latin typeface="Arial"/>
+              </a:rPr>
+              <a:t> у разбора четырьмя запросами с голосованием; ловит разовые срывы</a:t>
+            </a:r>
+          </a:p>
+        </p:txBody>
+      </p:sp>
+      <p:sp>
+        <p:nvSpPr>
+          <p:cNvPr id="13" name="TextBox 12"/>
+          <p:cNvSpPr txBox="1"/>
+          <p:nvPr/>
+        </p:nvSpPr>
+        <p:spPr>
+          <a:xfrm>
+            <a:off x="6495112" y="1988168"/>
+            <a:ext cx="4861735" cy="712279"/>
+          </a:xfrm>
+          <a:prstGeom prst="rect">
+            <a:avLst/>
+          </a:prstGeom>
+          <a:noFill/>
+        </p:spPr>
+        <p:txBody>
+          <a:bodyPr wrap="square" lIns="0" rIns="0" tIns="0" bIns="0" anchor="ctr">
+            <a:spAutoFit/>
+          </a:bodyPr>
+          <a:lstStyle/>
+          <a:p>
+            <a:pPr algn="l">
+              <a:lnSpc>
+                <a:spcPts val="1437"/>
+              </a:lnSpc>
+              <a:spcAft>
+                <a:spcPts val="0"/>
+              </a:spcAft>
+            </a:pPr>
+            <a:r>
+              <a:rPr sz="1250" b="0" i="0">
+                <a:solidFill>
+                  <a:srgbClr val="141B2E"/>
+                </a:solidFill>
+                <a:latin typeface="Arial"/>
+              </a:rPr>
+              <a:t>каждый прогон вдвое дороже и вдвое дольше; расхождение двух моделей надо как-то разрешать</a:t>
+            </a:r>
+          </a:p>
+        </p:txBody>
+      </p:sp>
+      <p:cxnSp>
+        <p:nvCxnSpPr>
+          <p:cNvPr id="14" name="Connector 13"/>
+          <p:cNvCxnSpPr/>
+          <p:nvPr/>
+        </p:nvCxnSpPr>
+        <p:spPr>
+          <a:xfrm>
+            <a:off x="685800" y="2700447"/>
+            <a:ext cx="10817352" cy="0"/>
+          </a:xfrm>
+          <a:prstGeom prst="line">
+            <a:avLst/>
+          </a:prstGeom>
+          <a:ln w="9525">
+            <a:solidFill>
+              <a:srgbClr val="E5EAF0"/>
+            </a:solidFill>
+          </a:ln>
+        </p:spPr>
+        <p:style>
+          <a:lnRef idx="2">
+            <a:schemeClr val="accent1"/>
+          </a:lnRef>
+          <a:fillRef idx="0">
+            <a:schemeClr val="accent1"/>
+          </a:fillRef>
+          <a:effectRef idx="1">
+            <a:schemeClr val="accent1"/>
+          </a:effectRef>
+          <a:fontRef idx="minor">
+            <a:schemeClr val="tx1"/>
+          </a:fontRef>
+        </p:style>
+      </p:cxnSp>
+      <p:sp>
+        <p:nvSpPr>
+          <p:cNvPr id="15" name="TextBox 14"/>
+          <p:cNvSpPr txBox="1"/>
+          <p:nvPr/>
+        </p:nvSpPr>
+        <p:spPr>
+          <a:xfrm>
+            <a:off x="685800" y="2700447"/>
+            <a:ext cx="1510718" cy="529717"/>
+          </a:xfrm>
+          <a:prstGeom prst="rect">
+            <a:avLst/>
+          </a:prstGeom>
+          <a:noFill/>
+        </p:spPr>
+        <p:txBody>
+          <a:bodyPr wrap="square" lIns="0" rIns="0" tIns="0" bIns="0" anchor="ctr">
+            <a:spAutoFit/>
+          </a:bodyPr>
+          <a:lstStyle/>
+          <a:p>
+            <a:pPr algn="l">
+              <a:lnSpc>
+                <a:spcPts val="1437"/>
+              </a:lnSpc>
+              <a:spcAft>
+                <a:spcPts val="0"/>
+              </a:spcAft>
+            </a:pPr>
+            <a:r>
+              <a:rPr sz="1250" b="1" i="0">
+                <a:solidFill>
+                  <a:srgbClr val="141B2E"/>
+                </a:solidFill>
+                <a:latin typeface="Arial"/>
+              </a:rPr>
+              <a:t>алгоритмические правила поверх</a:t>
+            </a:r>
+          </a:p>
+        </p:txBody>
+      </p:sp>
+      <p:sp>
+        <p:nvSpPr>
+          <p:cNvPr id="16" name="TextBox 15"/>
+          <p:cNvSpPr txBox="1"/>
+          <p:nvPr/>
+        </p:nvSpPr>
+        <p:spPr>
+          <a:xfrm>
+            <a:off x="2342822" y="2700447"/>
+            <a:ext cx="4005985" cy="529717"/>
+          </a:xfrm>
+          <a:prstGeom prst="rect">
+            <a:avLst/>
+          </a:prstGeom>
+          <a:noFill/>
+        </p:spPr>
+        <p:txBody>
+          <a:bodyPr wrap="square" lIns="0" rIns="0" tIns="0" bIns="0" anchor="ctr">
+            <a:spAutoFit/>
+          </a:bodyPr>
+          <a:lstStyle/>
+          <a:p>
+            <a:pPr algn="l">
+              <a:lnSpc>
+                <a:spcPts val="1437"/>
+              </a:lnSpc>
+              <a:spcAft>
+                <a:spcPts val="0"/>
+              </a:spcAft>
+            </a:pPr>
+            <a:r>
+              <a:rPr sz="1250" b="1" i="0">
+                <a:solidFill>
+                  <a:srgbClr val="141B2E"/>
+                </a:solidFill>
+                <a:latin typeface="Arial"/>
+              </a:rPr>
+              <a:t>+2–3 п.п.</a:t>
+            </a:r>
+            <a:r>
+              <a:rPr sz="1250" b="0" i="0">
+                <a:solidFill>
+                  <a:srgbClr val="141B2E"/>
+                </a:solidFill>
+                <a:latin typeface="Arial"/>
+              </a:rPr>
+              <a:t> точно и предсказуемо: «есть слово „счёт“ или „ООО“ — тема </a:t>
+            </a:r>
+            <a:r>
+              <a:rPr sz="1250" b="0" i="0">
+                <a:solidFill>
+                  <a:srgbClr val="141B2E"/>
+                </a:solidFill>
+                <a:latin typeface="Consolas"/>
+              </a:rPr>
+              <a:t>оплата</a:t>
+            </a:r>
+            <a:r>
+              <a:rPr sz="1250" b="0" i="0">
+                <a:solidFill>
+                  <a:srgbClr val="141B2E"/>
+                </a:solidFill>
+                <a:latin typeface="Arial"/>
+              </a:rPr>
+              <a:t>»</a:t>
+            </a:r>
+          </a:p>
+        </p:txBody>
+      </p:sp>
+      <p:sp>
+        <p:nvSpPr>
+          <p:cNvPr id="17" name="TextBox 16"/>
+          <p:cNvSpPr txBox="1"/>
+          <p:nvPr/>
+        </p:nvSpPr>
+        <p:spPr>
+          <a:xfrm>
+            <a:off x="6495112" y="2700447"/>
+            <a:ext cx="4861735" cy="529717"/>
+          </a:xfrm>
+          <a:prstGeom prst="rect">
+            <a:avLst/>
+          </a:prstGeom>
+          <a:noFill/>
+        </p:spPr>
+        <p:txBody>
+          <a:bodyPr wrap="square" lIns="0" rIns="0" tIns="0" bIns="0" anchor="ctr">
+            <a:spAutoFit/>
+          </a:bodyPr>
+          <a:lstStyle/>
+          <a:p>
+            <a:pPr algn="l">
+              <a:lnSpc>
+                <a:spcPts val="1437"/>
+              </a:lnSpc>
+              <a:spcAft>
+                <a:spcPts val="0"/>
+              </a:spcAft>
+            </a:pPr>
+            <a:r>
+              <a:rPr sz="1250" b="0" i="0">
+                <a:solidFill>
+                  <a:srgbClr val="141B2E"/>
+                </a:solidFill>
+                <a:latin typeface="Arial"/>
+              </a:rPr>
+              <a:t>правил становится много, они начинают противоречить друг другу, и живой язык всё равно шире</a:t>
+            </a:r>
+          </a:p>
+        </p:txBody>
+      </p:sp>
+      <p:cxnSp>
+        <p:nvCxnSpPr>
+          <p:cNvPr id="18" name="Connector 17"/>
+          <p:cNvCxnSpPr/>
+          <p:nvPr/>
+        </p:nvCxnSpPr>
+        <p:spPr>
+          <a:xfrm>
+            <a:off x="685800" y="3230164"/>
+            <a:ext cx="10817352" cy="0"/>
+          </a:xfrm>
+          <a:prstGeom prst="line">
+            <a:avLst/>
+          </a:prstGeom>
+          <a:ln w="9525">
+            <a:solidFill>
+              <a:srgbClr val="E5EAF0"/>
+            </a:solidFill>
+          </a:ln>
+        </p:spPr>
+        <p:style>
+          <a:lnRef idx="2">
+            <a:schemeClr val="accent1"/>
+          </a:lnRef>
+          <a:fillRef idx="0">
+            <a:schemeClr val="accent1"/>
+          </a:fillRef>
+          <a:effectRef idx="1">
+            <a:schemeClr val="accent1"/>
+          </a:effectRef>
+          <a:fontRef idx="minor">
+            <a:schemeClr val="tx1"/>
+          </a:fontRef>
+        </p:style>
+      </p:cxnSp>
+      <p:sp>
+        <p:nvSpPr>
+          <p:cNvPr id="19" name="TextBox 18"/>
+          <p:cNvSpPr txBox="1"/>
+          <p:nvPr/>
+        </p:nvSpPr>
+        <p:spPr>
+          <a:xfrm>
+            <a:off x="685800" y="3230164"/>
+            <a:ext cx="1510718" cy="529717"/>
+          </a:xfrm>
+          <a:prstGeom prst="rect">
+            <a:avLst/>
+          </a:prstGeom>
+          <a:noFill/>
+        </p:spPr>
+        <p:txBody>
+          <a:bodyPr wrap="square" lIns="0" rIns="0" tIns="0" bIns="0" anchor="ctr">
+            <a:spAutoFit/>
+          </a:bodyPr>
+          <a:lstStyle/>
+          <a:p>
+            <a:pPr algn="l">
+              <a:lnSpc>
+                <a:spcPts val="1437"/>
+              </a:lnSpc>
+              <a:spcAft>
+                <a:spcPts val="0"/>
+              </a:spcAft>
+            </a:pPr>
+            <a:r>
+              <a:rPr sz="1250" b="1" i="0">
+                <a:solidFill>
+                  <a:srgbClr val="141B2E"/>
+                </a:solidFill>
+                <a:latin typeface="Arial"/>
+              </a:rPr>
+              <a:t>модель помощнее</a:t>
+            </a:r>
+          </a:p>
+        </p:txBody>
+      </p:sp>
+      <p:sp>
+        <p:nvSpPr>
+          <p:cNvPr id="20" name="TextBox 19"/>
+          <p:cNvSpPr txBox="1"/>
+          <p:nvPr/>
+        </p:nvSpPr>
+        <p:spPr>
+          <a:xfrm>
+            <a:off x="2342822" y="3230164"/>
+            <a:ext cx="4005985" cy="529717"/>
+          </a:xfrm>
+          <a:prstGeom prst="rect">
+            <a:avLst/>
+          </a:prstGeom>
+          <a:noFill/>
+        </p:spPr>
+        <p:txBody>
+          <a:bodyPr wrap="square" lIns="0" rIns="0" tIns="0" bIns="0" anchor="ctr">
+            <a:spAutoFit/>
+          </a:bodyPr>
+          <a:lstStyle/>
+          <a:p>
+            <a:pPr algn="l">
+              <a:lnSpc>
+                <a:spcPts val="1437"/>
+              </a:lnSpc>
+              <a:spcAft>
+                <a:spcPts val="0"/>
+              </a:spcAft>
+            </a:pPr>
+            <a:r>
+              <a:rPr sz="1250" b="0" i="0">
+                <a:solidFill>
+                  <a:srgbClr val="141B2E"/>
+                </a:solidFill>
+                <a:latin typeface="Arial"/>
+              </a:rPr>
+              <a:t>обычно заметно лучше на длинном и запутанном тексте</a:t>
+            </a:r>
+          </a:p>
+        </p:txBody>
+      </p:sp>
+      <p:sp>
+        <p:nvSpPr>
+          <p:cNvPr id="21" name="TextBox 20"/>
+          <p:cNvSpPr txBox="1"/>
+          <p:nvPr/>
+        </p:nvSpPr>
+        <p:spPr>
+          <a:xfrm>
+            <a:off x="6495112" y="3230164"/>
+            <a:ext cx="4861735" cy="529717"/>
+          </a:xfrm>
+          <a:prstGeom prst="rect">
+            <a:avLst/>
+          </a:prstGeom>
+          <a:noFill/>
+        </p:spPr>
+        <p:txBody>
+          <a:bodyPr wrap="square" lIns="0" rIns="0" tIns="0" bIns="0" anchor="ctr">
+            <a:spAutoFit/>
+          </a:bodyPr>
+          <a:lstStyle/>
+          <a:p>
+            <a:pPr algn="l">
+              <a:lnSpc>
+                <a:spcPts val="1437"/>
+              </a:lnSpc>
+              <a:spcAft>
+                <a:spcPts val="0"/>
+              </a:spcAft>
+            </a:pPr>
+            <a:r>
+              <a:rPr sz="1250" b="0" i="0">
+                <a:solidFill>
+                  <a:srgbClr val="141B2E"/>
+                </a:solidFill>
+                <a:latin typeface="Arial"/>
+              </a:rPr>
+              <a:t>платите на </a:t>
+            </a:r>
+            <a:r>
+              <a:rPr sz="1250" b="1" i="0">
+                <a:solidFill>
+                  <a:srgbClr val="141B2E"/>
+                </a:solidFill>
+                <a:latin typeface="Arial"/>
+              </a:rPr>
+              <a:t>каждом</a:t>
+            </a:r>
+            <a:r>
+              <a:rPr sz="1250" b="0" i="0">
+                <a:solidFill>
+                  <a:srgbClr val="141B2E"/>
+                </a:solidFill>
+                <a:latin typeface="Arial"/>
+              </a:rPr>
+              <a:t> прогоне, навсегда; на коротких заявках разница часто в пределах шума</a:t>
+            </a:r>
+          </a:p>
+        </p:txBody>
+      </p:sp>
+      <p:sp>
+        <p:nvSpPr>
+          <p:cNvPr id="22" name="Rounded Rectangle 21"/>
+          <p:cNvSpPr/>
+          <p:nvPr/>
+        </p:nvSpPr>
+        <p:spPr>
+          <a:xfrm>
+            <a:off x="502920" y="4232723"/>
+            <a:ext cx="82296" cy="982980"/>
           </a:xfrm>
           <a:prstGeom prst="roundRect">
             <a:avLst>
@@ -27374,14 +28621,14 @@
       </p:sp>
       <p:sp>
         <p:nvSpPr>
-          <p:cNvPr id="5" name="TextBox 4"/>
-          <p:cNvSpPr txBox="1"/>
-          <p:nvPr/>
-        </p:nvSpPr>
-        <p:spPr>
-          <a:xfrm>
-            <a:off x="859536" y="5372718"/>
-            <a:ext cx="10643616" cy="254508"/>
+          <p:cNvPr id="23" name="TextBox 22"/>
+          <p:cNvSpPr txBox="1"/>
+          <p:nvPr/>
+        </p:nvSpPr>
+        <p:spPr>
+          <a:xfrm>
+            <a:off x="859536" y="4360739"/>
+            <a:ext cx="10643616" cy="726948"/>
           </a:xfrm>
           <a:prstGeom prst="rect">
             <a:avLst/>
@@ -27409,14 +28656,156 @@
                 </a:solidFill>
                 <a:latin typeface="Arial"/>
               </a:rPr>
-              <a:t>Рядом со значком — стрелка вниз: там и живёт действие, которым правка уходит в бой.</a:t>
-            </a:r>
-          </a:p>
-        </p:txBody>
-      </p:sp>
-      <p:sp>
-        <p:nvSpPr>
-          <p:cNvPr id="6" name="TextBox 5"/>
+              <a:t>Поворот.</a:t>
+            </a:r>
+            <a:r>
+              <a:rPr sz="1500" b="1" i="0">
+                <a:solidFill>
+                  <a:srgbClr val="141B2E"/>
+                </a:solidFill>
+                <a:latin typeface="Arial"/>
+              </a:rPr>
+              <a:t> Первые три стоят </a:t>
+            </a:r>
+            <a:r>
+              <a:rPr sz="1500" b="1" i="0">
+                <a:solidFill>
+                  <a:srgbClr val="141B2E"/>
+                </a:solidFill>
+                <a:latin typeface="Arial"/>
+              </a:rPr>
+              <a:t>один раз</a:t>
+            </a:r>
+            <a:r>
+              <a:rPr sz="1500" b="1" i="0">
+                <a:solidFill>
+                  <a:srgbClr val="141B2E"/>
+                </a:solidFill>
+                <a:latin typeface="Arial"/>
+              </a:rPr>
+              <a:t>, четвёртый — </a:t>
+            </a:r>
+            <a:r>
+              <a:rPr sz="1500" b="1" i="0">
+                <a:solidFill>
+                  <a:srgbClr val="141B2E"/>
+                </a:solidFill>
+                <a:latin typeface="Arial"/>
+              </a:rPr>
+              <a:t>каждый день</a:t>
+            </a:r>
+            <a:r>
+              <a:rPr sz="1500" b="1" i="0">
+                <a:solidFill>
+                  <a:srgbClr val="141B2E"/>
+                </a:solidFill>
+                <a:latin typeface="Arial"/>
+              </a:rPr>
+              <a:t>. Поэтому порядок почти всегда такой: сначала запрос, потом правила на узкие случаи, потом вторая модель там, где цена ошибки высока, и только потом более дорогая модель.</a:t>
+            </a:r>
+          </a:p>
+        </p:txBody>
+      </p:sp>
+      <p:sp>
+        <p:nvSpPr>
+          <p:cNvPr id="24" name="Rounded Rectangle 23"/>
+          <p:cNvSpPr/>
+          <p:nvPr/>
+        </p:nvSpPr>
+        <p:spPr>
+          <a:xfrm>
+            <a:off x="502920" y="5505665"/>
+            <a:ext cx="82296" cy="746760"/>
+          </a:xfrm>
+          <a:prstGeom prst="roundRect">
+            <a:avLst>
+              <a:gd name="adj" fmla="val 50000"/>
+            </a:avLst>
+          </a:prstGeom>
+          <a:solidFill>
+            <a:srgbClr val="F0AB00"/>
+          </a:solidFill>
+          <a:ln>
+            <a:noFill/>
+          </a:ln>
+          <a:effectLst/>
+        </p:spPr>
+        <p:style>
+          <a:lnRef idx="1">
+            <a:schemeClr val="accent1"/>
+          </a:lnRef>
+          <a:fillRef idx="3">
+            <a:schemeClr val="accent1"/>
+          </a:fillRef>
+          <a:effectRef idx="2">
+            <a:schemeClr val="accent1"/>
+          </a:effectRef>
+          <a:fontRef idx="minor">
+            <a:schemeClr val="lt1"/>
+          </a:fontRef>
+        </p:style>
+        <p:txBody>
+          <a:bodyPr rtlCol="0" anchor="ctr"/>
+          <a:lstStyle/>
+          <a:p>
+            <a:pPr algn="ctr"/>
+          </a:p>
+        </p:txBody>
+      </p:sp>
+      <p:sp>
+        <p:nvSpPr>
+          <p:cNvPr id="25" name="TextBox 24"/>
+          <p:cNvSpPr txBox="1"/>
+          <p:nvPr/>
+        </p:nvSpPr>
+        <p:spPr>
+          <a:xfrm>
+            <a:off x="859536" y="5633681"/>
+            <a:ext cx="10643616" cy="490727"/>
+          </a:xfrm>
+          <a:prstGeom prst="rect">
+            <a:avLst/>
+          </a:prstGeom>
+          <a:noFill/>
+        </p:spPr>
+        <p:txBody>
+          <a:bodyPr wrap="square" lIns="0" rIns="0" tIns="0" bIns="0" anchor="ctr">
+            <a:spAutoFit/>
+          </a:bodyPr>
+          <a:lstStyle/>
+          <a:p>
+            <a:pPr algn="l">
+              <a:lnSpc>
+                <a:spcPts val="1860"/>
+              </a:lnSpc>
+              <a:spcAft>
+                <a:spcPts val="300"/>
+              </a:spcAft>
+            </a:pPr>
+            <a:r>
+              <a:rPr sz="1500" b="1" i="0">
+                <a:solidFill>
+                  <a:srgbClr val="141B2E"/>
+                </a:solidFill>
+                <a:latin typeface="Arial"/>
+              </a:rPr>
+              <a:t>И то, без чего всё перечисленное бессмысленно:</a:t>
+            </a:r>
+            <a:r>
+              <a:rPr sz="1500" b="1" i="0">
+                <a:solidFill>
+                  <a:srgbClr val="141B2E"/>
+                </a:solidFill>
+                <a:latin typeface="Arial"/>
+              </a:rPr>
+              <a:t> ни один из четырёх способов нельзя оценить, пока ошибки нигде не отмечаются. «Стало лучше» без числа — это вера.</a:t>
+            </a:r>
+          </a:p>
+        </p:txBody>
+      </p:sp>
+      <p:sp>
+        <p:nvSpPr>
+          <p:cNvPr id="26" name="TextBox 25"/>
           <p:cNvSpPr txBox="1"/>
           <p:nvPr/>
         </p:nvSpPr>
@@ -27519,7 +28908,7 @@
                 </a:solidFill>
                 <a:latin typeface="Arial"/>
               </a:rPr>
-              <a:t>Черновик и опубликованная версия</a:t>
+              <a:t>Решение: усиленный запрос и отметка ошибки</a:t>
             </a:r>
           </a:p>
         </p:txBody>
@@ -27532,8 +28921,8 @@
         </p:nvSpPr>
         <p:spPr>
           <a:xfrm>
-            <a:off x="502920" y="1136548"/>
-            <a:ext cx="82296" cy="1059180"/>
+            <a:off x="502920" y="1039215"/>
+            <a:ext cx="82296" cy="982980"/>
           </a:xfrm>
           <a:prstGeom prst="roundRect">
             <a:avLst>
@@ -27578,8 +28967,8 @@
         </p:nvSpPr>
         <p:spPr>
           <a:xfrm>
-            <a:off x="859536" y="1264564"/>
-            <a:ext cx="10643616" cy="803148"/>
+            <a:off x="859536" y="1167231"/>
+            <a:ext cx="10643616" cy="726948"/>
           </a:xfrm>
           <a:prstGeom prst="rect">
             <a:avLst/>
@@ -27607,7 +28996,7 @@
                 </a:solidFill>
                 <a:latin typeface="Arial"/>
               </a:rPr>
-              <a:t>Правки сохраняются сами, постоянно, в черновик.</a:t>
+              <a:t>Описания категорий словами.</a:t>
             </a:r>
             <a:r>
               <a:rPr sz="1500" b="1" i="0">
@@ -27616,37 +29005,17 @@
                 </a:solidFill>
                 <a:latin typeface="Arial"/>
               </a:rPr>
-              <a:t> Кнопки «Сохранить» в интерфейсе нет вовсе.</a:t>
-            </a:r>
-          </a:p>
-          <a:p>
-            <a:pPr algn="l">
-              <a:lnSpc>
-                <a:spcPts val="1860"/>
-              </a:lnSpc>
-              <a:spcAft>
-                <a:spcPts val="300"/>
-              </a:spcAft>
-            </a:pPr>
+              <a:t> Было: «о чём заявка». Стало: «</a:t>
+            </a:r>
             <a:r>
               <a:rPr sz="1500" b="1" i="0">
                 <a:solidFill>
                   <a:srgbClr val="141B2E"/>
                 </a:solidFill>
-                <a:latin typeface="Arial"/>
-              </a:rPr>
-              <a:t>В боевой режим правка уходит отдельным действием — Publish.</a:t>
-            </a:r>
-          </a:p>
-          <a:p>
-            <a:pPr algn="l">
-              <a:lnSpc>
-                <a:spcPts val="1860"/>
-              </a:lnSpc>
-              <a:spcAft>
-                <a:spcPts val="300"/>
-              </a:spcAft>
-            </a:pPr>
+                <a:latin typeface="Consolas"/>
+              </a:rPr>
+              <a:t>оплата</a:t>
+            </a:r>
             <a:r>
               <a:rPr sz="1500" b="1" i="0">
                 <a:solidFill>
@@ -27654,7 +29023,7 @@
                 </a:solidFill>
                 <a:latin typeface="Arial"/>
               </a:rPr>
-              <a:t>Боевые прогоны исполняют опубликованную версию</a:t>
+              <a:t> — человек спрашивает про счёт, реквизиты, безналичный расчёт или возврат денег, </a:t>
             </a:r>
             <a:r>
               <a:rPr sz="1500" b="1" i="0">
@@ -27663,7 +29032,16 @@
                 </a:solidFill>
                 <a:latin typeface="Arial"/>
               </a:rPr>
-              <a:t>, а не то, что открыто в редакторе.</a:t>
+              <a:t>даже если в той же фразе упомянут курс</a:t>
+            </a:r>
+            <a:r>
+              <a:rPr sz="1500" b="1" i="0">
+                <a:solidFill>
+                  <a:srgbClr val="141B2E"/>
+                </a:solidFill>
+                <a:latin typeface="Arial"/>
+              </a:rPr>
+              <a:t>». Именно эта оговорка чинит нашу заявку.</a:t>
             </a:r>
           </a:p>
         </p:txBody>
@@ -27676,617 +29054,8 @@
         </p:nvSpPr>
         <p:spPr>
           <a:xfrm>
-            <a:off x="502920" y="2843301"/>
-            <a:ext cx="11183112" cy="2036444"/>
-          </a:xfrm>
-          <a:prstGeom prst="roundRect">
-            <a:avLst>
-              <a:gd name="adj" fmla="val 14967"/>
-            </a:avLst>
-          </a:prstGeom>
-          <a:solidFill>
-            <a:srgbClr val="FFFFFF"/>
-          </a:solidFill>
-          <a:ln w="17780">
-            <a:solidFill>
-              <a:srgbClr val="1C7293"/>
-            </a:solidFill>
-          </a:ln>
-          <a:effectLst/>
-        </p:spPr>
-        <p:style>
-          <a:lnRef idx="1">
-            <a:schemeClr val="accent1"/>
-          </a:lnRef>
-          <a:fillRef idx="3">
-            <a:schemeClr val="accent1"/>
-          </a:fillRef>
-          <a:effectRef idx="2">
-            <a:schemeClr val="accent1"/>
-          </a:effectRef>
-          <a:fontRef idx="minor">
-            <a:schemeClr val="lt1"/>
-          </a:fontRef>
-        </p:style>
-        <p:txBody>
-          <a:bodyPr rtlCol="0" anchor="ctr"/>
-          <a:lstStyle/>
-          <a:p>
-            <a:pPr algn="ctr"/>
-          </a:p>
-        </p:txBody>
-      </p:sp>
-      <p:sp>
-        <p:nvSpPr>
-          <p:cNvPr id="6" name="TextBox 5"/>
-          <p:cNvSpPr txBox="1"/>
-          <p:nvPr/>
-        </p:nvSpPr>
-        <p:spPr>
-          <a:xfrm>
-            <a:off x="685800" y="3026181"/>
-            <a:ext cx="4089755" cy="282067"/>
-          </a:xfrm>
-          <a:prstGeom prst="rect">
-            <a:avLst/>
-          </a:prstGeom>
-          <a:noFill/>
-        </p:spPr>
-        <p:txBody>
-          <a:bodyPr wrap="square" lIns="0" rIns="0" tIns="0" bIns="0" anchor="t">
-            <a:spAutoFit/>
-          </a:bodyPr>
-          <a:lstStyle/>
-          <a:p>
-            <a:pPr algn="l">
-              <a:lnSpc>
-                <a:spcPts val="1265"/>
-              </a:lnSpc>
-              <a:spcAft>
-                <a:spcPts val="0"/>
-              </a:spcAft>
-            </a:pPr>
-            <a:r>
-              <a:rPr sz="1150" b="1" i="0">
-                <a:solidFill>
-                  <a:srgbClr val="6B7685"/>
-                </a:solidFill>
-                <a:latin typeface="Arial"/>
-              </a:rPr>
-              <a:t>КАРТОЧКА</a:t>
-            </a:r>
-          </a:p>
-        </p:txBody>
-      </p:sp>
-      <p:sp>
-        <p:nvSpPr>
-          <p:cNvPr id="7" name="TextBox 6"/>
-          <p:cNvSpPr txBox="1"/>
-          <p:nvPr/>
-        </p:nvSpPr>
-        <p:spPr>
-          <a:xfrm>
-            <a:off x="4921859" y="3026181"/>
-            <a:ext cx="6434988" cy="282067"/>
-          </a:xfrm>
-          <a:prstGeom prst="rect">
-            <a:avLst/>
-          </a:prstGeom>
-          <a:noFill/>
-        </p:spPr>
-        <p:txBody>
-          <a:bodyPr wrap="square" lIns="0" rIns="0" tIns="0" bIns="0" anchor="t">
-            <a:spAutoFit/>
-          </a:bodyPr>
-          <a:lstStyle/>
-          <a:p>
-            <a:pPr algn="l">
-              <a:lnSpc>
-                <a:spcPts val="1265"/>
-              </a:lnSpc>
-              <a:spcAft>
-                <a:spcPts val="0"/>
-              </a:spcAft>
-            </a:pPr>
-            <a:r>
-              <a:rPr sz="1150" b="1" i="0">
-                <a:solidFill>
-                  <a:srgbClr val="6B7685"/>
-                </a:solidFill>
-                <a:latin typeface="Arial"/>
-              </a:rPr>
-              <a:t>ВЕРДИКТ</a:t>
-            </a:r>
-          </a:p>
-        </p:txBody>
-      </p:sp>
-      <p:sp>
-        <p:nvSpPr>
-          <p:cNvPr id="8" name="TextBox 7"/>
-          <p:cNvSpPr txBox="1"/>
-          <p:nvPr/>
-        </p:nvSpPr>
-        <p:spPr>
-          <a:xfrm>
-            <a:off x="685800" y="3308248"/>
-            <a:ext cx="4089755" cy="347154"/>
-          </a:xfrm>
-          <a:prstGeom prst="rect">
-            <a:avLst/>
-          </a:prstGeom>
-          <a:noFill/>
-        </p:spPr>
-        <p:txBody>
-          <a:bodyPr wrap="square" lIns="0" rIns="0" tIns="0" bIns="0" anchor="ctr">
-            <a:spAutoFit/>
-          </a:bodyPr>
-          <a:lstStyle/>
-          <a:p>
-            <a:pPr algn="l">
-              <a:lnSpc>
-                <a:spcPts val="1437"/>
-              </a:lnSpc>
-              <a:spcAft>
-                <a:spcPts val="0"/>
-              </a:spcAft>
-            </a:pPr>
-            <a:r>
-              <a:rPr sz="1250" b="0" i="0">
-                <a:solidFill>
-                  <a:srgbClr val="141B2E"/>
-                </a:solidFill>
-                <a:latin typeface="Arial"/>
-              </a:rPr>
-              <a:t>правку не сохранили</a:t>
-            </a:r>
-          </a:p>
-        </p:txBody>
-      </p:sp>
-      <p:sp>
-        <p:nvSpPr>
-          <p:cNvPr id="9" name="TextBox 8"/>
-          <p:cNvSpPr txBox="1"/>
-          <p:nvPr/>
-        </p:nvSpPr>
-        <p:spPr>
-          <a:xfrm>
-            <a:off x="4921859" y="3308248"/>
-            <a:ext cx="6434988" cy="347154"/>
-          </a:xfrm>
-          <a:prstGeom prst="rect">
-            <a:avLst/>
-          </a:prstGeom>
-          <a:noFill/>
-        </p:spPr>
-        <p:txBody>
-          <a:bodyPr wrap="square" lIns="0" rIns="0" tIns="0" bIns="0" anchor="ctr">
-            <a:spAutoFit/>
-          </a:bodyPr>
-          <a:lstStyle/>
-          <a:p>
-            <a:pPr algn="l">
-              <a:lnSpc>
-                <a:spcPts val="1437"/>
-              </a:lnSpc>
-              <a:spcAft>
-                <a:spcPts val="0"/>
-              </a:spcAft>
-            </a:pPr>
-            <a:r>
-              <a:rPr sz="1250" b="1" i="0">
-                <a:solidFill>
-                  <a:srgbClr val="141B2E"/>
-                </a:solidFill>
-                <a:latin typeface="Arial"/>
-              </a:rPr>
-              <a:t>неверно</a:t>
-            </a:r>
-            <a:r>
-              <a:rPr sz="1250" b="0" i="0">
-                <a:solidFill>
-                  <a:srgbClr val="141B2E"/>
-                </a:solidFill>
-                <a:latin typeface="Arial"/>
-              </a:rPr>
-              <a:t> — сохранять нечего, сохраняется само</a:t>
-            </a:r>
-          </a:p>
-        </p:txBody>
-      </p:sp>
-      <p:cxnSp>
-        <p:nvCxnSpPr>
-          <p:cNvPr id="10" name="Connector 9"/>
-          <p:cNvCxnSpPr/>
-          <p:nvPr/>
-        </p:nvCxnSpPr>
-        <p:spPr>
-          <a:xfrm>
-            <a:off x="685800" y="3655402"/>
-            <a:ext cx="10817352" cy="0"/>
-          </a:xfrm>
-          <a:prstGeom prst="line">
-            <a:avLst/>
-          </a:prstGeom>
-          <a:ln w="9525">
-            <a:solidFill>
-              <a:srgbClr val="E5EAF0"/>
-            </a:solidFill>
-          </a:ln>
-        </p:spPr>
-        <p:style>
-          <a:lnRef idx="2">
-            <a:schemeClr val="accent1"/>
-          </a:lnRef>
-          <a:fillRef idx="0">
-            <a:schemeClr val="accent1"/>
-          </a:fillRef>
-          <a:effectRef idx="1">
-            <a:schemeClr val="accent1"/>
-          </a:effectRef>
-          <a:fontRef idx="minor">
-            <a:schemeClr val="tx1"/>
-          </a:fontRef>
-        </p:style>
-      </p:cxnSp>
-      <p:sp>
-        <p:nvSpPr>
-          <p:cNvPr id="11" name="TextBox 10"/>
-          <p:cNvSpPr txBox="1"/>
-          <p:nvPr/>
-        </p:nvSpPr>
-        <p:spPr>
-          <a:xfrm>
-            <a:off x="685800" y="3655402"/>
-            <a:ext cx="4089755" cy="347154"/>
-          </a:xfrm>
-          <a:prstGeom prst="rect">
-            <a:avLst/>
-          </a:prstGeom>
-          <a:noFill/>
-        </p:spPr>
-        <p:txBody>
-          <a:bodyPr wrap="square" lIns="0" rIns="0" tIns="0" bIns="0" anchor="ctr">
-            <a:spAutoFit/>
-          </a:bodyPr>
-          <a:lstStyle/>
-          <a:p>
-            <a:pPr algn="l">
-              <a:lnSpc>
-                <a:spcPts val="1437"/>
-              </a:lnSpc>
-              <a:spcAft>
-                <a:spcPts val="0"/>
-              </a:spcAft>
-            </a:pPr>
-            <a:r>
-              <a:rPr sz="1250" b="0" i="0">
-                <a:solidFill>
-                  <a:srgbClr val="141B2E"/>
-                </a:solidFill>
-                <a:latin typeface="Arial"/>
-              </a:rPr>
-              <a:t>сохранили, но не опубликовали</a:t>
-            </a:r>
-          </a:p>
-        </p:txBody>
-      </p:sp>
-      <p:sp>
-        <p:nvSpPr>
-          <p:cNvPr id="12" name="TextBox 11"/>
-          <p:cNvSpPr txBox="1"/>
-          <p:nvPr/>
-        </p:nvSpPr>
-        <p:spPr>
-          <a:xfrm>
-            <a:off x="4921859" y="3655402"/>
-            <a:ext cx="6434988" cy="347154"/>
-          </a:xfrm>
-          <a:prstGeom prst="rect">
-            <a:avLst/>
-          </a:prstGeom>
-          <a:noFill/>
-        </p:spPr>
-        <p:txBody>
-          <a:bodyPr wrap="square" lIns="0" rIns="0" tIns="0" bIns="0" anchor="ctr">
-            <a:spAutoFit/>
-          </a:bodyPr>
-          <a:lstStyle/>
-          <a:p>
-            <a:pPr algn="l">
-              <a:lnSpc>
-                <a:spcPts val="1437"/>
-              </a:lnSpc>
-              <a:spcAft>
-                <a:spcPts val="0"/>
-              </a:spcAft>
-            </a:pPr>
-            <a:r>
-              <a:rPr sz="1250" b="1" i="0">
-                <a:solidFill>
-                  <a:srgbClr val="141B2E"/>
-                </a:solidFill>
-                <a:latin typeface="Arial"/>
-              </a:rPr>
-              <a:t>верно</a:t>
-            </a:r>
-            <a:r>
-              <a:rPr sz="1250" b="0" i="0">
-                <a:solidFill>
-                  <a:srgbClr val="141B2E"/>
-                </a:solidFill>
-                <a:latin typeface="Arial"/>
-              </a:rPr>
-              <a:t> — это и произошло</a:t>
-            </a:r>
-          </a:p>
-        </p:txBody>
-      </p:sp>
-      <p:cxnSp>
-        <p:nvCxnSpPr>
-          <p:cNvPr id="13" name="Connector 12"/>
-          <p:cNvCxnSpPr/>
-          <p:nvPr/>
-        </p:nvCxnSpPr>
-        <p:spPr>
-          <a:xfrm>
-            <a:off x="685800" y="4002557"/>
-            <a:ext cx="10817352" cy="0"/>
-          </a:xfrm>
-          <a:prstGeom prst="line">
-            <a:avLst/>
-          </a:prstGeom>
-          <a:ln w="9525">
-            <a:solidFill>
-              <a:srgbClr val="E5EAF0"/>
-            </a:solidFill>
-          </a:ln>
-        </p:spPr>
-        <p:style>
-          <a:lnRef idx="2">
-            <a:schemeClr val="accent1"/>
-          </a:lnRef>
-          <a:fillRef idx="0">
-            <a:schemeClr val="accent1"/>
-          </a:fillRef>
-          <a:effectRef idx="1">
-            <a:schemeClr val="accent1"/>
-          </a:effectRef>
-          <a:fontRef idx="minor">
-            <a:schemeClr val="tx1"/>
-          </a:fontRef>
-        </p:style>
-      </p:cxnSp>
-      <p:sp>
-        <p:nvSpPr>
-          <p:cNvPr id="14" name="TextBox 13"/>
-          <p:cNvSpPr txBox="1"/>
-          <p:nvPr/>
-        </p:nvSpPr>
-        <p:spPr>
-          <a:xfrm>
-            <a:off x="685800" y="4002557"/>
-            <a:ext cx="4089755" cy="347154"/>
-          </a:xfrm>
-          <a:prstGeom prst="rect">
-            <a:avLst/>
-          </a:prstGeom>
-          <a:noFill/>
-        </p:spPr>
-        <p:txBody>
-          <a:bodyPr wrap="square" lIns="0" rIns="0" tIns="0" bIns="0" anchor="ctr">
-            <a:spAutoFit/>
-          </a:bodyPr>
-          <a:lstStyle/>
-          <a:p>
-            <a:pPr algn="l">
-              <a:lnSpc>
-                <a:spcPts val="1437"/>
-              </a:lnSpc>
-              <a:spcAft>
-                <a:spcPts val="0"/>
-              </a:spcAft>
-            </a:pPr>
-            <a:r>
-              <a:rPr sz="1250" b="0" i="0">
-                <a:solidFill>
-                  <a:srgbClr val="141B2E"/>
-                </a:solidFill>
-                <a:latin typeface="Arial"/>
-              </a:rPr>
-              <a:t>кэш, надо подождать</a:t>
-            </a:r>
-          </a:p>
-        </p:txBody>
-      </p:sp>
-      <p:sp>
-        <p:nvSpPr>
-          <p:cNvPr id="15" name="TextBox 14"/>
-          <p:cNvSpPr txBox="1"/>
-          <p:nvPr/>
-        </p:nvSpPr>
-        <p:spPr>
-          <a:xfrm>
-            <a:off x="4921859" y="4002557"/>
-            <a:ext cx="6434988" cy="347154"/>
-          </a:xfrm>
-          <a:prstGeom prst="rect">
-            <a:avLst/>
-          </a:prstGeom>
-          <a:noFill/>
-        </p:spPr>
-        <p:txBody>
-          <a:bodyPr wrap="square" lIns="0" rIns="0" tIns="0" bIns="0" anchor="ctr">
-            <a:spAutoFit/>
-          </a:bodyPr>
-          <a:lstStyle/>
-          <a:p>
-            <a:pPr algn="l">
-              <a:lnSpc>
-                <a:spcPts val="1437"/>
-              </a:lnSpc>
-              <a:spcAft>
-                <a:spcPts val="0"/>
-              </a:spcAft>
-            </a:pPr>
-            <a:r>
-              <a:rPr sz="1250" b="1" i="0">
-                <a:solidFill>
-                  <a:srgbClr val="141B2E"/>
-                </a:solidFill>
-                <a:latin typeface="Arial"/>
-              </a:rPr>
-              <a:t>неверно</a:t>
-            </a:r>
-            <a:r>
-              <a:rPr sz="1250" b="0" i="0">
-                <a:solidFill>
-                  <a:srgbClr val="141B2E"/>
-                </a:solidFill>
-                <a:latin typeface="Arial"/>
-              </a:rPr>
-              <a:t> — ждать можно сколько угодно, версий две, и обе живые</a:t>
-            </a:r>
-          </a:p>
-        </p:txBody>
-      </p:sp>
-      <p:cxnSp>
-        <p:nvCxnSpPr>
-          <p:cNvPr id="16" name="Connector 15"/>
-          <p:cNvCxnSpPr/>
-          <p:nvPr/>
-        </p:nvCxnSpPr>
-        <p:spPr>
-          <a:xfrm>
-            <a:off x="685800" y="4349711"/>
-            <a:ext cx="10817352" cy="0"/>
-          </a:xfrm>
-          <a:prstGeom prst="line">
-            <a:avLst/>
-          </a:prstGeom>
-          <a:ln w="9525">
-            <a:solidFill>
-              <a:srgbClr val="E5EAF0"/>
-            </a:solidFill>
-          </a:ln>
-        </p:spPr>
-        <p:style>
-          <a:lnRef idx="2">
-            <a:schemeClr val="accent1"/>
-          </a:lnRef>
-          <a:fillRef idx="0">
-            <a:schemeClr val="accent1"/>
-          </a:fillRef>
-          <a:effectRef idx="1">
-            <a:schemeClr val="accent1"/>
-          </a:effectRef>
-          <a:fontRef idx="minor">
-            <a:schemeClr val="tx1"/>
-          </a:fontRef>
-        </p:style>
-      </p:cxnSp>
-      <p:sp>
-        <p:nvSpPr>
-          <p:cNvPr id="17" name="TextBox 16"/>
-          <p:cNvSpPr txBox="1"/>
-          <p:nvPr/>
-        </p:nvSpPr>
-        <p:spPr>
-          <a:xfrm>
-            <a:off x="685800" y="4349711"/>
-            <a:ext cx="4089755" cy="347154"/>
-          </a:xfrm>
-          <a:prstGeom prst="rect">
-            <a:avLst/>
-          </a:prstGeom>
-          <a:noFill/>
-        </p:spPr>
-        <p:txBody>
-          <a:bodyPr wrap="square" lIns="0" rIns="0" tIns="0" bIns="0" anchor="ctr">
-            <a:spAutoFit/>
-          </a:bodyPr>
-          <a:lstStyle/>
-          <a:p>
-            <a:pPr algn="l">
-              <a:lnSpc>
-                <a:spcPts val="1437"/>
-              </a:lnSpc>
-              <a:spcAft>
-                <a:spcPts val="0"/>
-              </a:spcAft>
-            </a:pPr>
-            <a:r>
-              <a:rPr sz="1250" b="0" i="0">
-                <a:solidFill>
-                  <a:srgbClr val="141B2E"/>
-                </a:solidFill>
-                <a:latin typeface="Arial"/>
-              </a:rPr>
-              <a:t>ручной запуск и боевой — разные пути</a:t>
-            </a:r>
-          </a:p>
-        </p:txBody>
-      </p:sp>
-      <p:sp>
-        <p:nvSpPr>
-          <p:cNvPr id="18" name="TextBox 17"/>
-          <p:cNvSpPr txBox="1"/>
-          <p:nvPr/>
-        </p:nvSpPr>
-        <p:spPr>
-          <a:xfrm>
-            <a:off x="4921859" y="4349711"/>
-            <a:ext cx="6434988" cy="347154"/>
-          </a:xfrm>
-          <a:prstGeom prst="rect">
-            <a:avLst/>
-          </a:prstGeom>
-          <a:noFill/>
-        </p:spPr>
-        <p:txBody>
-          <a:bodyPr wrap="square" lIns="0" rIns="0" tIns="0" bIns="0" anchor="ctr">
-            <a:spAutoFit/>
-          </a:bodyPr>
-          <a:lstStyle/>
-          <a:p>
-            <a:pPr algn="l">
-              <a:lnSpc>
-                <a:spcPts val="1437"/>
-              </a:lnSpc>
-              <a:spcAft>
-                <a:spcPts val="0"/>
-              </a:spcAft>
-            </a:pPr>
-            <a:r>
-              <a:rPr sz="1250" b="1" i="0">
-                <a:solidFill>
-                  <a:srgbClr val="141B2E"/>
-                </a:solidFill>
-                <a:latin typeface="Arial"/>
-              </a:rPr>
-              <a:t>верно</a:t>
-            </a:r>
-            <a:r>
-              <a:rPr sz="1250" b="0" i="0">
-                <a:solidFill>
-                  <a:srgbClr val="141B2E"/>
-                </a:solidFill>
-                <a:latin typeface="Arial"/>
-              </a:rPr>
-              <a:t> — ручной идёт по черновику, боевой по опубликованному</a:t>
-            </a:r>
-          </a:p>
-        </p:txBody>
-      </p:sp>
-      <p:sp>
-        <p:nvSpPr>
-          <p:cNvPr id="19" name="Rounded Rectangle 18"/>
-          <p:cNvSpPr/>
-          <p:nvPr/>
-        </p:nvSpPr>
-        <p:spPr>
-          <a:xfrm>
-            <a:off x="502920" y="5527319"/>
-            <a:ext cx="82296" cy="510540"/>
+            <a:off x="502920" y="2426436"/>
+            <a:ext cx="82296" cy="982980"/>
           </a:xfrm>
           <a:prstGeom prst="roundRect">
             <a:avLst>
@@ -28325,14 +29094,14 @@
       </p:sp>
       <p:sp>
         <p:nvSpPr>
-          <p:cNvPr id="20" name="TextBox 19"/>
-          <p:cNvSpPr txBox="1"/>
-          <p:nvPr/>
-        </p:nvSpPr>
-        <p:spPr>
-          <a:xfrm>
-            <a:off x="859536" y="5655335"/>
-            <a:ext cx="10643616" cy="254508"/>
+          <p:cNvPr id="6" name="TextBox 5"/>
+          <p:cNvSpPr txBox="1"/>
+          <p:nvPr/>
+        </p:nvSpPr>
+        <p:spPr>
+          <a:xfrm>
+            <a:off x="859536" y="2554452"/>
+            <a:ext cx="10643616" cy="726948"/>
           </a:xfrm>
           <a:prstGeom prst="rect">
             <a:avLst/>
@@ -28360,7 +29129,7 @@
                 </a:solidFill>
                 <a:latin typeface="Arial"/>
               </a:rPr>
-              <a:t>Слова «активировать» в n8n 2.x больше нет: </a:t>
+              <a:t>Примеры заявок прямо в запросе.</a:t>
             </a:r>
             <a:r>
               <a:rPr sz="1500" b="1" i="0">
@@ -28369,7 +29138,7 @@
                 </a:solidFill>
                 <a:latin typeface="Arial"/>
               </a:rPr>
-              <a:t>Publish</a:t>
+              <a:t> Три-пять настоящих коротких заявок с правильным ответом, и обязательно — </a:t>
             </a:r>
             <a:r>
               <a:rPr sz="1500" b="1" i="0">
@@ -28378,14 +29147,289 @@
                 </a:solidFill>
                 <a:latin typeface="Arial"/>
               </a:rPr>
-              <a:t> занял его место и значит другое.</a:t>
-            </a:r>
-          </a:p>
-        </p:txBody>
-      </p:sp>
-      <p:sp>
-        <p:nvSpPr>
-          <p:cNvPr id="21" name="TextBox 20"/>
+              <a:t>трудные</a:t>
+            </a:r>
+            <a:r>
+              <a:rPr sz="1500" b="1" i="0">
+                <a:solidFill>
+                  <a:srgbClr val="141B2E"/>
+                </a:solidFill>
+                <a:latin typeface="Arial"/>
+              </a:rPr>
+              <a:t>, а не очевидные: та самая, про счёт на ООО. Замеренный прирост даёт не количество примеров, а их трудность.</a:t>
+            </a:r>
+          </a:p>
+        </p:txBody>
+      </p:sp>
+      <p:sp>
+        <p:nvSpPr>
+          <p:cNvPr id="7" name="Rounded Rectangle 6"/>
+          <p:cNvSpPr/>
+          <p:nvPr/>
+        </p:nvSpPr>
+        <p:spPr>
+          <a:xfrm>
+            <a:off x="502920" y="3813657"/>
+            <a:ext cx="82296" cy="982980"/>
+          </a:xfrm>
+          <a:prstGeom prst="roundRect">
+            <a:avLst>
+              <a:gd name="adj" fmla="val 50000"/>
+            </a:avLst>
+          </a:prstGeom>
+          <a:solidFill>
+            <a:srgbClr val="F0AB00"/>
+          </a:solidFill>
+          <a:ln>
+            <a:noFill/>
+          </a:ln>
+          <a:effectLst/>
+        </p:spPr>
+        <p:style>
+          <a:lnRef idx="1">
+            <a:schemeClr val="accent1"/>
+          </a:lnRef>
+          <a:fillRef idx="3">
+            <a:schemeClr val="accent1"/>
+          </a:fillRef>
+          <a:effectRef idx="2">
+            <a:schemeClr val="accent1"/>
+          </a:effectRef>
+          <a:fontRef idx="minor">
+            <a:schemeClr val="lt1"/>
+          </a:fontRef>
+        </p:style>
+        <p:txBody>
+          <a:bodyPr rtlCol="0" anchor="ctr"/>
+          <a:lstStyle/>
+          <a:p>
+            <a:pPr algn="ctr"/>
+          </a:p>
+        </p:txBody>
+      </p:sp>
+      <p:sp>
+        <p:nvSpPr>
+          <p:cNvPr id="8" name="TextBox 7"/>
+          <p:cNvSpPr txBox="1"/>
+          <p:nvPr/>
+        </p:nvSpPr>
+        <p:spPr>
+          <a:xfrm>
+            <a:off x="859536" y="3941673"/>
+            <a:ext cx="10643616" cy="726948"/>
+          </a:xfrm>
+          <a:prstGeom prst="rect">
+            <a:avLst/>
+          </a:prstGeom>
+          <a:noFill/>
+        </p:spPr>
+        <p:txBody>
+          <a:bodyPr wrap="square" lIns="0" rIns="0" tIns="0" bIns="0" anchor="ctr">
+            <a:spAutoFit/>
+          </a:bodyPr>
+          <a:lstStyle/>
+          <a:p>
+            <a:pPr algn="l">
+              <a:lnSpc>
+                <a:spcPts val="1860"/>
+              </a:lnSpc>
+              <a:spcAft>
+                <a:spcPts val="300"/>
+              </a:spcAft>
+            </a:pPr>
+            <a:r>
+              <a:rPr sz="1500" b="1" i="0">
+                <a:solidFill>
+                  <a:srgbClr val="141B2E"/>
+                </a:solidFill>
+                <a:latin typeface="Arial"/>
+              </a:rPr>
+              <a:t>Правило воздержания.</a:t>
+            </a:r>
+            <a:r>
+              <a:rPr sz="1500" b="1" i="0">
+                <a:solidFill>
+                  <a:srgbClr val="141B2E"/>
+                </a:solidFill>
+                <a:latin typeface="Arial"/>
+              </a:rPr>
+              <a:t> «Если подходит больше одной темы и ни одна не очевидна — ставь </a:t>
+            </a:r>
+            <a:r>
+              <a:rPr sz="1500" b="1" i="0">
+                <a:solidFill>
+                  <a:srgbClr val="141B2E"/>
+                </a:solidFill>
+                <a:latin typeface="Consolas"/>
+              </a:rPr>
+              <a:t>не</a:t>
+            </a:r>
+            <a:r>
+              <a:rPr sz="1500" b="1" i="0">
+                <a:solidFill>
+                  <a:srgbClr val="141B2E"/>
+                </a:solidFill>
+                <a:latin typeface="Arial"/>
+              </a:rPr>
+              <a:t> </a:t>
+            </a:r>
+            <a:r>
+              <a:rPr sz="1500" b="1" i="0">
+                <a:solidFill>
+                  <a:srgbClr val="141B2E"/>
+                </a:solidFill>
+                <a:latin typeface="Consolas"/>
+              </a:rPr>
+              <a:t>определено</a:t>
+            </a:r>
+            <a:r>
+              <a:rPr sz="1500" b="1" i="0">
+                <a:solidFill>
+                  <a:srgbClr val="141B2E"/>
+                </a:solidFill>
+                <a:latin typeface="Arial"/>
+              </a:rPr>
+              <a:t>». Законный отказ из кейса 2, только теперь он включается не по пустоте, а по </a:t>
+            </a:r>
+            <a:r>
+              <a:rPr sz="1500" b="1" i="0">
+                <a:solidFill>
+                  <a:srgbClr val="141B2E"/>
+                </a:solidFill>
+                <a:latin typeface="Arial"/>
+              </a:rPr>
+              <a:t>неуверенности</a:t>
+            </a:r>
+            <a:r>
+              <a:rPr sz="1500" b="1" i="0">
+                <a:solidFill>
+                  <a:srgbClr val="141B2E"/>
+                </a:solidFill>
+                <a:latin typeface="Arial"/>
+              </a:rPr>
+              <a:t>.</a:t>
+            </a:r>
+          </a:p>
+        </p:txBody>
+      </p:sp>
+      <p:sp>
+        <p:nvSpPr>
+          <p:cNvPr id="9" name="Rounded Rectangle 8"/>
+          <p:cNvSpPr/>
+          <p:nvPr/>
+        </p:nvSpPr>
+        <p:spPr>
+          <a:xfrm>
+            <a:off x="502920" y="5200878"/>
+            <a:ext cx="82296" cy="982980"/>
+          </a:xfrm>
+          <a:prstGeom prst="roundRect">
+            <a:avLst>
+              <a:gd name="adj" fmla="val 50000"/>
+            </a:avLst>
+          </a:prstGeom>
+          <a:solidFill>
+            <a:srgbClr val="F0AB00"/>
+          </a:solidFill>
+          <a:ln>
+            <a:noFill/>
+          </a:ln>
+          <a:effectLst/>
+        </p:spPr>
+        <p:style>
+          <a:lnRef idx="1">
+            <a:schemeClr val="accent1"/>
+          </a:lnRef>
+          <a:fillRef idx="3">
+            <a:schemeClr val="accent1"/>
+          </a:fillRef>
+          <a:effectRef idx="2">
+            <a:schemeClr val="accent1"/>
+          </a:effectRef>
+          <a:fontRef idx="minor">
+            <a:schemeClr val="lt1"/>
+          </a:fontRef>
+        </p:style>
+        <p:txBody>
+          <a:bodyPr rtlCol="0" anchor="ctr"/>
+          <a:lstStyle/>
+          <a:p>
+            <a:pPr algn="ctr"/>
+          </a:p>
+        </p:txBody>
+      </p:sp>
+      <p:sp>
+        <p:nvSpPr>
+          <p:cNvPr id="10" name="TextBox 9"/>
+          <p:cNvSpPr txBox="1"/>
+          <p:nvPr/>
+        </p:nvSpPr>
+        <p:spPr>
+          <a:xfrm>
+            <a:off x="859536" y="5328894"/>
+            <a:ext cx="10643616" cy="726948"/>
+          </a:xfrm>
+          <a:prstGeom prst="rect">
+            <a:avLst/>
+          </a:prstGeom>
+          <a:noFill/>
+        </p:spPr>
+        <p:txBody>
+          <a:bodyPr wrap="square" lIns="0" rIns="0" tIns="0" bIns="0" anchor="ctr">
+            <a:spAutoFit/>
+          </a:bodyPr>
+          <a:lstStyle/>
+          <a:p>
+            <a:pPr algn="l">
+              <a:lnSpc>
+                <a:spcPts val="1860"/>
+              </a:lnSpc>
+              <a:spcAft>
+                <a:spcPts val="300"/>
+              </a:spcAft>
+            </a:pPr>
+            <a:r>
+              <a:rPr sz="1500" b="1" i="0">
+                <a:solidFill>
+                  <a:srgbClr val="141B2E"/>
+                </a:solidFill>
+                <a:latin typeface="Arial"/>
+              </a:rPr>
+              <a:t>Столбец </a:t>
+            </a:r>
+            <a:r>
+              <a:rPr sz="1500" b="1" i="0">
+                <a:solidFill>
+                  <a:srgbClr val="141B2E"/>
+                </a:solidFill>
+                <a:latin typeface="Consolas"/>
+              </a:rPr>
+              <a:t>topic_wrong</a:t>
+            </a:r>
+            <a:r>
+              <a:rPr sz="1500" b="1" i="0">
+                <a:solidFill>
+                  <a:srgbClr val="141B2E"/>
+                </a:solidFill>
+                <a:latin typeface="Arial"/>
+              </a:rPr>
+              <a:t> в таблице.</a:t>
+            </a:r>
+            <a:r>
+              <a:rPr sz="1500" b="1" i="0">
+                <a:solidFill>
+                  <a:srgbClr val="141B2E"/>
+                </a:solidFill>
+                <a:latin typeface="Arial"/>
+              </a:rPr>
+              <a:t> Один флажок, который Ольга ставит, увидев неверную тему. С этого дня у вас есть доля ошибок, и любое следующее улучшение — измеримо. Это и есть та размеченная история, которой у центра нет: через месяц она появится сама.</a:t>
+            </a:r>
+          </a:p>
+        </p:txBody>
+      </p:sp>
+      <p:sp>
+        <p:nvSpPr>
+          <p:cNvPr id="11" name="TextBox 10"/>
           <p:cNvSpPr txBox="1"/>
           <p:nvPr/>
         </p:nvSpPr>
@@ -28488,7 +29532,7 @@
                 </a:solidFill>
                 <a:latin typeface="Arial"/>
               </a:rPr>
-              <a:t>Что проверять в бою, а что хватит руками</a:t>
+              <a:t>Чем поднимать качество</a:t>
             </a:r>
           </a:p>
         </p:txBody>
@@ -28578,7 +29622,7 @@
                 </a:solidFill>
                 <a:latin typeface="Arial"/>
               </a:rPr>
-              <a:t>НУЖНА ПРОВЕРКА НАСТОЯЩИМ СОБЫТИЕМ</a:t>
+              <a:t>ХВАТИТ УСИЛЕНИЯ ЗАПРОСА</a:t>
             </a:r>
           </a:p>
         </p:txBody>
@@ -28620,7 +29664,7 @@
                 </a:solidFill>
                 <a:latin typeface="Arial"/>
               </a:rPr>
-              <a:t>обработчик ошибок: его триггер срабатывает только на автоматическом прогоне, и вручную не произойдёт ничего</a:t>
+              <a:t>ошибки разные и каждая объяснима словами: модель не знала, что считать оплатой</a:t>
             </a:r>
           </a:p>
         </p:txBody>
@@ -28697,7 +29741,7 @@
                 </a:solidFill>
                 <a:latin typeface="Arial"/>
               </a:rPr>
-              <a:t>расписание: сработает ли в нужный момент и что будет, если прогон не успел до следующего</a:t>
+              <a:t>вы можете назвать правильный ответ для каждой разобранной ошибки</a:t>
             </a:r>
           </a:p>
         </p:txBody>
@@ -28774,7 +29818,7 @@
                 </a:solidFill>
                 <a:latin typeface="Arial"/>
               </a:rPr>
-              <a:t>реакция на вызов чужой системы: тот ли адрес, та ли авторизация, тот ли формат</a:t>
+              <a:t>заявки короткие и однородные — на них разница между моделями в пределах шума</a:t>
             </a:r>
           </a:p>
         </p:txBody>
@@ -28823,7 +29867,7 @@
         <p:spPr>
           <a:xfrm>
             <a:off x="685800" y="2874788"/>
-            <a:ext cx="5088636" cy="490982"/>
+            <a:ext cx="5088636" cy="318642"/>
           </a:xfrm>
           <a:prstGeom prst="rect">
             <a:avLst/>
@@ -28851,7 +29895,7 @@
                 </a:solidFill>
                 <a:latin typeface="Arial"/>
               </a:rPr>
-              <a:t>поведение на объёме: ручной прогон копирует данные для показа и на больших объёмах падает там, где боевой проходит</a:t>
+              <a:t>у вас нет размеченной истории — запрос работает без неё</a:t>
             </a:r>
           </a:p>
         </p:txBody>
@@ -28941,7 +29985,7 @@
                 </a:solidFill>
                 <a:latin typeface="Arial"/>
               </a:rPr>
-              <a:t>ХВАТИТ РУЧНОГО ЗАПУСКА</a:t>
+              <a:t>НУЖНО ЧТО-ТО СВЕРХ ЗАПРОСА</a:t>
             </a:r>
           </a:p>
         </p:txBody>
@@ -28983,7 +30027,7 @@
                 </a:solidFill>
                 <a:latin typeface="Arial"/>
               </a:rPr>
-              <a:t>логика шагов на обычных данных: что пришло, что вернулось, что записалось</a:t>
+              <a:t>одна и та же ошибка повторяется дословно — дешевле поставить правило, чем уговаривать модель</a:t>
             </a:r>
           </a:p>
         </p:txBody>
@@ -29032,7 +30076,7 @@
         <p:spPr>
           <a:xfrm>
             <a:off x="6414516" y="1892824"/>
-            <a:ext cx="5088636" cy="318642"/>
+            <a:ext cx="5088636" cy="490982"/>
           </a:xfrm>
           <a:prstGeom prst="rect">
             <a:avLst/>
@@ -29060,7 +30104,7 @@
                 </a:solidFill>
                 <a:latin typeface="Arial"/>
               </a:rPr>
-              <a:t>форма и её поля: что видит человек, что приходит в процесс</a:t>
+              <a:t>цена одной ошибки высока: деньги, здоровье, юридические последствия — тогда вторая проверка окупается</a:t>
             </a:r>
           </a:p>
         </p:txBody>
@@ -29073,7 +30117,7 @@
         </p:nvCxnSpPr>
         <p:spPr>
           <a:xfrm>
-            <a:off x="6414516" y="2211467"/>
+            <a:off x="6414516" y="2383806"/>
             <a:ext cx="5088636" cy="0"/>
           </a:xfrm>
           <a:prstGeom prst="line">
@@ -29108,8 +30152,8 @@
         </p:nvSpPr>
         <p:spPr>
           <a:xfrm>
-            <a:off x="6414516" y="2211467"/>
-            <a:ext cx="5088636" cy="318642"/>
+            <a:off x="6414516" y="2383806"/>
+            <a:ext cx="5088636" cy="490982"/>
           </a:xfrm>
           <a:prstGeom prst="rect">
             <a:avLst/>
@@ -29137,7 +30181,7 @@
                 </a:solidFill>
                 <a:latin typeface="Arial"/>
               </a:rPr>
-              <a:t>выражения и преобразования: видно сразу, в данных узла</a:t>
+              <a:t>текст длинный и запутанный: здесь более сильная модель даёт заметный прирост, и за него есть смысл платить</a:t>
             </a:r>
           </a:p>
         </p:txBody>
@@ -29150,7 +30194,7 @@
         </p:nvCxnSpPr>
         <p:spPr>
           <a:xfrm>
-            <a:off x="6414516" y="2530110"/>
+            <a:off x="6414516" y="2874788"/>
             <a:ext cx="5088636" cy="0"/>
           </a:xfrm>
           <a:prstGeom prst="line">
@@ -29185,8 +30229,8 @@
         </p:nvSpPr>
         <p:spPr>
           <a:xfrm>
-            <a:off x="6414516" y="2530110"/>
-            <a:ext cx="5088636" cy="318642"/>
+            <a:off x="6414516" y="2874788"/>
+            <a:ext cx="5088636" cy="490982"/>
           </a:xfrm>
           <a:prstGeom prst="rect">
             <a:avLst/>
@@ -29214,7 +30258,7 @@
                 </a:solidFill>
                 <a:latin typeface="Arial"/>
               </a:rPr>
-              <a:t>один элемент, одна заявка, один файл</a:t>
+              <a:t>история накопилась: тысячи заявок с правильными ответами делают дообучение осмысленным</a:t>
             </a:r>
           </a:p>
         </p:txBody>
@@ -29228,7 +30272,7 @@
         <p:spPr>
           <a:xfrm>
             <a:off x="502920" y="3899340"/>
-            <a:ext cx="82296" cy="1219200"/>
+            <a:ext cx="82296" cy="982980"/>
           </a:xfrm>
           <a:prstGeom prst="roundRect">
             <a:avLst>
@@ -29274,7 +30318,7 @@
         <p:spPr>
           <a:xfrm>
             <a:off x="859536" y="4027356"/>
-            <a:ext cx="10643616" cy="963168"/>
+            <a:ext cx="10643616" cy="726948"/>
           </a:xfrm>
           <a:prstGeom prst="rect">
             <a:avLst/>
@@ -29302,7 +30346,7 @@
                 </a:solidFill>
                 <a:latin typeface="Arial"/>
               </a:rPr>
-              <a:t>Предел: вместе с файлом сценария уезжает больше, чем кажется.</a:t>
+              <a:t>Предел: улучшение без замера.</a:t>
             </a:r>
             <a:r>
               <a:rPr sz="1500" b="1" i="0">
@@ -29311,25 +30355,7 @@
                 </a:solidFill>
                 <a:latin typeface="Arial"/>
               </a:rPr>
-              <a:t> Секретов в нём нет — пароли и ключи инструмент хранит отдельно. А идентификаторы и имена подключений, адреса, пути, имена таблиц и внутренних сервисов — есть. Правило, которое стоит выполнять механически: </a:t>
-            </a:r>
-            <a:r>
-              <a:rPr sz="1500" b="1" i="0">
-                <a:solidFill>
-                  <a:srgbClr val="141B2E"/>
-                </a:solidFill>
-                <a:latin typeface="Arial"/>
-              </a:rPr>
-              <a:t>прежде чем отдать файл сценария — откройте его и прочитайте глазами.</a:t>
-            </a:r>
-            <a:r>
-              <a:rPr sz="1500" b="1" i="0">
-                <a:solidFill>
-                  <a:srgbClr val="141B2E"/>
-                </a:solidFill>
-                <a:latin typeface="Arial"/>
-              </a:rPr>
-              <a:t> Это тридцать секунд.</a:t>
+              <a:t> Пока ошибки нигде не отмечаются, любой из четырёх способов даёт только ощущение. Сначала столбец отметки — потом улучшения; иначе вы будете честно работать и не сможете сказать, помогло ли.</a:t>
             </a:r>
           </a:p>
         </p:txBody>
@@ -29342,8 +30368,8 @@
         </p:nvSpPr>
         <p:spPr>
           <a:xfrm>
-            <a:off x="502920" y="5469229"/>
-            <a:ext cx="82296" cy="746760"/>
+            <a:off x="502920" y="5233009"/>
+            <a:ext cx="82296" cy="982980"/>
           </a:xfrm>
           <a:prstGeom prst="roundRect">
             <a:avLst>
@@ -29388,8 +30414,8 @@
         </p:nvSpPr>
         <p:spPr>
           <a:xfrm>
-            <a:off x="859536" y="5597245"/>
-            <a:ext cx="10643616" cy="490727"/>
+            <a:off x="859536" y="5361025"/>
+            <a:ext cx="10643616" cy="726948"/>
           </a:xfrm>
           <a:prstGeom prst="rect">
             <a:avLst/>
@@ -29426,7 +30452,25 @@
                 </a:solidFill>
                 <a:latin typeface="Arial"/>
               </a:rPr>
-              <a:t> Правка на холсте есть, никто её не откатывал — выглядит успехом. Чем оказалось: сутки работы по старой версии.</a:t>
+              <a:t> Значение из справочника, прогон зелёный — и это выглядит успехом. Чем оказалось: </a:t>
+            </a:r>
+            <a:r>
+              <a:rPr sz="1500" b="1" i="0">
+                <a:solidFill>
+                  <a:srgbClr val="141B2E"/>
+                </a:solidFill>
+                <a:latin typeface="Arial"/>
+              </a:rPr>
+              <a:t>тема неверная, и узнать об этом неоткуда</a:t>
+            </a:r>
+            <a:r>
+              <a:rPr sz="1500" b="1" i="0">
+                <a:solidFill>
+                  <a:srgbClr val="141B2E"/>
+                </a:solidFill>
+                <a:latin typeface="Arial"/>
+              </a:rPr>
+              <a:t> — все наши сторожа проверяют форму, а не смысл.</a:t>
             </a:r>
           </a:p>
         </p:txBody>
@@ -30728,594 +31772,45 @@
                 </a:solidFill>
                 <a:latin typeface="Arial"/>
               </a:rPr>
-              <a:t>Четыре строки оси: что оказалось</a:t>
-            </a:r>
-          </a:p>
-        </p:txBody>
-      </p:sp>
-      <p:sp>
-        <p:nvSpPr>
-          <p:cNvPr id="3" name="Rounded Rectangle 2"/>
+              <a:t>Черновик и опубликованная версия</a:t>
+            </a:r>
+          </a:p>
+        </p:txBody>
+      </p:sp>
+      <p:pic>
+        <p:nvPicPr>
+          <p:cNvPr id="3" name="Picture 2" descr="obzor-k4.png"/>
+          <p:cNvPicPr>
+            <a:picLocks noChangeAspect="1"/>
+          </p:cNvPicPr>
+          <p:nvPr/>
+        </p:nvPicPr>
+        <p:blipFill>
+          <a:blip r:embed="rId2"/>
+          <a:stretch>
+            <a:fillRect/>
+          </a:stretch>
+        </p:blipFill>
+        <p:spPr>
+          <a:xfrm>
+            <a:off x="2533297" y="943356"/>
+            <a:ext cx="7122357" cy="2071297"/>
+          </a:xfrm>
+          <a:prstGeom prst="rect">
+            <a:avLst/>
+          </a:prstGeom>
+        </p:spPr>
+      </p:pic>
+      <p:sp>
+        <p:nvSpPr>
+          <p:cNvPr id="4" name="Rounded Rectangle 3"/>
           <p:cNvSpPr/>
           <p:nvPr/>
         </p:nvSpPr>
         <p:spPr>
           <a:xfrm>
-            <a:off x="502920" y="1716786"/>
-            <a:ext cx="11183112" cy="2036444"/>
-          </a:xfrm>
-          <a:prstGeom prst="roundRect">
-            <a:avLst>
-              <a:gd name="adj" fmla="val 14967"/>
-            </a:avLst>
-          </a:prstGeom>
-          <a:solidFill>
-            <a:srgbClr val="FFFFFF"/>
-          </a:solidFill>
-          <a:ln w="17780">
-            <a:solidFill>
-              <a:srgbClr val="1C7293"/>
-            </a:solidFill>
-          </a:ln>
-          <a:effectLst/>
-        </p:spPr>
-        <p:style>
-          <a:lnRef idx="1">
-            <a:schemeClr val="accent1"/>
-          </a:lnRef>
-          <a:fillRef idx="3">
-            <a:schemeClr val="accent1"/>
-          </a:fillRef>
-          <a:effectRef idx="2">
-            <a:schemeClr val="accent1"/>
-          </a:effectRef>
-          <a:fontRef idx="minor">
-            <a:schemeClr val="lt1"/>
-          </a:fontRef>
-        </p:style>
-        <p:txBody>
-          <a:bodyPr rtlCol="0" anchor="ctr"/>
-          <a:lstStyle/>
-          <a:p>
-            <a:pPr algn="ctr"/>
-          </a:p>
-        </p:txBody>
-      </p:sp>
-      <p:sp>
-        <p:nvSpPr>
-          <p:cNvPr id="4" name="TextBox 3"/>
-          <p:cNvSpPr txBox="1"/>
-          <p:nvPr/>
-        </p:nvSpPr>
-        <p:spPr>
-          <a:xfrm>
-            <a:off x="685800" y="1899666"/>
-            <a:ext cx="4809785" cy="282067"/>
-          </a:xfrm>
-          <a:prstGeom prst="rect">
-            <a:avLst/>
-          </a:prstGeom>
-          <a:noFill/>
-        </p:spPr>
-        <p:txBody>
-          <a:bodyPr wrap="square" lIns="0" rIns="0" tIns="0" bIns="0" anchor="t">
-            <a:spAutoFit/>
-          </a:bodyPr>
-          <a:lstStyle/>
-          <a:p>
-            <a:pPr algn="l">
-              <a:lnSpc>
-                <a:spcPts val="1265"/>
-              </a:lnSpc>
-              <a:spcAft>
-                <a:spcPts val="0"/>
-              </a:spcAft>
-            </a:pPr>
-            <a:r>
-              <a:rPr sz="1150" b="1" i="0">
-                <a:solidFill>
-                  <a:srgbClr val="6B7685"/>
-                </a:solidFill>
-                <a:latin typeface="Arial"/>
-              </a:rPr>
-              <a:t>ВЫГЛЯДИТ РАБОЧИМ</a:t>
-            </a:r>
-          </a:p>
-        </p:txBody>
-      </p:sp>
-      <p:sp>
-        <p:nvSpPr>
-          <p:cNvPr id="5" name="TextBox 4"/>
-          <p:cNvSpPr txBox="1"/>
-          <p:nvPr/>
-        </p:nvSpPr>
-        <p:spPr>
-          <a:xfrm>
-            <a:off x="5641889" y="1899666"/>
-            <a:ext cx="5714958" cy="282067"/>
-          </a:xfrm>
-          <a:prstGeom prst="rect">
-            <a:avLst/>
-          </a:prstGeom>
-          <a:noFill/>
-        </p:spPr>
-        <p:txBody>
-          <a:bodyPr wrap="square" lIns="0" rIns="0" tIns="0" bIns="0" anchor="t">
-            <a:spAutoFit/>
-          </a:bodyPr>
-          <a:lstStyle/>
-          <a:p>
-            <a:pPr algn="l">
-              <a:lnSpc>
-                <a:spcPts val="1265"/>
-              </a:lnSpc>
-              <a:spcAft>
-                <a:spcPts val="0"/>
-              </a:spcAft>
-            </a:pPr>
-            <a:r>
-              <a:rPr sz="1150" b="1" i="0">
-                <a:solidFill>
-                  <a:srgbClr val="6B7685"/>
-                </a:solidFill>
-                <a:latin typeface="Arial"/>
-              </a:rPr>
-              <a:t>ЧЕМ ОКАЗАЛСЯ</a:t>
-            </a:r>
-          </a:p>
-        </p:txBody>
-      </p:sp>
-      <p:sp>
-        <p:nvSpPr>
-          <p:cNvPr id="6" name="TextBox 5"/>
-          <p:cNvSpPr txBox="1"/>
-          <p:nvPr/>
-        </p:nvSpPr>
-        <p:spPr>
-          <a:xfrm>
-            <a:off x="685800" y="2181733"/>
-            <a:ext cx="4809785" cy="347154"/>
-          </a:xfrm>
-          <a:prstGeom prst="rect">
-            <a:avLst/>
-          </a:prstGeom>
-          <a:noFill/>
-        </p:spPr>
-        <p:txBody>
-          <a:bodyPr wrap="square" lIns="0" rIns="0" tIns="0" bIns="0" anchor="ctr">
-            <a:spAutoFit/>
-          </a:bodyPr>
-          <a:lstStyle/>
-          <a:p>
-            <a:pPr algn="l">
-              <a:lnSpc>
-                <a:spcPts val="1437"/>
-              </a:lnSpc>
-              <a:spcAft>
-                <a:spcPts val="0"/>
-              </a:spcAft>
-            </a:pPr>
-            <a:r>
-              <a:rPr sz="1250" b="0" i="0">
-                <a:solidFill>
-                  <a:srgbClr val="141B2E"/>
-                </a:solidFill>
-                <a:latin typeface="Arial"/>
-              </a:rPr>
-              <a:t>три узла, заявка доезжает до таблицы</a:t>
-            </a:r>
-          </a:p>
-        </p:txBody>
-      </p:sp>
-      <p:sp>
-        <p:nvSpPr>
-          <p:cNvPr id="7" name="TextBox 6"/>
-          <p:cNvSpPr txBox="1"/>
-          <p:nvPr/>
-        </p:nvSpPr>
-        <p:spPr>
-          <a:xfrm>
-            <a:off x="5641889" y="2181733"/>
-            <a:ext cx="5714958" cy="347154"/>
-          </a:xfrm>
-          <a:prstGeom prst="rect">
-            <a:avLst/>
-          </a:prstGeom>
-          <a:noFill/>
-        </p:spPr>
-        <p:txBody>
-          <a:bodyPr wrap="square" lIns="0" rIns="0" tIns="0" bIns="0" anchor="ctr">
-            <a:spAutoFit/>
-          </a:bodyPr>
-          <a:lstStyle/>
-          <a:p>
-            <a:pPr algn="l">
-              <a:lnSpc>
-                <a:spcPts val="1437"/>
-              </a:lnSpc>
-              <a:spcAft>
-                <a:spcPts val="0"/>
-              </a:spcAft>
-            </a:pPr>
-            <a:r>
-              <a:rPr sz="1250" b="0" i="0">
-                <a:solidFill>
-                  <a:srgbClr val="141B2E"/>
-                </a:solidFill>
-                <a:latin typeface="Arial"/>
-              </a:rPr>
-              <a:t>тема какая угодно, срочности нет вовсе, ручаться нечем</a:t>
-            </a:r>
-          </a:p>
-        </p:txBody>
-      </p:sp>
-      <p:cxnSp>
-        <p:nvCxnSpPr>
-          <p:cNvPr id="8" name="Connector 7"/>
-          <p:cNvCxnSpPr/>
-          <p:nvPr/>
-        </p:nvCxnSpPr>
-        <p:spPr>
-          <a:xfrm>
-            <a:off x="685800" y="2528887"/>
-            <a:ext cx="10817352" cy="0"/>
-          </a:xfrm>
-          <a:prstGeom prst="line">
-            <a:avLst/>
-          </a:prstGeom>
-          <a:ln w="9525">
-            <a:solidFill>
-              <a:srgbClr val="E5EAF0"/>
-            </a:solidFill>
-          </a:ln>
-        </p:spPr>
-        <p:style>
-          <a:lnRef idx="2">
-            <a:schemeClr val="accent1"/>
-          </a:lnRef>
-          <a:fillRef idx="0">
-            <a:schemeClr val="accent1"/>
-          </a:fillRef>
-          <a:effectRef idx="1">
-            <a:schemeClr val="accent1"/>
-          </a:effectRef>
-          <a:fontRef idx="minor">
-            <a:schemeClr val="tx1"/>
-          </a:fontRef>
-        </p:style>
-      </p:cxnSp>
-      <p:sp>
-        <p:nvSpPr>
-          <p:cNvPr id="9" name="TextBox 8"/>
-          <p:cNvSpPr txBox="1"/>
-          <p:nvPr/>
-        </p:nvSpPr>
-        <p:spPr>
-          <a:xfrm>
-            <a:off x="685800" y="2528887"/>
-            <a:ext cx="4809785" cy="347154"/>
-          </a:xfrm>
-          <a:prstGeom prst="rect">
-            <a:avLst/>
-          </a:prstGeom>
-          <a:noFill/>
-        </p:spPr>
-        <p:txBody>
-          <a:bodyPr wrap="square" lIns="0" rIns="0" tIns="0" bIns="0" anchor="ctr">
-            <a:spAutoFit/>
-          </a:bodyPr>
-          <a:lstStyle/>
-          <a:p>
-            <a:pPr algn="l">
-              <a:lnSpc>
-                <a:spcPts val="1437"/>
-              </a:lnSpc>
-              <a:spcAft>
-                <a:spcPts val="0"/>
-              </a:spcAft>
-            </a:pPr>
-            <a:r>
-              <a:rPr sz="1250" b="0" i="0">
-                <a:solidFill>
-                  <a:srgbClr val="141B2E"/>
-                </a:solidFill>
-                <a:latin typeface="Arial"/>
-              </a:rPr>
-              <a:t>клетка заполнена, значение законное</a:t>
-            </a:r>
-          </a:p>
-        </p:txBody>
-      </p:sp>
-      <p:sp>
-        <p:nvSpPr>
-          <p:cNvPr id="10" name="TextBox 9"/>
-          <p:cNvSpPr txBox="1"/>
-          <p:nvPr/>
-        </p:nvSpPr>
-        <p:spPr>
-          <a:xfrm>
-            <a:off x="5641889" y="2528887"/>
-            <a:ext cx="5714958" cy="347154"/>
-          </a:xfrm>
-          <a:prstGeom prst="rect">
-            <a:avLst/>
-          </a:prstGeom>
-          <a:noFill/>
-        </p:spPr>
-        <p:txBody>
-          <a:bodyPr wrap="square" lIns="0" rIns="0" tIns="0" bIns="0" anchor="ctr">
-            <a:spAutoFit/>
-          </a:bodyPr>
-          <a:lstStyle/>
-          <a:p>
-            <a:pPr algn="l">
-              <a:lnSpc>
-                <a:spcPts val="1437"/>
-              </a:lnSpc>
-              <a:spcAft>
-                <a:spcPts val="0"/>
-              </a:spcAft>
-            </a:pPr>
-            <a:r>
-              <a:rPr sz="1250" b="0" i="0">
-                <a:solidFill>
-                  <a:srgbClr val="141B2E"/>
-                </a:solidFill>
-                <a:latin typeface="Arial"/>
-              </a:rPr>
-              <a:t>вторая тема заявки исчезла молча</a:t>
-            </a:r>
-          </a:p>
-        </p:txBody>
-      </p:sp>
-      <p:cxnSp>
-        <p:nvCxnSpPr>
-          <p:cNvPr id="11" name="Connector 10"/>
-          <p:cNvCxnSpPr/>
-          <p:nvPr/>
-        </p:nvCxnSpPr>
-        <p:spPr>
-          <a:xfrm>
-            <a:off x="685800" y="2876042"/>
-            <a:ext cx="10817352" cy="0"/>
-          </a:xfrm>
-          <a:prstGeom prst="line">
-            <a:avLst/>
-          </a:prstGeom>
-          <a:ln w="9525">
-            <a:solidFill>
-              <a:srgbClr val="E5EAF0"/>
-            </a:solidFill>
-          </a:ln>
-        </p:spPr>
-        <p:style>
-          <a:lnRef idx="2">
-            <a:schemeClr val="accent1"/>
-          </a:lnRef>
-          <a:fillRef idx="0">
-            <a:schemeClr val="accent1"/>
-          </a:fillRef>
-          <a:effectRef idx="1">
-            <a:schemeClr val="accent1"/>
-          </a:effectRef>
-          <a:fontRef idx="minor">
-            <a:schemeClr val="tx1"/>
-          </a:fontRef>
-        </p:style>
-      </p:cxnSp>
-      <p:sp>
-        <p:nvSpPr>
-          <p:cNvPr id="12" name="TextBox 11"/>
-          <p:cNvSpPr txBox="1"/>
-          <p:nvPr/>
-        </p:nvSpPr>
-        <p:spPr>
-          <a:xfrm>
-            <a:off x="685800" y="2876042"/>
-            <a:ext cx="4809785" cy="347154"/>
-          </a:xfrm>
-          <a:prstGeom prst="rect">
-            <a:avLst/>
-          </a:prstGeom>
-          <a:noFill/>
-        </p:spPr>
-        <p:txBody>
-          <a:bodyPr wrap="square" lIns="0" rIns="0" tIns="0" bIns="0" anchor="ctr">
-            <a:spAutoFit/>
-          </a:bodyPr>
-          <a:lstStyle/>
-          <a:p>
-            <a:pPr algn="l">
-              <a:lnSpc>
-                <a:spcPts val="1437"/>
-              </a:lnSpc>
-              <a:spcAft>
-                <a:spcPts val="0"/>
-              </a:spcAft>
-            </a:pPr>
-            <a:r>
-              <a:rPr sz="1250" b="0" i="0">
-                <a:solidFill>
-                  <a:srgbClr val="141B2E"/>
-                </a:solidFill>
-                <a:latin typeface="Arial"/>
-              </a:rPr>
-              <a:t>прогон зелёный, в журнале ни одной ошибки</a:t>
-            </a:r>
-          </a:p>
-        </p:txBody>
-      </p:sp>
-      <p:sp>
-        <p:nvSpPr>
-          <p:cNvPr id="13" name="TextBox 12"/>
-          <p:cNvSpPr txBox="1"/>
-          <p:nvPr/>
-        </p:nvSpPr>
-        <p:spPr>
-          <a:xfrm>
-            <a:off x="5641889" y="2876042"/>
-            <a:ext cx="5714958" cy="347154"/>
-          </a:xfrm>
-          <a:prstGeom prst="rect">
-            <a:avLst/>
-          </a:prstGeom>
-          <a:noFill/>
-        </p:spPr>
-        <p:txBody>
-          <a:bodyPr wrap="square" lIns="0" rIns="0" tIns="0" bIns="0" anchor="ctr">
-            <a:spAutoFit/>
-          </a:bodyPr>
-          <a:lstStyle/>
-          <a:p>
-            <a:pPr algn="l">
-              <a:lnSpc>
-                <a:spcPts val="1437"/>
-              </a:lnSpc>
-              <a:spcAft>
-                <a:spcPts val="0"/>
-              </a:spcAft>
-            </a:pPr>
-            <a:r>
-              <a:rPr sz="1250" b="0" i="0">
-                <a:solidFill>
-                  <a:srgbClr val="141B2E"/>
-                </a:solidFill>
-                <a:latin typeface="Arial"/>
-              </a:rPr>
-              <a:t>три отказа подряд, заявки за выходные не разобраны</a:t>
-            </a:r>
-          </a:p>
-        </p:txBody>
-      </p:sp>
-      <p:cxnSp>
-        <p:nvCxnSpPr>
-          <p:cNvPr id="14" name="Connector 13"/>
-          <p:cNvCxnSpPr/>
-          <p:nvPr/>
-        </p:nvCxnSpPr>
-        <p:spPr>
-          <a:xfrm>
-            <a:off x="685800" y="3223196"/>
-            <a:ext cx="10817352" cy="0"/>
-          </a:xfrm>
-          <a:prstGeom prst="line">
-            <a:avLst/>
-          </a:prstGeom>
-          <a:ln w="9525">
-            <a:solidFill>
-              <a:srgbClr val="E5EAF0"/>
-            </a:solidFill>
-          </a:ln>
-        </p:spPr>
-        <p:style>
-          <a:lnRef idx="2">
-            <a:schemeClr val="accent1"/>
-          </a:lnRef>
-          <a:fillRef idx="0">
-            <a:schemeClr val="accent1"/>
-          </a:fillRef>
-          <a:effectRef idx="1">
-            <a:schemeClr val="accent1"/>
-          </a:effectRef>
-          <a:fontRef idx="minor">
-            <a:schemeClr val="tx1"/>
-          </a:fontRef>
-        </p:style>
-      </p:cxnSp>
-      <p:sp>
-        <p:nvSpPr>
-          <p:cNvPr id="15" name="TextBox 14"/>
-          <p:cNvSpPr txBox="1"/>
-          <p:nvPr/>
-        </p:nvSpPr>
-        <p:spPr>
-          <a:xfrm>
-            <a:off x="685800" y="3223196"/>
-            <a:ext cx="4809785" cy="347154"/>
-          </a:xfrm>
-          <a:prstGeom prst="rect">
-            <a:avLst/>
-          </a:prstGeom>
-          <a:noFill/>
-        </p:spPr>
-        <p:txBody>
-          <a:bodyPr wrap="square" lIns="0" rIns="0" tIns="0" bIns="0" anchor="ctr">
-            <a:spAutoFit/>
-          </a:bodyPr>
-          <a:lstStyle/>
-          <a:p>
-            <a:pPr algn="l">
-              <a:lnSpc>
-                <a:spcPts val="1437"/>
-              </a:lnSpc>
-              <a:spcAft>
-                <a:spcPts val="0"/>
-              </a:spcAft>
-            </a:pPr>
-            <a:r>
-              <a:rPr sz="1250" b="0" i="0">
-                <a:solidFill>
-                  <a:srgbClr val="141B2E"/>
-                </a:solidFill>
-                <a:latin typeface="Arial"/>
-              </a:rPr>
-              <a:t>правка на холсте есть, никто её не откатывал</a:t>
-            </a:r>
-          </a:p>
-        </p:txBody>
-      </p:sp>
-      <p:sp>
-        <p:nvSpPr>
-          <p:cNvPr id="16" name="TextBox 15"/>
-          <p:cNvSpPr txBox="1"/>
-          <p:nvPr/>
-        </p:nvSpPr>
-        <p:spPr>
-          <a:xfrm>
-            <a:off x="5641889" y="3223196"/>
-            <a:ext cx="5714958" cy="347154"/>
-          </a:xfrm>
-          <a:prstGeom prst="rect">
-            <a:avLst/>
-          </a:prstGeom>
-          <a:noFill/>
-        </p:spPr>
-        <p:txBody>
-          <a:bodyPr wrap="square" lIns="0" rIns="0" tIns="0" bIns="0" anchor="ctr">
-            <a:spAutoFit/>
-          </a:bodyPr>
-          <a:lstStyle/>
-          <a:p>
-            <a:pPr algn="l">
-              <a:lnSpc>
-                <a:spcPts val="1437"/>
-              </a:lnSpc>
-              <a:spcAft>
-                <a:spcPts val="0"/>
-              </a:spcAft>
-            </a:pPr>
-            <a:r>
-              <a:rPr sz="1250" b="0" i="0">
-                <a:solidFill>
-                  <a:srgbClr val="141B2E"/>
-                </a:solidFill>
-                <a:latin typeface="Arial"/>
-              </a:rPr>
-              <a:t>сутки работы по старой версии</a:t>
-            </a:r>
-          </a:p>
-        </p:txBody>
-      </p:sp>
-      <p:sp>
-        <p:nvSpPr>
-          <p:cNvPr id="17" name="Rounded Rectangle 16"/>
-          <p:cNvSpPr/>
-          <p:nvPr/>
-        </p:nvSpPr>
-        <p:spPr>
-          <a:xfrm>
-            <a:off x="502920" y="4420742"/>
-            <a:ext cx="82296" cy="746760"/>
+            <a:off x="502920" y="3179245"/>
+            <a:ext cx="82296" cy="475600"/>
           </a:xfrm>
           <a:prstGeom prst="roundRect">
             <a:avLst>
@@ -31354,14 +31849,14 @@
       </p:sp>
       <p:sp>
         <p:nvSpPr>
-          <p:cNvPr id="18" name="TextBox 17"/>
-          <p:cNvSpPr txBox="1"/>
-          <p:nvPr/>
-        </p:nvSpPr>
-        <p:spPr>
-          <a:xfrm>
-            <a:off x="859536" y="4548758"/>
-            <a:ext cx="10643616" cy="490727"/>
+          <p:cNvPr id="5" name="TextBox 4"/>
+          <p:cNvSpPr txBox="1"/>
+          <p:nvPr/>
+        </p:nvSpPr>
+        <p:spPr>
+          <a:xfrm>
+            <a:off x="859536" y="3307261"/>
+            <a:ext cx="10643616" cy="219568"/>
           </a:xfrm>
           <a:prstGeom prst="rect">
             <a:avLst/>
@@ -31376,36 +31871,363 @@
           <a:p>
             <a:pPr algn="l">
               <a:lnSpc>
-                <a:spcPts val="1860"/>
+                <a:spcPts val="1364"/>
               </a:lnSpc>
               <a:spcAft>
                 <a:spcPts val="300"/>
               </a:spcAft>
             </a:pPr>
             <a:r>
-              <a:rPr sz="1500" b="1" i="0">
-                <a:solidFill>
-                  <a:srgbClr val="141B2E"/>
-                </a:solidFill>
-                <a:latin typeface="Arial"/>
-              </a:rPr>
-              <a:t>Процесс работает — или за него можно ручаться?</a:t>
-            </a:r>
-            <a:r>
-              <a:rPr sz="1500" b="1" i="0">
-                <a:solidFill>
-                  <a:srgbClr val="141B2E"/>
-                </a:solidFill>
-                <a:latin typeface="Arial"/>
-              </a:rPr>
-              <a:t> Четыре строки справа и есть четыре способа это проверить, и ни один не требует верить на слово.</a:t>
-            </a:r>
-          </a:p>
-        </p:txBody>
-      </p:sp>
-      <p:sp>
-        <p:nvSpPr>
-          <p:cNvPr id="19" name="TextBox 18"/>
+              <a:rPr sz="1100" b="1" i="0">
+                <a:solidFill>
+                  <a:srgbClr val="141B2E"/>
+                </a:solidFill>
+                <a:latin typeface="Arial"/>
+              </a:rPr>
+              <a:t>Правки идут в черновик постоянно и сами.</a:t>
+            </a:r>
+            <a:r>
+              <a:rPr sz="1100" b="1" i="0">
+                <a:solidFill>
+                  <a:srgbClr val="141B2E"/>
+                </a:solidFill>
+                <a:latin typeface="Arial"/>
+              </a:rPr>
+              <a:t> Кнопки «Сохранить» в интерфейсе нет вовсе — и именно поэтому возникает уверенность, что всё уже в деле.</a:t>
+            </a:r>
+          </a:p>
+        </p:txBody>
+      </p:sp>
+      <p:sp>
+        <p:nvSpPr>
+          <p:cNvPr id="6" name="Rounded Rectangle 5"/>
+          <p:cNvSpPr/>
+          <p:nvPr/>
+        </p:nvSpPr>
+        <p:spPr>
+          <a:xfrm>
+            <a:off x="502920" y="3819438"/>
+            <a:ext cx="82296" cy="776490"/>
+          </a:xfrm>
+          <a:prstGeom prst="roundRect">
+            <a:avLst>
+              <a:gd name="adj" fmla="val 50000"/>
+            </a:avLst>
+          </a:prstGeom>
+          <a:solidFill>
+            <a:srgbClr val="F0AB00"/>
+          </a:solidFill>
+          <a:ln>
+            <a:noFill/>
+          </a:ln>
+          <a:effectLst/>
+        </p:spPr>
+        <p:style>
+          <a:lnRef idx="1">
+            <a:schemeClr val="accent1"/>
+          </a:lnRef>
+          <a:fillRef idx="3">
+            <a:schemeClr val="accent1"/>
+          </a:fillRef>
+          <a:effectRef idx="2">
+            <a:schemeClr val="accent1"/>
+          </a:effectRef>
+          <a:fontRef idx="minor">
+            <a:schemeClr val="lt1"/>
+          </a:fontRef>
+        </p:style>
+        <p:txBody>
+          <a:bodyPr rtlCol="0" anchor="ctr"/>
+          <a:lstStyle/>
+          <a:p>
+            <a:pPr algn="ctr"/>
+          </a:p>
+        </p:txBody>
+      </p:sp>
+      <p:sp>
+        <p:nvSpPr>
+          <p:cNvPr id="7" name="TextBox 6"/>
+          <p:cNvSpPr txBox="1"/>
+          <p:nvPr/>
+        </p:nvSpPr>
+        <p:spPr>
+          <a:xfrm>
+            <a:off x="859536" y="3947454"/>
+            <a:ext cx="10643616" cy="520458"/>
+          </a:xfrm>
+          <a:prstGeom prst="rect">
+            <a:avLst/>
+          </a:prstGeom>
+          <a:noFill/>
+        </p:spPr>
+        <p:txBody>
+          <a:bodyPr wrap="square" lIns="0" rIns="0" tIns="0" bIns="0" anchor="ctr">
+            <a:spAutoFit/>
+          </a:bodyPr>
+          <a:lstStyle/>
+          <a:p>
+            <a:pPr algn="l">
+              <a:lnSpc>
+                <a:spcPts val="1364"/>
+              </a:lnSpc>
+              <a:spcAft>
+                <a:spcPts val="300"/>
+              </a:spcAft>
+            </a:pPr>
+            <a:r>
+              <a:rPr sz="1100" b="1" i="0">
+                <a:solidFill>
+                  <a:srgbClr val="141B2E"/>
+                </a:solidFill>
+                <a:latin typeface="Arial"/>
+              </a:rPr>
+              <a:t>В бой правка уходит отдельным действием — Publish.</a:t>
+            </a:r>
+            <a:r>
+              <a:rPr sz="1100" b="1" i="0">
+                <a:solidFill>
+                  <a:srgbClr val="141B2E"/>
+                </a:solidFill>
+                <a:latin typeface="Arial"/>
+              </a:rPr>
+              <a:t> Боевые прогоны исполняют </a:t>
+            </a:r>
+            <a:r>
+              <a:rPr sz="1100" b="1" i="0">
+                <a:solidFill>
+                  <a:srgbClr val="141B2E"/>
+                </a:solidFill>
+                <a:latin typeface="Arial"/>
+              </a:rPr>
+              <a:t>опубликованную</a:t>
+            </a:r>
+            <a:r>
+              <a:rPr sz="1100" b="1" i="0">
+                <a:solidFill>
+                  <a:srgbClr val="141B2E"/>
+                </a:solidFill>
+                <a:latin typeface="Arial"/>
+              </a:rPr>
+              <a:t> версию, а ручной запуск — </a:t>
+            </a:r>
+            <a:r>
+              <a:rPr sz="1100" b="1" i="0">
+                <a:solidFill>
+                  <a:srgbClr val="141B2E"/>
+                </a:solidFill>
+                <a:latin typeface="Arial"/>
+              </a:rPr>
+              <a:t>черновик</a:t>
+            </a:r>
+            <a:r>
+              <a:rPr sz="1100" b="1" i="0">
+                <a:solidFill>
+                  <a:srgbClr val="141B2E"/>
+                </a:solidFill>
+                <a:latin typeface="Arial"/>
+              </a:rPr>
+              <a:t>. Отсюда вся путаница: вы правите, запускаете руками, видите правильный результат — и он честный, просто не тот, что работает в бою. Слова «активировать» в n8n 2.x больше нет.</a:t>
+            </a:r>
+          </a:p>
+        </p:txBody>
+      </p:sp>
+      <p:sp>
+        <p:nvSpPr>
+          <p:cNvPr id="8" name="Rounded Rectangle 7"/>
+          <p:cNvSpPr/>
+          <p:nvPr/>
+        </p:nvSpPr>
+        <p:spPr>
+          <a:xfrm>
+            <a:off x="502920" y="4760520"/>
+            <a:ext cx="82296" cy="776490"/>
+          </a:xfrm>
+          <a:prstGeom prst="roundRect">
+            <a:avLst>
+              <a:gd name="adj" fmla="val 50000"/>
+            </a:avLst>
+          </a:prstGeom>
+          <a:solidFill>
+            <a:srgbClr val="F0AB00"/>
+          </a:solidFill>
+          <a:ln>
+            <a:noFill/>
+          </a:ln>
+          <a:effectLst/>
+        </p:spPr>
+        <p:style>
+          <a:lnRef idx="1">
+            <a:schemeClr val="accent1"/>
+          </a:lnRef>
+          <a:fillRef idx="3">
+            <a:schemeClr val="accent1"/>
+          </a:fillRef>
+          <a:effectRef idx="2">
+            <a:schemeClr val="accent1"/>
+          </a:effectRef>
+          <a:fontRef idx="minor">
+            <a:schemeClr val="lt1"/>
+          </a:fontRef>
+        </p:style>
+        <p:txBody>
+          <a:bodyPr rtlCol="0" anchor="ctr"/>
+          <a:lstStyle/>
+          <a:p>
+            <a:pPr algn="ctr"/>
+          </a:p>
+        </p:txBody>
+      </p:sp>
+      <p:sp>
+        <p:nvSpPr>
+          <p:cNvPr id="9" name="TextBox 8"/>
+          <p:cNvSpPr txBox="1"/>
+          <p:nvPr/>
+        </p:nvSpPr>
+        <p:spPr>
+          <a:xfrm>
+            <a:off x="859536" y="4888536"/>
+            <a:ext cx="10643616" cy="520458"/>
+          </a:xfrm>
+          <a:prstGeom prst="rect">
+            <a:avLst/>
+          </a:prstGeom>
+          <a:noFill/>
+        </p:spPr>
+        <p:txBody>
+          <a:bodyPr wrap="square" lIns="0" rIns="0" tIns="0" bIns="0" anchor="ctr">
+            <a:spAutoFit/>
+          </a:bodyPr>
+          <a:lstStyle/>
+          <a:p>
+            <a:pPr algn="l">
+              <a:lnSpc>
+                <a:spcPts val="1364"/>
+              </a:lnSpc>
+              <a:spcAft>
+                <a:spcPts val="300"/>
+              </a:spcAft>
+            </a:pPr>
+            <a:r>
+              <a:rPr sz="1100" b="1" i="0">
+                <a:solidFill>
+                  <a:srgbClr val="141B2E"/>
+                </a:solidFill>
+                <a:latin typeface="Arial"/>
+              </a:rPr>
+              <a:t>Что проверяется только настоящим событием:</a:t>
+            </a:r>
+            <a:r>
+              <a:rPr sz="1100" b="1" i="0">
+                <a:solidFill>
+                  <a:srgbClr val="141B2E"/>
+                </a:solidFill>
+                <a:latin typeface="Arial"/>
+              </a:rPr>
+              <a:t> обработчик ошибок (его триггер при ручном запуске не срабатывает вовсе) · расписание · обращение к чужой системе · поведение на объёме. Руками проверяются шаги, выражения и форма — этого достаточно для логики и недостаточно для боя.</a:t>
+            </a:r>
+          </a:p>
+        </p:txBody>
+      </p:sp>
+      <p:sp>
+        <p:nvSpPr>
+          <p:cNvPr id="10" name="Rounded Rectangle 9"/>
+          <p:cNvSpPr/>
+          <p:nvPr/>
+        </p:nvSpPr>
+        <p:spPr>
+          <a:xfrm>
+            <a:off x="502920" y="5701602"/>
+            <a:ext cx="82296" cy="620776"/>
+          </a:xfrm>
+          <a:prstGeom prst="roundRect">
+            <a:avLst>
+              <a:gd name="adj" fmla="val 50000"/>
+            </a:avLst>
+          </a:prstGeom>
+          <a:solidFill>
+            <a:srgbClr val="F0AB00"/>
+          </a:solidFill>
+          <a:ln>
+            <a:noFill/>
+          </a:ln>
+          <a:effectLst/>
+        </p:spPr>
+        <p:style>
+          <a:lnRef idx="1">
+            <a:schemeClr val="accent1"/>
+          </a:lnRef>
+          <a:fillRef idx="3">
+            <a:schemeClr val="accent1"/>
+          </a:fillRef>
+          <a:effectRef idx="2">
+            <a:schemeClr val="accent1"/>
+          </a:effectRef>
+          <a:fontRef idx="minor">
+            <a:schemeClr val="lt1"/>
+          </a:fontRef>
+        </p:style>
+        <p:txBody>
+          <a:bodyPr rtlCol="0" anchor="ctr"/>
+          <a:lstStyle/>
+          <a:p>
+            <a:pPr algn="ctr"/>
+          </a:p>
+        </p:txBody>
+      </p:sp>
+      <p:sp>
+        <p:nvSpPr>
+          <p:cNvPr id="11" name="TextBox 10"/>
+          <p:cNvSpPr txBox="1"/>
+          <p:nvPr/>
+        </p:nvSpPr>
+        <p:spPr>
+          <a:xfrm>
+            <a:off x="859536" y="5829618"/>
+            <a:ext cx="10643616" cy="364743"/>
+          </a:xfrm>
+          <a:prstGeom prst="rect">
+            <a:avLst/>
+          </a:prstGeom>
+          <a:noFill/>
+        </p:spPr>
+        <p:txBody>
+          <a:bodyPr wrap="square" lIns="0" rIns="0" tIns="0" bIns="0" anchor="ctr">
+            <a:spAutoFit/>
+          </a:bodyPr>
+          <a:lstStyle/>
+          <a:p>
+            <a:pPr algn="l">
+              <a:lnSpc>
+                <a:spcPts val="1364"/>
+              </a:lnSpc>
+              <a:spcAft>
+                <a:spcPts val="300"/>
+              </a:spcAft>
+            </a:pPr>
+            <a:r>
+              <a:rPr sz="1100" b="1" i="0">
+                <a:solidFill>
+                  <a:srgbClr val="141B2E"/>
+                </a:solidFill>
+                <a:latin typeface="Arial"/>
+              </a:rPr>
+              <a:t>Перед тем как отдать файл сценария — прочитайте его глазами.</a:t>
+            </a:r>
+            <a:r>
+              <a:rPr sz="1100" b="1" i="0">
+                <a:solidFill>
+                  <a:srgbClr val="141B2E"/>
+                </a:solidFill>
+                <a:latin typeface="Arial"/>
+              </a:rPr>
+              <a:t> Ключей в нём нет, их инструмент держит отдельно. А имена подключений, адреса, пути, названия таблиц и внутренних сервисов — есть. Это тридцать секунд.</a:t>
+            </a:r>
+          </a:p>
+        </p:txBody>
+      </p:sp>
+      <p:sp>
+        <p:nvSpPr>
+          <p:cNvPr id="12" name="TextBox 11"/>
           <p:cNvSpPr txBox="1"/>
           <p:nvPr/>
         </p:nvSpPr>
@@ -31508,49 +32330,25 @@
                 </a:solidFill>
                 <a:latin typeface="Arial"/>
               </a:rPr>
-              <a:t>Что уносим с занятия</a:t>
-            </a:r>
-          </a:p>
-        </p:txBody>
-      </p:sp>
-      <p:pic>
-        <p:nvPicPr>
-          <p:cNvPr id="3" name="Picture 2" descr="vyhod-shema-protsess.png"/>
-          <p:cNvPicPr>
-            <a:picLocks noChangeAspect="1"/>
-          </p:cNvPicPr>
-          <p:nvPr/>
-        </p:nvPicPr>
-        <p:blipFill>
-          <a:blip r:embed="rId2"/>
-          <a:stretch>
-            <a:fillRect/>
-          </a:stretch>
-        </p:blipFill>
-        <p:spPr>
-          <a:xfrm>
-            <a:off x="817788" y="943356"/>
-            <a:ext cx="10553375" cy="3297929"/>
-          </a:xfrm>
-          <a:prstGeom prst="rect">
-            <a:avLst/>
-          </a:prstGeom>
-        </p:spPr>
-      </p:pic>
-      <p:sp>
-        <p:nvSpPr>
-          <p:cNvPr id="4" name="Rounded Rectangle 3"/>
+              <a:t>Четыре строки оси: что оказалось</a:t>
+            </a:r>
+          </a:p>
+        </p:txBody>
+      </p:sp>
+      <p:sp>
+        <p:nvSpPr>
+          <p:cNvPr id="3" name="Rounded Rectangle 2"/>
           <p:cNvSpPr/>
           <p:nvPr/>
         </p:nvSpPr>
         <p:spPr>
           <a:xfrm>
-            <a:off x="502920" y="4405877"/>
-            <a:ext cx="11183112" cy="1904619"/>
+            <a:off x="502920" y="1716786"/>
+            <a:ext cx="11183112" cy="2036444"/>
           </a:xfrm>
           <a:prstGeom prst="roundRect">
             <a:avLst>
-              <a:gd name="adj" fmla="val 16003"/>
+              <a:gd name="adj" fmla="val 14967"/>
             </a:avLst>
           </a:prstGeom>
           <a:solidFill>
@@ -31587,14 +32385,56 @@
       </p:sp>
       <p:sp>
         <p:nvSpPr>
+          <p:cNvPr id="4" name="TextBox 3"/>
+          <p:cNvSpPr txBox="1"/>
+          <p:nvPr/>
+        </p:nvSpPr>
+        <p:spPr>
+          <a:xfrm>
+            <a:off x="685800" y="1899666"/>
+            <a:ext cx="4773967" cy="282067"/>
+          </a:xfrm>
+          <a:prstGeom prst="rect">
+            <a:avLst/>
+          </a:prstGeom>
+          <a:noFill/>
+        </p:spPr>
+        <p:txBody>
+          <a:bodyPr wrap="square" lIns="0" rIns="0" tIns="0" bIns="0" anchor="t">
+            <a:spAutoFit/>
+          </a:bodyPr>
+          <a:lstStyle/>
+          <a:p>
+            <a:pPr algn="l">
+              <a:lnSpc>
+                <a:spcPts val="1265"/>
+              </a:lnSpc>
+              <a:spcAft>
+                <a:spcPts val="0"/>
+              </a:spcAft>
+            </a:pPr>
+            <a:r>
+              <a:rPr sz="1150" b="1" i="0">
+                <a:solidFill>
+                  <a:srgbClr val="6B7685"/>
+                </a:solidFill>
+                <a:latin typeface="Arial"/>
+              </a:rPr>
+              <a:t>ВЫГЛЯДИТ РАБОЧИМ</a:t>
+            </a:r>
+          </a:p>
+        </p:txBody>
+      </p:sp>
+      <p:sp>
+        <p:nvSpPr>
           <p:cNvPr id="5" name="TextBox 4"/>
           <p:cNvSpPr txBox="1"/>
           <p:nvPr/>
         </p:nvSpPr>
         <p:spPr>
           <a:xfrm>
-            <a:off x="685800" y="4588757"/>
-            <a:ext cx="3255771" cy="267081"/>
+            <a:off x="5606071" y="1899666"/>
+            <a:ext cx="5750776" cy="282067"/>
           </a:xfrm>
           <a:prstGeom prst="rect">
             <a:avLst/>
@@ -31609,20 +32449,20 @@
           <a:p>
             <a:pPr algn="l">
               <a:lnSpc>
-                <a:spcPts val="1155"/>
+                <a:spcPts val="1265"/>
               </a:lnSpc>
               <a:spcAft>
                 <a:spcPts val="0"/>
               </a:spcAft>
             </a:pPr>
             <a:r>
-              <a:rPr sz="1050" b="1" i="0">
+              <a:rPr sz="1150" b="1" i="0">
                 <a:solidFill>
                   <a:srgbClr val="6B7685"/>
                 </a:solidFill>
                 <a:latin typeface="Arial"/>
               </a:rPr>
-              <a:t>ФАЙЛ</a:t>
+              <a:t>ЧЕМ ОКАЗАЛСЯ</a:t>
             </a:r>
           </a:p>
         </p:txBody>
@@ -31635,36 +32475,36 @@
         </p:nvSpPr>
         <p:spPr>
           <a:xfrm>
-            <a:off x="4087875" y="4588757"/>
-            <a:ext cx="7268971" cy="267081"/>
-          </a:xfrm>
-          <a:prstGeom prst="rect">
-            <a:avLst/>
-          </a:prstGeom>
-          <a:noFill/>
-        </p:spPr>
-        <p:txBody>
-          <a:bodyPr wrap="square" lIns="0" rIns="0" tIns="0" bIns="0" anchor="t">
+            <a:off x="685800" y="2181733"/>
+            <a:ext cx="4773967" cy="347154"/>
+          </a:xfrm>
+          <a:prstGeom prst="rect">
+            <a:avLst/>
+          </a:prstGeom>
+          <a:noFill/>
+        </p:spPr>
+        <p:txBody>
+          <a:bodyPr wrap="square" lIns="0" rIns="0" tIns="0" bIns="0" anchor="ctr">
             <a:spAutoFit/>
           </a:bodyPr>
           <a:lstStyle/>
           <a:p>
             <a:pPr algn="l">
               <a:lnSpc>
-                <a:spcPts val="1155"/>
+                <a:spcPts val="1437"/>
               </a:lnSpc>
               <a:spcAft>
                 <a:spcPts val="0"/>
               </a:spcAft>
             </a:pPr>
             <a:r>
-              <a:rPr sz="1050" b="1" i="0">
-                <a:solidFill>
-                  <a:srgbClr val="6B7685"/>
-                </a:solidFill>
-                <a:latin typeface="Consolas"/>
-              </a:rPr>
-              <a:t>STUDENT.JSON</a:t>
+              <a:rPr sz="1250" b="0" i="0">
+                <a:solidFill>
+                  <a:srgbClr val="141B2E"/>
+                </a:solidFill>
+                <a:latin typeface="Arial"/>
+              </a:rPr>
+              <a:t>три узла, заявка доезжает до таблицы</a:t>
             </a:r>
           </a:p>
         </p:txBody>
@@ -31677,8 +32517,8 @@
         </p:nvSpPr>
         <p:spPr>
           <a:xfrm>
-            <a:off x="685800" y="4855838"/>
-            <a:ext cx="3255771" cy="317944"/>
+            <a:off x="5606071" y="2181733"/>
+            <a:ext cx="5750776" cy="347154"/>
           </a:xfrm>
           <a:prstGeom prst="rect">
             <a:avLst/>
@@ -31693,75 +32533,33 @@
           <a:p>
             <a:pPr algn="l">
               <a:lnSpc>
-                <a:spcPts val="1207"/>
+                <a:spcPts val="1437"/>
               </a:lnSpc>
               <a:spcAft>
                 <a:spcPts val="0"/>
               </a:spcAft>
             </a:pPr>
             <a:r>
-              <a:rPr sz="1050" b="1" i="0">
-                <a:solidFill>
-                  <a:srgbClr val="141B2E"/>
-                </a:solidFill>
-                <a:latin typeface="Arial"/>
-              </a:rPr>
-              <a:t>как поставить</a:t>
-            </a:r>
-          </a:p>
-        </p:txBody>
-      </p:sp>
-      <p:sp>
-        <p:nvSpPr>
-          <p:cNvPr id="8" name="TextBox 7"/>
-          <p:cNvSpPr txBox="1"/>
-          <p:nvPr/>
-        </p:nvSpPr>
-        <p:spPr>
-          <a:xfrm>
-            <a:off x="4087875" y="4855838"/>
-            <a:ext cx="7268971" cy="317944"/>
-          </a:xfrm>
-          <a:prstGeom prst="rect">
-            <a:avLst/>
-          </a:prstGeom>
-          <a:noFill/>
-        </p:spPr>
-        <p:txBody>
-          <a:bodyPr wrap="square" lIns="0" rIns="0" tIns="0" bIns="0" anchor="ctr">
-            <a:spAutoFit/>
-          </a:bodyPr>
-          <a:lstStyle/>
-          <a:p>
-            <a:pPr algn="l">
-              <a:lnSpc>
-                <a:spcPts val="1207"/>
-              </a:lnSpc>
-              <a:spcAft>
-                <a:spcPts val="0"/>
-              </a:spcAft>
-            </a:pPr>
-            <a:r>
-              <a:rPr sz="1050" b="0" i="0">
-                <a:solidFill>
-                  <a:srgbClr val="141B2E"/>
-                </a:solidFill>
-                <a:latin typeface="Arial"/>
-              </a:rPr>
-              <a:t>меню сценария → Import from File → выбрать файл</a:t>
+              <a:rPr sz="1250" b="0" i="0">
+                <a:solidFill>
+                  <a:srgbClr val="141B2E"/>
+                </a:solidFill>
+                <a:latin typeface="Arial"/>
+              </a:rPr>
+              <a:t>тема какая угодно, срочности нет вовсе, ручаться нечем</a:t>
             </a:r>
           </a:p>
         </p:txBody>
       </p:sp>
       <p:cxnSp>
         <p:nvCxnSpPr>
-          <p:cNvPr id="9" name="Connector 8"/>
+          <p:cNvPr id="8" name="Connector 7"/>
           <p:cNvCxnSpPr/>
           <p:nvPr/>
         </p:nvCxnSpPr>
         <p:spPr>
           <a:xfrm>
-            <a:off x="685800" y="5173783"/>
+            <a:off x="685800" y="2528887"/>
             <a:ext cx="10817352" cy="0"/>
           </a:xfrm>
           <a:prstGeom prst="line">
@@ -31790,14 +32588,56 @@
       </p:cxnSp>
       <p:sp>
         <p:nvSpPr>
+          <p:cNvPr id="9" name="TextBox 8"/>
+          <p:cNvSpPr txBox="1"/>
+          <p:nvPr/>
+        </p:nvSpPr>
+        <p:spPr>
+          <a:xfrm>
+            <a:off x="685800" y="2528887"/>
+            <a:ext cx="4773967" cy="347154"/>
+          </a:xfrm>
+          <a:prstGeom prst="rect">
+            <a:avLst/>
+          </a:prstGeom>
+          <a:noFill/>
+        </p:spPr>
+        <p:txBody>
+          <a:bodyPr wrap="square" lIns="0" rIns="0" tIns="0" bIns="0" anchor="ctr">
+            <a:spAutoFit/>
+          </a:bodyPr>
+          <a:lstStyle/>
+          <a:p>
+            <a:pPr algn="l">
+              <a:lnSpc>
+                <a:spcPts val="1437"/>
+              </a:lnSpc>
+              <a:spcAft>
+                <a:spcPts val="0"/>
+              </a:spcAft>
+            </a:pPr>
+            <a:r>
+              <a:rPr sz="1250" b="0" i="0">
+                <a:solidFill>
+                  <a:srgbClr val="141B2E"/>
+                </a:solidFill>
+                <a:latin typeface="Arial"/>
+              </a:rPr>
+              <a:t>клетка заполнена, значение законное</a:t>
+            </a:r>
+          </a:p>
+        </p:txBody>
+      </p:sp>
+      <p:sp>
+        <p:nvSpPr>
           <p:cNvPr id="10" name="TextBox 9"/>
           <p:cNvSpPr txBox="1"/>
           <p:nvPr/>
         </p:nvSpPr>
         <p:spPr>
           <a:xfrm>
-            <a:off x="685800" y="5173783"/>
-            <a:ext cx="3255771" cy="317944"/>
+            <a:off x="5606071" y="2528887"/>
+            <a:ext cx="5750776" cy="347154"/>
           </a:xfrm>
           <a:prstGeom prst="rect">
             <a:avLst/>
@@ -31812,75 +32652,33 @@
           <a:p>
             <a:pPr algn="l">
               <a:lnSpc>
-                <a:spcPts val="1207"/>
+                <a:spcPts val="1437"/>
               </a:lnSpc>
               <a:spcAft>
                 <a:spcPts val="0"/>
               </a:spcAft>
             </a:pPr>
             <a:r>
-              <a:rPr sz="1050" b="1" i="0">
-                <a:solidFill>
-                  <a:srgbClr val="141B2E"/>
-                </a:solidFill>
-                <a:latin typeface="Arial"/>
-              </a:rPr>
-              <a:t>что нужно</a:t>
-            </a:r>
-          </a:p>
-        </p:txBody>
-      </p:sp>
-      <p:sp>
-        <p:nvSpPr>
-          <p:cNvPr id="11" name="TextBox 10"/>
-          <p:cNvSpPr txBox="1"/>
-          <p:nvPr/>
-        </p:nvSpPr>
-        <p:spPr>
-          <a:xfrm>
-            <a:off x="4087875" y="5173783"/>
-            <a:ext cx="7268971" cy="317944"/>
-          </a:xfrm>
-          <a:prstGeom prst="rect">
-            <a:avLst/>
-          </a:prstGeom>
-          <a:noFill/>
-        </p:spPr>
-        <p:txBody>
-          <a:bodyPr wrap="square" lIns="0" rIns="0" tIns="0" bIns="0" anchor="ctr">
-            <a:spAutoFit/>
-          </a:bodyPr>
-          <a:lstStyle/>
-          <a:p>
-            <a:pPr algn="l">
-              <a:lnSpc>
-                <a:spcPts val="1207"/>
-              </a:lnSpc>
-              <a:spcAft>
-                <a:spcPts val="0"/>
-              </a:spcAft>
-            </a:pPr>
-            <a:r>
-              <a:rPr sz="1050" b="0" i="0">
-                <a:solidFill>
-                  <a:srgbClr val="141B2E"/>
-                </a:solidFill>
-                <a:latin typeface="Arial"/>
-              </a:rPr>
-              <a:t>свой n8n и ключ провайдера модели (инструкция)</a:t>
+              <a:rPr sz="1250" b="0" i="0">
+                <a:solidFill>
+                  <a:srgbClr val="141B2E"/>
+                </a:solidFill>
+                <a:latin typeface="Arial"/>
+              </a:rPr>
+              <a:t>вторая тема заявки исчезла молча</a:t>
             </a:r>
           </a:p>
         </p:txBody>
       </p:sp>
       <p:cxnSp>
         <p:nvCxnSpPr>
-          <p:cNvPr id="12" name="Connector 11"/>
+          <p:cNvPr id="11" name="Connector 10"/>
           <p:cNvCxnSpPr/>
           <p:nvPr/>
         </p:nvCxnSpPr>
         <p:spPr>
           <a:xfrm>
-            <a:off x="685800" y="5491727"/>
+            <a:off x="685800" y="2876042"/>
             <a:ext cx="10817352" cy="0"/>
           </a:xfrm>
           <a:prstGeom prst="line">
@@ -31909,14 +32707,56 @@
       </p:cxnSp>
       <p:sp>
         <p:nvSpPr>
+          <p:cNvPr id="12" name="TextBox 11"/>
+          <p:cNvSpPr txBox="1"/>
+          <p:nvPr/>
+        </p:nvSpPr>
+        <p:spPr>
+          <a:xfrm>
+            <a:off x="685800" y="2876042"/>
+            <a:ext cx="4773967" cy="347154"/>
+          </a:xfrm>
+          <a:prstGeom prst="rect">
+            <a:avLst/>
+          </a:prstGeom>
+          <a:noFill/>
+        </p:spPr>
+        <p:txBody>
+          <a:bodyPr wrap="square" lIns="0" rIns="0" tIns="0" bIns="0" anchor="ctr">
+            <a:spAutoFit/>
+          </a:bodyPr>
+          <a:lstStyle/>
+          <a:p>
+            <a:pPr algn="l">
+              <a:lnSpc>
+                <a:spcPts val="1437"/>
+              </a:lnSpc>
+              <a:spcAft>
+                <a:spcPts val="0"/>
+              </a:spcAft>
+            </a:pPr>
+            <a:r>
+              <a:rPr sz="1250" b="0" i="0">
+                <a:solidFill>
+                  <a:srgbClr val="141B2E"/>
+                </a:solidFill>
+                <a:latin typeface="Arial"/>
+              </a:rPr>
+              <a:t>прогон зелёный, в журнале ни одной ошибки</a:t>
+            </a:r>
+          </a:p>
+        </p:txBody>
+      </p:sp>
+      <p:sp>
+        <p:nvSpPr>
           <p:cNvPr id="13" name="TextBox 12"/>
           <p:cNvSpPr txBox="1"/>
           <p:nvPr/>
         </p:nvSpPr>
         <p:spPr>
           <a:xfrm>
-            <a:off x="685800" y="5491727"/>
-            <a:ext cx="3255771" cy="317944"/>
+            <a:off x="5606071" y="2876042"/>
+            <a:ext cx="5750776" cy="347154"/>
           </a:xfrm>
           <a:prstGeom prst="rect">
             <a:avLst/>
@@ -31931,75 +32771,33 @@
           <a:p>
             <a:pPr algn="l">
               <a:lnSpc>
-                <a:spcPts val="1207"/>
+                <a:spcPts val="1437"/>
               </a:lnSpc>
               <a:spcAft>
                 <a:spcPts val="0"/>
               </a:spcAft>
             </a:pPr>
             <a:r>
-              <a:rPr sz="1050" b="1" i="0">
-                <a:solidFill>
-                  <a:srgbClr val="141B2E"/>
-                </a:solidFill>
-                <a:latin typeface="Arial"/>
-              </a:rPr>
-              <a:t>что делать</a:t>
-            </a:r>
-          </a:p>
-        </p:txBody>
-      </p:sp>
-      <p:sp>
-        <p:nvSpPr>
-          <p:cNvPr id="14" name="TextBox 13"/>
-          <p:cNvSpPr txBox="1"/>
-          <p:nvPr/>
-        </p:nvSpPr>
-        <p:spPr>
-          <a:xfrm>
-            <a:off x="4087875" y="5491727"/>
-            <a:ext cx="7268971" cy="317944"/>
-          </a:xfrm>
-          <a:prstGeom prst="rect">
-            <a:avLst/>
-          </a:prstGeom>
-          <a:noFill/>
-        </p:spPr>
-        <p:txBody>
-          <a:bodyPr wrap="square" lIns="0" rIns="0" tIns="0" bIns="0" anchor="ctr">
-            <a:spAutoFit/>
-          </a:bodyPr>
-          <a:lstStyle/>
-          <a:p>
-            <a:pPr algn="l">
-              <a:lnSpc>
-                <a:spcPts val="1207"/>
-              </a:lnSpc>
-              <a:spcAft>
-                <a:spcPts val="0"/>
-              </a:spcAft>
-            </a:pPr>
-            <a:r>
-              <a:rPr sz="1050" b="0" i="0">
-                <a:solidFill>
-                  <a:srgbClr val="141B2E"/>
-                </a:solidFill>
-                <a:latin typeface="Arial"/>
-              </a:rPr>
-              <a:t>прогнать на своих трёх заявках и посмотреть, где развалится</a:t>
+              <a:rPr sz="1250" b="0" i="0">
+                <a:solidFill>
+                  <a:srgbClr val="141B2E"/>
+                </a:solidFill>
+                <a:latin typeface="Arial"/>
+              </a:rPr>
+              <a:t>три отказа подряд, заявки за выходные не разобраны</a:t>
             </a:r>
           </a:p>
         </p:txBody>
       </p:sp>
       <p:cxnSp>
         <p:nvCxnSpPr>
-          <p:cNvPr id="15" name="Connector 14"/>
+          <p:cNvPr id="14" name="Connector 13"/>
           <p:cNvCxnSpPr/>
           <p:nvPr/>
         </p:nvCxnSpPr>
         <p:spPr>
           <a:xfrm>
-            <a:off x="685800" y="5809672"/>
+            <a:off x="685800" y="3223196"/>
             <a:ext cx="10817352" cy="0"/>
           </a:xfrm>
           <a:prstGeom prst="line">
@@ -32028,14 +32826,56 @@
       </p:cxnSp>
       <p:sp>
         <p:nvSpPr>
+          <p:cNvPr id="15" name="TextBox 14"/>
+          <p:cNvSpPr txBox="1"/>
+          <p:nvPr/>
+        </p:nvSpPr>
+        <p:spPr>
+          <a:xfrm>
+            <a:off x="685800" y="3223196"/>
+            <a:ext cx="4773967" cy="347154"/>
+          </a:xfrm>
+          <a:prstGeom prst="rect">
+            <a:avLst/>
+          </a:prstGeom>
+          <a:noFill/>
+        </p:spPr>
+        <p:txBody>
+          <a:bodyPr wrap="square" lIns="0" rIns="0" tIns="0" bIns="0" anchor="ctr">
+            <a:spAutoFit/>
+          </a:bodyPr>
+          <a:lstStyle/>
+          <a:p>
+            <a:pPr algn="l">
+              <a:lnSpc>
+                <a:spcPts val="1437"/>
+              </a:lnSpc>
+              <a:spcAft>
+                <a:spcPts val="0"/>
+              </a:spcAft>
+            </a:pPr>
+            <a:r>
+              <a:rPr sz="1250" b="0" i="0">
+                <a:solidFill>
+                  <a:srgbClr val="141B2E"/>
+                </a:solidFill>
+                <a:latin typeface="Arial"/>
+              </a:rPr>
+              <a:t>значение из справочника, прогон зелёный</a:t>
+            </a:r>
+          </a:p>
+        </p:txBody>
+      </p:sp>
+      <p:sp>
+        <p:nvSpPr>
           <p:cNvPr id="16" name="TextBox 15"/>
           <p:cNvSpPr txBox="1"/>
           <p:nvPr/>
         </p:nvSpPr>
         <p:spPr>
           <a:xfrm>
-            <a:off x="685800" y="5809672"/>
-            <a:ext cx="3255771" cy="317944"/>
+            <a:off x="5606071" y="3223196"/>
+            <a:ext cx="5750776" cy="347154"/>
           </a:xfrm>
           <a:prstGeom prst="rect">
             <a:avLst/>
@@ -32050,34 +32890,80 @@
           <a:p>
             <a:pPr algn="l">
               <a:lnSpc>
-                <a:spcPts val="1207"/>
+                <a:spcPts val="1437"/>
               </a:lnSpc>
               <a:spcAft>
                 <a:spcPts val="0"/>
               </a:spcAft>
             </a:pPr>
             <a:r>
-              <a:rPr sz="1050" b="1" i="0">
-                <a:solidFill>
-                  <a:srgbClr val="141B2E"/>
-                </a:solidFill>
-                <a:latin typeface="Arial"/>
-              </a:rPr>
-              <a:t>что завести своё</a:t>
-            </a:r>
-          </a:p>
-        </p:txBody>
-      </p:sp>
-      <p:sp>
-        <p:nvSpPr>
-          <p:cNvPr id="17" name="TextBox 16"/>
-          <p:cNvSpPr txBox="1"/>
-          <p:nvPr/>
-        </p:nvSpPr>
-        <p:spPr>
-          <a:xfrm>
-            <a:off x="4087875" y="5809672"/>
-            <a:ext cx="7268971" cy="317944"/>
+              <a:rPr sz="1250" b="0" i="0">
+                <a:solidFill>
+                  <a:srgbClr val="141B2E"/>
+                </a:solidFill>
+                <a:latin typeface="Arial"/>
+              </a:rPr>
+              <a:t>тема неверная, и узнать об этом неоткуда</a:t>
+            </a:r>
+          </a:p>
+        </p:txBody>
+      </p:sp>
+      <p:sp>
+        <p:nvSpPr>
+          <p:cNvPr id="17" name="Rounded Rectangle 16"/>
+          <p:cNvSpPr/>
+          <p:nvPr/>
+        </p:nvSpPr>
+        <p:spPr>
+          <a:xfrm>
+            <a:off x="502920" y="4420742"/>
+            <a:ext cx="82296" cy="746760"/>
+          </a:xfrm>
+          <a:prstGeom prst="roundRect">
+            <a:avLst>
+              <a:gd name="adj" fmla="val 50000"/>
+            </a:avLst>
+          </a:prstGeom>
+          <a:solidFill>
+            <a:srgbClr val="F0AB00"/>
+          </a:solidFill>
+          <a:ln>
+            <a:noFill/>
+          </a:ln>
+          <a:effectLst/>
+        </p:spPr>
+        <p:style>
+          <a:lnRef idx="1">
+            <a:schemeClr val="accent1"/>
+          </a:lnRef>
+          <a:fillRef idx="3">
+            <a:schemeClr val="accent1"/>
+          </a:fillRef>
+          <a:effectRef idx="2">
+            <a:schemeClr val="accent1"/>
+          </a:effectRef>
+          <a:fontRef idx="minor">
+            <a:schemeClr val="lt1"/>
+          </a:fontRef>
+        </p:style>
+        <p:txBody>
+          <a:bodyPr rtlCol="0" anchor="ctr"/>
+          <a:lstStyle/>
+          <a:p>
+            <a:pPr algn="ctr"/>
+          </a:p>
+        </p:txBody>
+      </p:sp>
+      <p:sp>
+        <p:nvSpPr>
+          <p:cNvPr id="18" name="TextBox 17"/>
+          <p:cNvSpPr txBox="1"/>
+          <p:nvPr/>
+        </p:nvSpPr>
+        <p:spPr>
+          <a:xfrm>
+            <a:off x="859536" y="4548758"/>
+            <a:ext cx="10643616" cy="490727"/>
           </a:xfrm>
           <a:prstGeom prst="rect">
             <a:avLst/>
@@ -32092,27 +32978,36 @@
           <a:p>
             <a:pPr algn="l">
               <a:lnSpc>
-                <a:spcPts val="1207"/>
-              </a:lnSpc>
-              <a:spcAft>
-                <a:spcPts val="0"/>
-              </a:spcAft>
-            </a:pPr>
-            <a:r>
-              <a:rPr sz="1050" b="0" i="0">
-                <a:solidFill>
-                  <a:srgbClr val="141B2E"/>
-                </a:solidFill>
-                <a:latin typeface="Arial"/>
-              </a:rPr>
-              <a:t>учётные данные модели и свою таблицу: в файле они пустые намеренно</a:t>
-            </a:r>
-          </a:p>
-        </p:txBody>
-      </p:sp>
-      <p:sp>
-        <p:nvSpPr>
-          <p:cNvPr id="18" name="TextBox 17"/>
+                <a:spcPts val="1860"/>
+              </a:lnSpc>
+              <a:spcAft>
+                <a:spcPts val="300"/>
+              </a:spcAft>
+            </a:pPr>
+            <a:r>
+              <a:rPr sz="1500" b="1" i="0">
+                <a:solidFill>
+                  <a:srgbClr val="141B2E"/>
+                </a:solidFill>
+                <a:latin typeface="Arial"/>
+              </a:rPr>
+              <a:t>Процесс работает — или за него можно ручаться?</a:t>
+            </a:r>
+            <a:r>
+              <a:rPr sz="1500" b="1" i="0">
+                <a:solidFill>
+                  <a:srgbClr val="141B2E"/>
+                </a:solidFill>
+                <a:latin typeface="Arial"/>
+              </a:rPr>
+              <a:t> Четыре строки справа и есть четыре способа это проверить, и ни один не требует верить на слово.</a:t>
+            </a:r>
+          </a:p>
+        </p:txBody>
+      </p:sp>
+      <p:sp>
+        <p:nvSpPr>
+          <p:cNvPr id="19" name="TextBox 18"/>
           <p:cNvSpPr txBox="1"/>
           <p:nvPr/>
         </p:nvSpPr>
@@ -32215,6 +33110,713 @@
                 </a:solidFill>
                 <a:latin typeface="Arial"/>
               </a:rPr>
+              <a:t>Что уносим с занятия</a:t>
+            </a:r>
+          </a:p>
+        </p:txBody>
+      </p:sp>
+      <p:pic>
+        <p:nvPicPr>
+          <p:cNvPr id="3" name="Picture 2" descr="vyhod-shema-protsess.png"/>
+          <p:cNvPicPr>
+            <a:picLocks noChangeAspect="1"/>
+          </p:cNvPicPr>
+          <p:nvPr/>
+        </p:nvPicPr>
+        <p:blipFill>
+          <a:blip r:embed="rId2"/>
+          <a:stretch>
+            <a:fillRect/>
+          </a:stretch>
+        </p:blipFill>
+        <p:spPr>
+          <a:xfrm>
+            <a:off x="817788" y="943356"/>
+            <a:ext cx="10553375" cy="3297929"/>
+          </a:xfrm>
+          <a:prstGeom prst="rect">
+            <a:avLst/>
+          </a:prstGeom>
+        </p:spPr>
+      </p:pic>
+      <p:sp>
+        <p:nvSpPr>
+          <p:cNvPr id="4" name="Rounded Rectangle 3"/>
+          <p:cNvSpPr/>
+          <p:nvPr/>
+        </p:nvSpPr>
+        <p:spPr>
+          <a:xfrm>
+            <a:off x="502920" y="4405877"/>
+            <a:ext cx="11183112" cy="1904619"/>
+          </a:xfrm>
+          <a:prstGeom prst="roundRect">
+            <a:avLst>
+              <a:gd name="adj" fmla="val 16003"/>
+            </a:avLst>
+          </a:prstGeom>
+          <a:solidFill>
+            <a:srgbClr val="FFFFFF"/>
+          </a:solidFill>
+          <a:ln w="17780">
+            <a:solidFill>
+              <a:srgbClr val="1C7293"/>
+            </a:solidFill>
+          </a:ln>
+          <a:effectLst/>
+        </p:spPr>
+        <p:style>
+          <a:lnRef idx="1">
+            <a:schemeClr val="accent1"/>
+          </a:lnRef>
+          <a:fillRef idx="3">
+            <a:schemeClr val="accent1"/>
+          </a:fillRef>
+          <a:effectRef idx="2">
+            <a:schemeClr val="accent1"/>
+          </a:effectRef>
+          <a:fontRef idx="minor">
+            <a:schemeClr val="lt1"/>
+          </a:fontRef>
+        </p:style>
+        <p:txBody>
+          <a:bodyPr rtlCol="0" anchor="ctr"/>
+          <a:lstStyle/>
+          <a:p>
+            <a:pPr algn="ctr"/>
+          </a:p>
+        </p:txBody>
+      </p:sp>
+      <p:sp>
+        <p:nvSpPr>
+          <p:cNvPr id="5" name="TextBox 4"/>
+          <p:cNvSpPr txBox="1"/>
+          <p:nvPr/>
+        </p:nvSpPr>
+        <p:spPr>
+          <a:xfrm>
+            <a:off x="685800" y="4588757"/>
+            <a:ext cx="3255771" cy="267081"/>
+          </a:xfrm>
+          <a:prstGeom prst="rect">
+            <a:avLst/>
+          </a:prstGeom>
+          <a:noFill/>
+        </p:spPr>
+        <p:txBody>
+          <a:bodyPr wrap="square" lIns="0" rIns="0" tIns="0" bIns="0" anchor="t">
+            <a:spAutoFit/>
+          </a:bodyPr>
+          <a:lstStyle/>
+          <a:p>
+            <a:pPr algn="l">
+              <a:lnSpc>
+                <a:spcPts val="1155"/>
+              </a:lnSpc>
+              <a:spcAft>
+                <a:spcPts val="0"/>
+              </a:spcAft>
+            </a:pPr>
+            <a:r>
+              <a:rPr sz="1050" b="1" i="0">
+                <a:solidFill>
+                  <a:srgbClr val="6B7685"/>
+                </a:solidFill>
+                <a:latin typeface="Arial"/>
+              </a:rPr>
+              <a:t>ФАЙЛ</a:t>
+            </a:r>
+          </a:p>
+        </p:txBody>
+      </p:sp>
+      <p:sp>
+        <p:nvSpPr>
+          <p:cNvPr id="6" name="TextBox 5"/>
+          <p:cNvSpPr txBox="1"/>
+          <p:nvPr/>
+        </p:nvSpPr>
+        <p:spPr>
+          <a:xfrm>
+            <a:off x="4087875" y="4588757"/>
+            <a:ext cx="7268971" cy="267081"/>
+          </a:xfrm>
+          <a:prstGeom prst="rect">
+            <a:avLst/>
+          </a:prstGeom>
+          <a:noFill/>
+        </p:spPr>
+        <p:txBody>
+          <a:bodyPr wrap="square" lIns="0" rIns="0" tIns="0" bIns="0" anchor="t">
+            <a:spAutoFit/>
+          </a:bodyPr>
+          <a:lstStyle/>
+          <a:p>
+            <a:pPr algn="l">
+              <a:lnSpc>
+                <a:spcPts val="1155"/>
+              </a:lnSpc>
+              <a:spcAft>
+                <a:spcPts val="0"/>
+              </a:spcAft>
+            </a:pPr>
+            <a:r>
+              <a:rPr sz="1050" b="1" i="0">
+                <a:solidFill>
+                  <a:srgbClr val="6B7685"/>
+                </a:solidFill>
+                <a:latin typeface="Consolas"/>
+              </a:rPr>
+              <a:t>STUDENT.JSON</a:t>
+            </a:r>
+          </a:p>
+        </p:txBody>
+      </p:sp>
+      <p:sp>
+        <p:nvSpPr>
+          <p:cNvPr id="7" name="TextBox 6"/>
+          <p:cNvSpPr txBox="1"/>
+          <p:nvPr/>
+        </p:nvSpPr>
+        <p:spPr>
+          <a:xfrm>
+            <a:off x="685800" y="4855838"/>
+            <a:ext cx="3255771" cy="317944"/>
+          </a:xfrm>
+          <a:prstGeom prst="rect">
+            <a:avLst/>
+          </a:prstGeom>
+          <a:noFill/>
+        </p:spPr>
+        <p:txBody>
+          <a:bodyPr wrap="square" lIns="0" rIns="0" tIns="0" bIns="0" anchor="ctr">
+            <a:spAutoFit/>
+          </a:bodyPr>
+          <a:lstStyle/>
+          <a:p>
+            <a:pPr algn="l">
+              <a:lnSpc>
+                <a:spcPts val="1207"/>
+              </a:lnSpc>
+              <a:spcAft>
+                <a:spcPts val="0"/>
+              </a:spcAft>
+            </a:pPr>
+            <a:r>
+              <a:rPr sz="1050" b="1" i="0">
+                <a:solidFill>
+                  <a:srgbClr val="141B2E"/>
+                </a:solidFill>
+                <a:latin typeface="Arial"/>
+              </a:rPr>
+              <a:t>как поставить</a:t>
+            </a:r>
+          </a:p>
+        </p:txBody>
+      </p:sp>
+      <p:sp>
+        <p:nvSpPr>
+          <p:cNvPr id="8" name="TextBox 7"/>
+          <p:cNvSpPr txBox="1"/>
+          <p:nvPr/>
+        </p:nvSpPr>
+        <p:spPr>
+          <a:xfrm>
+            <a:off x="4087875" y="4855838"/>
+            <a:ext cx="7268971" cy="317944"/>
+          </a:xfrm>
+          <a:prstGeom prst="rect">
+            <a:avLst/>
+          </a:prstGeom>
+          <a:noFill/>
+        </p:spPr>
+        <p:txBody>
+          <a:bodyPr wrap="square" lIns="0" rIns="0" tIns="0" bIns="0" anchor="ctr">
+            <a:spAutoFit/>
+          </a:bodyPr>
+          <a:lstStyle/>
+          <a:p>
+            <a:pPr algn="l">
+              <a:lnSpc>
+                <a:spcPts val="1207"/>
+              </a:lnSpc>
+              <a:spcAft>
+                <a:spcPts val="0"/>
+              </a:spcAft>
+            </a:pPr>
+            <a:r>
+              <a:rPr sz="1050" b="0" i="0">
+                <a:solidFill>
+                  <a:srgbClr val="141B2E"/>
+                </a:solidFill>
+                <a:latin typeface="Arial"/>
+              </a:rPr>
+              <a:t>меню сценария → Import from File → выбрать файл</a:t>
+            </a:r>
+          </a:p>
+        </p:txBody>
+      </p:sp>
+      <p:cxnSp>
+        <p:nvCxnSpPr>
+          <p:cNvPr id="9" name="Connector 8"/>
+          <p:cNvCxnSpPr/>
+          <p:nvPr/>
+        </p:nvCxnSpPr>
+        <p:spPr>
+          <a:xfrm>
+            <a:off x="685800" y="5173783"/>
+            <a:ext cx="10817352" cy="0"/>
+          </a:xfrm>
+          <a:prstGeom prst="line">
+            <a:avLst/>
+          </a:prstGeom>
+          <a:ln w="9525">
+            <a:solidFill>
+              <a:srgbClr val="E5EAF0"/>
+            </a:solidFill>
+          </a:ln>
+        </p:spPr>
+        <p:style>
+          <a:lnRef idx="2">
+            <a:schemeClr val="accent1"/>
+          </a:lnRef>
+          <a:fillRef idx="0">
+            <a:schemeClr val="accent1"/>
+          </a:fillRef>
+          <a:effectRef idx="1">
+            <a:schemeClr val="accent1"/>
+          </a:effectRef>
+          <a:fontRef idx="minor">
+            <a:schemeClr val="tx1"/>
+          </a:fontRef>
+        </p:style>
+      </p:cxnSp>
+      <p:sp>
+        <p:nvSpPr>
+          <p:cNvPr id="10" name="TextBox 9"/>
+          <p:cNvSpPr txBox="1"/>
+          <p:nvPr/>
+        </p:nvSpPr>
+        <p:spPr>
+          <a:xfrm>
+            <a:off x="685800" y="5173783"/>
+            <a:ext cx="3255771" cy="317944"/>
+          </a:xfrm>
+          <a:prstGeom prst="rect">
+            <a:avLst/>
+          </a:prstGeom>
+          <a:noFill/>
+        </p:spPr>
+        <p:txBody>
+          <a:bodyPr wrap="square" lIns="0" rIns="0" tIns="0" bIns="0" anchor="ctr">
+            <a:spAutoFit/>
+          </a:bodyPr>
+          <a:lstStyle/>
+          <a:p>
+            <a:pPr algn="l">
+              <a:lnSpc>
+                <a:spcPts val="1207"/>
+              </a:lnSpc>
+              <a:spcAft>
+                <a:spcPts val="0"/>
+              </a:spcAft>
+            </a:pPr>
+            <a:r>
+              <a:rPr sz="1050" b="1" i="0">
+                <a:solidFill>
+                  <a:srgbClr val="141B2E"/>
+                </a:solidFill>
+                <a:latin typeface="Arial"/>
+              </a:rPr>
+              <a:t>что нужно</a:t>
+            </a:r>
+          </a:p>
+        </p:txBody>
+      </p:sp>
+      <p:sp>
+        <p:nvSpPr>
+          <p:cNvPr id="11" name="TextBox 10"/>
+          <p:cNvSpPr txBox="1"/>
+          <p:nvPr/>
+        </p:nvSpPr>
+        <p:spPr>
+          <a:xfrm>
+            <a:off x="4087875" y="5173783"/>
+            <a:ext cx="7268971" cy="317944"/>
+          </a:xfrm>
+          <a:prstGeom prst="rect">
+            <a:avLst/>
+          </a:prstGeom>
+          <a:noFill/>
+        </p:spPr>
+        <p:txBody>
+          <a:bodyPr wrap="square" lIns="0" rIns="0" tIns="0" bIns="0" anchor="ctr">
+            <a:spAutoFit/>
+          </a:bodyPr>
+          <a:lstStyle/>
+          <a:p>
+            <a:pPr algn="l">
+              <a:lnSpc>
+                <a:spcPts val="1207"/>
+              </a:lnSpc>
+              <a:spcAft>
+                <a:spcPts val="0"/>
+              </a:spcAft>
+            </a:pPr>
+            <a:r>
+              <a:rPr sz="1050" b="0" i="0">
+                <a:solidFill>
+                  <a:srgbClr val="141B2E"/>
+                </a:solidFill>
+                <a:latin typeface="Arial"/>
+              </a:rPr>
+              <a:t>свой n8n и ключ провайдера модели (инструкция)</a:t>
+            </a:r>
+          </a:p>
+        </p:txBody>
+      </p:sp>
+      <p:cxnSp>
+        <p:nvCxnSpPr>
+          <p:cNvPr id="12" name="Connector 11"/>
+          <p:cNvCxnSpPr/>
+          <p:nvPr/>
+        </p:nvCxnSpPr>
+        <p:spPr>
+          <a:xfrm>
+            <a:off x="685800" y="5491727"/>
+            <a:ext cx="10817352" cy="0"/>
+          </a:xfrm>
+          <a:prstGeom prst="line">
+            <a:avLst/>
+          </a:prstGeom>
+          <a:ln w="9525">
+            <a:solidFill>
+              <a:srgbClr val="E5EAF0"/>
+            </a:solidFill>
+          </a:ln>
+        </p:spPr>
+        <p:style>
+          <a:lnRef idx="2">
+            <a:schemeClr val="accent1"/>
+          </a:lnRef>
+          <a:fillRef idx="0">
+            <a:schemeClr val="accent1"/>
+          </a:fillRef>
+          <a:effectRef idx="1">
+            <a:schemeClr val="accent1"/>
+          </a:effectRef>
+          <a:fontRef idx="minor">
+            <a:schemeClr val="tx1"/>
+          </a:fontRef>
+        </p:style>
+      </p:cxnSp>
+      <p:sp>
+        <p:nvSpPr>
+          <p:cNvPr id="13" name="TextBox 12"/>
+          <p:cNvSpPr txBox="1"/>
+          <p:nvPr/>
+        </p:nvSpPr>
+        <p:spPr>
+          <a:xfrm>
+            <a:off x="685800" y="5491727"/>
+            <a:ext cx="3255771" cy="317944"/>
+          </a:xfrm>
+          <a:prstGeom prst="rect">
+            <a:avLst/>
+          </a:prstGeom>
+          <a:noFill/>
+        </p:spPr>
+        <p:txBody>
+          <a:bodyPr wrap="square" lIns="0" rIns="0" tIns="0" bIns="0" anchor="ctr">
+            <a:spAutoFit/>
+          </a:bodyPr>
+          <a:lstStyle/>
+          <a:p>
+            <a:pPr algn="l">
+              <a:lnSpc>
+                <a:spcPts val="1207"/>
+              </a:lnSpc>
+              <a:spcAft>
+                <a:spcPts val="0"/>
+              </a:spcAft>
+            </a:pPr>
+            <a:r>
+              <a:rPr sz="1050" b="1" i="0">
+                <a:solidFill>
+                  <a:srgbClr val="141B2E"/>
+                </a:solidFill>
+                <a:latin typeface="Arial"/>
+              </a:rPr>
+              <a:t>что делать</a:t>
+            </a:r>
+          </a:p>
+        </p:txBody>
+      </p:sp>
+      <p:sp>
+        <p:nvSpPr>
+          <p:cNvPr id="14" name="TextBox 13"/>
+          <p:cNvSpPr txBox="1"/>
+          <p:nvPr/>
+        </p:nvSpPr>
+        <p:spPr>
+          <a:xfrm>
+            <a:off x="4087875" y="5491727"/>
+            <a:ext cx="7268971" cy="317944"/>
+          </a:xfrm>
+          <a:prstGeom prst="rect">
+            <a:avLst/>
+          </a:prstGeom>
+          <a:noFill/>
+        </p:spPr>
+        <p:txBody>
+          <a:bodyPr wrap="square" lIns="0" rIns="0" tIns="0" bIns="0" anchor="ctr">
+            <a:spAutoFit/>
+          </a:bodyPr>
+          <a:lstStyle/>
+          <a:p>
+            <a:pPr algn="l">
+              <a:lnSpc>
+                <a:spcPts val="1207"/>
+              </a:lnSpc>
+              <a:spcAft>
+                <a:spcPts val="0"/>
+              </a:spcAft>
+            </a:pPr>
+            <a:r>
+              <a:rPr sz="1050" b="0" i="0">
+                <a:solidFill>
+                  <a:srgbClr val="141B2E"/>
+                </a:solidFill>
+                <a:latin typeface="Arial"/>
+              </a:rPr>
+              <a:t>прогнать на своих трёх заявках и посмотреть, где развалится</a:t>
+            </a:r>
+          </a:p>
+        </p:txBody>
+      </p:sp>
+      <p:cxnSp>
+        <p:nvCxnSpPr>
+          <p:cNvPr id="15" name="Connector 14"/>
+          <p:cNvCxnSpPr/>
+          <p:nvPr/>
+        </p:nvCxnSpPr>
+        <p:spPr>
+          <a:xfrm>
+            <a:off x="685800" y="5809672"/>
+            <a:ext cx="10817352" cy="0"/>
+          </a:xfrm>
+          <a:prstGeom prst="line">
+            <a:avLst/>
+          </a:prstGeom>
+          <a:ln w="9525">
+            <a:solidFill>
+              <a:srgbClr val="E5EAF0"/>
+            </a:solidFill>
+          </a:ln>
+        </p:spPr>
+        <p:style>
+          <a:lnRef idx="2">
+            <a:schemeClr val="accent1"/>
+          </a:lnRef>
+          <a:fillRef idx="0">
+            <a:schemeClr val="accent1"/>
+          </a:fillRef>
+          <a:effectRef idx="1">
+            <a:schemeClr val="accent1"/>
+          </a:effectRef>
+          <a:fontRef idx="minor">
+            <a:schemeClr val="tx1"/>
+          </a:fontRef>
+        </p:style>
+      </p:cxnSp>
+      <p:sp>
+        <p:nvSpPr>
+          <p:cNvPr id="16" name="TextBox 15"/>
+          <p:cNvSpPr txBox="1"/>
+          <p:nvPr/>
+        </p:nvSpPr>
+        <p:spPr>
+          <a:xfrm>
+            <a:off x="685800" y="5809672"/>
+            <a:ext cx="3255771" cy="317944"/>
+          </a:xfrm>
+          <a:prstGeom prst="rect">
+            <a:avLst/>
+          </a:prstGeom>
+          <a:noFill/>
+        </p:spPr>
+        <p:txBody>
+          <a:bodyPr wrap="square" lIns="0" rIns="0" tIns="0" bIns="0" anchor="ctr">
+            <a:spAutoFit/>
+          </a:bodyPr>
+          <a:lstStyle/>
+          <a:p>
+            <a:pPr algn="l">
+              <a:lnSpc>
+                <a:spcPts val="1207"/>
+              </a:lnSpc>
+              <a:spcAft>
+                <a:spcPts val="0"/>
+              </a:spcAft>
+            </a:pPr>
+            <a:r>
+              <a:rPr sz="1050" b="1" i="0">
+                <a:solidFill>
+                  <a:srgbClr val="141B2E"/>
+                </a:solidFill>
+                <a:latin typeface="Arial"/>
+              </a:rPr>
+              <a:t>что завести своё</a:t>
+            </a:r>
+          </a:p>
+        </p:txBody>
+      </p:sp>
+      <p:sp>
+        <p:nvSpPr>
+          <p:cNvPr id="17" name="TextBox 16"/>
+          <p:cNvSpPr txBox="1"/>
+          <p:nvPr/>
+        </p:nvSpPr>
+        <p:spPr>
+          <a:xfrm>
+            <a:off x="4087875" y="5809672"/>
+            <a:ext cx="7268971" cy="317944"/>
+          </a:xfrm>
+          <a:prstGeom prst="rect">
+            <a:avLst/>
+          </a:prstGeom>
+          <a:noFill/>
+        </p:spPr>
+        <p:txBody>
+          <a:bodyPr wrap="square" lIns="0" rIns="0" tIns="0" bIns="0" anchor="ctr">
+            <a:spAutoFit/>
+          </a:bodyPr>
+          <a:lstStyle/>
+          <a:p>
+            <a:pPr algn="l">
+              <a:lnSpc>
+                <a:spcPts val="1207"/>
+              </a:lnSpc>
+              <a:spcAft>
+                <a:spcPts val="0"/>
+              </a:spcAft>
+            </a:pPr>
+            <a:r>
+              <a:rPr sz="1050" b="0" i="0">
+                <a:solidFill>
+                  <a:srgbClr val="141B2E"/>
+                </a:solidFill>
+                <a:latin typeface="Arial"/>
+              </a:rPr>
+              <a:t>учётные данные модели и свою таблицу: в файле они пустые намеренно</a:t>
+            </a:r>
+          </a:p>
+        </p:txBody>
+      </p:sp>
+      <p:sp>
+        <p:nvSpPr>
+          <p:cNvPr id="18" name="TextBox 17"/>
+          <p:cNvSpPr txBox="1"/>
+          <p:nvPr/>
+        </p:nvSpPr>
+        <p:spPr>
+          <a:xfrm>
+            <a:off x="10957255" y="6437376"/>
+            <a:ext cx="914400" cy="274320"/>
+          </a:xfrm>
+          <a:prstGeom prst="rect">
+            <a:avLst/>
+          </a:prstGeom>
+          <a:noFill/>
+        </p:spPr>
+        <p:txBody>
+          <a:bodyPr wrap="square" lIns="0" rIns="0" tIns="0" bIns="0" anchor="t">
+            <a:spAutoFit/>
+          </a:bodyPr>
+          <a:lstStyle/>
+          <a:p>
+            <a:pPr algn="r">
+              <a:lnSpc>
+                <a:spcPts val="1238"/>
+              </a:lnSpc>
+              <a:spcAft>
+                <a:spcPts val="0"/>
+              </a:spcAft>
+            </a:pPr>
+            <a:r>
+              <a:rPr sz="1050" b="0" i="0">
+                <a:solidFill>
+                  <a:srgbClr val="6B7685"/>
+                </a:solidFill>
+                <a:latin typeface="Arial"/>
+              </a:rPr>
+              <a:t>42</a:t>
+            </a:r>
+          </a:p>
+        </p:txBody>
+      </p:sp>
+    </p:spTree>
+  </p:cSld>
+  <p:clrMapOvr>
+    <a:masterClrMapping/>
+  </p:clrMapOvr>
+</p:sld>
+</file>
+
+<file path=ppt/slides/slide43.xml><?xml version="1.0" encoding="utf-8"?>
+<p:sld xmlns:a="http://schemas.openxmlformats.org/drawingml/2006/main" xmlns:p="http://schemas.openxmlformats.org/presentationml/2006/main" xmlns:r="http://schemas.openxmlformats.org/officeDocument/2006/relationships">
+  <p:cSld>
+    <p:bg>
+      <p:bgPr>
+        <a:solidFill>
+          <a:srgbClr val="FFFFFF"/>
+        </a:solidFill>
+        <a:effectLst/>
+      </p:bgPr>
+    </p:bg>
+    <p:spTree>
+      <p:nvGrpSpPr>
+        <p:cNvPr id="1" name=""/>
+        <p:cNvGrpSpPr/>
+        <p:nvPr/>
+      </p:nvGrpSpPr>
+      <p:grpSpPr/>
+      <p:sp>
+        <p:nvSpPr>
+          <p:cNvPr id="2" name="TextBox 1"/>
+          <p:cNvSpPr txBox="1"/>
+          <p:nvPr/>
+        </p:nvSpPr>
+        <p:spPr>
+          <a:xfrm>
+            <a:off x="502920" y="310896"/>
+            <a:ext cx="11183112" cy="431291"/>
+          </a:xfrm>
+          <a:prstGeom prst="rect">
+            <a:avLst/>
+          </a:prstGeom>
+          <a:noFill/>
+        </p:spPr>
+        <p:txBody>
+          <a:bodyPr wrap="square" lIns="0" rIns="0" tIns="0" bIns="0" anchor="t">
+            <a:spAutoFit/>
+          </a:bodyPr>
+          <a:lstStyle/>
+          <a:p>
+            <a:pPr algn="l">
+              <a:lnSpc>
+                <a:spcPts val="2963"/>
+              </a:lnSpc>
+              <a:spcAft>
+                <a:spcPts val="0"/>
+              </a:spcAft>
+            </a:pPr>
+            <a:r>
+              <a:rPr sz="2600" b="1" i="0">
+                <a:solidFill>
+                  <a:srgbClr val="141B2E"/>
+                </a:solidFill>
+                <a:latin typeface="Arial"/>
+              </a:rPr>
               <a:t>Что дальше</a:t>
             </a:r>
           </a:p>
@@ -32533,7 +34135,7 @@
                 </a:solidFill>
                 <a:latin typeface="Arial"/>
               </a:rPr>
-              <a:t>42</a:t>
+              <a:t>43</a:t>
             </a:r>
           </a:p>
         </p:txBody>
@@ -34201,7 +35803,7 @@
         <p:spPr>
           <a:xfrm>
             <a:off x="685800" y="1611655"/>
-            <a:ext cx="2128019" cy="454405"/>
+            <a:ext cx="2158192" cy="454405"/>
           </a:xfrm>
           <a:prstGeom prst="rect">
             <a:avLst/>
@@ -34242,8 +35844,8 @@
         </p:nvSpPr>
         <p:spPr>
           <a:xfrm>
-            <a:off x="2960123" y="1611655"/>
-            <a:ext cx="3531939" cy="454405"/>
+            <a:off x="2990296" y="1611655"/>
+            <a:ext cx="3430315" cy="454405"/>
           </a:xfrm>
           <a:prstGeom prst="rect">
             <a:avLst/>
@@ -34284,8 +35886,8 @@
         </p:nvSpPr>
         <p:spPr>
           <a:xfrm>
-            <a:off x="6638366" y="1611655"/>
-            <a:ext cx="3596545" cy="454405"/>
+            <a:off x="6566916" y="1611655"/>
+            <a:ext cx="3667996" cy="454405"/>
           </a:xfrm>
           <a:prstGeom prst="rect">
             <a:avLst/>
@@ -34369,7 +35971,7 @@
         <p:spPr>
           <a:xfrm>
             <a:off x="685800" y="2066061"/>
-            <a:ext cx="2128019" cy="529717"/>
+            <a:ext cx="2158192" cy="529717"/>
           </a:xfrm>
           <a:prstGeom prst="rect">
             <a:avLst/>
@@ -34410,8 +36012,8 @@
         </p:nvSpPr>
         <p:spPr>
           <a:xfrm>
-            <a:off x="2960123" y="2066061"/>
-            <a:ext cx="3531939" cy="529717"/>
+            <a:off x="2990296" y="2066061"/>
+            <a:ext cx="3430315" cy="529717"/>
           </a:xfrm>
           <a:prstGeom prst="rect">
             <a:avLst/>
@@ -34452,8 +36054,8 @@
         </p:nvSpPr>
         <p:spPr>
           <a:xfrm>
-            <a:off x="6638366" y="2066061"/>
-            <a:ext cx="3596545" cy="529717"/>
+            <a:off x="6566916" y="2066061"/>
+            <a:ext cx="3667996" cy="529717"/>
           </a:xfrm>
           <a:prstGeom prst="rect">
             <a:avLst/>
@@ -34579,7 +36181,7 @@
         <p:spPr>
           <a:xfrm>
             <a:off x="685800" y="2595778"/>
-            <a:ext cx="2128019" cy="529717"/>
+            <a:ext cx="2158192" cy="529717"/>
           </a:xfrm>
           <a:prstGeom prst="rect">
             <a:avLst/>
@@ -34620,8 +36222,8 @@
         </p:nvSpPr>
         <p:spPr>
           <a:xfrm>
-            <a:off x="2960123" y="2595778"/>
-            <a:ext cx="3531939" cy="529717"/>
+            <a:off x="2990296" y="2595778"/>
+            <a:ext cx="3430315" cy="529717"/>
           </a:xfrm>
           <a:prstGeom prst="rect">
             <a:avLst/>
@@ -34662,8 +36264,8 @@
         </p:nvSpPr>
         <p:spPr>
           <a:xfrm>
-            <a:off x="6638366" y="2595778"/>
-            <a:ext cx="3596545" cy="529717"/>
+            <a:off x="6566916" y="2595778"/>
+            <a:ext cx="3667996" cy="529717"/>
           </a:xfrm>
           <a:prstGeom prst="rect">
             <a:avLst/>
@@ -34789,7 +36391,7 @@
         <p:spPr>
           <a:xfrm>
             <a:off x="685800" y="3125495"/>
-            <a:ext cx="2128019" cy="347154"/>
+            <a:ext cx="2158192" cy="347154"/>
           </a:xfrm>
           <a:prstGeom prst="rect">
             <a:avLst/>
@@ -34830,8 +36432,8 @@
         </p:nvSpPr>
         <p:spPr>
           <a:xfrm>
-            <a:off x="2960123" y="3125495"/>
-            <a:ext cx="3531939" cy="347154"/>
+            <a:off x="2990296" y="3125495"/>
+            <a:ext cx="3430315" cy="347154"/>
           </a:xfrm>
           <a:prstGeom prst="rect">
             <a:avLst/>
@@ -34872,8 +36474,8 @@
         </p:nvSpPr>
         <p:spPr>
           <a:xfrm>
-            <a:off x="6638366" y="3125495"/>
-            <a:ext cx="3596545" cy="347154"/>
+            <a:off x="6566916" y="3125495"/>
+            <a:ext cx="3667996" cy="347154"/>
           </a:xfrm>
           <a:prstGeom prst="rect">
             <a:avLst/>
@@ -34999,7 +36601,7 @@
         <p:spPr>
           <a:xfrm>
             <a:off x="685800" y="3472649"/>
-            <a:ext cx="2128019" cy="529717"/>
+            <a:ext cx="2158192" cy="529717"/>
           </a:xfrm>
           <a:prstGeom prst="rect">
             <a:avLst/>
@@ -35027,7 +36629,7 @@
                 </a:solidFill>
                 <a:latin typeface="Arial"/>
               </a:rPr>
-              <a:t>4. Публикация версии</a:t>
+              <a:t>4. Тема определена неверно</a:t>
             </a:r>
           </a:p>
         </p:txBody>
@@ -35040,8 +36642,8 @@
         </p:nvSpPr>
         <p:spPr>
           <a:xfrm>
-            <a:off x="2960123" y="3472649"/>
-            <a:ext cx="3531939" cy="529717"/>
+            <a:off x="2990296" y="3472649"/>
+            <a:ext cx="3430315" cy="529717"/>
           </a:xfrm>
           <a:prstGeom prst="rect">
             <a:avLst/>
@@ -35069,7 +36671,7 @@
                 </a:solidFill>
                 <a:latin typeface="Arial"/>
               </a:rPr>
-              <a:t>черновик, опубликованная версия, передача</a:t>
+              <a:t>усиленный запрос и отметка ошибки человеком</a:t>
             </a:r>
           </a:p>
         </p:txBody>
@@ -35082,8 +36684,8 @@
         </p:nvSpPr>
         <p:spPr>
           <a:xfrm>
-            <a:off x="6638366" y="3472649"/>
-            <a:ext cx="3596545" cy="529717"/>
+            <a:off x="6566916" y="3472649"/>
+            <a:ext cx="3667996" cy="529717"/>
           </a:xfrm>
           <a:prstGeom prst="rect">
             <a:avLst/>
@@ -35111,7 +36713,7 @@
                 </a:solidFill>
                 <a:latin typeface="Arial"/>
               </a:rPr>
-              <a:t>правка на холсте есть, никто её не откатывал</a:t>
+              <a:t>значение из справочника, прогон зелёный</a:t>
             </a:r>
           </a:p>
         </p:txBody>
